--- a/content/docs/theory-analysis/container-nvidia-gpu/images/images.pptx
+++ b/content/docs/theory-analysis/container-nvidia-gpu/images/images.pptx
@@ -5,21 +5,22 @@
     <p:sldMasterId id="2147483648" r:id="rId1"/>
   </p:sldMasterIdLst>
   <p:notesMasterIdLst>
-    <p:notesMasterId r:id="rId14"/>
+    <p:notesMasterId r:id="rId15"/>
   </p:notesMasterIdLst>
   <p:sldIdLst>
-    <p:sldId id="434" r:id="rId2"/>
+    <p:sldId id="436" r:id="rId2"/>
     <p:sldId id="435" r:id="rId3"/>
-    <p:sldId id="436" r:id="rId4"/>
+    <p:sldId id="434" r:id="rId4"/>
     <p:sldId id="426" r:id="rId5"/>
-    <p:sldId id="428" r:id="rId6"/>
-    <p:sldId id="427" r:id="rId7"/>
-    <p:sldId id="422" r:id="rId8"/>
-    <p:sldId id="433" r:id="rId9"/>
-    <p:sldId id="432" r:id="rId10"/>
-    <p:sldId id="429" r:id="rId11"/>
-    <p:sldId id="430" r:id="rId12"/>
-    <p:sldId id="431" r:id="rId13"/>
+    <p:sldId id="437" r:id="rId6"/>
+    <p:sldId id="428" r:id="rId7"/>
+    <p:sldId id="427" r:id="rId8"/>
+    <p:sldId id="422" r:id="rId9"/>
+    <p:sldId id="433" r:id="rId10"/>
+    <p:sldId id="432" r:id="rId11"/>
+    <p:sldId id="429" r:id="rId12"/>
+    <p:sldId id="430" r:id="rId13"/>
+    <p:sldId id="431" r:id="rId14"/>
   </p:sldIdLst>
   <p:sldSz cx="9144000" cy="5143500" type="screen16x9"/>
   <p:notesSz cx="6858000" cy="9144000"/>
@@ -499,7 +500,7 @@
         <p:cNvPr id="1" name="">
           <a:extLst>
             <a:ext uri="{FF2B5EF4-FFF2-40B4-BE49-F238E27FC236}">
-              <a16:creationId xmlns:a16="http://schemas.microsoft.com/office/drawing/2014/main" id="{1DFA0934-F7EE-9604-5F97-9303B9190681}"/>
+              <a16:creationId xmlns:a16="http://schemas.microsoft.com/office/drawing/2014/main" id="{6EF2A508-FF2A-1DF1-3DD3-78CD3A998595}"/>
             </a:ext>
           </a:extLst>
         </p:cNvPr>
@@ -519,7 +520,7 @@
           <p:cNvPr id="2" name="슬라이드 이미지 개체 틀 1">
             <a:extLst>
               <a:ext uri="{FF2B5EF4-FFF2-40B4-BE49-F238E27FC236}">
-                <a16:creationId xmlns:a16="http://schemas.microsoft.com/office/drawing/2014/main" id="{FE7579C9-5BE1-8221-4693-BCE6637AD201}"/>
+                <a16:creationId xmlns:a16="http://schemas.microsoft.com/office/drawing/2014/main" id="{9947AFE7-477E-C4FB-922E-A5DB497B17F7}"/>
               </a:ext>
             </a:extLst>
           </p:cNvPr>
@@ -537,7 +538,7 @@
           <p:cNvPr id="3" name="슬라이드 노트 개체 틀 2">
             <a:extLst>
               <a:ext uri="{FF2B5EF4-FFF2-40B4-BE49-F238E27FC236}">
-                <a16:creationId xmlns:a16="http://schemas.microsoft.com/office/drawing/2014/main" id="{6F3B7F8E-81F1-5209-BDDF-7F146D069A0B}"/>
+                <a16:creationId xmlns:a16="http://schemas.microsoft.com/office/drawing/2014/main" id="{456F2381-BDD9-A6C4-B2FC-712A1F1B6CCE}"/>
               </a:ext>
             </a:extLst>
           </p:cNvPr>
@@ -562,7 +563,7 @@
           <p:cNvPr id="4" name="슬라이드 번호 개체 틀 3">
             <a:extLst>
               <a:ext uri="{FF2B5EF4-FFF2-40B4-BE49-F238E27FC236}">
-                <a16:creationId xmlns:a16="http://schemas.microsoft.com/office/drawing/2014/main" id="{AF124785-C804-4CE2-7D22-3D227F9C1FCD}"/>
+                <a16:creationId xmlns:a16="http://schemas.microsoft.com/office/drawing/2014/main" id="{759EAA6B-72CD-38D7-FF10-CEB4B320E9F9}"/>
               </a:ext>
             </a:extLst>
           </p:cNvPr>
@@ -589,7 +590,7 @@
     </p:spTree>
     <p:extLst>
       <p:ext uri="{BB962C8B-B14F-4D97-AF65-F5344CB8AC3E}">
-        <p14:creationId xmlns:p14="http://schemas.microsoft.com/office/powerpoint/2010/main" val="3889942508"/>
+        <p14:creationId xmlns:p14="http://schemas.microsoft.com/office/powerpoint/2010/main" val="2709561344"/>
       </p:ext>
     </p:extLst>
   </p:cSld>
@@ -673,7 +674,7 @@
     </p:spTree>
     <p:extLst>
       <p:ext uri="{BB962C8B-B14F-4D97-AF65-F5344CB8AC3E}">
-        <p14:creationId xmlns:p14="http://schemas.microsoft.com/office/powerpoint/2010/main" val="1174720120"/>
+        <p14:creationId xmlns:p14="http://schemas.microsoft.com/office/powerpoint/2010/main" val="1617950839"/>
       </p:ext>
     </p:extLst>
   </p:cSld>
@@ -749,6 +750,90 @@
             <a:fld id="{BA5DFA43-8D57-47FB-BC46-057616015C3B}" type="slidenum">
               <a:rPr lang="ko-KR" altLang="en-US" smtClean="0"/>
               <a:t>12</a:t>
+            </a:fld>
+            <a:endParaRPr lang="ko-KR" altLang="en-US"/>
+          </a:p>
+        </p:txBody>
+      </p:sp>
+    </p:spTree>
+    <p:extLst>
+      <p:ext uri="{BB962C8B-B14F-4D97-AF65-F5344CB8AC3E}">
+        <p14:creationId xmlns:p14="http://schemas.microsoft.com/office/powerpoint/2010/main" val="1174720120"/>
+      </p:ext>
+    </p:extLst>
+  </p:cSld>
+  <p:clrMapOvr>
+    <a:masterClrMapping/>
+  </p:clrMapOvr>
+</p:notes>
+</file>
+
+<file path=ppt/notesSlides/notesSlide12.xml><?xml version="1.0" encoding="utf-8"?>
+<p:notes xmlns:a="http://schemas.openxmlformats.org/drawingml/2006/main" xmlns:r="http://schemas.openxmlformats.org/officeDocument/2006/relationships" xmlns:p="http://schemas.openxmlformats.org/presentationml/2006/main">
+  <p:cSld>
+    <p:spTree>
+      <p:nvGrpSpPr>
+        <p:cNvPr id="1" name=""/>
+        <p:cNvGrpSpPr/>
+        <p:nvPr/>
+      </p:nvGrpSpPr>
+      <p:grpSpPr>
+        <a:xfrm>
+          <a:off x="0" y="0"/>
+          <a:ext cx="0" cy="0"/>
+          <a:chOff x="0" y="0"/>
+          <a:chExt cx="0" cy="0"/>
+        </a:xfrm>
+      </p:grpSpPr>
+      <p:sp>
+        <p:nvSpPr>
+          <p:cNvPr id="2" name="슬라이드 이미지 개체 틀 1"/>
+          <p:cNvSpPr>
+            <a:spLocks noGrp="1" noRot="1" noChangeAspect="1"/>
+          </p:cNvSpPr>
+          <p:nvPr>
+            <p:ph type="sldImg"/>
+          </p:nvPr>
+        </p:nvSpPr>
+        <p:spPr/>
+      </p:sp>
+      <p:sp>
+        <p:nvSpPr>
+          <p:cNvPr id="3" name="슬라이드 노트 개체 틀 2"/>
+          <p:cNvSpPr>
+            <a:spLocks noGrp="1"/>
+          </p:cNvSpPr>
+          <p:nvPr>
+            <p:ph type="body" idx="1"/>
+          </p:nvPr>
+        </p:nvSpPr>
+        <p:spPr/>
+        <p:txBody>
+          <a:bodyPr/>
+          <a:lstStyle/>
+          <a:p>
+            <a:endParaRPr lang="ko-KR" altLang="en-US"/>
+          </a:p>
+        </p:txBody>
+      </p:sp>
+      <p:sp>
+        <p:nvSpPr>
+          <p:cNvPr id="4" name="슬라이드 번호 개체 틀 3"/>
+          <p:cNvSpPr>
+            <a:spLocks noGrp="1"/>
+          </p:cNvSpPr>
+          <p:nvPr>
+            <p:ph type="sldNum" sz="quarter" idx="10"/>
+          </p:nvPr>
+        </p:nvSpPr>
+        <p:spPr/>
+        <p:txBody>
+          <a:bodyPr/>
+          <a:lstStyle/>
+          <a:p>
+            <a:fld id="{BA5DFA43-8D57-47FB-BC46-057616015C3B}" type="slidenum">
+              <a:rPr lang="ko-KR" altLang="en-US" smtClean="0"/>
+              <a:t>13</a:t>
             </a:fld>
             <a:endParaRPr lang="ko-KR" altLang="en-US"/>
           </a:p>
@@ -883,7 +968,7 @@
         <p:cNvPr id="1" name="">
           <a:extLst>
             <a:ext uri="{FF2B5EF4-FFF2-40B4-BE49-F238E27FC236}">
-              <a16:creationId xmlns:a16="http://schemas.microsoft.com/office/drawing/2014/main" id="{6EF2A508-FF2A-1DF1-3DD3-78CD3A998595}"/>
+              <a16:creationId xmlns:a16="http://schemas.microsoft.com/office/drawing/2014/main" id="{1DFA0934-F7EE-9604-5F97-9303B9190681}"/>
             </a:ext>
           </a:extLst>
         </p:cNvPr>
@@ -903,7 +988,7 @@
           <p:cNvPr id="2" name="슬라이드 이미지 개체 틀 1">
             <a:extLst>
               <a:ext uri="{FF2B5EF4-FFF2-40B4-BE49-F238E27FC236}">
-                <a16:creationId xmlns:a16="http://schemas.microsoft.com/office/drawing/2014/main" id="{9947AFE7-477E-C4FB-922E-A5DB497B17F7}"/>
+                <a16:creationId xmlns:a16="http://schemas.microsoft.com/office/drawing/2014/main" id="{FE7579C9-5BE1-8221-4693-BCE6637AD201}"/>
               </a:ext>
             </a:extLst>
           </p:cNvPr>
@@ -921,7 +1006,7 @@
           <p:cNvPr id="3" name="슬라이드 노트 개체 틀 2">
             <a:extLst>
               <a:ext uri="{FF2B5EF4-FFF2-40B4-BE49-F238E27FC236}">
-                <a16:creationId xmlns:a16="http://schemas.microsoft.com/office/drawing/2014/main" id="{456F2381-BDD9-A6C4-B2FC-712A1F1B6CCE}"/>
+                <a16:creationId xmlns:a16="http://schemas.microsoft.com/office/drawing/2014/main" id="{6F3B7F8E-81F1-5209-BDDF-7F146D069A0B}"/>
               </a:ext>
             </a:extLst>
           </p:cNvPr>
@@ -946,7 +1031,7 @@
           <p:cNvPr id="4" name="슬라이드 번호 개체 틀 3">
             <a:extLst>
               <a:ext uri="{FF2B5EF4-FFF2-40B4-BE49-F238E27FC236}">
-                <a16:creationId xmlns:a16="http://schemas.microsoft.com/office/drawing/2014/main" id="{759EAA6B-72CD-38D7-FF10-CEB4B320E9F9}"/>
+                <a16:creationId xmlns:a16="http://schemas.microsoft.com/office/drawing/2014/main" id="{AF124785-C804-4CE2-7D22-3D227F9C1FCD}"/>
               </a:ext>
             </a:extLst>
           </p:cNvPr>
@@ -973,7 +1058,7 @@
     </p:spTree>
     <p:extLst>
       <p:ext uri="{BB962C8B-B14F-4D97-AF65-F5344CB8AC3E}">
-        <p14:creationId xmlns:p14="http://schemas.microsoft.com/office/powerpoint/2010/main" val="2709561344"/>
+        <p14:creationId xmlns:p14="http://schemas.microsoft.com/office/powerpoint/2010/main" val="3889942508"/>
       </p:ext>
     </p:extLst>
   </p:cSld>
@@ -988,7 +1073,13 @@
   <p:cSld>
     <p:spTree>
       <p:nvGrpSpPr>
-        <p:cNvPr id="1" name=""/>
+        <p:cNvPr id="1" name="">
+          <a:extLst>
+            <a:ext uri="{FF2B5EF4-FFF2-40B4-BE49-F238E27FC236}">
+              <a16:creationId xmlns:a16="http://schemas.microsoft.com/office/drawing/2014/main" id="{8FE1B288-98C9-A4E5-A2EA-749B9AE03772}"/>
+            </a:ext>
+          </a:extLst>
+        </p:cNvPr>
         <p:cNvGrpSpPr/>
         <p:nvPr/>
       </p:nvGrpSpPr>
@@ -1002,7 +1093,13 @@
       </p:grpSpPr>
       <p:sp>
         <p:nvSpPr>
-          <p:cNvPr id="2" name="슬라이드 이미지 개체 틀 1"/>
+          <p:cNvPr id="2" name="슬라이드 이미지 개체 틀 1">
+            <a:extLst>
+              <a:ext uri="{FF2B5EF4-FFF2-40B4-BE49-F238E27FC236}">
+                <a16:creationId xmlns:a16="http://schemas.microsoft.com/office/drawing/2014/main" id="{CB2548F9-8E43-ED1B-6810-0B30E5B4002D}"/>
+              </a:ext>
+            </a:extLst>
+          </p:cNvPr>
           <p:cNvSpPr>
             <a:spLocks noGrp="1" noRot="1" noChangeAspect="1"/>
           </p:cNvSpPr>
@@ -1014,7 +1111,13 @@
       </p:sp>
       <p:sp>
         <p:nvSpPr>
-          <p:cNvPr id="3" name="슬라이드 노트 개체 틀 2"/>
+          <p:cNvPr id="3" name="슬라이드 노트 개체 틀 2">
+            <a:extLst>
+              <a:ext uri="{FF2B5EF4-FFF2-40B4-BE49-F238E27FC236}">
+                <a16:creationId xmlns:a16="http://schemas.microsoft.com/office/drawing/2014/main" id="{67F840B6-0AA5-E832-D457-8B89649CFC81}"/>
+              </a:ext>
+            </a:extLst>
+          </p:cNvPr>
           <p:cNvSpPr>
             <a:spLocks noGrp="1"/>
           </p:cNvSpPr>
@@ -1033,7 +1136,13 @@
       </p:sp>
       <p:sp>
         <p:nvSpPr>
-          <p:cNvPr id="4" name="슬라이드 번호 개체 틀 3"/>
+          <p:cNvPr id="4" name="슬라이드 번호 개체 틀 3">
+            <a:extLst>
+              <a:ext uri="{FF2B5EF4-FFF2-40B4-BE49-F238E27FC236}">
+                <a16:creationId xmlns:a16="http://schemas.microsoft.com/office/drawing/2014/main" id="{549C7EDC-DE4A-729D-7509-A9D5EF7524EF}"/>
+              </a:ext>
+            </a:extLst>
+          </p:cNvPr>
           <p:cNvSpPr>
             <a:spLocks noGrp="1"/>
           </p:cNvSpPr>
@@ -1057,7 +1166,7 @@
     </p:spTree>
     <p:extLst>
       <p:ext uri="{BB962C8B-B14F-4D97-AF65-F5344CB8AC3E}">
-        <p14:creationId xmlns:p14="http://schemas.microsoft.com/office/powerpoint/2010/main" val="1567964482"/>
+        <p14:creationId xmlns:p14="http://schemas.microsoft.com/office/powerpoint/2010/main" val="3929111847"/>
       </p:ext>
     </p:extLst>
   </p:cSld>
@@ -1141,7 +1250,7 @@
     </p:spTree>
     <p:extLst>
       <p:ext uri="{BB962C8B-B14F-4D97-AF65-F5344CB8AC3E}">
-        <p14:creationId xmlns:p14="http://schemas.microsoft.com/office/powerpoint/2010/main" val="3019375958"/>
+        <p14:creationId xmlns:p14="http://schemas.microsoft.com/office/powerpoint/2010/main" val="1567964482"/>
       </p:ext>
     </p:extLst>
   </p:cSld>
@@ -1225,6 +1334,90 @@
     </p:spTree>
     <p:extLst>
       <p:ext uri="{BB962C8B-B14F-4D97-AF65-F5344CB8AC3E}">
+        <p14:creationId xmlns:p14="http://schemas.microsoft.com/office/powerpoint/2010/main" val="3019375958"/>
+      </p:ext>
+    </p:extLst>
+  </p:cSld>
+  <p:clrMapOvr>
+    <a:masterClrMapping/>
+  </p:clrMapOvr>
+</p:notes>
+</file>
+
+<file path=ppt/notesSlides/notesSlide7.xml><?xml version="1.0" encoding="utf-8"?>
+<p:notes xmlns:a="http://schemas.openxmlformats.org/drawingml/2006/main" xmlns:r="http://schemas.openxmlformats.org/officeDocument/2006/relationships" xmlns:p="http://schemas.openxmlformats.org/presentationml/2006/main">
+  <p:cSld>
+    <p:spTree>
+      <p:nvGrpSpPr>
+        <p:cNvPr id="1" name=""/>
+        <p:cNvGrpSpPr/>
+        <p:nvPr/>
+      </p:nvGrpSpPr>
+      <p:grpSpPr>
+        <a:xfrm>
+          <a:off x="0" y="0"/>
+          <a:ext cx="0" cy="0"/>
+          <a:chOff x="0" y="0"/>
+          <a:chExt cx="0" cy="0"/>
+        </a:xfrm>
+      </p:grpSpPr>
+      <p:sp>
+        <p:nvSpPr>
+          <p:cNvPr id="2" name="슬라이드 이미지 개체 틀 1"/>
+          <p:cNvSpPr>
+            <a:spLocks noGrp="1" noRot="1" noChangeAspect="1"/>
+          </p:cNvSpPr>
+          <p:nvPr>
+            <p:ph type="sldImg"/>
+          </p:nvPr>
+        </p:nvSpPr>
+        <p:spPr/>
+      </p:sp>
+      <p:sp>
+        <p:nvSpPr>
+          <p:cNvPr id="3" name="슬라이드 노트 개체 틀 2"/>
+          <p:cNvSpPr>
+            <a:spLocks noGrp="1"/>
+          </p:cNvSpPr>
+          <p:nvPr>
+            <p:ph type="body" idx="1"/>
+          </p:nvPr>
+        </p:nvSpPr>
+        <p:spPr/>
+        <p:txBody>
+          <a:bodyPr/>
+          <a:lstStyle/>
+          <a:p>
+            <a:endParaRPr lang="ko-KR" altLang="en-US"/>
+          </a:p>
+        </p:txBody>
+      </p:sp>
+      <p:sp>
+        <p:nvSpPr>
+          <p:cNvPr id="4" name="슬라이드 번호 개체 틀 3"/>
+          <p:cNvSpPr>
+            <a:spLocks noGrp="1"/>
+          </p:cNvSpPr>
+          <p:nvPr>
+            <p:ph type="sldNum" sz="quarter" idx="10"/>
+          </p:nvPr>
+        </p:nvSpPr>
+        <p:spPr/>
+        <p:txBody>
+          <a:bodyPr/>
+          <a:lstStyle/>
+          <a:p>
+            <a:fld id="{BA5DFA43-8D57-47FB-BC46-057616015C3B}" type="slidenum">
+              <a:rPr lang="ko-KR" altLang="en-US" smtClean="0"/>
+              <a:t>8</a:t>
+            </a:fld>
+            <a:endParaRPr lang="ko-KR" altLang="en-US"/>
+          </a:p>
+        </p:txBody>
+      </p:sp>
+    </p:spTree>
+    <p:extLst>
+      <p:ext uri="{BB962C8B-B14F-4D97-AF65-F5344CB8AC3E}">
         <p14:creationId xmlns:p14="http://schemas.microsoft.com/office/powerpoint/2010/main" val="3104554366"/>
       </p:ext>
     </p:extLst>
@@ -1235,7 +1428,7 @@
 </p:notes>
 </file>
 
-<file path=ppt/notesSlides/notesSlide7.xml><?xml version="1.0" encoding="utf-8"?>
+<file path=ppt/notesSlides/notesSlide8.xml><?xml version="1.0" encoding="utf-8"?>
 <p:notes xmlns:a="http://schemas.openxmlformats.org/drawingml/2006/main" xmlns:r="http://schemas.openxmlformats.org/officeDocument/2006/relationships" xmlns:p="http://schemas.openxmlformats.org/presentationml/2006/main">
   <p:cSld>
     <p:spTree>
@@ -1324,7 +1517,7 @@
           <a:p>
             <a:fld id="{BA5DFA43-8D57-47FB-BC46-057616015C3B}" type="slidenum">
               <a:rPr lang="ko-KR" altLang="en-US" smtClean="0"/>
-              <a:t>8</a:t>
+              <a:t>9</a:t>
             </a:fld>
             <a:endParaRPr lang="ko-KR" altLang="en-US"/>
           </a:p>
@@ -1343,7 +1536,7 @@
 </p:notes>
 </file>
 
-<file path=ppt/notesSlides/notesSlide8.xml><?xml version="1.0" encoding="utf-8"?>
+<file path=ppt/notesSlides/notesSlide9.xml><?xml version="1.0" encoding="utf-8"?>
 <p:notes xmlns:a="http://schemas.openxmlformats.org/drawingml/2006/main" xmlns:r="http://schemas.openxmlformats.org/officeDocument/2006/relationships" xmlns:p="http://schemas.openxmlformats.org/presentationml/2006/main">
   <p:cSld>
     <p:spTree>
@@ -1432,7 +1625,7 @@
           <a:p>
             <a:fld id="{BA5DFA43-8D57-47FB-BC46-057616015C3B}" type="slidenum">
               <a:rPr lang="ko-KR" altLang="en-US" smtClean="0"/>
-              <a:t>9</a:t>
+              <a:t>10</a:t>
             </a:fld>
             <a:endParaRPr lang="ko-KR" altLang="en-US"/>
           </a:p>
@@ -1442,90 +1635,6 @@
     <p:extLst>
       <p:ext uri="{BB962C8B-B14F-4D97-AF65-F5344CB8AC3E}">
         <p14:creationId xmlns:p14="http://schemas.microsoft.com/office/powerpoint/2010/main" val="180167310"/>
-      </p:ext>
-    </p:extLst>
-  </p:cSld>
-  <p:clrMapOvr>
-    <a:masterClrMapping/>
-  </p:clrMapOvr>
-</p:notes>
-</file>
-
-<file path=ppt/notesSlides/notesSlide9.xml><?xml version="1.0" encoding="utf-8"?>
-<p:notes xmlns:a="http://schemas.openxmlformats.org/drawingml/2006/main" xmlns:r="http://schemas.openxmlformats.org/officeDocument/2006/relationships" xmlns:p="http://schemas.openxmlformats.org/presentationml/2006/main">
-  <p:cSld>
-    <p:spTree>
-      <p:nvGrpSpPr>
-        <p:cNvPr id="1" name=""/>
-        <p:cNvGrpSpPr/>
-        <p:nvPr/>
-      </p:nvGrpSpPr>
-      <p:grpSpPr>
-        <a:xfrm>
-          <a:off x="0" y="0"/>
-          <a:ext cx="0" cy="0"/>
-          <a:chOff x="0" y="0"/>
-          <a:chExt cx="0" cy="0"/>
-        </a:xfrm>
-      </p:grpSpPr>
-      <p:sp>
-        <p:nvSpPr>
-          <p:cNvPr id="2" name="슬라이드 이미지 개체 틀 1"/>
-          <p:cNvSpPr>
-            <a:spLocks noGrp="1" noRot="1" noChangeAspect="1"/>
-          </p:cNvSpPr>
-          <p:nvPr>
-            <p:ph type="sldImg"/>
-          </p:nvPr>
-        </p:nvSpPr>
-        <p:spPr/>
-      </p:sp>
-      <p:sp>
-        <p:nvSpPr>
-          <p:cNvPr id="3" name="슬라이드 노트 개체 틀 2"/>
-          <p:cNvSpPr>
-            <a:spLocks noGrp="1"/>
-          </p:cNvSpPr>
-          <p:nvPr>
-            <p:ph type="body" idx="1"/>
-          </p:nvPr>
-        </p:nvSpPr>
-        <p:spPr/>
-        <p:txBody>
-          <a:bodyPr/>
-          <a:lstStyle/>
-          <a:p>
-            <a:endParaRPr lang="ko-KR" altLang="en-US"/>
-          </a:p>
-        </p:txBody>
-      </p:sp>
-      <p:sp>
-        <p:nvSpPr>
-          <p:cNvPr id="4" name="슬라이드 번호 개체 틀 3"/>
-          <p:cNvSpPr>
-            <a:spLocks noGrp="1"/>
-          </p:cNvSpPr>
-          <p:nvPr>
-            <p:ph type="sldNum" sz="quarter" idx="10"/>
-          </p:nvPr>
-        </p:nvSpPr>
-        <p:spPr/>
-        <p:txBody>
-          <a:bodyPr/>
-          <a:lstStyle/>
-          <a:p>
-            <a:fld id="{BA5DFA43-8D57-47FB-BC46-057616015C3B}" type="slidenum">
-              <a:rPr lang="ko-KR" altLang="en-US" smtClean="0"/>
-              <a:t>10</a:t>
-            </a:fld>
-            <a:endParaRPr lang="ko-KR" altLang="en-US"/>
-          </a:p>
-        </p:txBody>
-      </p:sp>
-    </p:spTree>
-    <p:extLst>
-      <p:ext uri="{BB962C8B-B14F-4D97-AF65-F5344CB8AC3E}">
-        <p14:creationId xmlns:p14="http://schemas.microsoft.com/office/powerpoint/2010/main" val="1617950839"/>
       </p:ext>
     </p:extLst>
   </p:cSld>
@@ -4433,7 +4542,7 @@
         <p:cNvPr id="1" name="">
           <a:extLst>
             <a:ext uri="{FF2B5EF4-FFF2-40B4-BE49-F238E27FC236}">
-              <a16:creationId xmlns:a16="http://schemas.microsoft.com/office/drawing/2014/main" id="{D47006E3-14BF-55C5-19C7-5F69C3DAA1BF}"/>
+              <a16:creationId xmlns:a16="http://schemas.microsoft.com/office/drawing/2014/main" id="{536E8B20-5CB0-266F-D010-4969008FB20B}"/>
             </a:ext>
           </a:extLst>
         </p:cNvPr>
@@ -4450,10 +4559,61 @@
       </p:grpSpPr>
       <p:sp>
         <p:nvSpPr>
+          <p:cNvPr id="38" name="사각형: 둥근 모서리 114">
+            <a:extLst>
+              <a:ext uri="{FF2B5EF4-FFF2-40B4-BE49-F238E27FC236}">
+                <a16:creationId xmlns:a16="http://schemas.microsoft.com/office/drawing/2014/main" id="{715760DB-F35A-5664-E40F-12A0BEDC0B89}"/>
+              </a:ext>
+            </a:extLst>
+          </p:cNvPr>
+          <p:cNvSpPr/>
+          <p:nvPr/>
+        </p:nvSpPr>
+        <p:spPr>
+          <a:xfrm>
+            <a:off x="1547664" y="1930664"/>
+            <a:ext cx="6043510" cy="1282172"/>
+          </a:xfrm>
+          <a:prstGeom prst="roundRect">
+            <a:avLst>
+              <a:gd name="adj" fmla="val 7201"/>
+            </a:avLst>
+          </a:prstGeom>
+          <a:ln w="12700"/>
+        </p:spPr>
+        <p:style>
+          <a:lnRef idx="2">
+            <a:schemeClr val="dk1"/>
+          </a:lnRef>
+          <a:fillRef idx="1">
+            <a:schemeClr val="lt1"/>
+          </a:fillRef>
+          <a:effectRef idx="0">
+            <a:schemeClr val="dk1"/>
+          </a:effectRef>
+          <a:fontRef idx="minor">
+            <a:schemeClr val="dk1"/>
+          </a:fontRef>
+        </p:style>
+        <p:txBody>
+          <a:bodyPr rtlCol="0" anchor="b"/>
+          <a:lstStyle/>
+          <a:p>
+            <a:pPr algn="ctr"/>
+            <a:r>
+              <a:rPr lang="en-US" altLang="ko-KR" sz="1000" b="1"/>
+              <a:t>Host Filesystem</a:t>
+            </a:r>
+            <a:endParaRPr lang="en-US" altLang="ko-KR" sz="1000" b="1" dirty="0"/>
+          </a:p>
+        </p:txBody>
+      </p:sp>
+      <p:sp>
+        <p:nvSpPr>
           <p:cNvPr id="2" name="제목 1">
             <a:extLst>
               <a:ext uri="{FF2B5EF4-FFF2-40B4-BE49-F238E27FC236}">
-                <a16:creationId xmlns:a16="http://schemas.microsoft.com/office/drawing/2014/main" id="{C72503FA-17E5-5AE3-085B-3E08955531E7}"/>
+                <a16:creationId xmlns:a16="http://schemas.microsoft.com/office/drawing/2014/main" id="{5C0F9C8F-437F-D0AF-97AA-D56EC0818CE2}"/>
               </a:ext>
             </a:extLst>
           </p:cNvPr>
@@ -4466,19 +4626,19 @@
         </p:nvSpPr>
         <p:spPr>
           <a:xfrm>
-            <a:off x="0" y="-726229"/>
+            <a:off x="0" y="-773419"/>
             <a:ext cx="9144000" cy="857250"/>
           </a:xfrm>
         </p:spPr>
         <p:txBody>
           <a:bodyPr>
-            <a:normAutofit fontScale="90000"/>
+            <a:normAutofit/>
           </a:bodyPr>
           <a:lstStyle/>
           <a:p>
             <a:r>
               <a:rPr lang="en-US" altLang="ko-KR"/>
-              <a:t>CUDA Container OCI Runtime Spec</a:t>
+              <a:t>CUDA Container Stack</a:t>
             </a:r>
             <a:endParaRPr lang="ko-KR" altLang="en-US" dirty="0"/>
           </a:p>
@@ -4486,10 +4646,10 @@
       </p:sp>
       <p:sp>
         <p:nvSpPr>
-          <p:cNvPr id="7" name="사각형: 둥근 모서리 114">
-            <a:extLst>
-              <a:ext uri="{FF2B5EF4-FFF2-40B4-BE49-F238E27FC236}">
-                <a16:creationId xmlns:a16="http://schemas.microsoft.com/office/drawing/2014/main" id="{3A9A9FAD-7393-75E5-FB5E-4B6A1277EAD6}"/>
+          <p:cNvPr id="37" name="사각형: 둥근 모서리 114">
+            <a:extLst>
+              <a:ext uri="{FF2B5EF4-FFF2-40B4-BE49-F238E27FC236}">
+                <a16:creationId xmlns:a16="http://schemas.microsoft.com/office/drawing/2014/main" id="{13D7B3E7-F783-1EC1-5F29-0874EF0E893E}"/>
               </a:ext>
             </a:extLst>
           </p:cNvPr>
@@ -4498,12 +4658,12 @@
         </p:nvSpPr>
         <p:spPr>
           <a:xfrm>
-            <a:off x="1691680" y="555526"/>
-            <a:ext cx="5904656" cy="433441"/>
+            <a:off x="1557988" y="4061207"/>
+            <a:ext cx="6033186" cy="976265"/>
           </a:xfrm>
           <a:prstGeom prst="roundRect">
             <a:avLst>
-              <a:gd name="adj" fmla="val 0"/>
+              <a:gd name="adj" fmla="val 6397"/>
             </a:avLst>
           </a:prstGeom>
           <a:ln w="12700"/>
@@ -4523,31 +4683,24 @@
           </a:fontRef>
         </p:style>
         <p:txBody>
-          <a:bodyPr rtlCol="0" anchor="ctr"/>
-          <a:lstStyle/>
-          <a:p>
-            <a:r>
-              <a:rPr lang="en-US" altLang="ko-KR" sz="1100"/>
-              <a:t>$ ctr run --env NVIDIA_VISIBLE_DEVICES=all</a:t>
-            </a:r>
-            <a:r>
-              <a:rPr lang="ko-KR" altLang="en-US" sz="1100"/>
-              <a:t> </a:t>
-            </a:r>
-            <a:r>
-              <a:rPr lang="en-US" altLang="ko-KR" sz="1100"/>
-              <a:t>nvidia/cuda:9.0-base test-gpu nvidia-smi</a:t>
-            </a:r>
-            <a:endParaRPr lang="en-US" altLang="ko-KR" sz="1100" dirty="0"/>
-          </a:p>
-        </p:txBody>
-      </p:sp>
-      <p:sp>
-        <p:nvSpPr>
-          <p:cNvPr id="11" name="사각형: 둥근 모서리 114">
-            <a:extLst>
-              <a:ext uri="{FF2B5EF4-FFF2-40B4-BE49-F238E27FC236}">
-                <a16:creationId xmlns:a16="http://schemas.microsoft.com/office/drawing/2014/main" id="{6CABFD53-A11C-D694-A1D1-C2B792E873C0}"/>
+          <a:bodyPr rtlCol="0" anchor="b"/>
+          <a:lstStyle/>
+          <a:p>
+            <a:pPr algn="ctr"/>
+            <a:r>
+              <a:rPr lang="en-US" altLang="ko-KR" sz="1000" b="1"/>
+              <a:t>Host Hardware</a:t>
+            </a:r>
+            <a:endParaRPr lang="en-US" altLang="ko-KR" sz="1000" b="1" dirty="0"/>
+          </a:p>
+        </p:txBody>
+      </p:sp>
+      <p:sp>
+        <p:nvSpPr>
+          <p:cNvPr id="33" name="사각형: 둥근 모서리 114">
+            <a:extLst>
+              <a:ext uri="{FF2B5EF4-FFF2-40B4-BE49-F238E27FC236}">
+                <a16:creationId xmlns:a16="http://schemas.microsoft.com/office/drawing/2014/main" id="{F56E2D5A-3AEA-BC86-A33B-53D0167D37EC}"/>
               </a:ext>
             </a:extLst>
           </p:cNvPr>
@@ -4556,12 +4709,12 @@
         </p:nvSpPr>
         <p:spPr>
           <a:xfrm>
-            <a:off x="899592" y="1211838"/>
-            <a:ext cx="7488831" cy="2880320"/>
+            <a:off x="1552826" y="3212363"/>
+            <a:ext cx="6043510" cy="855136"/>
           </a:xfrm>
           <a:prstGeom prst="roundRect">
             <a:avLst>
-              <a:gd name="adj" fmla="val 0"/>
+              <a:gd name="adj" fmla="val 7201"/>
             </a:avLst>
           </a:prstGeom>
           <a:ln w="12700"/>
@@ -4581,270 +4734,1249 @@
           </a:fontRef>
         </p:style>
         <p:txBody>
+          <a:bodyPr rtlCol="0" anchor="b"/>
+          <a:lstStyle/>
+          <a:p>
+            <a:pPr algn="ctr"/>
+            <a:r>
+              <a:rPr lang="en-US" altLang="ko-KR" sz="1000" b="1"/>
+              <a:t>Host Kernel</a:t>
+            </a:r>
+            <a:endParaRPr lang="en-US" altLang="ko-KR" sz="1000" b="1" dirty="0"/>
+          </a:p>
+        </p:txBody>
+      </p:sp>
+      <p:sp>
+        <p:nvSpPr>
+          <p:cNvPr id="14" name="사각형: 둥근 모서리 114">
+            <a:extLst>
+              <a:ext uri="{FF2B5EF4-FFF2-40B4-BE49-F238E27FC236}">
+                <a16:creationId xmlns:a16="http://schemas.microsoft.com/office/drawing/2014/main" id="{33278C70-4E26-832E-F3CF-8888DB9B5A2A}"/>
+              </a:ext>
+            </a:extLst>
+          </p:cNvPr>
+          <p:cNvSpPr/>
+          <p:nvPr/>
+        </p:nvSpPr>
+        <p:spPr>
+          <a:xfrm>
+            <a:off x="2145948" y="4173376"/>
+            <a:ext cx="1077331" cy="576064"/>
+          </a:xfrm>
+          <a:prstGeom prst="roundRect">
+            <a:avLst>
+              <a:gd name="adj" fmla="val 7242"/>
+            </a:avLst>
+          </a:prstGeom>
+          <a:solidFill>
+            <a:schemeClr val="bg1">
+              <a:lumMod val="95000"/>
+            </a:schemeClr>
+          </a:solidFill>
+          <a:ln w="12700"/>
+        </p:spPr>
+        <p:style>
+          <a:lnRef idx="2">
+            <a:schemeClr val="dk1"/>
+          </a:lnRef>
+          <a:fillRef idx="1">
+            <a:schemeClr val="lt1"/>
+          </a:fillRef>
+          <a:effectRef idx="0">
+            <a:schemeClr val="dk1"/>
+          </a:effectRef>
+          <a:fontRef idx="minor">
+            <a:schemeClr val="dk1"/>
+          </a:fontRef>
+        </p:style>
+        <p:txBody>
           <a:bodyPr rtlCol="0" anchor="ctr"/>
           <a:lstStyle/>
           <a:p>
-            <a:r>
-              <a:rPr lang="en-US" altLang="ko-KR" sz="1100" kern="0" dirty="0">
-                <a:cs typeface="Al Bayan Plain" pitchFamily="2" charset="-78"/>
-              </a:rPr>
-              <a:t>{</a:t>
-            </a:r>
-          </a:p>
-          <a:p>
-            <a:r>
-              <a:rPr lang="en-US" altLang="ko-KR" sz="1100" kern="0" dirty="0">
-                <a:cs typeface="Al Bayan Plain" pitchFamily="2" charset="-78"/>
-              </a:rPr>
-              <a:t>    "hooks": {</a:t>
-            </a:r>
-          </a:p>
-          <a:p>
-            <a:r>
-              <a:rPr lang="en-US" altLang="ko-KR" sz="1100" kern="0" dirty="0">
-                <a:cs typeface="Al Bayan Plain" pitchFamily="2" charset="-78"/>
-              </a:rPr>
-              <a:t>        "</a:t>
-            </a:r>
-            <a:r>
-              <a:rPr lang="en-US" altLang="ko-KR" sz="1100" kern="0" dirty="0" err="1">
-                <a:cs typeface="Al Bayan Plain" pitchFamily="2" charset="-78"/>
-              </a:rPr>
-              <a:t>Poststart</a:t>
-            </a:r>
-            <a:r>
-              <a:rPr lang="en-US" altLang="ko-KR" sz="1100" kern="0" dirty="0">
-                <a:cs typeface="Al Bayan Plain" pitchFamily="2" charset="-78"/>
-              </a:rPr>
-              <a:t>": [],</a:t>
-            </a:r>
-          </a:p>
-          <a:p>
-            <a:r>
-              <a:rPr lang="en-US" altLang="ko-KR" sz="1100" kern="0" dirty="0">
-                <a:cs typeface="Al Bayan Plain" pitchFamily="2" charset="-78"/>
-              </a:rPr>
-              <a:t>        "</a:t>
-            </a:r>
-            <a:r>
-              <a:rPr lang="en-US" altLang="ko-KR" sz="1100" kern="0" dirty="0" err="1">
-                <a:cs typeface="Al Bayan Plain" pitchFamily="2" charset="-78"/>
-              </a:rPr>
-              <a:t>Poststop</a:t>
-            </a:r>
-            <a:r>
-              <a:rPr lang="en-US" altLang="ko-KR" sz="1100" kern="0" dirty="0">
-                <a:cs typeface="Al Bayan Plain" pitchFamily="2" charset="-78"/>
-              </a:rPr>
-              <a:t>": [],</a:t>
-            </a:r>
-          </a:p>
-          <a:p>
-            <a:r>
-              <a:rPr lang="en-US" altLang="ko-KR" sz="1100" kern="0" dirty="0">
-                <a:cs typeface="Al Bayan Plain" pitchFamily="2" charset="-78"/>
-              </a:rPr>
-              <a:t>        "prestart": [{</a:t>
-            </a:r>
-          </a:p>
-          <a:p>
-            <a:r>
-              <a:rPr lang="en-US" altLang="ko-KR" sz="1100" kern="0" dirty="0">
-                <a:cs typeface="Al Bayan Plain" pitchFamily="2" charset="-78"/>
-              </a:rPr>
-              <a:t>            "</a:t>
-            </a:r>
-            <a:r>
-              <a:rPr lang="en-US" altLang="ko-KR" sz="1100" kern="0" dirty="0" err="1">
-                <a:cs typeface="Al Bayan Plain" pitchFamily="2" charset="-78"/>
-              </a:rPr>
-              <a:t>args</a:t>
-            </a:r>
-            <a:r>
-              <a:rPr lang="en-US" altLang="ko-KR" sz="1100" kern="0" dirty="0">
-                <a:cs typeface="Al Bayan Plain" pitchFamily="2" charset="-78"/>
-              </a:rPr>
-              <a:t>": ["/</a:t>
-            </a:r>
-            <a:r>
-              <a:rPr lang="en-US" altLang="ko-KR" sz="1100" kern="0" dirty="0" err="1">
-                <a:cs typeface="Al Bayan Plain" pitchFamily="2" charset="-78"/>
-              </a:rPr>
-              <a:t>usr</a:t>
-            </a:r>
-            <a:r>
-              <a:rPr lang="en-US" altLang="ko-KR" sz="1100" kern="0" dirty="0">
-                <a:cs typeface="Al Bayan Plain" pitchFamily="2" charset="-78"/>
-              </a:rPr>
-              <a:t>/bin/</a:t>
-            </a:r>
-            <a:r>
-              <a:rPr lang="en-US" altLang="ko-KR" sz="1100" kern="0" dirty="0" err="1">
-                <a:cs typeface="Al Bayan Plain" pitchFamily="2" charset="-78"/>
-              </a:rPr>
-              <a:t>nvidia</a:t>
-            </a:r>
-            <a:r>
-              <a:rPr lang="en-US" altLang="ko-KR" sz="1100" kern="0" dirty="0">
-                <a:cs typeface="Al Bayan Plain" pitchFamily="2" charset="-78"/>
-              </a:rPr>
-              <a:t>-container-runtime-hook", "prestart"],</a:t>
-            </a:r>
-          </a:p>
-          <a:p>
-            <a:r>
-              <a:rPr lang="en-US" altLang="ko-KR" sz="1100" kern="0" dirty="0">
-                <a:cs typeface="Al Bayan Plain" pitchFamily="2" charset="-78"/>
-              </a:rPr>
-              <a:t>            "path": "/</a:t>
-            </a:r>
-            <a:r>
-              <a:rPr lang="en-US" altLang="ko-KR" sz="1100" kern="0" dirty="0" err="1">
-                <a:cs typeface="Al Bayan Plain" pitchFamily="2" charset="-78"/>
-              </a:rPr>
-              <a:t>usr</a:t>
-            </a:r>
-            <a:r>
-              <a:rPr lang="en-US" altLang="ko-KR" sz="1100" kern="0" dirty="0">
-                <a:cs typeface="Al Bayan Plain" pitchFamily="2" charset="-78"/>
-              </a:rPr>
-              <a:t>/bin/</a:t>
-            </a:r>
-            <a:r>
-              <a:rPr lang="en-US" altLang="ko-KR" sz="1100" kern="0" dirty="0" err="1">
-                <a:cs typeface="Al Bayan Plain" pitchFamily="2" charset="-78"/>
-              </a:rPr>
-              <a:t>nvidia</a:t>
-            </a:r>
-            <a:r>
-              <a:rPr lang="en-US" altLang="ko-KR" sz="1100" kern="0" dirty="0">
-                <a:cs typeface="Al Bayan Plain" pitchFamily="2" charset="-78"/>
-              </a:rPr>
-              <a:t>-container-runtime-hook”</a:t>
-            </a:r>
-          </a:p>
-          <a:p>
-            <a:r>
-              <a:rPr lang="en-US" altLang="ko-KR" sz="1100" kern="0" dirty="0">
-                <a:cs typeface="Al Bayan Plain" pitchFamily="2" charset="-78"/>
-              </a:rPr>
-              <a:t>        }]</a:t>
-            </a:r>
-          </a:p>
-          <a:p>
-            <a:r>
-              <a:rPr lang="en-US" altLang="ko-KR" sz="1100" kern="0" dirty="0">
-                <a:cs typeface="Al Bayan Plain" pitchFamily="2" charset="-78"/>
-              </a:rPr>
-              <a:t>    },</a:t>
-            </a:r>
-          </a:p>
-          <a:p>
-            <a:r>
-              <a:rPr lang="en-US" altLang="ko-KR" sz="1100" kern="0" dirty="0">
-                <a:cs typeface="Al Bayan Plain" pitchFamily="2" charset="-78"/>
-              </a:rPr>
-              <a:t>    "process": {</a:t>
-            </a:r>
-          </a:p>
-          <a:p>
-            <a:r>
-              <a:rPr lang="en-US" altLang="ko-KR" sz="1100" kern="0" dirty="0">
-                <a:cs typeface="Al Bayan Plain" pitchFamily="2" charset="-78"/>
-              </a:rPr>
-              <a:t>        “env”: [</a:t>
-            </a:r>
-          </a:p>
-          <a:p>
-            <a:r>
-              <a:rPr lang="en-US" altLang="ko-KR" sz="1100" kern="0" dirty="0">
-                <a:cs typeface="Al Bayan Plain" pitchFamily="2" charset="-78"/>
-              </a:rPr>
-              <a:t>            "</a:t>
-            </a:r>
-            <a:r>
-              <a:rPr lang="en-US" altLang="ko-KR" sz="1100" b="1" kern="0" dirty="0">
-                <a:cs typeface="Al Bayan Plain" pitchFamily="2" charset="-78"/>
-              </a:rPr>
-              <a:t>NVIDIA_VISIBLE_DEVICES</a:t>
-            </a:r>
-            <a:r>
-              <a:rPr lang="en-US" altLang="ko-KR" sz="1100" kern="0" dirty="0">
-                <a:cs typeface="Al Bayan Plain" pitchFamily="2" charset="-78"/>
-              </a:rPr>
-              <a:t>=all",</a:t>
-            </a:r>
-          </a:p>
-          <a:p>
-            <a:r>
-              <a:rPr lang="en-US" altLang="ko-KR" sz="1100" kern="0" dirty="0">
-                <a:cs typeface="Al Bayan Plain" pitchFamily="2" charset="-78"/>
-              </a:rPr>
-              <a:t>            ...</a:t>
-            </a:r>
-            <a:br>
-              <a:rPr lang="en-US" altLang="ko-KR" sz="1100" kern="0" dirty="0">
-                <a:cs typeface="Al Bayan Plain" pitchFamily="2" charset="-78"/>
-              </a:rPr>
-            </a:br>
-            <a:r>
-              <a:rPr lang="en-US" altLang="ko-KR" sz="1100" kern="0" dirty="0">
-                <a:cs typeface="Al Bayan Plain" pitchFamily="2" charset="-78"/>
-              </a:rPr>
-              <a:t>        ]</a:t>
-            </a:r>
-          </a:p>
-          <a:p>
-            <a:r>
-              <a:rPr lang="en-US" altLang="ko-KR" sz="1100" kern="0" dirty="0">
-                <a:cs typeface="Al Bayan Plain" pitchFamily="2" charset="-78"/>
-              </a:rPr>
-              <a:t>    }</a:t>
-            </a:r>
-          </a:p>
-          <a:p>
-            <a:r>
-              <a:rPr lang="en-US" altLang="ko-KR" sz="1100" kern="0" dirty="0">
-                <a:cs typeface="Al Bayan Plain" pitchFamily="2" charset="-78"/>
-              </a:rPr>
-              <a:t>...</a:t>
-            </a:r>
-            <a:endParaRPr lang="en-US" altLang="ko-KR" sz="1600" kern="0" dirty="0">
-              <a:cs typeface="Al Bayan Plain" pitchFamily="2" charset="-78"/>
+            <a:pPr algn="ctr"/>
+            <a:r>
+              <a:rPr lang="en-US" altLang="ko-KR" sz="1000"/>
+              <a:t>NVIDIA</a:t>
+            </a:r>
+          </a:p>
+          <a:p>
+            <a:pPr algn="ctr"/>
+            <a:r>
+              <a:rPr lang="en-US" altLang="ko-KR" sz="1000"/>
+              <a:t>GPU 0</a:t>
+            </a:r>
+            <a:endParaRPr lang="en-US" altLang="ko-KR" sz="1000" dirty="0"/>
+          </a:p>
+        </p:txBody>
+      </p:sp>
+      <p:sp>
+        <p:nvSpPr>
+          <p:cNvPr id="15" name="사각형: 둥근 모서리 114">
+            <a:extLst>
+              <a:ext uri="{FF2B5EF4-FFF2-40B4-BE49-F238E27FC236}">
+                <a16:creationId xmlns:a16="http://schemas.microsoft.com/office/drawing/2014/main" id="{BF9A344D-403F-E740-9878-AAA1304E842D}"/>
+              </a:ext>
+            </a:extLst>
+          </p:cNvPr>
+          <p:cNvSpPr/>
+          <p:nvPr/>
+        </p:nvSpPr>
+        <p:spPr>
+          <a:xfrm>
+            <a:off x="3405927" y="4173376"/>
+            <a:ext cx="1077331" cy="576064"/>
+          </a:xfrm>
+          <a:prstGeom prst="roundRect">
+            <a:avLst>
+              <a:gd name="adj" fmla="val 7242"/>
+            </a:avLst>
+          </a:prstGeom>
+          <a:solidFill>
+            <a:schemeClr val="bg1">
+              <a:lumMod val="95000"/>
+            </a:schemeClr>
+          </a:solidFill>
+          <a:ln w="12700"/>
+        </p:spPr>
+        <p:style>
+          <a:lnRef idx="2">
+            <a:schemeClr val="dk1"/>
+          </a:lnRef>
+          <a:fillRef idx="1">
+            <a:schemeClr val="lt1"/>
+          </a:fillRef>
+          <a:effectRef idx="0">
+            <a:schemeClr val="dk1"/>
+          </a:effectRef>
+          <a:fontRef idx="minor">
+            <a:schemeClr val="dk1"/>
+          </a:fontRef>
+        </p:style>
+        <p:txBody>
+          <a:bodyPr rtlCol="0" anchor="ctr"/>
+          <a:lstStyle/>
+          <a:p>
+            <a:pPr algn="ctr"/>
+            <a:r>
+              <a:rPr lang="en-US" altLang="ko-KR" sz="1000"/>
+              <a:t>NVIDIA</a:t>
+            </a:r>
+          </a:p>
+          <a:p>
+            <a:pPr algn="ctr"/>
+            <a:r>
+              <a:rPr lang="en-US" altLang="ko-KR" sz="1000"/>
+              <a:t>GPU 1</a:t>
+            </a:r>
+            <a:endParaRPr lang="en-US" altLang="ko-KR" sz="1000" dirty="0"/>
+          </a:p>
+        </p:txBody>
+      </p:sp>
+      <p:sp>
+        <p:nvSpPr>
+          <p:cNvPr id="16" name="사각형: 둥근 모서리 114">
+            <a:extLst>
+              <a:ext uri="{FF2B5EF4-FFF2-40B4-BE49-F238E27FC236}">
+                <a16:creationId xmlns:a16="http://schemas.microsoft.com/office/drawing/2014/main" id="{229628F2-2ACB-D300-083B-933563ACB3DF}"/>
+              </a:ext>
+            </a:extLst>
+          </p:cNvPr>
+          <p:cNvSpPr/>
+          <p:nvPr/>
+        </p:nvSpPr>
+        <p:spPr>
+          <a:xfrm>
+            <a:off x="4665905" y="4173376"/>
+            <a:ext cx="1077331" cy="576064"/>
+          </a:xfrm>
+          <a:prstGeom prst="roundRect">
+            <a:avLst>
+              <a:gd name="adj" fmla="val 7242"/>
+            </a:avLst>
+          </a:prstGeom>
+          <a:solidFill>
+            <a:schemeClr val="bg1">
+              <a:lumMod val="95000"/>
+            </a:schemeClr>
+          </a:solidFill>
+          <a:ln w="12700"/>
+        </p:spPr>
+        <p:style>
+          <a:lnRef idx="2">
+            <a:schemeClr val="dk1"/>
+          </a:lnRef>
+          <a:fillRef idx="1">
+            <a:schemeClr val="lt1"/>
+          </a:fillRef>
+          <a:effectRef idx="0">
+            <a:schemeClr val="dk1"/>
+          </a:effectRef>
+          <a:fontRef idx="minor">
+            <a:schemeClr val="dk1"/>
+          </a:fontRef>
+        </p:style>
+        <p:txBody>
+          <a:bodyPr rtlCol="0" anchor="ctr"/>
+          <a:lstStyle/>
+          <a:p>
+            <a:pPr algn="ctr"/>
+            <a:r>
+              <a:rPr lang="en-US" altLang="ko-KR" sz="1000"/>
+              <a:t>NVIDIA</a:t>
+            </a:r>
+          </a:p>
+          <a:p>
+            <a:pPr algn="ctr"/>
+            <a:r>
+              <a:rPr lang="en-US" altLang="ko-KR" sz="1000"/>
+              <a:t>GPU 2</a:t>
+            </a:r>
+            <a:endParaRPr lang="en-US" altLang="ko-KR" sz="1000" dirty="0"/>
+          </a:p>
+        </p:txBody>
+      </p:sp>
+      <p:sp>
+        <p:nvSpPr>
+          <p:cNvPr id="17" name="사각형: 둥근 모서리 114">
+            <a:extLst>
+              <a:ext uri="{FF2B5EF4-FFF2-40B4-BE49-F238E27FC236}">
+                <a16:creationId xmlns:a16="http://schemas.microsoft.com/office/drawing/2014/main" id="{C70318E8-718F-3AC5-9B88-74F8F2A5DBB1}"/>
+              </a:ext>
+            </a:extLst>
+          </p:cNvPr>
+          <p:cNvSpPr/>
+          <p:nvPr/>
+        </p:nvSpPr>
+        <p:spPr>
+          <a:xfrm>
+            <a:off x="5925884" y="4173376"/>
+            <a:ext cx="1077331" cy="576064"/>
+          </a:xfrm>
+          <a:prstGeom prst="roundRect">
+            <a:avLst>
+              <a:gd name="adj" fmla="val 7242"/>
+            </a:avLst>
+          </a:prstGeom>
+          <a:solidFill>
+            <a:schemeClr val="bg1">
+              <a:lumMod val="95000"/>
+            </a:schemeClr>
+          </a:solidFill>
+          <a:ln w="12700"/>
+        </p:spPr>
+        <p:style>
+          <a:lnRef idx="2">
+            <a:schemeClr val="dk1"/>
+          </a:lnRef>
+          <a:fillRef idx="1">
+            <a:schemeClr val="lt1"/>
+          </a:fillRef>
+          <a:effectRef idx="0">
+            <a:schemeClr val="dk1"/>
+          </a:effectRef>
+          <a:fontRef idx="minor">
+            <a:schemeClr val="dk1"/>
+          </a:fontRef>
+        </p:style>
+        <p:txBody>
+          <a:bodyPr rtlCol="0" anchor="ctr"/>
+          <a:lstStyle/>
+          <a:p>
+            <a:pPr algn="ctr"/>
+            <a:r>
+              <a:rPr lang="en-US" altLang="ko-KR" sz="1000"/>
+              <a:t>NVIDIA</a:t>
+            </a:r>
+          </a:p>
+          <a:p>
+            <a:pPr algn="ctr"/>
+            <a:r>
+              <a:rPr lang="en-US" altLang="ko-KR" sz="1000"/>
+              <a:t>GPU 3</a:t>
+            </a:r>
+            <a:endParaRPr lang="en-US" altLang="ko-KR" sz="1000" dirty="0"/>
+          </a:p>
+        </p:txBody>
+      </p:sp>
+      <p:sp>
+        <p:nvSpPr>
+          <p:cNvPr id="36" name="사각형: 둥근 모서리 114">
+            <a:extLst>
+              <a:ext uri="{FF2B5EF4-FFF2-40B4-BE49-F238E27FC236}">
+                <a16:creationId xmlns:a16="http://schemas.microsoft.com/office/drawing/2014/main" id="{3364FA23-F895-1B5D-699B-3DEDE068BF8C}"/>
+              </a:ext>
+            </a:extLst>
+          </p:cNvPr>
+          <p:cNvSpPr/>
+          <p:nvPr/>
+        </p:nvSpPr>
+        <p:spPr>
+          <a:xfrm>
+            <a:off x="734944" y="111692"/>
+            <a:ext cx="2486761" cy="1717824"/>
+          </a:xfrm>
+          <a:prstGeom prst="roundRect">
+            <a:avLst>
+              <a:gd name="adj" fmla="val 4028"/>
+            </a:avLst>
+          </a:prstGeom>
+          <a:ln w="12700"/>
+        </p:spPr>
+        <p:style>
+          <a:lnRef idx="2">
+            <a:schemeClr val="dk1"/>
+          </a:lnRef>
+          <a:fillRef idx="1">
+            <a:schemeClr val="lt1"/>
+          </a:fillRef>
+          <a:effectRef idx="0">
+            <a:schemeClr val="dk1"/>
+          </a:effectRef>
+          <a:fontRef idx="minor">
+            <a:schemeClr val="dk1"/>
+          </a:fontRef>
+        </p:style>
+        <p:txBody>
+          <a:bodyPr rtlCol="0" anchor="t"/>
+          <a:lstStyle/>
+          <a:p>
+            <a:pPr algn="ctr"/>
+            <a:r>
+              <a:rPr lang="en-US" altLang="ko-KR" sz="1000" b="1"/>
+              <a:t>Container A</a:t>
+            </a:r>
+            <a:endParaRPr lang="ko-KR" altLang="en-US" sz="1000" b="1" dirty="0">
+              <a:solidFill>
+                <a:schemeClr val="accent2">
+                  <a:lumMod val="75000"/>
+                </a:schemeClr>
+              </a:solidFill>
             </a:endParaRPr>
+          </a:p>
+        </p:txBody>
+      </p:sp>
+      <p:sp>
+        <p:nvSpPr>
+          <p:cNvPr id="48" name="사각형: 둥근 모서리 114">
+            <a:extLst>
+              <a:ext uri="{FF2B5EF4-FFF2-40B4-BE49-F238E27FC236}">
+                <a16:creationId xmlns:a16="http://schemas.microsoft.com/office/drawing/2014/main" id="{7B735900-90DF-2B9C-D836-265C1EE6844C}"/>
+              </a:ext>
+            </a:extLst>
+          </p:cNvPr>
+          <p:cNvSpPr/>
+          <p:nvPr/>
+        </p:nvSpPr>
+        <p:spPr>
+          <a:xfrm>
+            <a:off x="822678" y="1345650"/>
+            <a:ext cx="1099999" cy="396044"/>
+          </a:xfrm>
+          <a:prstGeom prst="roundRect">
+            <a:avLst>
+              <a:gd name="adj" fmla="val 7242"/>
+            </a:avLst>
+          </a:prstGeom>
+          <a:solidFill>
+            <a:schemeClr val="bg1">
+              <a:lumMod val="95000"/>
+            </a:schemeClr>
+          </a:solidFill>
+          <a:ln w="12700"/>
+        </p:spPr>
+        <p:style>
+          <a:lnRef idx="2">
+            <a:schemeClr val="dk1"/>
+          </a:lnRef>
+          <a:fillRef idx="1">
+            <a:schemeClr val="lt1"/>
+          </a:fillRef>
+          <a:effectRef idx="0">
+            <a:schemeClr val="dk1"/>
+          </a:effectRef>
+          <a:fontRef idx="minor">
+            <a:schemeClr val="dk1"/>
+          </a:fontRef>
+        </p:style>
+        <p:txBody>
+          <a:bodyPr rtlCol="0" anchor="ctr"/>
+          <a:lstStyle/>
+          <a:p>
+            <a:pPr algn="ctr"/>
+            <a:r>
+              <a:rPr lang="en-US" altLang="ko-KR" sz="1000"/>
+              <a:t>/dev/nvidia0</a:t>
+            </a:r>
+            <a:endParaRPr lang="en-US" altLang="ko-KR" sz="1000" dirty="0"/>
+          </a:p>
+        </p:txBody>
+      </p:sp>
+      <p:sp>
+        <p:nvSpPr>
+          <p:cNvPr id="49" name="사각형: 둥근 모서리 114">
+            <a:extLst>
+              <a:ext uri="{FF2B5EF4-FFF2-40B4-BE49-F238E27FC236}">
+                <a16:creationId xmlns:a16="http://schemas.microsoft.com/office/drawing/2014/main" id="{2E5EDF11-A65E-332B-1623-CD439CC6BDBB}"/>
+              </a:ext>
+            </a:extLst>
+          </p:cNvPr>
+          <p:cNvSpPr/>
+          <p:nvPr/>
+        </p:nvSpPr>
+        <p:spPr>
+          <a:xfrm>
+            <a:off x="2024278" y="1345650"/>
+            <a:ext cx="1099868" cy="396044"/>
+          </a:xfrm>
+          <a:prstGeom prst="roundRect">
+            <a:avLst>
+              <a:gd name="adj" fmla="val 7242"/>
+            </a:avLst>
+          </a:prstGeom>
+          <a:solidFill>
+            <a:schemeClr val="bg1">
+              <a:lumMod val="95000"/>
+            </a:schemeClr>
+          </a:solidFill>
+          <a:ln w="12700"/>
+        </p:spPr>
+        <p:style>
+          <a:lnRef idx="2">
+            <a:schemeClr val="dk1"/>
+          </a:lnRef>
+          <a:fillRef idx="1">
+            <a:schemeClr val="lt1"/>
+          </a:fillRef>
+          <a:effectRef idx="0">
+            <a:schemeClr val="dk1"/>
+          </a:effectRef>
+          <a:fontRef idx="minor">
+            <a:schemeClr val="dk1"/>
+          </a:fontRef>
+        </p:style>
+        <p:txBody>
+          <a:bodyPr rtlCol="0" anchor="ctr"/>
+          <a:lstStyle/>
+          <a:p>
+            <a:pPr algn="ctr"/>
+            <a:r>
+              <a:rPr lang="en-US" altLang="ko-KR" sz="1000"/>
+              <a:t>/dev/nvidia1</a:t>
+            </a:r>
+            <a:endParaRPr lang="en-US" altLang="ko-KR" sz="1000" dirty="0"/>
+          </a:p>
+        </p:txBody>
+      </p:sp>
+      <p:sp>
+        <p:nvSpPr>
+          <p:cNvPr id="53" name="사각형: 둥근 모서리 114">
+            <a:extLst>
+              <a:ext uri="{FF2B5EF4-FFF2-40B4-BE49-F238E27FC236}">
+                <a16:creationId xmlns:a16="http://schemas.microsoft.com/office/drawing/2014/main" id="{1B1E7317-CD60-5008-9179-9A5631A47234}"/>
+              </a:ext>
+            </a:extLst>
+          </p:cNvPr>
+          <p:cNvSpPr/>
+          <p:nvPr/>
+        </p:nvSpPr>
+        <p:spPr>
+          <a:xfrm>
+            <a:off x="822678" y="859596"/>
+            <a:ext cx="2301467" cy="396044"/>
+          </a:xfrm>
+          <a:prstGeom prst="roundRect">
+            <a:avLst>
+              <a:gd name="adj" fmla="val 7242"/>
+            </a:avLst>
+          </a:prstGeom>
+          <a:solidFill>
+            <a:schemeClr val="bg2">
+              <a:lumMod val="90000"/>
+            </a:schemeClr>
+          </a:solidFill>
+          <a:ln w="12700"/>
+        </p:spPr>
+        <p:style>
+          <a:lnRef idx="2">
+            <a:schemeClr val="dk1"/>
+          </a:lnRef>
+          <a:fillRef idx="1">
+            <a:schemeClr val="lt1"/>
+          </a:fillRef>
+          <a:effectRef idx="0">
+            <a:schemeClr val="dk1"/>
+          </a:effectRef>
+          <a:fontRef idx="minor">
+            <a:schemeClr val="dk1"/>
+          </a:fontRef>
+        </p:style>
+        <p:txBody>
+          <a:bodyPr rtlCol="0" anchor="ctr"/>
+          <a:lstStyle/>
+          <a:p>
+            <a:pPr algn="ctr"/>
+            <a:r>
+              <a:rPr lang="en-US" altLang="ko-KR" sz="1000"/>
+              <a:t>NVIDIA CUDA Lib/Toolkit</a:t>
+            </a:r>
+            <a:endParaRPr lang="en-US" altLang="ko-KR" sz="1000" dirty="0"/>
+          </a:p>
+        </p:txBody>
+      </p:sp>
+      <p:sp>
+        <p:nvSpPr>
+          <p:cNvPr id="54" name="사각형: 둥근 모서리 114">
+            <a:extLst>
+              <a:ext uri="{FF2B5EF4-FFF2-40B4-BE49-F238E27FC236}">
+                <a16:creationId xmlns:a16="http://schemas.microsoft.com/office/drawing/2014/main" id="{10043FEE-E23C-35BF-1858-6BADDDFA64C5}"/>
+              </a:ext>
+            </a:extLst>
+          </p:cNvPr>
+          <p:cNvSpPr/>
+          <p:nvPr/>
+        </p:nvSpPr>
+        <p:spPr>
+          <a:xfrm>
+            <a:off x="3346476" y="106029"/>
+            <a:ext cx="3674596" cy="1717824"/>
+          </a:xfrm>
+          <a:prstGeom prst="roundRect">
+            <a:avLst>
+              <a:gd name="adj" fmla="val 4028"/>
+            </a:avLst>
+          </a:prstGeom>
+          <a:ln w="12700"/>
+        </p:spPr>
+        <p:style>
+          <a:lnRef idx="2">
+            <a:schemeClr val="dk1"/>
+          </a:lnRef>
+          <a:fillRef idx="1">
+            <a:schemeClr val="lt1"/>
+          </a:fillRef>
+          <a:effectRef idx="0">
+            <a:schemeClr val="dk1"/>
+          </a:effectRef>
+          <a:fontRef idx="minor">
+            <a:schemeClr val="dk1"/>
+          </a:fontRef>
+        </p:style>
+        <p:txBody>
+          <a:bodyPr rtlCol="0" anchor="t"/>
+          <a:lstStyle/>
+          <a:p>
+            <a:pPr algn="ctr"/>
+            <a:r>
+              <a:rPr lang="en-US" altLang="ko-KR" sz="1000" b="1"/>
+              <a:t>Container B</a:t>
+            </a:r>
+            <a:endParaRPr lang="ko-KR" altLang="en-US" sz="1000" b="1" dirty="0">
+              <a:solidFill>
+                <a:schemeClr val="accent2">
+                  <a:lumMod val="75000"/>
+                </a:schemeClr>
+              </a:solidFill>
+            </a:endParaRPr>
+          </a:p>
+        </p:txBody>
+      </p:sp>
+      <p:sp>
+        <p:nvSpPr>
+          <p:cNvPr id="55" name="사각형: 둥근 모서리 114">
+            <a:extLst>
+              <a:ext uri="{FF2B5EF4-FFF2-40B4-BE49-F238E27FC236}">
+                <a16:creationId xmlns:a16="http://schemas.microsoft.com/office/drawing/2014/main" id="{E13B8AD4-E810-DF4E-C9A7-6A146565EF13}"/>
+              </a:ext>
+            </a:extLst>
+          </p:cNvPr>
+          <p:cNvSpPr/>
+          <p:nvPr/>
+        </p:nvSpPr>
+        <p:spPr>
+          <a:xfrm>
+            <a:off x="3434210" y="1339987"/>
+            <a:ext cx="1099999" cy="396044"/>
+          </a:xfrm>
+          <a:prstGeom prst="roundRect">
+            <a:avLst>
+              <a:gd name="adj" fmla="val 7242"/>
+            </a:avLst>
+          </a:prstGeom>
+          <a:solidFill>
+            <a:schemeClr val="bg1">
+              <a:lumMod val="95000"/>
+            </a:schemeClr>
+          </a:solidFill>
+          <a:ln w="12700"/>
+        </p:spPr>
+        <p:style>
+          <a:lnRef idx="2">
+            <a:schemeClr val="dk1"/>
+          </a:lnRef>
+          <a:fillRef idx="1">
+            <a:schemeClr val="lt1"/>
+          </a:fillRef>
+          <a:effectRef idx="0">
+            <a:schemeClr val="dk1"/>
+          </a:effectRef>
+          <a:fontRef idx="minor">
+            <a:schemeClr val="dk1"/>
+          </a:fontRef>
+        </p:style>
+        <p:txBody>
+          <a:bodyPr rtlCol="0" anchor="ctr"/>
+          <a:lstStyle/>
+          <a:p>
+            <a:pPr algn="ctr"/>
+            <a:r>
+              <a:rPr lang="en-US" altLang="ko-KR" sz="1000"/>
+              <a:t>/dev/nvidia0</a:t>
+            </a:r>
+            <a:endParaRPr lang="en-US" altLang="ko-KR" sz="1000" dirty="0"/>
+          </a:p>
+        </p:txBody>
+      </p:sp>
+      <p:sp>
+        <p:nvSpPr>
+          <p:cNvPr id="56" name="사각형: 둥근 모서리 114">
+            <a:extLst>
+              <a:ext uri="{FF2B5EF4-FFF2-40B4-BE49-F238E27FC236}">
+                <a16:creationId xmlns:a16="http://schemas.microsoft.com/office/drawing/2014/main" id="{1CB1F2AA-DC81-E2C1-7A13-B84199E7846D}"/>
+              </a:ext>
+            </a:extLst>
+          </p:cNvPr>
+          <p:cNvSpPr/>
+          <p:nvPr/>
+        </p:nvSpPr>
+        <p:spPr>
+          <a:xfrm>
+            <a:off x="4635810" y="1339987"/>
+            <a:ext cx="1099868" cy="396044"/>
+          </a:xfrm>
+          <a:prstGeom prst="roundRect">
+            <a:avLst>
+              <a:gd name="adj" fmla="val 7242"/>
+            </a:avLst>
+          </a:prstGeom>
+          <a:solidFill>
+            <a:schemeClr val="bg1">
+              <a:lumMod val="95000"/>
+            </a:schemeClr>
+          </a:solidFill>
+          <a:ln w="12700"/>
+        </p:spPr>
+        <p:style>
+          <a:lnRef idx="2">
+            <a:schemeClr val="dk1"/>
+          </a:lnRef>
+          <a:fillRef idx="1">
+            <a:schemeClr val="lt1"/>
+          </a:fillRef>
+          <a:effectRef idx="0">
+            <a:schemeClr val="dk1"/>
+          </a:effectRef>
+          <a:fontRef idx="minor">
+            <a:schemeClr val="dk1"/>
+          </a:fontRef>
+        </p:style>
+        <p:txBody>
+          <a:bodyPr rtlCol="0" anchor="ctr"/>
+          <a:lstStyle/>
+          <a:p>
+            <a:pPr algn="ctr"/>
+            <a:r>
+              <a:rPr lang="en-US" altLang="ko-KR" sz="1000"/>
+              <a:t>/dev/nvidia2</a:t>
+            </a:r>
+            <a:endParaRPr lang="en-US" altLang="ko-KR" sz="1000" dirty="0"/>
+          </a:p>
+        </p:txBody>
+      </p:sp>
+      <p:sp>
+        <p:nvSpPr>
+          <p:cNvPr id="57" name="사각형: 둥근 모서리 114">
+            <a:extLst>
+              <a:ext uri="{FF2B5EF4-FFF2-40B4-BE49-F238E27FC236}">
+                <a16:creationId xmlns:a16="http://schemas.microsoft.com/office/drawing/2014/main" id="{FE234310-EA87-B58A-F8CE-9180E6935EBD}"/>
+              </a:ext>
+            </a:extLst>
+          </p:cNvPr>
+          <p:cNvSpPr/>
+          <p:nvPr/>
+        </p:nvSpPr>
+        <p:spPr>
+          <a:xfrm>
+            <a:off x="3434210" y="853933"/>
+            <a:ext cx="3498895" cy="396044"/>
+          </a:xfrm>
+          <a:prstGeom prst="roundRect">
+            <a:avLst>
+              <a:gd name="adj" fmla="val 7242"/>
+            </a:avLst>
+          </a:prstGeom>
+          <a:solidFill>
+            <a:schemeClr val="bg2">
+              <a:lumMod val="90000"/>
+            </a:schemeClr>
+          </a:solidFill>
+          <a:ln w="12700"/>
+        </p:spPr>
+        <p:style>
+          <a:lnRef idx="2">
+            <a:schemeClr val="dk1"/>
+          </a:lnRef>
+          <a:fillRef idx="1">
+            <a:schemeClr val="lt1"/>
+          </a:fillRef>
+          <a:effectRef idx="0">
+            <a:schemeClr val="dk1"/>
+          </a:effectRef>
+          <a:fontRef idx="minor">
+            <a:schemeClr val="dk1"/>
+          </a:fontRef>
+        </p:style>
+        <p:txBody>
+          <a:bodyPr rtlCol="0" anchor="ctr"/>
+          <a:lstStyle/>
+          <a:p>
+            <a:pPr algn="ctr"/>
+            <a:r>
+              <a:rPr lang="en-US" altLang="ko-KR" sz="1000"/>
+              <a:t>NVIDIA CUDA Lib/Toolkit</a:t>
+            </a:r>
+            <a:endParaRPr lang="en-US" altLang="ko-KR" sz="1000" dirty="0"/>
+          </a:p>
+        </p:txBody>
+      </p:sp>
+      <p:sp>
+        <p:nvSpPr>
+          <p:cNvPr id="85" name="사각형: 둥근 모서리 114">
+            <a:extLst>
+              <a:ext uri="{FF2B5EF4-FFF2-40B4-BE49-F238E27FC236}">
+                <a16:creationId xmlns:a16="http://schemas.microsoft.com/office/drawing/2014/main" id="{E7C861E8-6B20-F678-A387-14468B64DDD0}"/>
+              </a:ext>
+            </a:extLst>
+          </p:cNvPr>
+          <p:cNvSpPr/>
+          <p:nvPr/>
+        </p:nvSpPr>
+        <p:spPr>
+          <a:xfrm>
+            <a:off x="5833237" y="1339987"/>
+            <a:ext cx="1099868" cy="396044"/>
+          </a:xfrm>
+          <a:prstGeom prst="roundRect">
+            <a:avLst>
+              <a:gd name="adj" fmla="val 7242"/>
+            </a:avLst>
+          </a:prstGeom>
+          <a:solidFill>
+            <a:schemeClr val="bg1">
+              <a:lumMod val="95000"/>
+            </a:schemeClr>
+          </a:solidFill>
+          <a:ln w="12700"/>
+        </p:spPr>
+        <p:style>
+          <a:lnRef idx="2">
+            <a:schemeClr val="dk1"/>
+          </a:lnRef>
+          <a:fillRef idx="1">
+            <a:schemeClr val="lt1"/>
+          </a:fillRef>
+          <a:effectRef idx="0">
+            <a:schemeClr val="dk1"/>
+          </a:effectRef>
+          <a:fontRef idx="minor">
+            <a:schemeClr val="dk1"/>
+          </a:fontRef>
+        </p:style>
+        <p:txBody>
+          <a:bodyPr rtlCol="0" anchor="ctr"/>
+          <a:lstStyle/>
+          <a:p>
+            <a:pPr algn="ctr"/>
+            <a:r>
+              <a:rPr lang="en-US" altLang="ko-KR" sz="1000"/>
+              <a:t>/dev/nvidia3</a:t>
+            </a:r>
+            <a:endParaRPr lang="en-US" altLang="ko-KR" sz="1000" dirty="0"/>
+          </a:p>
+        </p:txBody>
+      </p:sp>
+      <p:sp>
+        <p:nvSpPr>
+          <p:cNvPr id="72" name="사각형: 둥근 모서리 114">
+            <a:extLst>
+              <a:ext uri="{FF2B5EF4-FFF2-40B4-BE49-F238E27FC236}">
+                <a16:creationId xmlns:a16="http://schemas.microsoft.com/office/drawing/2014/main" id="{A40CEE21-4126-4EA9-D005-8D6AA05FC3C8}"/>
+              </a:ext>
+            </a:extLst>
+          </p:cNvPr>
+          <p:cNvSpPr/>
+          <p:nvPr/>
+        </p:nvSpPr>
+        <p:spPr>
+          <a:xfrm>
+            <a:off x="7164288" y="106029"/>
+            <a:ext cx="1487816" cy="1717824"/>
+          </a:xfrm>
+          <a:prstGeom prst="roundRect">
+            <a:avLst>
+              <a:gd name="adj" fmla="val 4159"/>
+            </a:avLst>
+          </a:prstGeom>
+          <a:ln w="12700"/>
+        </p:spPr>
+        <p:style>
+          <a:lnRef idx="2">
+            <a:schemeClr val="dk1"/>
+          </a:lnRef>
+          <a:fillRef idx="1">
+            <a:schemeClr val="lt1"/>
+          </a:fillRef>
+          <a:effectRef idx="0">
+            <a:schemeClr val="dk1"/>
+          </a:effectRef>
+          <a:fontRef idx="minor">
+            <a:schemeClr val="dk1"/>
+          </a:fontRef>
+        </p:style>
+        <p:txBody>
+          <a:bodyPr rtlCol="0" anchor="t"/>
+          <a:lstStyle/>
+          <a:p>
+            <a:pPr algn="ctr"/>
+            <a:r>
+              <a:rPr lang="en-US" altLang="ko-KR" sz="1000" b="1"/>
+              <a:t>Container C</a:t>
+            </a:r>
+            <a:endParaRPr lang="ko-KR" altLang="en-US" sz="1000" b="1" dirty="0">
+              <a:solidFill>
+                <a:schemeClr val="accent2">
+                  <a:lumMod val="75000"/>
+                </a:schemeClr>
+              </a:solidFill>
+            </a:endParaRPr>
+          </a:p>
+        </p:txBody>
+      </p:sp>
+      <p:sp>
+        <p:nvSpPr>
+          <p:cNvPr id="74" name="사각형: 둥근 모서리 114">
+            <a:extLst>
+              <a:ext uri="{FF2B5EF4-FFF2-40B4-BE49-F238E27FC236}">
+                <a16:creationId xmlns:a16="http://schemas.microsoft.com/office/drawing/2014/main" id="{75050760-962B-EFA9-329D-D87ACB628E2E}"/>
+              </a:ext>
+            </a:extLst>
+          </p:cNvPr>
+          <p:cNvSpPr/>
+          <p:nvPr/>
+        </p:nvSpPr>
+        <p:spPr>
+          <a:xfrm>
+            <a:off x="7244475" y="1339987"/>
+            <a:ext cx="1321799" cy="396044"/>
+          </a:xfrm>
+          <a:prstGeom prst="roundRect">
+            <a:avLst>
+              <a:gd name="adj" fmla="val 7242"/>
+            </a:avLst>
+          </a:prstGeom>
+          <a:solidFill>
+            <a:schemeClr val="bg1">
+              <a:lumMod val="95000"/>
+            </a:schemeClr>
+          </a:solidFill>
+          <a:ln w="12700"/>
+        </p:spPr>
+        <p:style>
+          <a:lnRef idx="2">
+            <a:schemeClr val="dk1"/>
+          </a:lnRef>
+          <a:fillRef idx="1">
+            <a:schemeClr val="lt1"/>
+          </a:fillRef>
+          <a:effectRef idx="0">
+            <a:schemeClr val="dk1"/>
+          </a:effectRef>
+          <a:fontRef idx="minor">
+            <a:schemeClr val="dk1"/>
+          </a:fontRef>
+        </p:style>
+        <p:txBody>
+          <a:bodyPr rtlCol="0" anchor="ctr"/>
+          <a:lstStyle/>
+          <a:p>
+            <a:pPr algn="ctr"/>
+            <a:r>
+              <a:rPr lang="en-US" altLang="ko-KR" sz="1000"/>
+              <a:t>/dev/nvidia3</a:t>
+            </a:r>
+            <a:endParaRPr lang="en-US" altLang="ko-KR" sz="1000" dirty="0"/>
+          </a:p>
+        </p:txBody>
+      </p:sp>
+      <p:sp>
+        <p:nvSpPr>
+          <p:cNvPr id="75" name="사각형: 둥근 모서리 114">
+            <a:extLst>
+              <a:ext uri="{FF2B5EF4-FFF2-40B4-BE49-F238E27FC236}">
+                <a16:creationId xmlns:a16="http://schemas.microsoft.com/office/drawing/2014/main" id="{C7E78AFF-D068-E06B-33BF-D4132D988816}"/>
+              </a:ext>
+            </a:extLst>
+          </p:cNvPr>
+          <p:cNvSpPr/>
+          <p:nvPr/>
+        </p:nvSpPr>
+        <p:spPr>
+          <a:xfrm>
+            <a:off x="7244475" y="853933"/>
+            <a:ext cx="1321798" cy="396044"/>
+          </a:xfrm>
+          <a:prstGeom prst="roundRect">
+            <a:avLst>
+              <a:gd name="adj" fmla="val 7242"/>
+            </a:avLst>
+          </a:prstGeom>
+          <a:solidFill>
+            <a:schemeClr val="bg2">
+              <a:lumMod val="90000"/>
+            </a:schemeClr>
+          </a:solidFill>
+          <a:ln w="12700"/>
+        </p:spPr>
+        <p:style>
+          <a:lnRef idx="2">
+            <a:schemeClr val="dk1"/>
+          </a:lnRef>
+          <a:fillRef idx="1">
+            <a:schemeClr val="lt1"/>
+          </a:fillRef>
+          <a:effectRef idx="0">
+            <a:schemeClr val="dk1"/>
+          </a:effectRef>
+          <a:fontRef idx="minor">
+            <a:schemeClr val="dk1"/>
+          </a:fontRef>
+        </p:style>
+        <p:txBody>
+          <a:bodyPr rtlCol="0" anchor="ctr"/>
+          <a:lstStyle/>
+          <a:p>
+            <a:pPr algn="ctr"/>
+            <a:r>
+              <a:rPr lang="en-US" altLang="ko-KR" sz="1000"/>
+              <a:t>NVIDIA CUDA Lib/Toolkit</a:t>
+            </a:r>
+            <a:endParaRPr lang="en-US" altLang="ko-KR" sz="1000" dirty="0"/>
+          </a:p>
+        </p:txBody>
+      </p:sp>
+      <p:sp>
+        <p:nvSpPr>
+          <p:cNvPr id="35" name="사각형: 둥근 모서리 114">
+            <a:extLst>
+              <a:ext uri="{FF2B5EF4-FFF2-40B4-BE49-F238E27FC236}">
+                <a16:creationId xmlns:a16="http://schemas.microsoft.com/office/drawing/2014/main" id="{B4917971-4A59-EF10-9161-86DDC9778D84}"/>
+              </a:ext>
+            </a:extLst>
+          </p:cNvPr>
+          <p:cNvSpPr/>
+          <p:nvPr/>
+        </p:nvSpPr>
+        <p:spPr>
+          <a:xfrm>
+            <a:off x="1692325" y="3345284"/>
+            <a:ext cx="5759996" cy="396044"/>
+          </a:xfrm>
+          <a:prstGeom prst="roundRect">
+            <a:avLst>
+              <a:gd name="adj" fmla="val 7242"/>
+            </a:avLst>
+          </a:prstGeom>
+          <a:ln w="12700"/>
+        </p:spPr>
+        <p:style>
+          <a:lnRef idx="2">
+            <a:schemeClr val="dk1"/>
+          </a:lnRef>
+          <a:fillRef idx="1">
+            <a:schemeClr val="lt1"/>
+          </a:fillRef>
+          <a:effectRef idx="0">
+            <a:schemeClr val="dk1"/>
+          </a:effectRef>
+          <a:fontRef idx="minor">
+            <a:schemeClr val="dk1"/>
+          </a:fontRef>
+        </p:style>
+        <p:txBody>
+          <a:bodyPr rtlCol="0" anchor="ctr"/>
+          <a:lstStyle/>
+          <a:p>
+            <a:pPr algn="ctr"/>
+            <a:r>
+              <a:rPr lang="en-US" altLang="ko-KR" sz="1000"/>
+              <a:t>NVIDIA GPU Device Driver</a:t>
+            </a:r>
+            <a:endParaRPr lang="en-US" altLang="ko-KR" sz="1000" dirty="0"/>
+          </a:p>
+        </p:txBody>
+      </p:sp>
+      <p:sp>
+        <p:nvSpPr>
+          <p:cNvPr id="34" name="사각형: 둥근 모서리 114">
+            <a:extLst>
+              <a:ext uri="{FF2B5EF4-FFF2-40B4-BE49-F238E27FC236}">
+                <a16:creationId xmlns:a16="http://schemas.microsoft.com/office/drawing/2014/main" id="{EFF8982B-63D5-E17D-1B32-242B369711D5}"/>
+              </a:ext>
+            </a:extLst>
+          </p:cNvPr>
+          <p:cNvSpPr/>
+          <p:nvPr/>
+        </p:nvSpPr>
+        <p:spPr>
+          <a:xfrm>
+            <a:off x="2141132" y="2495911"/>
+            <a:ext cx="1082148" cy="396044"/>
+          </a:xfrm>
+          <a:prstGeom prst="roundRect">
+            <a:avLst>
+              <a:gd name="adj" fmla="val 13792"/>
+            </a:avLst>
+          </a:prstGeom>
+          <a:solidFill>
+            <a:schemeClr val="bg1">
+              <a:lumMod val="95000"/>
+            </a:schemeClr>
+          </a:solidFill>
+          <a:ln w="12700"/>
+        </p:spPr>
+        <p:style>
+          <a:lnRef idx="2">
+            <a:schemeClr val="dk1"/>
+          </a:lnRef>
+          <a:fillRef idx="1">
+            <a:schemeClr val="lt1"/>
+          </a:fillRef>
+          <a:effectRef idx="0">
+            <a:schemeClr val="dk1"/>
+          </a:effectRef>
+          <a:fontRef idx="minor">
+            <a:schemeClr val="dk1"/>
+          </a:fontRef>
+        </p:style>
+        <p:txBody>
+          <a:bodyPr rtlCol="0" anchor="ctr"/>
+          <a:lstStyle/>
+          <a:p>
+            <a:pPr algn="ctr"/>
+            <a:r>
+              <a:rPr lang="en-US" altLang="ko-KR" sz="1000"/>
+              <a:t>/dev/nvidia0</a:t>
+            </a:r>
+            <a:endParaRPr lang="en-US" altLang="ko-KR" sz="1000" dirty="0"/>
+          </a:p>
+        </p:txBody>
+      </p:sp>
+      <p:sp>
+        <p:nvSpPr>
+          <p:cNvPr id="44" name="사각형: 둥근 모서리 114">
+            <a:extLst>
+              <a:ext uri="{FF2B5EF4-FFF2-40B4-BE49-F238E27FC236}">
+                <a16:creationId xmlns:a16="http://schemas.microsoft.com/office/drawing/2014/main" id="{6B73B028-701B-7DB2-D934-C4FBFEEEF43E}"/>
+              </a:ext>
+            </a:extLst>
+          </p:cNvPr>
+          <p:cNvSpPr/>
+          <p:nvPr/>
+        </p:nvSpPr>
+        <p:spPr>
+          <a:xfrm>
+            <a:off x="3405927" y="2495911"/>
+            <a:ext cx="1082148" cy="396044"/>
+          </a:xfrm>
+          <a:prstGeom prst="roundRect">
+            <a:avLst>
+              <a:gd name="adj" fmla="val 13792"/>
+            </a:avLst>
+          </a:prstGeom>
+          <a:solidFill>
+            <a:schemeClr val="bg1">
+              <a:lumMod val="95000"/>
+            </a:schemeClr>
+          </a:solidFill>
+          <a:ln w="12700"/>
+        </p:spPr>
+        <p:style>
+          <a:lnRef idx="2">
+            <a:schemeClr val="dk1"/>
+          </a:lnRef>
+          <a:fillRef idx="1">
+            <a:schemeClr val="lt1"/>
+          </a:fillRef>
+          <a:effectRef idx="0">
+            <a:schemeClr val="dk1"/>
+          </a:effectRef>
+          <a:fontRef idx="minor">
+            <a:schemeClr val="dk1"/>
+          </a:fontRef>
+        </p:style>
+        <p:txBody>
+          <a:bodyPr rtlCol="0" anchor="ctr"/>
+          <a:lstStyle/>
+          <a:p>
+            <a:pPr algn="ctr"/>
+            <a:r>
+              <a:rPr lang="en-US" altLang="ko-KR" sz="1000"/>
+              <a:t>/dev/nvidia1</a:t>
+            </a:r>
+            <a:endParaRPr lang="en-US" altLang="ko-KR" sz="1000" dirty="0"/>
+          </a:p>
+        </p:txBody>
+      </p:sp>
+      <p:sp>
+        <p:nvSpPr>
+          <p:cNvPr id="45" name="사각형: 둥근 모서리 114">
+            <a:extLst>
+              <a:ext uri="{FF2B5EF4-FFF2-40B4-BE49-F238E27FC236}">
+                <a16:creationId xmlns:a16="http://schemas.microsoft.com/office/drawing/2014/main" id="{F44321F7-0BF8-67DA-8623-45B172C3D60B}"/>
+              </a:ext>
+            </a:extLst>
+          </p:cNvPr>
+          <p:cNvSpPr/>
+          <p:nvPr/>
+        </p:nvSpPr>
+        <p:spPr>
+          <a:xfrm>
+            <a:off x="4665905" y="2495911"/>
+            <a:ext cx="1082148" cy="396044"/>
+          </a:xfrm>
+          <a:prstGeom prst="roundRect">
+            <a:avLst>
+              <a:gd name="adj" fmla="val 13792"/>
+            </a:avLst>
+          </a:prstGeom>
+          <a:solidFill>
+            <a:schemeClr val="bg1">
+              <a:lumMod val="95000"/>
+            </a:schemeClr>
+          </a:solidFill>
+          <a:ln w="12700"/>
+        </p:spPr>
+        <p:style>
+          <a:lnRef idx="2">
+            <a:schemeClr val="dk1"/>
+          </a:lnRef>
+          <a:fillRef idx="1">
+            <a:schemeClr val="lt1"/>
+          </a:fillRef>
+          <a:effectRef idx="0">
+            <a:schemeClr val="dk1"/>
+          </a:effectRef>
+          <a:fontRef idx="minor">
+            <a:schemeClr val="dk1"/>
+          </a:fontRef>
+        </p:style>
+        <p:txBody>
+          <a:bodyPr rtlCol="0" anchor="ctr"/>
+          <a:lstStyle/>
+          <a:p>
+            <a:pPr algn="ctr"/>
+            <a:r>
+              <a:rPr lang="en-US" altLang="ko-KR" sz="1000"/>
+              <a:t>/dev/nvidia2</a:t>
+            </a:r>
+            <a:endParaRPr lang="en-US" altLang="ko-KR" sz="1000" dirty="0"/>
+          </a:p>
+        </p:txBody>
+      </p:sp>
+      <p:sp>
+        <p:nvSpPr>
+          <p:cNvPr id="46" name="사각형: 둥근 모서리 114">
+            <a:extLst>
+              <a:ext uri="{FF2B5EF4-FFF2-40B4-BE49-F238E27FC236}">
+                <a16:creationId xmlns:a16="http://schemas.microsoft.com/office/drawing/2014/main" id="{8C01386A-F5AB-38FF-A04F-2904BDE292F2}"/>
+              </a:ext>
+            </a:extLst>
+          </p:cNvPr>
+          <p:cNvSpPr/>
+          <p:nvPr/>
+        </p:nvSpPr>
+        <p:spPr>
+          <a:xfrm>
+            <a:off x="5925884" y="2495911"/>
+            <a:ext cx="1082148" cy="396044"/>
+          </a:xfrm>
+          <a:prstGeom prst="roundRect">
+            <a:avLst>
+              <a:gd name="adj" fmla="val 13792"/>
+            </a:avLst>
+          </a:prstGeom>
+          <a:solidFill>
+            <a:schemeClr val="bg1">
+              <a:lumMod val="95000"/>
+            </a:schemeClr>
+          </a:solidFill>
+          <a:ln w="12700"/>
+        </p:spPr>
+        <p:style>
+          <a:lnRef idx="2">
+            <a:schemeClr val="dk1"/>
+          </a:lnRef>
+          <a:fillRef idx="1">
+            <a:schemeClr val="lt1"/>
+          </a:fillRef>
+          <a:effectRef idx="0">
+            <a:schemeClr val="dk1"/>
+          </a:effectRef>
+          <a:fontRef idx="minor">
+            <a:schemeClr val="dk1"/>
+          </a:fontRef>
+        </p:style>
+        <p:txBody>
+          <a:bodyPr rtlCol="0" anchor="ctr"/>
+          <a:lstStyle/>
+          <a:p>
+            <a:pPr algn="ctr"/>
+            <a:r>
+              <a:rPr lang="en-US" altLang="ko-KR" sz="1000"/>
+              <a:t>/dev/nvidia3</a:t>
+            </a:r>
+            <a:endParaRPr lang="en-US" altLang="ko-KR" sz="1000" dirty="0"/>
           </a:p>
         </p:txBody>
       </p:sp>
       <p:cxnSp>
         <p:nvCxnSpPr>
-          <p:cNvPr id="9" name="직선 화살표 연결선 8">
-            <a:extLst>
-              <a:ext uri="{FF2B5EF4-FFF2-40B4-BE49-F238E27FC236}">
-                <a16:creationId xmlns:a16="http://schemas.microsoft.com/office/drawing/2014/main" id="{E2C29F7C-E831-83D2-6BE9-5A7252F4071B}"/>
+          <p:cNvPr id="52" name="직선 연결선 20">
+            <a:extLst>
+              <a:ext uri="{FF2B5EF4-FFF2-40B4-BE49-F238E27FC236}">
+                <a16:creationId xmlns:a16="http://schemas.microsoft.com/office/drawing/2014/main" id="{F2AA228D-B388-2E7C-D3A6-826D9ABBF7FD}"/>
               </a:ext>
             </a:extLst>
           </p:cNvPr>
           <p:cNvCxnSpPr>
             <a:cxnSpLocks/>
-            <a:stCxn id="7" idx="2"/>
-            <a:endCxn id="11" idx="0"/>
+            <a:stCxn id="44" idx="2"/>
+            <a:endCxn id="15" idx="0"/>
           </p:cNvCxnSpPr>
           <p:nvPr/>
         </p:nvCxnSpPr>
         <p:spPr>
-          <a:xfrm>
-            <a:off x="4644008" y="988967"/>
-            <a:ext cx="0" cy="222871"/>
-          </a:xfrm>
-          <a:prstGeom prst="straightConnector1">
+          <a:xfrm flipH="1">
+            <a:off x="3944593" y="2891955"/>
+            <a:ext cx="2408" cy="1281421"/>
+          </a:xfrm>
+          <a:prstGeom prst="line">
             <a:avLst/>
           </a:prstGeom>
           <a:ln w="12700">
             <a:solidFill>
               <a:schemeClr val="tx1"/>
             </a:solidFill>
-            <a:headEnd type="none" w="med" len="med"/>
-            <a:tailEnd type="triangle" w="med" len="med"/>
+            <a:prstDash val="dash"/>
           </a:ln>
         </p:spPr>
         <p:style>
@@ -4864,10 +5996,10 @@
       </p:cxnSp>
       <p:sp>
         <p:nvSpPr>
-          <p:cNvPr id="22" name="사각형: 둥근 모서리 114">
-            <a:extLst>
-              <a:ext uri="{FF2B5EF4-FFF2-40B4-BE49-F238E27FC236}">
-                <a16:creationId xmlns:a16="http://schemas.microsoft.com/office/drawing/2014/main" id="{11FE6D81-54D3-433F-201E-86F85E0C5348}"/>
+          <p:cNvPr id="104" name="사각형: 둥근 모서리 114">
+            <a:extLst>
+              <a:ext uri="{FF2B5EF4-FFF2-40B4-BE49-F238E27FC236}">
+                <a16:creationId xmlns:a16="http://schemas.microsoft.com/office/drawing/2014/main" id="{504E7774-3EBD-0C5F-78E0-CC156021027E}"/>
               </a:ext>
             </a:extLst>
           </p:cNvPr>
@@ -4876,18 +6008,20 @@
         </p:nvSpPr>
         <p:spPr>
           <a:xfrm>
-            <a:off x="3278436" y="4098308"/>
-            <a:ext cx="2731142" cy="281881"/>
+            <a:off x="2141132" y="2008269"/>
+            <a:ext cx="4862083" cy="396044"/>
           </a:xfrm>
           <a:prstGeom prst="roundRect">
             <a:avLst>
-              <a:gd name="adj" fmla="val 10304"/>
+              <a:gd name="adj" fmla="val 17067"/>
             </a:avLst>
           </a:prstGeom>
-          <a:noFill/>
-          <a:ln>
-            <a:noFill/>
-          </a:ln>
+          <a:solidFill>
+            <a:schemeClr val="bg2">
+              <a:lumMod val="90000"/>
+            </a:schemeClr>
+          </a:solidFill>
+          <a:ln w="12700"/>
         </p:spPr>
         <p:style>
           <a:lnRef idx="2">
@@ -4909,17 +6043,777 @@
           <a:p>
             <a:pPr algn="ctr"/>
             <a:r>
-              <a:rPr lang="en-US" altLang="ko-KR" sz="1200"/>
-              <a:t>OCI Runtime Spec</a:t>
-            </a:r>
-            <a:endParaRPr lang="en-US" altLang="ko-KR" sz="1200" dirty="0"/>
+              <a:rPr lang="en-US" altLang="ko-KR" sz="1000"/>
+              <a:t>NVIDIA CUDA Lib/Toolkit</a:t>
+            </a:r>
+            <a:endParaRPr lang="en-US" altLang="ko-KR" sz="1000" dirty="0"/>
+          </a:p>
+        </p:txBody>
+      </p:sp>
+      <p:cxnSp>
+        <p:nvCxnSpPr>
+          <p:cNvPr id="117" name="직선 연결선 17">
+            <a:extLst>
+              <a:ext uri="{FF2B5EF4-FFF2-40B4-BE49-F238E27FC236}">
+                <a16:creationId xmlns:a16="http://schemas.microsoft.com/office/drawing/2014/main" id="{C42F2A3D-D551-E411-0433-B0F62EB9365D}"/>
+              </a:ext>
+            </a:extLst>
+          </p:cNvPr>
+          <p:cNvCxnSpPr>
+            <a:cxnSpLocks/>
+            <a:stCxn id="34" idx="2"/>
+            <a:endCxn id="14" idx="0"/>
+          </p:cNvCxnSpPr>
+          <p:nvPr/>
+        </p:nvCxnSpPr>
+        <p:spPr>
+          <a:xfrm>
+            <a:off x="2682206" y="2891955"/>
+            <a:ext cx="2408" cy="1281421"/>
+          </a:xfrm>
+          <a:prstGeom prst="line">
+            <a:avLst/>
+          </a:prstGeom>
+          <a:ln w="12700">
+            <a:solidFill>
+              <a:schemeClr val="tx1"/>
+            </a:solidFill>
+            <a:prstDash val="dash"/>
+          </a:ln>
+        </p:spPr>
+        <p:style>
+          <a:lnRef idx="1">
+            <a:schemeClr val="accent1"/>
+          </a:lnRef>
+          <a:fillRef idx="0">
+            <a:schemeClr val="accent1"/>
+          </a:fillRef>
+          <a:effectRef idx="0">
+            <a:schemeClr val="accent1"/>
+          </a:effectRef>
+          <a:fontRef idx="minor">
+            <a:schemeClr val="tx1"/>
+          </a:fontRef>
+        </p:style>
+      </p:cxnSp>
+      <p:cxnSp>
+        <p:nvCxnSpPr>
+          <p:cNvPr id="120" name="직선 연결선 17">
+            <a:extLst>
+              <a:ext uri="{FF2B5EF4-FFF2-40B4-BE49-F238E27FC236}">
+                <a16:creationId xmlns:a16="http://schemas.microsoft.com/office/drawing/2014/main" id="{D9F37173-F9DC-2211-8B64-FA5BA36ED2D5}"/>
+              </a:ext>
+            </a:extLst>
+          </p:cNvPr>
+          <p:cNvCxnSpPr>
+            <a:cxnSpLocks/>
+            <a:stCxn id="45" idx="2"/>
+            <a:endCxn id="16" idx="0"/>
+          </p:cNvCxnSpPr>
+          <p:nvPr/>
+        </p:nvCxnSpPr>
+        <p:spPr>
+          <a:xfrm flipH="1">
+            <a:off x="5204571" y="2891955"/>
+            <a:ext cx="2408" cy="1281421"/>
+          </a:xfrm>
+          <a:prstGeom prst="line">
+            <a:avLst/>
+          </a:prstGeom>
+          <a:ln w="12700">
+            <a:solidFill>
+              <a:schemeClr val="tx1"/>
+            </a:solidFill>
+            <a:prstDash val="dash"/>
+          </a:ln>
+        </p:spPr>
+        <p:style>
+          <a:lnRef idx="1">
+            <a:schemeClr val="accent1"/>
+          </a:lnRef>
+          <a:fillRef idx="0">
+            <a:schemeClr val="accent1"/>
+          </a:fillRef>
+          <a:effectRef idx="0">
+            <a:schemeClr val="accent1"/>
+          </a:effectRef>
+          <a:fontRef idx="minor">
+            <a:schemeClr val="tx1"/>
+          </a:fontRef>
+        </p:style>
+      </p:cxnSp>
+      <p:cxnSp>
+        <p:nvCxnSpPr>
+          <p:cNvPr id="123" name="직선 연결선 26">
+            <a:extLst>
+              <a:ext uri="{FF2B5EF4-FFF2-40B4-BE49-F238E27FC236}">
+                <a16:creationId xmlns:a16="http://schemas.microsoft.com/office/drawing/2014/main" id="{72AADCE9-3C6C-060F-E232-3EF5984803DA}"/>
+              </a:ext>
+            </a:extLst>
+          </p:cNvPr>
+          <p:cNvCxnSpPr>
+            <a:cxnSpLocks/>
+            <a:stCxn id="46" idx="2"/>
+            <a:endCxn id="17" idx="0"/>
+          </p:cNvCxnSpPr>
+          <p:nvPr/>
+        </p:nvCxnSpPr>
+        <p:spPr>
+          <a:xfrm flipH="1">
+            <a:off x="6464550" y="2891955"/>
+            <a:ext cx="2408" cy="1281421"/>
+          </a:xfrm>
+          <a:prstGeom prst="line">
+            <a:avLst/>
+          </a:prstGeom>
+          <a:ln w="12700">
+            <a:solidFill>
+              <a:schemeClr val="tx1"/>
+            </a:solidFill>
+            <a:prstDash val="dash"/>
+          </a:ln>
+        </p:spPr>
+        <p:style>
+          <a:lnRef idx="1">
+            <a:schemeClr val="accent1"/>
+          </a:lnRef>
+          <a:fillRef idx="0">
+            <a:schemeClr val="accent1"/>
+          </a:fillRef>
+          <a:effectRef idx="0">
+            <a:schemeClr val="accent1"/>
+          </a:effectRef>
+          <a:fontRef idx="minor">
+            <a:schemeClr val="tx1"/>
+          </a:fontRef>
+        </p:style>
+      </p:cxnSp>
+      <p:sp>
+        <p:nvSpPr>
+          <p:cNvPr id="146" name="사각형: 둥근 모서리 114">
+            <a:extLst>
+              <a:ext uri="{FF2B5EF4-FFF2-40B4-BE49-F238E27FC236}">
+                <a16:creationId xmlns:a16="http://schemas.microsoft.com/office/drawing/2014/main" id="{5F4C3AF4-DD22-0B60-383F-EC6AD421D8F6}"/>
+              </a:ext>
+            </a:extLst>
+          </p:cNvPr>
+          <p:cNvSpPr/>
+          <p:nvPr/>
+        </p:nvSpPr>
+        <p:spPr>
+          <a:xfrm>
+            <a:off x="822678" y="393358"/>
+            <a:ext cx="2301467" cy="396044"/>
+          </a:xfrm>
+          <a:prstGeom prst="roundRect">
+            <a:avLst>
+              <a:gd name="adj" fmla="val 7242"/>
+            </a:avLst>
+          </a:prstGeom>
+          <a:ln w="12700"/>
+        </p:spPr>
+        <p:style>
+          <a:lnRef idx="2">
+            <a:schemeClr val="dk1"/>
+          </a:lnRef>
+          <a:fillRef idx="1">
+            <a:schemeClr val="lt1"/>
+          </a:fillRef>
+          <a:effectRef idx="0">
+            <a:schemeClr val="dk1"/>
+          </a:effectRef>
+          <a:fontRef idx="minor">
+            <a:schemeClr val="dk1"/>
+          </a:fontRef>
+        </p:style>
+        <p:txBody>
+          <a:bodyPr rtlCol="0" anchor="ctr"/>
+          <a:lstStyle/>
+          <a:p>
+            <a:pPr algn="ctr"/>
+            <a:r>
+              <a:rPr lang="en-US" altLang="ko-KR" sz="1000"/>
+              <a:t>App with </a:t>
+            </a:r>
+          </a:p>
+          <a:p>
+            <a:pPr algn="ctr"/>
+            <a:r>
+              <a:rPr lang="en-US" altLang="ko-KR" sz="1000"/>
+              <a:t>NVIDIA_VISIBLE_DEVICES Env  </a:t>
+            </a:r>
+            <a:endParaRPr lang="en-US" altLang="ko-KR" sz="1000" dirty="0"/>
+          </a:p>
+        </p:txBody>
+      </p:sp>
+      <p:sp>
+        <p:nvSpPr>
+          <p:cNvPr id="147" name="사각형: 둥근 모서리 114">
+            <a:extLst>
+              <a:ext uri="{FF2B5EF4-FFF2-40B4-BE49-F238E27FC236}">
+                <a16:creationId xmlns:a16="http://schemas.microsoft.com/office/drawing/2014/main" id="{A16AF2D3-7795-BF33-2382-ADA2298B768A}"/>
+              </a:ext>
+            </a:extLst>
+          </p:cNvPr>
+          <p:cNvSpPr/>
+          <p:nvPr/>
+        </p:nvSpPr>
+        <p:spPr>
+          <a:xfrm>
+            <a:off x="3434211" y="393358"/>
+            <a:ext cx="3498894" cy="396044"/>
+          </a:xfrm>
+          <a:prstGeom prst="roundRect">
+            <a:avLst>
+              <a:gd name="adj" fmla="val 7242"/>
+            </a:avLst>
+          </a:prstGeom>
+          <a:ln w="12700"/>
+        </p:spPr>
+        <p:style>
+          <a:lnRef idx="2">
+            <a:schemeClr val="dk1"/>
+          </a:lnRef>
+          <a:fillRef idx="1">
+            <a:schemeClr val="lt1"/>
+          </a:fillRef>
+          <a:effectRef idx="0">
+            <a:schemeClr val="dk1"/>
+          </a:effectRef>
+          <a:fontRef idx="minor">
+            <a:schemeClr val="dk1"/>
+          </a:fontRef>
+        </p:style>
+        <p:txBody>
+          <a:bodyPr rtlCol="0" anchor="ctr"/>
+          <a:lstStyle/>
+          <a:p>
+            <a:pPr algn="ctr"/>
+            <a:r>
+              <a:rPr lang="en-US" altLang="ko-KR" sz="1000"/>
+              <a:t>App with </a:t>
+            </a:r>
+          </a:p>
+          <a:p>
+            <a:pPr algn="ctr"/>
+            <a:r>
+              <a:rPr lang="en-US" altLang="ko-KR" sz="1000"/>
+              <a:t>NVIDIA_VISIBLE_DEVICES Env  </a:t>
+            </a:r>
+            <a:endParaRPr lang="en-US" altLang="ko-KR" sz="1000" dirty="0"/>
+          </a:p>
+        </p:txBody>
+      </p:sp>
+      <p:sp>
+        <p:nvSpPr>
+          <p:cNvPr id="148" name="사각형: 둥근 모서리 114">
+            <a:extLst>
+              <a:ext uri="{FF2B5EF4-FFF2-40B4-BE49-F238E27FC236}">
+                <a16:creationId xmlns:a16="http://schemas.microsoft.com/office/drawing/2014/main" id="{E564AD90-001F-1131-35AF-1B92219AF4D3}"/>
+              </a:ext>
+            </a:extLst>
+          </p:cNvPr>
+          <p:cNvSpPr/>
+          <p:nvPr/>
+        </p:nvSpPr>
+        <p:spPr>
+          <a:xfrm>
+            <a:off x="7244474" y="393358"/>
+            <a:ext cx="1321799" cy="396044"/>
+          </a:xfrm>
+          <a:prstGeom prst="roundRect">
+            <a:avLst>
+              <a:gd name="adj" fmla="val 7242"/>
+            </a:avLst>
+          </a:prstGeom>
+          <a:ln w="12700"/>
+        </p:spPr>
+        <p:style>
+          <a:lnRef idx="2">
+            <a:schemeClr val="dk1"/>
+          </a:lnRef>
+          <a:fillRef idx="1">
+            <a:schemeClr val="lt1"/>
+          </a:fillRef>
+          <a:effectRef idx="0">
+            <a:schemeClr val="dk1"/>
+          </a:effectRef>
+          <a:fontRef idx="minor">
+            <a:schemeClr val="dk1"/>
+          </a:fontRef>
+        </p:style>
+        <p:txBody>
+          <a:bodyPr rtlCol="0" anchor="ctr"/>
+          <a:lstStyle/>
+          <a:p>
+            <a:pPr algn="ctr"/>
+            <a:r>
+              <a:rPr lang="en-US" altLang="ko-KR" sz="1000"/>
+              <a:t>App with </a:t>
+            </a:r>
+          </a:p>
+          <a:p>
+            <a:pPr algn="ctr"/>
+            <a:r>
+              <a:rPr lang="en-US" altLang="ko-KR" sz="1000"/>
+              <a:t>NVIDIA_VISIBLE_</a:t>
+            </a:r>
+            <a:br>
+              <a:rPr lang="en-US" altLang="ko-KR" sz="1000"/>
+            </a:br>
+            <a:r>
+              <a:rPr lang="en-US" altLang="ko-KR" sz="1000"/>
+              <a:t>DEVICES Env  </a:t>
+            </a:r>
+            <a:endParaRPr lang="en-US" altLang="ko-KR" sz="1000" dirty="0"/>
+          </a:p>
+        </p:txBody>
+      </p:sp>
+      <p:cxnSp>
+        <p:nvCxnSpPr>
+          <p:cNvPr id="150" name="직선 연결선 26">
+            <a:extLst>
+              <a:ext uri="{FF2B5EF4-FFF2-40B4-BE49-F238E27FC236}">
+                <a16:creationId xmlns:a16="http://schemas.microsoft.com/office/drawing/2014/main" id="{656CB95D-962A-D56E-D3C6-D95E7E41C7EE}"/>
+              </a:ext>
+            </a:extLst>
+          </p:cNvPr>
+          <p:cNvCxnSpPr>
+            <a:cxnSpLocks/>
+            <a:stCxn id="74" idx="2"/>
+            <a:endCxn id="46" idx="0"/>
+          </p:cNvCxnSpPr>
+          <p:nvPr/>
+        </p:nvCxnSpPr>
+        <p:spPr>
+          <a:xfrm flipH="1">
+            <a:off x="6466958" y="1736031"/>
+            <a:ext cx="1438417" cy="759880"/>
+          </a:xfrm>
+          <a:prstGeom prst="line">
+            <a:avLst/>
+          </a:prstGeom>
+          <a:ln w="12700">
+            <a:solidFill>
+              <a:schemeClr val="tx1"/>
+            </a:solidFill>
+          </a:ln>
+        </p:spPr>
+        <p:style>
+          <a:lnRef idx="1">
+            <a:schemeClr val="accent1"/>
+          </a:lnRef>
+          <a:fillRef idx="0">
+            <a:schemeClr val="accent1"/>
+          </a:fillRef>
+          <a:effectRef idx="0">
+            <a:schemeClr val="accent1"/>
+          </a:effectRef>
+          <a:fontRef idx="minor">
+            <a:schemeClr val="tx1"/>
+          </a:fontRef>
+        </p:style>
+      </p:cxnSp>
+      <p:cxnSp>
+        <p:nvCxnSpPr>
+          <p:cNvPr id="153" name="직선 연결선 26">
+            <a:extLst>
+              <a:ext uri="{FF2B5EF4-FFF2-40B4-BE49-F238E27FC236}">
+                <a16:creationId xmlns:a16="http://schemas.microsoft.com/office/drawing/2014/main" id="{49A64ACA-A8C7-E513-598E-DC51514EFDD4}"/>
+              </a:ext>
+            </a:extLst>
+          </p:cNvPr>
+          <p:cNvCxnSpPr>
+            <a:cxnSpLocks/>
+            <a:stCxn id="85" idx="2"/>
+            <a:endCxn id="46" idx="0"/>
+          </p:cNvCxnSpPr>
+          <p:nvPr/>
+        </p:nvCxnSpPr>
+        <p:spPr>
+          <a:xfrm>
+            <a:off x="6383171" y="1736031"/>
+            <a:ext cx="83787" cy="759880"/>
+          </a:xfrm>
+          <a:prstGeom prst="line">
+            <a:avLst/>
+          </a:prstGeom>
+          <a:ln w="12700">
+            <a:solidFill>
+              <a:schemeClr val="tx1"/>
+            </a:solidFill>
+          </a:ln>
+        </p:spPr>
+        <p:style>
+          <a:lnRef idx="1">
+            <a:schemeClr val="accent1"/>
+          </a:lnRef>
+          <a:fillRef idx="0">
+            <a:schemeClr val="accent1"/>
+          </a:fillRef>
+          <a:effectRef idx="0">
+            <a:schemeClr val="accent1"/>
+          </a:effectRef>
+          <a:fontRef idx="minor">
+            <a:schemeClr val="tx1"/>
+          </a:fontRef>
+        </p:style>
+      </p:cxnSp>
+      <p:cxnSp>
+        <p:nvCxnSpPr>
+          <p:cNvPr id="156" name="직선 연결선 26">
+            <a:extLst>
+              <a:ext uri="{FF2B5EF4-FFF2-40B4-BE49-F238E27FC236}">
+                <a16:creationId xmlns:a16="http://schemas.microsoft.com/office/drawing/2014/main" id="{F77071BF-692D-3793-E85B-C50C86B8ECB3}"/>
+              </a:ext>
+            </a:extLst>
+          </p:cNvPr>
+          <p:cNvCxnSpPr>
+            <a:cxnSpLocks/>
+            <a:stCxn id="56" idx="2"/>
+            <a:endCxn id="45" idx="0"/>
+          </p:cNvCxnSpPr>
+          <p:nvPr/>
+        </p:nvCxnSpPr>
+        <p:spPr>
+          <a:xfrm>
+            <a:off x="5185744" y="1736031"/>
+            <a:ext cx="21235" cy="759880"/>
+          </a:xfrm>
+          <a:prstGeom prst="line">
+            <a:avLst/>
+          </a:prstGeom>
+          <a:ln w="12700">
+            <a:solidFill>
+              <a:schemeClr val="tx1"/>
+            </a:solidFill>
+          </a:ln>
+        </p:spPr>
+        <p:style>
+          <a:lnRef idx="1">
+            <a:schemeClr val="accent1"/>
+          </a:lnRef>
+          <a:fillRef idx="0">
+            <a:schemeClr val="accent1"/>
+          </a:fillRef>
+          <a:effectRef idx="0">
+            <a:schemeClr val="accent1"/>
+          </a:effectRef>
+          <a:fontRef idx="minor">
+            <a:schemeClr val="tx1"/>
+          </a:fontRef>
+        </p:style>
+      </p:cxnSp>
+      <p:cxnSp>
+        <p:nvCxnSpPr>
+          <p:cNvPr id="159" name="직선 연결선 20">
+            <a:extLst>
+              <a:ext uri="{FF2B5EF4-FFF2-40B4-BE49-F238E27FC236}">
+                <a16:creationId xmlns:a16="http://schemas.microsoft.com/office/drawing/2014/main" id="{0B8FEDE2-7BBF-D65E-75C1-8B0B3692C055}"/>
+              </a:ext>
+            </a:extLst>
+          </p:cNvPr>
+          <p:cNvCxnSpPr>
+            <a:cxnSpLocks/>
+            <a:stCxn id="55" idx="2"/>
+            <a:endCxn id="34" idx="0"/>
+          </p:cNvCxnSpPr>
+          <p:nvPr/>
+        </p:nvCxnSpPr>
+        <p:spPr>
+          <a:xfrm flipH="1">
+            <a:off x="2682206" y="1736031"/>
+            <a:ext cx="1302004" cy="759880"/>
+          </a:xfrm>
+          <a:prstGeom prst="line">
+            <a:avLst/>
+          </a:prstGeom>
+          <a:ln w="12700">
+            <a:solidFill>
+              <a:schemeClr val="tx1"/>
+            </a:solidFill>
+          </a:ln>
+        </p:spPr>
+        <p:style>
+          <a:lnRef idx="1">
+            <a:schemeClr val="accent1"/>
+          </a:lnRef>
+          <a:fillRef idx="0">
+            <a:schemeClr val="accent1"/>
+          </a:fillRef>
+          <a:effectRef idx="0">
+            <a:schemeClr val="accent1"/>
+          </a:effectRef>
+          <a:fontRef idx="minor">
+            <a:schemeClr val="tx1"/>
+          </a:fontRef>
+        </p:style>
+      </p:cxnSp>
+      <p:cxnSp>
+        <p:nvCxnSpPr>
+          <p:cNvPr id="162" name="직선 연결선 20">
+            <a:extLst>
+              <a:ext uri="{FF2B5EF4-FFF2-40B4-BE49-F238E27FC236}">
+                <a16:creationId xmlns:a16="http://schemas.microsoft.com/office/drawing/2014/main" id="{05A750D1-6E61-A32C-04B7-84DF602A5A3A}"/>
+              </a:ext>
+            </a:extLst>
+          </p:cNvPr>
+          <p:cNvCxnSpPr>
+            <a:cxnSpLocks/>
+            <a:stCxn id="49" idx="2"/>
+            <a:endCxn id="44" idx="0"/>
+          </p:cNvCxnSpPr>
+          <p:nvPr/>
+        </p:nvCxnSpPr>
+        <p:spPr>
+          <a:xfrm>
+            <a:off x="2574212" y="1741694"/>
+            <a:ext cx="1372789" cy="754217"/>
+          </a:xfrm>
+          <a:prstGeom prst="line">
+            <a:avLst/>
+          </a:prstGeom>
+          <a:ln w="12700">
+            <a:solidFill>
+              <a:schemeClr val="tx1"/>
+            </a:solidFill>
+          </a:ln>
+        </p:spPr>
+        <p:style>
+          <a:lnRef idx="1">
+            <a:schemeClr val="accent1"/>
+          </a:lnRef>
+          <a:fillRef idx="0">
+            <a:schemeClr val="accent1"/>
+          </a:fillRef>
+          <a:effectRef idx="0">
+            <a:schemeClr val="accent1"/>
+          </a:effectRef>
+          <a:fontRef idx="minor">
+            <a:schemeClr val="tx1"/>
+          </a:fontRef>
+        </p:style>
+      </p:cxnSp>
+      <p:cxnSp>
+        <p:nvCxnSpPr>
+          <p:cNvPr id="165" name="직선 연결선 17">
+            <a:extLst>
+              <a:ext uri="{FF2B5EF4-FFF2-40B4-BE49-F238E27FC236}">
+                <a16:creationId xmlns:a16="http://schemas.microsoft.com/office/drawing/2014/main" id="{153FBB6B-820B-BA1D-E2F6-A9FD8E258E38}"/>
+              </a:ext>
+            </a:extLst>
+          </p:cNvPr>
+          <p:cNvCxnSpPr>
+            <a:cxnSpLocks/>
+            <a:stCxn id="48" idx="2"/>
+            <a:endCxn id="34" idx="0"/>
+          </p:cNvCxnSpPr>
+          <p:nvPr/>
+        </p:nvCxnSpPr>
+        <p:spPr>
+          <a:xfrm>
+            <a:off x="1372678" y="1741694"/>
+            <a:ext cx="1309528" cy="754217"/>
+          </a:xfrm>
+          <a:prstGeom prst="line">
+            <a:avLst/>
+          </a:prstGeom>
+          <a:ln w="12700">
+            <a:solidFill>
+              <a:schemeClr val="tx1"/>
+            </a:solidFill>
+          </a:ln>
+        </p:spPr>
+        <p:style>
+          <a:lnRef idx="1">
+            <a:schemeClr val="accent1"/>
+          </a:lnRef>
+          <a:fillRef idx="0">
+            <a:schemeClr val="accent1"/>
+          </a:fillRef>
+          <a:effectRef idx="0">
+            <a:schemeClr val="accent1"/>
+          </a:effectRef>
+          <a:fontRef idx="minor">
+            <a:schemeClr val="tx1"/>
+          </a:fontRef>
+        </p:style>
+      </p:cxnSp>
+      <p:cxnSp>
+        <p:nvCxnSpPr>
+          <p:cNvPr id="168" name="직선 연결선 20">
+            <a:extLst>
+              <a:ext uri="{FF2B5EF4-FFF2-40B4-BE49-F238E27FC236}">
+                <a16:creationId xmlns:a16="http://schemas.microsoft.com/office/drawing/2014/main" id="{8D357443-4835-7C24-E92E-753B01DC17EB}"/>
+              </a:ext>
+            </a:extLst>
+          </p:cNvPr>
+          <p:cNvCxnSpPr>
+            <a:cxnSpLocks/>
+            <a:stCxn id="53" idx="2"/>
+            <a:endCxn id="104" idx="0"/>
+          </p:cNvCxnSpPr>
+          <p:nvPr/>
+        </p:nvCxnSpPr>
+        <p:spPr>
+          <a:xfrm>
+            <a:off x="1973412" y="1255640"/>
+            <a:ext cx="2598762" cy="752629"/>
+          </a:xfrm>
+          <a:prstGeom prst="line">
+            <a:avLst/>
+          </a:prstGeom>
+          <a:ln w="12700">
+            <a:solidFill>
+              <a:schemeClr val="tx1"/>
+            </a:solidFill>
+          </a:ln>
+        </p:spPr>
+        <p:style>
+          <a:lnRef idx="1">
+            <a:schemeClr val="accent1"/>
+          </a:lnRef>
+          <a:fillRef idx="0">
+            <a:schemeClr val="accent1"/>
+          </a:fillRef>
+          <a:effectRef idx="0">
+            <a:schemeClr val="accent1"/>
+          </a:effectRef>
+          <a:fontRef idx="minor">
+            <a:schemeClr val="tx1"/>
+          </a:fontRef>
+        </p:style>
+      </p:cxnSp>
+      <p:cxnSp>
+        <p:nvCxnSpPr>
+          <p:cNvPr id="172" name="직선 연결선 20">
+            <a:extLst>
+              <a:ext uri="{FF2B5EF4-FFF2-40B4-BE49-F238E27FC236}">
+                <a16:creationId xmlns:a16="http://schemas.microsoft.com/office/drawing/2014/main" id="{C731D1A3-750E-AA78-FDCE-98249776DC05}"/>
+              </a:ext>
+            </a:extLst>
+          </p:cNvPr>
+          <p:cNvCxnSpPr>
+            <a:cxnSpLocks/>
+            <a:stCxn id="57" idx="2"/>
+            <a:endCxn id="104" idx="0"/>
+          </p:cNvCxnSpPr>
+          <p:nvPr/>
+        </p:nvCxnSpPr>
+        <p:spPr>
+          <a:xfrm flipH="1">
+            <a:off x="4572174" y="1249977"/>
+            <a:ext cx="611484" cy="758292"/>
+          </a:xfrm>
+          <a:prstGeom prst="line">
+            <a:avLst/>
+          </a:prstGeom>
+          <a:ln w="12700">
+            <a:solidFill>
+              <a:schemeClr val="tx1"/>
+            </a:solidFill>
+          </a:ln>
+        </p:spPr>
+        <p:style>
+          <a:lnRef idx="1">
+            <a:schemeClr val="accent1"/>
+          </a:lnRef>
+          <a:fillRef idx="0">
+            <a:schemeClr val="accent1"/>
+          </a:fillRef>
+          <a:effectRef idx="0">
+            <a:schemeClr val="accent1"/>
+          </a:effectRef>
+          <a:fontRef idx="minor">
+            <a:schemeClr val="tx1"/>
+          </a:fontRef>
+        </p:style>
+      </p:cxnSp>
+      <p:cxnSp>
+        <p:nvCxnSpPr>
+          <p:cNvPr id="175" name="직선 연결선 20">
+            <a:extLst>
+              <a:ext uri="{FF2B5EF4-FFF2-40B4-BE49-F238E27FC236}">
+                <a16:creationId xmlns:a16="http://schemas.microsoft.com/office/drawing/2014/main" id="{0BA98BD0-D2BE-D1A3-6910-B0B0FE735DC7}"/>
+              </a:ext>
+            </a:extLst>
+          </p:cNvPr>
+          <p:cNvCxnSpPr>
+            <a:cxnSpLocks/>
+            <a:stCxn id="75" idx="2"/>
+            <a:endCxn id="104" idx="0"/>
+          </p:cNvCxnSpPr>
+          <p:nvPr/>
+        </p:nvCxnSpPr>
+        <p:spPr>
+          <a:xfrm flipH="1">
+            <a:off x="4572174" y="1249977"/>
+            <a:ext cx="3333200" cy="758292"/>
+          </a:xfrm>
+          <a:prstGeom prst="line">
+            <a:avLst/>
+          </a:prstGeom>
+          <a:ln w="12700">
+            <a:solidFill>
+              <a:schemeClr val="tx1"/>
+            </a:solidFill>
+          </a:ln>
+        </p:spPr>
+        <p:style>
+          <a:lnRef idx="1">
+            <a:schemeClr val="accent1"/>
+          </a:lnRef>
+          <a:fillRef idx="0">
+            <a:schemeClr val="accent1"/>
+          </a:fillRef>
+          <a:effectRef idx="0">
+            <a:schemeClr val="accent1"/>
+          </a:effectRef>
+          <a:fontRef idx="minor">
+            <a:schemeClr val="tx1"/>
+          </a:fontRef>
+        </p:style>
+      </p:cxnSp>
+      <p:sp>
+        <p:nvSpPr>
+          <p:cNvPr id="179" name="TextBox 178">
+            <a:extLst>
+              <a:ext uri="{FF2B5EF4-FFF2-40B4-BE49-F238E27FC236}">
+                <a16:creationId xmlns:a16="http://schemas.microsoft.com/office/drawing/2014/main" id="{670BFEEC-1A34-44E5-6762-6C7FD7A5A5BA}"/>
+              </a:ext>
+            </a:extLst>
+          </p:cNvPr>
+          <p:cNvSpPr txBox="1"/>
+          <p:nvPr/>
+        </p:nvSpPr>
+        <p:spPr>
+          <a:xfrm>
+            <a:off x="691097" y="1819727"/>
+            <a:ext cx="915635" cy="246221"/>
+          </a:xfrm>
+          <a:prstGeom prst="rect">
+            <a:avLst/>
+          </a:prstGeom>
+          <a:noFill/>
+        </p:spPr>
+        <p:txBody>
+          <a:bodyPr wrap="none" rtlCol="0">
+            <a:spAutoFit/>
+          </a:bodyPr>
+          <a:lstStyle/>
+          <a:p>
+            <a:r>
+              <a:rPr kumimoji="1" lang="en-US" altLang="ko-KR" sz="1000" b="1" i="1"/>
+              <a:t>Bind Mount</a:t>
+            </a:r>
+            <a:endParaRPr kumimoji="1" lang="ko-KR" altLang="en-US" sz="1000" b="1" i="1"/>
           </a:p>
         </p:txBody>
       </p:sp>
     </p:spTree>
     <p:extLst>
       <p:ext uri="{BB962C8B-B14F-4D97-AF65-F5344CB8AC3E}">
-        <p14:creationId xmlns:p14="http://schemas.microsoft.com/office/powerpoint/2010/main" val="3094524413"/>
+        <p14:creationId xmlns:p14="http://schemas.microsoft.com/office/powerpoint/2010/main" val="2980991815"/>
       </p:ext>
     </p:extLst>
   </p:cSld>
@@ -4934,7 +6828,13 @@
   <p:cSld>
     <p:spTree>
       <p:nvGrpSpPr>
-        <p:cNvPr id="1" name=""/>
+        <p:cNvPr id="1" name="">
+          <a:extLst>
+            <a:ext uri="{FF2B5EF4-FFF2-40B4-BE49-F238E27FC236}">
+              <a16:creationId xmlns:a16="http://schemas.microsoft.com/office/drawing/2014/main" id="{BED122ED-3835-3DC0-4352-5EC9D3A5DBE0}"/>
+            </a:ext>
+          </a:extLst>
+        </p:cNvPr>
         <p:cNvGrpSpPr/>
         <p:nvPr/>
       </p:nvGrpSpPr>
@@ -4951,7 +6851,7 @@
           <p:cNvPr id="2" name="제목 1">
             <a:extLst>
               <a:ext uri="{FF2B5EF4-FFF2-40B4-BE49-F238E27FC236}">
-                <a16:creationId xmlns:a16="http://schemas.microsoft.com/office/drawing/2014/main" id="{8738443D-5E72-49E2-86AC-581D61C41C39}"/>
+                <a16:creationId xmlns:a16="http://schemas.microsoft.com/office/drawing/2014/main" id="{B9995984-7EC0-74A8-AF2B-5AF306DDEE7F}"/>
               </a:ext>
             </a:extLst>
           </p:cNvPr>
@@ -4970,13 +6870,13 @@
         </p:spPr>
         <p:txBody>
           <a:bodyPr>
-            <a:normAutofit fontScale="90000"/>
+            <a:normAutofit/>
           </a:bodyPr>
           <a:lstStyle/>
           <a:p>
             <a:r>
               <a:rPr lang="en-US" altLang="ko-KR"/>
-              <a:t>CUDA Container OCI Runtime Spec</a:t>
+              <a:t>CUDA Container Init</a:t>
             </a:r>
             <a:endParaRPr lang="ko-KR" altLang="en-US" dirty="0"/>
           </a:p>
@@ -4984,10 +6884,10 @@
       </p:sp>
       <p:sp>
         <p:nvSpPr>
-          <p:cNvPr id="7" name="사각형: 둥근 모서리 114">
-            <a:extLst>
-              <a:ext uri="{FF2B5EF4-FFF2-40B4-BE49-F238E27FC236}">
-                <a16:creationId xmlns:a16="http://schemas.microsoft.com/office/drawing/2014/main" id="{E074CAD6-7716-4458-B0D4-1C0318E58F6D}"/>
+          <p:cNvPr id="42" name="사각형: 둥근 모서리 114">
+            <a:extLst>
+              <a:ext uri="{FF2B5EF4-FFF2-40B4-BE49-F238E27FC236}">
+                <a16:creationId xmlns:a16="http://schemas.microsoft.com/office/drawing/2014/main" id="{AECCCC64-0828-F134-05A2-0B439489904B}"/>
               </a:ext>
             </a:extLst>
           </p:cNvPr>
@@ -4996,12 +6896,12 @@
         </p:nvSpPr>
         <p:spPr>
           <a:xfrm>
-            <a:off x="2267744" y="698149"/>
-            <a:ext cx="4752528" cy="433441"/>
+            <a:off x="3841306" y="3760564"/>
+            <a:ext cx="2731142" cy="827410"/>
           </a:xfrm>
           <a:prstGeom prst="roundRect">
             <a:avLst>
-              <a:gd name="adj" fmla="val 0"/>
+              <a:gd name="adj" fmla="val 6397"/>
             </a:avLst>
           </a:prstGeom>
         </p:spPr>
@@ -5020,12 +6920,13 @@
           </a:fontRef>
         </p:style>
         <p:txBody>
-          <a:bodyPr rtlCol="0" anchor="ctr"/>
-          <a:lstStyle/>
-          <a:p>
+          <a:bodyPr rtlCol="0" anchor="t"/>
+          <a:lstStyle/>
+          <a:p>
+            <a:pPr algn="ctr"/>
             <a:r>
               <a:rPr lang="en-US" altLang="ko-KR" sz="1400"/>
-              <a:t># docker run --gpu all nvidia/cuda:9.0-base nvidia-smi</a:t>
+              <a:t>nvidia-container-cli CLI</a:t>
             </a:r>
             <a:endParaRPr lang="en-US" altLang="ko-KR" sz="1400" dirty="0"/>
           </a:p>
@@ -5033,10 +6934,10 @@
       </p:sp>
       <p:sp>
         <p:nvSpPr>
-          <p:cNvPr id="11" name="사각형: 둥근 모서리 114">
-            <a:extLst>
-              <a:ext uri="{FF2B5EF4-FFF2-40B4-BE49-F238E27FC236}">
-                <a16:creationId xmlns:a16="http://schemas.microsoft.com/office/drawing/2014/main" id="{E07F06D4-AF1E-486E-8493-362B4DEDC5E3}"/>
+          <p:cNvPr id="43" name="사각형: 둥근 모서리 114">
+            <a:extLst>
+              <a:ext uri="{FF2B5EF4-FFF2-40B4-BE49-F238E27FC236}">
+                <a16:creationId xmlns:a16="http://schemas.microsoft.com/office/drawing/2014/main" id="{392D0A0A-B53F-4A90-B311-F8FAD571A8A5}"/>
               </a:ext>
             </a:extLst>
           </p:cNvPr>
@@ -5045,12 +6946,12 @@
         </p:nvSpPr>
         <p:spPr>
           <a:xfrm>
-            <a:off x="899592" y="1354461"/>
-            <a:ext cx="7488831" cy="3367380"/>
+            <a:off x="4237350" y="4108151"/>
+            <a:ext cx="1939054" cy="372492"/>
           </a:xfrm>
           <a:prstGeom prst="roundRect">
             <a:avLst>
-              <a:gd name="adj" fmla="val 0"/>
+              <a:gd name="adj" fmla="val 6397"/>
             </a:avLst>
           </a:prstGeom>
         </p:spPr>
@@ -5072,96 +6973,110 @@
           <a:bodyPr rtlCol="0" anchor="ctr"/>
           <a:lstStyle/>
           <a:p>
+            <a:pPr algn="ctr"/>
             <a:r>
               <a:rPr lang="en-US" altLang="ko-KR" sz="1400"/>
-              <a:t>"hooks": {</a:t>
-            </a:r>
-          </a:p>
-          <a:p>
+              <a:t>libnvidia-container</a:t>
+            </a:r>
+            <a:endParaRPr lang="en-US" altLang="ko-KR" sz="1400" dirty="0"/>
+          </a:p>
+        </p:txBody>
+      </p:sp>
+      <p:sp>
+        <p:nvSpPr>
+          <p:cNvPr id="44" name="사각형: 둥근 모서리 114">
+            <a:extLst>
+              <a:ext uri="{FF2B5EF4-FFF2-40B4-BE49-F238E27FC236}">
+                <a16:creationId xmlns:a16="http://schemas.microsoft.com/office/drawing/2014/main" id="{4B2C7BE7-2F5A-24AE-CDFD-798E4A9F25CF}"/>
+              </a:ext>
+            </a:extLst>
+          </p:cNvPr>
+          <p:cNvSpPr/>
+          <p:nvPr/>
+        </p:nvSpPr>
+        <p:spPr>
+          <a:xfrm>
+            <a:off x="3673694" y="2571751"/>
+            <a:ext cx="3066366" cy="433441"/>
+          </a:xfrm>
+          <a:prstGeom prst="roundRect">
+            <a:avLst>
+              <a:gd name="adj" fmla="val 10304"/>
+            </a:avLst>
+          </a:prstGeom>
+        </p:spPr>
+        <p:style>
+          <a:lnRef idx="2">
+            <a:schemeClr val="dk1"/>
+          </a:lnRef>
+          <a:fillRef idx="1">
+            <a:schemeClr val="lt1"/>
+          </a:fillRef>
+          <a:effectRef idx="0">
+            <a:schemeClr val="dk1"/>
+          </a:effectRef>
+          <a:fontRef idx="minor">
+            <a:schemeClr val="dk1"/>
+          </a:fontRef>
+        </p:style>
+        <p:txBody>
+          <a:bodyPr rtlCol="0" anchor="ctr"/>
+          <a:lstStyle/>
+          <a:p>
+            <a:pPr algn="ctr"/>
             <a:r>
               <a:rPr lang="en-US" altLang="ko-KR" sz="1400"/>
-              <a:t>    "prestart": [</a:t>
-            </a:r>
-          </a:p>
-          <a:p>
+              <a:t>nvidia-container-runtime-hook CLI</a:t>
+            </a:r>
+            <a:endParaRPr lang="en-US" altLang="ko-KR" sz="1400" dirty="0"/>
+          </a:p>
+        </p:txBody>
+      </p:sp>
+      <p:sp>
+        <p:nvSpPr>
+          <p:cNvPr id="45" name="사각형: 둥근 모서리 114">
+            <a:extLst>
+              <a:ext uri="{FF2B5EF4-FFF2-40B4-BE49-F238E27FC236}">
+                <a16:creationId xmlns:a16="http://schemas.microsoft.com/office/drawing/2014/main" id="{6CB43451-663D-44ED-F26F-A184162A2227}"/>
+              </a:ext>
+            </a:extLst>
+          </p:cNvPr>
+          <p:cNvSpPr/>
+          <p:nvPr/>
+        </p:nvSpPr>
+        <p:spPr>
+          <a:xfrm>
+            <a:off x="7153673" y="2571750"/>
+            <a:ext cx="1717863" cy="433441"/>
+          </a:xfrm>
+          <a:prstGeom prst="roundRect">
+            <a:avLst>
+              <a:gd name="adj" fmla="val 10304"/>
+            </a:avLst>
+          </a:prstGeom>
+        </p:spPr>
+        <p:style>
+          <a:lnRef idx="2">
+            <a:schemeClr val="dk1"/>
+          </a:lnRef>
+          <a:fillRef idx="1">
+            <a:schemeClr val="lt1"/>
+          </a:fillRef>
+          <a:effectRef idx="0">
+            <a:schemeClr val="dk1"/>
+          </a:effectRef>
+          <a:fontRef idx="minor">
+            <a:schemeClr val="dk1"/>
+          </a:fontRef>
+        </p:style>
+        <p:txBody>
+          <a:bodyPr rtlCol="0" anchor="ctr"/>
+          <a:lstStyle/>
+          <a:p>
+            <a:pPr algn="ctr"/>
             <a:r>
               <a:rPr lang="en-US" altLang="ko-KR" sz="1400"/>
-              <a:t>         {</a:t>
-            </a:r>
-          </a:p>
-          <a:p>
-            <a:r>
-              <a:rPr lang="en-US" altLang="ko-KR" sz="1400"/>
-              <a:t>             "path": “/usr/bin/nvidia-container-runtime-hook”,</a:t>
-            </a:r>
-          </a:p>
-          <a:p>
-            <a:r>
-              <a:rPr lang="en-US" altLang="ko-KR" sz="1400"/>
-              <a:t>             "args": ["nvidia-container-runtime-hook ", “prestart"],</a:t>
-            </a:r>
-          </a:p>
-          <a:p>
-            <a:r>
-              <a:rPr lang="en-US" altLang="ko-KR" sz="1400"/>
-              <a:t>             "env": [“CUDA_VERSION=9.0.176”,</a:t>
-            </a:r>
-            <a:br>
-              <a:rPr lang="en-US" altLang="ko-KR" sz="1400"/>
-            </a:br>
-            <a:r>
-              <a:rPr lang="en-US" altLang="ko-KR" sz="1400"/>
-              <a:t>                       “CUDA_PKG_VERSION=9-0=9.0.176-1”,</a:t>
-            </a:r>
-          </a:p>
-          <a:p>
-            <a:r>
-              <a:rPr lang="en-US" altLang="ko-KR" sz="1400"/>
-              <a:t>                       “NVIDIA_VISIBLE_DEVICES=all“,</a:t>
-            </a:r>
-            <a:br>
-              <a:rPr lang="en-US" altLang="ko-KR" sz="1400"/>
-            </a:br>
-            <a:r>
-              <a:rPr lang="en-US" altLang="ko-KR" sz="1400"/>
-              <a:t>                       “NVIDIA_DRIVER_CAPABILITIES=“compute,utility”,</a:t>
-            </a:r>
-          </a:p>
-          <a:p>
-            <a:r>
-              <a:rPr lang="en-US" altLang="ko-KR" sz="1400"/>
-              <a:t>                       "NVIDIA_REQUIRE_CUDA=cuda&gt;=9.0“,</a:t>
-            </a:r>
-            <a:br>
-              <a:rPr lang="en-US" altLang="ko-KR" sz="1400"/>
-            </a:br>
-            <a:r>
-              <a:rPr lang="en-US" altLang="ko-KR" sz="1400"/>
-              <a:t>                       "LD_LIBRARY_PATH=/usr/local/nvidia/lib:/usr/local/nvidia/lib64“</a:t>
-            </a:r>
-          </a:p>
-          <a:p>
-            <a:r>
-              <a:rPr lang="en-US" altLang="ko-KR" sz="1400"/>
-              <a:t>             ]</a:t>
-            </a:r>
-          </a:p>
-          <a:p>
-            <a:r>
-              <a:rPr lang="en-US" altLang="ko-KR" sz="1400"/>
-              <a:t>         },</a:t>
-            </a:r>
-          </a:p>
-          <a:p>
-            <a:r>
-              <a:rPr lang="en-US" altLang="ko-KR" sz="1400"/>
-              <a:t>    ],</a:t>
-            </a:r>
-          </a:p>
-          <a:p>
-            <a:r>
-              <a:rPr lang="en-US" altLang="ko-KR" sz="1400"/>
-              <a:t>}</a:t>
+              <a:t>Hook Config File</a:t>
             </a:r>
             <a:endParaRPr lang="en-US" altLang="ko-KR" sz="1400" dirty="0"/>
           </a:p>
@@ -5169,24 +7084,24 @@
       </p:sp>
       <p:cxnSp>
         <p:nvCxnSpPr>
-          <p:cNvPr id="9" name="직선 화살표 연결선 8">
-            <a:extLst>
-              <a:ext uri="{FF2B5EF4-FFF2-40B4-BE49-F238E27FC236}">
-                <a16:creationId xmlns:a16="http://schemas.microsoft.com/office/drawing/2014/main" id="{D3447036-464F-4C90-9B09-6E8806442451}"/>
+          <p:cNvPr id="18" name="직선 화살표 연결선 17">
+            <a:extLst>
+              <a:ext uri="{FF2B5EF4-FFF2-40B4-BE49-F238E27FC236}">
+                <a16:creationId xmlns:a16="http://schemas.microsoft.com/office/drawing/2014/main" id="{CEC02631-0696-740D-BC41-FDE19399C85F}"/>
               </a:ext>
             </a:extLst>
           </p:cNvPr>
           <p:cNvCxnSpPr>
             <a:cxnSpLocks/>
-            <a:stCxn id="7" idx="2"/>
-            <a:endCxn id="11" idx="0"/>
+            <a:stCxn id="45" idx="1"/>
+            <a:endCxn id="44" idx="3"/>
           </p:cNvCxnSpPr>
           <p:nvPr/>
         </p:nvCxnSpPr>
         <p:spPr>
-          <a:xfrm>
-            <a:off x="4644008" y="1131590"/>
-            <a:ext cx="0" cy="222871"/>
+          <a:xfrm flipH="1">
+            <a:off x="6740060" y="2788471"/>
+            <a:ext cx="413613" cy="1"/>
           </a:xfrm>
           <a:prstGeom prst="straightConnector1">
             <a:avLst/>
@@ -5214,12 +7129,153 @@
           </a:fontRef>
         </p:style>
       </p:cxnSp>
-      <p:sp>
-        <p:nvSpPr>
-          <p:cNvPr id="22" name="사각형: 둥근 모서리 114">
-            <a:extLst>
-              <a:ext uri="{FF2B5EF4-FFF2-40B4-BE49-F238E27FC236}">
-                <a16:creationId xmlns:a16="http://schemas.microsoft.com/office/drawing/2014/main" id="{0B79FB11-EB5E-48B2-9B7D-2CF7A5759856}"/>
+      <p:cxnSp>
+        <p:nvCxnSpPr>
+          <p:cNvPr id="21" name="직선 화살표 연결선 20">
+            <a:extLst>
+              <a:ext uri="{FF2B5EF4-FFF2-40B4-BE49-F238E27FC236}">
+                <a16:creationId xmlns:a16="http://schemas.microsoft.com/office/drawing/2014/main" id="{DC38CB59-20C9-6733-FA0E-412AE49E45FB}"/>
+              </a:ext>
+            </a:extLst>
+          </p:cNvPr>
+          <p:cNvCxnSpPr>
+            <a:cxnSpLocks/>
+            <a:stCxn id="42" idx="1"/>
+            <a:endCxn id="48" idx="2"/>
+          </p:cNvCxnSpPr>
+          <p:nvPr/>
+        </p:nvCxnSpPr>
+        <p:spPr>
+          <a:xfrm flipH="1" flipV="1">
+            <a:off x="1955254" y="3343764"/>
+            <a:ext cx="1886052" cy="830505"/>
+          </a:xfrm>
+          <a:prstGeom prst="straightConnector1">
+            <a:avLst/>
+          </a:prstGeom>
+          <a:ln w="19050">
+            <a:solidFill>
+              <a:schemeClr val="tx1"/>
+            </a:solidFill>
+            <a:headEnd type="none" w="med" len="med"/>
+            <a:tailEnd type="arrow" w="med" len="med"/>
+          </a:ln>
+        </p:spPr>
+        <p:style>
+          <a:lnRef idx="1">
+            <a:schemeClr val="accent1"/>
+          </a:lnRef>
+          <a:fillRef idx="0">
+            <a:schemeClr val="accent1"/>
+          </a:fillRef>
+          <a:effectRef idx="0">
+            <a:schemeClr val="accent1"/>
+          </a:effectRef>
+          <a:fontRef idx="minor">
+            <a:schemeClr val="tx1"/>
+          </a:fontRef>
+        </p:style>
+      </p:cxnSp>
+      <p:cxnSp>
+        <p:nvCxnSpPr>
+          <p:cNvPr id="22" name="직선 화살표 연결선 21">
+            <a:extLst>
+              <a:ext uri="{FF2B5EF4-FFF2-40B4-BE49-F238E27FC236}">
+                <a16:creationId xmlns:a16="http://schemas.microsoft.com/office/drawing/2014/main" id="{B3533A58-75CD-7D94-2995-7961486E80BA}"/>
+              </a:ext>
+            </a:extLst>
+          </p:cNvPr>
+          <p:cNvCxnSpPr>
+            <a:cxnSpLocks/>
+            <a:stCxn id="44" idx="2"/>
+            <a:endCxn id="42" idx="0"/>
+          </p:cNvCxnSpPr>
+          <p:nvPr/>
+        </p:nvCxnSpPr>
+        <p:spPr>
+          <a:xfrm>
+            <a:off x="5206877" y="3005192"/>
+            <a:ext cx="0" cy="755372"/>
+          </a:xfrm>
+          <a:prstGeom prst="straightConnector1">
+            <a:avLst/>
+          </a:prstGeom>
+          <a:ln w="19050">
+            <a:solidFill>
+              <a:schemeClr val="tx1"/>
+            </a:solidFill>
+            <a:headEnd type="none" w="med" len="med"/>
+            <a:tailEnd type="arrow" w="med" len="med"/>
+          </a:ln>
+        </p:spPr>
+        <p:style>
+          <a:lnRef idx="1">
+            <a:schemeClr val="accent1"/>
+          </a:lnRef>
+          <a:fillRef idx="0">
+            <a:schemeClr val="accent1"/>
+          </a:fillRef>
+          <a:effectRef idx="0">
+            <a:schemeClr val="accent1"/>
+          </a:effectRef>
+          <a:fontRef idx="minor">
+            <a:schemeClr val="tx1"/>
+          </a:fontRef>
+        </p:style>
+      </p:cxnSp>
+      <p:cxnSp>
+        <p:nvCxnSpPr>
+          <p:cNvPr id="30" name="직선 화살표 연결선 29">
+            <a:extLst>
+              <a:ext uri="{FF2B5EF4-FFF2-40B4-BE49-F238E27FC236}">
+                <a16:creationId xmlns:a16="http://schemas.microsoft.com/office/drawing/2014/main" id="{2674C97E-6670-D3AD-8F74-BA2D89D7A7FD}"/>
+              </a:ext>
+            </a:extLst>
+          </p:cNvPr>
+          <p:cNvCxnSpPr>
+            <a:cxnSpLocks/>
+            <a:stCxn id="35" idx="2"/>
+            <a:endCxn id="44" idx="0"/>
+          </p:cNvCxnSpPr>
+          <p:nvPr/>
+        </p:nvCxnSpPr>
+        <p:spPr>
+          <a:xfrm>
+            <a:off x="5206872" y="1811551"/>
+            <a:ext cx="5" cy="760200"/>
+          </a:xfrm>
+          <a:prstGeom prst="straightConnector1">
+            <a:avLst/>
+          </a:prstGeom>
+          <a:ln w="19050">
+            <a:solidFill>
+              <a:schemeClr val="tx1"/>
+            </a:solidFill>
+            <a:headEnd type="none" w="med" len="med"/>
+            <a:tailEnd type="arrow" w="med" len="med"/>
+          </a:ln>
+        </p:spPr>
+        <p:style>
+          <a:lnRef idx="1">
+            <a:schemeClr val="accent1"/>
+          </a:lnRef>
+          <a:fillRef idx="0">
+            <a:schemeClr val="accent1"/>
+          </a:fillRef>
+          <a:effectRef idx="0">
+            <a:schemeClr val="accent1"/>
+          </a:effectRef>
+          <a:fontRef idx="minor">
+            <a:schemeClr val="tx1"/>
+          </a:fontRef>
+        </p:style>
+      </p:cxnSp>
+      <p:sp>
+        <p:nvSpPr>
+          <p:cNvPr id="35" name="사각형: 둥근 모서리 114">
+            <a:extLst>
+              <a:ext uri="{FF2B5EF4-FFF2-40B4-BE49-F238E27FC236}">
+                <a16:creationId xmlns:a16="http://schemas.microsoft.com/office/drawing/2014/main" id="{B08B49E6-412F-DDF1-A72D-9194FA92404B}"/>
               </a:ext>
             </a:extLst>
           </p:cNvPr>
@@ -5228,7 +7284,7 @@
         </p:nvSpPr>
         <p:spPr>
           <a:xfrm>
-            <a:off x="3278436" y="4658589"/>
+            <a:off x="3841301" y="1378110"/>
             <a:ext cx="2731142" cy="433441"/>
           </a:xfrm>
           <a:prstGeom prst="roundRect">
@@ -5236,6 +7292,56 @@
               <a:gd name="adj" fmla="val 10304"/>
             </a:avLst>
           </a:prstGeom>
+        </p:spPr>
+        <p:style>
+          <a:lnRef idx="2">
+            <a:schemeClr val="dk1"/>
+          </a:lnRef>
+          <a:fillRef idx="1">
+            <a:schemeClr val="lt1"/>
+          </a:fillRef>
+          <a:effectRef idx="0">
+            <a:schemeClr val="dk1"/>
+          </a:effectRef>
+          <a:fontRef idx="minor">
+            <a:schemeClr val="dk1"/>
+          </a:fontRef>
+        </p:style>
+        <p:txBody>
+          <a:bodyPr rtlCol="0" anchor="ctr"/>
+          <a:lstStyle/>
+          <a:p>
+            <a:pPr algn="ctr"/>
+            <a:r>
+              <a:rPr lang="en-US" altLang="ko-KR" sz="1400"/>
+              <a:t>runc CLI</a:t>
+            </a:r>
+            <a:endParaRPr lang="en-US" altLang="ko-KR" sz="1400" dirty="0"/>
+          </a:p>
+        </p:txBody>
+      </p:sp>
+      <p:sp>
+        <p:nvSpPr>
+          <p:cNvPr id="39" name="사각형: 둥근 모서리 114">
+            <a:extLst>
+              <a:ext uri="{FF2B5EF4-FFF2-40B4-BE49-F238E27FC236}">
+                <a16:creationId xmlns:a16="http://schemas.microsoft.com/office/drawing/2014/main" id="{3BCEDCC4-7A90-07A4-91E3-FEF13C5D6553}"/>
+              </a:ext>
+            </a:extLst>
+          </p:cNvPr>
+          <p:cNvSpPr/>
+          <p:nvPr/>
+        </p:nvSpPr>
+        <p:spPr>
+          <a:xfrm>
+            <a:off x="4978365" y="1942417"/>
+            <a:ext cx="2731142" cy="433442"/>
+          </a:xfrm>
+          <a:prstGeom prst="roundRect">
+            <a:avLst>
+              <a:gd name="adj" fmla="val 10304"/>
+            </a:avLst>
+          </a:prstGeom>
           <a:noFill/>
           <a:ln>
             <a:noFill/>
@@ -5261,17 +7367,765 @@
           <a:p>
             <a:pPr algn="ctr"/>
             <a:r>
+              <a:rPr lang="en-US" altLang="ko-KR" sz="1400" b="1"/>
+              <a:t>Exec via OCI runtime’s prestart hook</a:t>
+            </a:r>
+          </a:p>
+        </p:txBody>
+      </p:sp>
+      <p:sp>
+        <p:nvSpPr>
+          <p:cNvPr id="46" name="사각형: 둥근 모서리 114">
+            <a:extLst>
+              <a:ext uri="{FF2B5EF4-FFF2-40B4-BE49-F238E27FC236}">
+                <a16:creationId xmlns:a16="http://schemas.microsoft.com/office/drawing/2014/main" id="{C082F7EE-2B3E-ED69-1005-9B90468E3EDB}"/>
+              </a:ext>
+            </a:extLst>
+          </p:cNvPr>
+          <p:cNvSpPr/>
+          <p:nvPr/>
+        </p:nvSpPr>
+        <p:spPr>
+          <a:xfrm>
+            <a:off x="5153226" y="3080244"/>
+            <a:ext cx="2381421" cy="537288"/>
+          </a:xfrm>
+          <a:prstGeom prst="roundRect">
+            <a:avLst>
+              <a:gd name="adj" fmla="val 10304"/>
+            </a:avLst>
+          </a:prstGeom>
+          <a:noFill/>
+          <a:ln>
+            <a:noFill/>
+          </a:ln>
+        </p:spPr>
+        <p:style>
+          <a:lnRef idx="2">
+            <a:schemeClr val="dk1"/>
+          </a:lnRef>
+          <a:fillRef idx="1">
+            <a:schemeClr val="lt1"/>
+          </a:fillRef>
+          <a:effectRef idx="0">
+            <a:schemeClr val="dk1"/>
+          </a:effectRef>
+          <a:fontRef idx="minor">
+            <a:schemeClr val="dk1"/>
+          </a:fontRef>
+        </p:style>
+        <p:txBody>
+          <a:bodyPr rtlCol="0" anchor="ctr"/>
+          <a:lstStyle/>
+          <a:p>
+            <a:pPr algn="ctr"/>
+            <a:r>
+              <a:rPr lang="en-US" altLang="ko-KR" sz="1400" b="1"/>
+              <a:t>Exec with container, </a:t>
+            </a:r>
+          </a:p>
+          <a:p>
+            <a:pPr algn="ctr"/>
+            <a:r>
+              <a:rPr lang="en-US" altLang="ko-KR" sz="1400" b="1"/>
+              <a:t>GPU, CUDA arguments</a:t>
+            </a:r>
+          </a:p>
+        </p:txBody>
+      </p:sp>
+      <p:sp>
+        <p:nvSpPr>
+          <p:cNvPr id="48" name="사각형: 둥근 모서리 114">
+            <a:extLst>
+              <a:ext uri="{FF2B5EF4-FFF2-40B4-BE49-F238E27FC236}">
+                <a16:creationId xmlns:a16="http://schemas.microsoft.com/office/drawing/2014/main" id="{8F2DFD78-2A43-A301-E75E-696F7A31EDDF}"/>
+              </a:ext>
+            </a:extLst>
+          </p:cNvPr>
+          <p:cNvSpPr/>
+          <p:nvPr/>
+        </p:nvSpPr>
+        <p:spPr>
+          <a:xfrm>
+            <a:off x="994692" y="2231784"/>
+            <a:ext cx="1921124" cy="1111980"/>
+          </a:xfrm>
+          <a:prstGeom prst="roundRect">
+            <a:avLst>
+              <a:gd name="adj" fmla="val 6774"/>
+            </a:avLst>
+          </a:prstGeom>
+        </p:spPr>
+        <p:style>
+          <a:lnRef idx="2">
+            <a:schemeClr val="dk1"/>
+          </a:lnRef>
+          <a:fillRef idx="1">
+            <a:schemeClr val="lt1"/>
+          </a:fillRef>
+          <a:effectRef idx="0">
+            <a:schemeClr val="dk1"/>
+          </a:effectRef>
+          <a:fontRef idx="minor">
+            <a:schemeClr val="dk1"/>
+          </a:fontRef>
+        </p:style>
+        <p:txBody>
+          <a:bodyPr rtlCol="0" anchor="ctr"/>
+          <a:lstStyle/>
+          <a:p>
+            <a:pPr algn="ctr"/>
+            <a:r>
+              <a:rPr lang="en-US" altLang="ko-KR" sz="1400">
+                <a:solidFill>
+                  <a:schemeClr val="tx1"/>
+                </a:solidFill>
+              </a:rPr>
+              <a:t>Container</a:t>
+            </a:r>
+            <a:endParaRPr lang="en-US" altLang="ko-KR" sz="1400" dirty="0">
+              <a:solidFill>
+                <a:schemeClr val="tx1"/>
+              </a:solidFill>
+            </a:endParaRPr>
+          </a:p>
+          <a:p>
+            <a:pPr algn="ctr"/>
+            <a:r>
+              <a:rPr lang="en-US" altLang="ko-KR" sz="1400">
+                <a:solidFill>
+                  <a:schemeClr val="tx1"/>
+                </a:solidFill>
+              </a:rPr>
+              <a:t>(Namespace, Rootfs)</a:t>
+            </a:r>
+          </a:p>
+        </p:txBody>
+      </p:sp>
+      <p:sp>
+        <p:nvSpPr>
+          <p:cNvPr id="59" name="사각형: 둥근 모서리 114">
+            <a:extLst>
+              <a:ext uri="{FF2B5EF4-FFF2-40B4-BE49-F238E27FC236}">
+                <a16:creationId xmlns:a16="http://schemas.microsoft.com/office/drawing/2014/main" id="{E7104B79-1752-9403-35AA-4C63AF9C7839}"/>
+              </a:ext>
+            </a:extLst>
+          </p:cNvPr>
+          <p:cNvSpPr/>
+          <p:nvPr/>
+        </p:nvSpPr>
+        <p:spPr>
+          <a:xfrm>
+            <a:off x="1125242" y="1046349"/>
+            <a:ext cx="2731142" cy="619914"/>
+          </a:xfrm>
+          <a:prstGeom prst="roundRect">
+            <a:avLst>
+              <a:gd name="adj" fmla="val 10304"/>
+            </a:avLst>
+          </a:prstGeom>
+          <a:noFill/>
+          <a:ln>
+            <a:noFill/>
+          </a:ln>
+        </p:spPr>
+        <p:style>
+          <a:lnRef idx="2">
+            <a:schemeClr val="dk1"/>
+          </a:lnRef>
+          <a:fillRef idx="1">
+            <a:schemeClr val="lt1"/>
+          </a:fillRef>
+          <a:effectRef idx="0">
+            <a:schemeClr val="dk1"/>
+          </a:effectRef>
+          <a:fontRef idx="minor">
+            <a:schemeClr val="dk1"/>
+          </a:fontRef>
+        </p:style>
+        <p:txBody>
+          <a:bodyPr rtlCol="0" anchor="ctr"/>
+          <a:lstStyle/>
+          <a:p>
+            <a:pPr algn="ctr"/>
+            <a:r>
               <a:rPr lang="en-US" altLang="ko-KR" sz="1400"/>
-              <a:t>OCI Runtime Spec</a:t>
+              <a:t>Create namespace (clone()),</a:t>
+            </a:r>
+          </a:p>
+          <a:p>
+            <a:pPr algn="ctr"/>
+            <a:r>
+              <a:rPr lang="en-US" altLang="ko-KR" sz="1400"/>
+              <a:t>Set rootfs (overlay FS)</a:t>
+            </a:r>
+          </a:p>
+        </p:txBody>
+      </p:sp>
+      <p:sp>
+        <p:nvSpPr>
+          <p:cNvPr id="73" name="타원 72">
+            <a:extLst>
+              <a:ext uri="{FF2B5EF4-FFF2-40B4-BE49-F238E27FC236}">
+                <a16:creationId xmlns:a16="http://schemas.microsoft.com/office/drawing/2014/main" id="{3D06B21E-B4C8-C97E-A8A8-41A024A3AAAD}"/>
+              </a:ext>
+            </a:extLst>
+          </p:cNvPr>
+          <p:cNvSpPr/>
+          <p:nvPr/>
+        </p:nvSpPr>
+        <p:spPr>
+          <a:xfrm>
+            <a:off x="5054539" y="1708096"/>
+            <a:ext cx="288032" cy="288032"/>
+          </a:xfrm>
+          <a:prstGeom prst="ellipse">
+            <a:avLst/>
+          </a:prstGeom>
+        </p:spPr>
+        <p:style>
+          <a:lnRef idx="2">
+            <a:schemeClr val="dk1"/>
+          </a:lnRef>
+          <a:fillRef idx="1">
+            <a:schemeClr val="lt1"/>
+          </a:fillRef>
+          <a:effectRef idx="0">
+            <a:schemeClr val="dk1"/>
+          </a:effectRef>
+          <a:fontRef idx="minor">
+            <a:schemeClr val="dk1"/>
+          </a:fontRef>
+        </p:style>
+        <p:txBody>
+          <a:bodyPr rtlCol="0" anchor="ctr"/>
+          <a:lstStyle/>
+          <a:p>
+            <a:pPr algn="ctr"/>
+            <a:r>
+              <a:rPr lang="en-US" altLang="ko-KR" sz="1600"/>
+              <a:t>2</a:t>
+            </a:r>
+            <a:endParaRPr lang="ko-KR" altLang="en-US" sz="1600"/>
+          </a:p>
+        </p:txBody>
+      </p:sp>
+      <p:sp>
+        <p:nvSpPr>
+          <p:cNvPr id="74" name="타원 73">
+            <a:extLst>
+              <a:ext uri="{FF2B5EF4-FFF2-40B4-BE49-F238E27FC236}">
+                <a16:creationId xmlns:a16="http://schemas.microsoft.com/office/drawing/2014/main" id="{12E84C7F-602E-1394-C058-B812ABB2093C}"/>
+              </a:ext>
+            </a:extLst>
+          </p:cNvPr>
+          <p:cNvSpPr/>
+          <p:nvPr/>
+        </p:nvSpPr>
+        <p:spPr>
+          <a:xfrm>
+            <a:off x="5054539" y="2886446"/>
+            <a:ext cx="288032" cy="288032"/>
+          </a:xfrm>
+          <a:prstGeom prst="ellipse">
+            <a:avLst/>
+          </a:prstGeom>
+        </p:spPr>
+        <p:style>
+          <a:lnRef idx="2">
+            <a:schemeClr val="dk1"/>
+          </a:lnRef>
+          <a:fillRef idx="1">
+            <a:schemeClr val="lt1"/>
+          </a:fillRef>
+          <a:effectRef idx="0">
+            <a:schemeClr val="dk1"/>
+          </a:effectRef>
+          <a:fontRef idx="minor">
+            <a:schemeClr val="dk1"/>
+          </a:fontRef>
+        </p:style>
+        <p:txBody>
+          <a:bodyPr rtlCol="0" anchor="ctr"/>
+          <a:lstStyle/>
+          <a:p>
+            <a:pPr algn="ctr"/>
+            <a:r>
+              <a:rPr lang="en-US" altLang="ko-KR" sz="1600"/>
+              <a:t>3</a:t>
+            </a:r>
+            <a:endParaRPr lang="ko-KR" altLang="en-US" sz="1600"/>
+          </a:p>
+        </p:txBody>
+      </p:sp>
+      <p:sp>
+        <p:nvSpPr>
+          <p:cNvPr id="75" name="타원 74">
+            <a:extLst>
+              <a:ext uri="{FF2B5EF4-FFF2-40B4-BE49-F238E27FC236}">
+                <a16:creationId xmlns:a16="http://schemas.microsoft.com/office/drawing/2014/main" id="{03712F6E-D101-AE14-5440-4FAFDBCBA76B}"/>
+              </a:ext>
+            </a:extLst>
+          </p:cNvPr>
+          <p:cNvSpPr/>
+          <p:nvPr/>
+        </p:nvSpPr>
+        <p:spPr>
+          <a:xfrm>
+            <a:off x="3693972" y="4030253"/>
+            <a:ext cx="288032" cy="288032"/>
+          </a:xfrm>
+          <a:prstGeom prst="ellipse">
+            <a:avLst/>
+          </a:prstGeom>
+        </p:spPr>
+        <p:style>
+          <a:lnRef idx="2">
+            <a:schemeClr val="dk1"/>
+          </a:lnRef>
+          <a:fillRef idx="1">
+            <a:schemeClr val="lt1"/>
+          </a:fillRef>
+          <a:effectRef idx="0">
+            <a:schemeClr val="dk1"/>
+          </a:effectRef>
+          <a:fontRef idx="minor">
+            <a:schemeClr val="dk1"/>
+          </a:fontRef>
+        </p:style>
+        <p:txBody>
+          <a:bodyPr rtlCol="0" anchor="ctr"/>
+          <a:lstStyle/>
+          <a:p>
+            <a:pPr algn="ctr"/>
+            <a:r>
+              <a:rPr lang="en-US" altLang="ko-KR" sz="1600"/>
+              <a:t>4</a:t>
+            </a:r>
+            <a:endParaRPr lang="ko-KR" altLang="en-US" sz="1600"/>
+          </a:p>
+        </p:txBody>
+      </p:sp>
+      <p:sp>
+        <p:nvSpPr>
+          <p:cNvPr id="80" name="사각형: 둥근 모서리 114">
+            <a:extLst>
+              <a:ext uri="{FF2B5EF4-FFF2-40B4-BE49-F238E27FC236}">
+                <a16:creationId xmlns:a16="http://schemas.microsoft.com/office/drawing/2014/main" id="{81580CDA-A4DC-926E-BF06-49B86D6E308F}"/>
+              </a:ext>
+            </a:extLst>
+          </p:cNvPr>
+          <p:cNvSpPr/>
+          <p:nvPr/>
+        </p:nvSpPr>
+        <p:spPr>
+          <a:xfrm>
+            <a:off x="2548806" y="1902976"/>
+            <a:ext cx="2604420" cy="619914"/>
+          </a:xfrm>
+          <a:prstGeom prst="roundRect">
+            <a:avLst>
+              <a:gd name="adj" fmla="val 10304"/>
+            </a:avLst>
+          </a:prstGeom>
+          <a:noFill/>
+          <a:ln>
+            <a:noFill/>
+          </a:ln>
+        </p:spPr>
+        <p:style>
+          <a:lnRef idx="2">
+            <a:schemeClr val="dk1"/>
+          </a:lnRef>
+          <a:fillRef idx="1">
+            <a:schemeClr val="lt1"/>
+          </a:fillRef>
+          <a:effectRef idx="0">
+            <a:schemeClr val="dk1"/>
+          </a:effectRef>
+          <a:fontRef idx="minor">
+            <a:schemeClr val="dk1"/>
+          </a:fontRef>
+        </p:style>
+        <p:txBody>
+          <a:bodyPr rtlCol="0" anchor="ctr"/>
+          <a:lstStyle/>
+          <a:p>
+            <a:pPr algn="ctr"/>
+            <a:r>
+              <a:rPr lang="en-US" altLang="ko-KR" sz="1400"/>
+              <a:t>Change root (pivot_root()),</a:t>
+            </a:r>
+            <a:br>
+              <a:rPr lang="en-US" altLang="ko-KR" sz="1400"/>
+            </a:br>
+            <a:r>
+              <a:rPr lang="en-US" altLang="ko-KR" sz="1400"/>
+              <a:t>Exec app (exec())</a:t>
+            </a:r>
+          </a:p>
+        </p:txBody>
+      </p:sp>
+      <p:sp>
+        <p:nvSpPr>
+          <p:cNvPr id="76" name="타원 75">
+            <a:extLst>
+              <a:ext uri="{FF2B5EF4-FFF2-40B4-BE49-F238E27FC236}">
+                <a16:creationId xmlns:a16="http://schemas.microsoft.com/office/drawing/2014/main" id="{6ED8FE13-254F-4094-BE66-85495E6FE887}"/>
+              </a:ext>
+            </a:extLst>
+          </p:cNvPr>
+          <p:cNvSpPr/>
+          <p:nvPr/>
+        </p:nvSpPr>
+        <p:spPr>
+          <a:xfrm>
+            <a:off x="3690518" y="1705061"/>
+            <a:ext cx="288032" cy="288032"/>
+          </a:xfrm>
+          <a:prstGeom prst="ellipse">
+            <a:avLst/>
+          </a:prstGeom>
+          <a:solidFill>
+            <a:schemeClr val="bg1"/>
+          </a:solidFill>
+        </p:spPr>
+        <p:style>
+          <a:lnRef idx="2">
+            <a:schemeClr val="dk1"/>
+          </a:lnRef>
+          <a:fillRef idx="1">
+            <a:schemeClr val="lt1"/>
+          </a:fillRef>
+          <a:effectRef idx="0">
+            <a:schemeClr val="dk1"/>
+          </a:effectRef>
+          <a:fontRef idx="minor">
+            <a:schemeClr val="dk1"/>
+          </a:fontRef>
+        </p:style>
+        <p:txBody>
+          <a:bodyPr rtlCol="0" anchor="ctr"/>
+          <a:lstStyle/>
+          <a:p>
+            <a:pPr algn="ctr"/>
+            <a:r>
+              <a:rPr lang="en-US" altLang="ko-KR" sz="1600"/>
+              <a:t>5</a:t>
+            </a:r>
+            <a:endParaRPr lang="ko-KR" altLang="en-US" sz="1600"/>
+          </a:p>
+        </p:txBody>
+      </p:sp>
+      <p:cxnSp>
+        <p:nvCxnSpPr>
+          <p:cNvPr id="97" name="직선 화살표 연결선 96">
+            <a:extLst>
+              <a:ext uri="{FF2B5EF4-FFF2-40B4-BE49-F238E27FC236}">
+                <a16:creationId xmlns:a16="http://schemas.microsoft.com/office/drawing/2014/main" id="{73965EDB-8B72-A906-108E-D38F962AAA8C}"/>
+              </a:ext>
+            </a:extLst>
+          </p:cNvPr>
+          <p:cNvCxnSpPr>
+            <a:cxnSpLocks/>
+            <a:stCxn id="35" idx="1"/>
+          </p:cNvCxnSpPr>
+          <p:nvPr/>
+        </p:nvCxnSpPr>
+        <p:spPr>
+          <a:xfrm flipH="1">
+            <a:off x="1718313" y="1594831"/>
+            <a:ext cx="2122988" cy="636953"/>
+          </a:xfrm>
+          <a:prstGeom prst="straightConnector1">
+            <a:avLst/>
+          </a:prstGeom>
+          <a:ln w="19050">
+            <a:solidFill>
+              <a:schemeClr val="tx1"/>
+            </a:solidFill>
+            <a:headEnd type="none" w="med" len="med"/>
+            <a:tailEnd type="arrow" w="med" len="med"/>
+          </a:ln>
+        </p:spPr>
+        <p:style>
+          <a:lnRef idx="1">
+            <a:schemeClr val="accent1"/>
+          </a:lnRef>
+          <a:fillRef idx="0">
+            <a:schemeClr val="accent1"/>
+          </a:fillRef>
+          <a:effectRef idx="0">
+            <a:schemeClr val="accent1"/>
+          </a:effectRef>
+          <a:fontRef idx="minor">
+            <a:schemeClr val="tx1"/>
+          </a:fontRef>
+        </p:style>
+      </p:cxnSp>
+      <p:sp>
+        <p:nvSpPr>
+          <p:cNvPr id="70" name="타원 69">
+            <a:extLst>
+              <a:ext uri="{FF2B5EF4-FFF2-40B4-BE49-F238E27FC236}">
+                <a16:creationId xmlns:a16="http://schemas.microsoft.com/office/drawing/2014/main" id="{5D0B6546-3B63-E414-9215-AE042A33EBDC}"/>
+              </a:ext>
+            </a:extLst>
+          </p:cNvPr>
+          <p:cNvSpPr/>
+          <p:nvPr/>
+        </p:nvSpPr>
+        <p:spPr>
+          <a:xfrm>
+            <a:off x="3693972" y="1234253"/>
+            <a:ext cx="288032" cy="288032"/>
+          </a:xfrm>
+          <a:prstGeom prst="ellipse">
+            <a:avLst/>
+          </a:prstGeom>
+        </p:spPr>
+        <p:style>
+          <a:lnRef idx="2">
+            <a:schemeClr val="dk1"/>
+          </a:lnRef>
+          <a:fillRef idx="1">
+            <a:schemeClr val="lt1"/>
+          </a:fillRef>
+          <a:effectRef idx="0">
+            <a:schemeClr val="dk1"/>
+          </a:effectRef>
+          <a:fontRef idx="minor">
+            <a:schemeClr val="dk1"/>
+          </a:fontRef>
+        </p:style>
+        <p:txBody>
+          <a:bodyPr rtlCol="0" anchor="ctr"/>
+          <a:lstStyle/>
+          <a:p>
+            <a:pPr algn="ctr"/>
+            <a:r>
+              <a:rPr lang="en-US" altLang="ko-KR" sz="1600"/>
+              <a:t>1</a:t>
+            </a:r>
+            <a:endParaRPr lang="ko-KR" altLang="en-US" sz="1600"/>
+          </a:p>
+        </p:txBody>
+      </p:sp>
+      <p:sp>
+        <p:nvSpPr>
+          <p:cNvPr id="24" name="사각형: 둥근 모서리 114">
+            <a:extLst>
+              <a:ext uri="{FF2B5EF4-FFF2-40B4-BE49-F238E27FC236}">
+                <a16:creationId xmlns:a16="http://schemas.microsoft.com/office/drawing/2014/main" id="{8BD2647E-7F6D-665A-281C-4989E21F06B8}"/>
+              </a:ext>
+            </a:extLst>
+          </p:cNvPr>
+          <p:cNvSpPr/>
+          <p:nvPr/>
+        </p:nvSpPr>
+        <p:spPr>
+          <a:xfrm>
+            <a:off x="921657" y="3734226"/>
+            <a:ext cx="2878471" cy="619914"/>
+          </a:xfrm>
+          <a:prstGeom prst="roundRect">
+            <a:avLst>
+              <a:gd name="adj" fmla="val 10304"/>
+            </a:avLst>
+          </a:prstGeom>
+          <a:noFill/>
+          <a:ln>
+            <a:noFill/>
+          </a:ln>
+        </p:spPr>
+        <p:style>
+          <a:lnRef idx="2">
+            <a:schemeClr val="dk1"/>
+          </a:lnRef>
+          <a:fillRef idx="1">
+            <a:schemeClr val="lt1"/>
+          </a:fillRef>
+          <a:effectRef idx="0">
+            <a:schemeClr val="dk1"/>
+          </a:effectRef>
+          <a:fontRef idx="minor">
+            <a:schemeClr val="dk1"/>
+          </a:fontRef>
+        </p:style>
+        <p:txBody>
+          <a:bodyPr rtlCol="0" anchor="ctr"/>
+          <a:lstStyle/>
+          <a:p>
+            <a:pPr algn="ctr"/>
+            <a:r>
+              <a:rPr lang="en-US" altLang="ko-KR" sz="1400"/>
+              <a:t>Make device node </a:t>
+            </a:r>
+            <a:br>
+              <a:rPr lang="en-US" altLang="ko-KR" sz="1400"/>
+            </a:br>
+            <a:r>
+              <a:rPr lang="en-US" altLang="ko-KR" sz="1400"/>
+              <a:t>(mknod), Load kernel module</a:t>
+            </a:r>
+          </a:p>
+        </p:txBody>
+      </p:sp>
+      <p:sp>
+        <p:nvSpPr>
+          <p:cNvPr id="4" name="사각형: 둥근 모서리 114">
+            <a:extLst>
+              <a:ext uri="{FF2B5EF4-FFF2-40B4-BE49-F238E27FC236}">
+                <a16:creationId xmlns:a16="http://schemas.microsoft.com/office/drawing/2014/main" id="{BFD3FE09-03AF-1987-088E-72EB08CB5B76}"/>
+              </a:ext>
+            </a:extLst>
+          </p:cNvPr>
+          <p:cNvSpPr/>
+          <p:nvPr/>
+        </p:nvSpPr>
+        <p:spPr>
+          <a:xfrm>
+            <a:off x="7153673" y="1370132"/>
+            <a:ext cx="1717863" cy="433441"/>
+          </a:xfrm>
+          <a:prstGeom prst="roundRect">
+            <a:avLst>
+              <a:gd name="adj" fmla="val 10304"/>
+            </a:avLst>
+          </a:prstGeom>
+        </p:spPr>
+        <p:style>
+          <a:lnRef idx="2">
+            <a:schemeClr val="dk1"/>
+          </a:lnRef>
+          <a:fillRef idx="1">
+            <a:schemeClr val="lt1"/>
+          </a:fillRef>
+          <a:effectRef idx="0">
+            <a:schemeClr val="dk1"/>
+          </a:effectRef>
+          <a:fontRef idx="minor">
+            <a:schemeClr val="dk1"/>
+          </a:fontRef>
+        </p:style>
+        <p:txBody>
+          <a:bodyPr rtlCol="0" anchor="ctr"/>
+          <a:lstStyle/>
+          <a:p>
+            <a:pPr algn="ctr"/>
+            <a:r>
+              <a:rPr lang="en-US" altLang="ko-KR" sz="1400"/>
+              <a:t>OCI Runtime</a:t>
+            </a:r>
+          </a:p>
+          <a:p>
+            <a:pPr algn="ctr"/>
+            <a:r>
+              <a:rPr lang="en-US" altLang="ko-KR" sz="1400"/>
+              <a:t>Config.json</a:t>
             </a:r>
             <a:endParaRPr lang="en-US" altLang="ko-KR" sz="1400" dirty="0"/>
           </a:p>
         </p:txBody>
       </p:sp>
+      <p:cxnSp>
+        <p:nvCxnSpPr>
+          <p:cNvPr id="5" name="직선 화살표 연결선 17">
+            <a:extLst>
+              <a:ext uri="{FF2B5EF4-FFF2-40B4-BE49-F238E27FC236}">
+                <a16:creationId xmlns:a16="http://schemas.microsoft.com/office/drawing/2014/main" id="{73A68F90-A225-1E6B-0D4B-49050CDFFAFE}"/>
+              </a:ext>
+            </a:extLst>
+          </p:cNvPr>
+          <p:cNvCxnSpPr>
+            <a:cxnSpLocks/>
+            <a:stCxn id="4" idx="1"/>
+            <a:endCxn id="35" idx="3"/>
+          </p:cNvCxnSpPr>
+          <p:nvPr/>
+        </p:nvCxnSpPr>
+        <p:spPr>
+          <a:xfrm flipH="1">
+            <a:off x="6572443" y="1586853"/>
+            <a:ext cx="581230" cy="7978"/>
+          </a:xfrm>
+          <a:prstGeom prst="straightConnector1">
+            <a:avLst/>
+          </a:prstGeom>
+          <a:ln w="19050">
+            <a:solidFill>
+              <a:schemeClr val="tx1"/>
+            </a:solidFill>
+            <a:headEnd type="none" w="med" len="med"/>
+            <a:tailEnd type="arrow" w="med" len="med"/>
+          </a:ln>
+        </p:spPr>
+        <p:style>
+          <a:lnRef idx="1">
+            <a:schemeClr val="accent1"/>
+          </a:lnRef>
+          <a:fillRef idx="0">
+            <a:schemeClr val="accent1"/>
+          </a:fillRef>
+          <a:effectRef idx="0">
+            <a:schemeClr val="accent1"/>
+          </a:effectRef>
+          <a:fontRef idx="minor">
+            <a:schemeClr val="tx1"/>
+          </a:fontRef>
+        </p:style>
+      </p:cxnSp>
+      <p:cxnSp>
+        <p:nvCxnSpPr>
+          <p:cNvPr id="26" name="직선 화살표 연결선 17">
+            <a:extLst>
+              <a:ext uri="{FF2B5EF4-FFF2-40B4-BE49-F238E27FC236}">
+                <a16:creationId xmlns:a16="http://schemas.microsoft.com/office/drawing/2014/main" id="{080B94D1-EF6B-8C54-F068-8376FB251754}"/>
+              </a:ext>
+            </a:extLst>
+          </p:cNvPr>
+          <p:cNvCxnSpPr>
+            <a:cxnSpLocks/>
+            <a:stCxn id="4" idx="2"/>
+            <a:endCxn id="44" idx="3"/>
+          </p:cNvCxnSpPr>
+          <p:nvPr/>
+        </p:nvCxnSpPr>
+        <p:spPr>
+          <a:xfrm flipH="1">
+            <a:off x="6740060" y="1803573"/>
+            <a:ext cx="1272545" cy="984899"/>
+          </a:xfrm>
+          <a:prstGeom prst="straightConnector1">
+            <a:avLst/>
+          </a:prstGeom>
+          <a:ln w="19050">
+            <a:solidFill>
+              <a:schemeClr val="tx1"/>
+            </a:solidFill>
+            <a:headEnd type="none" w="med" len="med"/>
+            <a:tailEnd type="arrow" w="med" len="med"/>
+          </a:ln>
+        </p:spPr>
+        <p:style>
+          <a:lnRef idx="1">
+            <a:schemeClr val="accent1"/>
+          </a:lnRef>
+          <a:fillRef idx="0">
+            <a:schemeClr val="accent1"/>
+          </a:fillRef>
+          <a:effectRef idx="0">
+            <a:schemeClr val="accent1"/>
+          </a:effectRef>
+          <a:fontRef idx="minor">
+            <a:schemeClr val="tx1"/>
+          </a:fontRef>
+        </p:style>
+      </p:cxnSp>
     </p:spTree>
     <p:extLst>
       <p:ext uri="{BB962C8B-B14F-4D97-AF65-F5344CB8AC3E}">
-        <p14:creationId xmlns:p14="http://schemas.microsoft.com/office/powerpoint/2010/main" val="3532445663"/>
+        <p14:creationId xmlns:p14="http://schemas.microsoft.com/office/powerpoint/2010/main" val="1318549003"/>
       </p:ext>
     </p:extLst>
   </p:cSld>
@@ -5322,6 +8176,358 @@
         </p:spPr>
         <p:txBody>
           <a:bodyPr>
+            <a:normAutofit fontScale="90000"/>
+          </a:bodyPr>
+          <a:lstStyle/>
+          <a:p>
+            <a:r>
+              <a:rPr lang="en-US" altLang="ko-KR"/>
+              <a:t>CUDA Container OCI Runtime Spec</a:t>
+            </a:r>
+            <a:endParaRPr lang="ko-KR" altLang="en-US" dirty="0"/>
+          </a:p>
+        </p:txBody>
+      </p:sp>
+      <p:sp>
+        <p:nvSpPr>
+          <p:cNvPr id="7" name="사각형: 둥근 모서리 114">
+            <a:extLst>
+              <a:ext uri="{FF2B5EF4-FFF2-40B4-BE49-F238E27FC236}">
+                <a16:creationId xmlns:a16="http://schemas.microsoft.com/office/drawing/2014/main" id="{E074CAD6-7716-4458-B0D4-1C0318E58F6D}"/>
+              </a:ext>
+            </a:extLst>
+          </p:cNvPr>
+          <p:cNvSpPr/>
+          <p:nvPr/>
+        </p:nvSpPr>
+        <p:spPr>
+          <a:xfrm>
+            <a:off x="2267744" y="698149"/>
+            <a:ext cx="4752528" cy="433441"/>
+          </a:xfrm>
+          <a:prstGeom prst="roundRect">
+            <a:avLst>
+              <a:gd name="adj" fmla="val 0"/>
+            </a:avLst>
+          </a:prstGeom>
+        </p:spPr>
+        <p:style>
+          <a:lnRef idx="2">
+            <a:schemeClr val="dk1"/>
+          </a:lnRef>
+          <a:fillRef idx="1">
+            <a:schemeClr val="lt1"/>
+          </a:fillRef>
+          <a:effectRef idx="0">
+            <a:schemeClr val="dk1"/>
+          </a:effectRef>
+          <a:fontRef idx="minor">
+            <a:schemeClr val="dk1"/>
+          </a:fontRef>
+        </p:style>
+        <p:txBody>
+          <a:bodyPr rtlCol="0" anchor="ctr"/>
+          <a:lstStyle/>
+          <a:p>
+            <a:r>
+              <a:rPr lang="en-US" altLang="ko-KR" sz="1400"/>
+              <a:t># docker run --gpu all nvidia/cuda:9.0-base nvidia-smi</a:t>
+            </a:r>
+            <a:endParaRPr lang="en-US" altLang="ko-KR" sz="1400" dirty="0"/>
+          </a:p>
+        </p:txBody>
+      </p:sp>
+      <p:sp>
+        <p:nvSpPr>
+          <p:cNvPr id="11" name="사각형: 둥근 모서리 114">
+            <a:extLst>
+              <a:ext uri="{FF2B5EF4-FFF2-40B4-BE49-F238E27FC236}">
+                <a16:creationId xmlns:a16="http://schemas.microsoft.com/office/drawing/2014/main" id="{E07F06D4-AF1E-486E-8493-362B4DEDC5E3}"/>
+              </a:ext>
+            </a:extLst>
+          </p:cNvPr>
+          <p:cNvSpPr/>
+          <p:nvPr/>
+        </p:nvSpPr>
+        <p:spPr>
+          <a:xfrm>
+            <a:off x="899592" y="1354461"/>
+            <a:ext cx="7488831" cy="3367380"/>
+          </a:xfrm>
+          <a:prstGeom prst="roundRect">
+            <a:avLst>
+              <a:gd name="adj" fmla="val 0"/>
+            </a:avLst>
+          </a:prstGeom>
+        </p:spPr>
+        <p:style>
+          <a:lnRef idx="2">
+            <a:schemeClr val="dk1"/>
+          </a:lnRef>
+          <a:fillRef idx="1">
+            <a:schemeClr val="lt1"/>
+          </a:fillRef>
+          <a:effectRef idx="0">
+            <a:schemeClr val="dk1"/>
+          </a:effectRef>
+          <a:fontRef idx="minor">
+            <a:schemeClr val="dk1"/>
+          </a:fontRef>
+        </p:style>
+        <p:txBody>
+          <a:bodyPr rtlCol="0" anchor="ctr"/>
+          <a:lstStyle/>
+          <a:p>
+            <a:r>
+              <a:rPr lang="en-US" altLang="ko-KR" sz="1400"/>
+              <a:t>"hooks": {</a:t>
+            </a:r>
+          </a:p>
+          <a:p>
+            <a:r>
+              <a:rPr lang="en-US" altLang="ko-KR" sz="1400"/>
+              <a:t>    "prestart": [</a:t>
+            </a:r>
+          </a:p>
+          <a:p>
+            <a:r>
+              <a:rPr lang="en-US" altLang="ko-KR" sz="1400"/>
+              <a:t>         {</a:t>
+            </a:r>
+          </a:p>
+          <a:p>
+            <a:r>
+              <a:rPr lang="en-US" altLang="ko-KR" sz="1400"/>
+              <a:t>             "path": “/usr/bin/nvidia-container-runtime-hook”,</a:t>
+            </a:r>
+          </a:p>
+          <a:p>
+            <a:r>
+              <a:rPr lang="en-US" altLang="ko-KR" sz="1400"/>
+              <a:t>             "args": ["nvidia-container-runtime-hook ", “prestart"],</a:t>
+            </a:r>
+          </a:p>
+          <a:p>
+            <a:r>
+              <a:rPr lang="en-US" altLang="ko-KR" sz="1400"/>
+              <a:t>             "env": [“CUDA_VERSION=9.0.176”,</a:t>
+            </a:r>
+            <a:br>
+              <a:rPr lang="en-US" altLang="ko-KR" sz="1400"/>
+            </a:br>
+            <a:r>
+              <a:rPr lang="en-US" altLang="ko-KR" sz="1400"/>
+              <a:t>                       “CUDA_PKG_VERSION=9-0=9.0.176-1”,</a:t>
+            </a:r>
+          </a:p>
+          <a:p>
+            <a:r>
+              <a:rPr lang="en-US" altLang="ko-KR" sz="1400"/>
+              <a:t>                       “NVIDIA_VISIBLE_DEVICES=all“,</a:t>
+            </a:r>
+            <a:br>
+              <a:rPr lang="en-US" altLang="ko-KR" sz="1400"/>
+            </a:br>
+            <a:r>
+              <a:rPr lang="en-US" altLang="ko-KR" sz="1400"/>
+              <a:t>                       “NVIDIA_DRIVER_CAPABILITIES=“compute,utility”,</a:t>
+            </a:r>
+          </a:p>
+          <a:p>
+            <a:r>
+              <a:rPr lang="en-US" altLang="ko-KR" sz="1400"/>
+              <a:t>                       "NVIDIA_REQUIRE_CUDA=cuda&gt;=9.0“,</a:t>
+            </a:r>
+            <a:br>
+              <a:rPr lang="en-US" altLang="ko-KR" sz="1400"/>
+            </a:br>
+            <a:r>
+              <a:rPr lang="en-US" altLang="ko-KR" sz="1400"/>
+              <a:t>                       "LD_LIBRARY_PATH=/usr/local/nvidia/lib:/usr/local/nvidia/lib64“</a:t>
+            </a:r>
+          </a:p>
+          <a:p>
+            <a:r>
+              <a:rPr lang="en-US" altLang="ko-KR" sz="1400"/>
+              <a:t>             ]</a:t>
+            </a:r>
+          </a:p>
+          <a:p>
+            <a:r>
+              <a:rPr lang="en-US" altLang="ko-KR" sz="1400"/>
+              <a:t>         },</a:t>
+            </a:r>
+          </a:p>
+          <a:p>
+            <a:r>
+              <a:rPr lang="en-US" altLang="ko-KR" sz="1400"/>
+              <a:t>    ],</a:t>
+            </a:r>
+          </a:p>
+          <a:p>
+            <a:r>
+              <a:rPr lang="en-US" altLang="ko-KR" sz="1400"/>
+              <a:t>}</a:t>
+            </a:r>
+            <a:endParaRPr lang="en-US" altLang="ko-KR" sz="1400" dirty="0"/>
+          </a:p>
+        </p:txBody>
+      </p:sp>
+      <p:cxnSp>
+        <p:nvCxnSpPr>
+          <p:cNvPr id="9" name="직선 화살표 연결선 8">
+            <a:extLst>
+              <a:ext uri="{FF2B5EF4-FFF2-40B4-BE49-F238E27FC236}">
+                <a16:creationId xmlns:a16="http://schemas.microsoft.com/office/drawing/2014/main" id="{D3447036-464F-4C90-9B09-6E8806442451}"/>
+              </a:ext>
+            </a:extLst>
+          </p:cNvPr>
+          <p:cNvCxnSpPr>
+            <a:cxnSpLocks/>
+            <a:stCxn id="7" idx="2"/>
+            <a:endCxn id="11" idx="0"/>
+          </p:cNvCxnSpPr>
+          <p:nvPr/>
+        </p:nvCxnSpPr>
+        <p:spPr>
+          <a:xfrm>
+            <a:off x="4644008" y="1131590"/>
+            <a:ext cx="0" cy="222871"/>
+          </a:xfrm>
+          <a:prstGeom prst="straightConnector1">
+            <a:avLst/>
+          </a:prstGeom>
+          <a:ln w="19050">
+            <a:solidFill>
+              <a:schemeClr val="tx1"/>
+            </a:solidFill>
+            <a:headEnd type="none" w="med" len="med"/>
+            <a:tailEnd type="arrow" w="med" len="med"/>
+          </a:ln>
+        </p:spPr>
+        <p:style>
+          <a:lnRef idx="1">
+            <a:schemeClr val="accent1"/>
+          </a:lnRef>
+          <a:fillRef idx="0">
+            <a:schemeClr val="accent1"/>
+          </a:fillRef>
+          <a:effectRef idx="0">
+            <a:schemeClr val="accent1"/>
+          </a:effectRef>
+          <a:fontRef idx="minor">
+            <a:schemeClr val="tx1"/>
+          </a:fontRef>
+        </p:style>
+      </p:cxnSp>
+      <p:sp>
+        <p:nvSpPr>
+          <p:cNvPr id="22" name="사각형: 둥근 모서리 114">
+            <a:extLst>
+              <a:ext uri="{FF2B5EF4-FFF2-40B4-BE49-F238E27FC236}">
+                <a16:creationId xmlns:a16="http://schemas.microsoft.com/office/drawing/2014/main" id="{0B79FB11-EB5E-48B2-9B7D-2CF7A5759856}"/>
+              </a:ext>
+            </a:extLst>
+          </p:cNvPr>
+          <p:cNvSpPr/>
+          <p:nvPr/>
+        </p:nvSpPr>
+        <p:spPr>
+          <a:xfrm>
+            <a:off x="3278436" y="4658589"/>
+            <a:ext cx="2731142" cy="433441"/>
+          </a:xfrm>
+          <a:prstGeom prst="roundRect">
+            <a:avLst>
+              <a:gd name="adj" fmla="val 10304"/>
+            </a:avLst>
+          </a:prstGeom>
+          <a:noFill/>
+          <a:ln>
+            <a:noFill/>
+          </a:ln>
+        </p:spPr>
+        <p:style>
+          <a:lnRef idx="2">
+            <a:schemeClr val="dk1"/>
+          </a:lnRef>
+          <a:fillRef idx="1">
+            <a:schemeClr val="lt1"/>
+          </a:fillRef>
+          <a:effectRef idx="0">
+            <a:schemeClr val="dk1"/>
+          </a:effectRef>
+          <a:fontRef idx="minor">
+            <a:schemeClr val="dk1"/>
+          </a:fontRef>
+        </p:style>
+        <p:txBody>
+          <a:bodyPr rtlCol="0" anchor="ctr"/>
+          <a:lstStyle/>
+          <a:p>
+            <a:pPr algn="ctr"/>
+            <a:r>
+              <a:rPr lang="en-US" altLang="ko-KR" sz="1400"/>
+              <a:t>OCI Runtime Spec</a:t>
+            </a:r>
+            <a:endParaRPr lang="en-US" altLang="ko-KR" sz="1400" dirty="0"/>
+          </a:p>
+        </p:txBody>
+      </p:sp>
+    </p:spTree>
+    <p:extLst>
+      <p:ext uri="{BB962C8B-B14F-4D97-AF65-F5344CB8AC3E}">
+        <p14:creationId xmlns:p14="http://schemas.microsoft.com/office/powerpoint/2010/main" val="3532445663"/>
+      </p:ext>
+    </p:extLst>
+  </p:cSld>
+  <p:clrMapOvr>
+    <a:masterClrMapping/>
+  </p:clrMapOvr>
+</p:sld>
+</file>
+
+<file path=ppt/slides/slide12.xml><?xml version="1.0" encoding="utf-8"?>
+<p:sld xmlns:a="http://schemas.openxmlformats.org/drawingml/2006/main" xmlns:r="http://schemas.openxmlformats.org/officeDocument/2006/relationships" xmlns:p="http://schemas.openxmlformats.org/presentationml/2006/main">
+  <p:cSld>
+    <p:spTree>
+      <p:nvGrpSpPr>
+        <p:cNvPr id="1" name=""/>
+        <p:cNvGrpSpPr/>
+        <p:nvPr/>
+      </p:nvGrpSpPr>
+      <p:grpSpPr>
+        <a:xfrm>
+          <a:off x="0" y="0"/>
+          <a:ext cx="0" cy="0"/>
+          <a:chOff x="0" y="0"/>
+          <a:chExt cx="0" cy="0"/>
+        </a:xfrm>
+      </p:grpSpPr>
+      <p:sp>
+        <p:nvSpPr>
+          <p:cNvPr id="2" name="제목 1">
+            <a:extLst>
+              <a:ext uri="{FF2B5EF4-FFF2-40B4-BE49-F238E27FC236}">
+                <a16:creationId xmlns:a16="http://schemas.microsoft.com/office/drawing/2014/main" id="{8738443D-5E72-49E2-86AC-581D61C41C39}"/>
+              </a:ext>
+            </a:extLst>
+          </p:cNvPr>
+          <p:cNvSpPr>
+            <a:spLocks noGrp="1"/>
+          </p:cNvSpPr>
+          <p:nvPr>
+            <p:ph type="title"/>
+          </p:nvPr>
+        </p:nvSpPr>
+        <p:spPr>
+          <a:xfrm>
+            <a:off x="0" y="-92546"/>
+            <a:ext cx="9144000" cy="857250"/>
+          </a:xfrm>
+        </p:spPr>
+        <p:txBody>
+          <a:bodyPr>
             <a:normAutofit/>
           </a:bodyPr>
           <a:lstStyle/>
@@ -6510,7 +9716,7 @@
 </p:sld>
 </file>
 
-<file path=ppt/slides/slide12.xml><?xml version="1.0" encoding="utf-8"?>
+<file path=ppt/slides/slide13.xml><?xml version="1.0" encoding="utf-8"?>
 <p:sld xmlns:a="http://schemas.openxmlformats.org/drawingml/2006/main" xmlns:r="http://schemas.openxmlformats.org/officeDocument/2006/relationships" xmlns:p="http://schemas.openxmlformats.org/presentationml/2006/main">
   <p:cSld>
     <p:spTree>
@@ -8762,7 +11968,7 @@
         </p:nvSpPr>
         <p:spPr>
           <a:xfrm>
-            <a:off x="4631738" y="2612782"/>
+            <a:off x="4778229" y="2516062"/>
             <a:ext cx="2731142" cy="368912"/>
           </a:xfrm>
           <a:prstGeom prst="roundRect">
@@ -8795,8 +12001,8 @@
           <a:p>
             <a:pPr algn="ctr"/>
             <a:r>
-              <a:rPr lang="en-US" altLang="ko-KR" sz="1000" b="1" i="1"/>
-              <a:t>Exec via OCI runtime’s </a:t>
+              <a:rPr lang="en-US" altLang="ko-KR" sz="1000" i="1"/>
+              <a:t>Execute via OCI runtime’s </a:t>
             </a:r>
           </a:p>
           <a:p>
@@ -8822,8 +12028,8 @@
         </p:nvSpPr>
         <p:spPr>
           <a:xfrm>
-            <a:off x="4806599" y="3602251"/>
-            <a:ext cx="2381421" cy="457298"/>
+            <a:off x="4951288" y="3533577"/>
+            <a:ext cx="2381421" cy="558237"/>
           </a:xfrm>
           <a:prstGeom prst="roundRect">
             <a:avLst>
@@ -8855,15 +12061,23 @@
           <a:p>
             <a:pPr algn="ctr"/>
             <a:r>
+              <a:rPr lang="en-US" altLang="ko-KR" sz="1000" i="1"/>
+              <a:t>Execute with </a:t>
+            </a:r>
+            <a:r>
               <a:rPr lang="en-US" altLang="ko-KR" sz="1000" b="1" i="1"/>
-              <a:t>Exec with container, </a:t>
-            </a:r>
-          </a:p>
-          <a:p>
-            <a:pPr algn="ctr"/>
-            <a:r>
-              <a:rPr lang="en-US" altLang="ko-KR" sz="1000" b="1" i="1"/>
-              <a:t>GPU, CUDA parameters</a:t>
+              <a:t>NVIDIA_VISIBLE_DEVICES </a:t>
+            </a:r>
+            <a:r>
+              <a:rPr lang="en-US" altLang="ko-KR" sz="1000" i="1"/>
+              <a:t>env</a:t>
+            </a:r>
+          </a:p>
+          <a:p>
+            <a:pPr algn="ctr"/>
+            <a:r>
+              <a:rPr lang="en-US" altLang="ko-KR" sz="1000" i="1"/>
+              <a:t>in OCI Runtime Config</a:t>
             </a:r>
           </a:p>
         </p:txBody>
@@ -9041,7 +12255,7 @@
             <a:pPr algn="ctr"/>
             <a:r>
               <a:rPr lang="en-US" altLang="ko-KR" sz="1000"/>
-              <a:t>3</a:t>
+              <a:t>8</a:t>
             </a:r>
             <a:endParaRPr lang="ko-KR" altLang="en-US" sz="1000"/>
           </a:p>
@@ -9061,7 +12275,7 @@
         </p:nvSpPr>
         <p:spPr>
           <a:xfrm>
-            <a:off x="5082692" y="3507810"/>
+            <a:off x="5082692" y="3441849"/>
             <a:ext cx="261982" cy="245150"/>
           </a:xfrm>
           <a:prstGeom prst="ellipse">
@@ -9090,7 +12304,7 @@
             <a:pPr algn="ctr"/>
             <a:r>
               <a:rPr lang="en-US" altLang="ko-KR" sz="1000"/>
-              <a:t>4</a:t>
+              <a:t>9</a:t>
             </a:r>
             <a:endParaRPr lang="ko-KR" altLang="en-US" sz="1000"/>
           </a:p>
@@ -9137,10 +12351,6 @@
           <a:lstStyle/>
           <a:p>
             <a:pPr algn="ctr"/>
-            <a:r>
-              <a:rPr lang="en-US" altLang="ko-KR" sz="1000"/>
-              <a:t>5</a:t>
-            </a:r>
             <a:endParaRPr lang="ko-KR" altLang="en-US" sz="1000"/>
           </a:p>
         </p:txBody>
@@ -9293,7 +12503,7 @@
             <a:pPr algn="ctr"/>
             <a:r>
               <a:rPr lang="en-US" altLang="ko-KR" sz="1000"/>
-              <a:t>1</a:t>
+              <a:t>6</a:t>
             </a:r>
             <a:endParaRPr lang="ko-KR" altLang="en-US" sz="1000"/>
           </a:p>
@@ -9313,8 +12523,8 @@
         </p:nvSpPr>
         <p:spPr>
           <a:xfrm>
-            <a:off x="1869653" y="4556806"/>
-            <a:ext cx="1859108" cy="339346"/>
+            <a:off x="1788388" y="4606536"/>
+            <a:ext cx="2092741" cy="452194"/>
           </a:xfrm>
           <a:prstGeom prst="roundRect">
             <a:avLst>
@@ -9347,14 +12557,21 @@
             <a:pPr algn="ctr"/>
             <a:r>
               <a:rPr lang="en-US" altLang="ko-KR" sz="1000" i="1"/>
-              <a:t>Bind Mount device node, </a:t>
-            </a:r>
-          </a:p>
-          <a:p>
-            <a:pPr algn="ctr"/>
-            <a:r>
+              <a:t>Bind mount GPU device file </a:t>
+            </a:r>
+            <a:br>
               <a:rPr lang="en-US" altLang="ko-KR" sz="1000" i="1"/>
-              <a:t>Load kernel module</a:t>
+            </a:br>
+            <a:r>
+              <a:rPr lang="en-US" altLang="ko-KR" sz="1000" i="1"/>
+              <a:t>and CUDA libraries/tools,</a:t>
+            </a:r>
+          </a:p>
+          <a:p>
+            <a:pPr algn="ctr"/>
+            <a:r>
+              <a:rPr lang="en-US" altLang="ko-KR" sz="1000" i="1"/>
+              <a:t>Load GPU kernel module</a:t>
             </a:r>
           </a:p>
         </p:txBody>
@@ -9468,15 +12685,15 @@
           </p:cNvPr>
           <p:cNvCxnSpPr>
             <a:cxnSpLocks/>
-            <a:stCxn id="4" idx="2"/>
+            <a:stCxn id="4" idx="1"/>
             <a:endCxn id="44" idx="3"/>
           </p:cNvCxnSpPr>
           <p:nvPr/>
         </p:nvCxnSpPr>
         <p:spPr>
           <a:xfrm flipH="1">
-            <a:off x="6592090" y="2510457"/>
-            <a:ext cx="1435643" cy="840149"/>
+            <a:off x="6592090" y="2326002"/>
+            <a:ext cx="576711" cy="1024604"/>
           </a:xfrm>
           <a:prstGeom prst="straightConnector1">
             <a:avLst/>
@@ -9657,7 +12874,7 @@
             <a:pPr algn="ctr"/>
             <a:r>
               <a:rPr lang="en-US" altLang="ko-KR" sz="1000"/>
-              <a:t>2</a:t>
+              <a:t>7</a:t>
             </a:r>
             <a:endParaRPr lang="ko-KR" altLang="en-US" sz="1000"/>
           </a:p>
@@ -9749,10 +12966,6 @@
           <a:lstStyle/>
           <a:p>
             <a:pPr algn="ctr"/>
-            <a:r>
-              <a:rPr lang="en-US" altLang="ko-KR" sz="1000"/>
-              <a:t>6</a:t>
-            </a:r>
             <a:endParaRPr lang="ko-KR" altLang="en-US" sz="1000"/>
           </a:p>
         </p:txBody>
@@ -9807,55 +13020,6 @@
               <a:rPr lang="en-US" altLang="ko-KR" sz="1000" i="1"/>
               <a:t>Response done prestart hook through FIFO</a:t>
             </a:r>
-          </a:p>
-        </p:txBody>
-      </p:sp>
-      <p:sp>
-        <p:nvSpPr>
-          <p:cNvPr id="64" name="타원 63">
-            <a:extLst>
-              <a:ext uri="{FF2B5EF4-FFF2-40B4-BE49-F238E27FC236}">
-                <a16:creationId xmlns:a16="http://schemas.microsoft.com/office/drawing/2014/main" id="{2CB05037-1388-2466-D23A-95D5D6AF2C6C}"/>
-              </a:ext>
-            </a:extLst>
-          </p:cNvPr>
-          <p:cNvSpPr/>
-          <p:nvPr/>
-        </p:nvSpPr>
-        <p:spPr>
-          <a:xfrm>
-            <a:off x="1065067" y="3458377"/>
-            <a:ext cx="261982" cy="245150"/>
-          </a:xfrm>
-          <a:prstGeom prst="ellipse">
-            <a:avLst/>
-          </a:prstGeom>
-          <a:ln w="12700"/>
-        </p:spPr>
-        <p:style>
-          <a:lnRef idx="2">
-            <a:schemeClr val="dk1"/>
-          </a:lnRef>
-          <a:fillRef idx="1">
-            <a:schemeClr val="lt1"/>
-          </a:fillRef>
-          <a:effectRef idx="0">
-            <a:schemeClr val="dk1"/>
-          </a:effectRef>
-          <a:fontRef idx="minor">
-            <a:schemeClr val="dk1"/>
-          </a:fontRef>
-        </p:style>
-        <p:txBody>
-          <a:bodyPr rtlCol="0" anchor="ctr"/>
-          <a:lstStyle/>
-          <a:p>
-            <a:pPr algn="ctr"/>
-            <a:r>
-              <a:rPr lang="en-US" altLang="ko-KR" sz="1000"/>
-              <a:t>7</a:t>
-            </a:r>
-            <a:endParaRPr lang="ko-KR" altLang="en-US" sz="1000"/>
           </a:p>
         </p:txBody>
       </p:sp>
@@ -10002,7 +13166,7 @@
             <a:pPr algn="ctr"/>
             <a:r>
               <a:rPr lang="en-US" altLang="ko-KR" sz="1050"/>
-              <a:t>containerd</a:t>
+              <a:t>containerd/dockerd</a:t>
             </a:r>
             <a:endParaRPr lang="en-US" altLang="ko-KR" sz="1050" dirty="0"/>
           </a:p>
@@ -10147,7 +13311,7 @@
             <a:pPr algn="ctr"/>
             <a:r>
               <a:rPr lang="en-US" altLang="ko-KR" sz="1050" dirty="0"/>
-              <a:t>ctr</a:t>
+              <a:t>ctr/docker</a:t>
             </a:r>
           </a:p>
         </p:txBody>
@@ -10447,7 +13611,7 @@
         </p:nvSpPr>
         <p:spPr>
           <a:xfrm>
-            <a:off x="5061641" y="521840"/>
+            <a:off x="5061641" y="488750"/>
             <a:ext cx="1954122" cy="357931"/>
           </a:xfrm>
           <a:prstGeom prst="roundRect">
@@ -10481,7 +13645,14 @@
             <a:pPr algn="ctr"/>
             <a:r>
               <a:rPr lang="en-US" altLang="ko-KR" sz="1000" i="1"/>
-              <a:t>Request create container</a:t>
+              <a:t>Execute to</a:t>
+            </a:r>
+          </a:p>
+          <a:p>
+            <a:pPr algn="ctr"/>
+            <a:r>
+              <a:rPr lang="en-US" altLang="ko-KR" sz="1000" i="1"/>
+              <a:t>request create container</a:t>
             </a:r>
           </a:p>
         </p:txBody>
@@ -10692,6 +13863,319 @@
               <a:t>4</a:t>
             </a:r>
             <a:endParaRPr lang="ko-KR" altLang="en-US" sz="1000"/>
+          </a:p>
+        </p:txBody>
+      </p:sp>
+      <p:sp>
+        <p:nvSpPr>
+          <p:cNvPr id="105" name="사각형: 둥근 모서리 114">
+            <a:extLst>
+              <a:ext uri="{FF2B5EF4-FFF2-40B4-BE49-F238E27FC236}">
+                <a16:creationId xmlns:a16="http://schemas.microsoft.com/office/drawing/2014/main" id="{057F0C62-E8F8-9CA2-0D87-B184E67EE533}"/>
+              </a:ext>
+            </a:extLst>
+          </p:cNvPr>
+          <p:cNvSpPr/>
+          <p:nvPr/>
+        </p:nvSpPr>
+        <p:spPr>
+          <a:xfrm>
+            <a:off x="5061641" y="1498783"/>
+            <a:ext cx="1954122" cy="357931"/>
+          </a:xfrm>
+          <a:prstGeom prst="roundRect">
+            <a:avLst>
+              <a:gd name="adj" fmla="val 10304"/>
+            </a:avLst>
+          </a:prstGeom>
+          <a:noFill/>
+          <a:ln>
+            <a:noFill/>
+          </a:ln>
+        </p:spPr>
+        <p:style>
+          <a:lnRef idx="2">
+            <a:schemeClr val="dk1"/>
+          </a:lnRef>
+          <a:fillRef idx="1">
+            <a:schemeClr val="lt1"/>
+          </a:fillRef>
+          <a:effectRef idx="0">
+            <a:schemeClr val="dk1"/>
+          </a:effectRef>
+          <a:fontRef idx="minor">
+            <a:schemeClr val="dk1"/>
+          </a:fontRef>
+        </p:style>
+        <p:txBody>
+          <a:bodyPr rtlCol="0" anchor="ctr"/>
+          <a:lstStyle/>
+          <a:p>
+            <a:pPr algn="ctr"/>
+            <a:r>
+              <a:rPr lang="en-US" altLang="ko-KR" sz="1000" i="1"/>
+              <a:t>Execute to</a:t>
+            </a:r>
+          </a:p>
+          <a:p>
+            <a:pPr algn="ctr"/>
+            <a:r>
+              <a:rPr lang="en-US" altLang="ko-KR" sz="1000" i="1"/>
+              <a:t>request create container</a:t>
+            </a:r>
+          </a:p>
+        </p:txBody>
+      </p:sp>
+      <p:sp>
+        <p:nvSpPr>
+          <p:cNvPr id="106" name="타원 105">
+            <a:extLst>
+              <a:ext uri="{FF2B5EF4-FFF2-40B4-BE49-F238E27FC236}">
+                <a16:creationId xmlns:a16="http://schemas.microsoft.com/office/drawing/2014/main" id="{DFA9FB7D-B0F3-852E-D20C-56BC77DF82CE}"/>
+              </a:ext>
+            </a:extLst>
+          </p:cNvPr>
+          <p:cNvSpPr/>
+          <p:nvPr/>
+        </p:nvSpPr>
+        <p:spPr>
+          <a:xfrm>
+            <a:off x="5091009" y="1421504"/>
+            <a:ext cx="261982" cy="245150"/>
+          </a:xfrm>
+          <a:prstGeom prst="ellipse">
+            <a:avLst/>
+          </a:prstGeom>
+          <a:ln w="12700"/>
+        </p:spPr>
+        <p:style>
+          <a:lnRef idx="2">
+            <a:schemeClr val="dk1"/>
+          </a:lnRef>
+          <a:fillRef idx="1">
+            <a:schemeClr val="lt1"/>
+          </a:fillRef>
+          <a:effectRef idx="0">
+            <a:schemeClr val="dk1"/>
+          </a:effectRef>
+          <a:fontRef idx="minor">
+            <a:schemeClr val="dk1"/>
+          </a:fontRef>
+        </p:style>
+        <p:txBody>
+          <a:bodyPr rtlCol="0" anchor="ctr"/>
+          <a:lstStyle/>
+          <a:p>
+            <a:pPr algn="ctr"/>
+            <a:r>
+              <a:rPr lang="en-US" altLang="ko-KR" sz="1000"/>
+              <a:t>5</a:t>
+            </a:r>
+            <a:endParaRPr lang="ko-KR" altLang="en-US" sz="1000"/>
+          </a:p>
+        </p:txBody>
+      </p:sp>
+      <p:sp>
+        <p:nvSpPr>
+          <p:cNvPr id="108" name="사각형: 둥근 모서리 114">
+            <a:extLst>
+              <a:ext uri="{FF2B5EF4-FFF2-40B4-BE49-F238E27FC236}">
+                <a16:creationId xmlns:a16="http://schemas.microsoft.com/office/drawing/2014/main" id="{B6B5F83C-1491-276C-81C3-FB0D6B725777}"/>
+              </a:ext>
+            </a:extLst>
+          </p:cNvPr>
+          <p:cNvSpPr/>
+          <p:nvPr/>
+        </p:nvSpPr>
+        <p:spPr>
+          <a:xfrm>
+            <a:off x="3677574" y="4481330"/>
+            <a:ext cx="338500" cy="245150"/>
+          </a:xfrm>
+          <a:prstGeom prst="roundRect">
+            <a:avLst>
+              <a:gd name="adj" fmla="val 10304"/>
+            </a:avLst>
+          </a:prstGeom>
+          <a:noFill/>
+          <a:ln>
+            <a:noFill/>
+          </a:ln>
+        </p:spPr>
+        <p:style>
+          <a:lnRef idx="2">
+            <a:schemeClr val="dk1"/>
+          </a:lnRef>
+          <a:fillRef idx="1">
+            <a:schemeClr val="lt1"/>
+          </a:fillRef>
+          <a:effectRef idx="0">
+            <a:schemeClr val="dk1"/>
+          </a:effectRef>
+          <a:fontRef idx="minor">
+            <a:schemeClr val="dk1"/>
+          </a:fontRef>
+        </p:style>
+        <p:txBody>
+          <a:bodyPr rtlCol="0" anchor="ctr"/>
+          <a:lstStyle/>
+          <a:p>
+            <a:pPr algn="ctr"/>
+            <a:r>
+              <a:rPr lang="en-US" altLang="ko-KR" sz="1000"/>
+              <a:t>10</a:t>
+            </a:r>
+          </a:p>
+        </p:txBody>
+      </p:sp>
+      <p:sp>
+        <p:nvSpPr>
+          <p:cNvPr id="112" name="사각형: 둥근 모서리 114">
+            <a:extLst>
+              <a:ext uri="{FF2B5EF4-FFF2-40B4-BE49-F238E27FC236}">
+                <a16:creationId xmlns:a16="http://schemas.microsoft.com/office/drawing/2014/main" id="{B4CA8B3A-5421-FB45-365E-1619F4941FFC}"/>
+              </a:ext>
+            </a:extLst>
+          </p:cNvPr>
+          <p:cNvSpPr/>
+          <p:nvPr/>
+        </p:nvSpPr>
+        <p:spPr>
+          <a:xfrm>
+            <a:off x="3677574" y="2397827"/>
+            <a:ext cx="338500" cy="245150"/>
+          </a:xfrm>
+          <a:prstGeom prst="roundRect">
+            <a:avLst>
+              <a:gd name="adj" fmla="val 10304"/>
+            </a:avLst>
+          </a:prstGeom>
+          <a:noFill/>
+          <a:ln>
+            <a:noFill/>
+          </a:ln>
+        </p:spPr>
+        <p:style>
+          <a:lnRef idx="2">
+            <a:schemeClr val="dk1"/>
+          </a:lnRef>
+          <a:fillRef idx="1">
+            <a:schemeClr val="lt1"/>
+          </a:fillRef>
+          <a:effectRef idx="0">
+            <a:schemeClr val="dk1"/>
+          </a:effectRef>
+          <a:fontRef idx="minor">
+            <a:schemeClr val="dk1"/>
+          </a:fontRef>
+        </p:style>
+        <p:txBody>
+          <a:bodyPr rtlCol="0" anchor="ctr"/>
+          <a:lstStyle/>
+          <a:p>
+            <a:pPr algn="ctr"/>
+            <a:r>
+              <a:rPr lang="en-US" altLang="ko-KR" sz="1000"/>
+              <a:t>11</a:t>
+            </a:r>
+          </a:p>
+        </p:txBody>
+      </p:sp>
+      <p:sp>
+        <p:nvSpPr>
+          <p:cNvPr id="113" name="타원 112">
+            <a:extLst>
+              <a:ext uri="{FF2B5EF4-FFF2-40B4-BE49-F238E27FC236}">
+                <a16:creationId xmlns:a16="http://schemas.microsoft.com/office/drawing/2014/main" id="{F812CCD5-AB2B-6287-3233-E10519F850B1}"/>
+              </a:ext>
+            </a:extLst>
+          </p:cNvPr>
+          <p:cNvSpPr/>
+          <p:nvPr/>
+        </p:nvSpPr>
+        <p:spPr>
+          <a:xfrm>
+            <a:off x="1072006" y="3448477"/>
+            <a:ext cx="261982" cy="245150"/>
+          </a:xfrm>
+          <a:prstGeom prst="ellipse">
+            <a:avLst/>
+          </a:prstGeom>
+          <a:ln w="12700"/>
+        </p:spPr>
+        <p:style>
+          <a:lnRef idx="2">
+            <a:schemeClr val="dk1"/>
+          </a:lnRef>
+          <a:fillRef idx="1">
+            <a:schemeClr val="lt1"/>
+          </a:fillRef>
+          <a:effectRef idx="0">
+            <a:schemeClr val="dk1"/>
+          </a:effectRef>
+          <a:fontRef idx="minor">
+            <a:schemeClr val="dk1"/>
+          </a:fontRef>
+        </p:style>
+        <p:txBody>
+          <a:bodyPr rtlCol="0" anchor="ctr"/>
+          <a:lstStyle/>
+          <a:p>
+            <a:pPr algn="ctr"/>
+            <a:endParaRPr lang="ko-KR" altLang="en-US" sz="1000"/>
+          </a:p>
+        </p:txBody>
+      </p:sp>
+      <p:sp>
+        <p:nvSpPr>
+          <p:cNvPr id="114" name="사각형: 둥근 모서리 114">
+            <a:extLst>
+              <a:ext uri="{FF2B5EF4-FFF2-40B4-BE49-F238E27FC236}">
+                <a16:creationId xmlns:a16="http://schemas.microsoft.com/office/drawing/2014/main" id="{A76AF592-7A55-83F2-CB1C-D08274D92F93}"/>
+              </a:ext>
+            </a:extLst>
+          </p:cNvPr>
+          <p:cNvSpPr/>
+          <p:nvPr/>
+        </p:nvSpPr>
+        <p:spPr>
+          <a:xfrm>
+            <a:off x="1027455" y="3452817"/>
+            <a:ext cx="338500" cy="245150"/>
+          </a:xfrm>
+          <a:prstGeom prst="roundRect">
+            <a:avLst>
+              <a:gd name="adj" fmla="val 10304"/>
+            </a:avLst>
+          </a:prstGeom>
+          <a:noFill/>
+          <a:ln>
+            <a:noFill/>
+          </a:ln>
+        </p:spPr>
+        <p:style>
+          <a:lnRef idx="2">
+            <a:schemeClr val="dk1"/>
+          </a:lnRef>
+          <a:fillRef idx="1">
+            <a:schemeClr val="lt1"/>
+          </a:fillRef>
+          <a:effectRef idx="0">
+            <a:schemeClr val="dk1"/>
+          </a:effectRef>
+          <a:fontRef idx="minor">
+            <a:schemeClr val="dk1"/>
+          </a:fontRef>
+        </p:style>
+        <p:txBody>
+          <a:bodyPr rtlCol="0" anchor="ctr"/>
+          <a:lstStyle/>
+          <a:p>
+            <a:pPr algn="ctr"/>
+            <a:r>
+              <a:rPr lang="en-US" altLang="ko-KR" sz="1000"/>
+              <a:t>12</a:t>
+            </a:r>
           </a:p>
         </p:txBody>
       </p:sp>
@@ -10716,7 +14200,7 @@
         <p:cNvPr id="1" name="">
           <a:extLst>
             <a:ext uri="{FF2B5EF4-FFF2-40B4-BE49-F238E27FC236}">
-              <a16:creationId xmlns:a16="http://schemas.microsoft.com/office/drawing/2014/main" id="{536E8B20-5CB0-266F-D010-4969008FB20B}"/>
+              <a16:creationId xmlns:a16="http://schemas.microsoft.com/office/drawing/2014/main" id="{D47006E3-14BF-55C5-19C7-5F69C3DAA1BF}"/>
             </a:ext>
           </a:extLst>
         </p:cNvPr>
@@ -10736,7 +14220,7 @@
           <p:cNvPr id="2" name="제목 1">
             <a:extLst>
               <a:ext uri="{FF2B5EF4-FFF2-40B4-BE49-F238E27FC236}">
-                <a16:creationId xmlns:a16="http://schemas.microsoft.com/office/drawing/2014/main" id="{5C0F9C8F-437F-D0AF-97AA-D56EC0818CE2}"/>
+                <a16:creationId xmlns:a16="http://schemas.microsoft.com/office/drawing/2014/main" id="{C72503FA-17E5-5AE3-085B-3E08955531E7}"/>
               </a:ext>
             </a:extLst>
           </p:cNvPr>
@@ -10749,6 +14233,540 @@
         </p:nvSpPr>
         <p:spPr>
           <a:xfrm>
+            <a:off x="0" y="-726229"/>
+            <a:ext cx="9144000" cy="857250"/>
+          </a:xfrm>
+        </p:spPr>
+        <p:txBody>
+          <a:bodyPr>
+            <a:normAutofit fontScale="90000"/>
+          </a:bodyPr>
+          <a:lstStyle/>
+          <a:p>
+            <a:r>
+              <a:rPr lang="en-US" altLang="ko-KR"/>
+              <a:t>CUDA Container OCI Runtime Spec</a:t>
+            </a:r>
+            <a:endParaRPr lang="ko-KR" altLang="en-US" dirty="0"/>
+          </a:p>
+        </p:txBody>
+      </p:sp>
+      <p:sp>
+        <p:nvSpPr>
+          <p:cNvPr id="7" name="사각형: 둥근 모서리 114">
+            <a:extLst>
+              <a:ext uri="{FF2B5EF4-FFF2-40B4-BE49-F238E27FC236}">
+                <a16:creationId xmlns:a16="http://schemas.microsoft.com/office/drawing/2014/main" id="{3A9A9FAD-7393-75E5-FB5E-4B6A1277EAD6}"/>
+              </a:ext>
+            </a:extLst>
+          </p:cNvPr>
+          <p:cNvSpPr/>
+          <p:nvPr/>
+        </p:nvSpPr>
+        <p:spPr>
+          <a:xfrm>
+            <a:off x="1691680" y="555526"/>
+            <a:ext cx="5904656" cy="433441"/>
+          </a:xfrm>
+          <a:prstGeom prst="roundRect">
+            <a:avLst>
+              <a:gd name="adj" fmla="val 0"/>
+            </a:avLst>
+          </a:prstGeom>
+          <a:ln w="12700"/>
+        </p:spPr>
+        <p:style>
+          <a:lnRef idx="2">
+            <a:schemeClr val="dk1"/>
+          </a:lnRef>
+          <a:fillRef idx="1">
+            <a:schemeClr val="lt1"/>
+          </a:fillRef>
+          <a:effectRef idx="0">
+            <a:schemeClr val="dk1"/>
+          </a:effectRef>
+          <a:fontRef idx="minor">
+            <a:schemeClr val="dk1"/>
+          </a:fontRef>
+        </p:style>
+        <p:txBody>
+          <a:bodyPr rtlCol="0" anchor="ctr"/>
+          <a:lstStyle/>
+          <a:p>
+            <a:r>
+              <a:rPr lang="en-US" altLang="ko-KR" sz="1100"/>
+              <a:t>$ ctr run --env NVIDIA_VISIBLE_DEVICES=all</a:t>
+            </a:r>
+            <a:r>
+              <a:rPr lang="ko-KR" altLang="en-US" sz="1100"/>
+              <a:t> </a:t>
+            </a:r>
+            <a:r>
+              <a:rPr lang="en-US" altLang="ko-KR" sz="1100"/>
+              <a:t>nvidia/cuda:9.0-base test-gpu nvidia-smi</a:t>
+            </a:r>
+            <a:endParaRPr lang="en-US" altLang="ko-KR" sz="1100" dirty="0"/>
+          </a:p>
+        </p:txBody>
+      </p:sp>
+      <p:sp>
+        <p:nvSpPr>
+          <p:cNvPr id="11" name="사각형: 둥근 모서리 114">
+            <a:extLst>
+              <a:ext uri="{FF2B5EF4-FFF2-40B4-BE49-F238E27FC236}">
+                <a16:creationId xmlns:a16="http://schemas.microsoft.com/office/drawing/2014/main" id="{6CABFD53-A11C-D694-A1D1-C2B792E873C0}"/>
+              </a:ext>
+            </a:extLst>
+          </p:cNvPr>
+          <p:cNvSpPr/>
+          <p:nvPr/>
+        </p:nvSpPr>
+        <p:spPr>
+          <a:xfrm>
+            <a:off x="899592" y="1211838"/>
+            <a:ext cx="7488831" cy="2880320"/>
+          </a:xfrm>
+          <a:prstGeom prst="roundRect">
+            <a:avLst>
+              <a:gd name="adj" fmla="val 0"/>
+            </a:avLst>
+          </a:prstGeom>
+          <a:ln w="12700"/>
+        </p:spPr>
+        <p:style>
+          <a:lnRef idx="2">
+            <a:schemeClr val="dk1"/>
+          </a:lnRef>
+          <a:fillRef idx="1">
+            <a:schemeClr val="lt1"/>
+          </a:fillRef>
+          <a:effectRef idx="0">
+            <a:schemeClr val="dk1"/>
+          </a:effectRef>
+          <a:fontRef idx="minor">
+            <a:schemeClr val="dk1"/>
+          </a:fontRef>
+        </p:style>
+        <p:txBody>
+          <a:bodyPr rtlCol="0" anchor="ctr"/>
+          <a:lstStyle/>
+          <a:p>
+            <a:r>
+              <a:rPr lang="en-US" altLang="ko-KR" sz="1100" kern="0" dirty="0">
+                <a:cs typeface="Al Bayan Plain" pitchFamily="2" charset="-78"/>
+              </a:rPr>
+              <a:t>{</a:t>
+            </a:r>
+          </a:p>
+          <a:p>
+            <a:r>
+              <a:rPr lang="en-US" altLang="ko-KR" sz="1100" kern="0" dirty="0">
+                <a:cs typeface="Al Bayan Plain" pitchFamily="2" charset="-78"/>
+              </a:rPr>
+              <a:t>    "hooks": {</a:t>
+            </a:r>
+          </a:p>
+          <a:p>
+            <a:r>
+              <a:rPr lang="en-US" altLang="ko-KR" sz="1100" kern="0" dirty="0">
+                <a:cs typeface="Al Bayan Plain" pitchFamily="2" charset="-78"/>
+              </a:rPr>
+              <a:t>        "</a:t>
+            </a:r>
+            <a:r>
+              <a:rPr lang="en-US" altLang="ko-KR" sz="1100" kern="0" dirty="0" err="1">
+                <a:cs typeface="Al Bayan Plain" pitchFamily="2" charset="-78"/>
+              </a:rPr>
+              <a:t>Poststart</a:t>
+            </a:r>
+            <a:r>
+              <a:rPr lang="en-US" altLang="ko-KR" sz="1100" kern="0" dirty="0">
+                <a:cs typeface="Al Bayan Plain" pitchFamily="2" charset="-78"/>
+              </a:rPr>
+              <a:t>": [],</a:t>
+            </a:r>
+          </a:p>
+          <a:p>
+            <a:r>
+              <a:rPr lang="en-US" altLang="ko-KR" sz="1100" kern="0" dirty="0">
+                <a:cs typeface="Al Bayan Plain" pitchFamily="2" charset="-78"/>
+              </a:rPr>
+              <a:t>        "</a:t>
+            </a:r>
+            <a:r>
+              <a:rPr lang="en-US" altLang="ko-KR" sz="1100" kern="0" dirty="0" err="1">
+                <a:cs typeface="Al Bayan Plain" pitchFamily="2" charset="-78"/>
+              </a:rPr>
+              <a:t>Poststop</a:t>
+            </a:r>
+            <a:r>
+              <a:rPr lang="en-US" altLang="ko-KR" sz="1100" kern="0" dirty="0">
+                <a:cs typeface="Al Bayan Plain" pitchFamily="2" charset="-78"/>
+              </a:rPr>
+              <a:t>": [],</a:t>
+            </a:r>
+          </a:p>
+          <a:p>
+            <a:r>
+              <a:rPr lang="en-US" altLang="ko-KR" sz="1100" kern="0" dirty="0">
+                <a:cs typeface="Al Bayan Plain" pitchFamily="2" charset="-78"/>
+              </a:rPr>
+              <a:t>        "prestart": [{</a:t>
+            </a:r>
+          </a:p>
+          <a:p>
+            <a:r>
+              <a:rPr lang="en-US" altLang="ko-KR" sz="1100" kern="0" dirty="0">
+                <a:cs typeface="Al Bayan Plain" pitchFamily="2" charset="-78"/>
+              </a:rPr>
+              <a:t>            "</a:t>
+            </a:r>
+            <a:r>
+              <a:rPr lang="en-US" altLang="ko-KR" sz="1100" kern="0" dirty="0" err="1">
+                <a:cs typeface="Al Bayan Plain" pitchFamily="2" charset="-78"/>
+              </a:rPr>
+              <a:t>args</a:t>
+            </a:r>
+            <a:r>
+              <a:rPr lang="en-US" altLang="ko-KR" sz="1100" kern="0" dirty="0">
+                <a:cs typeface="Al Bayan Plain" pitchFamily="2" charset="-78"/>
+              </a:rPr>
+              <a:t>": ["/</a:t>
+            </a:r>
+            <a:r>
+              <a:rPr lang="en-US" altLang="ko-KR" sz="1100" kern="0" dirty="0" err="1">
+                <a:cs typeface="Al Bayan Plain" pitchFamily="2" charset="-78"/>
+              </a:rPr>
+              <a:t>usr</a:t>
+            </a:r>
+            <a:r>
+              <a:rPr lang="en-US" altLang="ko-KR" sz="1100" kern="0" dirty="0">
+                <a:cs typeface="Al Bayan Plain" pitchFamily="2" charset="-78"/>
+              </a:rPr>
+              <a:t>/bin/</a:t>
+            </a:r>
+            <a:r>
+              <a:rPr lang="en-US" altLang="ko-KR" sz="1100" kern="0" dirty="0" err="1">
+                <a:cs typeface="Al Bayan Plain" pitchFamily="2" charset="-78"/>
+              </a:rPr>
+              <a:t>nvidia</a:t>
+            </a:r>
+            <a:r>
+              <a:rPr lang="en-US" altLang="ko-KR" sz="1100" kern="0" dirty="0">
+                <a:cs typeface="Al Bayan Plain" pitchFamily="2" charset="-78"/>
+              </a:rPr>
+              <a:t>-container-runtime-hook", "prestart"],</a:t>
+            </a:r>
+          </a:p>
+          <a:p>
+            <a:r>
+              <a:rPr lang="en-US" altLang="ko-KR" sz="1100" kern="0" dirty="0">
+                <a:cs typeface="Al Bayan Plain" pitchFamily="2" charset="-78"/>
+              </a:rPr>
+              <a:t>            "path": "/</a:t>
+            </a:r>
+            <a:r>
+              <a:rPr lang="en-US" altLang="ko-KR" sz="1100" kern="0" dirty="0" err="1">
+                <a:cs typeface="Al Bayan Plain" pitchFamily="2" charset="-78"/>
+              </a:rPr>
+              <a:t>usr</a:t>
+            </a:r>
+            <a:r>
+              <a:rPr lang="en-US" altLang="ko-KR" sz="1100" kern="0" dirty="0">
+                <a:cs typeface="Al Bayan Plain" pitchFamily="2" charset="-78"/>
+              </a:rPr>
+              <a:t>/bin/</a:t>
+            </a:r>
+            <a:r>
+              <a:rPr lang="en-US" altLang="ko-KR" sz="1100" kern="0" dirty="0" err="1">
+                <a:cs typeface="Al Bayan Plain" pitchFamily="2" charset="-78"/>
+              </a:rPr>
+              <a:t>nvidia</a:t>
+            </a:r>
+            <a:r>
+              <a:rPr lang="en-US" altLang="ko-KR" sz="1100" kern="0" dirty="0">
+                <a:cs typeface="Al Bayan Plain" pitchFamily="2" charset="-78"/>
+              </a:rPr>
+              <a:t>-container-runtime-hook”</a:t>
+            </a:r>
+          </a:p>
+          <a:p>
+            <a:r>
+              <a:rPr lang="en-US" altLang="ko-KR" sz="1100" kern="0" dirty="0">
+                <a:cs typeface="Al Bayan Plain" pitchFamily="2" charset="-78"/>
+              </a:rPr>
+              <a:t>        }]</a:t>
+            </a:r>
+          </a:p>
+          <a:p>
+            <a:r>
+              <a:rPr lang="en-US" altLang="ko-KR" sz="1100" kern="0" dirty="0">
+                <a:cs typeface="Al Bayan Plain" pitchFamily="2" charset="-78"/>
+              </a:rPr>
+              <a:t>    },</a:t>
+            </a:r>
+          </a:p>
+          <a:p>
+            <a:r>
+              <a:rPr lang="en-US" altLang="ko-KR" sz="1100" kern="0" dirty="0">
+                <a:cs typeface="Al Bayan Plain" pitchFamily="2" charset="-78"/>
+              </a:rPr>
+              <a:t>    "process": {</a:t>
+            </a:r>
+          </a:p>
+          <a:p>
+            <a:r>
+              <a:rPr lang="en-US" altLang="ko-KR" sz="1100" kern="0" dirty="0">
+                <a:cs typeface="Al Bayan Plain" pitchFamily="2" charset="-78"/>
+              </a:rPr>
+              <a:t>        “env”: [</a:t>
+            </a:r>
+          </a:p>
+          <a:p>
+            <a:r>
+              <a:rPr lang="en-US" altLang="ko-KR" sz="1100" kern="0" dirty="0">
+                <a:cs typeface="Al Bayan Plain" pitchFamily="2" charset="-78"/>
+              </a:rPr>
+              <a:t>            "</a:t>
+            </a:r>
+            <a:r>
+              <a:rPr lang="en-US" altLang="ko-KR" sz="1100" b="1" kern="0" dirty="0">
+                <a:cs typeface="Al Bayan Plain" pitchFamily="2" charset="-78"/>
+              </a:rPr>
+              <a:t>NVIDIA_VISIBLE_DEVICES</a:t>
+            </a:r>
+            <a:r>
+              <a:rPr lang="en-US" altLang="ko-KR" sz="1100" kern="0" dirty="0">
+                <a:cs typeface="Al Bayan Plain" pitchFamily="2" charset="-78"/>
+              </a:rPr>
+              <a:t>=all",</a:t>
+            </a:r>
+          </a:p>
+          <a:p>
+            <a:r>
+              <a:rPr lang="en-US" altLang="ko-KR" sz="1100" kern="0" dirty="0">
+                <a:cs typeface="Al Bayan Plain" pitchFamily="2" charset="-78"/>
+              </a:rPr>
+              <a:t>            ...</a:t>
+            </a:r>
+            <a:br>
+              <a:rPr lang="en-US" altLang="ko-KR" sz="1100" kern="0" dirty="0">
+                <a:cs typeface="Al Bayan Plain" pitchFamily="2" charset="-78"/>
+              </a:rPr>
+            </a:br>
+            <a:r>
+              <a:rPr lang="en-US" altLang="ko-KR" sz="1100" kern="0" dirty="0">
+                <a:cs typeface="Al Bayan Plain" pitchFamily="2" charset="-78"/>
+              </a:rPr>
+              <a:t>        ]</a:t>
+            </a:r>
+          </a:p>
+          <a:p>
+            <a:r>
+              <a:rPr lang="en-US" altLang="ko-KR" sz="1100" kern="0" dirty="0">
+                <a:cs typeface="Al Bayan Plain" pitchFamily="2" charset="-78"/>
+              </a:rPr>
+              <a:t>    }</a:t>
+            </a:r>
+          </a:p>
+          <a:p>
+            <a:r>
+              <a:rPr lang="en-US" altLang="ko-KR" sz="1100" kern="0" dirty="0">
+                <a:cs typeface="Al Bayan Plain" pitchFamily="2" charset="-78"/>
+              </a:rPr>
+              <a:t>...</a:t>
+            </a:r>
+            <a:endParaRPr lang="en-US" altLang="ko-KR" sz="1600" kern="0" dirty="0">
+              <a:cs typeface="Al Bayan Plain" pitchFamily="2" charset="-78"/>
+            </a:endParaRPr>
+          </a:p>
+        </p:txBody>
+      </p:sp>
+      <p:cxnSp>
+        <p:nvCxnSpPr>
+          <p:cNvPr id="9" name="직선 화살표 연결선 8">
+            <a:extLst>
+              <a:ext uri="{FF2B5EF4-FFF2-40B4-BE49-F238E27FC236}">
+                <a16:creationId xmlns:a16="http://schemas.microsoft.com/office/drawing/2014/main" id="{E2C29F7C-E831-83D2-6BE9-5A7252F4071B}"/>
+              </a:ext>
+            </a:extLst>
+          </p:cNvPr>
+          <p:cNvCxnSpPr>
+            <a:cxnSpLocks/>
+            <a:stCxn id="7" idx="2"/>
+            <a:endCxn id="11" idx="0"/>
+          </p:cNvCxnSpPr>
+          <p:nvPr/>
+        </p:nvCxnSpPr>
+        <p:spPr>
+          <a:xfrm>
+            <a:off x="4644008" y="988967"/>
+            <a:ext cx="0" cy="222871"/>
+          </a:xfrm>
+          <a:prstGeom prst="straightConnector1">
+            <a:avLst/>
+          </a:prstGeom>
+          <a:ln w="12700">
+            <a:solidFill>
+              <a:schemeClr val="tx1"/>
+            </a:solidFill>
+            <a:headEnd type="none" w="med" len="med"/>
+            <a:tailEnd type="triangle" w="med" len="med"/>
+          </a:ln>
+        </p:spPr>
+        <p:style>
+          <a:lnRef idx="1">
+            <a:schemeClr val="accent1"/>
+          </a:lnRef>
+          <a:fillRef idx="0">
+            <a:schemeClr val="accent1"/>
+          </a:fillRef>
+          <a:effectRef idx="0">
+            <a:schemeClr val="accent1"/>
+          </a:effectRef>
+          <a:fontRef idx="minor">
+            <a:schemeClr val="tx1"/>
+          </a:fontRef>
+        </p:style>
+      </p:cxnSp>
+      <p:sp>
+        <p:nvSpPr>
+          <p:cNvPr id="22" name="사각형: 둥근 모서리 114">
+            <a:extLst>
+              <a:ext uri="{FF2B5EF4-FFF2-40B4-BE49-F238E27FC236}">
+                <a16:creationId xmlns:a16="http://schemas.microsoft.com/office/drawing/2014/main" id="{11FE6D81-54D3-433F-201E-86F85E0C5348}"/>
+              </a:ext>
+            </a:extLst>
+          </p:cNvPr>
+          <p:cNvSpPr/>
+          <p:nvPr/>
+        </p:nvSpPr>
+        <p:spPr>
+          <a:xfrm>
+            <a:off x="3278436" y="4098308"/>
+            <a:ext cx="2731142" cy="281881"/>
+          </a:xfrm>
+          <a:prstGeom prst="roundRect">
+            <a:avLst>
+              <a:gd name="adj" fmla="val 10304"/>
+            </a:avLst>
+          </a:prstGeom>
+          <a:noFill/>
+          <a:ln>
+            <a:noFill/>
+          </a:ln>
+        </p:spPr>
+        <p:style>
+          <a:lnRef idx="2">
+            <a:schemeClr val="dk1"/>
+          </a:lnRef>
+          <a:fillRef idx="1">
+            <a:schemeClr val="lt1"/>
+          </a:fillRef>
+          <a:effectRef idx="0">
+            <a:schemeClr val="dk1"/>
+          </a:effectRef>
+          <a:fontRef idx="minor">
+            <a:schemeClr val="dk1"/>
+          </a:fontRef>
+        </p:style>
+        <p:txBody>
+          <a:bodyPr rtlCol="0" anchor="ctr"/>
+          <a:lstStyle/>
+          <a:p>
+            <a:pPr algn="ctr"/>
+            <a:r>
+              <a:rPr lang="en-US" altLang="ko-KR" sz="1200"/>
+              <a:t>OCI Runtime Spec</a:t>
+            </a:r>
+            <a:endParaRPr lang="en-US" altLang="ko-KR" sz="1200" dirty="0"/>
+          </a:p>
+        </p:txBody>
+      </p:sp>
+    </p:spTree>
+    <p:extLst>
+      <p:ext uri="{BB962C8B-B14F-4D97-AF65-F5344CB8AC3E}">
+        <p14:creationId xmlns:p14="http://schemas.microsoft.com/office/powerpoint/2010/main" val="3094524413"/>
+      </p:ext>
+    </p:extLst>
+  </p:cSld>
+  <p:clrMapOvr>
+    <a:masterClrMapping/>
+  </p:clrMapOvr>
+</p:sld>
+</file>
+
+<file path=ppt/slides/slide4.xml><?xml version="1.0" encoding="utf-8"?>
+<p:sld xmlns:a="http://schemas.openxmlformats.org/drawingml/2006/main" xmlns:r="http://schemas.openxmlformats.org/officeDocument/2006/relationships" xmlns:p="http://schemas.openxmlformats.org/presentationml/2006/main">
+  <p:cSld>
+    <p:spTree>
+      <p:nvGrpSpPr>
+        <p:cNvPr id="1" name=""/>
+        <p:cNvGrpSpPr/>
+        <p:nvPr/>
+      </p:nvGrpSpPr>
+      <p:grpSpPr>
+        <a:xfrm>
+          <a:off x="0" y="0"/>
+          <a:ext cx="0" cy="0"/>
+          <a:chOff x="0" y="0"/>
+          <a:chExt cx="0" cy="0"/>
+        </a:xfrm>
+      </p:grpSpPr>
+    </p:spTree>
+    <p:extLst>
+      <p:ext uri="{BB962C8B-B14F-4D97-AF65-F5344CB8AC3E}">
+        <p14:creationId xmlns:p14="http://schemas.microsoft.com/office/powerpoint/2010/main" val="1182420857"/>
+      </p:ext>
+    </p:extLst>
+  </p:cSld>
+  <p:clrMapOvr>
+    <a:masterClrMapping/>
+  </p:clrMapOvr>
+</p:sld>
+</file>
+
+<file path=ppt/slides/slide5.xml><?xml version="1.0" encoding="utf-8"?>
+<p:sld xmlns:a="http://schemas.openxmlformats.org/drawingml/2006/main" xmlns:r="http://schemas.openxmlformats.org/officeDocument/2006/relationships" xmlns:p="http://schemas.openxmlformats.org/presentationml/2006/main">
+  <p:cSld>
+    <p:spTree>
+      <p:nvGrpSpPr>
+        <p:cNvPr id="1" name="">
+          <a:extLst>
+            <a:ext uri="{FF2B5EF4-FFF2-40B4-BE49-F238E27FC236}">
+              <a16:creationId xmlns:a16="http://schemas.microsoft.com/office/drawing/2014/main" id="{821F27C9-FE9F-B983-E596-7CC42B712E39}"/>
+            </a:ext>
+          </a:extLst>
+        </p:cNvPr>
+        <p:cNvGrpSpPr/>
+        <p:nvPr/>
+      </p:nvGrpSpPr>
+      <p:grpSpPr>
+        <a:xfrm>
+          <a:off x="0" y="0"/>
+          <a:ext cx="0" cy="0"/>
+          <a:chOff x="0" y="0"/>
+          <a:chExt cx="0" cy="0"/>
+        </a:xfrm>
+      </p:grpSpPr>
+      <p:sp>
+        <p:nvSpPr>
+          <p:cNvPr id="2" name="제목 1">
+            <a:extLst>
+              <a:ext uri="{FF2B5EF4-FFF2-40B4-BE49-F238E27FC236}">
+                <a16:creationId xmlns:a16="http://schemas.microsoft.com/office/drawing/2014/main" id="{AE15B928-A8DC-815E-9CFF-56B5FEFA2852}"/>
+              </a:ext>
+            </a:extLst>
+          </p:cNvPr>
+          <p:cNvSpPr>
+            <a:spLocks noGrp="1"/>
+          </p:cNvSpPr>
+          <p:nvPr>
+            <p:ph type="title"/>
+          </p:nvPr>
+        </p:nvSpPr>
+        <p:spPr>
+          <a:xfrm>
             <a:off x="0" y="-92546"/>
             <a:ext cx="9144000" cy="857250"/>
           </a:xfrm>
@@ -10772,7 +14790,7 @@
           <p:cNvPr id="37" name="사각형: 둥근 모서리 114">
             <a:extLst>
               <a:ext uri="{FF2B5EF4-FFF2-40B4-BE49-F238E27FC236}">
-                <a16:creationId xmlns:a16="http://schemas.microsoft.com/office/drawing/2014/main" id="{13D7B3E7-F783-1EC1-5F29-0874EF0E893E}"/>
+                <a16:creationId xmlns:a16="http://schemas.microsoft.com/office/drawing/2014/main" id="{0F15E521-42AD-9F16-663B-8C9CF9794EE3}"/>
               </a:ext>
             </a:extLst>
           </p:cNvPr>
@@ -10823,7 +14841,7 @@
           <p:cNvPr id="33" name="사각형: 둥근 모서리 114">
             <a:extLst>
               <a:ext uri="{FF2B5EF4-FFF2-40B4-BE49-F238E27FC236}">
-                <a16:creationId xmlns:a16="http://schemas.microsoft.com/office/drawing/2014/main" id="{F56E2D5A-3AEA-BC86-A33B-53D0167D37EC}"/>
+                <a16:creationId xmlns:a16="http://schemas.microsoft.com/office/drawing/2014/main" id="{CC2CA0D7-E25A-4E8F-102B-D8277B3DC374}"/>
               </a:ext>
             </a:extLst>
           </p:cNvPr>
@@ -10874,7 +14892,7 @@
           <p:cNvPr id="14" name="사각형: 둥근 모서리 114">
             <a:extLst>
               <a:ext uri="{FF2B5EF4-FFF2-40B4-BE49-F238E27FC236}">
-                <a16:creationId xmlns:a16="http://schemas.microsoft.com/office/drawing/2014/main" id="{33278C70-4E26-832E-F3CF-8888DB9B5A2A}"/>
+                <a16:creationId xmlns:a16="http://schemas.microsoft.com/office/drawing/2014/main" id="{0D675FE4-B9AC-A94B-5B1F-2A97ED4540A7}"/>
               </a:ext>
             </a:extLst>
           </p:cNvPr>
@@ -10932,7 +14950,7 @@
           <p:cNvPr id="15" name="사각형: 둥근 모서리 114">
             <a:extLst>
               <a:ext uri="{FF2B5EF4-FFF2-40B4-BE49-F238E27FC236}">
-                <a16:creationId xmlns:a16="http://schemas.microsoft.com/office/drawing/2014/main" id="{BF9A344D-403F-E740-9878-AAA1304E842D}"/>
+                <a16:creationId xmlns:a16="http://schemas.microsoft.com/office/drawing/2014/main" id="{57F266B6-6534-D114-73C9-2F931E20C5FD}"/>
               </a:ext>
             </a:extLst>
           </p:cNvPr>
@@ -10990,7 +15008,7 @@
           <p:cNvPr id="16" name="사각형: 둥근 모서리 114">
             <a:extLst>
               <a:ext uri="{FF2B5EF4-FFF2-40B4-BE49-F238E27FC236}">
-                <a16:creationId xmlns:a16="http://schemas.microsoft.com/office/drawing/2014/main" id="{229628F2-2ACB-D300-083B-933563ACB3DF}"/>
+                <a16:creationId xmlns:a16="http://schemas.microsoft.com/office/drawing/2014/main" id="{BD0849C0-387C-23D7-6D71-EA7D49BF9086}"/>
               </a:ext>
             </a:extLst>
           </p:cNvPr>
@@ -11048,7 +15066,7 @@
           <p:cNvPr id="17" name="사각형: 둥근 모서리 114">
             <a:extLst>
               <a:ext uri="{FF2B5EF4-FFF2-40B4-BE49-F238E27FC236}">
-                <a16:creationId xmlns:a16="http://schemas.microsoft.com/office/drawing/2014/main" id="{C70318E8-718F-3AC5-9B88-74F8F2A5DBB1}"/>
+                <a16:creationId xmlns:a16="http://schemas.microsoft.com/office/drawing/2014/main" id="{72A4C5BE-5325-D922-1D47-18D1B1EE3C86}"/>
               </a:ext>
             </a:extLst>
           </p:cNvPr>
@@ -11106,7 +15124,7 @@
           <p:cNvPr id="36" name="사각형: 둥근 모서리 114">
             <a:extLst>
               <a:ext uri="{FF2B5EF4-FFF2-40B4-BE49-F238E27FC236}">
-                <a16:creationId xmlns:a16="http://schemas.microsoft.com/office/drawing/2014/main" id="{3364FA23-F895-1B5D-699B-3DEDE068BF8C}"/>
+                <a16:creationId xmlns:a16="http://schemas.microsoft.com/office/drawing/2014/main" id="{96E2251D-3062-C567-A0D6-9EE0B0C70B79}"/>
               </a:ext>
             </a:extLst>
           </p:cNvPr>
@@ -11163,7 +15181,7 @@
           <p:cNvPr id="48" name="사각형: 둥근 모서리 114">
             <a:extLst>
               <a:ext uri="{FF2B5EF4-FFF2-40B4-BE49-F238E27FC236}">
-                <a16:creationId xmlns:a16="http://schemas.microsoft.com/office/drawing/2014/main" id="{7B735900-90DF-2B9C-D836-265C1EE6844C}"/>
+                <a16:creationId xmlns:a16="http://schemas.microsoft.com/office/drawing/2014/main" id="{F310B05C-7347-6005-190A-E59B721CD3A7}"/>
               </a:ext>
             </a:extLst>
           </p:cNvPr>
@@ -11214,7 +15232,7 @@
           <p:cNvPr id="49" name="사각형: 둥근 모서리 114">
             <a:extLst>
               <a:ext uri="{FF2B5EF4-FFF2-40B4-BE49-F238E27FC236}">
-                <a16:creationId xmlns:a16="http://schemas.microsoft.com/office/drawing/2014/main" id="{2E5EDF11-A65E-332B-1623-CD439CC6BDBB}"/>
+                <a16:creationId xmlns:a16="http://schemas.microsoft.com/office/drawing/2014/main" id="{7F9E0133-19BF-C998-AB14-9900D88AF886}"/>
               </a:ext>
             </a:extLst>
           </p:cNvPr>
@@ -11265,7 +15283,7 @@
           <p:cNvPr id="53" name="사각형: 둥근 모서리 114">
             <a:extLst>
               <a:ext uri="{FF2B5EF4-FFF2-40B4-BE49-F238E27FC236}">
-                <a16:creationId xmlns:a16="http://schemas.microsoft.com/office/drawing/2014/main" id="{1B1E7317-CD60-5008-9179-9A5631A47234}"/>
+                <a16:creationId xmlns:a16="http://schemas.microsoft.com/office/drawing/2014/main" id="{0AC767D1-D8B6-81B3-CC4D-27EB7E2B3019}"/>
               </a:ext>
             </a:extLst>
           </p:cNvPr>
@@ -11316,7 +15334,7 @@
           <p:cNvPr id="58" name="그룹 57">
             <a:extLst>
               <a:ext uri="{FF2B5EF4-FFF2-40B4-BE49-F238E27FC236}">
-                <a16:creationId xmlns:a16="http://schemas.microsoft.com/office/drawing/2014/main" id="{98AFD201-FB34-A339-E715-18A95A5F5436}"/>
+                <a16:creationId xmlns:a16="http://schemas.microsoft.com/office/drawing/2014/main" id="{012D9227-5823-A226-CF6D-EB6377708E48}"/>
               </a:ext>
             </a:extLst>
           </p:cNvPr>
@@ -11336,7 +15354,7 @@
             <p:cNvPr id="54" name="사각형: 둥근 모서리 114">
               <a:extLst>
                 <a:ext uri="{FF2B5EF4-FFF2-40B4-BE49-F238E27FC236}">
-                  <a16:creationId xmlns:a16="http://schemas.microsoft.com/office/drawing/2014/main" id="{10043FEE-E23C-35BF-1858-6BADDDFA64C5}"/>
+                  <a16:creationId xmlns:a16="http://schemas.microsoft.com/office/drawing/2014/main" id="{341018E0-5C40-7C99-9D12-F4C67D06B651}"/>
                 </a:ext>
               </a:extLst>
             </p:cNvPr>
@@ -11393,7 +15411,7 @@
             <p:cNvPr id="55" name="사각형: 둥근 모서리 114">
               <a:extLst>
                 <a:ext uri="{FF2B5EF4-FFF2-40B4-BE49-F238E27FC236}">
-                  <a16:creationId xmlns:a16="http://schemas.microsoft.com/office/drawing/2014/main" id="{E13B8AD4-E810-DF4E-C9A7-6A146565EF13}"/>
+                  <a16:creationId xmlns:a16="http://schemas.microsoft.com/office/drawing/2014/main" id="{F56C11F9-0C3F-3604-1093-922DC40ABE7D}"/>
                 </a:ext>
               </a:extLst>
             </p:cNvPr>
@@ -11444,7 +15462,7 @@
             <p:cNvPr id="56" name="사각형: 둥근 모서리 114">
               <a:extLst>
                 <a:ext uri="{FF2B5EF4-FFF2-40B4-BE49-F238E27FC236}">
-                  <a16:creationId xmlns:a16="http://schemas.microsoft.com/office/drawing/2014/main" id="{1CB1F2AA-DC81-E2C1-7A13-B84199E7846D}"/>
+                  <a16:creationId xmlns:a16="http://schemas.microsoft.com/office/drawing/2014/main" id="{71890ADD-A0DB-6261-7F1E-4BE6848BEF81}"/>
                 </a:ext>
               </a:extLst>
             </p:cNvPr>
@@ -11495,7 +15513,7 @@
             <p:cNvPr id="57" name="사각형: 둥근 모서리 114">
               <a:extLst>
                 <a:ext uri="{FF2B5EF4-FFF2-40B4-BE49-F238E27FC236}">
-                  <a16:creationId xmlns:a16="http://schemas.microsoft.com/office/drawing/2014/main" id="{FE234310-EA87-B58A-F8CE-9180E6935EBD}"/>
+                  <a16:creationId xmlns:a16="http://schemas.microsoft.com/office/drawing/2014/main" id="{167DCAC4-F288-0DE5-E901-C12716CE6819}"/>
                 </a:ext>
               </a:extLst>
             </p:cNvPr>
@@ -11546,7 +15564,7 @@
             <p:cNvPr id="85" name="사각형: 둥근 모서리 114">
               <a:extLst>
                 <a:ext uri="{FF2B5EF4-FFF2-40B4-BE49-F238E27FC236}">
-                  <a16:creationId xmlns:a16="http://schemas.microsoft.com/office/drawing/2014/main" id="{E7C861E8-6B20-F678-A387-14468B64DDD0}"/>
+                  <a16:creationId xmlns:a16="http://schemas.microsoft.com/office/drawing/2014/main" id="{680999CA-FF8F-26AE-D876-22610AACAB44}"/>
                 </a:ext>
               </a:extLst>
             </p:cNvPr>
@@ -11598,7 +15616,7 @@
           <p:cNvPr id="72" name="사각형: 둥근 모서리 114">
             <a:extLst>
               <a:ext uri="{FF2B5EF4-FFF2-40B4-BE49-F238E27FC236}">
-                <a16:creationId xmlns:a16="http://schemas.microsoft.com/office/drawing/2014/main" id="{A40CEE21-4126-4EA9-D005-8D6AA05FC3C8}"/>
+                <a16:creationId xmlns:a16="http://schemas.microsoft.com/office/drawing/2014/main" id="{3053C66E-F46D-498D-DF70-A6C0C0A4C081}"/>
               </a:ext>
             </a:extLst>
           </p:cNvPr>
@@ -11655,7 +15673,7 @@
           <p:cNvPr id="74" name="사각형: 둥근 모서리 114">
             <a:extLst>
               <a:ext uri="{FF2B5EF4-FFF2-40B4-BE49-F238E27FC236}">
-                <a16:creationId xmlns:a16="http://schemas.microsoft.com/office/drawing/2014/main" id="{75050760-962B-EFA9-329D-D87ACB628E2E}"/>
+                <a16:creationId xmlns:a16="http://schemas.microsoft.com/office/drawing/2014/main" id="{BBA54966-6171-893D-E8B5-1EF6B3149383}"/>
               </a:ext>
             </a:extLst>
           </p:cNvPr>
@@ -11706,7 +15724,7 @@
           <p:cNvPr id="75" name="사각형: 둥근 모서리 114">
             <a:extLst>
               <a:ext uri="{FF2B5EF4-FFF2-40B4-BE49-F238E27FC236}">
-                <a16:creationId xmlns:a16="http://schemas.microsoft.com/office/drawing/2014/main" id="{C7E78AFF-D068-E06B-33BF-D4132D988816}"/>
+                <a16:creationId xmlns:a16="http://schemas.microsoft.com/office/drawing/2014/main" id="{B0C6C204-5487-CB99-48BE-6731085185E4}"/>
               </a:ext>
             </a:extLst>
           </p:cNvPr>
@@ -11757,7 +15775,7 @@
           <p:cNvPr id="18" name="직선 연결선 17">
             <a:extLst>
               <a:ext uri="{FF2B5EF4-FFF2-40B4-BE49-F238E27FC236}">
-                <a16:creationId xmlns:a16="http://schemas.microsoft.com/office/drawing/2014/main" id="{4B95293B-526B-E58F-7ECA-096BF2817D49}"/>
+                <a16:creationId xmlns:a16="http://schemas.microsoft.com/office/drawing/2014/main" id="{9A1E5562-3930-E1E7-FD4B-1151CD57A5E1}"/>
               </a:ext>
             </a:extLst>
           </p:cNvPr>
@@ -11802,7 +15820,7 @@
           <p:cNvPr id="21" name="직선 연결선 20">
             <a:extLst>
               <a:ext uri="{FF2B5EF4-FFF2-40B4-BE49-F238E27FC236}">
-                <a16:creationId xmlns:a16="http://schemas.microsoft.com/office/drawing/2014/main" id="{AE34D3B1-9462-32A1-5DAA-3CA2169113C8}"/>
+                <a16:creationId xmlns:a16="http://schemas.microsoft.com/office/drawing/2014/main" id="{3D96D04A-1709-AC58-9283-0BE7B70A3B55}"/>
               </a:ext>
             </a:extLst>
           </p:cNvPr>
@@ -11847,7 +15865,7 @@
           <p:cNvPr id="4" name="직선 연결선 17">
             <a:extLst>
               <a:ext uri="{FF2B5EF4-FFF2-40B4-BE49-F238E27FC236}">
-                <a16:creationId xmlns:a16="http://schemas.microsoft.com/office/drawing/2014/main" id="{E4BF545E-F9F6-BAB7-9F62-0547117AAB4B}"/>
+                <a16:creationId xmlns:a16="http://schemas.microsoft.com/office/drawing/2014/main" id="{41C42C19-2FA7-7B47-A69D-655B79B26E9F}"/>
               </a:ext>
             </a:extLst>
           </p:cNvPr>
@@ -11892,7 +15910,7 @@
           <p:cNvPr id="9" name="직선 연결선 17">
             <a:extLst>
               <a:ext uri="{FF2B5EF4-FFF2-40B4-BE49-F238E27FC236}">
-                <a16:creationId xmlns:a16="http://schemas.microsoft.com/office/drawing/2014/main" id="{72699C33-8C78-0DCA-EF87-E371F6B59321}"/>
+                <a16:creationId xmlns:a16="http://schemas.microsoft.com/office/drawing/2014/main" id="{3F667F75-900D-ECC0-32EE-59ACAB2EDEBA}"/>
               </a:ext>
             </a:extLst>
           </p:cNvPr>
@@ -11937,7 +15955,7 @@
           <p:cNvPr id="27" name="직선 연결선 26">
             <a:extLst>
               <a:ext uri="{FF2B5EF4-FFF2-40B4-BE49-F238E27FC236}">
-                <a16:creationId xmlns:a16="http://schemas.microsoft.com/office/drawing/2014/main" id="{7119F8D9-1B2A-798E-AE19-CE57D5A9261C}"/>
+                <a16:creationId xmlns:a16="http://schemas.microsoft.com/office/drawing/2014/main" id="{00193E1B-53AC-8E3F-7067-53104C419E2E}"/>
               </a:ext>
             </a:extLst>
           </p:cNvPr>
@@ -11982,7 +16000,7 @@
           <p:cNvPr id="24" name="직선 연결선 26">
             <a:extLst>
               <a:ext uri="{FF2B5EF4-FFF2-40B4-BE49-F238E27FC236}">
-                <a16:creationId xmlns:a16="http://schemas.microsoft.com/office/drawing/2014/main" id="{74073680-0026-ED3E-544F-0C94225DA895}"/>
+                <a16:creationId xmlns:a16="http://schemas.microsoft.com/office/drawing/2014/main" id="{E69B32E6-A4BB-94A5-3BEA-1B9E2A989020}"/>
               </a:ext>
             </a:extLst>
           </p:cNvPr>
@@ -12027,7 +16045,7 @@
           <p:cNvPr id="35" name="사각형: 둥근 모서리 114">
             <a:extLst>
               <a:ext uri="{FF2B5EF4-FFF2-40B4-BE49-F238E27FC236}">
-                <a16:creationId xmlns:a16="http://schemas.microsoft.com/office/drawing/2014/main" id="{B4917971-4A59-EF10-9161-86DDC9778D84}"/>
+                <a16:creationId xmlns:a16="http://schemas.microsoft.com/office/drawing/2014/main" id="{A1D7EEF2-2AB2-F6C6-C4FD-B9BD5A4B5CA7}"/>
               </a:ext>
             </a:extLst>
           </p:cNvPr>
@@ -12076,615 +16094,7 @@
     </p:spTree>
     <p:extLst>
       <p:ext uri="{BB962C8B-B14F-4D97-AF65-F5344CB8AC3E}">
-        <p14:creationId xmlns:p14="http://schemas.microsoft.com/office/powerpoint/2010/main" val="2980991815"/>
-      </p:ext>
-    </p:extLst>
-  </p:cSld>
-  <p:clrMapOvr>
-    <a:masterClrMapping/>
-  </p:clrMapOvr>
-</p:sld>
-</file>
-
-<file path=ppt/slides/slide4.xml><?xml version="1.0" encoding="utf-8"?>
-<p:sld xmlns:a="http://schemas.openxmlformats.org/drawingml/2006/main" xmlns:r="http://schemas.openxmlformats.org/officeDocument/2006/relationships" xmlns:p="http://schemas.openxmlformats.org/presentationml/2006/main">
-  <p:cSld>
-    <p:spTree>
-      <p:nvGrpSpPr>
-        <p:cNvPr id="1" name=""/>
-        <p:cNvGrpSpPr/>
-        <p:nvPr/>
-      </p:nvGrpSpPr>
-      <p:grpSpPr>
-        <a:xfrm>
-          <a:off x="0" y="0"/>
-          <a:ext cx="0" cy="0"/>
-          <a:chOff x="0" y="0"/>
-          <a:chExt cx="0" cy="0"/>
-        </a:xfrm>
-      </p:grpSpPr>
-    </p:spTree>
-    <p:extLst>
-      <p:ext uri="{BB962C8B-B14F-4D97-AF65-F5344CB8AC3E}">
-        <p14:creationId xmlns:p14="http://schemas.microsoft.com/office/powerpoint/2010/main" val="1182420857"/>
-      </p:ext>
-    </p:extLst>
-  </p:cSld>
-  <p:clrMapOvr>
-    <a:masterClrMapping/>
-  </p:clrMapOvr>
-</p:sld>
-</file>
-
-<file path=ppt/slides/slide5.xml><?xml version="1.0" encoding="utf-8"?>
-<p:sld xmlns:a="http://schemas.openxmlformats.org/drawingml/2006/main" xmlns:r="http://schemas.openxmlformats.org/officeDocument/2006/relationships" xmlns:p="http://schemas.openxmlformats.org/presentationml/2006/main">
-  <p:cSld>
-    <p:spTree>
-      <p:nvGrpSpPr>
-        <p:cNvPr id="1" name=""/>
-        <p:cNvGrpSpPr/>
-        <p:nvPr/>
-      </p:nvGrpSpPr>
-      <p:grpSpPr>
-        <a:xfrm>
-          <a:off x="0" y="0"/>
-          <a:ext cx="0" cy="0"/>
-          <a:chOff x="0" y="0"/>
-          <a:chExt cx="0" cy="0"/>
-        </a:xfrm>
-      </p:grpSpPr>
-      <p:sp>
-        <p:nvSpPr>
-          <p:cNvPr id="2" name="제목 1">
-            <a:extLst>
-              <a:ext uri="{FF2B5EF4-FFF2-40B4-BE49-F238E27FC236}">
-                <a16:creationId xmlns:a16="http://schemas.microsoft.com/office/drawing/2014/main" id="{8738443D-5E72-49E2-86AC-581D61C41C39}"/>
-              </a:ext>
-            </a:extLst>
-          </p:cNvPr>
-          <p:cNvSpPr>
-            <a:spLocks noGrp="1"/>
-          </p:cNvSpPr>
-          <p:nvPr>
-            <p:ph type="title"/>
-          </p:nvPr>
-        </p:nvSpPr>
-        <p:spPr>
-          <a:xfrm>
-            <a:off x="0" y="-726229"/>
-            <a:ext cx="9144000" cy="857250"/>
-          </a:xfrm>
-        </p:spPr>
-        <p:txBody>
-          <a:bodyPr>
-            <a:normAutofit fontScale="90000"/>
-          </a:bodyPr>
-          <a:lstStyle/>
-          <a:p>
-            <a:r>
-              <a:rPr lang="en-US" altLang="ko-KR"/>
-              <a:t>CUDA Container OCI Runtime Spec</a:t>
-            </a:r>
-            <a:endParaRPr lang="ko-KR" altLang="en-US" dirty="0"/>
-          </a:p>
-        </p:txBody>
-      </p:sp>
-      <p:sp>
-        <p:nvSpPr>
-          <p:cNvPr id="7" name="사각형: 둥근 모서리 114">
-            <a:extLst>
-              <a:ext uri="{FF2B5EF4-FFF2-40B4-BE49-F238E27FC236}">
-                <a16:creationId xmlns:a16="http://schemas.microsoft.com/office/drawing/2014/main" id="{E074CAD6-7716-4458-B0D4-1C0318E58F6D}"/>
-              </a:ext>
-            </a:extLst>
-          </p:cNvPr>
-          <p:cNvSpPr/>
-          <p:nvPr/>
-        </p:nvSpPr>
-        <p:spPr>
-          <a:xfrm>
-            <a:off x="2627784" y="259255"/>
-            <a:ext cx="4032448" cy="433441"/>
-          </a:xfrm>
-          <a:prstGeom prst="roundRect">
-            <a:avLst>
-              <a:gd name="adj" fmla="val 0"/>
-            </a:avLst>
-          </a:prstGeom>
-          <a:ln w="12700"/>
-        </p:spPr>
-        <p:style>
-          <a:lnRef idx="2">
-            <a:schemeClr val="dk1"/>
-          </a:lnRef>
-          <a:fillRef idx="1">
-            <a:schemeClr val="lt1"/>
-          </a:fillRef>
-          <a:effectRef idx="0">
-            <a:schemeClr val="dk1"/>
-          </a:effectRef>
-          <a:fontRef idx="minor">
-            <a:schemeClr val="dk1"/>
-          </a:fontRef>
-        </p:style>
-        <p:txBody>
-          <a:bodyPr rtlCol="0" anchor="ctr"/>
-          <a:lstStyle/>
-          <a:p>
-            <a:r>
-              <a:rPr lang="en-US" altLang="ko-KR" sz="1100"/>
-              <a:t>$ docker run --gpu all nvidia/cuda:9.0-base nvidia-smi</a:t>
-            </a:r>
-            <a:endParaRPr lang="en-US" altLang="ko-KR" sz="1100" dirty="0"/>
-          </a:p>
-        </p:txBody>
-      </p:sp>
-      <p:sp>
-        <p:nvSpPr>
-          <p:cNvPr id="11" name="사각형: 둥근 모서리 114">
-            <a:extLst>
-              <a:ext uri="{FF2B5EF4-FFF2-40B4-BE49-F238E27FC236}">
-                <a16:creationId xmlns:a16="http://schemas.microsoft.com/office/drawing/2014/main" id="{E07F06D4-AF1E-486E-8493-362B4DEDC5E3}"/>
-              </a:ext>
-            </a:extLst>
-          </p:cNvPr>
-          <p:cNvSpPr/>
-          <p:nvPr/>
-        </p:nvSpPr>
-        <p:spPr>
-          <a:xfrm>
-            <a:off x="899592" y="915566"/>
-            <a:ext cx="7488831" cy="3737569"/>
-          </a:xfrm>
-          <a:prstGeom prst="roundRect">
-            <a:avLst>
-              <a:gd name="adj" fmla="val 0"/>
-            </a:avLst>
-          </a:prstGeom>
-          <a:ln w="12700"/>
-        </p:spPr>
-        <p:style>
-          <a:lnRef idx="2">
-            <a:schemeClr val="dk1"/>
-          </a:lnRef>
-          <a:fillRef idx="1">
-            <a:schemeClr val="lt1"/>
-          </a:fillRef>
-          <a:effectRef idx="0">
-            <a:schemeClr val="dk1"/>
-          </a:effectRef>
-          <a:fontRef idx="minor">
-            <a:schemeClr val="dk1"/>
-          </a:fontRef>
-        </p:style>
-        <p:txBody>
-          <a:bodyPr rtlCol="0" anchor="ctr"/>
-          <a:lstStyle/>
-          <a:p>
-            <a:r>
-              <a:rPr lang="en-US" altLang="ko-KR" sz="1100" kern="0" dirty="0">
-                <a:cs typeface="Al Bayan Plain" pitchFamily="2" charset="-78"/>
-              </a:rPr>
-              <a:t>{</a:t>
-            </a:r>
-          </a:p>
-          <a:p>
-            <a:r>
-              <a:rPr lang="en-US" altLang="ko-KR" sz="1100" kern="0" dirty="0">
-                <a:cs typeface="Al Bayan Plain" pitchFamily="2" charset="-78"/>
-              </a:rPr>
-              <a:t>    "hooks": {</a:t>
-            </a:r>
-          </a:p>
-          <a:p>
-            <a:r>
-              <a:rPr lang="en-US" altLang="ko-KR" sz="1100" kern="0" dirty="0">
-                <a:cs typeface="Al Bayan Plain" pitchFamily="2" charset="-78"/>
-              </a:rPr>
-              <a:t>        "</a:t>
-            </a:r>
-            <a:r>
-              <a:rPr lang="en-US" altLang="ko-KR" sz="1100" kern="0" dirty="0" err="1">
-                <a:cs typeface="Al Bayan Plain" pitchFamily="2" charset="-78"/>
-              </a:rPr>
-              <a:t>Poststart</a:t>
-            </a:r>
-            <a:r>
-              <a:rPr lang="en-US" altLang="ko-KR" sz="1100" kern="0" dirty="0">
-                <a:cs typeface="Al Bayan Plain" pitchFamily="2" charset="-78"/>
-              </a:rPr>
-              <a:t>": [],</a:t>
-            </a:r>
-          </a:p>
-          <a:p>
-            <a:r>
-              <a:rPr lang="en-US" altLang="ko-KR" sz="1100" kern="0" dirty="0">
-                <a:cs typeface="Al Bayan Plain" pitchFamily="2" charset="-78"/>
-              </a:rPr>
-              <a:t>        "</a:t>
-            </a:r>
-            <a:r>
-              <a:rPr lang="en-US" altLang="ko-KR" sz="1100" kern="0" dirty="0" err="1">
-                <a:cs typeface="Al Bayan Plain" pitchFamily="2" charset="-78"/>
-              </a:rPr>
-              <a:t>Poststop</a:t>
-            </a:r>
-            <a:r>
-              <a:rPr lang="en-US" altLang="ko-KR" sz="1100" kern="0" dirty="0">
-                <a:cs typeface="Al Bayan Plain" pitchFamily="2" charset="-78"/>
-              </a:rPr>
-              <a:t>": [],</a:t>
-            </a:r>
-          </a:p>
-          <a:p>
-            <a:r>
-              <a:rPr lang="en-US" altLang="ko-KR" sz="1100" kern="0" dirty="0">
-                <a:cs typeface="Al Bayan Plain" pitchFamily="2" charset="-78"/>
-              </a:rPr>
-              <a:t>        "prestart": [{</a:t>
-            </a:r>
-          </a:p>
-          <a:p>
-            <a:r>
-              <a:rPr lang="en-US" altLang="ko-KR" sz="1100" kern="0" dirty="0">
-                <a:cs typeface="Al Bayan Plain" pitchFamily="2" charset="-78"/>
-              </a:rPr>
-              <a:t>            "</a:t>
-            </a:r>
-            <a:r>
-              <a:rPr lang="en-US" altLang="ko-KR" sz="1100" kern="0" dirty="0" err="1">
-                <a:cs typeface="Al Bayan Plain" pitchFamily="2" charset="-78"/>
-              </a:rPr>
-              <a:t>args</a:t>
-            </a:r>
-            <a:r>
-              <a:rPr lang="en-US" altLang="ko-KR" sz="1100" kern="0" dirty="0">
-                <a:cs typeface="Al Bayan Plain" pitchFamily="2" charset="-78"/>
-              </a:rPr>
-              <a:t>": ["/</a:t>
-            </a:r>
-            <a:r>
-              <a:rPr lang="en-US" altLang="ko-KR" sz="1100" kern="0" dirty="0" err="1">
-                <a:cs typeface="Al Bayan Plain" pitchFamily="2" charset="-78"/>
-              </a:rPr>
-              <a:t>usr</a:t>
-            </a:r>
-            <a:r>
-              <a:rPr lang="en-US" altLang="ko-KR" sz="1100" kern="0" dirty="0">
-                <a:cs typeface="Al Bayan Plain" pitchFamily="2" charset="-78"/>
-              </a:rPr>
-              <a:t>/bin/</a:t>
-            </a:r>
-            <a:r>
-              <a:rPr lang="en-US" altLang="ko-KR" sz="1100" kern="0" dirty="0" err="1">
-                <a:cs typeface="Al Bayan Plain" pitchFamily="2" charset="-78"/>
-              </a:rPr>
-              <a:t>nvidia</a:t>
-            </a:r>
-            <a:r>
-              <a:rPr lang="en-US" altLang="ko-KR" sz="1100" kern="0" dirty="0">
-                <a:cs typeface="Al Bayan Plain" pitchFamily="2" charset="-78"/>
-              </a:rPr>
-              <a:t>-container-runtime-hook", "prestart"],</a:t>
-            </a:r>
-          </a:p>
-          <a:p>
-            <a:r>
-              <a:rPr lang="en-US" altLang="ko-KR" sz="1100" kern="0" dirty="0">
-                <a:cs typeface="Al Bayan Plain" pitchFamily="2" charset="-78"/>
-              </a:rPr>
-              <a:t>            "path": "/</a:t>
-            </a:r>
-            <a:r>
-              <a:rPr lang="en-US" altLang="ko-KR" sz="1100" kern="0" dirty="0" err="1">
-                <a:cs typeface="Al Bayan Plain" pitchFamily="2" charset="-78"/>
-              </a:rPr>
-              <a:t>usr</a:t>
-            </a:r>
-            <a:r>
-              <a:rPr lang="en-US" altLang="ko-KR" sz="1100" kern="0" dirty="0">
-                <a:cs typeface="Al Bayan Plain" pitchFamily="2" charset="-78"/>
-              </a:rPr>
-              <a:t>/bin/</a:t>
-            </a:r>
-            <a:r>
-              <a:rPr lang="en-US" altLang="ko-KR" sz="1100" kern="0" dirty="0" err="1">
-                <a:cs typeface="Al Bayan Plain" pitchFamily="2" charset="-78"/>
-              </a:rPr>
-              <a:t>nvidia</a:t>
-            </a:r>
-            <a:r>
-              <a:rPr lang="en-US" altLang="ko-KR" sz="1100" kern="0" dirty="0">
-                <a:cs typeface="Al Bayan Plain" pitchFamily="2" charset="-78"/>
-              </a:rPr>
-              <a:t>-container-runtime-hook”</a:t>
-            </a:r>
-          </a:p>
-          <a:p>
-            <a:r>
-              <a:rPr lang="en-US" altLang="ko-KR" sz="1100" kern="0" dirty="0">
-                <a:cs typeface="Al Bayan Plain" pitchFamily="2" charset="-78"/>
-              </a:rPr>
-              <a:t>        }]</a:t>
-            </a:r>
-          </a:p>
-          <a:p>
-            <a:r>
-              <a:rPr lang="en-US" altLang="ko-KR" sz="1100" kern="0" dirty="0">
-                <a:cs typeface="Al Bayan Plain" pitchFamily="2" charset="-78"/>
-              </a:rPr>
-              <a:t>    },</a:t>
-            </a:r>
-          </a:p>
-          <a:p>
-            <a:r>
-              <a:rPr lang="en-US" altLang="ko-KR" sz="1100" kern="0" dirty="0">
-                <a:cs typeface="Al Bayan Plain" pitchFamily="2" charset="-78"/>
-              </a:rPr>
-              <a:t>...</a:t>
-            </a:r>
-          </a:p>
-          <a:p>
-            <a:r>
-              <a:rPr lang="en-US" altLang="ko-KR" sz="1100" kern="0" dirty="0">
-                <a:cs typeface="Al Bayan Plain" pitchFamily="2" charset="-78"/>
-              </a:rPr>
-              <a:t>    "process": {</a:t>
-            </a:r>
-          </a:p>
-          <a:p>
-            <a:r>
-              <a:rPr lang="en-US" altLang="ko-KR" sz="1100" kern="0" dirty="0">
-                <a:cs typeface="Al Bayan Plain" pitchFamily="2" charset="-78"/>
-              </a:rPr>
-              <a:t>        “env”: [</a:t>
-            </a:r>
-          </a:p>
-          <a:p>
-            <a:r>
-              <a:rPr lang="en-US" altLang="ko-KR" sz="1100" kern="0" dirty="0">
-                <a:cs typeface="Al Bayan Plain" pitchFamily="2" charset="-78"/>
-              </a:rPr>
-              <a:t>            "NVIDIA_VISIBLE_DEVICES=GPU-5a270e58-abc7-d55b-a94f-54d410c1dfe2,GPU-9de66fe4-2a8b-4a2b-36bc-d61c165db7d8",</a:t>
-            </a:r>
-          </a:p>
-          <a:p>
-            <a:r>
-              <a:rPr lang="en-US" altLang="ko-KR" sz="1100" kern="0" dirty="0">
-                <a:cs typeface="Al Bayan Plain" pitchFamily="2" charset="-78"/>
-              </a:rPr>
-              <a:t>            “NVIDIA_DRIVER_CAPABILITIES=</a:t>
-            </a:r>
-            <a:r>
-              <a:rPr lang="en-US" altLang="ko-KR" sz="1100" kern="0" dirty="0" err="1">
-                <a:cs typeface="Al Bayan Plain" pitchFamily="2" charset="-78"/>
-              </a:rPr>
-              <a:t>compute,utility</a:t>
-            </a:r>
-            <a:r>
-              <a:rPr lang="en-US" altLang="ko-KR" sz="1100" kern="0" dirty="0">
-                <a:cs typeface="Al Bayan Plain" pitchFamily="2" charset="-78"/>
-              </a:rPr>
-              <a:t>”,</a:t>
-            </a:r>
-          </a:p>
-          <a:p>
-            <a:r>
-              <a:rPr lang="en-US" altLang="ko-KR" sz="1100" kern="0" dirty="0">
-                <a:cs typeface="Al Bayan Plain" pitchFamily="2" charset="-78"/>
-              </a:rPr>
-              <a:t>            "NV_CUDA_CUDART_VERSION=11.8.89-1",</a:t>
-            </a:r>
-          </a:p>
-          <a:p>
-            <a:r>
-              <a:rPr lang="en-US" altLang="ko-KR" sz="1100" kern="0" dirty="0">
-                <a:cs typeface="Al Bayan Plain" pitchFamily="2" charset="-78"/>
-              </a:rPr>
-              <a:t>            "CUDA_VERSION=11.8.0”,</a:t>
-            </a:r>
-          </a:p>
-          <a:p>
-            <a:r>
-              <a:rPr lang="en-US" altLang="ko-KR" sz="1100" kern="0" dirty="0">
-                <a:cs typeface="Al Bayan Plain" pitchFamily="2" charset="-78"/>
-              </a:rPr>
-              <a:t>            "LD_LIBRARY_PATH=/</a:t>
-            </a:r>
-            <a:r>
-              <a:rPr lang="en-US" altLang="ko-KR" sz="1100" kern="0" dirty="0" err="1">
-                <a:cs typeface="Al Bayan Plain" pitchFamily="2" charset="-78"/>
-              </a:rPr>
-              <a:t>usr</a:t>
-            </a:r>
-            <a:r>
-              <a:rPr lang="en-US" altLang="ko-KR" sz="1100" kern="0" dirty="0">
-                <a:cs typeface="Al Bayan Plain" pitchFamily="2" charset="-78"/>
-              </a:rPr>
-              <a:t>/local/</a:t>
-            </a:r>
-            <a:r>
-              <a:rPr lang="en-US" altLang="ko-KR" sz="1100" kern="0" dirty="0" err="1">
-                <a:cs typeface="Al Bayan Plain" pitchFamily="2" charset="-78"/>
-              </a:rPr>
-              <a:t>nvidia</a:t>
-            </a:r>
-            <a:r>
-              <a:rPr lang="en-US" altLang="ko-KR" sz="1100" kern="0" dirty="0">
-                <a:cs typeface="Al Bayan Plain" pitchFamily="2" charset="-78"/>
-              </a:rPr>
-              <a:t>/lib:/</a:t>
-            </a:r>
-            <a:r>
-              <a:rPr lang="en-US" altLang="ko-KR" sz="1100" kern="0" dirty="0" err="1">
-                <a:cs typeface="Al Bayan Plain" pitchFamily="2" charset="-78"/>
-              </a:rPr>
-              <a:t>usr</a:t>
-            </a:r>
-            <a:r>
-              <a:rPr lang="en-US" altLang="ko-KR" sz="1100" kern="0" dirty="0">
-                <a:cs typeface="Al Bayan Plain" pitchFamily="2" charset="-78"/>
-              </a:rPr>
-              <a:t>/local/</a:t>
-            </a:r>
-            <a:r>
-              <a:rPr lang="en-US" altLang="ko-KR" sz="1100" kern="0" dirty="0" err="1">
-                <a:cs typeface="Al Bayan Plain" pitchFamily="2" charset="-78"/>
-              </a:rPr>
-              <a:t>nvidia</a:t>
-            </a:r>
-            <a:r>
-              <a:rPr lang="en-US" altLang="ko-KR" sz="1100" kern="0" dirty="0">
-                <a:cs typeface="Al Bayan Plain" pitchFamily="2" charset="-78"/>
-              </a:rPr>
-              <a:t>/lib64"</a:t>
-            </a:r>
-          </a:p>
-          <a:p>
-            <a:r>
-              <a:rPr lang="en-US" altLang="ko-KR" sz="1100" kern="0" dirty="0">
-                <a:cs typeface="Al Bayan Plain" pitchFamily="2" charset="-78"/>
-              </a:rPr>
-              <a:t>            ...</a:t>
-            </a:r>
-            <a:br>
-              <a:rPr lang="en-US" altLang="ko-KR" sz="1100" kern="0" dirty="0">
-                <a:cs typeface="Al Bayan Plain" pitchFamily="2" charset="-78"/>
-              </a:rPr>
-            </a:br>
-            <a:r>
-              <a:rPr lang="en-US" altLang="ko-KR" sz="1100" kern="0" dirty="0">
-                <a:cs typeface="Al Bayan Plain" pitchFamily="2" charset="-78"/>
-              </a:rPr>
-              <a:t>        ]</a:t>
-            </a:r>
-          </a:p>
-          <a:p>
-            <a:r>
-              <a:rPr lang="en-US" altLang="ko-KR" sz="1100" kern="0" dirty="0">
-                <a:cs typeface="Al Bayan Plain" pitchFamily="2" charset="-78"/>
-              </a:rPr>
-              <a:t>    }</a:t>
-            </a:r>
-          </a:p>
-          <a:p>
-            <a:r>
-              <a:rPr lang="en-US" altLang="ko-KR" sz="1100" kern="0" dirty="0">
-                <a:cs typeface="Al Bayan Plain" pitchFamily="2" charset="-78"/>
-              </a:rPr>
-              <a:t>...</a:t>
-            </a:r>
-            <a:endParaRPr lang="en-US" altLang="ko-KR" sz="1600" kern="0" dirty="0">
-              <a:cs typeface="Al Bayan Plain" pitchFamily="2" charset="-78"/>
-            </a:endParaRPr>
-          </a:p>
-        </p:txBody>
-      </p:sp>
-      <p:cxnSp>
-        <p:nvCxnSpPr>
-          <p:cNvPr id="9" name="직선 화살표 연결선 8">
-            <a:extLst>
-              <a:ext uri="{FF2B5EF4-FFF2-40B4-BE49-F238E27FC236}">
-                <a16:creationId xmlns:a16="http://schemas.microsoft.com/office/drawing/2014/main" id="{D3447036-464F-4C90-9B09-6E8806442451}"/>
-              </a:ext>
-            </a:extLst>
-          </p:cNvPr>
-          <p:cNvCxnSpPr>
-            <a:cxnSpLocks/>
-            <a:stCxn id="7" idx="2"/>
-            <a:endCxn id="11" idx="0"/>
-          </p:cNvCxnSpPr>
-          <p:nvPr/>
-        </p:nvCxnSpPr>
-        <p:spPr>
-          <a:xfrm>
-            <a:off x="4644008" y="692696"/>
-            <a:ext cx="0" cy="222870"/>
-          </a:xfrm>
-          <a:prstGeom prst="straightConnector1">
-            <a:avLst/>
-          </a:prstGeom>
-          <a:ln w="12700">
-            <a:solidFill>
-              <a:schemeClr val="tx1"/>
-            </a:solidFill>
-            <a:headEnd type="none" w="med" len="med"/>
-            <a:tailEnd type="triangle" w="med" len="med"/>
-          </a:ln>
-        </p:spPr>
-        <p:style>
-          <a:lnRef idx="1">
-            <a:schemeClr val="accent1"/>
-          </a:lnRef>
-          <a:fillRef idx="0">
-            <a:schemeClr val="accent1"/>
-          </a:fillRef>
-          <a:effectRef idx="0">
-            <a:schemeClr val="accent1"/>
-          </a:effectRef>
-          <a:fontRef idx="minor">
-            <a:schemeClr val="tx1"/>
-          </a:fontRef>
-        </p:style>
-      </p:cxnSp>
-      <p:sp>
-        <p:nvSpPr>
-          <p:cNvPr id="22" name="사각형: 둥근 모서리 114">
-            <a:extLst>
-              <a:ext uri="{FF2B5EF4-FFF2-40B4-BE49-F238E27FC236}">
-                <a16:creationId xmlns:a16="http://schemas.microsoft.com/office/drawing/2014/main" id="{0B79FB11-EB5E-48B2-9B7D-2CF7A5759856}"/>
-              </a:ext>
-            </a:extLst>
-          </p:cNvPr>
-          <p:cNvSpPr/>
-          <p:nvPr/>
-        </p:nvSpPr>
-        <p:spPr>
-          <a:xfrm>
-            <a:off x="3278436" y="4587974"/>
-            <a:ext cx="2731142" cy="433441"/>
-          </a:xfrm>
-          <a:prstGeom prst="roundRect">
-            <a:avLst>
-              <a:gd name="adj" fmla="val 10304"/>
-            </a:avLst>
-          </a:prstGeom>
-          <a:noFill/>
-          <a:ln>
-            <a:noFill/>
-          </a:ln>
-        </p:spPr>
-        <p:style>
-          <a:lnRef idx="2">
-            <a:schemeClr val="dk1"/>
-          </a:lnRef>
-          <a:fillRef idx="1">
-            <a:schemeClr val="lt1"/>
-          </a:fillRef>
-          <a:effectRef idx="0">
-            <a:schemeClr val="dk1"/>
-          </a:effectRef>
-          <a:fontRef idx="minor">
-            <a:schemeClr val="dk1"/>
-          </a:fontRef>
-        </p:style>
-        <p:txBody>
-          <a:bodyPr rtlCol="0" anchor="ctr"/>
-          <a:lstStyle/>
-          <a:p>
-            <a:pPr algn="ctr"/>
-            <a:r>
-              <a:rPr lang="en-US" altLang="ko-KR" sz="1200"/>
-              <a:t>OCI Runtime Spec</a:t>
-            </a:r>
-            <a:endParaRPr lang="en-US" altLang="ko-KR" sz="1200" dirty="0"/>
-          </a:p>
-        </p:txBody>
-      </p:sp>
-    </p:spTree>
-    <p:extLst>
-      <p:ext uri="{BB962C8B-B14F-4D97-AF65-F5344CB8AC3E}">
-        <p14:creationId xmlns:p14="http://schemas.microsoft.com/office/powerpoint/2010/main" val="3265569655"/>
+        <p14:creationId xmlns:p14="http://schemas.microsoft.com/office/powerpoint/2010/main" val="4218939010"/>
       </p:ext>
     </p:extLst>
   </p:cSld>
@@ -12729,6 +16139,584 @@
         </p:nvSpPr>
         <p:spPr>
           <a:xfrm>
+            <a:off x="0" y="-726229"/>
+            <a:ext cx="9144000" cy="857250"/>
+          </a:xfrm>
+        </p:spPr>
+        <p:txBody>
+          <a:bodyPr>
+            <a:normAutofit fontScale="90000"/>
+          </a:bodyPr>
+          <a:lstStyle/>
+          <a:p>
+            <a:r>
+              <a:rPr lang="en-US" altLang="ko-KR"/>
+              <a:t>CUDA Container OCI Runtime Spec</a:t>
+            </a:r>
+            <a:endParaRPr lang="ko-KR" altLang="en-US" dirty="0"/>
+          </a:p>
+        </p:txBody>
+      </p:sp>
+      <p:sp>
+        <p:nvSpPr>
+          <p:cNvPr id="7" name="사각형: 둥근 모서리 114">
+            <a:extLst>
+              <a:ext uri="{FF2B5EF4-FFF2-40B4-BE49-F238E27FC236}">
+                <a16:creationId xmlns:a16="http://schemas.microsoft.com/office/drawing/2014/main" id="{E074CAD6-7716-4458-B0D4-1C0318E58F6D}"/>
+              </a:ext>
+            </a:extLst>
+          </p:cNvPr>
+          <p:cNvSpPr/>
+          <p:nvPr/>
+        </p:nvSpPr>
+        <p:spPr>
+          <a:xfrm>
+            <a:off x="2627784" y="259255"/>
+            <a:ext cx="4032448" cy="433441"/>
+          </a:xfrm>
+          <a:prstGeom prst="roundRect">
+            <a:avLst>
+              <a:gd name="adj" fmla="val 0"/>
+            </a:avLst>
+          </a:prstGeom>
+          <a:ln w="12700"/>
+        </p:spPr>
+        <p:style>
+          <a:lnRef idx="2">
+            <a:schemeClr val="dk1"/>
+          </a:lnRef>
+          <a:fillRef idx="1">
+            <a:schemeClr val="lt1"/>
+          </a:fillRef>
+          <a:effectRef idx="0">
+            <a:schemeClr val="dk1"/>
+          </a:effectRef>
+          <a:fontRef idx="minor">
+            <a:schemeClr val="dk1"/>
+          </a:fontRef>
+        </p:style>
+        <p:txBody>
+          <a:bodyPr rtlCol="0" anchor="ctr"/>
+          <a:lstStyle/>
+          <a:p>
+            <a:r>
+              <a:rPr lang="en-US" altLang="ko-KR" sz="1100"/>
+              <a:t>$ docker run --gpu all nvidia/cuda:9.0-base nvidia-smi</a:t>
+            </a:r>
+            <a:endParaRPr lang="en-US" altLang="ko-KR" sz="1100" dirty="0"/>
+          </a:p>
+        </p:txBody>
+      </p:sp>
+      <p:sp>
+        <p:nvSpPr>
+          <p:cNvPr id="11" name="사각형: 둥근 모서리 114">
+            <a:extLst>
+              <a:ext uri="{FF2B5EF4-FFF2-40B4-BE49-F238E27FC236}">
+                <a16:creationId xmlns:a16="http://schemas.microsoft.com/office/drawing/2014/main" id="{E07F06D4-AF1E-486E-8493-362B4DEDC5E3}"/>
+              </a:ext>
+            </a:extLst>
+          </p:cNvPr>
+          <p:cNvSpPr/>
+          <p:nvPr/>
+        </p:nvSpPr>
+        <p:spPr>
+          <a:xfrm>
+            <a:off x="899592" y="915566"/>
+            <a:ext cx="7488831" cy="3737569"/>
+          </a:xfrm>
+          <a:prstGeom prst="roundRect">
+            <a:avLst>
+              <a:gd name="adj" fmla="val 0"/>
+            </a:avLst>
+          </a:prstGeom>
+          <a:ln w="12700"/>
+        </p:spPr>
+        <p:style>
+          <a:lnRef idx="2">
+            <a:schemeClr val="dk1"/>
+          </a:lnRef>
+          <a:fillRef idx="1">
+            <a:schemeClr val="lt1"/>
+          </a:fillRef>
+          <a:effectRef idx="0">
+            <a:schemeClr val="dk1"/>
+          </a:effectRef>
+          <a:fontRef idx="minor">
+            <a:schemeClr val="dk1"/>
+          </a:fontRef>
+        </p:style>
+        <p:txBody>
+          <a:bodyPr rtlCol="0" anchor="ctr"/>
+          <a:lstStyle/>
+          <a:p>
+            <a:r>
+              <a:rPr lang="en-US" altLang="ko-KR" sz="1100" kern="0" dirty="0">
+                <a:cs typeface="Al Bayan Plain" pitchFamily="2" charset="-78"/>
+              </a:rPr>
+              <a:t>{</a:t>
+            </a:r>
+          </a:p>
+          <a:p>
+            <a:r>
+              <a:rPr lang="en-US" altLang="ko-KR" sz="1100" kern="0" dirty="0">
+                <a:cs typeface="Al Bayan Plain" pitchFamily="2" charset="-78"/>
+              </a:rPr>
+              <a:t>    "hooks": {</a:t>
+            </a:r>
+          </a:p>
+          <a:p>
+            <a:r>
+              <a:rPr lang="en-US" altLang="ko-KR" sz="1100" kern="0" dirty="0">
+                <a:cs typeface="Al Bayan Plain" pitchFamily="2" charset="-78"/>
+              </a:rPr>
+              <a:t>        "</a:t>
+            </a:r>
+            <a:r>
+              <a:rPr lang="en-US" altLang="ko-KR" sz="1100" kern="0" dirty="0" err="1">
+                <a:cs typeface="Al Bayan Plain" pitchFamily="2" charset="-78"/>
+              </a:rPr>
+              <a:t>Poststart</a:t>
+            </a:r>
+            <a:r>
+              <a:rPr lang="en-US" altLang="ko-KR" sz="1100" kern="0" dirty="0">
+                <a:cs typeface="Al Bayan Plain" pitchFamily="2" charset="-78"/>
+              </a:rPr>
+              <a:t>": [],</a:t>
+            </a:r>
+          </a:p>
+          <a:p>
+            <a:r>
+              <a:rPr lang="en-US" altLang="ko-KR" sz="1100" kern="0" dirty="0">
+                <a:cs typeface="Al Bayan Plain" pitchFamily="2" charset="-78"/>
+              </a:rPr>
+              <a:t>        "</a:t>
+            </a:r>
+            <a:r>
+              <a:rPr lang="en-US" altLang="ko-KR" sz="1100" kern="0" dirty="0" err="1">
+                <a:cs typeface="Al Bayan Plain" pitchFamily="2" charset="-78"/>
+              </a:rPr>
+              <a:t>Poststop</a:t>
+            </a:r>
+            <a:r>
+              <a:rPr lang="en-US" altLang="ko-KR" sz="1100" kern="0" dirty="0">
+                <a:cs typeface="Al Bayan Plain" pitchFamily="2" charset="-78"/>
+              </a:rPr>
+              <a:t>": [],</a:t>
+            </a:r>
+          </a:p>
+          <a:p>
+            <a:r>
+              <a:rPr lang="en-US" altLang="ko-KR" sz="1100" kern="0" dirty="0">
+                <a:cs typeface="Al Bayan Plain" pitchFamily="2" charset="-78"/>
+              </a:rPr>
+              <a:t>        "prestart": [{</a:t>
+            </a:r>
+          </a:p>
+          <a:p>
+            <a:r>
+              <a:rPr lang="en-US" altLang="ko-KR" sz="1100" kern="0" dirty="0">
+                <a:cs typeface="Al Bayan Plain" pitchFamily="2" charset="-78"/>
+              </a:rPr>
+              <a:t>            "</a:t>
+            </a:r>
+            <a:r>
+              <a:rPr lang="en-US" altLang="ko-KR" sz="1100" kern="0" dirty="0" err="1">
+                <a:cs typeface="Al Bayan Plain" pitchFamily="2" charset="-78"/>
+              </a:rPr>
+              <a:t>args</a:t>
+            </a:r>
+            <a:r>
+              <a:rPr lang="en-US" altLang="ko-KR" sz="1100" kern="0" dirty="0">
+                <a:cs typeface="Al Bayan Plain" pitchFamily="2" charset="-78"/>
+              </a:rPr>
+              <a:t>": ["/</a:t>
+            </a:r>
+            <a:r>
+              <a:rPr lang="en-US" altLang="ko-KR" sz="1100" kern="0" dirty="0" err="1">
+                <a:cs typeface="Al Bayan Plain" pitchFamily="2" charset="-78"/>
+              </a:rPr>
+              <a:t>usr</a:t>
+            </a:r>
+            <a:r>
+              <a:rPr lang="en-US" altLang="ko-KR" sz="1100" kern="0" dirty="0">
+                <a:cs typeface="Al Bayan Plain" pitchFamily="2" charset="-78"/>
+              </a:rPr>
+              <a:t>/bin/</a:t>
+            </a:r>
+            <a:r>
+              <a:rPr lang="en-US" altLang="ko-KR" sz="1100" kern="0" dirty="0" err="1">
+                <a:cs typeface="Al Bayan Plain" pitchFamily="2" charset="-78"/>
+              </a:rPr>
+              <a:t>nvidia</a:t>
+            </a:r>
+            <a:r>
+              <a:rPr lang="en-US" altLang="ko-KR" sz="1100" kern="0" dirty="0">
+                <a:cs typeface="Al Bayan Plain" pitchFamily="2" charset="-78"/>
+              </a:rPr>
+              <a:t>-container-runtime-hook", "prestart"],</a:t>
+            </a:r>
+          </a:p>
+          <a:p>
+            <a:r>
+              <a:rPr lang="en-US" altLang="ko-KR" sz="1100" kern="0" dirty="0">
+                <a:cs typeface="Al Bayan Plain" pitchFamily="2" charset="-78"/>
+              </a:rPr>
+              <a:t>            "path": "/</a:t>
+            </a:r>
+            <a:r>
+              <a:rPr lang="en-US" altLang="ko-KR" sz="1100" kern="0" dirty="0" err="1">
+                <a:cs typeface="Al Bayan Plain" pitchFamily="2" charset="-78"/>
+              </a:rPr>
+              <a:t>usr</a:t>
+            </a:r>
+            <a:r>
+              <a:rPr lang="en-US" altLang="ko-KR" sz="1100" kern="0" dirty="0">
+                <a:cs typeface="Al Bayan Plain" pitchFamily="2" charset="-78"/>
+              </a:rPr>
+              <a:t>/bin/</a:t>
+            </a:r>
+            <a:r>
+              <a:rPr lang="en-US" altLang="ko-KR" sz="1100" kern="0" dirty="0" err="1">
+                <a:cs typeface="Al Bayan Plain" pitchFamily="2" charset="-78"/>
+              </a:rPr>
+              <a:t>nvidia</a:t>
+            </a:r>
+            <a:r>
+              <a:rPr lang="en-US" altLang="ko-KR" sz="1100" kern="0" dirty="0">
+                <a:cs typeface="Al Bayan Plain" pitchFamily="2" charset="-78"/>
+              </a:rPr>
+              <a:t>-container-runtime-hook”</a:t>
+            </a:r>
+          </a:p>
+          <a:p>
+            <a:r>
+              <a:rPr lang="en-US" altLang="ko-KR" sz="1100" kern="0" dirty="0">
+                <a:cs typeface="Al Bayan Plain" pitchFamily="2" charset="-78"/>
+              </a:rPr>
+              <a:t>        }]</a:t>
+            </a:r>
+          </a:p>
+          <a:p>
+            <a:r>
+              <a:rPr lang="en-US" altLang="ko-KR" sz="1100" kern="0" dirty="0">
+                <a:cs typeface="Al Bayan Plain" pitchFamily="2" charset="-78"/>
+              </a:rPr>
+              <a:t>    },</a:t>
+            </a:r>
+          </a:p>
+          <a:p>
+            <a:r>
+              <a:rPr lang="en-US" altLang="ko-KR" sz="1100" kern="0" dirty="0">
+                <a:cs typeface="Al Bayan Plain" pitchFamily="2" charset="-78"/>
+              </a:rPr>
+              <a:t>...</a:t>
+            </a:r>
+          </a:p>
+          <a:p>
+            <a:r>
+              <a:rPr lang="en-US" altLang="ko-KR" sz="1100" kern="0" dirty="0">
+                <a:cs typeface="Al Bayan Plain" pitchFamily="2" charset="-78"/>
+              </a:rPr>
+              <a:t>    "process": {</a:t>
+            </a:r>
+          </a:p>
+          <a:p>
+            <a:r>
+              <a:rPr lang="en-US" altLang="ko-KR" sz="1100" kern="0" dirty="0">
+                <a:cs typeface="Al Bayan Plain" pitchFamily="2" charset="-78"/>
+              </a:rPr>
+              <a:t>        “env”: [</a:t>
+            </a:r>
+          </a:p>
+          <a:p>
+            <a:r>
+              <a:rPr lang="en-US" altLang="ko-KR" sz="1100" kern="0" dirty="0">
+                <a:cs typeface="Al Bayan Plain" pitchFamily="2" charset="-78"/>
+              </a:rPr>
+              <a:t>            "NVIDIA_VISIBLE_DEVICES=GPU-5a270e58-abc7-d55b-a94f-54d410c1dfe2,GPU-9de66fe4-2a8b-4a2b-36bc-d61c165db7d8",</a:t>
+            </a:r>
+          </a:p>
+          <a:p>
+            <a:r>
+              <a:rPr lang="en-US" altLang="ko-KR" sz="1100" kern="0" dirty="0">
+                <a:cs typeface="Al Bayan Plain" pitchFamily="2" charset="-78"/>
+              </a:rPr>
+              <a:t>            “NVIDIA_DRIVER_CAPABILITIES=</a:t>
+            </a:r>
+            <a:r>
+              <a:rPr lang="en-US" altLang="ko-KR" sz="1100" kern="0" dirty="0" err="1">
+                <a:cs typeface="Al Bayan Plain" pitchFamily="2" charset="-78"/>
+              </a:rPr>
+              <a:t>compute,utility</a:t>
+            </a:r>
+            <a:r>
+              <a:rPr lang="en-US" altLang="ko-KR" sz="1100" kern="0" dirty="0">
+                <a:cs typeface="Al Bayan Plain" pitchFamily="2" charset="-78"/>
+              </a:rPr>
+              <a:t>”,</a:t>
+            </a:r>
+          </a:p>
+          <a:p>
+            <a:r>
+              <a:rPr lang="en-US" altLang="ko-KR" sz="1100" kern="0" dirty="0">
+                <a:cs typeface="Al Bayan Plain" pitchFamily="2" charset="-78"/>
+              </a:rPr>
+              <a:t>            "NV_CUDA_CUDART_VERSION=11.8.89-1",</a:t>
+            </a:r>
+          </a:p>
+          <a:p>
+            <a:r>
+              <a:rPr lang="en-US" altLang="ko-KR" sz="1100" kern="0" dirty="0">
+                <a:cs typeface="Al Bayan Plain" pitchFamily="2" charset="-78"/>
+              </a:rPr>
+              <a:t>            "CUDA_VERSION=11.8.0”,</a:t>
+            </a:r>
+          </a:p>
+          <a:p>
+            <a:r>
+              <a:rPr lang="en-US" altLang="ko-KR" sz="1100" kern="0" dirty="0">
+                <a:cs typeface="Al Bayan Plain" pitchFamily="2" charset="-78"/>
+              </a:rPr>
+              <a:t>            "LD_LIBRARY_PATH=/</a:t>
+            </a:r>
+            <a:r>
+              <a:rPr lang="en-US" altLang="ko-KR" sz="1100" kern="0" dirty="0" err="1">
+                <a:cs typeface="Al Bayan Plain" pitchFamily="2" charset="-78"/>
+              </a:rPr>
+              <a:t>usr</a:t>
+            </a:r>
+            <a:r>
+              <a:rPr lang="en-US" altLang="ko-KR" sz="1100" kern="0" dirty="0">
+                <a:cs typeface="Al Bayan Plain" pitchFamily="2" charset="-78"/>
+              </a:rPr>
+              <a:t>/local/</a:t>
+            </a:r>
+            <a:r>
+              <a:rPr lang="en-US" altLang="ko-KR" sz="1100" kern="0" dirty="0" err="1">
+                <a:cs typeface="Al Bayan Plain" pitchFamily="2" charset="-78"/>
+              </a:rPr>
+              <a:t>nvidia</a:t>
+            </a:r>
+            <a:r>
+              <a:rPr lang="en-US" altLang="ko-KR" sz="1100" kern="0" dirty="0">
+                <a:cs typeface="Al Bayan Plain" pitchFamily="2" charset="-78"/>
+              </a:rPr>
+              <a:t>/lib:/</a:t>
+            </a:r>
+            <a:r>
+              <a:rPr lang="en-US" altLang="ko-KR" sz="1100" kern="0" dirty="0" err="1">
+                <a:cs typeface="Al Bayan Plain" pitchFamily="2" charset="-78"/>
+              </a:rPr>
+              <a:t>usr</a:t>
+            </a:r>
+            <a:r>
+              <a:rPr lang="en-US" altLang="ko-KR" sz="1100" kern="0" dirty="0">
+                <a:cs typeface="Al Bayan Plain" pitchFamily="2" charset="-78"/>
+              </a:rPr>
+              <a:t>/local/</a:t>
+            </a:r>
+            <a:r>
+              <a:rPr lang="en-US" altLang="ko-KR" sz="1100" kern="0" dirty="0" err="1">
+                <a:cs typeface="Al Bayan Plain" pitchFamily="2" charset="-78"/>
+              </a:rPr>
+              <a:t>nvidia</a:t>
+            </a:r>
+            <a:r>
+              <a:rPr lang="en-US" altLang="ko-KR" sz="1100" kern="0" dirty="0">
+                <a:cs typeface="Al Bayan Plain" pitchFamily="2" charset="-78"/>
+              </a:rPr>
+              <a:t>/lib64"</a:t>
+            </a:r>
+          </a:p>
+          <a:p>
+            <a:r>
+              <a:rPr lang="en-US" altLang="ko-KR" sz="1100" kern="0" dirty="0">
+                <a:cs typeface="Al Bayan Plain" pitchFamily="2" charset="-78"/>
+              </a:rPr>
+              <a:t>            ...</a:t>
+            </a:r>
+            <a:br>
+              <a:rPr lang="en-US" altLang="ko-KR" sz="1100" kern="0" dirty="0">
+                <a:cs typeface="Al Bayan Plain" pitchFamily="2" charset="-78"/>
+              </a:rPr>
+            </a:br>
+            <a:r>
+              <a:rPr lang="en-US" altLang="ko-KR" sz="1100" kern="0" dirty="0">
+                <a:cs typeface="Al Bayan Plain" pitchFamily="2" charset="-78"/>
+              </a:rPr>
+              <a:t>        ]</a:t>
+            </a:r>
+          </a:p>
+          <a:p>
+            <a:r>
+              <a:rPr lang="en-US" altLang="ko-KR" sz="1100" kern="0" dirty="0">
+                <a:cs typeface="Al Bayan Plain" pitchFamily="2" charset="-78"/>
+              </a:rPr>
+              <a:t>    }</a:t>
+            </a:r>
+          </a:p>
+          <a:p>
+            <a:r>
+              <a:rPr lang="en-US" altLang="ko-KR" sz="1100" kern="0" dirty="0">
+                <a:cs typeface="Al Bayan Plain" pitchFamily="2" charset="-78"/>
+              </a:rPr>
+              <a:t>...</a:t>
+            </a:r>
+            <a:endParaRPr lang="en-US" altLang="ko-KR" sz="1600" kern="0" dirty="0">
+              <a:cs typeface="Al Bayan Plain" pitchFamily="2" charset="-78"/>
+            </a:endParaRPr>
+          </a:p>
+        </p:txBody>
+      </p:sp>
+      <p:cxnSp>
+        <p:nvCxnSpPr>
+          <p:cNvPr id="9" name="직선 화살표 연결선 8">
+            <a:extLst>
+              <a:ext uri="{FF2B5EF4-FFF2-40B4-BE49-F238E27FC236}">
+                <a16:creationId xmlns:a16="http://schemas.microsoft.com/office/drawing/2014/main" id="{D3447036-464F-4C90-9B09-6E8806442451}"/>
+              </a:ext>
+            </a:extLst>
+          </p:cNvPr>
+          <p:cNvCxnSpPr>
+            <a:cxnSpLocks/>
+            <a:stCxn id="7" idx="2"/>
+            <a:endCxn id="11" idx="0"/>
+          </p:cNvCxnSpPr>
+          <p:nvPr/>
+        </p:nvCxnSpPr>
+        <p:spPr>
+          <a:xfrm>
+            <a:off x="4644008" y="692696"/>
+            <a:ext cx="0" cy="222870"/>
+          </a:xfrm>
+          <a:prstGeom prst="straightConnector1">
+            <a:avLst/>
+          </a:prstGeom>
+          <a:ln w="12700">
+            <a:solidFill>
+              <a:schemeClr val="tx1"/>
+            </a:solidFill>
+            <a:headEnd type="none" w="med" len="med"/>
+            <a:tailEnd type="triangle" w="med" len="med"/>
+          </a:ln>
+        </p:spPr>
+        <p:style>
+          <a:lnRef idx="1">
+            <a:schemeClr val="accent1"/>
+          </a:lnRef>
+          <a:fillRef idx="0">
+            <a:schemeClr val="accent1"/>
+          </a:fillRef>
+          <a:effectRef idx="0">
+            <a:schemeClr val="accent1"/>
+          </a:effectRef>
+          <a:fontRef idx="minor">
+            <a:schemeClr val="tx1"/>
+          </a:fontRef>
+        </p:style>
+      </p:cxnSp>
+      <p:sp>
+        <p:nvSpPr>
+          <p:cNvPr id="22" name="사각형: 둥근 모서리 114">
+            <a:extLst>
+              <a:ext uri="{FF2B5EF4-FFF2-40B4-BE49-F238E27FC236}">
+                <a16:creationId xmlns:a16="http://schemas.microsoft.com/office/drawing/2014/main" id="{0B79FB11-EB5E-48B2-9B7D-2CF7A5759856}"/>
+              </a:ext>
+            </a:extLst>
+          </p:cNvPr>
+          <p:cNvSpPr/>
+          <p:nvPr/>
+        </p:nvSpPr>
+        <p:spPr>
+          <a:xfrm>
+            <a:off x="3278436" y="4587974"/>
+            <a:ext cx="2731142" cy="433441"/>
+          </a:xfrm>
+          <a:prstGeom prst="roundRect">
+            <a:avLst>
+              <a:gd name="adj" fmla="val 10304"/>
+            </a:avLst>
+          </a:prstGeom>
+          <a:noFill/>
+          <a:ln>
+            <a:noFill/>
+          </a:ln>
+        </p:spPr>
+        <p:style>
+          <a:lnRef idx="2">
+            <a:schemeClr val="dk1"/>
+          </a:lnRef>
+          <a:fillRef idx="1">
+            <a:schemeClr val="lt1"/>
+          </a:fillRef>
+          <a:effectRef idx="0">
+            <a:schemeClr val="dk1"/>
+          </a:effectRef>
+          <a:fontRef idx="minor">
+            <a:schemeClr val="dk1"/>
+          </a:fontRef>
+        </p:style>
+        <p:txBody>
+          <a:bodyPr rtlCol="0" anchor="ctr"/>
+          <a:lstStyle/>
+          <a:p>
+            <a:pPr algn="ctr"/>
+            <a:r>
+              <a:rPr lang="en-US" altLang="ko-KR" sz="1200"/>
+              <a:t>OCI Runtime Spec</a:t>
+            </a:r>
+            <a:endParaRPr lang="en-US" altLang="ko-KR" sz="1200" dirty="0"/>
+          </a:p>
+        </p:txBody>
+      </p:sp>
+    </p:spTree>
+    <p:extLst>
+      <p:ext uri="{BB962C8B-B14F-4D97-AF65-F5344CB8AC3E}">
+        <p14:creationId xmlns:p14="http://schemas.microsoft.com/office/powerpoint/2010/main" val="3265569655"/>
+      </p:ext>
+    </p:extLst>
+  </p:cSld>
+  <p:clrMapOvr>
+    <a:masterClrMapping/>
+  </p:clrMapOvr>
+</p:sld>
+</file>
+
+<file path=ppt/slides/slide7.xml><?xml version="1.0" encoding="utf-8"?>
+<p:sld xmlns:a="http://schemas.openxmlformats.org/drawingml/2006/main" xmlns:r="http://schemas.openxmlformats.org/officeDocument/2006/relationships" xmlns:p="http://schemas.openxmlformats.org/presentationml/2006/main">
+  <p:cSld>
+    <p:spTree>
+      <p:nvGrpSpPr>
+        <p:cNvPr id="1" name=""/>
+        <p:cNvGrpSpPr/>
+        <p:nvPr/>
+      </p:nvGrpSpPr>
+      <p:grpSpPr>
+        <a:xfrm>
+          <a:off x="0" y="0"/>
+          <a:ext cx="0" cy="0"/>
+          <a:chOff x="0" y="0"/>
+          <a:chExt cx="0" cy="0"/>
+        </a:xfrm>
+      </p:grpSpPr>
+      <p:sp>
+        <p:nvSpPr>
+          <p:cNvPr id="2" name="제목 1">
+            <a:extLst>
+              <a:ext uri="{FF2B5EF4-FFF2-40B4-BE49-F238E27FC236}">
+                <a16:creationId xmlns:a16="http://schemas.microsoft.com/office/drawing/2014/main" id="{8738443D-5E72-49E2-86AC-581D61C41C39}"/>
+              </a:ext>
+            </a:extLst>
+          </p:cNvPr>
+          <p:cNvSpPr>
+            <a:spLocks noGrp="1"/>
+          </p:cNvSpPr>
+          <p:nvPr>
+            <p:ph type="title"/>
+          </p:nvPr>
+        </p:nvSpPr>
+        <p:spPr>
+          <a:xfrm>
             <a:off x="0" y="-92546"/>
             <a:ext cx="9144000" cy="857250"/>
           </a:xfrm>
@@ -14321,7 +18309,7 @@
 </p:sld>
 </file>
 
-<file path=ppt/slides/slide7.xml><?xml version="1.0" encoding="utf-8"?>
+<file path=ppt/slides/slide8.xml><?xml version="1.0" encoding="utf-8"?>
 <p:sld xmlns:a="http://schemas.openxmlformats.org/drawingml/2006/main" xmlns:r="http://schemas.openxmlformats.org/officeDocument/2006/relationships" xmlns:p="http://schemas.openxmlformats.org/presentationml/2006/main">
   <p:cSld>
     <p:spTree>
@@ -15693,7 +19681,7 @@
 </p:sld>
 </file>
 
-<file path=ppt/slides/slide8.xml><?xml version="1.0" encoding="utf-8"?>
+<file path=ppt/slides/slide9.xml><?xml version="1.0" encoding="utf-8"?>
 <p:sld xmlns:a="http://schemas.openxmlformats.org/drawingml/2006/main" xmlns:r="http://schemas.openxmlformats.org/officeDocument/2006/relationships" xmlns:p="http://schemas.openxmlformats.org/presentationml/2006/main">
   <p:cSld>
     <p:spTree>
@@ -16056,1318 +20044,6 @@
     <p:extLst>
       <p:ext uri="{BB962C8B-B14F-4D97-AF65-F5344CB8AC3E}">
         <p14:creationId xmlns:p14="http://schemas.microsoft.com/office/powerpoint/2010/main" val="3377665677"/>
-      </p:ext>
-    </p:extLst>
-  </p:cSld>
-  <p:clrMapOvr>
-    <a:masterClrMapping/>
-  </p:clrMapOvr>
-</p:sld>
-</file>
-
-<file path=ppt/slides/slide9.xml><?xml version="1.0" encoding="utf-8"?>
-<p:sld xmlns:a="http://schemas.openxmlformats.org/drawingml/2006/main" xmlns:r="http://schemas.openxmlformats.org/officeDocument/2006/relationships" xmlns:p="http://schemas.openxmlformats.org/presentationml/2006/main">
-  <p:cSld>
-    <p:spTree>
-      <p:nvGrpSpPr>
-        <p:cNvPr id="1" name="">
-          <a:extLst>
-            <a:ext uri="{FF2B5EF4-FFF2-40B4-BE49-F238E27FC236}">
-              <a16:creationId xmlns:a16="http://schemas.microsoft.com/office/drawing/2014/main" id="{BED122ED-3835-3DC0-4352-5EC9D3A5DBE0}"/>
-            </a:ext>
-          </a:extLst>
-        </p:cNvPr>
-        <p:cNvGrpSpPr/>
-        <p:nvPr/>
-      </p:nvGrpSpPr>
-      <p:grpSpPr>
-        <a:xfrm>
-          <a:off x="0" y="0"/>
-          <a:ext cx="0" cy="0"/>
-          <a:chOff x="0" y="0"/>
-          <a:chExt cx="0" cy="0"/>
-        </a:xfrm>
-      </p:grpSpPr>
-      <p:sp>
-        <p:nvSpPr>
-          <p:cNvPr id="2" name="제목 1">
-            <a:extLst>
-              <a:ext uri="{FF2B5EF4-FFF2-40B4-BE49-F238E27FC236}">
-                <a16:creationId xmlns:a16="http://schemas.microsoft.com/office/drawing/2014/main" id="{B9995984-7EC0-74A8-AF2B-5AF306DDEE7F}"/>
-              </a:ext>
-            </a:extLst>
-          </p:cNvPr>
-          <p:cNvSpPr>
-            <a:spLocks noGrp="1"/>
-          </p:cNvSpPr>
-          <p:nvPr>
-            <p:ph type="title"/>
-          </p:nvPr>
-        </p:nvSpPr>
-        <p:spPr>
-          <a:xfrm>
-            <a:off x="0" y="-92546"/>
-            <a:ext cx="9144000" cy="857250"/>
-          </a:xfrm>
-        </p:spPr>
-        <p:txBody>
-          <a:bodyPr>
-            <a:normAutofit/>
-          </a:bodyPr>
-          <a:lstStyle/>
-          <a:p>
-            <a:r>
-              <a:rPr lang="en-US" altLang="ko-KR"/>
-              <a:t>CUDA Container Init</a:t>
-            </a:r>
-            <a:endParaRPr lang="ko-KR" altLang="en-US" dirty="0"/>
-          </a:p>
-        </p:txBody>
-      </p:sp>
-      <p:sp>
-        <p:nvSpPr>
-          <p:cNvPr id="42" name="사각형: 둥근 모서리 114">
-            <a:extLst>
-              <a:ext uri="{FF2B5EF4-FFF2-40B4-BE49-F238E27FC236}">
-                <a16:creationId xmlns:a16="http://schemas.microsoft.com/office/drawing/2014/main" id="{AECCCC64-0828-F134-05A2-0B439489904B}"/>
-              </a:ext>
-            </a:extLst>
-          </p:cNvPr>
-          <p:cNvSpPr/>
-          <p:nvPr/>
-        </p:nvSpPr>
-        <p:spPr>
-          <a:xfrm>
-            <a:off x="3841306" y="3760564"/>
-            <a:ext cx="2731142" cy="827410"/>
-          </a:xfrm>
-          <a:prstGeom prst="roundRect">
-            <a:avLst>
-              <a:gd name="adj" fmla="val 6397"/>
-            </a:avLst>
-          </a:prstGeom>
-        </p:spPr>
-        <p:style>
-          <a:lnRef idx="2">
-            <a:schemeClr val="dk1"/>
-          </a:lnRef>
-          <a:fillRef idx="1">
-            <a:schemeClr val="lt1"/>
-          </a:fillRef>
-          <a:effectRef idx="0">
-            <a:schemeClr val="dk1"/>
-          </a:effectRef>
-          <a:fontRef idx="minor">
-            <a:schemeClr val="dk1"/>
-          </a:fontRef>
-        </p:style>
-        <p:txBody>
-          <a:bodyPr rtlCol="0" anchor="t"/>
-          <a:lstStyle/>
-          <a:p>
-            <a:pPr algn="ctr"/>
-            <a:r>
-              <a:rPr lang="en-US" altLang="ko-KR" sz="1400"/>
-              <a:t>nvidia-container-cli CLI</a:t>
-            </a:r>
-            <a:endParaRPr lang="en-US" altLang="ko-KR" sz="1400" dirty="0"/>
-          </a:p>
-        </p:txBody>
-      </p:sp>
-      <p:sp>
-        <p:nvSpPr>
-          <p:cNvPr id="43" name="사각형: 둥근 모서리 114">
-            <a:extLst>
-              <a:ext uri="{FF2B5EF4-FFF2-40B4-BE49-F238E27FC236}">
-                <a16:creationId xmlns:a16="http://schemas.microsoft.com/office/drawing/2014/main" id="{392D0A0A-B53F-4A90-B311-F8FAD571A8A5}"/>
-              </a:ext>
-            </a:extLst>
-          </p:cNvPr>
-          <p:cNvSpPr/>
-          <p:nvPr/>
-        </p:nvSpPr>
-        <p:spPr>
-          <a:xfrm>
-            <a:off x="4237350" y="4108151"/>
-            <a:ext cx="1939054" cy="372492"/>
-          </a:xfrm>
-          <a:prstGeom prst="roundRect">
-            <a:avLst>
-              <a:gd name="adj" fmla="val 6397"/>
-            </a:avLst>
-          </a:prstGeom>
-        </p:spPr>
-        <p:style>
-          <a:lnRef idx="2">
-            <a:schemeClr val="dk1"/>
-          </a:lnRef>
-          <a:fillRef idx="1">
-            <a:schemeClr val="lt1"/>
-          </a:fillRef>
-          <a:effectRef idx="0">
-            <a:schemeClr val="dk1"/>
-          </a:effectRef>
-          <a:fontRef idx="minor">
-            <a:schemeClr val="dk1"/>
-          </a:fontRef>
-        </p:style>
-        <p:txBody>
-          <a:bodyPr rtlCol="0" anchor="ctr"/>
-          <a:lstStyle/>
-          <a:p>
-            <a:pPr algn="ctr"/>
-            <a:r>
-              <a:rPr lang="en-US" altLang="ko-KR" sz="1400"/>
-              <a:t>libnvidia-container</a:t>
-            </a:r>
-            <a:endParaRPr lang="en-US" altLang="ko-KR" sz="1400" dirty="0"/>
-          </a:p>
-        </p:txBody>
-      </p:sp>
-      <p:sp>
-        <p:nvSpPr>
-          <p:cNvPr id="44" name="사각형: 둥근 모서리 114">
-            <a:extLst>
-              <a:ext uri="{FF2B5EF4-FFF2-40B4-BE49-F238E27FC236}">
-                <a16:creationId xmlns:a16="http://schemas.microsoft.com/office/drawing/2014/main" id="{4B2C7BE7-2F5A-24AE-CDFD-798E4A9F25CF}"/>
-              </a:ext>
-            </a:extLst>
-          </p:cNvPr>
-          <p:cNvSpPr/>
-          <p:nvPr/>
-        </p:nvSpPr>
-        <p:spPr>
-          <a:xfrm>
-            <a:off x="3673694" y="2571751"/>
-            <a:ext cx="3066366" cy="433441"/>
-          </a:xfrm>
-          <a:prstGeom prst="roundRect">
-            <a:avLst>
-              <a:gd name="adj" fmla="val 10304"/>
-            </a:avLst>
-          </a:prstGeom>
-        </p:spPr>
-        <p:style>
-          <a:lnRef idx="2">
-            <a:schemeClr val="dk1"/>
-          </a:lnRef>
-          <a:fillRef idx="1">
-            <a:schemeClr val="lt1"/>
-          </a:fillRef>
-          <a:effectRef idx="0">
-            <a:schemeClr val="dk1"/>
-          </a:effectRef>
-          <a:fontRef idx="minor">
-            <a:schemeClr val="dk1"/>
-          </a:fontRef>
-        </p:style>
-        <p:txBody>
-          <a:bodyPr rtlCol="0" anchor="ctr"/>
-          <a:lstStyle/>
-          <a:p>
-            <a:pPr algn="ctr"/>
-            <a:r>
-              <a:rPr lang="en-US" altLang="ko-KR" sz="1400"/>
-              <a:t>nvidia-container-runtime-hook CLI</a:t>
-            </a:r>
-            <a:endParaRPr lang="en-US" altLang="ko-KR" sz="1400" dirty="0"/>
-          </a:p>
-        </p:txBody>
-      </p:sp>
-      <p:sp>
-        <p:nvSpPr>
-          <p:cNvPr id="45" name="사각형: 둥근 모서리 114">
-            <a:extLst>
-              <a:ext uri="{FF2B5EF4-FFF2-40B4-BE49-F238E27FC236}">
-                <a16:creationId xmlns:a16="http://schemas.microsoft.com/office/drawing/2014/main" id="{6CB43451-663D-44ED-F26F-A184162A2227}"/>
-              </a:ext>
-            </a:extLst>
-          </p:cNvPr>
-          <p:cNvSpPr/>
-          <p:nvPr/>
-        </p:nvSpPr>
-        <p:spPr>
-          <a:xfrm>
-            <a:off x="7153673" y="2571750"/>
-            <a:ext cx="1717863" cy="433441"/>
-          </a:xfrm>
-          <a:prstGeom prst="roundRect">
-            <a:avLst>
-              <a:gd name="adj" fmla="val 10304"/>
-            </a:avLst>
-          </a:prstGeom>
-        </p:spPr>
-        <p:style>
-          <a:lnRef idx="2">
-            <a:schemeClr val="dk1"/>
-          </a:lnRef>
-          <a:fillRef idx="1">
-            <a:schemeClr val="lt1"/>
-          </a:fillRef>
-          <a:effectRef idx="0">
-            <a:schemeClr val="dk1"/>
-          </a:effectRef>
-          <a:fontRef idx="minor">
-            <a:schemeClr val="dk1"/>
-          </a:fontRef>
-        </p:style>
-        <p:txBody>
-          <a:bodyPr rtlCol="0" anchor="ctr"/>
-          <a:lstStyle/>
-          <a:p>
-            <a:pPr algn="ctr"/>
-            <a:r>
-              <a:rPr lang="en-US" altLang="ko-KR" sz="1400"/>
-              <a:t>Hook Config File</a:t>
-            </a:r>
-            <a:endParaRPr lang="en-US" altLang="ko-KR" sz="1400" dirty="0"/>
-          </a:p>
-        </p:txBody>
-      </p:sp>
-      <p:cxnSp>
-        <p:nvCxnSpPr>
-          <p:cNvPr id="18" name="직선 화살표 연결선 17">
-            <a:extLst>
-              <a:ext uri="{FF2B5EF4-FFF2-40B4-BE49-F238E27FC236}">
-                <a16:creationId xmlns:a16="http://schemas.microsoft.com/office/drawing/2014/main" id="{CEC02631-0696-740D-BC41-FDE19399C85F}"/>
-              </a:ext>
-            </a:extLst>
-          </p:cNvPr>
-          <p:cNvCxnSpPr>
-            <a:cxnSpLocks/>
-            <a:stCxn id="45" idx="1"/>
-            <a:endCxn id="44" idx="3"/>
-          </p:cNvCxnSpPr>
-          <p:nvPr/>
-        </p:nvCxnSpPr>
-        <p:spPr>
-          <a:xfrm flipH="1">
-            <a:off x="6740060" y="2788471"/>
-            <a:ext cx="413613" cy="1"/>
-          </a:xfrm>
-          <a:prstGeom prst="straightConnector1">
-            <a:avLst/>
-          </a:prstGeom>
-          <a:ln w="19050">
-            <a:solidFill>
-              <a:schemeClr val="tx1"/>
-            </a:solidFill>
-            <a:headEnd type="none" w="med" len="med"/>
-            <a:tailEnd type="arrow" w="med" len="med"/>
-          </a:ln>
-        </p:spPr>
-        <p:style>
-          <a:lnRef idx="1">
-            <a:schemeClr val="accent1"/>
-          </a:lnRef>
-          <a:fillRef idx="0">
-            <a:schemeClr val="accent1"/>
-          </a:fillRef>
-          <a:effectRef idx="0">
-            <a:schemeClr val="accent1"/>
-          </a:effectRef>
-          <a:fontRef idx="minor">
-            <a:schemeClr val="tx1"/>
-          </a:fontRef>
-        </p:style>
-      </p:cxnSp>
-      <p:cxnSp>
-        <p:nvCxnSpPr>
-          <p:cNvPr id="21" name="직선 화살표 연결선 20">
-            <a:extLst>
-              <a:ext uri="{FF2B5EF4-FFF2-40B4-BE49-F238E27FC236}">
-                <a16:creationId xmlns:a16="http://schemas.microsoft.com/office/drawing/2014/main" id="{DC38CB59-20C9-6733-FA0E-412AE49E45FB}"/>
-              </a:ext>
-            </a:extLst>
-          </p:cNvPr>
-          <p:cNvCxnSpPr>
-            <a:cxnSpLocks/>
-            <a:stCxn id="42" idx="1"/>
-            <a:endCxn id="48" idx="2"/>
-          </p:cNvCxnSpPr>
-          <p:nvPr/>
-        </p:nvCxnSpPr>
-        <p:spPr>
-          <a:xfrm flipH="1" flipV="1">
-            <a:off x="1955254" y="3343764"/>
-            <a:ext cx="1886052" cy="830505"/>
-          </a:xfrm>
-          <a:prstGeom prst="straightConnector1">
-            <a:avLst/>
-          </a:prstGeom>
-          <a:ln w="19050">
-            <a:solidFill>
-              <a:schemeClr val="tx1"/>
-            </a:solidFill>
-            <a:headEnd type="none" w="med" len="med"/>
-            <a:tailEnd type="arrow" w="med" len="med"/>
-          </a:ln>
-        </p:spPr>
-        <p:style>
-          <a:lnRef idx="1">
-            <a:schemeClr val="accent1"/>
-          </a:lnRef>
-          <a:fillRef idx="0">
-            <a:schemeClr val="accent1"/>
-          </a:fillRef>
-          <a:effectRef idx="0">
-            <a:schemeClr val="accent1"/>
-          </a:effectRef>
-          <a:fontRef idx="minor">
-            <a:schemeClr val="tx1"/>
-          </a:fontRef>
-        </p:style>
-      </p:cxnSp>
-      <p:cxnSp>
-        <p:nvCxnSpPr>
-          <p:cNvPr id="22" name="직선 화살표 연결선 21">
-            <a:extLst>
-              <a:ext uri="{FF2B5EF4-FFF2-40B4-BE49-F238E27FC236}">
-                <a16:creationId xmlns:a16="http://schemas.microsoft.com/office/drawing/2014/main" id="{B3533A58-75CD-7D94-2995-7961486E80BA}"/>
-              </a:ext>
-            </a:extLst>
-          </p:cNvPr>
-          <p:cNvCxnSpPr>
-            <a:cxnSpLocks/>
-            <a:stCxn id="44" idx="2"/>
-            <a:endCxn id="42" idx="0"/>
-          </p:cNvCxnSpPr>
-          <p:nvPr/>
-        </p:nvCxnSpPr>
-        <p:spPr>
-          <a:xfrm>
-            <a:off x="5206877" y="3005192"/>
-            <a:ext cx="0" cy="755372"/>
-          </a:xfrm>
-          <a:prstGeom prst="straightConnector1">
-            <a:avLst/>
-          </a:prstGeom>
-          <a:ln w="19050">
-            <a:solidFill>
-              <a:schemeClr val="tx1"/>
-            </a:solidFill>
-            <a:headEnd type="none" w="med" len="med"/>
-            <a:tailEnd type="arrow" w="med" len="med"/>
-          </a:ln>
-        </p:spPr>
-        <p:style>
-          <a:lnRef idx="1">
-            <a:schemeClr val="accent1"/>
-          </a:lnRef>
-          <a:fillRef idx="0">
-            <a:schemeClr val="accent1"/>
-          </a:fillRef>
-          <a:effectRef idx="0">
-            <a:schemeClr val="accent1"/>
-          </a:effectRef>
-          <a:fontRef idx="minor">
-            <a:schemeClr val="tx1"/>
-          </a:fontRef>
-        </p:style>
-      </p:cxnSp>
-      <p:cxnSp>
-        <p:nvCxnSpPr>
-          <p:cNvPr id="30" name="직선 화살표 연결선 29">
-            <a:extLst>
-              <a:ext uri="{FF2B5EF4-FFF2-40B4-BE49-F238E27FC236}">
-                <a16:creationId xmlns:a16="http://schemas.microsoft.com/office/drawing/2014/main" id="{2674C97E-6670-D3AD-8F74-BA2D89D7A7FD}"/>
-              </a:ext>
-            </a:extLst>
-          </p:cNvPr>
-          <p:cNvCxnSpPr>
-            <a:cxnSpLocks/>
-            <a:stCxn id="35" idx="2"/>
-            <a:endCxn id="44" idx="0"/>
-          </p:cNvCxnSpPr>
-          <p:nvPr/>
-        </p:nvCxnSpPr>
-        <p:spPr>
-          <a:xfrm>
-            <a:off x="5206872" y="1811551"/>
-            <a:ext cx="5" cy="760200"/>
-          </a:xfrm>
-          <a:prstGeom prst="straightConnector1">
-            <a:avLst/>
-          </a:prstGeom>
-          <a:ln w="19050">
-            <a:solidFill>
-              <a:schemeClr val="tx1"/>
-            </a:solidFill>
-            <a:headEnd type="none" w="med" len="med"/>
-            <a:tailEnd type="arrow" w="med" len="med"/>
-          </a:ln>
-        </p:spPr>
-        <p:style>
-          <a:lnRef idx="1">
-            <a:schemeClr val="accent1"/>
-          </a:lnRef>
-          <a:fillRef idx="0">
-            <a:schemeClr val="accent1"/>
-          </a:fillRef>
-          <a:effectRef idx="0">
-            <a:schemeClr val="accent1"/>
-          </a:effectRef>
-          <a:fontRef idx="minor">
-            <a:schemeClr val="tx1"/>
-          </a:fontRef>
-        </p:style>
-      </p:cxnSp>
-      <p:sp>
-        <p:nvSpPr>
-          <p:cNvPr id="35" name="사각형: 둥근 모서리 114">
-            <a:extLst>
-              <a:ext uri="{FF2B5EF4-FFF2-40B4-BE49-F238E27FC236}">
-                <a16:creationId xmlns:a16="http://schemas.microsoft.com/office/drawing/2014/main" id="{B08B49E6-412F-DDF1-A72D-9194FA92404B}"/>
-              </a:ext>
-            </a:extLst>
-          </p:cNvPr>
-          <p:cNvSpPr/>
-          <p:nvPr/>
-        </p:nvSpPr>
-        <p:spPr>
-          <a:xfrm>
-            <a:off x="3841301" y="1378110"/>
-            <a:ext cx="2731142" cy="433441"/>
-          </a:xfrm>
-          <a:prstGeom prst="roundRect">
-            <a:avLst>
-              <a:gd name="adj" fmla="val 10304"/>
-            </a:avLst>
-          </a:prstGeom>
-        </p:spPr>
-        <p:style>
-          <a:lnRef idx="2">
-            <a:schemeClr val="dk1"/>
-          </a:lnRef>
-          <a:fillRef idx="1">
-            <a:schemeClr val="lt1"/>
-          </a:fillRef>
-          <a:effectRef idx="0">
-            <a:schemeClr val="dk1"/>
-          </a:effectRef>
-          <a:fontRef idx="minor">
-            <a:schemeClr val="dk1"/>
-          </a:fontRef>
-        </p:style>
-        <p:txBody>
-          <a:bodyPr rtlCol="0" anchor="ctr"/>
-          <a:lstStyle/>
-          <a:p>
-            <a:pPr algn="ctr"/>
-            <a:r>
-              <a:rPr lang="en-US" altLang="ko-KR" sz="1400"/>
-              <a:t>runc CLI</a:t>
-            </a:r>
-            <a:endParaRPr lang="en-US" altLang="ko-KR" sz="1400" dirty="0"/>
-          </a:p>
-        </p:txBody>
-      </p:sp>
-      <p:sp>
-        <p:nvSpPr>
-          <p:cNvPr id="39" name="사각형: 둥근 모서리 114">
-            <a:extLst>
-              <a:ext uri="{FF2B5EF4-FFF2-40B4-BE49-F238E27FC236}">
-                <a16:creationId xmlns:a16="http://schemas.microsoft.com/office/drawing/2014/main" id="{3BCEDCC4-7A90-07A4-91E3-FEF13C5D6553}"/>
-              </a:ext>
-            </a:extLst>
-          </p:cNvPr>
-          <p:cNvSpPr/>
-          <p:nvPr/>
-        </p:nvSpPr>
-        <p:spPr>
-          <a:xfrm>
-            <a:off x="4978365" y="1942417"/>
-            <a:ext cx="2731142" cy="433442"/>
-          </a:xfrm>
-          <a:prstGeom prst="roundRect">
-            <a:avLst>
-              <a:gd name="adj" fmla="val 10304"/>
-            </a:avLst>
-          </a:prstGeom>
-          <a:noFill/>
-          <a:ln>
-            <a:noFill/>
-          </a:ln>
-        </p:spPr>
-        <p:style>
-          <a:lnRef idx="2">
-            <a:schemeClr val="dk1"/>
-          </a:lnRef>
-          <a:fillRef idx="1">
-            <a:schemeClr val="lt1"/>
-          </a:fillRef>
-          <a:effectRef idx="0">
-            <a:schemeClr val="dk1"/>
-          </a:effectRef>
-          <a:fontRef idx="minor">
-            <a:schemeClr val="dk1"/>
-          </a:fontRef>
-        </p:style>
-        <p:txBody>
-          <a:bodyPr rtlCol="0" anchor="ctr"/>
-          <a:lstStyle/>
-          <a:p>
-            <a:pPr algn="ctr"/>
-            <a:r>
-              <a:rPr lang="en-US" altLang="ko-KR" sz="1400" b="1"/>
-              <a:t>Exec via OCI runtime’s prestart hook</a:t>
-            </a:r>
-          </a:p>
-        </p:txBody>
-      </p:sp>
-      <p:sp>
-        <p:nvSpPr>
-          <p:cNvPr id="46" name="사각형: 둥근 모서리 114">
-            <a:extLst>
-              <a:ext uri="{FF2B5EF4-FFF2-40B4-BE49-F238E27FC236}">
-                <a16:creationId xmlns:a16="http://schemas.microsoft.com/office/drawing/2014/main" id="{C082F7EE-2B3E-ED69-1005-9B90468E3EDB}"/>
-              </a:ext>
-            </a:extLst>
-          </p:cNvPr>
-          <p:cNvSpPr/>
-          <p:nvPr/>
-        </p:nvSpPr>
-        <p:spPr>
-          <a:xfrm>
-            <a:off x="5153226" y="3080244"/>
-            <a:ext cx="2381421" cy="537288"/>
-          </a:xfrm>
-          <a:prstGeom prst="roundRect">
-            <a:avLst>
-              <a:gd name="adj" fmla="val 10304"/>
-            </a:avLst>
-          </a:prstGeom>
-          <a:noFill/>
-          <a:ln>
-            <a:noFill/>
-          </a:ln>
-        </p:spPr>
-        <p:style>
-          <a:lnRef idx="2">
-            <a:schemeClr val="dk1"/>
-          </a:lnRef>
-          <a:fillRef idx="1">
-            <a:schemeClr val="lt1"/>
-          </a:fillRef>
-          <a:effectRef idx="0">
-            <a:schemeClr val="dk1"/>
-          </a:effectRef>
-          <a:fontRef idx="minor">
-            <a:schemeClr val="dk1"/>
-          </a:fontRef>
-        </p:style>
-        <p:txBody>
-          <a:bodyPr rtlCol="0" anchor="ctr"/>
-          <a:lstStyle/>
-          <a:p>
-            <a:pPr algn="ctr"/>
-            <a:r>
-              <a:rPr lang="en-US" altLang="ko-KR" sz="1400" b="1"/>
-              <a:t>Exec with container, </a:t>
-            </a:r>
-          </a:p>
-          <a:p>
-            <a:pPr algn="ctr"/>
-            <a:r>
-              <a:rPr lang="en-US" altLang="ko-KR" sz="1400" b="1"/>
-              <a:t>GPU, CUDA arguments</a:t>
-            </a:r>
-          </a:p>
-        </p:txBody>
-      </p:sp>
-      <p:sp>
-        <p:nvSpPr>
-          <p:cNvPr id="48" name="사각형: 둥근 모서리 114">
-            <a:extLst>
-              <a:ext uri="{FF2B5EF4-FFF2-40B4-BE49-F238E27FC236}">
-                <a16:creationId xmlns:a16="http://schemas.microsoft.com/office/drawing/2014/main" id="{8F2DFD78-2A43-A301-E75E-696F7A31EDDF}"/>
-              </a:ext>
-            </a:extLst>
-          </p:cNvPr>
-          <p:cNvSpPr/>
-          <p:nvPr/>
-        </p:nvSpPr>
-        <p:spPr>
-          <a:xfrm>
-            <a:off x="994692" y="2231784"/>
-            <a:ext cx="1921124" cy="1111980"/>
-          </a:xfrm>
-          <a:prstGeom prst="roundRect">
-            <a:avLst>
-              <a:gd name="adj" fmla="val 6774"/>
-            </a:avLst>
-          </a:prstGeom>
-        </p:spPr>
-        <p:style>
-          <a:lnRef idx="2">
-            <a:schemeClr val="dk1"/>
-          </a:lnRef>
-          <a:fillRef idx="1">
-            <a:schemeClr val="lt1"/>
-          </a:fillRef>
-          <a:effectRef idx="0">
-            <a:schemeClr val="dk1"/>
-          </a:effectRef>
-          <a:fontRef idx="minor">
-            <a:schemeClr val="dk1"/>
-          </a:fontRef>
-        </p:style>
-        <p:txBody>
-          <a:bodyPr rtlCol="0" anchor="ctr"/>
-          <a:lstStyle/>
-          <a:p>
-            <a:pPr algn="ctr"/>
-            <a:r>
-              <a:rPr lang="en-US" altLang="ko-KR" sz="1400">
-                <a:solidFill>
-                  <a:schemeClr val="tx1"/>
-                </a:solidFill>
-              </a:rPr>
-              <a:t>Container</a:t>
-            </a:r>
-            <a:endParaRPr lang="en-US" altLang="ko-KR" sz="1400" dirty="0">
-              <a:solidFill>
-                <a:schemeClr val="tx1"/>
-              </a:solidFill>
-            </a:endParaRPr>
-          </a:p>
-          <a:p>
-            <a:pPr algn="ctr"/>
-            <a:r>
-              <a:rPr lang="en-US" altLang="ko-KR" sz="1400">
-                <a:solidFill>
-                  <a:schemeClr val="tx1"/>
-                </a:solidFill>
-              </a:rPr>
-              <a:t>(Namespace, Rootfs)</a:t>
-            </a:r>
-          </a:p>
-        </p:txBody>
-      </p:sp>
-      <p:sp>
-        <p:nvSpPr>
-          <p:cNvPr id="59" name="사각형: 둥근 모서리 114">
-            <a:extLst>
-              <a:ext uri="{FF2B5EF4-FFF2-40B4-BE49-F238E27FC236}">
-                <a16:creationId xmlns:a16="http://schemas.microsoft.com/office/drawing/2014/main" id="{E7104B79-1752-9403-35AA-4C63AF9C7839}"/>
-              </a:ext>
-            </a:extLst>
-          </p:cNvPr>
-          <p:cNvSpPr/>
-          <p:nvPr/>
-        </p:nvSpPr>
-        <p:spPr>
-          <a:xfrm>
-            <a:off x="1125242" y="1046349"/>
-            <a:ext cx="2731142" cy="619914"/>
-          </a:xfrm>
-          <a:prstGeom prst="roundRect">
-            <a:avLst>
-              <a:gd name="adj" fmla="val 10304"/>
-            </a:avLst>
-          </a:prstGeom>
-          <a:noFill/>
-          <a:ln>
-            <a:noFill/>
-          </a:ln>
-        </p:spPr>
-        <p:style>
-          <a:lnRef idx="2">
-            <a:schemeClr val="dk1"/>
-          </a:lnRef>
-          <a:fillRef idx="1">
-            <a:schemeClr val="lt1"/>
-          </a:fillRef>
-          <a:effectRef idx="0">
-            <a:schemeClr val="dk1"/>
-          </a:effectRef>
-          <a:fontRef idx="minor">
-            <a:schemeClr val="dk1"/>
-          </a:fontRef>
-        </p:style>
-        <p:txBody>
-          <a:bodyPr rtlCol="0" anchor="ctr"/>
-          <a:lstStyle/>
-          <a:p>
-            <a:pPr algn="ctr"/>
-            <a:r>
-              <a:rPr lang="en-US" altLang="ko-KR" sz="1400"/>
-              <a:t>Create namespace (clone()),</a:t>
-            </a:r>
-          </a:p>
-          <a:p>
-            <a:pPr algn="ctr"/>
-            <a:r>
-              <a:rPr lang="en-US" altLang="ko-KR" sz="1400"/>
-              <a:t>Set rootfs (overlay FS)</a:t>
-            </a:r>
-          </a:p>
-        </p:txBody>
-      </p:sp>
-      <p:sp>
-        <p:nvSpPr>
-          <p:cNvPr id="73" name="타원 72">
-            <a:extLst>
-              <a:ext uri="{FF2B5EF4-FFF2-40B4-BE49-F238E27FC236}">
-                <a16:creationId xmlns:a16="http://schemas.microsoft.com/office/drawing/2014/main" id="{3D06B21E-B4C8-C97E-A8A8-41A024A3AAAD}"/>
-              </a:ext>
-            </a:extLst>
-          </p:cNvPr>
-          <p:cNvSpPr/>
-          <p:nvPr/>
-        </p:nvSpPr>
-        <p:spPr>
-          <a:xfrm>
-            <a:off x="5054539" y="1708096"/>
-            <a:ext cx="288032" cy="288032"/>
-          </a:xfrm>
-          <a:prstGeom prst="ellipse">
-            <a:avLst/>
-          </a:prstGeom>
-        </p:spPr>
-        <p:style>
-          <a:lnRef idx="2">
-            <a:schemeClr val="dk1"/>
-          </a:lnRef>
-          <a:fillRef idx="1">
-            <a:schemeClr val="lt1"/>
-          </a:fillRef>
-          <a:effectRef idx="0">
-            <a:schemeClr val="dk1"/>
-          </a:effectRef>
-          <a:fontRef idx="minor">
-            <a:schemeClr val="dk1"/>
-          </a:fontRef>
-        </p:style>
-        <p:txBody>
-          <a:bodyPr rtlCol="0" anchor="ctr"/>
-          <a:lstStyle/>
-          <a:p>
-            <a:pPr algn="ctr"/>
-            <a:r>
-              <a:rPr lang="en-US" altLang="ko-KR" sz="1600"/>
-              <a:t>2</a:t>
-            </a:r>
-            <a:endParaRPr lang="ko-KR" altLang="en-US" sz="1600"/>
-          </a:p>
-        </p:txBody>
-      </p:sp>
-      <p:sp>
-        <p:nvSpPr>
-          <p:cNvPr id="74" name="타원 73">
-            <a:extLst>
-              <a:ext uri="{FF2B5EF4-FFF2-40B4-BE49-F238E27FC236}">
-                <a16:creationId xmlns:a16="http://schemas.microsoft.com/office/drawing/2014/main" id="{12E84C7F-602E-1394-C058-B812ABB2093C}"/>
-              </a:ext>
-            </a:extLst>
-          </p:cNvPr>
-          <p:cNvSpPr/>
-          <p:nvPr/>
-        </p:nvSpPr>
-        <p:spPr>
-          <a:xfrm>
-            <a:off x="5054539" y="2886446"/>
-            <a:ext cx="288032" cy="288032"/>
-          </a:xfrm>
-          <a:prstGeom prst="ellipse">
-            <a:avLst/>
-          </a:prstGeom>
-        </p:spPr>
-        <p:style>
-          <a:lnRef idx="2">
-            <a:schemeClr val="dk1"/>
-          </a:lnRef>
-          <a:fillRef idx="1">
-            <a:schemeClr val="lt1"/>
-          </a:fillRef>
-          <a:effectRef idx="0">
-            <a:schemeClr val="dk1"/>
-          </a:effectRef>
-          <a:fontRef idx="minor">
-            <a:schemeClr val="dk1"/>
-          </a:fontRef>
-        </p:style>
-        <p:txBody>
-          <a:bodyPr rtlCol="0" anchor="ctr"/>
-          <a:lstStyle/>
-          <a:p>
-            <a:pPr algn="ctr"/>
-            <a:r>
-              <a:rPr lang="en-US" altLang="ko-KR" sz="1600"/>
-              <a:t>3</a:t>
-            </a:r>
-            <a:endParaRPr lang="ko-KR" altLang="en-US" sz="1600"/>
-          </a:p>
-        </p:txBody>
-      </p:sp>
-      <p:sp>
-        <p:nvSpPr>
-          <p:cNvPr id="75" name="타원 74">
-            <a:extLst>
-              <a:ext uri="{FF2B5EF4-FFF2-40B4-BE49-F238E27FC236}">
-                <a16:creationId xmlns:a16="http://schemas.microsoft.com/office/drawing/2014/main" id="{03712F6E-D101-AE14-5440-4FAFDBCBA76B}"/>
-              </a:ext>
-            </a:extLst>
-          </p:cNvPr>
-          <p:cNvSpPr/>
-          <p:nvPr/>
-        </p:nvSpPr>
-        <p:spPr>
-          <a:xfrm>
-            <a:off x="3693972" y="4030253"/>
-            <a:ext cx="288032" cy="288032"/>
-          </a:xfrm>
-          <a:prstGeom prst="ellipse">
-            <a:avLst/>
-          </a:prstGeom>
-        </p:spPr>
-        <p:style>
-          <a:lnRef idx="2">
-            <a:schemeClr val="dk1"/>
-          </a:lnRef>
-          <a:fillRef idx="1">
-            <a:schemeClr val="lt1"/>
-          </a:fillRef>
-          <a:effectRef idx="0">
-            <a:schemeClr val="dk1"/>
-          </a:effectRef>
-          <a:fontRef idx="minor">
-            <a:schemeClr val="dk1"/>
-          </a:fontRef>
-        </p:style>
-        <p:txBody>
-          <a:bodyPr rtlCol="0" anchor="ctr"/>
-          <a:lstStyle/>
-          <a:p>
-            <a:pPr algn="ctr"/>
-            <a:r>
-              <a:rPr lang="en-US" altLang="ko-KR" sz="1600"/>
-              <a:t>4</a:t>
-            </a:r>
-            <a:endParaRPr lang="ko-KR" altLang="en-US" sz="1600"/>
-          </a:p>
-        </p:txBody>
-      </p:sp>
-      <p:sp>
-        <p:nvSpPr>
-          <p:cNvPr id="80" name="사각형: 둥근 모서리 114">
-            <a:extLst>
-              <a:ext uri="{FF2B5EF4-FFF2-40B4-BE49-F238E27FC236}">
-                <a16:creationId xmlns:a16="http://schemas.microsoft.com/office/drawing/2014/main" id="{81580CDA-A4DC-926E-BF06-49B86D6E308F}"/>
-              </a:ext>
-            </a:extLst>
-          </p:cNvPr>
-          <p:cNvSpPr/>
-          <p:nvPr/>
-        </p:nvSpPr>
-        <p:spPr>
-          <a:xfrm>
-            <a:off x="2548806" y="1902976"/>
-            <a:ext cx="2604420" cy="619914"/>
-          </a:xfrm>
-          <a:prstGeom prst="roundRect">
-            <a:avLst>
-              <a:gd name="adj" fmla="val 10304"/>
-            </a:avLst>
-          </a:prstGeom>
-          <a:noFill/>
-          <a:ln>
-            <a:noFill/>
-          </a:ln>
-        </p:spPr>
-        <p:style>
-          <a:lnRef idx="2">
-            <a:schemeClr val="dk1"/>
-          </a:lnRef>
-          <a:fillRef idx="1">
-            <a:schemeClr val="lt1"/>
-          </a:fillRef>
-          <a:effectRef idx="0">
-            <a:schemeClr val="dk1"/>
-          </a:effectRef>
-          <a:fontRef idx="minor">
-            <a:schemeClr val="dk1"/>
-          </a:fontRef>
-        </p:style>
-        <p:txBody>
-          <a:bodyPr rtlCol="0" anchor="ctr"/>
-          <a:lstStyle/>
-          <a:p>
-            <a:pPr algn="ctr"/>
-            <a:r>
-              <a:rPr lang="en-US" altLang="ko-KR" sz="1400"/>
-              <a:t>Change root (pivot_root()),</a:t>
-            </a:r>
-            <a:br>
-              <a:rPr lang="en-US" altLang="ko-KR" sz="1400"/>
-            </a:br>
-            <a:r>
-              <a:rPr lang="en-US" altLang="ko-KR" sz="1400"/>
-              <a:t>Exec app (exec())</a:t>
-            </a:r>
-          </a:p>
-        </p:txBody>
-      </p:sp>
-      <p:sp>
-        <p:nvSpPr>
-          <p:cNvPr id="76" name="타원 75">
-            <a:extLst>
-              <a:ext uri="{FF2B5EF4-FFF2-40B4-BE49-F238E27FC236}">
-                <a16:creationId xmlns:a16="http://schemas.microsoft.com/office/drawing/2014/main" id="{6ED8FE13-254F-4094-BE66-85495E6FE887}"/>
-              </a:ext>
-            </a:extLst>
-          </p:cNvPr>
-          <p:cNvSpPr/>
-          <p:nvPr/>
-        </p:nvSpPr>
-        <p:spPr>
-          <a:xfrm>
-            <a:off x="3690518" y="1705061"/>
-            <a:ext cx="288032" cy="288032"/>
-          </a:xfrm>
-          <a:prstGeom prst="ellipse">
-            <a:avLst/>
-          </a:prstGeom>
-          <a:solidFill>
-            <a:schemeClr val="bg1"/>
-          </a:solidFill>
-        </p:spPr>
-        <p:style>
-          <a:lnRef idx="2">
-            <a:schemeClr val="dk1"/>
-          </a:lnRef>
-          <a:fillRef idx="1">
-            <a:schemeClr val="lt1"/>
-          </a:fillRef>
-          <a:effectRef idx="0">
-            <a:schemeClr val="dk1"/>
-          </a:effectRef>
-          <a:fontRef idx="minor">
-            <a:schemeClr val="dk1"/>
-          </a:fontRef>
-        </p:style>
-        <p:txBody>
-          <a:bodyPr rtlCol="0" anchor="ctr"/>
-          <a:lstStyle/>
-          <a:p>
-            <a:pPr algn="ctr"/>
-            <a:r>
-              <a:rPr lang="en-US" altLang="ko-KR" sz="1600"/>
-              <a:t>5</a:t>
-            </a:r>
-            <a:endParaRPr lang="ko-KR" altLang="en-US" sz="1600"/>
-          </a:p>
-        </p:txBody>
-      </p:sp>
-      <p:cxnSp>
-        <p:nvCxnSpPr>
-          <p:cNvPr id="97" name="직선 화살표 연결선 96">
-            <a:extLst>
-              <a:ext uri="{FF2B5EF4-FFF2-40B4-BE49-F238E27FC236}">
-                <a16:creationId xmlns:a16="http://schemas.microsoft.com/office/drawing/2014/main" id="{73965EDB-8B72-A906-108E-D38F962AAA8C}"/>
-              </a:ext>
-            </a:extLst>
-          </p:cNvPr>
-          <p:cNvCxnSpPr>
-            <a:cxnSpLocks/>
-            <a:stCxn id="35" idx="1"/>
-          </p:cNvCxnSpPr>
-          <p:nvPr/>
-        </p:nvCxnSpPr>
-        <p:spPr>
-          <a:xfrm flipH="1">
-            <a:off x="1718313" y="1594831"/>
-            <a:ext cx="2122988" cy="636953"/>
-          </a:xfrm>
-          <a:prstGeom prst="straightConnector1">
-            <a:avLst/>
-          </a:prstGeom>
-          <a:ln w="19050">
-            <a:solidFill>
-              <a:schemeClr val="tx1"/>
-            </a:solidFill>
-            <a:headEnd type="none" w="med" len="med"/>
-            <a:tailEnd type="arrow" w="med" len="med"/>
-          </a:ln>
-        </p:spPr>
-        <p:style>
-          <a:lnRef idx="1">
-            <a:schemeClr val="accent1"/>
-          </a:lnRef>
-          <a:fillRef idx="0">
-            <a:schemeClr val="accent1"/>
-          </a:fillRef>
-          <a:effectRef idx="0">
-            <a:schemeClr val="accent1"/>
-          </a:effectRef>
-          <a:fontRef idx="minor">
-            <a:schemeClr val="tx1"/>
-          </a:fontRef>
-        </p:style>
-      </p:cxnSp>
-      <p:sp>
-        <p:nvSpPr>
-          <p:cNvPr id="70" name="타원 69">
-            <a:extLst>
-              <a:ext uri="{FF2B5EF4-FFF2-40B4-BE49-F238E27FC236}">
-                <a16:creationId xmlns:a16="http://schemas.microsoft.com/office/drawing/2014/main" id="{5D0B6546-3B63-E414-9215-AE042A33EBDC}"/>
-              </a:ext>
-            </a:extLst>
-          </p:cNvPr>
-          <p:cNvSpPr/>
-          <p:nvPr/>
-        </p:nvSpPr>
-        <p:spPr>
-          <a:xfrm>
-            <a:off x="3693972" y="1234253"/>
-            <a:ext cx="288032" cy="288032"/>
-          </a:xfrm>
-          <a:prstGeom prst="ellipse">
-            <a:avLst/>
-          </a:prstGeom>
-        </p:spPr>
-        <p:style>
-          <a:lnRef idx="2">
-            <a:schemeClr val="dk1"/>
-          </a:lnRef>
-          <a:fillRef idx="1">
-            <a:schemeClr val="lt1"/>
-          </a:fillRef>
-          <a:effectRef idx="0">
-            <a:schemeClr val="dk1"/>
-          </a:effectRef>
-          <a:fontRef idx="minor">
-            <a:schemeClr val="dk1"/>
-          </a:fontRef>
-        </p:style>
-        <p:txBody>
-          <a:bodyPr rtlCol="0" anchor="ctr"/>
-          <a:lstStyle/>
-          <a:p>
-            <a:pPr algn="ctr"/>
-            <a:r>
-              <a:rPr lang="en-US" altLang="ko-KR" sz="1600"/>
-              <a:t>1</a:t>
-            </a:r>
-            <a:endParaRPr lang="ko-KR" altLang="en-US" sz="1600"/>
-          </a:p>
-        </p:txBody>
-      </p:sp>
-      <p:sp>
-        <p:nvSpPr>
-          <p:cNvPr id="24" name="사각형: 둥근 모서리 114">
-            <a:extLst>
-              <a:ext uri="{FF2B5EF4-FFF2-40B4-BE49-F238E27FC236}">
-                <a16:creationId xmlns:a16="http://schemas.microsoft.com/office/drawing/2014/main" id="{8BD2647E-7F6D-665A-281C-4989E21F06B8}"/>
-              </a:ext>
-            </a:extLst>
-          </p:cNvPr>
-          <p:cNvSpPr/>
-          <p:nvPr/>
-        </p:nvSpPr>
-        <p:spPr>
-          <a:xfrm>
-            <a:off x="921657" y="3734226"/>
-            <a:ext cx="2878471" cy="619914"/>
-          </a:xfrm>
-          <a:prstGeom prst="roundRect">
-            <a:avLst>
-              <a:gd name="adj" fmla="val 10304"/>
-            </a:avLst>
-          </a:prstGeom>
-          <a:noFill/>
-          <a:ln>
-            <a:noFill/>
-          </a:ln>
-        </p:spPr>
-        <p:style>
-          <a:lnRef idx="2">
-            <a:schemeClr val="dk1"/>
-          </a:lnRef>
-          <a:fillRef idx="1">
-            <a:schemeClr val="lt1"/>
-          </a:fillRef>
-          <a:effectRef idx="0">
-            <a:schemeClr val="dk1"/>
-          </a:effectRef>
-          <a:fontRef idx="minor">
-            <a:schemeClr val="dk1"/>
-          </a:fontRef>
-        </p:style>
-        <p:txBody>
-          <a:bodyPr rtlCol="0" anchor="ctr"/>
-          <a:lstStyle/>
-          <a:p>
-            <a:pPr algn="ctr"/>
-            <a:r>
-              <a:rPr lang="en-US" altLang="ko-KR" sz="1400"/>
-              <a:t>Make device node </a:t>
-            </a:r>
-            <a:br>
-              <a:rPr lang="en-US" altLang="ko-KR" sz="1400"/>
-            </a:br>
-            <a:r>
-              <a:rPr lang="en-US" altLang="ko-KR" sz="1400"/>
-              <a:t>(mknod), Load kernel module</a:t>
-            </a:r>
-          </a:p>
-        </p:txBody>
-      </p:sp>
-      <p:sp>
-        <p:nvSpPr>
-          <p:cNvPr id="4" name="사각형: 둥근 모서리 114">
-            <a:extLst>
-              <a:ext uri="{FF2B5EF4-FFF2-40B4-BE49-F238E27FC236}">
-                <a16:creationId xmlns:a16="http://schemas.microsoft.com/office/drawing/2014/main" id="{BFD3FE09-03AF-1987-088E-72EB08CB5B76}"/>
-              </a:ext>
-            </a:extLst>
-          </p:cNvPr>
-          <p:cNvSpPr/>
-          <p:nvPr/>
-        </p:nvSpPr>
-        <p:spPr>
-          <a:xfrm>
-            <a:off x="7153673" y="1370132"/>
-            <a:ext cx="1717863" cy="433441"/>
-          </a:xfrm>
-          <a:prstGeom prst="roundRect">
-            <a:avLst>
-              <a:gd name="adj" fmla="val 10304"/>
-            </a:avLst>
-          </a:prstGeom>
-        </p:spPr>
-        <p:style>
-          <a:lnRef idx="2">
-            <a:schemeClr val="dk1"/>
-          </a:lnRef>
-          <a:fillRef idx="1">
-            <a:schemeClr val="lt1"/>
-          </a:fillRef>
-          <a:effectRef idx="0">
-            <a:schemeClr val="dk1"/>
-          </a:effectRef>
-          <a:fontRef idx="minor">
-            <a:schemeClr val="dk1"/>
-          </a:fontRef>
-        </p:style>
-        <p:txBody>
-          <a:bodyPr rtlCol="0" anchor="ctr"/>
-          <a:lstStyle/>
-          <a:p>
-            <a:pPr algn="ctr"/>
-            <a:r>
-              <a:rPr lang="en-US" altLang="ko-KR" sz="1400"/>
-              <a:t>OCI Runtime</a:t>
-            </a:r>
-          </a:p>
-          <a:p>
-            <a:pPr algn="ctr"/>
-            <a:r>
-              <a:rPr lang="en-US" altLang="ko-KR" sz="1400"/>
-              <a:t>Config.json</a:t>
-            </a:r>
-            <a:endParaRPr lang="en-US" altLang="ko-KR" sz="1400" dirty="0"/>
-          </a:p>
-        </p:txBody>
-      </p:sp>
-      <p:cxnSp>
-        <p:nvCxnSpPr>
-          <p:cNvPr id="5" name="직선 화살표 연결선 17">
-            <a:extLst>
-              <a:ext uri="{FF2B5EF4-FFF2-40B4-BE49-F238E27FC236}">
-                <a16:creationId xmlns:a16="http://schemas.microsoft.com/office/drawing/2014/main" id="{73A68F90-A225-1E6B-0D4B-49050CDFFAFE}"/>
-              </a:ext>
-            </a:extLst>
-          </p:cNvPr>
-          <p:cNvCxnSpPr>
-            <a:cxnSpLocks/>
-            <a:stCxn id="4" idx="1"/>
-            <a:endCxn id="35" idx="3"/>
-          </p:cNvCxnSpPr>
-          <p:nvPr/>
-        </p:nvCxnSpPr>
-        <p:spPr>
-          <a:xfrm flipH="1">
-            <a:off x="6572443" y="1586853"/>
-            <a:ext cx="581230" cy="7978"/>
-          </a:xfrm>
-          <a:prstGeom prst="straightConnector1">
-            <a:avLst/>
-          </a:prstGeom>
-          <a:ln w="19050">
-            <a:solidFill>
-              <a:schemeClr val="tx1"/>
-            </a:solidFill>
-            <a:headEnd type="none" w="med" len="med"/>
-            <a:tailEnd type="arrow" w="med" len="med"/>
-          </a:ln>
-        </p:spPr>
-        <p:style>
-          <a:lnRef idx="1">
-            <a:schemeClr val="accent1"/>
-          </a:lnRef>
-          <a:fillRef idx="0">
-            <a:schemeClr val="accent1"/>
-          </a:fillRef>
-          <a:effectRef idx="0">
-            <a:schemeClr val="accent1"/>
-          </a:effectRef>
-          <a:fontRef idx="minor">
-            <a:schemeClr val="tx1"/>
-          </a:fontRef>
-        </p:style>
-      </p:cxnSp>
-      <p:cxnSp>
-        <p:nvCxnSpPr>
-          <p:cNvPr id="26" name="직선 화살표 연결선 17">
-            <a:extLst>
-              <a:ext uri="{FF2B5EF4-FFF2-40B4-BE49-F238E27FC236}">
-                <a16:creationId xmlns:a16="http://schemas.microsoft.com/office/drawing/2014/main" id="{080B94D1-EF6B-8C54-F068-8376FB251754}"/>
-              </a:ext>
-            </a:extLst>
-          </p:cNvPr>
-          <p:cNvCxnSpPr>
-            <a:cxnSpLocks/>
-            <a:stCxn id="4" idx="2"/>
-            <a:endCxn id="44" idx="3"/>
-          </p:cNvCxnSpPr>
-          <p:nvPr/>
-        </p:nvCxnSpPr>
-        <p:spPr>
-          <a:xfrm flipH="1">
-            <a:off x="6740060" y="1803573"/>
-            <a:ext cx="1272545" cy="984899"/>
-          </a:xfrm>
-          <a:prstGeom prst="straightConnector1">
-            <a:avLst/>
-          </a:prstGeom>
-          <a:ln w="19050">
-            <a:solidFill>
-              <a:schemeClr val="tx1"/>
-            </a:solidFill>
-            <a:headEnd type="none" w="med" len="med"/>
-            <a:tailEnd type="arrow" w="med" len="med"/>
-          </a:ln>
-        </p:spPr>
-        <p:style>
-          <a:lnRef idx="1">
-            <a:schemeClr val="accent1"/>
-          </a:lnRef>
-          <a:fillRef idx="0">
-            <a:schemeClr val="accent1"/>
-          </a:fillRef>
-          <a:effectRef idx="0">
-            <a:schemeClr val="accent1"/>
-          </a:effectRef>
-          <a:fontRef idx="minor">
-            <a:schemeClr val="tx1"/>
-          </a:fontRef>
-        </p:style>
-      </p:cxnSp>
-    </p:spTree>
-    <p:extLst>
-      <p:ext uri="{BB962C8B-B14F-4D97-AF65-F5344CB8AC3E}">
-        <p14:creationId xmlns:p14="http://schemas.microsoft.com/office/powerpoint/2010/main" val="1318549003"/>
       </p:ext>
     </p:extLst>
   </p:cSld>

--- a/content/docs/theory-analysis/container-nvidia-gpu/images/images.pptx
+++ b/content/docs/theory-analysis/container-nvidia-gpu/images/images.pptx
@@ -5,22 +5,23 @@
     <p:sldMasterId id="2147483648" r:id="rId1"/>
   </p:sldMasterIdLst>
   <p:notesMasterIdLst>
-    <p:notesMasterId r:id="rId15"/>
+    <p:notesMasterId r:id="rId16"/>
   </p:notesMasterIdLst>
   <p:sldIdLst>
     <p:sldId id="436" r:id="rId2"/>
     <p:sldId id="435" r:id="rId3"/>
-    <p:sldId id="434" r:id="rId4"/>
+    <p:sldId id="438" r:id="rId4"/>
     <p:sldId id="426" r:id="rId5"/>
-    <p:sldId id="437" r:id="rId6"/>
-    <p:sldId id="428" r:id="rId7"/>
-    <p:sldId id="427" r:id="rId8"/>
-    <p:sldId id="422" r:id="rId9"/>
-    <p:sldId id="433" r:id="rId10"/>
-    <p:sldId id="432" r:id="rId11"/>
-    <p:sldId id="429" r:id="rId12"/>
-    <p:sldId id="430" r:id="rId13"/>
-    <p:sldId id="431" r:id="rId14"/>
+    <p:sldId id="434" r:id="rId6"/>
+    <p:sldId id="437" r:id="rId7"/>
+    <p:sldId id="428" r:id="rId8"/>
+    <p:sldId id="427" r:id="rId9"/>
+    <p:sldId id="422" r:id="rId10"/>
+    <p:sldId id="433" r:id="rId11"/>
+    <p:sldId id="432" r:id="rId12"/>
+    <p:sldId id="429" r:id="rId13"/>
+    <p:sldId id="430" r:id="rId14"/>
+    <p:sldId id="431" r:id="rId15"/>
   </p:sldIdLst>
   <p:sldSz cx="9144000" cy="5143500" type="screen16x9"/>
   <p:notesSz cx="6858000" cy="9144000"/>
@@ -605,7 +606,13 @@
   <p:cSld>
     <p:spTree>
       <p:nvGrpSpPr>
-        <p:cNvPr id="1" name=""/>
+        <p:cNvPr id="1" name="">
+          <a:extLst>
+            <a:ext uri="{FF2B5EF4-FFF2-40B4-BE49-F238E27FC236}">
+              <a16:creationId xmlns:a16="http://schemas.microsoft.com/office/drawing/2014/main" id="{6D308DBE-B1B4-7D50-CD13-CEB16511702E}"/>
+            </a:ext>
+          </a:extLst>
+        </p:cNvPr>
         <p:cNvGrpSpPr/>
         <p:nvPr/>
       </p:nvGrpSpPr>
@@ -619,7 +626,13 @@
       </p:grpSpPr>
       <p:sp>
         <p:nvSpPr>
-          <p:cNvPr id="2" name="슬라이드 이미지 개체 틀 1"/>
+          <p:cNvPr id="2" name="슬라이드 이미지 개체 틀 1">
+            <a:extLst>
+              <a:ext uri="{FF2B5EF4-FFF2-40B4-BE49-F238E27FC236}">
+                <a16:creationId xmlns:a16="http://schemas.microsoft.com/office/drawing/2014/main" id="{D8932A28-C535-04DC-B68D-E086AECAAA49}"/>
+              </a:ext>
+            </a:extLst>
+          </p:cNvPr>
           <p:cNvSpPr>
             <a:spLocks noGrp="1" noRot="1" noChangeAspect="1"/>
           </p:cNvSpPr>
@@ -631,7 +644,13 @@
       </p:sp>
       <p:sp>
         <p:nvSpPr>
-          <p:cNvPr id="3" name="슬라이드 노트 개체 틀 2"/>
+          <p:cNvPr id="3" name="슬라이드 노트 개체 틀 2">
+            <a:extLst>
+              <a:ext uri="{FF2B5EF4-FFF2-40B4-BE49-F238E27FC236}">
+                <a16:creationId xmlns:a16="http://schemas.microsoft.com/office/drawing/2014/main" id="{CB04DC1A-50F3-F419-D819-B62C860E0B3B}"/>
+              </a:ext>
+            </a:extLst>
+          </p:cNvPr>
           <p:cNvSpPr>
             <a:spLocks noGrp="1"/>
           </p:cNvSpPr>
@@ -650,7 +669,13 @@
       </p:sp>
       <p:sp>
         <p:nvSpPr>
-          <p:cNvPr id="4" name="슬라이드 번호 개체 틀 3"/>
+          <p:cNvPr id="4" name="슬라이드 번호 개체 틀 3">
+            <a:extLst>
+              <a:ext uri="{FF2B5EF4-FFF2-40B4-BE49-F238E27FC236}">
+                <a16:creationId xmlns:a16="http://schemas.microsoft.com/office/drawing/2014/main" id="{C4E9CA9E-6278-9238-5D9A-93DDFDE20AB7}"/>
+              </a:ext>
+            </a:extLst>
+          </p:cNvPr>
           <p:cNvSpPr>
             <a:spLocks noGrp="1"/>
           </p:cNvSpPr>
@@ -674,7 +699,7 @@
     </p:spTree>
     <p:extLst>
       <p:ext uri="{BB962C8B-B14F-4D97-AF65-F5344CB8AC3E}">
-        <p14:creationId xmlns:p14="http://schemas.microsoft.com/office/powerpoint/2010/main" val="1617950839"/>
+        <p14:creationId xmlns:p14="http://schemas.microsoft.com/office/powerpoint/2010/main" val="180167310"/>
       </p:ext>
     </p:extLst>
   </p:cSld>
@@ -758,7 +783,7 @@
     </p:spTree>
     <p:extLst>
       <p:ext uri="{BB962C8B-B14F-4D97-AF65-F5344CB8AC3E}">
-        <p14:creationId xmlns:p14="http://schemas.microsoft.com/office/powerpoint/2010/main" val="1174720120"/>
+        <p14:creationId xmlns:p14="http://schemas.microsoft.com/office/powerpoint/2010/main" val="1617950839"/>
       </p:ext>
     </p:extLst>
   </p:cSld>
@@ -834,6 +859,90 @@
             <a:fld id="{BA5DFA43-8D57-47FB-BC46-057616015C3B}" type="slidenum">
               <a:rPr lang="ko-KR" altLang="en-US" smtClean="0"/>
               <a:t>13</a:t>
+            </a:fld>
+            <a:endParaRPr lang="ko-KR" altLang="en-US"/>
+          </a:p>
+        </p:txBody>
+      </p:sp>
+    </p:spTree>
+    <p:extLst>
+      <p:ext uri="{BB962C8B-B14F-4D97-AF65-F5344CB8AC3E}">
+        <p14:creationId xmlns:p14="http://schemas.microsoft.com/office/powerpoint/2010/main" val="1174720120"/>
+      </p:ext>
+    </p:extLst>
+  </p:cSld>
+  <p:clrMapOvr>
+    <a:masterClrMapping/>
+  </p:clrMapOvr>
+</p:notes>
+</file>
+
+<file path=ppt/notesSlides/notesSlide13.xml><?xml version="1.0" encoding="utf-8"?>
+<p:notes xmlns:a="http://schemas.openxmlformats.org/drawingml/2006/main" xmlns:r="http://schemas.openxmlformats.org/officeDocument/2006/relationships" xmlns:p="http://schemas.openxmlformats.org/presentationml/2006/main">
+  <p:cSld>
+    <p:spTree>
+      <p:nvGrpSpPr>
+        <p:cNvPr id="1" name=""/>
+        <p:cNvGrpSpPr/>
+        <p:nvPr/>
+      </p:nvGrpSpPr>
+      <p:grpSpPr>
+        <a:xfrm>
+          <a:off x="0" y="0"/>
+          <a:ext cx="0" cy="0"/>
+          <a:chOff x="0" y="0"/>
+          <a:chExt cx="0" cy="0"/>
+        </a:xfrm>
+      </p:grpSpPr>
+      <p:sp>
+        <p:nvSpPr>
+          <p:cNvPr id="2" name="슬라이드 이미지 개체 틀 1"/>
+          <p:cNvSpPr>
+            <a:spLocks noGrp="1" noRot="1" noChangeAspect="1"/>
+          </p:cNvSpPr>
+          <p:nvPr>
+            <p:ph type="sldImg"/>
+          </p:nvPr>
+        </p:nvSpPr>
+        <p:spPr/>
+      </p:sp>
+      <p:sp>
+        <p:nvSpPr>
+          <p:cNvPr id="3" name="슬라이드 노트 개체 틀 2"/>
+          <p:cNvSpPr>
+            <a:spLocks noGrp="1"/>
+          </p:cNvSpPr>
+          <p:nvPr>
+            <p:ph type="body" idx="1"/>
+          </p:nvPr>
+        </p:nvSpPr>
+        <p:spPr/>
+        <p:txBody>
+          <a:bodyPr/>
+          <a:lstStyle/>
+          <a:p>
+            <a:endParaRPr lang="ko-KR" altLang="en-US"/>
+          </a:p>
+        </p:txBody>
+      </p:sp>
+      <p:sp>
+        <p:nvSpPr>
+          <p:cNvPr id="4" name="슬라이드 번호 개체 틀 3"/>
+          <p:cNvSpPr>
+            <a:spLocks noGrp="1"/>
+          </p:cNvSpPr>
+          <p:nvPr>
+            <p:ph type="sldNum" sz="quarter" idx="10"/>
+          </p:nvPr>
+        </p:nvSpPr>
+        <p:spPr/>
+        <p:txBody>
+          <a:bodyPr/>
+          <a:lstStyle/>
+          <a:p>
+            <a:fld id="{BA5DFA43-8D57-47FB-BC46-057616015C3B}" type="slidenum">
+              <a:rPr lang="ko-KR" altLang="en-US" smtClean="0"/>
+              <a:t>14</a:t>
             </a:fld>
             <a:endParaRPr lang="ko-KR" altLang="en-US"/>
           </a:p>
@@ -968,6 +1077,114 @@
         <p:cNvPr id="1" name="">
           <a:extLst>
             <a:ext uri="{FF2B5EF4-FFF2-40B4-BE49-F238E27FC236}">
+              <a16:creationId xmlns:a16="http://schemas.microsoft.com/office/drawing/2014/main" id="{71309103-E672-6E7C-6282-154F936A6F9A}"/>
+            </a:ext>
+          </a:extLst>
+        </p:cNvPr>
+        <p:cNvGrpSpPr/>
+        <p:nvPr/>
+      </p:nvGrpSpPr>
+      <p:grpSpPr>
+        <a:xfrm>
+          <a:off x="0" y="0"/>
+          <a:ext cx="0" cy="0"/>
+          <a:chOff x="0" y="0"/>
+          <a:chExt cx="0" cy="0"/>
+        </a:xfrm>
+      </p:grpSpPr>
+      <p:sp>
+        <p:nvSpPr>
+          <p:cNvPr id="2" name="슬라이드 이미지 개체 틀 1">
+            <a:extLst>
+              <a:ext uri="{FF2B5EF4-FFF2-40B4-BE49-F238E27FC236}">
+                <a16:creationId xmlns:a16="http://schemas.microsoft.com/office/drawing/2014/main" id="{5644AB52-7692-CC96-0F1E-7CECA85C90AF}"/>
+              </a:ext>
+            </a:extLst>
+          </p:cNvPr>
+          <p:cNvSpPr>
+            <a:spLocks noGrp="1" noRot="1" noChangeAspect="1"/>
+          </p:cNvSpPr>
+          <p:nvPr>
+            <p:ph type="sldImg"/>
+          </p:nvPr>
+        </p:nvSpPr>
+        <p:spPr/>
+      </p:sp>
+      <p:sp>
+        <p:nvSpPr>
+          <p:cNvPr id="3" name="슬라이드 노트 개체 틀 2">
+            <a:extLst>
+              <a:ext uri="{FF2B5EF4-FFF2-40B4-BE49-F238E27FC236}">
+                <a16:creationId xmlns:a16="http://schemas.microsoft.com/office/drawing/2014/main" id="{7CA9D0AF-5C11-575B-12A6-BAF068A88CD9}"/>
+              </a:ext>
+            </a:extLst>
+          </p:cNvPr>
+          <p:cNvSpPr>
+            <a:spLocks noGrp="1"/>
+          </p:cNvSpPr>
+          <p:nvPr>
+            <p:ph type="body" idx="1"/>
+          </p:nvPr>
+        </p:nvSpPr>
+        <p:spPr/>
+        <p:txBody>
+          <a:bodyPr/>
+          <a:lstStyle/>
+          <a:p>
+            <a:endParaRPr lang="ko-KR" altLang="en-US"/>
+          </a:p>
+        </p:txBody>
+      </p:sp>
+      <p:sp>
+        <p:nvSpPr>
+          <p:cNvPr id="4" name="슬라이드 번호 개체 틀 3">
+            <a:extLst>
+              <a:ext uri="{FF2B5EF4-FFF2-40B4-BE49-F238E27FC236}">
+                <a16:creationId xmlns:a16="http://schemas.microsoft.com/office/drawing/2014/main" id="{F2C4F015-0AB9-59DC-BD2C-4AA2C1797AC9}"/>
+              </a:ext>
+            </a:extLst>
+          </p:cNvPr>
+          <p:cNvSpPr>
+            <a:spLocks noGrp="1"/>
+          </p:cNvSpPr>
+          <p:nvPr>
+            <p:ph type="sldNum" sz="quarter" idx="10"/>
+          </p:nvPr>
+        </p:nvSpPr>
+        <p:spPr/>
+        <p:txBody>
+          <a:bodyPr/>
+          <a:lstStyle/>
+          <a:p>
+            <a:fld id="{BA5DFA43-8D57-47FB-BC46-057616015C3B}" type="slidenum">
+              <a:rPr lang="ko-KR" altLang="en-US" smtClean="0"/>
+              <a:t>3</a:t>
+            </a:fld>
+            <a:endParaRPr lang="ko-KR" altLang="en-US"/>
+          </a:p>
+        </p:txBody>
+      </p:sp>
+    </p:spTree>
+    <p:extLst>
+      <p:ext uri="{BB962C8B-B14F-4D97-AF65-F5344CB8AC3E}">
+        <p14:creationId xmlns:p14="http://schemas.microsoft.com/office/powerpoint/2010/main" val="732420446"/>
+      </p:ext>
+    </p:extLst>
+  </p:cSld>
+  <p:clrMapOvr>
+    <a:masterClrMapping/>
+  </p:clrMapOvr>
+</p:notes>
+</file>
+
+<file path=ppt/notesSlides/notesSlide4.xml><?xml version="1.0" encoding="utf-8"?>
+<p:notes xmlns:a="http://schemas.openxmlformats.org/drawingml/2006/main" xmlns:r="http://schemas.openxmlformats.org/officeDocument/2006/relationships" xmlns:p="http://schemas.openxmlformats.org/presentationml/2006/main">
+  <p:cSld>
+    <p:spTree>
+      <p:nvGrpSpPr>
+        <p:cNvPr id="1" name="">
+          <a:extLst>
+            <a:ext uri="{FF2B5EF4-FFF2-40B4-BE49-F238E27FC236}">
               <a16:creationId xmlns:a16="http://schemas.microsoft.com/office/drawing/2014/main" id="{1DFA0934-F7EE-9604-5F97-9303B9190681}"/>
             </a:ext>
           </a:extLst>
@@ -1049,7 +1266,7 @@
           <a:p>
             <a:fld id="{BA5DFA43-8D57-47FB-BC46-057616015C3B}" type="slidenum">
               <a:rPr lang="ko-KR" altLang="en-US" smtClean="0"/>
-              <a:t>3</a:t>
+              <a:t>5</a:t>
             </a:fld>
             <a:endParaRPr lang="ko-KR" altLang="en-US"/>
           </a:p>
@@ -1068,7 +1285,7 @@
 </p:notes>
 </file>
 
-<file path=ppt/notesSlides/notesSlide4.xml><?xml version="1.0" encoding="utf-8"?>
+<file path=ppt/notesSlides/notesSlide5.xml><?xml version="1.0" encoding="utf-8"?>
 <p:notes xmlns:a="http://schemas.openxmlformats.org/drawingml/2006/main" xmlns:r="http://schemas.openxmlformats.org/officeDocument/2006/relationships" xmlns:p="http://schemas.openxmlformats.org/presentationml/2006/main">
   <p:cSld>
     <p:spTree>
@@ -1157,7 +1374,7 @@
           <a:p>
             <a:fld id="{BA5DFA43-8D57-47FB-BC46-057616015C3B}" type="slidenum">
               <a:rPr lang="ko-KR" altLang="en-US" smtClean="0"/>
-              <a:t>5</a:t>
+              <a:t>6</a:t>
             </a:fld>
             <a:endParaRPr lang="ko-KR" altLang="en-US"/>
           </a:p>
@@ -1167,90 +1384,6 @@
     <p:extLst>
       <p:ext uri="{BB962C8B-B14F-4D97-AF65-F5344CB8AC3E}">
         <p14:creationId xmlns:p14="http://schemas.microsoft.com/office/powerpoint/2010/main" val="3929111847"/>
-      </p:ext>
-    </p:extLst>
-  </p:cSld>
-  <p:clrMapOvr>
-    <a:masterClrMapping/>
-  </p:clrMapOvr>
-</p:notes>
-</file>
-
-<file path=ppt/notesSlides/notesSlide5.xml><?xml version="1.0" encoding="utf-8"?>
-<p:notes xmlns:a="http://schemas.openxmlformats.org/drawingml/2006/main" xmlns:r="http://schemas.openxmlformats.org/officeDocument/2006/relationships" xmlns:p="http://schemas.openxmlformats.org/presentationml/2006/main">
-  <p:cSld>
-    <p:spTree>
-      <p:nvGrpSpPr>
-        <p:cNvPr id="1" name=""/>
-        <p:cNvGrpSpPr/>
-        <p:nvPr/>
-      </p:nvGrpSpPr>
-      <p:grpSpPr>
-        <a:xfrm>
-          <a:off x="0" y="0"/>
-          <a:ext cx="0" cy="0"/>
-          <a:chOff x="0" y="0"/>
-          <a:chExt cx="0" cy="0"/>
-        </a:xfrm>
-      </p:grpSpPr>
-      <p:sp>
-        <p:nvSpPr>
-          <p:cNvPr id="2" name="슬라이드 이미지 개체 틀 1"/>
-          <p:cNvSpPr>
-            <a:spLocks noGrp="1" noRot="1" noChangeAspect="1"/>
-          </p:cNvSpPr>
-          <p:nvPr>
-            <p:ph type="sldImg"/>
-          </p:nvPr>
-        </p:nvSpPr>
-        <p:spPr/>
-      </p:sp>
-      <p:sp>
-        <p:nvSpPr>
-          <p:cNvPr id="3" name="슬라이드 노트 개체 틀 2"/>
-          <p:cNvSpPr>
-            <a:spLocks noGrp="1"/>
-          </p:cNvSpPr>
-          <p:nvPr>
-            <p:ph type="body" idx="1"/>
-          </p:nvPr>
-        </p:nvSpPr>
-        <p:spPr/>
-        <p:txBody>
-          <a:bodyPr/>
-          <a:lstStyle/>
-          <a:p>
-            <a:endParaRPr lang="ko-KR" altLang="en-US"/>
-          </a:p>
-        </p:txBody>
-      </p:sp>
-      <p:sp>
-        <p:nvSpPr>
-          <p:cNvPr id="4" name="슬라이드 번호 개체 틀 3"/>
-          <p:cNvSpPr>
-            <a:spLocks noGrp="1"/>
-          </p:cNvSpPr>
-          <p:nvPr>
-            <p:ph type="sldNum" sz="quarter" idx="10"/>
-          </p:nvPr>
-        </p:nvSpPr>
-        <p:spPr/>
-        <p:txBody>
-          <a:bodyPr/>
-          <a:lstStyle/>
-          <a:p>
-            <a:fld id="{BA5DFA43-8D57-47FB-BC46-057616015C3B}" type="slidenum">
-              <a:rPr lang="ko-KR" altLang="en-US" smtClean="0"/>
-              <a:t>6</a:t>
-            </a:fld>
-            <a:endParaRPr lang="ko-KR" altLang="en-US"/>
-          </a:p>
-        </p:txBody>
-      </p:sp>
-    </p:spTree>
-    <p:extLst>
-      <p:ext uri="{BB962C8B-B14F-4D97-AF65-F5344CB8AC3E}">
-        <p14:creationId xmlns:p14="http://schemas.microsoft.com/office/powerpoint/2010/main" val="1567964482"/>
       </p:ext>
     </p:extLst>
   </p:cSld>
@@ -1334,7 +1467,7 @@
     </p:spTree>
     <p:extLst>
       <p:ext uri="{BB962C8B-B14F-4D97-AF65-F5344CB8AC3E}">
-        <p14:creationId xmlns:p14="http://schemas.microsoft.com/office/powerpoint/2010/main" val="3019375958"/>
+        <p14:creationId xmlns:p14="http://schemas.microsoft.com/office/powerpoint/2010/main" val="1567964482"/>
       </p:ext>
     </p:extLst>
   </p:cSld>
@@ -1418,6 +1551,90 @@
     </p:spTree>
     <p:extLst>
       <p:ext uri="{BB962C8B-B14F-4D97-AF65-F5344CB8AC3E}">
+        <p14:creationId xmlns:p14="http://schemas.microsoft.com/office/powerpoint/2010/main" val="3019375958"/>
+      </p:ext>
+    </p:extLst>
+  </p:cSld>
+  <p:clrMapOvr>
+    <a:masterClrMapping/>
+  </p:clrMapOvr>
+</p:notes>
+</file>
+
+<file path=ppt/notesSlides/notesSlide8.xml><?xml version="1.0" encoding="utf-8"?>
+<p:notes xmlns:a="http://schemas.openxmlformats.org/drawingml/2006/main" xmlns:r="http://schemas.openxmlformats.org/officeDocument/2006/relationships" xmlns:p="http://schemas.openxmlformats.org/presentationml/2006/main">
+  <p:cSld>
+    <p:spTree>
+      <p:nvGrpSpPr>
+        <p:cNvPr id="1" name=""/>
+        <p:cNvGrpSpPr/>
+        <p:nvPr/>
+      </p:nvGrpSpPr>
+      <p:grpSpPr>
+        <a:xfrm>
+          <a:off x="0" y="0"/>
+          <a:ext cx="0" cy="0"/>
+          <a:chOff x="0" y="0"/>
+          <a:chExt cx="0" cy="0"/>
+        </a:xfrm>
+      </p:grpSpPr>
+      <p:sp>
+        <p:nvSpPr>
+          <p:cNvPr id="2" name="슬라이드 이미지 개체 틀 1"/>
+          <p:cNvSpPr>
+            <a:spLocks noGrp="1" noRot="1" noChangeAspect="1"/>
+          </p:cNvSpPr>
+          <p:nvPr>
+            <p:ph type="sldImg"/>
+          </p:nvPr>
+        </p:nvSpPr>
+        <p:spPr/>
+      </p:sp>
+      <p:sp>
+        <p:nvSpPr>
+          <p:cNvPr id="3" name="슬라이드 노트 개체 틀 2"/>
+          <p:cNvSpPr>
+            <a:spLocks noGrp="1"/>
+          </p:cNvSpPr>
+          <p:nvPr>
+            <p:ph type="body" idx="1"/>
+          </p:nvPr>
+        </p:nvSpPr>
+        <p:spPr/>
+        <p:txBody>
+          <a:bodyPr/>
+          <a:lstStyle/>
+          <a:p>
+            <a:endParaRPr lang="ko-KR" altLang="en-US"/>
+          </a:p>
+        </p:txBody>
+      </p:sp>
+      <p:sp>
+        <p:nvSpPr>
+          <p:cNvPr id="4" name="슬라이드 번호 개체 틀 3"/>
+          <p:cNvSpPr>
+            <a:spLocks noGrp="1"/>
+          </p:cNvSpPr>
+          <p:nvPr>
+            <p:ph type="sldNum" sz="quarter" idx="10"/>
+          </p:nvPr>
+        </p:nvSpPr>
+        <p:spPr/>
+        <p:txBody>
+          <a:bodyPr/>
+          <a:lstStyle/>
+          <a:p>
+            <a:fld id="{BA5DFA43-8D57-47FB-BC46-057616015C3B}" type="slidenum">
+              <a:rPr lang="ko-KR" altLang="en-US" smtClean="0"/>
+              <a:t>9</a:t>
+            </a:fld>
+            <a:endParaRPr lang="ko-KR" altLang="en-US"/>
+          </a:p>
+        </p:txBody>
+      </p:sp>
+    </p:spTree>
+    <p:extLst>
+      <p:ext uri="{BB962C8B-B14F-4D97-AF65-F5344CB8AC3E}">
         <p14:creationId xmlns:p14="http://schemas.microsoft.com/office/powerpoint/2010/main" val="3104554366"/>
       </p:ext>
     </p:extLst>
@@ -1428,7 +1645,7 @@
 </p:notes>
 </file>
 
-<file path=ppt/notesSlides/notesSlide8.xml><?xml version="1.0" encoding="utf-8"?>
+<file path=ppt/notesSlides/notesSlide9.xml><?xml version="1.0" encoding="utf-8"?>
 <p:notes xmlns:a="http://schemas.openxmlformats.org/drawingml/2006/main" xmlns:r="http://schemas.openxmlformats.org/officeDocument/2006/relationships" xmlns:p="http://schemas.openxmlformats.org/presentationml/2006/main">
   <p:cSld>
     <p:spTree>
@@ -1517,7 +1734,7 @@
           <a:p>
             <a:fld id="{BA5DFA43-8D57-47FB-BC46-057616015C3B}" type="slidenum">
               <a:rPr lang="ko-KR" altLang="en-US" smtClean="0"/>
-              <a:t>9</a:t>
+              <a:t>10</a:t>
             </a:fld>
             <a:endParaRPr lang="ko-KR" altLang="en-US"/>
           </a:p>
@@ -1527,114 +1744,6 @@
     <p:extLst>
       <p:ext uri="{BB962C8B-B14F-4D97-AF65-F5344CB8AC3E}">
         <p14:creationId xmlns:p14="http://schemas.microsoft.com/office/powerpoint/2010/main" val="2909460317"/>
-      </p:ext>
-    </p:extLst>
-  </p:cSld>
-  <p:clrMapOvr>
-    <a:masterClrMapping/>
-  </p:clrMapOvr>
-</p:notes>
-</file>
-
-<file path=ppt/notesSlides/notesSlide9.xml><?xml version="1.0" encoding="utf-8"?>
-<p:notes xmlns:a="http://schemas.openxmlformats.org/drawingml/2006/main" xmlns:r="http://schemas.openxmlformats.org/officeDocument/2006/relationships" xmlns:p="http://schemas.openxmlformats.org/presentationml/2006/main">
-  <p:cSld>
-    <p:spTree>
-      <p:nvGrpSpPr>
-        <p:cNvPr id="1" name="">
-          <a:extLst>
-            <a:ext uri="{FF2B5EF4-FFF2-40B4-BE49-F238E27FC236}">
-              <a16:creationId xmlns:a16="http://schemas.microsoft.com/office/drawing/2014/main" id="{6D308DBE-B1B4-7D50-CD13-CEB16511702E}"/>
-            </a:ext>
-          </a:extLst>
-        </p:cNvPr>
-        <p:cNvGrpSpPr/>
-        <p:nvPr/>
-      </p:nvGrpSpPr>
-      <p:grpSpPr>
-        <a:xfrm>
-          <a:off x="0" y="0"/>
-          <a:ext cx="0" cy="0"/>
-          <a:chOff x="0" y="0"/>
-          <a:chExt cx="0" cy="0"/>
-        </a:xfrm>
-      </p:grpSpPr>
-      <p:sp>
-        <p:nvSpPr>
-          <p:cNvPr id="2" name="슬라이드 이미지 개체 틀 1">
-            <a:extLst>
-              <a:ext uri="{FF2B5EF4-FFF2-40B4-BE49-F238E27FC236}">
-                <a16:creationId xmlns:a16="http://schemas.microsoft.com/office/drawing/2014/main" id="{D8932A28-C535-04DC-B68D-E086AECAAA49}"/>
-              </a:ext>
-            </a:extLst>
-          </p:cNvPr>
-          <p:cNvSpPr>
-            <a:spLocks noGrp="1" noRot="1" noChangeAspect="1"/>
-          </p:cNvSpPr>
-          <p:nvPr>
-            <p:ph type="sldImg"/>
-          </p:nvPr>
-        </p:nvSpPr>
-        <p:spPr/>
-      </p:sp>
-      <p:sp>
-        <p:nvSpPr>
-          <p:cNvPr id="3" name="슬라이드 노트 개체 틀 2">
-            <a:extLst>
-              <a:ext uri="{FF2B5EF4-FFF2-40B4-BE49-F238E27FC236}">
-                <a16:creationId xmlns:a16="http://schemas.microsoft.com/office/drawing/2014/main" id="{CB04DC1A-50F3-F419-D819-B62C860E0B3B}"/>
-              </a:ext>
-            </a:extLst>
-          </p:cNvPr>
-          <p:cNvSpPr>
-            <a:spLocks noGrp="1"/>
-          </p:cNvSpPr>
-          <p:nvPr>
-            <p:ph type="body" idx="1"/>
-          </p:nvPr>
-        </p:nvSpPr>
-        <p:spPr/>
-        <p:txBody>
-          <a:bodyPr/>
-          <a:lstStyle/>
-          <a:p>
-            <a:endParaRPr lang="ko-KR" altLang="en-US"/>
-          </a:p>
-        </p:txBody>
-      </p:sp>
-      <p:sp>
-        <p:nvSpPr>
-          <p:cNvPr id="4" name="슬라이드 번호 개체 틀 3">
-            <a:extLst>
-              <a:ext uri="{FF2B5EF4-FFF2-40B4-BE49-F238E27FC236}">
-                <a16:creationId xmlns:a16="http://schemas.microsoft.com/office/drawing/2014/main" id="{C4E9CA9E-6278-9238-5D9A-93DDFDE20AB7}"/>
-              </a:ext>
-            </a:extLst>
-          </p:cNvPr>
-          <p:cNvSpPr>
-            <a:spLocks noGrp="1"/>
-          </p:cNvSpPr>
-          <p:nvPr>
-            <p:ph type="sldNum" sz="quarter" idx="10"/>
-          </p:nvPr>
-        </p:nvSpPr>
-        <p:spPr/>
-        <p:txBody>
-          <a:bodyPr/>
-          <a:lstStyle/>
-          <a:p>
-            <a:fld id="{BA5DFA43-8D57-47FB-BC46-057616015C3B}" type="slidenum">
-              <a:rPr lang="ko-KR" altLang="en-US" smtClean="0"/>
-              <a:t>10</a:t>
-            </a:fld>
-            <a:endParaRPr lang="ko-KR" altLang="en-US"/>
-          </a:p>
-        </p:txBody>
-      </p:sp>
-    </p:spTree>
-    <p:extLst>
-      <p:ext uri="{BB962C8B-B14F-4D97-AF65-F5344CB8AC3E}">
-        <p14:creationId xmlns:p14="http://schemas.microsoft.com/office/powerpoint/2010/main" val="180167310"/>
       </p:ext>
     </p:extLst>
   </p:cSld>
@@ -6831,6 +6940,378 @@
         <p:cNvPr id="1" name="">
           <a:extLst>
             <a:ext uri="{FF2B5EF4-FFF2-40B4-BE49-F238E27FC236}">
+              <a16:creationId xmlns:a16="http://schemas.microsoft.com/office/drawing/2014/main" id="{A103B0BA-68D1-BD3C-3458-09E9ACE5CC40}"/>
+            </a:ext>
+          </a:extLst>
+        </p:cNvPr>
+        <p:cNvGrpSpPr/>
+        <p:nvPr/>
+      </p:nvGrpSpPr>
+      <p:grpSpPr>
+        <a:xfrm>
+          <a:off x="0" y="0"/>
+          <a:ext cx="0" cy="0"/>
+          <a:chOff x="0" y="0"/>
+          <a:chExt cx="0" cy="0"/>
+        </a:xfrm>
+      </p:grpSpPr>
+      <p:sp>
+        <p:nvSpPr>
+          <p:cNvPr id="2" name="제목 1">
+            <a:extLst>
+              <a:ext uri="{FF2B5EF4-FFF2-40B4-BE49-F238E27FC236}">
+                <a16:creationId xmlns:a16="http://schemas.microsoft.com/office/drawing/2014/main" id="{97C74CC4-DE60-A510-3813-8C0BD405B8B4}"/>
+              </a:ext>
+            </a:extLst>
+          </p:cNvPr>
+          <p:cNvSpPr>
+            <a:spLocks noGrp="1"/>
+          </p:cNvSpPr>
+          <p:nvPr>
+            <p:ph type="title"/>
+          </p:nvPr>
+        </p:nvSpPr>
+        <p:spPr>
+          <a:xfrm>
+            <a:off x="0" y="-726229"/>
+            <a:ext cx="9144000" cy="857250"/>
+          </a:xfrm>
+        </p:spPr>
+        <p:txBody>
+          <a:bodyPr>
+            <a:normAutofit fontScale="90000"/>
+          </a:bodyPr>
+          <a:lstStyle/>
+          <a:p>
+            <a:r>
+              <a:rPr lang="en-US" altLang="ko-KR"/>
+              <a:t>CUDA Container OCI Runtime Spec</a:t>
+            </a:r>
+            <a:endParaRPr lang="ko-KR" altLang="en-US" dirty="0"/>
+          </a:p>
+        </p:txBody>
+      </p:sp>
+      <p:sp>
+        <p:nvSpPr>
+          <p:cNvPr id="7" name="사각형: 둥근 모서리 114">
+            <a:extLst>
+              <a:ext uri="{FF2B5EF4-FFF2-40B4-BE49-F238E27FC236}">
+                <a16:creationId xmlns:a16="http://schemas.microsoft.com/office/drawing/2014/main" id="{D022E7F7-C9AC-F290-1424-37425B5839ED}"/>
+              </a:ext>
+            </a:extLst>
+          </p:cNvPr>
+          <p:cNvSpPr/>
+          <p:nvPr/>
+        </p:nvSpPr>
+        <p:spPr>
+          <a:xfrm>
+            <a:off x="2267744" y="259255"/>
+            <a:ext cx="4752528" cy="433441"/>
+          </a:xfrm>
+          <a:prstGeom prst="roundRect">
+            <a:avLst>
+              <a:gd name="adj" fmla="val 0"/>
+            </a:avLst>
+          </a:prstGeom>
+          <a:ln w="12700"/>
+        </p:spPr>
+        <p:style>
+          <a:lnRef idx="2">
+            <a:schemeClr val="dk1"/>
+          </a:lnRef>
+          <a:fillRef idx="1">
+            <a:schemeClr val="lt1"/>
+          </a:fillRef>
+          <a:effectRef idx="0">
+            <a:schemeClr val="dk1"/>
+          </a:effectRef>
+          <a:fontRef idx="minor">
+            <a:schemeClr val="dk1"/>
+          </a:fontRef>
+        </p:style>
+        <p:txBody>
+          <a:bodyPr rtlCol="0" anchor="ctr"/>
+          <a:lstStyle/>
+          <a:p>
+            <a:r>
+              <a:rPr lang="en-US" altLang="ko-KR" sz="1400"/>
+              <a:t># docker run --gpu all nvidia/cuda:9.0-base nvidia-smi</a:t>
+            </a:r>
+            <a:endParaRPr lang="en-US" altLang="ko-KR" sz="1400" dirty="0"/>
+          </a:p>
+        </p:txBody>
+      </p:sp>
+      <p:sp>
+        <p:nvSpPr>
+          <p:cNvPr id="11" name="사각형: 둥근 모서리 114">
+            <a:extLst>
+              <a:ext uri="{FF2B5EF4-FFF2-40B4-BE49-F238E27FC236}">
+                <a16:creationId xmlns:a16="http://schemas.microsoft.com/office/drawing/2014/main" id="{A632F3FB-7B22-D451-5B4D-B7281CE5B4AA}"/>
+              </a:ext>
+            </a:extLst>
+          </p:cNvPr>
+          <p:cNvSpPr/>
+          <p:nvPr/>
+        </p:nvSpPr>
+        <p:spPr>
+          <a:xfrm>
+            <a:off x="899592" y="915566"/>
+            <a:ext cx="7488831" cy="3737569"/>
+          </a:xfrm>
+          <a:prstGeom prst="roundRect">
+            <a:avLst>
+              <a:gd name="adj" fmla="val 0"/>
+            </a:avLst>
+          </a:prstGeom>
+          <a:ln w="12700"/>
+        </p:spPr>
+        <p:style>
+          <a:lnRef idx="2">
+            <a:schemeClr val="dk1"/>
+          </a:lnRef>
+          <a:fillRef idx="1">
+            <a:schemeClr val="lt1"/>
+          </a:fillRef>
+          <a:effectRef idx="0">
+            <a:schemeClr val="dk1"/>
+          </a:effectRef>
+          <a:fontRef idx="minor">
+            <a:schemeClr val="dk1"/>
+          </a:fontRef>
+        </p:style>
+        <p:txBody>
+          <a:bodyPr rtlCol="0" anchor="ctr"/>
+          <a:lstStyle/>
+          <a:p>
+            <a:r>
+              <a:rPr lang="en-US" altLang="ko-KR" sz="1400"/>
+              <a:t>"hooks": {</a:t>
+            </a:r>
+          </a:p>
+          <a:p>
+            <a:r>
+              <a:rPr lang="en-US" altLang="ko-KR" sz="1400"/>
+              <a:t>    "process": {</a:t>
+            </a:r>
+          </a:p>
+          <a:p>
+            <a:r>
+              <a:rPr lang="en-US" altLang="ko-KR" sz="1400"/>
+              <a:t>          "env": [“CUDA_VERSION=9.0.176”,</a:t>
+            </a:r>
+            <a:br>
+              <a:rPr lang="en-US" altLang="ko-KR" sz="1400"/>
+            </a:br>
+            <a:r>
+              <a:rPr lang="en-US" altLang="ko-KR" sz="1400"/>
+              <a:t>                   “CUDA_PKG_VERSION=9-0=9.0.176-1”,</a:t>
+            </a:r>
+          </a:p>
+          <a:p>
+            <a:r>
+              <a:rPr lang="en-US" altLang="ko-KR" sz="1400"/>
+              <a:t>                   “NVIDIA_VISIBLE_DEVICES=all“,</a:t>
+            </a:r>
+            <a:br>
+              <a:rPr lang="en-US" altLang="ko-KR" sz="1400"/>
+            </a:br>
+            <a:r>
+              <a:rPr lang="en-US" altLang="ko-KR" sz="1400"/>
+              <a:t>                   “NVIDIA_DRIVER_CAPABILITIES=“compute,utility”,</a:t>
+            </a:r>
+          </a:p>
+          <a:p>
+            <a:r>
+              <a:rPr lang="en-US" altLang="ko-KR" sz="1400"/>
+              <a:t>                   "NVIDIA_REQUIRE_CUDA=cuda&gt;=9.0“,</a:t>
+            </a:r>
+            <a:br>
+              <a:rPr lang="en-US" altLang="ko-KR" sz="1400"/>
+            </a:br>
+            <a:r>
+              <a:rPr lang="en-US" altLang="ko-KR" sz="1400"/>
+              <a:t>                   "LD_LIBRARY_PATH=/usr/local/nvidia/lib:/usr/local/nvidia/lib64“</a:t>
+            </a:r>
+          </a:p>
+          <a:p>
+            <a:r>
+              <a:rPr lang="en-US" altLang="ko-KR" sz="1400"/>
+              <a:t>             ]</a:t>
+            </a:r>
+          </a:p>
+          <a:p>
+            <a:r>
+              <a:rPr lang="en-US" altLang="ko-KR" sz="1400"/>
+              <a:t>     }</a:t>
+            </a:r>
+          </a:p>
+          <a:p>
+            <a:r>
+              <a:rPr lang="en-US" altLang="ko-KR" sz="1400"/>
+              <a:t>    "prestart": [</a:t>
+            </a:r>
+          </a:p>
+          <a:p>
+            <a:r>
+              <a:rPr lang="en-US" altLang="ko-KR" sz="1400"/>
+              <a:t>         {</a:t>
+            </a:r>
+          </a:p>
+          <a:p>
+            <a:r>
+              <a:rPr lang="en-US" altLang="ko-KR" sz="1400"/>
+              <a:t>             "path": “/usr/bin/nvidia-container-runtime-hook”,</a:t>
+            </a:r>
+          </a:p>
+          <a:p>
+            <a:r>
+              <a:rPr lang="en-US" altLang="ko-KR" sz="1400"/>
+              <a:t>             "args": ["nvidia-container-runtime-hook ", “prestart"]</a:t>
+            </a:r>
+          </a:p>
+          <a:p>
+            <a:r>
+              <a:rPr lang="en-US" altLang="ko-KR" sz="1400"/>
+              <a:t>         },</a:t>
+            </a:r>
+          </a:p>
+          <a:p>
+            <a:r>
+              <a:rPr lang="en-US" altLang="ko-KR" sz="1400"/>
+              <a:t>    ],</a:t>
+            </a:r>
+          </a:p>
+          <a:p>
+            <a:r>
+              <a:rPr lang="en-US" altLang="ko-KR" sz="1400"/>
+              <a:t>}</a:t>
+            </a:r>
+            <a:endParaRPr lang="en-US" altLang="ko-KR" sz="1400" dirty="0"/>
+          </a:p>
+        </p:txBody>
+      </p:sp>
+      <p:cxnSp>
+        <p:nvCxnSpPr>
+          <p:cNvPr id="9" name="직선 화살표 연결선 8">
+            <a:extLst>
+              <a:ext uri="{FF2B5EF4-FFF2-40B4-BE49-F238E27FC236}">
+                <a16:creationId xmlns:a16="http://schemas.microsoft.com/office/drawing/2014/main" id="{765C919B-0EDF-3301-DFC5-8C1EF831E09C}"/>
+              </a:ext>
+            </a:extLst>
+          </p:cNvPr>
+          <p:cNvCxnSpPr>
+            <a:cxnSpLocks/>
+            <a:stCxn id="7" idx="2"/>
+            <a:endCxn id="11" idx="0"/>
+          </p:cNvCxnSpPr>
+          <p:nvPr/>
+        </p:nvCxnSpPr>
+        <p:spPr>
+          <a:xfrm>
+            <a:off x="4644008" y="692696"/>
+            <a:ext cx="0" cy="222870"/>
+          </a:xfrm>
+          <a:prstGeom prst="straightConnector1">
+            <a:avLst/>
+          </a:prstGeom>
+          <a:ln w="12700">
+            <a:solidFill>
+              <a:schemeClr val="tx1"/>
+            </a:solidFill>
+            <a:headEnd type="none" w="med" len="med"/>
+            <a:tailEnd type="triangle" w="med" len="med"/>
+          </a:ln>
+        </p:spPr>
+        <p:style>
+          <a:lnRef idx="1">
+            <a:schemeClr val="accent1"/>
+          </a:lnRef>
+          <a:fillRef idx="0">
+            <a:schemeClr val="accent1"/>
+          </a:fillRef>
+          <a:effectRef idx="0">
+            <a:schemeClr val="accent1"/>
+          </a:effectRef>
+          <a:fontRef idx="minor">
+            <a:schemeClr val="tx1"/>
+          </a:fontRef>
+        </p:style>
+      </p:cxnSp>
+      <p:sp>
+        <p:nvSpPr>
+          <p:cNvPr id="22" name="사각형: 둥근 모서리 114">
+            <a:extLst>
+              <a:ext uri="{FF2B5EF4-FFF2-40B4-BE49-F238E27FC236}">
+                <a16:creationId xmlns:a16="http://schemas.microsoft.com/office/drawing/2014/main" id="{D7853DE0-49D2-11AD-A222-5CDD76CD3A39}"/>
+              </a:ext>
+            </a:extLst>
+          </p:cNvPr>
+          <p:cNvSpPr/>
+          <p:nvPr/>
+        </p:nvSpPr>
+        <p:spPr>
+          <a:xfrm>
+            <a:off x="3278436" y="4587974"/>
+            <a:ext cx="2731142" cy="433441"/>
+          </a:xfrm>
+          <a:prstGeom prst="roundRect">
+            <a:avLst>
+              <a:gd name="adj" fmla="val 10304"/>
+            </a:avLst>
+          </a:prstGeom>
+          <a:noFill/>
+          <a:ln>
+            <a:noFill/>
+          </a:ln>
+        </p:spPr>
+        <p:style>
+          <a:lnRef idx="2">
+            <a:schemeClr val="dk1"/>
+          </a:lnRef>
+          <a:fillRef idx="1">
+            <a:schemeClr val="lt1"/>
+          </a:fillRef>
+          <a:effectRef idx="0">
+            <a:schemeClr val="dk1"/>
+          </a:effectRef>
+          <a:fontRef idx="minor">
+            <a:schemeClr val="dk1"/>
+          </a:fontRef>
+        </p:style>
+        <p:txBody>
+          <a:bodyPr rtlCol="0" anchor="ctr"/>
+          <a:lstStyle/>
+          <a:p>
+            <a:pPr algn="ctr"/>
+            <a:r>
+              <a:rPr lang="en-US" altLang="ko-KR" sz="1400"/>
+              <a:t>OCI Runtime Spec</a:t>
+            </a:r>
+            <a:endParaRPr lang="en-US" altLang="ko-KR" sz="1400" dirty="0"/>
+          </a:p>
+        </p:txBody>
+      </p:sp>
+    </p:spTree>
+    <p:extLst>
+      <p:ext uri="{BB962C8B-B14F-4D97-AF65-F5344CB8AC3E}">
+        <p14:creationId xmlns:p14="http://schemas.microsoft.com/office/powerpoint/2010/main" val="3377665677"/>
+      </p:ext>
+    </p:extLst>
+  </p:cSld>
+  <p:clrMapOvr>
+    <a:masterClrMapping/>
+  </p:clrMapOvr>
+</p:sld>
+</file>
+
+<file path=ppt/slides/slide11.xml><?xml version="1.0" encoding="utf-8"?>
+<p:sld xmlns:a="http://schemas.openxmlformats.org/drawingml/2006/main" xmlns:r="http://schemas.openxmlformats.org/officeDocument/2006/relationships" xmlns:p="http://schemas.openxmlformats.org/presentationml/2006/main">
+  <p:cSld>
+    <p:spTree>
+      <p:nvGrpSpPr>
+        <p:cNvPr id="1" name="">
+          <a:extLst>
+            <a:ext uri="{FF2B5EF4-FFF2-40B4-BE49-F238E27FC236}">
               <a16:creationId xmlns:a16="http://schemas.microsoft.com/office/drawing/2014/main" id="{BED122ED-3835-3DC0-4352-5EC9D3A5DBE0}"/>
             </a:ext>
           </a:extLst>
@@ -8126,358 +8607,6 @@
     <p:extLst>
       <p:ext uri="{BB962C8B-B14F-4D97-AF65-F5344CB8AC3E}">
         <p14:creationId xmlns:p14="http://schemas.microsoft.com/office/powerpoint/2010/main" val="1318549003"/>
-      </p:ext>
-    </p:extLst>
-  </p:cSld>
-  <p:clrMapOvr>
-    <a:masterClrMapping/>
-  </p:clrMapOvr>
-</p:sld>
-</file>
-
-<file path=ppt/slides/slide11.xml><?xml version="1.0" encoding="utf-8"?>
-<p:sld xmlns:a="http://schemas.openxmlformats.org/drawingml/2006/main" xmlns:r="http://schemas.openxmlformats.org/officeDocument/2006/relationships" xmlns:p="http://schemas.openxmlformats.org/presentationml/2006/main">
-  <p:cSld>
-    <p:spTree>
-      <p:nvGrpSpPr>
-        <p:cNvPr id="1" name=""/>
-        <p:cNvGrpSpPr/>
-        <p:nvPr/>
-      </p:nvGrpSpPr>
-      <p:grpSpPr>
-        <a:xfrm>
-          <a:off x="0" y="0"/>
-          <a:ext cx="0" cy="0"/>
-          <a:chOff x="0" y="0"/>
-          <a:chExt cx="0" cy="0"/>
-        </a:xfrm>
-      </p:grpSpPr>
-      <p:sp>
-        <p:nvSpPr>
-          <p:cNvPr id="2" name="제목 1">
-            <a:extLst>
-              <a:ext uri="{FF2B5EF4-FFF2-40B4-BE49-F238E27FC236}">
-                <a16:creationId xmlns:a16="http://schemas.microsoft.com/office/drawing/2014/main" id="{8738443D-5E72-49E2-86AC-581D61C41C39}"/>
-              </a:ext>
-            </a:extLst>
-          </p:cNvPr>
-          <p:cNvSpPr>
-            <a:spLocks noGrp="1"/>
-          </p:cNvSpPr>
-          <p:nvPr>
-            <p:ph type="title"/>
-          </p:nvPr>
-        </p:nvSpPr>
-        <p:spPr>
-          <a:xfrm>
-            <a:off x="0" y="-92546"/>
-            <a:ext cx="9144000" cy="857250"/>
-          </a:xfrm>
-        </p:spPr>
-        <p:txBody>
-          <a:bodyPr>
-            <a:normAutofit fontScale="90000"/>
-          </a:bodyPr>
-          <a:lstStyle/>
-          <a:p>
-            <a:r>
-              <a:rPr lang="en-US" altLang="ko-KR"/>
-              <a:t>CUDA Container OCI Runtime Spec</a:t>
-            </a:r>
-            <a:endParaRPr lang="ko-KR" altLang="en-US" dirty="0"/>
-          </a:p>
-        </p:txBody>
-      </p:sp>
-      <p:sp>
-        <p:nvSpPr>
-          <p:cNvPr id="7" name="사각형: 둥근 모서리 114">
-            <a:extLst>
-              <a:ext uri="{FF2B5EF4-FFF2-40B4-BE49-F238E27FC236}">
-                <a16:creationId xmlns:a16="http://schemas.microsoft.com/office/drawing/2014/main" id="{E074CAD6-7716-4458-B0D4-1C0318E58F6D}"/>
-              </a:ext>
-            </a:extLst>
-          </p:cNvPr>
-          <p:cNvSpPr/>
-          <p:nvPr/>
-        </p:nvSpPr>
-        <p:spPr>
-          <a:xfrm>
-            <a:off x="2267744" y="698149"/>
-            <a:ext cx="4752528" cy="433441"/>
-          </a:xfrm>
-          <a:prstGeom prst="roundRect">
-            <a:avLst>
-              <a:gd name="adj" fmla="val 0"/>
-            </a:avLst>
-          </a:prstGeom>
-        </p:spPr>
-        <p:style>
-          <a:lnRef idx="2">
-            <a:schemeClr val="dk1"/>
-          </a:lnRef>
-          <a:fillRef idx="1">
-            <a:schemeClr val="lt1"/>
-          </a:fillRef>
-          <a:effectRef idx="0">
-            <a:schemeClr val="dk1"/>
-          </a:effectRef>
-          <a:fontRef idx="minor">
-            <a:schemeClr val="dk1"/>
-          </a:fontRef>
-        </p:style>
-        <p:txBody>
-          <a:bodyPr rtlCol="0" anchor="ctr"/>
-          <a:lstStyle/>
-          <a:p>
-            <a:r>
-              <a:rPr lang="en-US" altLang="ko-KR" sz="1400"/>
-              <a:t># docker run --gpu all nvidia/cuda:9.0-base nvidia-smi</a:t>
-            </a:r>
-            <a:endParaRPr lang="en-US" altLang="ko-KR" sz="1400" dirty="0"/>
-          </a:p>
-        </p:txBody>
-      </p:sp>
-      <p:sp>
-        <p:nvSpPr>
-          <p:cNvPr id="11" name="사각형: 둥근 모서리 114">
-            <a:extLst>
-              <a:ext uri="{FF2B5EF4-FFF2-40B4-BE49-F238E27FC236}">
-                <a16:creationId xmlns:a16="http://schemas.microsoft.com/office/drawing/2014/main" id="{E07F06D4-AF1E-486E-8493-362B4DEDC5E3}"/>
-              </a:ext>
-            </a:extLst>
-          </p:cNvPr>
-          <p:cNvSpPr/>
-          <p:nvPr/>
-        </p:nvSpPr>
-        <p:spPr>
-          <a:xfrm>
-            <a:off x="899592" y="1354461"/>
-            <a:ext cx="7488831" cy="3367380"/>
-          </a:xfrm>
-          <a:prstGeom prst="roundRect">
-            <a:avLst>
-              <a:gd name="adj" fmla="val 0"/>
-            </a:avLst>
-          </a:prstGeom>
-        </p:spPr>
-        <p:style>
-          <a:lnRef idx="2">
-            <a:schemeClr val="dk1"/>
-          </a:lnRef>
-          <a:fillRef idx="1">
-            <a:schemeClr val="lt1"/>
-          </a:fillRef>
-          <a:effectRef idx="0">
-            <a:schemeClr val="dk1"/>
-          </a:effectRef>
-          <a:fontRef idx="minor">
-            <a:schemeClr val="dk1"/>
-          </a:fontRef>
-        </p:style>
-        <p:txBody>
-          <a:bodyPr rtlCol="0" anchor="ctr"/>
-          <a:lstStyle/>
-          <a:p>
-            <a:r>
-              <a:rPr lang="en-US" altLang="ko-KR" sz="1400"/>
-              <a:t>"hooks": {</a:t>
-            </a:r>
-          </a:p>
-          <a:p>
-            <a:r>
-              <a:rPr lang="en-US" altLang="ko-KR" sz="1400"/>
-              <a:t>    "prestart": [</a:t>
-            </a:r>
-          </a:p>
-          <a:p>
-            <a:r>
-              <a:rPr lang="en-US" altLang="ko-KR" sz="1400"/>
-              <a:t>         {</a:t>
-            </a:r>
-          </a:p>
-          <a:p>
-            <a:r>
-              <a:rPr lang="en-US" altLang="ko-KR" sz="1400"/>
-              <a:t>             "path": “/usr/bin/nvidia-container-runtime-hook”,</a:t>
-            </a:r>
-          </a:p>
-          <a:p>
-            <a:r>
-              <a:rPr lang="en-US" altLang="ko-KR" sz="1400"/>
-              <a:t>             "args": ["nvidia-container-runtime-hook ", “prestart"],</a:t>
-            </a:r>
-          </a:p>
-          <a:p>
-            <a:r>
-              <a:rPr lang="en-US" altLang="ko-KR" sz="1400"/>
-              <a:t>             "env": [“CUDA_VERSION=9.0.176”,</a:t>
-            </a:r>
-            <a:br>
-              <a:rPr lang="en-US" altLang="ko-KR" sz="1400"/>
-            </a:br>
-            <a:r>
-              <a:rPr lang="en-US" altLang="ko-KR" sz="1400"/>
-              <a:t>                       “CUDA_PKG_VERSION=9-0=9.0.176-1”,</a:t>
-            </a:r>
-          </a:p>
-          <a:p>
-            <a:r>
-              <a:rPr lang="en-US" altLang="ko-KR" sz="1400"/>
-              <a:t>                       “NVIDIA_VISIBLE_DEVICES=all“,</a:t>
-            </a:r>
-            <a:br>
-              <a:rPr lang="en-US" altLang="ko-KR" sz="1400"/>
-            </a:br>
-            <a:r>
-              <a:rPr lang="en-US" altLang="ko-KR" sz="1400"/>
-              <a:t>                       “NVIDIA_DRIVER_CAPABILITIES=“compute,utility”,</a:t>
-            </a:r>
-          </a:p>
-          <a:p>
-            <a:r>
-              <a:rPr lang="en-US" altLang="ko-KR" sz="1400"/>
-              <a:t>                       "NVIDIA_REQUIRE_CUDA=cuda&gt;=9.0“,</a:t>
-            </a:r>
-            <a:br>
-              <a:rPr lang="en-US" altLang="ko-KR" sz="1400"/>
-            </a:br>
-            <a:r>
-              <a:rPr lang="en-US" altLang="ko-KR" sz="1400"/>
-              <a:t>                       "LD_LIBRARY_PATH=/usr/local/nvidia/lib:/usr/local/nvidia/lib64“</a:t>
-            </a:r>
-          </a:p>
-          <a:p>
-            <a:r>
-              <a:rPr lang="en-US" altLang="ko-KR" sz="1400"/>
-              <a:t>             ]</a:t>
-            </a:r>
-          </a:p>
-          <a:p>
-            <a:r>
-              <a:rPr lang="en-US" altLang="ko-KR" sz="1400"/>
-              <a:t>         },</a:t>
-            </a:r>
-          </a:p>
-          <a:p>
-            <a:r>
-              <a:rPr lang="en-US" altLang="ko-KR" sz="1400"/>
-              <a:t>    ],</a:t>
-            </a:r>
-          </a:p>
-          <a:p>
-            <a:r>
-              <a:rPr lang="en-US" altLang="ko-KR" sz="1400"/>
-              <a:t>}</a:t>
-            </a:r>
-            <a:endParaRPr lang="en-US" altLang="ko-KR" sz="1400" dirty="0"/>
-          </a:p>
-        </p:txBody>
-      </p:sp>
-      <p:cxnSp>
-        <p:nvCxnSpPr>
-          <p:cNvPr id="9" name="직선 화살표 연결선 8">
-            <a:extLst>
-              <a:ext uri="{FF2B5EF4-FFF2-40B4-BE49-F238E27FC236}">
-                <a16:creationId xmlns:a16="http://schemas.microsoft.com/office/drawing/2014/main" id="{D3447036-464F-4C90-9B09-6E8806442451}"/>
-              </a:ext>
-            </a:extLst>
-          </p:cNvPr>
-          <p:cNvCxnSpPr>
-            <a:cxnSpLocks/>
-            <a:stCxn id="7" idx="2"/>
-            <a:endCxn id="11" idx="0"/>
-          </p:cNvCxnSpPr>
-          <p:nvPr/>
-        </p:nvCxnSpPr>
-        <p:spPr>
-          <a:xfrm>
-            <a:off x="4644008" y="1131590"/>
-            <a:ext cx="0" cy="222871"/>
-          </a:xfrm>
-          <a:prstGeom prst="straightConnector1">
-            <a:avLst/>
-          </a:prstGeom>
-          <a:ln w="19050">
-            <a:solidFill>
-              <a:schemeClr val="tx1"/>
-            </a:solidFill>
-            <a:headEnd type="none" w="med" len="med"/>
-            <a:tailEnd type="arrow" w="med" len="med"/>
-          </a:ln>
-        </p:spPr>
-        <p:style>
-          <a:lnRef idx="1">
-            <a:schemeClr val="accent1"/>
-          </a:lnRef>
-          <a:fillRef idx="0">
-            <a:schemeClr val="accent1"/>
-          </a:fillRef>
-          <a:effectRef idx="0">
-            <a:schemeClr val="accent1"/>
-          </a:effectRef>
-          <a:fontRef idx="minor">
-            <a:schemeClr val="tx1"/>
-          </a:fontRef>
-        </p:style>
-      </p:cxnSp>
-      <p:sp>
-        <p:nvSpPr>
-          <p:cNvPr id="22" name="사각형: 둥근 모서리 114">
-            <a:extLst>
-              <a:ext uri="{FF2B5EF4-FFF2-40B4-BE49-F238E27FC236}">
-                <a16:creationId xmlns:a16="http://schemas.microsoft.com/office/drawing/2014/main" id="{0B79FB11-EB5E-48B2-9B7D-2CF7A5759856}"/>
-              </a:ext>
-            </a:extLst>
-          </p:cNvPr>
-          <p:cNvSpPr/>
-          <p:nvPr/>
-        </p:nvSpPr>
-        <p:spPr>
-          <a:xfrm>
-            <a:off x="3278436" y="4658589"/>
-            <a:ext cx="2731142" cy="433441"/>
-          </a:xfrm>
-          <a:prstGeom prst="roundRect">
-            <a:avLst>
-              <a:gd name="adj" fmla="val 10304"/>
-            </a:avLst>
-          </a:prstGeom>
-          <a:noFill/>
-          <a:ln>
-            <a:noFill/>
-          </a:ln>
-        </p:spPr>
-        <p:style>
-          <a:lnRef idx="2">
-            <a:schemeClr val="dk1"/>
-          </a:lnRef>
-          <a:fillRef idx="1">
-            <a:schemeClr val="lt1"/>
-          </a:fillRef>
-          <a:effectRef idx="0">
-            <a:schemeClr val="dk1"/>
-          </a:effectRef>
-          <a:fontRef idx="minor">
-            <a:schemeClr val="dk1"/>
-          </a:fontRef>
-        </p:style>
-        <p:txBody>
-          <a:bodyPr rtlCol="0" anchor="ctr"/>
-          <a:lstStyle/>
-          <a:p>
-            <a:pPr algn="ctr"/>
-            <a:r>
-              <a:rPr lang="en-US" altLang="ko-KR" sz="1400"/>
-              <a:t>OCI Runtime Spec</a:t>
-            </a:r>
-            <a:endParaRPr lang="en-US" altLang="ko-KR" sz="1400" dirty="0"/>
-          </a:p>
-        </p:txBody>
-      </p:sp>
-    </p:spTree>
-    <p:extLst>
-      <p:ext uri="{BB962C8B-B14F-4D97-AF65-F5344CB8AC3E}">
-        <p14:creationId xmlns:p14="http://schemas.microsoft.com/office/powerpoint/2010/main" val="3532445663"/>
       </p:ext>
     </p:extLst>
   </p:cSld>
@@ -8528,6 +8657,358 @@
         </p:spPr>
         <p:txBody>
           <a:bodyPr>
+            <a:normAutofit fontScale="90000"/>
+          </a:bodyPr>
+          <a:lstStyle/>
+          <a:p>
+            <a:r>
+              <a:rPr lang="en-US" altLang="ko-KR"/>
+              <a:t>CUDA Container OCI Runtime Spec</a:t>
+            </a:r>
+            <a:endParaRPr lang="ko-KR" altLang="en-US" dirty="0"/>
+          </a:p>
+        </p:txBody>
+      </p:sp>
+      <p:sp>
+        <p:nvSpPr>
+          <p:cNvPr id="7" name="사각형: 둥근 모서리 114">
+            <a:extLst>
+              <a:ext uri="{FF2B5EF4-FFF2-40B4-BE49-F238E27FC236}">
+                <a16:creationId xmlns:a16="http://schemas.microsoft.com/office/drawing/2014/main" id="{E074CAD6-7716-4458-B0D4-1C0318E58F6D}"/>
+              </a:ext>
+            </a:extLst>
+          </p:cNvPr>
+          <p:cNvSpPr/>
+          <p:nvPr/>
+        </p:nvSpPr>
+        <p:spPr>
+          <a:xfrm>
+            <a:off x="2267744" y="698149"/>
+            <a:ext cx="4752528" cy="433441"/>
+          </a:xfrm>
+          <a:prstGeom prst="roundRect">
+            <a:avLst>
+              <a:gd name="adj" fmla="val 0"/>
+            </a:avLst>
+          </a:prstGeom>
+        </p:spPr>
+        <p:style>
+          <a:lnRef idx="2">
+            <a:schemeClr val="dk1"/>
+          </a:lnRef>
+          <a:fillRef idx="1">
+            <a:schemeClr val="lt1"/>
+          </a:fillRef>
+          <a:effectRef idx="0">
+            <a:schemeClr val="dk1"/>
+          </a:effectRef>
+          <a:fontRef idx="minor">
+            <a:schemeClr val="dk1"/>
+          </a:fontRef>
+        </p:style>
+        <p:txBody>
+          <a:bodyPr rtlCol="0" anchor="ctr"/>
+          <a:lstStyle/>
+          <a:p>
+            <a:r>
+              <a:rPr lang="en-US" altLang="ko-KR" sz="1400"/>
+              <a:t># docker run --gpu all nvidia/cuda:9.0-base nvidia-smi</a:t>
+            </a:r>
+            <a:endParaRPr lang="en-US" altLang="ko-KR" sz="1400" dirty="0"/>
+          </a:p>
+        </p:txBody>
+      </p:sp>
+      <p:sp>
+        <p:nvSpPr>
+          <p:cNvPr id="11" name="사각형: 둥근 모서리 114">
+            <a:extLst>
+              <a:ext uri="{FF2B5EF4-FFF2-40B4-BE49-F238E27FC236}">
+                <a16:creationId xmlns:a16="http://schemas.microsoft.com/office/drawing/2014/main" id="{E07F06D4-AF1E-486E-8493-362B4DEDC5E3}"/>
+              </a:ext>
+            </a:extLst>
+          </p:cNvPr>
+          <p:cNvSpPr/>
+          <p:nvPr/>
+        </p:nvSpPr>
+        <p:spPr>
+          <a:xfrm>
+            <a:off x="899592" y="1354461"/>
+            <a:ext cx="7488831" cy="3367380"/>
+          </a:xfrm>
+          <a:prstGeom prst="roundRect">
+            <a:avLst>
+              <a:gd name="adj" fmla="val 0"/>
+            </a:avLst>
+          </a:prstGeom>
+        </p:spPr>
+        <p:style>
+          <a:lnRef idx="2">
+            <a:schemeClr val="dk1"/>
+          </a:lnRef>
+          <a:fillRef idx="1">
+            <a:schemeClr val="lt1"/>
+          </a:fillRef>
+          <a:effectRef idx="0">
+            <a:schemeClr val="dk1"/>
+          </a:effectRef>
+          <a:fontRef idx="minor">
+            <a:schemeClr val="dk1"/>
+          </a:fontRef>
+        </p:style>
+        <p:txBody>
+          <a:bodyPr rtlCol="0" anchor="ctr"/>
+          <a:lstStyle/>
+          <a:p>
+            <a:r>
+              <a:rPr lang="en-US" altLang="ko-KR" sz="1400"/>
+              <a:t>"hooks": {</a:t>
+            </a:r>
+          </a:p>
+          <a:p>
+            <a:r>
+              <a:rPr lang="en-US" altLang="ko-KR" sz="1400"/>
+              <a:t>    "prestart": [</a:t>
+            </a:r>
+          </a:p>
+          <a:p>
+            <a:r>
+              <a:rPr lang="en-US" altLang="ko-KR" sz="1400"/>
+              <a:t>         {</a:t>
+            </a:r>
+          </a:p>
+          <a:p>
+            <a:r>
+              <a:rPr lang="en-US" altLang="ko-KR" sz="1400"/>
+              <a:t>             "path": “/usr/bin/nvidia-container-runtime-hook”,</a:t>
+            </a:r>
+          </a:p>
+          <a:p>
+            <a:r>
+              <a:rPr lang="en-US" altLang="ko-KR" sz="1400"/>
+              <a:t>             "args": ["nvidia-container-runtime-hook ", “prestart"],</a:t>
+            </a:r>
+          </a:p>
+          <a:p>
+            <a:r>
+              <a:rPr lang="en-US" altLang="ko-KR" sz="1400"/>
+              <a:t>             "env": [“CUDA_VERSION=9.0.176”,</a:t>
+            </a:r>
+            <a:br>
+              <a:rPr lang="en-US" altLang="ko-KR" sz="1400"/>
+            </a:br>
+            <a:r>
+              <a:rPr lang="en-US" altLang="ko-KR" sz="1400"/>
+              <a:t>                       “CUDA_PKG_VERSION=9-0=9.0.176-1”,</a:t>
+            </a:r>
+          </a:p>
+          <a:p>
+            <a:r>
+              <a:rPr lang="en-US" altLang="ko-KR" sz="1400"/>
+              <a:t>                       “NVIDIA_VISIBLE_DEVICES=all“,</a:t>
+            </a:r>
+            <a:br>
+              <a:rPr lang="en-US" altLang="ko-KR" sz="1400"/>
+            </a:br>
+            <a:r>
+              <a:rPr lang="en-US" altLang="ko-KR" sz="1400"/>
+              <a:t>                       “NVIDIA_DRIVER_CAPABILITIES=“compute,utility”,</a:t>
+            </a:r>
+          </a:p>
+          <a:p>
+            <a:r>
+              <a:rPr lang="en-US" altLang="ko-KR" sz="1400"/>
+              <a:t>                       "NVIDIA_REQUIRE_CUDA=cuda&gt;=9.0“,</a:t>
+            </a:r>
+            <a:br>
+              <a:rPr lang="en-US" altLang="ko-KR" sz="1400"/>
+            </a:br>
+            <a:r>
+              <a:rPr lang="en-US" altLang="ko-KR" sz="1400"/>
+              <a:t>                       "LD_LIBRARY_PATH=/usr/local/nvidia/lib:/usr/local/nvidia/lib64“</a:t>
+            </a:r>
+          </a:p>
+          <a:p>
+            <a:r>
+              <a:rPr lang="en-US" altLang="ko-KR" sz="1400"/>
+              <a:t>             ]</a:t>
+            </a:r>
+          </a:p>
+          <a:p>
+            <a:r>
+              <a:rPr lang="en-US" altLang="ko-KR" sz="1400"/>
+              <a:t>         },</a:t>
+            </a:r>
+          </a:p>
+          <a:p>
+            <a:r>
+              <a:rPr lang="en-US" altLang="ko-KR" sz="1400"/>
+              <a:t>    ],</a:t>
+            </a:r>
+          </a:p>
+          <a:p>
+            <a:r>
+              <a:rPr lang="en-US" altLang="ko-KR" sz="1400"/>
+              <a:t>}</a:t>
+            </a:r>
+            <a:endParaRPr lang="en-US" altLang="ko-KR" sz="1400" dirty="0"/>
+          </a:p>
+        </p:txBody>
+      </p:sp>
+      <p:cxnSp>
+        <p:nvCxnSpPr>
+          <p:cNvPr id="9" name="직선 화살표 연결선 8">
+            <a:extLst>
+              <a:ext uri="{FF2B5EF4-FFF2-40B4-BE49-F238E27FC236}">
+                <a16:creationId xmlns:a16="http://schemas.microsoft.com/office/drawing/2014/main" id="{D3447036-464F-4C90-9B09-6E8806442451}"/>
+              </a:ext>
+            </a:extLst>
+          </p:cNvPr>
+          <p:cNvCxnSpPr>
+            <a:cxnSpLocks/>
+            <a:stCxn id="7" idx="2"/>
+            <a:endCxn id="11" idx="0"/>
+          </p:cNvCxnSpPr>
+          <p:nvPr/>
+        </p:nvCxnSpPr>
+        <p:spPr>
+          <a:xfrm>
+            <a:off x="4644008" y="1131590"/>
+            <a:ext cx="0" cy="222871"/>
+          </a:xfrm>
+          <a:prstGeom prst="straightConnector1">
+            <a:avLst/>
+          </a:prstGeom>
+          <a:ln w="19050">
+            <a:solidFill>
+              <a:schemeClr val="tx1"/>
+            </a:solidFill>
+            <a:headEnd type="none" w="med" len="med"/>
+            <a:tailEnd type="arrow" w="med" len="med"/>
+          </a:ln>
+        </p:spPr>
+        <p:style>
+          <a:lnRef idx="1">
+            <a:schemeClr val="accent1"/>
+          </a:lnRef>
+          <a:fillRef idx="0">
+            <a:schemeClr val="accent1"/>
+          </a:fillRef>
+          <a:effectRef idx="0">
+            <a:schemeClr val="accent1"/>
+          </a:effectRef>
+          <a:fontRef idx="minor">
+            <a:schemeClr val="tx1"/>
+          </a:fontRef>
+        </p:style>
+      </p:cxnSp>
+      <p:sp>
+        <p:nvSpPr>
+          <p:cNvPr id="22" name="사각형: 둥근 모서리 114">
+            <a:extLst>
+              <a:ext uri="{FF2B5EF4-FFF2-40B4-BE49-F238E27FC236}">
+                <a16:creationId xmlns:a16="http://schemas.microsoft.com/office/drawing/2014/main" id="{0B79FB11-EB5E-48B2-9B7D-2CF7A5759856}"/>
+              </a:ext>
+            </a:extLst>
+          </p:cNvPr>
+          <p:cNvSpPr/>
+          <p:nvPr/>
+        </p:nvSpPr>
+        <p:spPr>
+          <a:xfrm>
+            <a:off x="3278436" y="4658589"/>
+            <a:ext cx="2731142" cy="433441"/>
+          </a:xfrm>
+          <a:prstGeom prst="roundRect">
+            <a:avLst>
+              <a:gd name="adj" fmla="val 10304"/>
+            </a:avLst>
+          </a:prstGeom>
+          <a:noFill/>
+          <a:ln>
+            <a:noFill/>
+          </a:ln>
+        </p:spPr>
+        <p:style>
+          <a:lnRef idx="2">
+            <a:schemeClr val="dk1"/>
+          </a:lnRef>
+          <a:fillRef idx="1">
+            <a:schemeClr val="lt1"/>
+          </a:fillRef>
+          <a:effectRef idx="0">
+            <a:schemeClr val="dk1"/>
+          </a:effectRef>
+          <a:fontRef idx="minor">
+            <a:schemeClr val="dk1"/>
+          </a:fontRef>
+        </p:style>
+        <p:txBody>
+          <a:bodyPr rtlCol="0" anchor="ctr"/>
+          <a:lstStyle/>
+          <a:p>
+            <a:pPr algn="ctr"/>
+            <a:r>
+              <a:rPr lang="en-US" altLang="ko-KR" sz="1400"/>
+              <a:t>OCI Runtime Spec</a:t>
+            </a:r>
+            <a:endParaRPr lang="en-US" altLang="ko-KR" sz="1400" dirty="0"/>
+          </a:p>
+        </p:txBody>
+      </p:sp>
+    </p:spTree>
+    <p:extLst>
+      <p:ext uri="{BB962C8B-B14F-4D97-AF65-F5344CB8AC3E}">
+        <p14:creationId xmlns:p14="http://schemas.microsoft.com/office/powerpoint/2010/main" val="3532445663"/>
+      </p:ext>
+    </p:extLst>
+  </p:cSld>
+  <p:clrMapOvr>
+    <a:masterClrMapping/>
+  </p:clrMapOvr>
+</p:sld>
+</file>
+
+<file path=ppt/slides/slide13.xml><?xml version="1.0" encoding="utf-8"?>
+<p:sld xmlns:a="http://schemas.openxmlformats.org/drawingml/2006/main" xmlns:r="http://schemas.openxmlformats.org/officeDocument/2006/relationships" xmlns:p="http://schemas.openxmlformats.org/presentationml/2006/main">
+  <p:cSld>
+    <p:spTree>
+      <p:nvGrpSpPr>
+        <p:cNvPr id="1" name=""/>
+        <p:cNvGrpSpPr/>
+        <p:nvPr/>
+      </p:nvGrpSpPr>
+      <p:grpSpPr>
+        <a:xfrm>
+          <a:off x="0" y="0"/>
+          <a:ext cx="0" cy="0"/>
+          <a:chOff x="0" y="0"/>
+          <a:chExt cx="0" cy="0"/>
+        </a:xfrm>
+      </p:grpSpPr>
+      <p:sp>
+        <p:nvSpPr>
+          <p:cNvPr id="2" name="제목 1">
+            <a:extLst>
+              <a:ext uri="{FF2B5EF4-FFF2-40B4-BE49-F238E27FC236}">
+                <a16:creationId xmlns:a16="http://schemas.microsoft.com/office/drawing/2014/main" id="{8738443D-5E72-49E2-86AC-581D61C41C39}"/>
+              </a:ext>
+            </a:extLst>
+          </p:cNvPr>
+          <p:cNvSpPr>
+            <a:spLocks noGrp="1"/>
+          </p:cNvSpPr>
+          <p:nvPr>
+            <p:ph type="title"/>
+          </p:nvPr>
+        </p:nvSpPr>
+        <p:spPr>
+          <a:xfrm>
+            <a:off x="0" y="-92546"/>
+            <a:ext cx="9144000" cy="857250"/>
+          </a:xfrm>
+        </p:spPr>
+        <p:txBody>
+          <a:bodyPr>
             <a:normAutofit/>
           </a:bodyPr>
           <a:lstStyle/>
@@ -9716,7 +10197,7 @@
 </p:sld>
 </file>
 
-<file path=ppt/slides/slide13.xml><?xml version="1.0" encoding="utf-8"?>
+<file path=ppt/slides/slide14.xml><?xml version="1.0" encoding="utf-8"?>
 <p:sld xmlns:a="http://schemas.openxmlformats.org/drawingml/2006/main" xmlns:r="http://schemas.openxmlformats.org/officeDocument/2006/relationships" xmlns:p="http://schemas.openxmlformats.org/presentationml/2006/main">
   <p:cSld>
     <p:spTree>
@@ -11623,7 +12104,7 @@
         </p:nvSpPr>
         <p:spPr>
           <a:xfrm>
-            <a:off x="3856434" y="4243753"/>
+            <a:off x="3707904" y="4171745"/>
             <a:ext cx="2731142" cy="704227"/>
           </a:xfrm>
           <a:prstGeom prst="roundRect">
@@ -11674,7 +12155,7 @@
         </p:nvSpPr>
         <p:spPr>
           <a:xfrm>
-            <a:off x="4252478" y="4547630"/>
+            <a:off x="4103948" y="4475622"/>
             <a:ext cx="1939054" cy="317036"/>
           </a:xfrm>
           <a:prstGeom prst="roundRect">
@@ -11725,7 +12206,7 @@
         </p:nvSpPr>
         <p:spPr>
           <a:xfrm>
-            <a:off x="3851920" y="3166150"/>
+            <a:off x="3703390" y="3094142"/>
             <a:ext cx="2740170" cy="368911"/>
           </a:xfrm>
           <a:prstGeom prst="roundRect">
@@ -11780,7 +12261,7 @@
         </p:nvCxnSpPr>
         <p:spPr>
           <a:xfrm flipH="1" flipV="1">
-            <a:off x="1970382" y="4253066"/>
+            <a:off x="1821852" y="4181058"/>
             <a:ext cx="1886052" cy="342801"/>
           </a:xfrm>
           <a:prstGeom prst="straightConnector1">
@@ -11827,7 +12308,7 @@
         </p:nvCxnSpPr>
         <p:spPr>
           <a:xfrm>
-            <a:off x="5222005" y="3535061"/>
+            <a:off x="5073475" y="3463053"/>
             <a:ext cx="0" cy="708692"/>
           </a:xfrm>
           <a:prstGeom prst="straightConnector1">
@@ -11874,7 +12355,7 @@
         </p:nvCxnSpPr>
         <p:spPr>
           <a:xfrm>
-            <a:off x="5222000" y="2517247"/>
+            <a:off x="5073470" y="2445239"/>
             <a:ext cx="5" cy="648903"/>
           </a:xfrm>
           <a:prstGeom prst="straightConnector1">
@@ -11917,7 +12398,7 @@
         </p:nvSpPr>
         <p:spPr>
           <a:xfrm>
-            <a:off x="3856429" y="2148336"/>
+            <a:off x="3707899" y="2076328"/>
             <a:ext cx="2731142" cy="368911"/>
           </a:xfrm>
           <a:prstGeom prst="roundRect">
@@ -11968,8 +12449,8 @@
         </p:nvSpPr>
         <p:spPr>
           <a:xfrm>
-            <a:off x="4778229" y="2516062"/>
-            <a:ext cx="2731142" cy="368912"/>
+            <a:off x="5201208" y="2444054"/>
+            <a:ext cx="1823567" cy="368912"/>
           </a:xfrm>
           <a:prstGeom prst="roundRect">
             <a:avLst>
@@ -11999,14 +12480,12 @@
           <a:bodyPr rtlCol="0" anchor="ctr"/>
           <a:lstStyle/>
           <a:p>
-            <a:pPr algn="ctr"/>
             <a:r>
               <a:rPr lang="en-US" altLang="ko-KR" sz="1000" i="1"/>
               <a:t>Execute via OCI runtime’s </a:t>
             </a:r>
           </a:p>
           <a:p>
-            <a:pPr algn="ctr"/>
             <a:r>
               <a:rPr lang="en-US" altLang="ko-KR" sz="1000" b="1" i="1"/>
               <a:t>prestart hook</a:t>
@@ -12028,7 +12507,7 @@
         </p:nvSpPr>
         <p:spPr>
           <a:xfrm>
-            <a:off x="4951288" y="3533577"/>
+            <a:off x="5191852" y="3461569"/>
             <a:ext cx="2381421" cy="558237"/>
           </a:xfrm>
           <a:prstGeom prst="roundRect">
@@ -12059,7 +12538,6 @@
           <a:bodyPr rtlCol="0" anchor="ctr"/>
           <a:lstStyle/>
           <a:p>
-            <a:pPr algn="ctr"/>
             <a:r>
               <a:rPr lang="en-US" altLang="ko-KR" sz="1000" i="1"/>
               <a:t>Execute with </a:t>
@@ -12074,7 +12552,6 @@
             </a:r>
           </a:p>
           <a:p>
-            <a:pPr algn="ctr"/>
             <a:r>
               <a:rPr lang="en-US" altLang="ko-KR" sz="1000" i="1"/>
               <a:t>in OCI Runtime Config</a:t>
@@ -12096,7 +12573,7 @@
         </p:nvSpPr>
         <p:spPr>
           <a:xfrm>
-            <a:off x="1009820" y="2796543"/>
+            <a:off x="861290" y="2724535"/>
             <a:ext cx="1921124" cy="1456523"/>
           </a:xfrm>
           <a:prstGeom prst="roundRect">
@@ -12126,14 +12603,14 @@
           <a:p>
             <a:pPr algn="ctr"/>
             <a:r>
-              <a:rPr lang="en-US" altLang="ko-KR" sz="1050">
+              <a:rPr lang="en-US" altLang="ko-KR" sz="1050" b="1">
                 <a:solidFill>
                   <a:schemeClr val="tx1"/>
                 </a:solidFill>
               </a:rPr>
               <a:t>Container</a:t>
             </a:r>
-            <a:endParaRPr lang="en-US" altLang="ko-KR" sz="1050" dirty="0">
+            <a:endParaRPr lang="en-US" altLang="ko-KR" sz="1050" b="1" dirty="0">
               <a:solidFill>
                 <a:schemeClr val="tx1"/>
               </a:solidFill>
@@ -12166,7 +12643,7 @@
         </p:nvSpPr>
         <p:spPr>
           <a:xfrm>
-            <a:off x="2053009" y="1855791"/>
+            <a:off x="1904479" y="1783783"/>
             <a:ext cx="1828120" cy="357931"/>
           </a:xfrm>
           <a:prstGeom prst="roundRect">
@@ -12197,14 +12674,12 @@
           <a:bodyPr rtlCol="0" anchor="ctr"/>
           <a:lstStyle/>
           <a:p>
-            <a:pPr algn="ctr"/>
             <a:r>
               <a:rPr lang="en-US" altLang="ko-KR" sz="1000" i="1"/>
               <a:t>Create namespace (clone()),</a:t>
             </a:r>
           </a:p>
           <a:p>
-            <a:pPr algn="ctr"/>
             <a:r>
               <a:rPr lang="en-US" altLang="ko-KR" sz="1000" i="1"/>
               <a:t>Set rootfs (overlay FS)</a:t>
@@ -12226,7 +12701,7 @@
         </p:nvSpPr>
         <p:spPr>
           <a:xfrm>
-            <a:off x="5082692" y="2429195"/>
+            <a:off x="4934162" y="2357187"/>
             <a:ext cx="261982" cy="245150"/>
           </a:xfrm>
           <a:prstGeom prst="ellipse">
@@ -12275,7 +12750,7 @@
         </p:nvSpPr>
         <p:spPr>
           <a:xfrm>
-            <a:off x="5082692" y="3441849"/>
+            <a:off x="4934162" y="3369841"/>
             <a:ext cx="261982" cy="245150"/>
           </a:xfrm>
           <a:prstGeom prst="ellipse">
@@ -12324,7 +12799,7 @@
         </p:nvSpPr>
         <p:spPr>
           <a:xfrm>
-            <a:off x="3722125" y="4481329"/>
+            <a:off x="3573595" y="4409321"/>
             <a:ext cx="261982" cy="245150"/>
           </a:xfrm>
           <a:prstGeom prst="ellipse">
@@ -12369,7 +12844,7 @@
         </p:nvSpPr>
         <p:spPr>
           <a:xfrm>
-            <a:off x="1192483" y="3385626"/>
+            <a:off x="1043953" y="3313618"/>
             <a:ext cx="1886052" cy="390651"/>
           </a:xfrm>
           <a:prstGeom prst="roundRect">
@@ -12431,7 +12906,7 @@
         </p:nvCxnSpPr>
         <p:spPr>
           <a:xfrm flipH="1">
-            <a:off x="1567011" y="2228547"/>
+            <a:off x="1418481" y="2156539"/>
             <a:ext cx="2289418" cy="567997"/>
           </a:xfrm>
           <a:prstGeom prst="straightConnector1">
@@ -12474,7 +12949,7 @@
         </p:nvSpPr>
         <p:spPr>
           <a:xfrm>
-            <a:off x="3722125" y="2032843"/>
+            <a:off x="3573595" y="1960835"/>
             <a:ext cx="261982" cy="245150"/>
           </a:xfrm>
           <a:prstGeom prst="ellipse">
@@ -12523,8 +12998,8 @@
         </p:nvSpPr>
         <p:spPr>
           <a:xfrm>
-            <a:off x="1788388" y="4606536"/>
-            <a:ext cx="2092741" cy="452194"/>
+            <a:off x="755576" y="4239338"/>
+            <a:ext cx="3442777" cy="452194"/>
           </a:xfrm>
           <a:prstGeom prst="roundRect">
             <a:avLst>
@@ -12554,24 +13029,21 @@
           <a:bodyPr rtlCol="0" anchor="ctr"/>
           <a:lstStyle/>
           <a:p>
-            <a:pPr algn="ctr"/>
             <a:r>
               <a:rPr lang="en-US" altLang="ko-KR" sz="1000" i="1"/>
-              <a:t>Bind mount GPU device file </a:t>
-            </a:r>
-            <a:br>
+              <a:t>- Bind mount GPU device file and CUDA libraries/tools,</a:t>
+            </a:r>
+          </a:p>
+          <a:p>
+            <a:r>
               <a:rPr lang="en-US" altLang="ko-KR" sz="1000" i="1"/>
-            </a:br>
+              <a:t>- Allow GPU Cgroup,</a:t>
+            </a:r>
+          </a:p>
+          <a:p>
             <a:r>
               <a:rPr lang="en-US" altLang="ko-KR" sz="1000" i="1"/>
-              <a:t>and CUDA libraries/tools,</a:t>
-            </a:r>
-          </a:p>
-          <a:p>
-            <a:pPr algn="ctr"/>
-            <a:r>
-              <a:rPr lang="en-US" altLang="ko-KR" sz="1000" i="1"/>
-              <a:t>Load GPU kernel module</a:t>
+              <a:t>- Load GPU kernel module</a:t>
             </a:r>
           </a:p>
         </p:txBody>
@@ -12590,7 +13062,7 @@
         </p:nvSpPr>
         <p:spPr>
           <a:xfrm>
-            <a:off x="7168801" y="2141546"/>
+            <a:off x="7020271" y="2069538"/>
             <a:ext cx="1717863" cy="368911"/>
           </a:xfrm>
           <a:prstGeom prst="roundRect">
@@ -12621,7 +13093,7 @@
             <a:pPr algn="ctr"/>
             <a:r>
               <a:rPr lang="en-US" altLang="ko-KR" sz="1050"/>
-              <a:t>OCI Runtime Config (JSON)</a:t>
+              <a:t>OCI Runtime Config File (JSON)</a:t>
             </a:r>
             <a:endParaRPr lang="en-US" altLang="ko-KR" sz="1050" dirty="0"/>
           </a:p>
@@ -12645,7 +13117,7 @@
         </p:nvCxnSpPr>
         <p:spPr>
           <a:xfrm flipH="1">
-            <a:off x="6587571" y="2326002"/>
+            <a:off x="6439041" y="2253994"/>
             <a:ext cx="581230" cy="6790"/>
           </a:xfrm>
           <a:prstGeom prst="straightConnector1">
@@ -12692,7 +13164,7 @@
         </p:nvCxnSpPr>
         <p:spPr>
           <a:xfrm flipH="1">
-            <a:off x="6592090" y="2326002"/>
+            <a:off x="6443560" y="2253994"/>
             <a:ext cx="576711" cy="1024604"/>
           </a:xfrm>
           <a:prstGeom prst="straightConnector1">
@@ -12739,7 +13211,7 @@
         </p:nvCxnSpPr>
         <p:spPr>
           <a:xfrm flipV="1">
-            <a:off x="1970382" y="2332793"/>
+            <a:off x="1821852" y="2260785"/>
             <a:ext cx="1886047" cy="463751"/>
           </a:xfrm>
           <a:prstGeom prst="straightConnector1">
@@ -12782,7 +13254,7 @@
         </p:nvSpPr>
         <p:spPr>
           <a:xfrm>
-            <a:off x="701489" y="2858699"/>
+            <a:off x="552959" y="2786691"/>
             <a:ext cx="1449638" cy="527623"/>
           </a:xfrm>
           <a:prstGeom prst="roundRect">
@@ -12842,7 +13314,7 @@
         </p:nvSpPr>
         <p:spPr>
           <a:xfrm>
-            <a:off x="1839391" y="2750516"/>
+            <a:off x="1690861" y="2678508"/>
             <a:ext cx="261982" cy="245150"/>
           </a:xfrm>
           <a:prstGeom prst="ellipse">
@@ -12896,7 +13368,7 @@
         </p:nvCxnSpPr>
         <p:spPr>
           <a:xfrm flipH="1">
-            <a:off x="2387043" y="2430592"/>
+            <a:off x="2238513" y="2358584"/>
             <a:ext cx="1464878" cy="366164"/>
           </a:xfrm>
           <a:prstGeom prst="straightConnector1">
@@ -12939,7 +13411,7 @@
         </p:nvSpPr>
         <p:spPr>
           <a:xfrm>
-            <a:off x="3722125" y="2393487"/>
+            <a:off x="3573595" y="2321479"/>
             <a:ext cx="261982" cy="245150"/>
           </a:xfrm>
           <a:prstGeom prst="ellipse">
@@ -12984,8 +13456,8 @@
         </p:nvSpPr>
         <p:spPr>
           <a:xfrm>
-            <a:off x="2944907" y="2623098"/>
-            <a:ext cx="1828120" cy="357931"/>
+            <a:off x="2883404" y="2551090"/>
+            <a:ext cx="1654066" cy="357931"/>
           </a:xfrm>
           <a:prstGeom prst="roundRect">
             <a:avLst>
@@ -13015,7 +13487,6 @@
           <a:bodyPr rtlCol="0" anchor="ctr"/>
           <a:lstStyle/>
           <a:p>
-            <a:pPr algn="ctr"/>
             <a:r>
               <a:rPr lang="en-US" altLang="ko-KR" sz="1000" i="1"/>
               <a:t>Response done prestart hook through FIFO</a:t>
@@ -13037,7 +13508,7 @@
         </p:nvSpPr>
         <p:spPr>
           <a:xfrm>
-            <a:off x="3856429" y="1135907"/>
+            <a:off x="3707899" y="1063899"/>
             <a:ext cx="2731142" cy="368911"/>
           </a:xfrm>
           <a:prstGeom prst="roundRect">
@@ -13092,7 +13563,7 @@
         </p:nvCxnSpPr>
         <p:spPr>
           <a:xfrm>
-            <a:off x="5222000" y="1504818"/>
+            <a:off x="5073470" y="1432810"/>
             <a:ext cx="0" cy="643518"/>
           </a:xfrm>
           <a:prstGeom prst="straightConnector1">
@@ -13135,7 +13606,7 @@
         </p:nvSpPr>
         <p:spPr>
           <a:xfrm>
-            <a:off x="3851920" y="123478"/>
+            <a:off x="3703390" y="51470"/>
             <a:ext cx="2731142" cy="368911"/>
           </a:xfrm>
           <a:prstGeom prst="roundRect">
@@ -13166,7 +13637,7 @@
             <a:pPr algn="ctr"/>
             <a:r>
               <a:rPr lang="en-US" altLang="ko-KR" sz="1050"/>
-              <a:t>containerd/dockerd</a:t>
+              <a:t>containerd</a:t>
             </a:r>
             <a:endParaRPr lang="en-US" altLang="ko-KR" sz="1050" dirty="0"/>
           </a:p>
@@ -13190,7 +13661,7 @@
         </p:nvCxnSpPr>
         <p:spPr>
           <a:xfrm>
-            <a:off x="5217491" y="492389"/>
+            <a:off x="5068961" y="420381"/>
             <a:ext cx="4509" cy="643518"/>
           </a:xfrm>
           <a:prstGeom prst="straightConnector1">
@@ -13237,7 +13708,7 @@
         </p:nvCxnSpPr>
         <p:spPr>
           <a:xfrm>
-            <a:off x="6583062" y="307934"/>
+            <a:off x="6434532" y="235926"/>
             <a:ext cx="1444671" cy="1833612"/>
           </a:xfrm>
           <a:prstGeom prst="straightConnector1">
@@ -13280,7 +13751,7 @@
         </p:nvSpPr>
         <p:spPr>
           <a:xfrm>
-            <a:off x="1009820" y="123478"/>
+            <a:off x="861290" y="51470"/>
             <a:ext cx="1921124" cy="368911"/>
           </a:xfrm>
           <a:prstGeom prst="roundRect">
@@ -13311,7 +13782,7 @@
             <a:pPr algn="ctr"/>
             <a:r>
               <a:rPr lang="en-US" altLang="ko-KR" sz="1050" dirty="0"/>
-              <a:t>ctr/docker</a:t>
+              <a:t>ctr</a:t>
             </a:r>
           </a:p>
         </p:txBody>
@@ -13334,7 +13805,7 @@
         </p:nvCxnSpPr>
         <p:spPr>
           <a:xfrm>
-            <a:off x="2930944" y="307934"/>
+            <a:off x="2782414" y="235926"/>
             <a:ext cx="920976" cy="0"/>
           </a:xfrm>
           <a:prstGeom prst="straightConnector1">
@@ -13377,7 +13848,7 @@
         </p:nvSpPr>
         <p:spPr>
           <a:xfrm>
-            <a:off x="2782414" y="185951"/>
+            <a:off x="2633884" y="113943"/>
             <a:ext cx="261982" cy="245150"/>
           </a:xfrm>
           <a:prstGeom prst="ellipse">
@@ -13426,7 +13897,7 @@
         </p:nvSpPr>
         <p:spPr>
           <a:xfrm>
-            <a:off x="1668514" y="515722"/>
+            <a:off x="1519984" y="443714"/>
             <a:ext cx="2489782" cy="357931"/>
           </a:xfrm>
           <a:prstGeom prst="roundRect">
@@ -13457,14 +13928,12 @@
           <a:bodyPr rtlCol="0" anchor="ctr"/>
           <a:lstStyle/>
           <a:p>
-            <a:pPr algn="ctr"/>
             <a:r>
               <a:rPr lang="en-US" altLang="ko-KR" sz="1000" i="1"/>
               <a:t>Request create container</a:t>
             </a:r>
           </a:p>
           <a:p>
-            <a:pPr algn="ctr"/>
             <a:r>
               <a:rPr lang="en-US" altLang="ko-KR" sz="1000" i="1"/>
               <a:t>with </a:t>
@@ -13494,7 +13963,7 @@
         </p:nvSpPr>
         <p:spPr>
           <a:xfrm>
-            <a:off x="6329612" y="123478"/>
+            <a:off x="6500171" y="51470"/>
             <a:ext cx="2843808" cy="357931"/>
           </a:xfrm>
           <a:prstGeom prst="roundRect">
@@ -13525,14 +13994,12 @@
           <a:bodyPr rtlCol="0" anchor="ctr"/>
           <a:lstStyle/>
           <a:p>
-            <a:pPr algn="ctr"/>
             <a:r>
               <a:rPr lang="en-US" altLang="ko-KR" sz="1000" i="1"/>
               <a:t>Create OCI Runtime Config</a:t>
             </a:r>
           </a:p>
           <a:p>
-            <a:pPr algn="ctr"/>
             <a:r>
               <a:rPr lang="en-US" altLang="ko-KR" sz="1000" i="1"/>
               <a:t>with </a:t>
@@ -13562,7 +14029,7 @@
         </p:nvSpPr>
         <p:spPr>
           <a:xfrm>
-            <a:off x="6447562" y="185951"/>
+            <a:off x="6299032" y="113943"/>
             <a:ext cx="261982" cy="245150"/>
           </a:xfrm>
           <a:prstGeom prst="ellipse">
@@ -13611,7 +14078,7 @@
         </p:nvSpPr>
         <p:spPr>
           <a:xfrm>
-            <a:off x="5061641" y="488750"/>
+            <a:off x="5192770" y="416742"/>
             <a:ext cx="1954122" cy="357931"/>
           </a:xfrm>
           <a:prstGeom prst="roundRect">
@@ -13642,14 +14109,12 @@
           <a:bodyPr rtlCol="0" anchor="ctr"/>
           <a:lstStyle/>
           <a:p>
-            <a:pPr algn="ctr"/>
             <a:r>
               <a:rPr lang="en-US" altLang="ko-KR" sz="1000" i="1"/>
               <a:t>Execute to</a:t>
             </a:r>
           </a:p>
           <a:p>
-            <a:pPr algn="ctr"/>
             <a:r>
               <a:rPr lang="en-US" altLang="ko-KR" sz="1000" i="1"/>
               <a:t>request create container</a:t>
@@ -13671,7 +14136,7 @@
         </p:nvSpPr>
         <p:spPr>
           <a:xfrm>
-            <a:off x="5091009" y="411471"/>
+            <a:off x="4942479" y="339463"/>
             <a:ext cx="261982" cy="245150"/>
           </a:xfrm>
           <a:prstGeom prst="ellipse">
@@ -13724,7 +14189,7 @@
         </p:nvCxnSpPr>
         <p:spPr>
           <a:xfrm>
-            <a:off x="6587571" y="1320363"/>
+            <a:off x="6439041" y="1248355"/>
             <a:ext cx="1440162" cy="821183"/>
           </a:xfrm>
           <a:prstGeom prst="straightConnector1">
@@ -13767,7 +14232,7 @@
         </p:nvSpPr>
         <p:spPr>
           <a:xfrm>
-            <a:off x="6329612" y="1143408"/>
+            <a:off x="6535021" y="1071400"/>
             <a:ext cx="2489782" cy="357931"/>
           </a:xfrm>
           <a:prstGeom prst="roundRect">
@@ -13798,17 +14263,15 @@
           <a:bodyPr rtlCol="0" anchor="ctr"/>
           <a:lstStyle/>
           <a:p>
-            <a:pPr algn="ctr"/>
             <a:r>
               <a:rPr lang="en-US" altLang="ko-KR" sz="1000" i="1"/>
               <a:t>Modify OCI Runtime Config</a:t>
             </a:r>
           </a:p>
           <a:p>
-            <a:pPr algn="ctr"/>
             <a:r>
               <a:rPr lang="en-US" altLang="ko-KR" sz="1000" i="1"/>
-              <a:t>with </a:t>
+              <a:t>to inject </a:t>
             </a:r>
             <a:r>
               <a:rPr lang="en-US" altLang="ko-KR" sz="1000" b="1" i="1"/>
@@ -13831,7 +14294,7 @@
         </p:nvSpPr>
         <p:spPr>
           <a:xfrm>
-            <a:off x="6456580" y="1197787"/>
+            <a:off x="6308050" y="1125779"/>
             <a:ext cx="261982" cy="245150"/>
           </a:xfrm>
           <a:prstGeom prst="ellipse">
@@ -13880,7 +14343,7 @@
         </p:nvSpPr>
         <p:spPr>
           <a:xfrm>
-            <a:off x="5061641" y="1498783"/>
+            <a:off x="5205000" y="1426775"/>
             <a:ext cx="1954122" cy="357931"/>
           </a:xfrm>
           <a:prstGeom prst="roundRect">
@@ -13911,14 +14374,12 @@
           <a:bodyPr rtlCol="0" anchor="ctr"/>
           <a:lstStyle/>
           <a:p>
-            <a:pPr algn="ctr"/>
             <a:r>
               <a:rPr lang="en-US" altLang="ko-KR" sz="1000" i="1"/>
               <a:t>Execute to</a:t>
             </a:r>
           </a:p>
           <a:p>
-            <a:pPr algn="ctr"/>
             <a:r>
               <a:rPr lang="en-US" altLang="ko-KR" sz="1000" i="1"/>
               <a:t>request create container</a:t>
@@ -13940,7 +14401,7 @@
         </p:nvSpPr>
         <p:spPr>
           <a:xfrm>
-            <a:off x="5091009" y="1421504"/>
+            <a:off x="4942479" y="1349496"/>
             <a:ext cx="261982" cy="245150"/>
           </a:xfrm>
           <a:prstGeom prst="ellipse">
@@ -13989,7 +14450,7 @@
         </p:nvSpPr>
         <p:spPr>
           <a:xfrm>
-            <a:off x="3677574" y="4481330"/>
+            <a:off x="3529044" y="4409322"/>
             <a:ext cx="338500" cy="245150"/>
           </a:xfrm>
           <a:prstGeom prst="roundRect">
@@ -14042,7 +14503,7 @@
         </p:nvSpPr>
         <p:spPr>
           <a:xfrm>
-            <a:off x="3677574" y="2397827"/>
+            <a:off x="3529044" y="2325819"/>
             <a:ext cx="338500" cy="245150"/>
           </a:xfrm>
           <a:prstGeom prst="roundRect">
@@ -14095,7 +14556,7 @@
         </p:nvSpPr>
         <p:spPr>
           <a:xfrm>
-            <a:off x="1072006" y="3448477"/>
+            <a:off x="923476" y="3376469"/>
             <a:ext cx="261982" cy="245150"/>
           </a:xfrm>
           <a:prstGeom prst="ellipse">
@@ -14140,7 +14601,7 @@
         </p:nvSpPr>
         <p:spPr>
           <a:xfrm>
-            <a:off x="1027455" y="3452817"/>
+            <a:off x="878925" y="3380809"/>
             <a:ext cx="338500" cy="245150"/>
           </a:xfrm>
           <a:prstGeom prst="roundRect">
@@ -14200,7 +14661,7 @@
         <p:cNvPr id="1" name="">
           <a:extLst>
             <a:ext uri="{FF2B5EF4-FFF2-40B4-BE49-F238E27FC236}">
-              <a16:creationId xmlns:a16="http://schemas.microsoft.com/office/drawing/2014/main" id="{D47006E3-14BF-55C5-19C7-5F69C3DAA1BF}"/>
+              <a16:creationId xmlns:a16="http://schemas.microsoft.com/office/drawing/2014/main" id="{A47A8ED9-2C43-A8C3-5F3B-878B22485496}"/>
             </a:ext>
           </a:extLst>
         </p:cNvPr>
@@ -14220,7 +14681,7 @@
           <p:cNvPr id="2" name="제목 1">
             <a:extLst>
               <a:ext uri="{FF2B5EF4-FFF2-40B4-BE49-F238E27FC236}">
-                <a16:creationId xmlns:a16="http://schemas.microsoft.com/office/drawing/2014/main" id="{C72503FA-17E5-5AE3-085B-3E08955531E7}"/>
+                <a16:creationId xmlns:a16="http://schemas.microsoft.com/office/drawing/2014/main" id="{37E3A3E8-F450-DBD0-7566-81E8F27624EC}"/>
               </a:ext>
             </a:extLst>
           </p:cNvPr>
@@ -14233,19 +14694,19 @@
         </p:nvSpPr>
         <p:spPr>
           <a:xfrm>
-            <a:off x="0" y="-726229"/>
+            <a:off x="0" y="-1028650"/>
             <a:ext cx="9144000" cy="857250"/>
           </a:xfrm>
         </p:spPr>
         <p:txBody>
           <a:bodyPr>
-            <a:normAutofit fontScale="90000"/>
+            <a:normAutofit/>
           </a:bodyPr>
           <a:lstStyle/>
           <a:p>
             <a:r>
               <a:rPr lang="en-US" altLang="ko-KR"/>
-              <a:t>CUDA Container OCI Runtime Spec</a:t>
+              <a:t>CUDA Container Init</a:t>
             </a:r>
             <a:endParaRPr lang="ko-KR" altLang="en-US" dirty="0"/>
           </a:p>
@@ -14253,10 +14714,10 @@
       </p:sp>
       <p:sp>
         <p:nvSpPr>
-          <p:cNvPr id="7" name="사각형: 둥근 모서리 114">
-            <a:extLst>
-              <a:ext uri="{FF2B5EF4-FFF2-40B4-BE49-F238E27FC236}">
-                <a16:creationId xmlns:a16="http://schemas.microsoft.com/office/drawing/2014/main" id="{3A9A9FAD-7393-75E5-FB5E-4B6A1277EAD6}"/>
+          <p:cNvPr id="35" name="사각형: 둥근 모서리 114">
+            <a:extLst>
+              <a:ext uri="{FF2B5EF4-FFF2-40B4-BE49-F238E27FC236}">
+                <a16:creationId xmlns:a16="http://schemas.microsoft.com/office/drawing/2014/main" id="{4EB5716E-86A0-437A-FCD9-B68EC9DD4B47}"/>
               </a:ext>
             </a:extLst>
           </p:cNvPr>
@@ -14265,12 +14726,12 @@
         </p:nvSpPr>
         <p:spPr>
           <a:xfrm>
-            <a:off x="1691680" y="555526"/>
-            <a:ext cx="5904656" cy="433441"/>
+            <a:off x="3707899" y="2280534"/>
+            <a:ext cx="2731142" cy="368911"/>
           </a:xfrm>
           <a:prstGeom prst="roundRect">
             <a:avLst>
-              <a:gd name="adj" fmla="val 0"/>
+              <a:gd name="adj" fmla="val 10304"/>
             </a:avLst>
           </a:prstGeom>
           <a:ln w="12700"/>
@@ -14293,28 +14754,21 @@
           <a:bodyPr rtlCol="0" anchor="ctr"/>
           <a:lstStyle/>
           <a:p>
-            <a:r>
-              <a:rPr lang="en-US" altLang="ko-KR" sz="1100"/>
-              <a:t>$ ctr run --env NVIDIA_VISIBLE_DEVICES=all</a:t>
-            </a:r>
-            <a:r>
-              <a:rPr lang="ko-KR" altLang="en-US" sz="1100"/>
-              <a:t> </a:t>
-            </a:r>
-            <a:r>
-              <a:rPr lang="en-US" altLang="ko-KR" sz="1100"/>
-              <a:t>nvidia/cuda:9.0-base test-gpu nvidia-smi</a:t>
-            </a:r>
-            <a:endParaRPr lang="en-US" altLang="ko-KR" sz="1100" dirty="0"/>
-          </a:p>
-        </p:txBody>
-      </p:sp>
-      <p:sp>
-        <p:nvSpPr>
-          <p:cNvPr id="11" name="사각형: 둥근 모서리 114">
-            <a:extLst>
-              <a:ext uri="{FF2B5EF4-FFF2-40B4-BE49-F238E27FC236}">
-                <a16:creationId xmlns:a16="http://schemas.microsoft.com/office/drawing/2014/main" id="{6CABFD53-A11C-D694-A1D1-C2B792E873C0}"/>
+            <a:pPr algn="ctr"/>
+            <a:r>
+              <a:rPr lang="en-US" altLang="ko-KR" sz="1050"/>
+              <a:t>runc</a:t>
+            </a:r>
+            <a:endParaRPr lang="en-US" altLang="ko-KR" sz="1050" dirty="0"/>
+          </a:p>
+        </p:txBody>
+      </p:sp>
+      <p:sp>
+        <p:nvSpPr>
+          <p:cNvPr id="48" name="사각형: 둥근 모서리 114">
+            <a:extLst>
+              <a:ext uri="{FF2B5EF4-FFF2-40B4-BE49-F238E27FC236}">
+                <a16:creationId xmlns:a16="http://schemas.microsoft.com/office/drawing/2014/main" id="{57AE67AC-D18A-EB66-5AFF-184289DBC9E0}"/>
               </a:ext>
             </a:extLst>
           </p:cNvPr>
@@ -14323,12 +14777,12 @@
         </p:nvSpPr>
         <p:spPr>
           <a:xfrm>
-            <a:off x="899592" y="1211838"/>
-            <a:ext cx="7488831" cy="2880320"/>
+            <a:off x="861290" y="2768453"/>
+            <a:ext cx="1921124" cy="883417"/>
           </a:xfrm>
           <a:prstGeom prst="roundRect">
             <a:avLst>
-              <a:gd name="adj" fmla="val 0"/>
+              <a:gd name="adj" fmla="val 6774"/>
             </a:avLst>
           </a:prstGeom>
           <a:ln w="12700"/>
@@ -14348,260 +14802,117 @@
           </a:fontRef>
         </p:style>
         <p:txBody>
+          <a:bodyPr rtlCol="0" anchor="b"/>
+          <a:lstStyle/>
+          <a:p>
+            <a:pPr algn="ctr"/>
+            <a:r>
+              <a:rPr lang="en-US" altLang="ko-KR" sz="1050" b="1">
+                <a:solidFill>
+                  <a:schemeClr val="tx1"/>
+                </a:solidFill>
+              </a:rPr>
+              <a:t>Container</a:t>
+            </a:r>
+            <a:endParaRPr lang="en-US" altLang="ko-KR" sz="1050" b="1" dirty="0">
+              <a:solidFill>
+                <a:schemeClr val="tx1"/>
+              </a:solidFill>
+            </a:endParaRPr>
+          </a:p>
+          <a:p>
+            <a:pPr algn="ctr"/>
+            <a:r>
+              <a:rPr lang="en-US" altLang="ko-KR" sz="1050">
+                <a:solidFill>
+                  <a:schemeClr val="tx1"/>
+                </a:solidFill>
+              </a:rPr>
+              <a:t>(Namespace, Rootfs)</a:t>
+            </a:r>
+          </a:p>
+        </p:txBody>
+      </p:sp>
+      <p:sp>
+        <p:nvSpPr>
+          <p:cNvPr id="80" name="사각형: 둥근 모서리 114">
+            <a:extLst>
+              <a:ext uri="{FF2B5EF4-FFF2-40B4-BE49-F238E27FC236}">
+                <a16:creationId xmlns:a16="http://schemas.microsoft.com/office/drawing/2014/main" id="{39728405-1F1D-A18A-A2F5-D12C37051CB4}"/>
+              </a:ext>
+            </a:extLst>
+          </p:cNvPr>
+          <p:cNvSpPr/>
+          <p:nvPr/>
+        </p:nvSpPr>
+        <p:spPr>
+          <a:xfrm>
+            <a:off x="1043953" y="2808893"/>
+            <a:ext cx="1886052" cy="390651"/>
+          </a:xfrm>
+          <a:prstGeom prst="roundRect">
+            <a:avLst>
+              <a:gd name="adj" fmla="val 10304"/>
+            </a:avLst>
+          </a:prstGeom>
+          <a:noFill/>
+          <a:ln>
+            <a:noFill/>
+          </a:ln>
+        </p:spPr>
+        <p:style>
+          <a:lnRef idx="2">
+            <a:schemeClr val="dk1"/>
+          </a:lnRef>
+          <a:fillRef idx="1">
+            <a:schemeClr val="lt1"/>
+          </a:fillRef>
+          <a:effectRef idx="0">
+            <a:schemeClr val="dk1"/>
+          </a:effectRef>
+          <a:fontRef idx="minor">
+            <a:schemeClr val="dk1"/>
+          </a:fontRef>
+        </p:style>
+        <p:txBody>
           <a:bodyPr rtlCol="0" anchor="ctr"/>
           <a:lstStyle/>
           <a:p>
-            <a:r>
-              <a:rPr lang="en-US" altLang="ko-KR" sz="1100" kern="0" dirty="0">
-                <a:cs typeface="Al Bayan Plain" pitchFamily="2" charset="-78"/>
-              </a:rPr>
-              <a:t>{</a:t>
-            </a:r>
-          </a:p>
-          <a:p>
-            <a:r>
-              <a:rPr lang="en-US" altLang="ko-KR" sz="1100" kern="0" dirty="0">
-                <a:cs typeface="Al Bayan Plain" pitchFamily="2" charset="-78"/>
-              </a:rPr>
-              <a:t>    "hooks": {</a:t>
-            </a:r>
-          </a:p>
-          <a:p>
-            <a:r>
-              <a:rPr lang="en-US" altLang="ko-KR" sz="1100" kern="0" dirty="0">
-                <a:cs typeface="Al Bayan Plain" pitchFamily="2" charset="-78"/>
-              </a:rPr>
-              <a:t>        "</a:t>
-            </a:r>
-            <a:r>
-              <a:rPr lang="en-US" altLang="ko-KR" sz="1100" kern="0" dirty="0" err="1">
-                <a:cs typeface="Al Bayan Plain" pitchFamily="2" charset="-78"/>
-              </a:rPr>
-              <a:t>Poststart</a:t>
-            </a:r>
-            <a:r>
-              <a:rPr lang="en-US" altLang="ko-KR" sz="1100" kern="0" dirty="0">
-                <a:cs typeface="Al Bayan Plain" pitchFamily="2" charset="-78"/>
-              </a:rPr>
-              <a:t>": [],</a:t>
-            </a:r>
-          </a:p>
-          <a:p>
-            <a:r>
-              <a:rPr lang="en-US" altLang="ko-KR" sz="1100" kern="0" dirty="0">
-                <a:cs typeface="Al Bayan Plain" pitchFamily="2" charset="-78"/>
-              </a:rPr>
-              <a:t>        "</a:t>
-            </a:r>
-            <a:r>
-              <a:rPr lang="en-US" altLang="ko-KR" sz="1100" kern="0" dirty="0" err="1">
-                <a:cs typeface="Al Bayan Plain" pitchFamily="2" charset="-78"/>
-              </a:rPr>
-              <a:t>Poststop</a:t>
-            </a:r>
-            <a:r>
-              <a:rPr lang="en-US" altLang="ko-KR" sz="1100" kern="0" dirty="0">
-                <a:cs typeface="Al Bayan Plain" pitchFamily="2" charset="-78"/>
-              </a:rPr>
-              <a:t>": [],</a:t>
-            </a:r>
-          </a:p>
-          <a:p>
-            <a:r>
-              <a:rPr lang="en-US" altLang="ko-KR" sz="1100" kern="0" dirty="0">
-                <a:cs typeface="Al Bayan Plain" pitchFamily="2" charset="-78"/>
-              </a:rPr>
-              <a:t>        "prestart": [{</a:t>
-            </a:r>
-          </a:p>
-          <a:p>
-            <a:r>
-              <a:rPr lang="en-US" altLang="ko-KR" sz="1100" kern="0" dirty="0">
-                <a:cs typeface="Al Bayan Plain" pitchFamily="2" charset="-78"/>
-              </a:rPr>
-              <a:t>            "</a:t>
-            </a:r>
-            <a:r>
-              <a:rPr lang="en-US" altLang="ko-KR" sz="1100" kern="0" dirty="0" err="1">
-                <a:cs typeface="Al Bayan Plain" pitchFamily="2" charset="-78"/>
-              </a:rPr>
-              <a:t>args</a:t>
-            </a:r>
-            <a:r>
-              <a:rPr lang="en-US" altLang="ko-KR" sz="1100" kern="0" dirty="0">
-                <a:cs typeface="Al Bayan Plain" pitchFamily="2" charset="-78"/>
-              </a:rPr>
-              <a:t>": ["/</a:t>
-            </a:r>
-            <a:r>
-              <a:rPr lang="en-US" altLang="ko-KR" sz="1100" kern="0" dirty="0" err="1">
-                <a:cs typeface="Al Bayan Plain" pitchFamily="2" charset="-78"/>
-              </a:rPr>
-              <a:t>usr</a:t>
-            </a:r>
-            <a:r>
-              <a:rPr lang="en-US" altLang="ko-KR" sz="1100" kern="0" dirty="0">
-                <a:cs typeface="Al Bayan Plain" pitchFamily="2" charset="-78"/>
-              </a:rPr>
-              <a:t>/bin/</a:t>
-            </a:r>
-            <a:r>
-              <a:rPr lang="en-US" altLang="ko-KR" sz="1100" kern="0" dirty="0" err="1">
-                <a:cs typeface="Al Bayan Plain" pitchFamily="2" charset="-78"/>
-              </a:rPr>
-              <a:t>nvidia</a:t>
-            </a:r>
-            <a:r>
-              <a:rPr lang="en-US" altLang="ko-KR" sz="1100" kern="0" dirty="0">
-                <a:cs typeface="Al Bayan Plain" pitchFamily="2" charset="-78"/>
-              </a:rPr>
-              <a:t>-container-runtime-hook", "prestart"],</a:t>
-            </a:r>
-          </a:p>
-          <a:p>
-            <a:r>
-              <a:rPr lang="en-US" altLang="ko-KR" sz="1100" kern="0" dirty="0">
-                <a:cs typeface="Al Bayan Plain" pitchFamily="2" charset="-78"/>
-              </a:rPr>
-              <a:t>            "path": "/</a:t>
-            </a:r>
-            <a:r>
-              <a:rPr lang="en-US" altLang="ko-KR" sz="1100" kern="0" dirty="0" err="1">
-                <a:cs typeface="Al Bayan Plain" pitchFamily="2" charset="-78"/>
-              </a:rPr>
-              <a:t>usr</a:t>
-            </a:r>
-            <a:r>
-              <a:rPr lang="en-US" altLang="ko-KR" sz="1100" kern="0" dirty="0">
-                <a:cs typeface="Al Bayan Plain" pitchFamily="2" charset="-78"/>
-              </a:rPr>
-              <a:t>/bin/</a:t>
-            </a:r>
-            <a:r>
-              <a:rPr lang="en-US" altLang="ko-KR" sz="1100" kern="0" dirty="0" err="1">
-                <a:cs typeface="Al Bayan Plain" pitchFamily="2" charset="-78"/>
-              </a:rPr>
-              <a:t>nvidia</a:t>
-            </a:r>
-            <a:r>
-              <a:rPr lang="en-US" altLang="ko-KR" sz="1100" kern="0" dirty="0">
-                <a:cs typeface="Al Bayan Plain" pitchFamily="2" charset="-78"/>
-              </a:rPr>
-              <a:t>-container-runtime-hook”</a:t>
-            </a:r>
-          </a:p>
-          <a:p>
-            <a:r>
-              <a:rPr lang="en-US" altLang="ko-KR" sz="1100" kern="0" dirty="0">
-                <a:cs typeface="Al Bayan Plain" pitchFamily="2" charset="-78"/>
-              </a:rPr>
-              <a:t>        }]</a:t>
-            </a:r>
-          </a:p>
-          <a:p>
-            <a:r>
-              <a:rPr lang="en-US" altLang="ko-KR" sz="1100" kern="0" dirty="0">
-                <a:cs typeface="Al Bayan Plain" pitchFamily="2" charset="-78"/>
-              </a:rPr>
-              <a:t>    },</a:t>
-            </a:r>
-          </a:p>
-          <a:p>
-            <a:r>
-              <a:rPr lang="en-US" altLang="ko-KR" sz="1100" kern="0" dirty="0">
-                <a:cs typeface="Al Bayan Plain" pitchFamily="2" charset="-78"/>
-              </a:rPr>
-              <a:t>    "process": {</a:t>
-            </a:r>
-          </a:p>
-          <a:p>
-            <a:r>
-              <a:rPr lang="en-US" altLang="ko-KR" sz="1100" kern="0" dirty="0">
-                <a:cs typeface="Al Bayan Plain" pitchFamily="2" charset="-78"/>
-              </a:rPr>
-              <a:t>        “env”: [</a:t>
-            </a:r>
-          </a:p>
-          <a:p>
-            <a:r>
-              <a:rPr lang="en-US" altLang="ko-KR" sz="1100" kern="0" dirty="0">
-                <a:cs typeface="Al Bayan Plain" pitchFamily="2" charset="-78"/>
-              </a:rPr>
-              <a:t>            "</a:t>
-            </a:r>
-            <a:r>
-              <a:rPr lang="en-US" altLang="ko-KR" sz="1100" b="1" kern="0" dirty="0">
-                <a:cs typeface="Al Bayan Plain" pitchFamily="2" charset="-78"/>
-              </a:rPr>
-              <a:t>NVIDIA_VISIBLE_DEVICES</a:t>
-            </a:r>
-            <a:r>
-              <a:rPr lang="en-US" altLang="ko-KR" sz="1100" kern="0" dirty="0">
-                <a:cs typeface="Al Bayan Plain" pitchFamily="2" charset="-78"/>
-              </a:rPr>
-              <a:t>=all",</a:t>
-            </a:r>
-          </a:p>
-          <a:p>
-            <a:r>
-              <a:rPr lang="en-US" altLang="ko-KR" sz="1100" kern="0" dirty="0">
-                <a:cs typeface="Al Bayan Plain" pitchFamily="2" charset="-78"/>
-              </a:rPr>
-              <a:t>            ...</a:t>
+            <a:pPr algn="ctr"/>
+            <a:r>
+              <a:rPr lang="en-US" altLang="ko-KR" sz="1000" i="1"/>
+              <a:t>Change root (pivot_root()),</a:t>
             </a:r>
             <a:br>
-              <a:rPr lang="en-US" altLang="ko-KR" sz="1100" kern="0" dirty="0">
-                <a:cs typeface="Al Bayan Plain" pitchFamily="2" charset="-78"/>
-              </a:rPr>
+              <a:rPr lang="en-US" altLang="ko-KR" sz="1000" i="1"/>
             </a:br>
             <a:r>
-              <a:rPr lang="en-US" altLang="ko-KR" sz="1100" kern="0" dirty="0">
-                <a:cs typeface="Al Bayan Plain" pitchFamily="2" charset="-78"/>
-              </a:rPr>
-              <a:t>        ]</a:t>
-            </a:r>
-          </a:p>
-          <a:p>
-            <a:r>
-              <a:rPr lang="en-US" altLang="ko-KR" sz="1100" kern="0" dirty="0">
-                <a:cs typeface="Al Bayan Plain" pitchFamily="2" charset="-78"/>
-              </a:rPr>
-              <a:t>    }</a:t>
-            </a:r>
-          </a:p>
-          <a:p>
-            <a:r>
-              <a:rPr lang="en-US" altLang="ko-KR" sz="1100" kern="0" dirty="0">
-                <a:cs typeface="Al Bayan Plain" pitchFamily="2" charset="-78"/>
-              </a:rPr>
-              <a:t>...</a:t>
-            </a:r>
-            <a:endParaRPr lang="en-US" altLang="ko-KR" sz="1600" kern="0" dirty="0">
-              <a:cs typeface="Al Bayan Plain" pitchFamily="2" charset="-78"/>
-            </a:endParaRPr>
+              <a:rPr lang="en-US" altLang="ko-KR" sz="1000" i="1"/>
+              <a:t>Exec app (exec())</a:t>
+            </a:r>
           </a:p>
         </p:txBody>
       </p:sp>
       <p:cxnSp>
         <p:nvCxnSpPr>
-          <p:cNvPr id="9" name="직선 화살표 연결선 8">
-            <a:extLst>
-              <a:ext uri="{FF2B5EF4-FFF2-40B4-BE49-F238E27FC236}">
-                <a16:creationId xmlns:a16="http://schemas.microsoft.com/office/drawing/2014/main" id="{E2C29F7C-E831-83D2-6BE9-5A7252F4071B}"/>
+          <p:cNvPr id="97" name="직선 화살표 연결선 96">
+            <a:extLst>
+              <a:ext uri="{FF2B5EF4-FFF2-40B4-BE49-F238E27FC236}">
+                <a16:creationId xmlns:a16="http://schemas.microsoft.com/office/drawing/2014/main" id="{C7C2E4CB-854E-A709-8761-4A89AE25BDEE}"/>
               </a:ext>
             </a:extLst>
           </p:cNvPr>
           <p:cNvCxnSpPr>
             <a:cxnSpLocks/>
-            <a:stCxn id="7" idx="2"/>
-            <a:endCxn id="11" idx="0"/>
+            <a:stCxn id="35" idx="1"/>
+            <a:endCxn id="48" idx="0"/>
           </p:cNvCxnSpPr>
           <p:nvPr/>
         </p:nvCxnSpPr>
         <p:spPr>
-          <a:xfrm>
-            <a:off x="4644008" y="988967"/>
-            <a:ext cx="0" cy="222871"/>
+          <a:xfrm flipH="1">
+            <a:off x="1821852" y="2464990"/>
+            <a:ext cx="1886047" cy="303463"/>
           </a:xfrm>
           <a:prstGeom prst="straightConnector1">
             <a:avLst/>
@@ -14631,10 +14942,10 @@
       </p:cxnSp>
       <p:sp>
         <p:nvSpPr>
-          <p:cNvPr id="22" name="사각형: 둥근 모서리 114">
-            <a:extLst>
-              <a:ext uri="{FF2B5EF4-FFF2-40B4-BE49-F238E27FC236}">
-                <a16:creationId xmlns:a16="http://schemas.microsoft.com/office/drawing/2014/main" id="{11FE6D81-54D3-433F-201E-86F85E0C5348}"/>
+          <p:cNvPr id="70" name="타원 69">
+            <a:extLst>
+              <a:ext uri="{FF2B5EF4-FFF2-40B4-BE49-F238E27FC236}">
+                <a16:creationId xmlns:a16="http://schemas.microsoft.com/office/drawing/2014/main" id="{6E21B1AF-6674-F4A2-058C-6CB3DF2B5482}"/>
               </a:ext>
             </a:extLst>
           </p:cNvPr>
@@ -14643,14 +14954,550 @@
         </p:nvSpPr>
         <p:spPr>
           <a:xfrm>
-            <a:off x="3278436" y="4098308"/>
-            <a:ext cx="2731142" cy="281881"/>
+            <a:off x="3573595" y="2549283"/>
+            <a:ext cx="261982" cy="245150"/>
+          </a:xfrm>
+          <a:prstGeom prst="ellipse">
+            <a:avLst/>
+          </a:prstGeom>
+          <a:ln w="12700"/>
+        </p:spPr>
+        <p:style>
+          <a:lnRef idx="2">
+            <a:schemeClr val="dk1"/>
+          </a:lnRef>
+          <a:fillRef idx="1">
+            <a:schemeClr val="lt1"/>
+          </a:fillRef>
+          <a:effectRef idx="0">
+            <a:schemeClr val="dk1"/>
+          </a:effectRef>
+          <a:fontRef idx="minor">
+            <a:schemeClr val="dk1"/>
+          </a:fontRef>
+        </p:style>
+        <p:txBody>
+          <a:bodyPr rtlCol="0" anchor="ctr"/>
+          <a:lstStyle/>
+          <a:p>
+            <a:pPr algn="ctr"/>
+            <a:r>
+              <a:rPr lang="en-US" altLang="ko-KR" sz="1000"/>
+              <a:t>6</a:t>
+            </a:r>
+            <a:endParaRPr lang="ko-KR" altLang="en-US" sz="1000"/>
+          </a:p>
+        </p:txBody>
+      </p:sp>
+      <p:sp>
+        <p:nvSpPr>
+          <p:cNvPr id="4" name="사각형: 둥근 모서리 114">
+            <a:extLst>
+              <a:ext uri="{FF2B5EF4-FFF2-40B4-BE49-F238E27FC236}">
+                <a16:creationId xmlns:a16="http://schemas.microsoft.com/office/drawing/2014/main" id="{B17E342C-685C-7D26-453C-5C5A0B7E3CF3}"/>
+              </a:ext>
+            </a:extLst>
+          </p:cNvPr>
+          <p:cNvSpPr/>
+          <p:nvPr/>
+        </p:nvSpPr>
+        <p:spPr>
+          <a:xfrm>
+            <a:off x="7020271" y="2273744"/>
+            <a:ext cx="1717863" cy="368911"/>
           </a:xfrm>
           <a:prstGeom prst="roundRect">
             <a:avLst>
               <a:gd name="adj" fmla="val 10304"/>
             </a:avLst>
           </a:prstGeom>
+          <a:ln w="12700"/>
+        </p:spPr>
+        <p:style>
+          <a:lnRef idx="2">
+            <a:schemeClr val="dk1"/>
+          </a:lnRef>
+          <a:fillRef idx="1">
+            <a:schemeClr val="lt1"/>
+          </a:fillRef>
+          <a:effectRef idx="0">
+            <a:schemeClr val="dk1"/>
+          </a:effectRef>
+          <a:fontRef idx="minor">
+            <a:schemeClr val="dk1"/>
+          </a:fontRef>
+        </p:style>
+        <p:txBody>
+          <a:bodyPr rtlCol="0" anchor="ctr"/>
+          <a:lstStyle/>
+          <a:p>
+            <a:pPr algn="ctr"/>
+            <a:r>
+              <a:rPr lang="en-US" altLang="ko-KR" sz="1050"/>
+              <a:t>OCI Runtime Config (JSON)</a:t>
+            </a:r>
+            <a:endParaRPr lang="en-US" altLang="ko-KR" sz="1050" dirty="0"/>
+          </a:p>
+        </p:txBody>
+      </p:sp>
+      <p:cxnSp>
+        <p:nvCxnSpPr>
+          <p:cNvPr id="5" name="직선 화살표 연결선 17">
+            <a:extLst>
+              <a:ext uri="{FF2B5EF4-FFF2-40B4-BE49-F238E27FC236}">
+                <a16:creationId xmlns:a16="http://schemas.microsoft.com/office/drawing/2014/main" id="{41FB13E3-F7CE-FDAB-1F86-DBF3B8B5145A}"/>
+              </a:ext>
+            </a:extLst>
+          </p:cNvPr>
+          <p:cNvCxnSpPr>
+            <a:cxnSpLocks/>
+            <a:stCxn id="4" idx="1"/>
+            <a:endCxn id="35" idx="3"/>
+          </p:cNvCxnSpPr>
+          <p:nvPr/>
+        </p:nvCxnSpPr>
+        <p:spPr>
+          <a:xfrm flipH="1">
+            <a:off x="6439041" y="2458200"/>
+            <a:ext cx="581230" cy="6790"/>
+          </a:xfrm>
+          <a:prstGeom prst="straightConnector1">
+            <a:avLst/>
+          </a:prstGeom>
+          <a:ln w="12700">
+            <a:solidFill>
+              <a:schemeClr val="tx1"/>
+            </a:solidFill>
+            <a:headEnd type="none" w="med" len="med"/>
+            <a:tailEnd type="triangle" w="med" len="med"/>
+          </a:ln>
+        </p:spPr>
+        <p:style>
+          <a:lnRef idx="1">
+            <a:schemeClr val="accent1"/>
+          </a:lnRef>
+          <a:fillRef idx="0">
+            <a:schemeClr val="accent1"/>
+          </a:fillRef>
+          <a:effectRef idx="0">
+            <a:schemeClr val="accent1"/>
+          </a:effectRef>
+          <a:fontRef idx="minor">
+            <a:schemeClr val="tx1"/>
+          </a:fontRef>
+        </p:style>
+      </p:cxnSp>
+      <p:sp>
+        <p:nvSpPr>
+          <p:cNvPr id="9" name="사각형: 둥근 모서리 114">
+            <a:extLst>
+              <a:ext uri="{FF2B5EF4-FFF2-40B4-BE49-F238E27FC236}">
+                <a16:creationId xmlns:a16="http://schemas.microsoft.com/office/drawing/2014/main" id="{E480179C-03C4-49B4-C70C-1DA34E8661A5}"/>
+              </a:ext>
+            </a:extLst>
+          </p:cNvPr>
+          <p:cNvSpPr/>
+          <p:nvPr/>
+        </p:nvSpPr>
+        <p:spPr>
+          <a:xfrm>
+            <a:off x="3707899" y="1268105"/>
+            <a:ext cx="2731142" cy="368911"/>
+          </a:xfrm>
+          <a:prstGeom prst="roundRect">
+            <a:avLst>
+              <a:gd name="adj" fmla="val 10304"/>
+            </a:avLst>
+          </a:prstGeom>
+          <a:ln w="12700"/>
+        </p:spPr>
+        <p:style>
+          <a:lnRef idx="2">
+            <a:schemeClr val="dk1"/>
+          </a:lnRef>
+          <a:fillRef idx="1">
+            <a:schemeClr val="lt1"/>
+          </a:fillRef>
+          <a:effectRef idx="0">
+            <a:schemeClr val="dk1"/>
+          </a:effectRef>
+          <a:fontRef idx="minor">
+            <a:schemeClr val="dk1"/>
+          </a:fontRef>
+        </p:style>
+        <p:txBody>
+          <a:bodyPr rtlCol="0" anchor="ctr"/>
+          <a:lstStyle/>
+          <a:p>
+            <a:pPr algn="ctr"/>
+            <a:r>
+              <a:rPr lang="en-US" altLang="ko-KR" sz="1050"/>
+              <a:t>nvidia-container-runtime (Shim)</a:t>
+            </a:r>
+            <a:endParaRPr lang="en-US" altLang="ko-KR" sz="1050" dirty="0"/>
+          </a:p>
+        </p:txBody>
+      </p:sp>
+      <p:cxnSp>
+        <p:nvCxnSpPr>
+          <p:cNvPr id="10" name="직선 화살표 연결선 9">
+            <a:extLst>
+              <a:ext uri="{FF2B5EF4-FFF2-40B4-BE49-F238E27FC236}">
+                <a16:creationId xmlns:a16="http://schemas.microsoft.com/office/drawing/2014/main" id="{57990544-63CF-0DCC-30E0-BDB617CE252E}"/>
+              </a:ext>
+            </a:extLst>
+          </p:cNvPr>
+          <p:cNvCxnSpPr>
+            <a:cxnSpLocks/>
+            <a:stCxn id="9" idx="2"/>
+            <a:endCxn id="35" idx="0"/>
+          </p:cNvCxnSpPr>
+          <p:nvPr/>
+        </p:nvCxnSpPr>
+        <p:spPr>
+          <a:xfrm>
+            <a:off x="5073470" y="1637016"/>
+            <a:ext cx="0" cy="643518"/>
+          </a:xfrm>
+          <a:prstGeom prst="straightConnector1">
+            <a:avLst/>
+          </a:prstGeom>
+          <a:ln w="12700">
+            <a:solidFill>
+              <a:schemeClr val="tx1"/>
+            </a:solidFill>
+            <a:headEnd type="none" w="med" len="med"/>
+            <a:tailEnd type="triangle" w="med" len="med"/>
+          </a:ln>
+        </p:spPr>
+        <p:style>
+          <a:lnRef idx="1">
+            <a:schemeClr val="accent1"/>
+          </a:lnRef>
+          <a:fillRef idx="0">
+            <a:schemeClr val="accent1"/>
+          </a:fillRef>
+          <a:effectRef idx="0">
+            <a:schemeClr val="accent1"/>
+          </a:effectRef>
+          <a:fontRef idx="minor">
+            <a:schemeClr val="tx1"/>
+          </a:fontRef>
+        </p:style>
+      </p:cxnSp>
+      <p:sp>
+        <p:nvSpPr>
+          <p:cNvPr id="14" name="사각형: 둥근 모서리 114">
+            <a:extLst>
+              <a:ext uri="{FF2B5EF4-FFF2-40B4-BE49-F238E27FC236}">
+                <a16:creationId xmlns:a16="http://schemas.microsoft.com/office/drawing/2014/main" id="{5FB10CCC-92E6-FBFA-1C8E-8EED88A10B60}"/>
+              </a:ext>
+            </a:extLst>
+          </p:cNvPr>
+          <p:cNvSpPr/>
+          <p:nvPr/>
+        </p:nvSpPr>
+        <p:spPr>
+          <a:xfrm>
+            <a:off x="3703390" y="255676"/>
+            <a:ext cx="2731142" cy="368911"/>
+          </a:xfrm>
+          <a:prstGeom prst="roundRect">
+            <a:avLst>
+              <a:gd name="adj" fmla="val 10304"/>
+            </a:avLst>
+          </a:prstGeom>
+          <a:ln w="12700"/>
+        </p:spPr>
+        <p:style>
+          <a:lnRef idx="2">
+            <a:schemeClr val="dk1"/>
+          </a:lnRef>
+          <a:fillRef idx="1">
+            <a:schemeClr val="lt1"/>
+          </a:fillRef>
+          <a:effectRef idx="0">
+            <a:schemeClr val="dk1"/>
+          </a:effectRef>
+          <a:fontRef idx="minor">
+            <a:schemeClr val="dk1"/>
+          </a:fontRef>
+        </p:style>
+        <p:txBody>
+          <a:bodyPr rtlCol="0" anchor="ctr"/>
+          <a:lstStyle/>
+          <a:p>
+            <a:pPr algn="ctr"/>
+            <a:r>
+              <a:rPr lang="en-US" altLang="ko-KR" sz="1050"/>
+              <a:t>containerd</a:t>
+            </a:r>
+            <a:endParaRPr lang="en-US" altLang="ko-KR" sz="1050" dirty="0"/>
+          </a:p>
+        </p:txBody>
+      </p:sp>
+      <p:cxnSp>
+        <p:nvCxnSpPr>
+          <p:cNvPr id="15" name="직선 화살표 연결선 14">
+            <a:extLst>
+              <a:ext uri="{FF2B5EF4-FFF2-40B4-BE49-F238E27FC236}">
+                <a16:creationId xmlns:a16="http://schemas.microsoft.com/office/drawing/2014/main" id="{2E491C69-6D80-3C26-61C8-D8983D96997D}"/>
+              </a:ext>
+            </a:extLst>
+          </p:cNvPr>
+          <p:cNvCxnSpPr>
+            <a:cxnSpLocks/>
+            <a:stCxn id="14" idx="2"/>
+            <a:endCxn id="9" idx="0"/>
+          </p:cNvCxnSpPr>
+          <p:nvPr/>
+        </p:nvCxnSpPr>
+        <p:spPr>
+          <a:xfrm>
+            <a:off x="5068961" y="624587"/>
+            <a:ext cx="4509" cy="643518"/>
+          </a:xfrm>
+          <a:prstGeom prst="straightConnector1">
+            <a:avLst/>
+          </a:prstGeom>
+          <a:ln w="12700">
+            <a:solidFill>
+              <a:schemeClr val="tx1"/>
+            </a:solidFill>
+            <a:headEnd type="none" w="med" len="med"/>
+            <a:tailEnd type="triangle" w="med" len="med"/>
+          </a:ln>
+        </p:spPr>
+        <p:style>
+          <a:lnRef idx="1">
+            <a:schemeClr val="accent1"/>
+          </a:lnRef>
+          <a:fillRef idx="0">
+            <a:schemeClr val="accent1"/>
+          </a:fillRef>
+          <a:effectRef idx="0">
+            <a:schemeClr val="accent1"/>
+          </a:effectRef>
+          <a:fontRef idx="minor">
+            <a:schemeClr val="tx1"/>
+          </a:fontRef>
+        </p:style>
+      </p:cxnSp>
+      <p:cxnSp>
+        <p:nvCxnSpPr>
+          <p:cNvPr id="68" name="직선 화살표 연결선 67">
+            <a:extLst>
+              <a:ext uri="{FF2B5EF4-FFF2-40B4-BE49-F238E27FC236}">
+                <a16:creationId xmlns:a16="http://schemas.microsoft.com/office/drawing/2014/main" id="{0E8B30AE-DE2B-14B6-2FAF-10B1554B7B93}"/>
+              </a:ext>
+            </a:extLst>
+          </p:cNvPr>
+          <p:cNvCxnSpPr>
+            <a:cxnSpLocks/>
+            <a:stCxn id="14" idx="3"/>
+            <a:endCxn id="4" idx="0"/>
+          </p:cNvCxnSpPr>
+          <p:nvPr/>
+        </p:nvCxnSpPr>
+        <p:spPr>
+          <a:xfrm>
+            <a:off x="6434532" y="440132"/>
+            <a:ext cx="1444671" cy="1833612"/>
+          </a:xfrm>
+          <a:prstGeom prst="straightConnector1">
+            <a:avLst/>
+          </a:prstGeom>
+          <a:ln w="12700">
+            <a:solidFill>
+              <a:schemeClr val="tx1"/>
+            </a:solidFill>
+            <a:headEnd type="none" w="med" len="med"/>
+            <a:tailEnd type="triangle" w="med" len="med"/>
+          </a:ln>
+        </p:spPr>
+        <p:style>
+          <a:lnRef idx="1">
+            <a:schemeClr val="accent1"/>
+          </a:lnRef>
+          <a:fillRef idx="0">
+            <a:schemeClr val="accent1"/>
+          </a:fillRef>
+          <a:effectRef idx="0">
+            <a:schemeClr val="accent1"/>
+          </a:effectRef>
+          <a:fontRef idx="minor">
+            <a:schemeClr val="tx1"/>
+          </a:fontRef>
+        </p:style>
+      </p:cxnSp>
+      <p:sp>
+        <p:nvSpPr>
+          <p:cNvPr id="77" name="사각형: 둥근 모서리 114">
+            <a:extLst>
+              <a:ext uri="{FF2B5EF4-FFF2-40B4-BE49-F238E27FC236}">
+                <a16:creationId xmlns:a16="http://schemas.microsoft.com/office/drawing/2014/main" id="{16643572-A6BC-9E6D-59E4-B23BE3EBEBB9}"/>
+              </a:ext>
+            </a:extLst>
+          </p:cNvPr>
+          <p:cNvSpPr/>
+          <p:nvPr/>
+        </p:nvSpPr>
+        <p:spPr>
+          <a:xfrm>
+            <a:off x="861290" y="255676"/>
+            <a:ext cx="1921124" cy="368911"/>
+          </a:xfrm>
+          <a:prstGeom prst="roundRect">
+            <a:avLst>
+              <a:gd name="adj" fmla="val 10304"/>
+            </a:avLst>
+          </a:prstGeom>
+          <a:ln w="12700"/>
+        </p:spPr>
+        <p:style>
+          <a:lnRef idx="2">
+            <a:schemeClr val="dk1"/>
+          </a:lnRef>
+          <a:fillRef idx="1">
+            <a:schemeClr val="lt1"/>
+          </a:fillRef>
+          <a:effectRef idx="0">
+            <a:schemeClr val="dk1"/>
+          </a:effectRef>
+          <a:fontRef idx="minor">
+            <a:schemeClr val="dk1"/>
+          </a:fontRef>
+        </p:style>
+        <p:txBody>
+          <a:bodyPr rtlCol="0" anchor="ctr"/>
+          <a:lstStyle/>
+          <a:p>
+            <a:pPr algn="ctr"/>
+            <a:r>
+              <a:rPr lang="en-US" altLang="ko-KR" sz="1050" dirty="0"/>
+              <a:t>ctr</a:t>
+            </a:r>
+          </a:p>
+        </p:txBody>
+      </p:sp>
+      <p:cxnSp>
+        <p:nvCxnSpPr>
+          <p:cNvPr id="78" name="직선 화살표 연결선 77">
+            <a:extLst>
+              <a:ext uri="{FF2B5EF4-FFF2-40B4-BE49-F238E27FC236}">
+                <a16:creationId xmlns:a16="http://schemas.microsoft.com/office/drawing/2014/main" id="{81BF1270-AA5E-A47C-6F6E-4C995F1C6684}"/>
+              </a:ext>
+            </a:extLst>
+          </p:cNvPr>
+          <p:cNvCxnSpPr>
+            <a:cxnSpLocks/>
+            <a:stCxn id="77" idx="3"/>
+            <a:endCxn id="14" idx="1"/>
+          </p:cNvCxnSpPr>
+          <p:nvPr/>
+        </p:nvCxnSpPr>
+        <p:spPr>
+          <a:xfrm>
+            <a:off x="2782414" y="440132"/>
+            <a:ext cx="920976" cy="0"/>
+          </a:xfrm>
+          <a:prstGeom prst="straightConnector1">
+            <a:avLst/>
+          </a:prstGeom>
+          <a:ln w="12700">
+            <a:solidFill>
+              <a:schemeClr val="tx1"/>
+            </a:solidFill>
+            <a:headEnd type="none" w="med" len="med"/>
+            <a:tailEnd type="triangle" w="med" len="med"/>
+          </a:ln>
+        </p:spPr>
+        <p:style>
+          <a:lnRef idx="1">
+            <a:schemeClr val="accent1"/>
+          </a:lnRef>
+          <a:fillRef idx="0">
+            <a:schemeClr val="accent1"/>
+          </a:fillRef>
+          <a:effectRef idx="0">
+            <a:schemeClr val="accent1"/>
+          </a:effectRef>
+          <a:fontRef idx="minor">
+            <a:schemeClr val="tx1"/>
+          </a:fontRef>
+        </p:style>
+      </p:cxnSp>
+      <p:sp>
+        <p:nvSpPr>
+          <p:cNvPr id="84" name="타원 83">
+            <a:extLst>
+              <a:ext uri="{FF2B5EF4-FFF2-40B4-BE49-F238E27FC236}">
+                <a16:creationId xmlns:a16="http://schemas.microsoft.com/office/drawing/2014/main" id="{773FAB8A-5EAD-2987-06EB-58C1E8A944D2}"/>
+              </a:ext>
+            </a:extLst>
+          </p:cNvPr>
+          <p:cNvSpPr/>
+          <p:nvPr/>
+        </p:nvSpPr>
+        <p:spPr>
+          <a:xfrm>
+            <a:off x="2633884" y="318149"/>
+            <a:ext cx="261982" cy="245150"/>
+          </a:xfrm>
+          <a:prstGeom prst="ellipse">
+            <a:avLst/>
+          </a:prstGeom>
+          <a:ln w="12700"/>
+        </p:spPr>
+        <p:style>
+          <a:lnRef idx="2">
+            <a:schemeClr val="dk1"/>
+          </a:lnRef>
+          <a:fillRef idx="1">
+            <a:schemeClr val="lt1"/>
+          </a:fillRef>
+          <a:effectRef idx="0">
+            <a:schemeClr val="dk1"/>
+          </a:effectRef>
+          <a:fontRef idx="minor">
+            <a:schemeClr val="dk1"/>
+          </a:fontRef>
+        </p:style>
+        <p:txBody>
+          <a:bodyPr rtlCol="0" anchor="ctr"/>
+          <a:lstStyle/>
+          <a:p>
+            <a:pPr algn="ctr"/>
+            <a:r>
+              <a:rPr lang="en-US" altLang="ko-KR" sz="1000"/>
+              <a:t>1</a:t>
+            </a:r>
+            <a:endParaRPr lang="ko-KR" altLang="en-US" sz="1000"/>
+          </a:p>
+        </p:txBody>
+      </p:sp>
+      <p:sp>
+        <p:nvSpPr>
+          <p:cNvPr id="85" name="사각형: 둥근 모서리 114">
+            <a:extLst>
+              <a:ext uri="{FF2B5EF4-FFF2-40B4-BE49-F238E27FC236}">
+                <a16:creationId xmlns:a16="http://schemas.microsoft.com/office/drawing/2014/main" id="{FB282C53-556F-3689-1438-C2195F754E0B}"/>
+              </a:ext>
+            </a:extLst>
+          </p:cNvPr>
+          <p:cNvSpPr/>
+          <p:nvPr/>
+        </p:nvSpPr>
+        <p:spPr>
+          <a:xfrm>
+            <a:off x="1519984" y="647920"/>
+            <a:ext cx="2489782" cy="357931"/>
+          </a:xfrm>
+          <a:prstGeom prst="roundRect">
+            <a:avLst>
+              <a:gd name="adj" fmla="val 10304"/>
+            </a:avLst>
+          </a:prstGeom>
           <a:noFill/>
           <a:ln>
             <a:noFill/>
@@ -14674,19 +15521,735 @@
           <a:bodyPr rtlCol="0" anchor="ctr"/>
           <a:lstStyle/>
           <a:p>
+            <a:r>
+              <a:rPr lang="en-US" altLang="ko-KR" sz="1000" i="1"/>
+              <a:t>Request create container</a:t>
+            </a:r>
+          </a:p>
+          <a:p>
+            <a:r>
+              <a:rPr lang="en-US" altLang="ko-KR" sz="1000" i="1"/>
+              <a:t>with </a:t>
+            </a:r>
+            <a:r>
+              <a:rPr lang="en-US" altLang="ko-KR" sz="1000" b="1" i="1"/>
+              <a:t>NVIDIA_VISIBLE_DEVICES </a:t>
+            </a:r>
+            <a:r>
+              <a:rPr lang="en-US" altLang="ko-KR" sz="1000" i="1"/>
+              <a:t>env</a:t>
+            </a:r>
+          </a:p>
+        </p:txBody>
+      </p:sp>
+      <p:sp>
+        <p:nvSpPr>
+          <p:cNvPr id="91" name="사각형: 둥근 모서리 114">
+            <a:extLst>
+              <a:ext uri="{FF2B5EF4-FFF2-40B4-BE49-F238E27FC236}">
+                <a16:creationId xmlns:a16="http://schemas.microsoft.com/office/drawing/2014/main" id="{3AFD3988-D88A-CB89-E48F-255D6849B213}"/>
+              </a:ext>
+            </a:extLst>
+          </p:cNvPr>
+          <p:cNvSpPr/>
+          <p:nvPr/>
+        </p:nvSpPr>
+        <p:spPr>
+          <a:xfrm>
+            <a:off x="6500171" y="255676"/>
+            <a:ext cx="2843808" cy="357931"/>
+          </a:xfrm>
+          <a:prstGeom prst="roundRect">
+            <a:avLst>
+              <a:gd name="adj" fmla="val 10304"/>
+            </a:avLst>
+          </a:prstGeom>
+          <a:noFill/>
+          <a:ln>
+            <a:noFill/>
+          </a:ln>
+        </p:spPr>
+        <p:style>
+          <a:lnRef idx="2">
+            <a:schemeClr val="dk1"/>
+          </a:lnRef>
+          <a:fillRef idx="1">
+            <a:schemeClr val="lt1"/>
+          </a:fillRef>
+          <a:effectRef idx="0">
+            <a:schemeClr val="dk1"/>
+          </a:effectRef>
+          <a:fontRef idx="minor">
+            <a:schemeClr val="dk1"/>
+          </a:fontRef>
+        </p:style>
+        <p:txBody>
+          <a:bodyPr rtlCol="0" anchor="ctr"/>
+          <a:lstStyle/>
+          <a:p>
+            <a:r>
+              <a:rPr lang="en-US" altLang="ko-KR" sz="1000" i="1"/>
+              <a:t>Create OCI Runtime Config</a:t>
+            </a:r>
+          </a:p>
+          <a:p>
+            <a:r>
+              <a:rPr lang="en-US" altLang="ko-KR" sz="1000" i="1"/>
+              <a:t>with </a:t>
+            </a:r>
+            <a:r>
+              <a:rPr lang="en-US" altLang="ko-KR" sz="1000" b="1" i="1"/>
+              <a:t>NVIDIA_VISIBLE_DEVICES</a:t>
+            </a:r>
+            <a:r>
+              <a:rPr lang="en-US" altLang="ko-KR" sz="1000" i="1"/>
+              <a:t> env</a:t>
+            </a:r>
+          </a:p>
+        </p:txBody>
+      </p:sp>
+      <p:sp>
+        <p:nvSpPr>
+          <p:cNvPr id="92" name="타원 91">
+            <a:extLst>
+              <a:ext uri="{FF2B5EF4-FFF2-40B4-BE49-F238E27FC236}">
+                <a16:creationId xmlns:a16="http://schemas.microsoft.com/office/drawing/2014/main" id="{50858522-C81B-3825-DC26-A8C4D4A6E534}"/>
+              </a:ext>
+            </a:extLst>
+          </p:cNvPr>
+          <p:cNvSpPr/>
+          <p:nvPr/>
+        </p:nvSpPr>
+        <p:spPr>
+          <a:xfrm>
+            <a:off x="6299032" y="318149"/>
+            <a:ext cx="261982" cy="245150"/>
+          </a:xfrm>
+          <a:prstGeom prst="ellipse">
+            <a:avLst/>
+          </a:prstGeom>
+          <a:ln w="12700"/>
+        </p:spPr>
+        <p:style>
+          <a:lnRef idx="2">
+            <a:schemeClr val="dk1"/>
+          </a:lnRef>
+          <a:fillRef idx="1">
+            <a:schemeClr val="lt1"/>
+          </a:fillRef>
+          <a:effectRef idx="0">
+            <a:schemeClr val="dk1"/>
+          </a:effectRef>
+          <a:fontRef idx="minor">
+            <a:schemeClr val="dk1"/>
+          </a:fontRef>
+        </p:style>
+        <p:txBody>
+          <a:bodyPr rtlCol="0" anchor="ctr"/>
+          <a:lstStyle/>
+          <a:p>
             <a:pPr algn="ctr"/>
             <a:r>
-              <a:rPr lang="en-US" altLang="ko-KR" sz="1200"/>
-              <a:t>OCI Runtime Spec</a:t>
-            </a:r>
-            <a:endParaRPr lang="en-US" altLang="ko-KR" sz="1200" dirty="0"/>
+              <a:rPr lang="en-US" altLang="ko-KR" sz="1000"/>
+              <a:t>2</a:t>
+            </a:r>
+            <a:endParaRPr lang="ko-KR" altLang="en-US" sz="1000"/>
+          </a:p>
+        </p:txBody>
+      </p:sp>
+      <p:sp>
+        <p:nvSpPr>
+          <p:cNvPr id="98" name="사각형: 둥근 모서리 114">
+            <a:extLst>
+              <a:ext uri="{FF2B5EF4-FFF2-40B4-BE49-F238E27FC236}">
+                <a16:creationId xmlns:a16="http://schemas.microsoft.com/office/drawing/2014/main" id="{B65403DB-6B11-F396-426F-5946E3A525FA}"/>
+              </a:ext>
+            </a:extLst>
+          </p:cNvPr>
+          <p:cNvSpPr/>
+          <p:nvPr/>
+        </p:nvSpPr>
+        <p:spPr>
+          <a:xfrm>
+            <a:off x="5192770" y="620948"/>
+            <a:ext cx="1954122" cy="357931"/>
+          </a:xfrm>
+          <a:prstGeom prst="roundRect">
+            <a:avLst>
+              <a:gd name="adj" fmla="val 10304"/>
+            </a:avLst>
+          </a:prstGeom>
+          <a:noFill/>
+          <a:ln>
+            <a:noFill/>
+          </a:ln>
+        </p:spPr>
+        <p:style>
+          <a:lnRef idx="2">
+            <a:schemeClr val="dk1"/>
+          </a:lnRef>
+          <a:fillRef idx="1">
+            <a:schemeClr val="lt1"/>
+          </a:fillRef>
+          <a:effectRef idx="0">
+            <a:schemeClr val="dk1"/>
+          </a:effectRef>
+          <a:fontRef idx="minor">
+            <a:schemeClr val="dk1"/>
+          </a:fontRef>
+        </p:style>
+        <p:txBody>
+          <a:bodyPr rtlCol="0" anchor="ctr"/>
+          <a:lstStyle/>
+          <a:p>
+            <a:r>
+              <a:rPr lang="en-US" altLang="ko-KR" sz="1000" i="1"/>
+              <a:t>Execute to</a:t>
+            </a:r>
+          </a:p>
+          <a:p>
+            <a:r>
+              <a:rPr lang="en-US" altLang="ko-KR" sz="1000" i="1"/>
+              <a:t>request create container</a:t>
+            </a:r>
+          </a:p>
+        </p:txBody>
+      </p:sp>
+      <p:sp>
+        <p:nvSpPr>
+          <p:cNvPr id="99" name="타원 98">
+            <a:extLst>
+              <a:ext uri="{FF2B5EF4-FFF2-40B4-BE49-F238E27FC236}">
+                <a16:creationId xmlns:a16="http://schemas.microsoft.com/office/drawing/2014/main" id="{A2047645-F1EE-50F7-3CF8-C4CE6E2B22CA}"/>
+              </a:ext>
+            </a:extLst>
+          </p:cNvPr>
+          <p:cNvSpPr/>
+          <p:nvPr/>
+        </p:nvSpPr>
+        <p:spPr>
+          <a:xfrm>
+            <a:off x="4942479" y="543669"/>
+            <a:ext cx="261982" cy="245150"/>
+          </a:xfrm>
+          <a:prstGeom prst="ellipse">
+            <a:avLst/>
+          </a:prstGeom>
+          <a:ln w="12700"/>
+        </p:spPr>
+        <p:style>
+          <a:lnRef idx="2">
+            <a:schemeClr val="dk1"/>
+          </a:lnRef>
+          <a:fillRef idx="1">
+            <a:schemeClr val="lt1"/>
+          </a:fillRef>
+          <a:effectRef idx="0">
+            <a:schemeClr val="dk1"/>
+          </a:effectRef>
+          <a:fontRef idx="minor">
+            <a:schemeClr val="dk1"/>
+          </a:fontRef>
+        </p:style>
+        <p:txBody>
+          <a:bodyPr rtlCol="0" anchor="ctr"/>
+          <a:lstStyle/>
+          <a:p>
+            <a:pPr algn="ctr"/>
+            <a:r>
+              <a:rPr lang="en-US" altLang="ko-KR" sz="1000"/>
+              <a:t>3</a:t>
+            </a:r>
+            <a:endParaRPr lang="ko-KR" altLang="en-US" sz="1000"/>
+          </a:p>
+        </p:txBody>
+      </p:sp>
+      <p:cxnSp>
+        <p:nvCxnSpPr>
+          <p:cNvPr id="100" name="직선 화살표 연결선 99">
+            <a:extLst>
+              <a:ext uri="{FF2B5EF4-FFF2-40B4-BE49-F238E27FC236}">
+                <a16:creationId xmlns:a16="http://schemas.microsoft.com/office/drawing/2014/main" id="{FBD9B1A6-2AD3-C13B-9CD7-71161998A574}"/>
+              </a:ext>
+            </a:extLst>
+          </p:cNvPr>
+          <p:cNvCxnSpPr>
+            <a:cxnSpLocks/>
+            <a:stCxn id="9" idx="3"/>
+            <a:endCxn id="4" idx="0"/>
+          </p:cNvCxnSpPr>
+          <p:nvPr/>
+        </p:nvCxnSpPr>
+        <p:spPr>
+          <a:xfrm>
+            <a:off x="6439041" y="1452561"/>
+            <a:ext cx="1440162" cy="821183"/>
+          </a:xfrm>
+          <a:prstGeom prst="straightConnector1">
+            <a:avLst/>
+          </a:prstGeom>
+          <a:ln w="12700">
+            <a:solidFill>
+              <a:schemeClr val="tx1"/>
+            </a:solidFill>
+            <a:headEnd type="none" w="med" len="med"/>
+            <a:tailEnd type="triangle" w="med" len="med"/>
+          </a:ln>
+        </p:spPr>
+        <p:style>
+          <a:lnRef idx="1">
+            <a:schemeClr val="accent1"/>
+          </a:lnRef>
+          <a:fillRef idx="0">
+            <a:schemeClr val="accent1"/>
+          </a:fillRef>
+          <a:effectRef idx="0">
+            <a:schemeClr val="accent1"/>
+          </a:effectRef>
+          <a:fontRef idx="minor">
+            <a:schemeClr val="tx1"/>
+          </a:fontRef>
+        </p:style>
+      </p:cxnSp>
+      <p:sp>
+        <p:nvSpPr>
+          <p:cNvPr id="103" name="사각형: 둥근 모서리 114">
+            <a:extLst>
+              <a:ext uri="{FF2B5EF4-FFF2-40B4-BE49-F238E27FC236}">
+                <a16:creationId xmlns:a16="http://schemas.microsoft.com/office/drawing/2014/main" id="{E4706976-6EC9-13EC-D119-6EBBB0CDE8C0}"/>
+              </a:ext>
+            </a:extLst>
+          </p:cNvPr>
+          <p:cNvSpPr/>
+          <p:nvPr/>
+        </p:nvSpPr>
+        <p:spPr>
+          <a:xfrm>
+            <a:off x="6535021" y="1275606"/>
+            <a:ext cx="2489782" cy="357931"/>
+          </a:xfrm>
+          <a:prstGeom prst="roundRect">
+            <a:avLst>
+              <a:gd name="adj" fmla="val 10304"/>
+            </a:avLst>
+          </a:prstGeom>
+          <a:noFill/>
+          <a:ln>
+            <a:noFill/>
+          </a:ln>
+        </p:spPr>
+        <p:style>
+          <a:lnRef idx="2">
+            <a:schemeClr val="dk1"/>
+          </a:lnRef>
+          <a:fillRef idx="1">
+            <a:schemeClr val="lt1"/>
+          </a:fillRef>
+          <a:effectRef idx="0">
+            <a:schemeClr val="dk1"/>
+          </a:effectRef>
+          <a:fontRef idx="minor">
+            <a:schemeClr val="dk1"/>
+          </a:fontRef>
+        </p:style>
+        <p:txBody>
+          <a:bodyPr rtlCol="0" anchor="ctr"/>
+          <a:lstStyle/>
+          <a:p>
+            <a:r>
+              <a:rPr lang="en-US" altLang="ko-KR" sz="1000" i="1"/>
+              <a:t>Modify OCI Runtime Config</a:t>
+            </a:r>
+          </a:p>
+          <a:p>
+            <a:r>
+              <a:rPr lang="en-US" altLang="ko-KR" sz="1000" i="1"/>
+              <a:t>for </a:t>
+            </a:r>
+            <a:r>
+              <a:rPr lang="en-US" altLang="ko-KR" sz="1000" b="1" i="1"/>
+              <a:t>GPU Settings</a:t>
+            </a:r>
+          </a:p>
+        </p:txBody>
+      </p:sp>
+      <p:sp>
+        <p:nvSpPr>
+          <p:cNvPr id="104" name="타원 103">
+            <a:extLst>
+              <a:ext uri="{FF2B5EF4-FFF2-40B4-BE49-F238E27FC236}">
+                <a16:creationId xmlns:a16="http://schemas.microsoft.com/office/drawing/2014/main" id="{27FC02DE-7602-2ED4-5CD2-69A362C74837}"/>
+              </a:ext>
+            </a:extLst>
+          </p:cNvPr>
+          <p:cNvSpPr/>
+          <p:nvPr/>
+        </p:nvSpPr>
+        <p:spPr>
+          <a:xfrm>
+            <a:off x="6308050" y="1329985"/>
+            <a:ext cx="261982" cy="245150"/>
+          </a:xfrm>
+          <a:prstGeom prst="ellipse">
+            <a:avLst/>
+          </a:prstGeom>
+          <a:ln w="12700"/>
+        </p:spPr>
+        <p:style>
+          <a:lnRef idx="2">
+            <a:schemeClr val="dk1"/>
+          </a:lnRef>
+          <a:fillRef idx="1">
+            <a:schemeClr val="lt1"/>
+          </a:fillRef>
+          <a:effectRef idx="0">
+            <a:schemeClr val="dk1"/>
+          </a:effectRef>
+          <a:fontRef idx="minor">
+            <a:schemeClr val="dk1"/>
+          </a:fontRef>
+        </p:style>
+        <p:txBody>
+          <a:bodyPr rtlCol="0" anchor="ctr"/>
+          <a:lstStyle/>
+          <a:p>
+            <a:pPr algn="ctr"/>
+            <a:r>
+              <a:rPr lang="en-US" altLang="ko-KR" sz="1000"/>
+              <a:t>4</a:t>
+            </a:r>
+            <a:endParaRPr lang="ko-KR" altLang="en-US" sz="1000"/>
+          </a:p>
+        </p:txBody>
+      </p:sp>
+      <p:sp>
+        <p:nvSpPr>
+          <p:cNvPr id="105" name="사각형: 둥근 모서리 114">
+            <a:extLst>
+              <a:ext uri="{FF2B5EF4-FFF2-40B4-BE49-F238E27FC236}">
+                <a16:creationId xmlns:a16="http://schemas.microsoft.com/office/drawing/2014/main" id="{1A56BDFC-FAF7-C693-A112-2CEEEA3C4EDA}"/>
+              </a:ext>
+            </a:extLst>
+          </p:cNvPr>
+          <p:cNvSpPr/>
+          <p:nvPr/>
+        </p:nvSpPr>
+        <p:spPr>
+          <a:xfrm>
+            <a:off x="5205000" y="1630981"/>
+            <a:ext cx="1954122" cy="357931"/>
+          </a:xfrm>
+          <a:prstGeom prst="roundRect">
+            <a:avLst>
+              <a:gd name="adj" fmla="val 10304"/>
+            </a:avLst>
+          </a:prstGeom>
+          <a:noFill/>
+          <a:ln>
+            <a:noFill/>
+          </a:ln>
+        </p:spPr>
+        <p:style>
+          <a:lnRef idx="2">
+            <a:schemeClr val="dk1"/>
+          </a:lnRef>
+          <a:fillRef idx="1">
+            <a:schemeClr val="lt1"/>
+          </a:fillRef>
+          <a:effectRef idx="0">
+            <a:schemeClr val="dk1"/>
+          </a:effectRef>
+          <a:fontRef idx="minor">
+            <a:schemeClr val="dk1"/>
+          </a:fontRef>
+        </p:style>
+        <p:txBody>
+          <a:bodyPr rtlCol="0" anchor="ctr"/>
+          <a:lstStyle/>
+          <a:p>
+            <a:r>
+              <a:rPr lang="en-US" altLang="ko-KR" sz="1000" i="1"/>
+              <a:t>Execute to</a:t>
+            </a:r>
+          </a:p>
+          <a:p>
+            <a:r>
+              <a:rPr lang="en-US" altLang="ko-KR" sz="1000" i="1"/>
+              <a:t>request create container</a:t>
+            </a:r>
+          </a:p>
+        </p:txBody>
+      </p:sp>
+      <p:sp>
+        <p:nvSpPr>
+          <p:cNvPr id="106" name="타원 105">
+            <a:extLst>
+              <a:ext uri="{FF2B5EF4-FFF2-40B4-BE49-F238E27FC236}">
+                <a16:creationId xmlns:a16="http://schemas.microsoft.com/office/drawing/2014/main" id="{2FF282B1-636E-A2A3-A672-F7A550F2EDCE}"/>
+              </a:ext>
+            </a:extLst>
+          </p:cNvPr>
+          <p:cNvSpPr/>
+          <p:nvPr/>
+        </p:nvSpPr>
+        <p:spPr>
+          <a:xfrm>
+            <a:off x="4942479" y="1553702"/>
+            <a:ext cx="261982" cy="245150"/>
+          </a:xfrm>
+          <a:prstGeom prst="ellipse">
+            <a:avLst/>
+          </a:prstGeom>
+          <a:ln w="12700"/>
+        </p:spPr>
+        <p:style>
+          <a:lnRef idx="2">
+            <a:schemeClr val="dk1"/>
+          </a:lnRef>
+          <a:fillRef idx="1">
+            <a:schemeClr val="lt1"/>
+          </a:fillRef>
+          <a:effectRef idx="0">
+            <a:schemeClr val="dk1"/>
+          </a:effectRef>
+          <a:fontRef idx="minor">
+            <a:schemeClr val="dk1"/>
+          </a:fontRef>
+        </p:style>
+        <p:txBody>
+          <a:bodyPr rtlCol="0" anchor="ctr"/>
+          <a:lstStyle/>
+          <a:p>
+            <a:pPr algn="ctr"/>
+            <a:r>
+              <a:rPr lang="en-US" altLang="ko-KR" sz="1000"/>
+              <a:t>5</a:t>
+            </a:r>
+            <a:endParaRPr lang="ko-KR" altLang="en-US" sz="1000"/>
+          </a:p>
+        </p:txBody>
+      </p:sp>
+      <p:sp>
+        <p:nvSpPr>
+          <p:cNvPr id="113" name="타원 112">
+            <a:extLst>
+              <a:ext uri="{FF2B5EF4-FFF2-40B4-BE49-F238E27FC236}">
+                <a16:creationId xmlns:a16="http://schemas.microsoft.com/office/drawing/2014/main" id="{53A93A43-CCAB-8204-E728-535814F16269}"/>
+              </a:ext>
+            </a:extLst>
+          </p:cNvPr>
+          <p:cNvSpPr/>
+          <p:nvPr/>
+        </p:nvSpPr>
+        <p:spPr>
+          <a:xfrm>
+            <a:off x="923476" y="2881644"/>
+            <a:ext cx="261982" cy="245150"/>
+          </a:xfrm>
+          <a:prstGeom prst="ellipse">
+            <a:avLst/>
+          </a:prstGeom>
+          <a:ln w="12700"/>
+        </p:spPr>
+        <p:style>
+          <a:lnRef idx="2">
+            <a:schemeClr val="dk1"/>
+          </a:lnRef>
+          <a:fillRef idx="1">
+            <a:schemeClr val="lt1"/>
+          </a:fillRef>
+          <a:effectRef idx="0">
+            <a:schemeClr val="dk1"/>
+          </a:effectRef>
+          <a:fontRef idx="minor">
+            <a:schemeClr val="dk1"/>
+          </a:fontRef>
+        </p:style>
+        <p:txBody>
+          <a:bodyPr rtlCol="0" anchor="ctr"/>
+          <a:lstStyle/>
+          <a:p>
+            <a:pPr algn="ctr"/>
+            <a:r>
+              <a:rPr lang="en-US" altLang="ko-KR" sz="1000"/>
+              <a:t>7</a:t>
+            </a:r>
+            <a:endParaRPr lang="ko-KR" altLang="en-US" sz="1000"/>
+          </a:p>
+        </p:txBody>
+      </p:sp>
+      <p:sp>
+        <p:nvSpPr>
+          <p:cNvPr id="11" name="사각형: 둥근 모서리 114">
+            <a:extLst>
+              <a:ext uri="{FF2B5EF4-FFF2-40B4-BE49-F238E27FC236}">
+                <a16:creationId xmlns:a16="http://schemas.microsoft.com/office/drawing/2014/main" id="{E0D7D79A-9AAE-6488-F0FC-931FA8825A97}"/>
+              </a:ext>
+            </a:extLst>
+          </p:cNvPr>
+          <p:cNvSpPr/>
+          <p:nvPr/>
+        </p:nvSpPr>
+        <p:spPr>
+          <a:xfrm>
+            <a:off x="861290" y="1268105"/>
+            <a:ext cx="1921124" cy="368911"/>
+          </a:xfrm>
+          <a:prstGeom prst="roundRect">
+            <a:avLst>
+              <a:gd name="adj" fmla="val 10304"/>
+            </a:avLst>
+          </a:prstGeom>
+          <a:ln w="12700"/>
+        </p:spPr>
+        <p:style>
+          <a:lnRef idx="2">
+            <a:schemeClr val="dk1"/>
+          </a:lnRef>
+          <a:fillRef idx="1">
+            <a:schemeClr val="lt1"/>
+          </a:fillRef>
+          <a:effectRef idx="0">
+            <a:schemeClr val="dk1"/>
+          </a:effectRef>
+          <a:fontRef idx="minor">
+            <a:schemeClr val="dk1"/>
+          </a:fontRef>
+        </p:style>
+        <p:txBody>
+          <a:bodyPr rtlCol="0" anchor="ctr"/>
+          <a:lstStyle/>
+          <a:p>
+            <a:pPr algn="ctr"/>
+            <a:r>
+              <a:rPr lang="en-US" altLang="ko-KR" sz="1050" b="1"/>
+              <a:t>CDI (Container Device Interface) Spec File (YAML) </a:t>
+            </a:r>
+            <a:endParaRPr lang="en-US" altLang="ko-KR" sz="1050" b="1" dirty="0"/>
+          </a:p>
+        </p:txBody>
+      </p:sp>
+      <p:cxnSp>
+        <p:nvCxnSpPr>
+          <p:cNvPr id="12" name="직선 화살표 연결선 17">
+            <a:extLst>
+              <a:ext uri="{FF2B5EF4-FFF2-40B4-BE49-F238E27FC236}">
+                <a16:creationId xmlns:a16="http://schemas.microsoft.com/office/drawing/2014/main" id="{46E18517-58DD-1B56-7350-9D34EB5D73E8}"/>
+              </a:ext>
+            </a:extLst>
+          </p:cNvPr>
+          <p:cNvCxnSpPr>
+            <a:cxnSpLocks/>
+            <a:stCxn id="11" idx="3"/>
+            <a:endCxn id="9" idx="1"/>
+          </p:cNvCxnSpPr>
+          <p:nvPr/>
+        </p:nvCxnSpPr>
+        <p:spPr>
+          <a:xfrm>
+            <a:off x="2782414" y="1452561"/>
+            <a:ext cx="925485" cy="0"/>
+          </a:xfrm>
+          <a:prstGeom prst="straightConnector1">
+            <a:avLst/>
+          </a:prstGeom>
+          <a:ln w="12700">
+            <a:solidFill>
+              <a:schemeClr val="tx1"/>
+            </a:solidFill>
+            <a:headEnd type="none" w="med" len="med"/>
+            <a:tailEnd type="triangle" w="med" len="med"/>
+          </a:ln>
+        </p:spPr>
+        <p:style>
+          <a:lnRef idx="1">
+            <a:schemeClr val="accent1"/>
+          </a:lnRef>
+          <a:fillRef idx="0">
+            <a:schemeClr val="accent1"/>
+          </a:fillRef>
+          <a:effectRef idx="0">
+            <a:schemeClr val="accent1"/>
+          </a:effectRef>
+          <a:fontRef idx="minor">
+            <a:schemeClr val="tx1"/>
+          </a:fontRef>
+        </p:style>
+      </p:cxnSp>
+      <p:sp>
+        <p:nvSpPr>
+          <p:cNvPr id="31" name="사각형: 둥근 모서리 114">
+            <a:extLst>
+              <a:ext uri="{FF2B5EF4-FFF2-40B4-BE49-F238E27FC236}">
+                <a16:creationId xmlns:a16="http://schemas.microsoft.com/office/drawing/2014/main" id="{DBA462F6-0F67-A528-0AB5-98CA2FC9CCA2}"/>
+              </a:ext>
+            </a:extLst>
+          </p:cNvPr>
+          <p:cNvSpPr/>
+          <p:nvPr/>
+        </p:nvSpPr>
+        <p:spPr>
+          <a:xfrm>
+            <a:off x="753313" y="2026286"/>
+            <a:ext cx="3595239" cy="698064"/>
+          </a:xfrm>
+          <a:prstGeom prst="roundRect">
+            <a:avLst>
+              <a:gd name="adj" fmla="val 10304"/>
+            </a:avLst>
+          </a:prstGeom>
+          <a:noFill/>
+          <a:ln>
+            <a:noFill/>
+          </a:ln>
+        </p:spPr>
+        <p:style>
+          <a:lnRef idx="2">
+            <a:schemeClr val="dk1"/>
+          </a:lnRef>
+          <a:fillRef idx="1">
+            <a:schemeClr val="lt1"/>
+          </a:fillRef>
+          <a:effectRef idx="0">
+            <a:schemeClr val="dk1"/>
+          </a:effectRef>
+          <a:fontRef idx="minor">
+            <a:schemeClr val="dk1"/>
+          </a:fontRef>
+        </p:style>
+        <p:txBody>
+          <a:bodyPr rtlCol="0" anchor="ctr"/>
+          <a:lstStyle/>
+          <a:p>
+            <a:r>
+              <a:rPr lang="en-US" altLang="ko-KR" sz="1000" i="1"/>
+              <a:t>- Create namespace (clone()),</a:t>
+            </a:r>
+          </a:p>
+          <a:p>
+            <a:r>
+              <a:rPr lang="en-US" altLang="ko-KR" sz="1000" i="1"/>
+              <a:t>- Set rootfs (overlay FS),</a:t>
+            </a:r>
+          </a:p>
+          <a:p>
+            <a:r>
+              <a:rPr lang="en-US" altLang="ko-KR" sz="1000" i="1"/>
+              <a:t>- Bind mount GPU device file and CUDA libraries/tools,</a:t>
+            </a:r>
+          </a:p>
+          <a:p>
+            <a:r>
+              <a:rPr lang="en-US" altLang="ko-KR" sz="1000" i="1"/>
+              <a:t>- Allow GPU Cgroup</a:t>
+            </a:r>
           </a:p>
         </p:txBody>
       </p:sp>
     </p:spTree>
     <p:extLst>
       <p:ext uri="{BB962C8B-B14F-4D97-AF65-F5344CB8AC3E}">
-        <p14:creationId xmlns:p14="http://schemas.microsoft.com/office/powerpoint/2010/main" val="3094524413"/>
+        <p14:creationId xmlns:p14="http://schemas.microsoft.com/office/powerpoint/2010/main" val="1138363944"/>
       </p:ext>
     </p:extLst>
   </p:cSld>
@@ -14727,6 +16290,510 @@
 </file>
 
 <file path=ppt/slides/slide5.xml><?xml version="1.0" encoding="utf-8"?>
+<p:sld xmlns:a="http://schemas.openxmlformats.org/drawingml/2006/main" xmlns:r="http://schemas.openxmlformats.org/officeDocument/2006/relationships" xmlns:p="http://schemas.openxmlformats.org/presentationml/2006/main">
+  <p:cSld>
+    <p:spTree>
+      <p:nvGrpSpPr>
+        <p:cNvPr id="1" name="">
+          <a:extLst>
+            <a:ext uri="{FF2B5EF4-FFF2-40B4-BE49-F238E27FC236}">
+              <a16:creationId xmlns:a16="http://schemas.microsoft.com/office/drawing/2014/main" id="{D47006E3-14BF-55C5-19C7-5F69C3DAA1BF}"/>
+            </a:ext>
+          </a:extLst>
+        </p:cNvPr>
+        <p:cNvGrpSpPr/>
+        <p:nvPr/>
+      </p:nvGrpSpPr>
+      <p:grpSpPr>
+        <a:xfrm>
+          <a:off x="0" y="0"/>
+          <a:ext cx="0" cy="0"/>
+          <a:chOff x="0" y="0"/>
+          <a:chExt cx="0" cy="0"/>
+        </a:xfrm>
+      </p:grpSpPr>
+      <p:sp>
+        <p:nvSpPr>
+          <p:cNvPr id="2" name="제목 1">
+            <a:extLst>
+              <a:ext uri="{FF2B5EF4-FFF2-40B4-BE49-F238E27FC236}">
+                <a16:creationId xmlns:a16="http://schemas.microsoft.com/office/drawing/2014/main" id="{C72503FA-17E5-5AE3-085B-3E08955531E7}"/>
+              </a:ext>
+            </a:extLst>
+          </p:cNvPr>
+          <p:cNvSpPr>
+            <a:spLocks noGrp="1"/>
+          </p:cNvSpPr>
+          <p:nvPr>
+            <p:ph type="title"/>
+          </p:nvPr>
+        </p:nvSpPr>
+        <p:spPr>
+          <a:xfrm>
+            <a:off x="0" y="-726229"/>
+            <a:ext cx="9144000" cy="857250"/>
+          </a:xfrm>
+        </p:spPr>
+        <p:txBody>
+          <a:bodyPr>
+            <a:normAutofit fontScale="90000"/>
+          </a:bodyPr>
+          <a:lstStyle/>
+          <a:p>
+            <a:r>
+              <a:rPr lang="en-US" altLang="ko-KR"/>
+              <a:t>CUDA Container OCI Runtime Spec</a:t>
+            </a:r>
+            <a:endParaRPr lang="ko-KR" altLang="en-US" dirty="0"/>
+          </a:p>
+        </p:txBody>
+      </p:sp>
+      <p:sp>
+        <p:nvSpPr>
+          <p:cNvPr id="7" name="사각형: 둥근 모서리 114">
+            <a:extLst>
+              <a:ext uri="{FF2B5EF4-FFF2-40B4-BE49-F238E27FC236}">
+                <a16:creationId xmlns:a16="http://schemas.microsoft.com/office/drawing/2014/main" id="{3A9A9FAD-7393-75E5-FB5E-4B6A1277EAD6}"/>
+              </a:ext>
+            </a:extLst>
+          </p:cNvPr>
+          <p:cNvSpPr/>
+          <p:nvPr/>
+        </p:nvSpPr>
+        <p:spPr>
+          <a:xfrm>
+            <a:off x="1691680" y="555526"/>
+            <a:ext cx="5904656" cy="433441"/>
+          </a:xfrm>
+          <a:prstGeom prst="roundRect">
+            <a:avLst>
+              <a:gd name="adj" fmla="val 0"/>
+            </a:avLst>
+          </a:prstGeom>
+          <a:ln w="12700"/>
+        </p:spPr>
+        <p:style>
+          <a:lnRef idx="2">
+            <a:schemeClr val="dk1"/>
+          </a:lnRef>
+          <a:fillRef idx="1">
+            <a:schemeClr val="lt1"/>
+          </a:fillRef>
+          <a:effectRef idx="0">
+            <a:schemeClr val="dk1"/>
+          </a:effectRef>
+          <a:fontRef idx="minor">
+            <a:schemeClr val="dk1"/>
+          </a:fontRef>
+        </p:style>
+        <p:txBody>
+          <a:bodyPr rtlCol="0" anchor="ctr"/>
+          <a:lstStyle/>
+          <a:p>
+            <a:r>
+              <a:rPr lang="en-US" altLang="ko-KR" sz="1100"/>
+              <a:t>$ ctr run --env NVIDIA_VISIBLE_DEVICES=all</a:t>
+            </a:r>
+            <a:r>
+              <a:rPr lang="ko-KR" altLang="en-US" sz="1100"/>
+              <a:t> </a:t>
+            </a:r>
+            <a:r>
+              <a:rPr lang="en-US" altLang="ko-KR" sz="1100"/>
+              <a:t>nvidia/cuda:9.0-base test-gpu nvidia-smi</a:t>
+            </a:r>
+            <a:endParaRPr lang="en-US" altLang="ko-KR" sz="1100" dirty="0"/>
+          </a:p>
+        </p:txBody>
+      </p:sp>
+      <p:sp>
+        <p:nvSpPr>
+          <p:cNvPr id="11" name="사각형: 둥근 모서리 114">
+            <a:extLst>
+              <a:ext uri="{FF2B5EF4-FFF2-40B4-BE49-F238E27FC236}">
+                <a16:creationId xmlns:a16="http://schemas.microsoft.com/office/drawing/2014/main" id="{6CABFD53-A11C-D694-A1D1-C2B792E873C0}"/>
+              </a:ext>
+            </a:extLst>
+          </p:cNvPr>
+          <p:cNvSpPr/>
+          <p:nvPr/>
+        </p:nvSpPr>
+        <p:spPr>
+          <a:xfrm>
+            <a:off x="899592" y="1211838"/>
+            <a:ext cx="7488831" cy="2880320"/>
+          </a:xfrm>
+          <a:prstGeom prst="roundRect">
+            <a:avLst>
+              <a:gd name="adj" fmla="val 0"/>
+            </a:avLst>
+          </a:prstGeom>
+          <a:ln w="12700"/>
+        </p:spPr>
+        <p:style>
+          <a:lnRef idx="2">
+            <a:schemeClr val="dk1"/>
+          </a:lnRef>
+          <a:fillRef idx="1">
+            <a:schemeClr val="lt1"/>
+          </a:fillRef>
+          <a:effectRef idx="0">
+            <a:schemeClr val="dk1"/>
+          </a:effectRef>
+          <a:fontRef idx="minor">
+            <a:schemeClr val="dk1"/>
+          </a:fontRef>
+        </p:style>
+        <p:txBody>
+          <a:bodyPr rtlCol="0" anchor="ctr"/>
+          <a:lstStyle/>
+          <a:p>
+            <a:r>
+              <a:rPr lang="en-US" altLang="ko-KR" sz="1100" kern="0" dirty="0">
+                <a:cs typeface="Al Bayan Plain" pitchFamily="2" charset="-78"/>
+              </a:rPr>
+              <a:t>{</a:t>
+            </a:r>
+          </a:p>
+          <a:p>
+            <a:r>
+              <a:rPr lang="en-US" altLang="ko-KR" sz="1100" kern="0" dirty="0">
+                <a:cs typeface="Al Bayan Plain" pitchFamily="2" charset="-78"/>
+              </a:rPr>
+              <a:t>    "hooks": {</a:t>
+            </a:r>
+          </a:p>
+          <a:p>
+            <a:r>
+              <a:rPr lang="en-US" altLang="ko-KR" sz="1100" kern="0" dirty="0">
+                <a:cs typeface="Al Bayan Plain" pitchFamily="2" charset="-78"/>
+              </a:rPr>
+              <a:t>        "</a:t>
+            </a:r>
+            <a:r>
+              <a:rPr lang="en-US" altLang="ko-KR" sz="1100" kern="0" dirty="0" err="1">
+                <a:cs typeface="Al Bayan Plain" pitchFamily="2" charset="-78"/>
+              </a:rPr>
+              <a:t>Poststart</a:t>
+            </a:r>
+            <a:r>
+              <a:rPr lang="en-US" altLang="ko-KR" sz="1100" kern="0" dirty="0">
+                <a:cs typeface="Al Bayan Plain" pitchFamily="2" charset="-78"/>
+              </a:rPr>
+              <a:t>": [],</a:t>
+            </a:r>
+          </a:p>
+          <a:p>
+            <a:r>
+              <a:rPr lang="en-US" altLang="ko-KR" sz="1100" kern="0" dirty="0">
+                <a:cs typeface="Al Bayan Plain" pitchFamily="2" charset="-78"/>
+              </a:rPr>
+              <a:t>        "</a:t>
+            </a:r>
+            <a:r>
+              <a:rPr lang="en-US" altLang="ko-KR" sz="1100" kern="0" dirty="0" err="1">
+                <a:cs typeface="Al Bayan Plain" pitchFamily="2" charset="-78"/>
+              </a:rPr>
+              <a:t>Poststop</a:t>
+            </a:r>
+            <a:r>
+              <a:rPr lang="en-US" altLang="ko-KR" sz="1100" kern="0" dirty="0">
+                <a:cs typeface="Al Bayan Plain" pitchFamily="2" charset="-78"/>
+              </a:rPr>
+              <a:t>": [],</a:t>
+            </a:r>
+          </a:p>
+          <a:p>
+            <a:r>
+              <a:rPr lang="en-US" altLang="ko-KR" sz="1100" kern="0" dirty="0">
+                <a:cs typeface="Al Bayan Plain" pitchFamily="2" charset="-78"/>
+              </a:rPr>
+              <a:t>        "prestart": [{</a:t>
+            </a:r>
+          </a:p>
+          <a:p>
+            <a:r>
+              <a:rPr lang="en-US" altLang="ko-KR" sz="1100" kern="0" dirty="0">
+                <a:cs typeface="Al Bayan Plain" pitchFamily="2" charset="-78"/>
+              </a:rPr>
+              <a:t>            "</a:t>
+            </a:r>
+            <a:r>
+              <a:rPr lang="en-US" altLang="ko-KR" sz="1100" kern="0" dirty="0" err="1">
+                <a:cs typeface="Al Bayan Plain" pitchFamily="2" charset="-78"/>
+              </a:rPr>
+              <a:t>args</a:t>
+            </a:r>
+            <a:r>
+              <a:rPr lang="en-US" altLang="ko-KR" sz="1100" kern="0" dirty="0">
+                <a:cs typeface="Al Bayan Plain" pitchFamily="2" charset="-78"/>
+              </a:rPr>
+              <a:t>": ["/</a:t>
+            </a:r>
+            <a:r>
+              <a:rPr lang="en-US" altLang="ko-KR" sz="1100" kern="0" dirty="0" err="1">
+                <a:cs typeface="Al Bayan Plain" pitchFamily="2" charset="-78"/>
+              </a:rPr>
+              <a:t>usr</a:t>
+            </a:r>
+            <a:r>
+              <a:rPr lang="en-US" altLang="ko-KR" sz="1100" kern="0" dirty="0">
+                <a:cs typeface="Al Bayan Plain" pitchFamily="2" charset="-78"/>
+              </a:rPr>
+              <a:t>/bin/</a:t>
+            </a:r>
+            <a:r>
+              <a:rPr lang="en-US" altLang="ko-KR" sz="1100" kern="0" dirty="0" err="1">
+                <a:cs typeface="Al Bayan Plain" pitchFamily="2" charset="-78"/>
+              </a:rPr>
+              <a:t>nvidia</a:t>
+            </a:r>
+            <a:r>
+              <a:rPr lang="en-US" altLang="ko-KR" sz="1100" kern="0" dirty="0">
+                <a:cs typeface="Al Bayan Plain" pitchFamily="2" charset="-78"/>
+              </a:rPr>
+              <a:t>-container-runtime-hook", "prestart"],</a:t>
+            </a:r>
+          </a:p>
+          <a:p>
+            <a:r>
+              <a:rPr lang="en-US" altLang="ko-KR" sz="1100" kern="0" dirty="0">
+                <a:cs typeface="Al Bayan Plain" pitchFamily="2" charset="-78"/>
+              </a:rPr>
+              <a:t>            "path": "/</a:t>
+            </a:r>
+            <a:r>
+              <a:rPr lang="en-US" altLang="ko-KR" sz="1100" kern="0" dirty="0" err="1">
+                <a:cs typeface="Al Bayan Plain" pitchFamily="2" charset="-78"/>
+              </a:rPr>
+              <a:t>usr</a:t>
+            </a:r>
+            <a:r>
+              <a:rPr lang="en-US" altLang="ko-KR" sz="1100" kern="0" dirty="0">
+                <a:cs typeface="Al Bayan Plain" pitchFamily="2" charset="-78"/>
+              </a:rPr>
+              <a:t>/bin/</a:t>
+            </a:r>
+            <a:r>
+              <a:rPr lang="en-US" altLang="ko-KR" sz="1100" kern="0" dirty="0" err="1">
+                <a:cs typeface="Al Bayan Plain" pitchFamily="2" charset="-78"/>
+              </a:rPr>
+              <a:t>nvidia</a:t>
+            </a:r>
+            <a:r>
+              <a:rPr lang="en-US" altLang="ko-KR" sz="1100" kern="0" dirty="0">
+                <a:cs typeface="Al Bayan Plain" pitchFamily="2" charset="-78"/>
+              </a:rPr>
+              <a:t>-container-runtime-hook”</a:t>
+            </a:r>
+          </a:p>
+          <a:p>
+            <a:r>
+              <a:rPr lang="en-US" altLang="ko-KR" sz="1100" kern="0" dirty="0">
+                <a:cs typeface="Al Bayan Plain" pitchFamily="2" charset="-78"/>
+              </a:rPr>
+              <a:t>        }]</a:t>
+            </a:r>
+          </a:p>
+          <a:p>
+            <a:r>
+              <a:rPr lang="en-US" altLang="ko-KR" sz="1100" kern="0" dirty="0">
+                <a:cs typeface="Al Bayan Plain" pitchFamily="2" charset="-78"/>
+              </a:rPr>
+              <a:t>    },</a:t>
+            </a:r>
+          </a:p>
+          <a:p>
+            <a:r>
+              <a:rPr lang="en-US" altLang="ko-KR" sz="1100" kern="0" dirty="0">
+                <a:cs typeface="Al Bayan Plain" pitchFamily="2" charset="-78"/>
+              </a:rPr>
+              <a:t>    "process": {</a:t>
+            </a:r>
+          </a:p>
+          <a:p>
+            <a:r>
+              <a:rPr lang="en-US" altLang="ko-KR" sz="1100" kern="0" dirty="0">
+                <a:cs typeface="Al Bayan Plain" pitchFamily="2" charset="-78"/>
+              </a:rPr>
+              <a:t>        “env”: [</a:t>
+            </a:r>
+          </a:p>
+          <a:p>
+            <a:r>
+              <a:rPr lang="en-US" altLang="ko-KR" sz="1100" kern="0" dirty="0">
+                <a:cs typeface="Al Bayan Plain" pitchFamily="2" charset="-78"/>
+              </a:rPr>
+              <a:t>            "</a:t>
+            </a:r>
+            <a:r>
+              <a:rPr lang="en-US" altLang="ko-KR" sz="1100" b="1" kern="0" dirty="0">
+                <a:cs typeface="Al Bayan Plain" pitchFamily="2" charset="-78"/>
+              </a:rPr>
+              <a:t>NVIDIA_VISIBLE_DEVICES</a:t>
+            </a:r>
+            <a:r>
+              <a:rPr lang="en-US" altLang="ko-KR" sz="1100" kern="0" dirty="0">
+                <a:cs typeface="Al Bayan Plain" pitchFamily="2" charset="-78"/>
+              </a:rPr>
+              <a:t>=all",</a:t>
+            </a:r>
+          </a:p>
+          <a:p>
+            <a:r>
+              <a:rPr lang="en-US" altLang="ko-KR" sz="1100" kern="0" dirty="0">
+                <a:cs typeface="Al Bayan Plain" pitchFamily="2" charset="-78"/>
+              </a:rPr>
+              <a:t>            ...</a:t>
+            </a:r>
+            <a:br>
+              <a:rPr lang="en-US" altLang="ko-KR" sz="1100" kern="0" dirty="0">
+                <a:cs typeface="Al Bayan Plain" pitchFamily="2" charset="-78"/>
+              </a:rPr>
+            </a:br>
+            <a:r>
+              <a:rPr lang="en-US" altLang="ko-KR" sz="1100" kern="0" dirty="0">
+                <a:cs typeface="Al Bayan Plain" pitchFamily="2" charset="-78"/>
+              </a:rPr>
+              <a:t>        ]</a:t>
+            </a:r>
+          </a:p>
+          <a:p>
+            <a:r>
+              <a:rPr lang="en-US" altLang="ko-KR" sz="1100" kern="0" dirty="0">
+                <a:cs typeface="Al Bayan Plain" pitchFamily="2" charset="-78"/>
+              </a:rPr>
+              <a:t>    }</a:t>
+            </a:r>
+          </a:p>
+          <a:p>
+            <a:r>
+              <a:rPr lang="en-US" altLang="ko-KR" sz="1100" kern="0" dirty="0">
+                <a:cs typeface="Al Bayan Plain" pitchFamily="2" charset="-78"/>
+              </a:rPr>
+              <a:t>...</a:t>
+            </a:r>
+            <a:endParaRPr lang="en-US" altLang="ko-KR" sz="1600" kern="0" dirty="0">
+              <a:cs typeface="Al Bayan Plain" pitchFamily="2" charset="-78"/>
+            </a:endParaRPr>
+          </a:p>
+        </p:txBody>
+      </p:sp>
+      <p:cxnSp>
+        <p:nvCxnSpPr>
+          <p:cNvPr id="9" name="직선 화살표 연결선 8">
+            <a:extLst>
+              <a:ext uri="{FF2B5EF4-FFF2-40B4-BE49-F238E27FC236}">
+                <a16:creationId xmlns:a16="http://schemas.microsoft.com/office/drawing/2014/main" id="{E2C29F7C-E831-83D2-6BE9-5A7252F4071B}"/>
+              </a:ext>
+            </a:extLst>
+          </p:cNvPr>
+          <p:cNvCxnSpPr>
+            <a:cxnSpLocks/>
+            <a:stCxn id="7" idx="2"/>
+            <a:endCxn id="11" idx="0"/>
+          </p:cNvCxnSpPr>
+          <p:nvPr/>
+        </p:nvCxnSpPr>
+        <p:spPr>
+          <a:xfrm>
+            <a:off x="4644008" y="988967"/>
+            <a:ext cx="0" cy="222871"/>
+          </a:xfrm>
+          <a:prstGeom prst="straightConnector1">
+            <a:avLst/>
+          </a:prstGeom>
+          <a:ln w="12700">
+            <a:solidFill>
+              <a:schemeClr val="tx1"/>
+            </a:solidFill>
+            <a:headEnd type="none" w="med" len="med"/>
+            <a:tailEnd type="triangle" w="med" len="med"/>
+          </a:ln>
+        </p:spPr>
+        <p:style>
+          <a:lnRef idx="1">
+            <a:schemeClr val="accent1"/>
+          </a:lnRef>
+          <a:fillRef idx="0">
+            <a:schemeClr val="accent1"/>
+          </a:fillRef>
+          <a:effectRef idx="0">
+            <a:schemeClr val="accent1"/>
+          </a:effectRef>
+          <a:fontRef idx="minor">
+            <a:schemeClr val="tx1"/>
+          </a:fontRef>
+        </p:style>
+      </p:cxnSp>
+      <p:sp>
+        <p:nvSpPr>
+          <p:cNvPr id="22" name="사각형: 둥근 모서리 114">
+            <a:extLst>
+              <a:ext uri="{FF2B5EF4-FFF2-40B4-BE49-F238E27FC236}">
+                <a16:creationId xmlns:a16="http://schemas.microsoft.com/office/drawing/2014/main" id="{11FE6D81-54D3-433F-201E-86F85E0C5348}"/>
+              </a:ext>
+            </a:extLst>
+          </p:cNvPr>
+          <p:cNvSpPr/>
+          <p:nvPr/>
+        </p:nvSpPr>
+        <p:spPr>
+          <a:xfrm>
+            <a:off x="3278436" y="4098308"/>
+            <a:ext cx="2731142" cy="281881"/>
+          </a:xfrm>
+          <a:prstGeom prst="roundRect">
+            <a:avLst>
+              <a:gd name="adj" fmla="val 10304"/>
+            </a:avLst>
+          </a:prstGeom>
+          <a:noFill/>
+          <a:ln>
+            <a:noFill/>
+          </a:ln>
+        </p:spPr>
+        <p:style>
+          <a:lnRef idx="2">
+            <a:schemeClr val="dk1"/>
+          </a:lnRef>
+          <a:fillRef idx="1">
+            <a:schemeClr val="lt1"/>
+          </a:fillRef>
+          <a:effectRef idx="0">
+            <a:schemeClr val="dk1"/>
+          </a:effectRef>
+          <a:fontRef idx="minor">
+            <a:schemeClr val="dk1"/>
+          </a:fontRef>
+        </p:style>
+        <p:txBody>
+          <a:bodyPr rtlCol="0" anchor="ctr"/>
+          <a:lstStyle/>
+          <a:p>
+            <a:pPr algn="ctr"/>
+            <a:r>
+              <a:rPr lang="en-US" altLang="ko-KR" sz="1200"/>
+              <a:t>OCI Runtime Spec</a:t>
+            </a:r>
+            <a:endParaRPr lang="en-US" altLang="ko-KR" sz="1200" dirty="0"/>
+          </a:p>
+        </p:txBody>
+      </p:sp>
+    </p:spTree>
+    <p:extLst>
+      <p:ext uri="{BB962C8B-B14F-4D97-AF65-F5344CB8AC3E}">
+        <p14:creationId xmlns:p14="http://schemas.microsoft.com/office/powerpoint/2010/main" val="3094524413"/>
+      </p:ext>
+    </p:extLst>
+  </p:cSld>
+  <p:clrMapOvr>
+    <a:masterClrMapping/>
+  </p:clrMapOvr>
+</p:sld>
+</file>
+
+<file path=ppt/slides/slide6.xml><?xml version="1.0" encoding="utf-8"?>
 <p:sld xmlns:a="http://schemas.openxmlformats.org/drawingml/2006/main" xmlns:r="http://schemas.openxmlformats.org/officeDocument/2006/relationships" xmlns:p="http://schemas.openxmlformats.org/presentationml/2006/main">
   <p:cSld>
     <p:spTree>
@@ -16104,584 +18171,6 @@
 </p:sld>
 </file>
 
-<file path=ppt/slides/slide6.xml><?xml version="1.0" encoding="utf-8"?>
-<p:sld xmlns:a="http://schemas.openxmlformats.org/drawingml/2006/main" xmlns:r="http://schemas.openxmlformats.org/officeDocument/2006/relationships" xmlns:p="http://schemas.openxmlformats.org/presentationml/2006/main">
-  <p:cSld>
-    <p:spTree>
-      <p:nvGrpSpPr>
-        <p:cNvPr id="1" name=""/>
-        <p:cNvGrpSpPr/>
-        <p:nvPr/>
-      </p:nvGrpSpPr>
-      <p:grpSpPr>
-        <a:xfrm>
-          <a:off x="0" y="0"/>
-          <a:ext cx="0" cy="0"/>
-          <a:chOff x="0" y="0"/>
-          <a:chExt cx="0" cy="0"/>
-        </a:xfrm>
-      </p:grpSpPr>
-      <p:sp>
-        <p:nvSpPr>
-          <p:cNvPr id="2" name="제목 1">
-            <a:extLst>
-              <a:ext uri="{FF2B5EF4-FFF2-40B4-BE49-F238E27FC236}">
-                <a16:creationId xmlns:a16="http://schemas.microsoft.com/office/drawing/2014/main" id="{8738443D-5E72-49E2-86AC-581D61C41C39}"/>
-              </a:ext>
-            </a:extLst>
-          </p:cNvPr>
-          <p:cNvSpPr>
-            <a:spLocks noGrp="1"/>
-          </p:cNvSpPr>
-          <p:nvPr>
-            <p:ph type="title"/>
-          </p:nvPr>
-        </p:nvSpPr>
-        <p:spPr>
-          <a:xfrm>
-            <a:off x="0" y="-726229"/>
-            <a:ext cx="9144000" cy="857250"/>
-          </a:xfrm>
-        </p:spPr>
-        <p:txBody>
-          <a:bodyPr>
-            <a:normAutofit fontScale="90000"/>
-          </a:bodyPr>
-          <a:lstStyle/>
-          <a:p>
-            <a:r>
-              <a:rPr lang="en-US" altLang="ko-KR"/>
-              <a:t>CUDA Container OCI Runtime Spec</a:t>
-            </a:r>
-            <a:endParaRPr lang="ko-KR" altLang="en-US" dirty="0"/>
-          </a:p>
-        </p:txBody>
-      </p:sp>
-      <p:sp>
-        <p:nvSpPr>
-          <p:cNvPr id="7" name="사각형: 둥근 모서리 114">
-            <a:extLst>
-              <a:ext uri="{FF2B5EF4-FFF2-40B4-BE49-F238E27FC236}">
-                <a16:creationId xmlns:a16="http://schemas.microsoft.com/office/drawing/2014/main" id="{E074CAD6-7716-4458-B0D4-1C0318E58F6D}"/>
-              </a:ext>
-            </a:extLst>
-          </p:cNvPr>
-          <p:cNvSpPr/>
-          <p:nvPr/>
-        </p:nvSpPr>
-        <p:spPr>
-          <a:xfrm>
-            <a:off x="2627784" y="259255"/>
-            <a:ext cx="4032448" cy="433441"/>
-          </a:xfrm>
-          <a:prstGeom prst="roundRect">
-            <a:avLst>
-              <a:gd name="adj" fmla="val 0"/>
-            </a:avLst>
-          </a:prstGeom>
-          <a:ln w="12700"/>
-        </p:spPr>
-        <p:style>
-          <a:lnRef idx="2">
-            <a:schemeClr val="dk1"/>
-          </a:lnRef>
-          <a:fillRef idx="1">
-            <a:schemeClr val="lt1"/>
-          </a:fillRef>
-          <a:effectRef idx="0">
-            <a:schemeClr val="dk1"/>
-          </a:effectRef>
-          <a:fontRef idx="minor">
-            <a:schemeClr val="dk1"/>
-          </a:fontRef>
-        </p:style>
-        <p:txBody>
-          <a:bodyPr rtlCol="0" anchor="ctr"/>
-          <a:lstStyle/>
-          <a:p>
-            <a:r>
-              <a:rPr lang="en-US" altLang="ko-KR" sz="1100"/>
-              <a:t>$ docker run --gpu all nvidia/cuda:9.0-base nvidia-smi</a:t>
-            </a:r>
-            <a:endParaRPr lang="en-US" altLang="ko-KR" sz="1100" dirty="0"/>
-          </a:p>
-        </p:txBody>
-      </p:sp>
-      <p:sp>
-        <p:nvSpPr>
-          <p:cNvPr id="11" name="사각형: 둥근 모서리 114">
-            <a:extLst>
-              <a:ext uri="{FF2B5EF4-FFF2-40B4-BE49-F238E27FC236}">
-                <a16:creationId xmlns:a16="http://schemas.microsoft.com/office/drawing/2014/main" id="{E07F06D4-AF1E-486E-8493-362B4DEDC5E3}"/>
-              </a:ext>
-            </a:extLst>
-          </p:cNvPr>
-          <p:cNvSpPr/>
-          <p:nvPr/>
-        </p:nvSpPr>
-        <p:spPr>
-          <a:xfrm>
-            <a:off x="899592" y="915566"/>
-            <a:ext cx="7488831" cy="3737569"/>
-          </a:xfrm>
-          <a:prstGeom prst="roundRect">
-            <a:avLst>
-              <a:gd name="adj" fmla="val 0"/>
-            </a:avLst>
-          </a:prstGeom>
-          <a:ln w="12700"/>
-        </p:spPr>
-        <p:style>
-          <a:lnRef idx="2">
-            <a:schemeClr val="dk1"/>
-          </a:lnRef>
-          <a:fillRef idx="1">
-            <a:schemeClr val="lt1"/>
-          </a:fillRef>
-          <a:effectRef idx="0">
-            <a:schemeClr val="dk1"/>
-          </a:effectRef>
-          <a:fontRef idx="minor">
-            <a:schemeClr val="dk1"/>
-          </a:fontRef>
-        </p:style>
-        <p:txBody>
-          <a:bodyPr rtlCol="0" anchor="ctr"/>
-          <a:lstStyle/>
-          <a:p>
-            <a:r>
-              <a:rPr lang="en-US" altLang="ko-KR" sz="1100" kern="0" dirty="0">
-                <a:cs typeface="Al Bayan Plain" pitchFamily="2" charset="-78"/>
-              </a:rPr>
-              <a:t>{</a:t>
-            </a:r>
-          </a:p>
-          <a:p>
-            <a:r>
-              <a:rPr lang="en-US" altLang="ko-KR" sz="1100" kern="0" dirty="0">
-                <a:cs typeface="Al Bayan Plain" pitchFamily="2" charset="-78"/>
-              </a:rPr>
-              <a:t>    "hooks": {</a:t>
-            </a:r>
-          </a:p>
-          <a:p>
-            <a:r>
-              <a:rPr lang="en-US" altLang="ko-KR" sz="1100" kern="0" dirty="0">
-                <a:cs typeface="Al Bayan Plain" pitchFamily="2" charset="-78"/>
-              </a:rPr>
-              <a:t>        "</a:t>
-            </a:r>
-            <a:r>
-              <a:rPr lang="en-US" altLang="ko-KR" sz="1100" kern="0" dirty="0" err="1">
-                <a:cs typeface="Al Bayan Plain" pitchFamily="2" charset="-78"/>
-              </a:rPr>
-              <a:t>Poststart</a:t>
-            </a:r>
-            <a:r>
-              <a:rPr lang="en-US" altLang="ko-KR" sz="1100" kern="0" dirty="0">
-                <a:cs typeface="Al Bayan Plain" pitchFamily="2" charset="-78"/>
-              </a:rPr>
-              <a:t>": [],</a:t>
-            </a:r>
-          </a:p>
-          <a:p>
-            <a:r>
-              <a:rPr lang="en-US" altLang="ko-KR" sz="1100" kern="0" dirty="0">
-                <a:cs typeface="Al Bayan Plain" pitchFamily="2" charset="-78"/>
-              </a:rPr>
-              <a:t>        "</a:t>
-            </a:r>
-            <a:r>
-              <a:rPr lang="en-US" altLang="ko-KR" sz="1100" kern="0" dirty="0" err="1">
-                <a:cs typeface="Al Bayan Plain" pitchFamily="2" charset="-78"/>
-              </a:rPr>
-              <a:t>Poststop</a:t>
-            </a:r>
-            <a:r>
-              <a:rPr lang="en-US" altLang="ko-KR" sz="1100" kern="0" dirty="0">
-                <a:cs typeface="Al Bayan Plain" pitchFamily="2" charset="-78"/>
-              </a:rPr>
-              <a:t>": [],</a:t>
-            </a:r>
-          </a:p>
-          <a:p>
-            <a:r>
-              <a:rPr lang="en-US" altLang="ko-KR" sz="1100" kern="0" dirty="0">
-                <a:cs typeface="Al Bayan Plain" pitchFamily="2" charset="-78"/>
-              </a:rPr>
-              <a:t>        "prestart": [{</a:t>
-            </a:r>
-          </a:p>
-          <a:p>
-            <a:r>
-              <a:rPr lang="en-US" altLang="ko-KR" sz="1100" kern="0" dirty="0">
-                <a:cs typeface="Al Bayan Plain" pitchFamily="2" charset="-78"/>
-              </a:rPr>
-              <a:t>            "</a:t>
-            </a:r>
-            <a:r>
-              <a:rPr lang="en-US" altLang="ko-KR" sz="1100" kern="0" dirty="0" err="1">
-                <a:cs typeface="Al Bayan Plain" pitchFamily="2" charset="-78"/>
-              </a:rPr>
-              <a:t>args</a:t>
-            </a:r>
-            <a:r>
-              <a:rPr lang="en-US" altLang="ko-KR" sz="1100" kern="0" dirty="0">
-                <a:cs typeface="Al Bayan Plain" pitchFamily="2" charset="-78"/>
-              </a:rPr>
-              <a:t>": ["/</a:t>
-            </a:r>
-            <a:r>
-              <a:rPr lang="en-US" altLang="ko-KR" sz="1100" kern="0" dirty="0" err="1">
-                <a:cs typeface="Al Bayan Plain" pitchFamily="2" charset="-78"/>
-              </a:rPr>
-              <a:t>usr</a:t>
-            </a:r>
-            <a:r>
-              <a:rPr lang="en-US" altLang="ko-KR" sz="1100" kern="0" dirty="0">
-                <a:cs typeface="Al Bayan Plain" pitchFamily="2" charset="-78"/>
-              </a:rPr>
-              <a:t>/bin/</a:t>
-            </a:r>
-            <a:r>
-              <a:rPr lang="en-US" altLang="ko-KR" sz="1100" kern="0" dirty="0" err="1">
-                <a:cs typeface="Al Bayan Plain" pitchFamily="2" charset="-78"/>
-              </a:rPr>
-              <a:t>nvidia</a:t>
-            </a:r>
-            <a:r>
-              <a:rPr lang="en-US" altLang="ko-KR" sz="1100" kern="0" dirty="0">
-                <a:cs typeface="Al Bayan Plain" pitchFamily="2" charset="-78"/>
-              </a:rPr>
-              <a:t>-container-runtime-hook", "prestart"],</a:t>
-            </a:r>
-          </a:p>
-          <a:p>
-            <a:r>
-              <a:rPr lang="en-US" altLang="ko-KR" sz="1100" kern="0" dirty="0">
-                <a:cs typeface="Al Bayan Plain" pitchFamily="2" charset="-78"/>
-              </a:rPr>
-              <a:t>            "path": "/</a:t>
-            </a:r>
-            <a:r>
-              <a:rPr lang="en-US" altLang="ko-KR" sz="1100" kern="0" dirty="0" err="1">
-                <a:cs typeface="Al Bayan Plain" pitchFamily="2" charset="-78"/>
-              </a:rPr>
-              <a:t>usr</a:t>
-            </a:r>
-            <a:r>
-              <a:rPr lang="en-US" altLang="ko-KR" sz="1100" kern="0" dirty="0">
-                <a:cs typeface="Al Bayan Plain" pitchFamily="2" charset="-78"/>
-              </a:rPr>
-              <a:t>/bin/</a:t>
-            </a:r>
-            <a:r>
-              <a:rPr lang="en-US" altLang="ko-KR" sz="1100" kern="0" dirty="0" err="1">
-                <a:cs typeface="Al Bayan Plain" pitchFamily="2" charset="-78"/>
-              </a:rPr>
-              <a:t>nvidia</a:t>
-            </a:r>
-            <a:r>
-              <a:rPr lang="en-US" altLang="ko-KR" sz="1100" kern="0" dirty="0">
-                <a:cs typeface="Al Bayan Plain" pitchFamily="2" charset="-78"/>
-              </a:rPr>
-              <a:t>-container-runtime-hook”</a:t>
-            </a:r>
-          </a:p>
-          <a:p>
-            <a:r>
-              <a:rPr lang="en-US" altLang="ko-KR" sz="1100" kern="0" dirty="0">
-                <a:cs typeface="Al Bayan Plain" pitchFamily="2" charset="-78"/>
-              </a:rPr>
-              <a:t>        }]</a:t>
-            </a:r>
-          </a:p>
-          <a:p>
-            <a:r>
-              <a:rPr lang="en-US" altLang="ko-KR" sz="1100" kern="0" dirty="0">
-                <a:cs typeface="Al Bayan Plain" pitchFamily="2" charset="-78"/>
-              </a:rPr>
-              <a:t>    },</a:t>
-            </a:r>
-          </a:p>
-          <a:p>
-            <a:r>
-              <a:rPr lang="en-US" altLang="ko-KR" sz="1100" kern="0" dirty="0">
-                <a:cs typeface="Al Bayan Plain" pitchFamily="2" charset="-78"/>
-              </a:rPr>
-              <a:t>...</a:t>
-            </a:r>
-          </a:p>
-          <a:p>
-            <a:r>
-              <a:rPr lang="en-US" altLang="ko-KR" sz="1100" kern="0" dirty="0">
-                <a:cs typeface="Al Bayan Plain" pitchFamily="2" charset="-78"/>
-              </a:rPr>
-              <a:t>    "process": {</a:t>
-            </a:r>
-          </a:p>
-          <a:p>
-            <a:r>
-              <a:rPr lang="en-US" altLang="ko-KR" sz="1100" kern="0" dirty="0">
-                <a:cs typeface="Al Bayan Plain" pitchFamily="2" charset="-78"/>
-              </a:rPr>
-              <a:t>        “env”: [</a:t>
-            </a:r>
-          </a:p>
-          <a:p>
-            <a:r>
-              <a:rPr lang="en-US" altLang="ko-KR" sz="1100" kern="0" dirty="0">
-                <a:cs typeface="Al Bayan Plain" pitchFamily="2" charset="-78"/>
-              </a:rPr>
-              <a:t>            "NVIDIA_VISIBLE_DEVICES=GPU-5a270e58-abc7-d55b-a94f-54d410c1dfe2,GPU-9de66fe4-2a8b-4a2b-36bc-d61c165db7d8",</a:t>
-            </a:r>
-          </a:p>
-          <a:p>
-            <a:r>
-              <a:rPr lang="en-US" altLang="ko-KR" sz="1100" kern="0" dirty="0">
-                <a:cs typeface="Al Bayan Plain" pitchFamily="2" charset="-78"/>
-              </a:rPr>
-              <a:t>            “NVIDIA_DRIVER_CAPABILITIES=</a:t>
-            </a:r>
-            <a:r>
-              <a:rPr lang="en-US" altLang="ko-KR" sz="1100" kern="0" dirty="0" err="1">
-                <a:cs typeface="Al Bayan Plain" pitchFamily="2" charset="-78"/>
-              </a:rPr>
-              <a:t>compute,utility</a:t>
-            </a:r>
-            <a:r>
-              <a:rPr lang="en-US" altLang="ko-KR" sz="1100" kern="0" dirty="0">
-                <a:cs typeface="Al Bayan Plain" pitchFamily="2" charset="-78"/>
-              </a:rPr>
-              <a:t>”,</a:t>
-            </a:r>
-          </a:p>
-          <a:p>
-            <a:r>
-              <a:rPr lang="en-US" altLang="ko-KR" sz="1100" kern="0" dirty="0">
-                <a:cs typeface="Al Bayan Plain" pitchFamily="2" charset="-78"/>
-              </a:rPr>
-              <a:t>            "NV_CUDA_CUDART_VERSION=11.8.89-1",</a:t>
-            </a:r>
-          </a:p>
-          <a:p>
-            <a:r>
-              <a:rPr lang="en-US" altLang="ko-KR" sz="1100" kern="0" dirty="0">
-                <a:cs typeface="Al Bayan Plain" pitchFamily="2" charset="-78"/>
-              </a:rPr>
-              <a:t>            "CUDA_VERSION=11.8.0”,</a:t>
-            </a:r>
-          </a:p>
-          <a:p>
-            <a:r>
-              <a:rPr lang="en-US" altLang="ko-KR" sz="1100" kern="0" dirty="0">
-                <a:cs typeface="Al Bayan Plain" pitchFamily="2" charset="-78"/>
-              </a:rPr>
-              <a:t>            "LD_LIBRARY_PATH=/</a:t>
-            </a:r>
-            <a:r>
-              <a:rPr lang="en-US" altLang="ko-KR" sz="1100" kern="0" dirty="0" err="1">
-                <a:cs typeface="Al Bayan Plain" pitchFamily="2" charset="-78"/>
-              </a:rPr>
-              <a:t>usr</a:t>
-            </a:r>
-            <a:r>
-              <a:rPr lang="en-US" altLang="ko-KR" sz="1100" kern="0" dirty="0">
-                <a:cs typeface="Al Bayan Plain" pitchFamily="2" charset="-78"/>
-              </a:rPr>
-              <a:t>/local/</a:t>
-            </a:r>
-            <a:r>
-              <a:rPr lang="en-US" altLang="ko-KR" sz="1100" kern="0" dirty="0" err="1">
-                <a:cs typeface="Al Bayan Plain" pitchFamily="2" charset="-78"/>
-              </a:rPr>
-              <a:t>nvidia</a:t>
-            </a:r>
-            <a:r>
-              <a:rPr lang="en-US" altLang="ko-KR" sz="1100" kern="0" dirty="0">
-                <a:cs typeface="Al Bayan Plain" pitchFamily="2" charset="-78"/>
-              </a:rPr>
-              <a:t>/lib:/</a:t>
-            </a:r>
-            <a:r>
-              <a:rPr lang="en-US" altLang="ko-KR" sz="1100" kern="0" dirty="0" err="1">
-                <a:cs typeface="Al Bayan Plain" pitchFamily="2" charset="-78"/>
-              </a:rPr>
-              <a:t>usr</a:t>
-            </a:r>
-            <a:r>
-              <a:rPr lang="en-US" altLang="ko-KR" sz="1100" kern="0" dirty="0">
-                <a:cs typeface="Al Bayan Plain" pitchFamily="2" charset="-78"/>
-              </a:rPr>
-              <a:t>/local/</a:t>
-            </a:r>
-            <a:r>
-              <a:rPr lang="en-US" altLang="ko-KR" sz="1100" kern="0" dirty="0" err="1">
-                <a:cs typeface="Al Bayan Plain" pitchFamily="2" charset="-78"/>
-              </a:rPr>
-              <a:t>nvidia</a:t>
-            </a:r>
-            <a:r>
-              <a:rPr lang="en-US" altLang="ko-KR" sz="1100" kern="0" dirty="0">
-                <a:cs typeface="Al Bayan Plain" pitchFamily="2" charset="-78"/>
-              </a:rPr>
-              <a:t>/lib64"</a:t>
-            </a:r>
-          </a:p>
-          <a:p>
-            <a:r>
-              <a:rPr lang="en-US" altLang="ko-KR" sz="1100" kern="0" dirty="0">
-                <a:cs typeface="Al Bayan Plain" pitchFamily="2" charset="-78"/>
-              </a:rPr>
-              <a:t>            ...</a:t>
-            </a:r>
-            <a:br>
-              <a:rPr lang="en-US" altLang="ko-KR" sz="1100" kern="0" dirty="0">
-                <a:cs typeface="Al Bayan Plain" pitchFamily="2" charset="-78"/>
-              </a:rPr>
-            </a:br>
-            <a:r>
-              <a:rPr lang="en-US" altLang="ko-KR" sz="1100" kern="0" dirty="0">
-                <a:cs typeface="Al Bayan Plain" pitchFamily="2" charset="-78"/>
-              </a:rPr>
-              <a:t>        ]</a:t>
-            </a:r>
-          </a:p>
-          <a:p>
-            <a:r>
-              <a:rPr lang="en-US" altLang="ko-KR" sz="1100" kern="0" dirty="0">
-                <a:cs typeface="Al Bayan Plain" pitchFamily="2" charset="-78"/>
-              </a:rPr>
-              <a:t>    }</a:t>
-            </a:r>
-          </a:p>
-          <a:p>
-            <a:r>
-              <a:rPr lang="en-US" altLang="ko-KR" sz="1100" kern="0" dirty="0">
-                <a:cs typeface="Al Bayan Plain" pitchFamily="2" charset="-78"/>
-              </a:rPr>
-              <a:t>...</a:t>
-            </a:r>
-            <a:endParaRPr lang="en-US" altLang="ko-KR" sz="1600" kern="0" dirty="0">
-              <a:cs typeface="Al Bayan Plain" pitchFamily="2" charset="-78"/>
-            </a:endParaRPr>
-          </a:p>
-        </p:txBody>
-      </p:sp>
-      <p:cxnSp>
-        <p:nvCxnSpPr>
-          <p:cNvPr id="9" name="직선 화살표 연결선 8">
-            <a:extLst>
-              <a:ext uri="{FF2B5EF4-FFF2-40B4-BE49-F238E27FC236}">
-                <a16:creationId xmlns:a16="http://schemas.microsoft.com/office/drawing/2014/main" id="{D3447036-464F-4C90-9B09-6E8806442451}"/>
-              </a:ext>
-            </a:extLst>
-          </p:cNvPr>
-          <p:cNvCxnSpPr>
-            <a:cxnSpLocks/>
-            <a:stCxn id="7" idx="2"/>
-            <a:endCxn id="11" idx="0"/>
-          </p:cNvCxnSpPr>
-          <p:nvPr/>
-        </p:nvCxnSpPr>
-        <p:spPr>
-          <a:xfrm>
-            <a:off x="4644008" y="692696"/>
-            <a:ext cx="0" cy="222870"/>
-          </a:xfrm>
-          <a:prstGeom prst="straightConnector1">
-            <a:avLst/>
-          </a:prstGeom>
-          <a:ln w="12700">
-            <a:solidFill>
-              <a:schemeClr val="tx1"/>
-            </a:solidFill>
-            <a:headEnd type="none" w="med" len="med"/>
-            <a:tailEnd type="triangle" w="med" len="med"/>
-          </a:ln>
-        </p:spPr>
-        <p:style>
-          <a:lnRef idx="1">
-            <a:schemeClr val="accent1"/>
-          </a:lnRef>
-          <a:fillRef idx="0">
-            <a:schemeClr val="accent1"/>
-          </a:fillRef>
-          <a:effectRef idx="0">
-            <a:schemeClr val="accent1"/>
-          </a:effectRef>
-          <a:fontRef idx="minor">
-            <a:schemeClr val="tx1"/>
-          </a:fontRef>
-        </p:style>
-      </p:cxnSp>
-      <p:sp>
-        <p:nvSpPr>
-          <p:cNvPr id="22" name="사각형: 둥근 모서리 114">
-            <a:extLst>
-              <a:ext uri="{FF2B5EF4-FFF2-40B4-BE49-F238E27FC236}">
-                <a16:creationId xmlns:a16="http://schemas.microsoft.com/office/drawing/2014/main" id="{0B79FB11-EB5E-48B2-9B7D-2CF7A5759856}"/>
-              </a:ext>
-            </a:extLst>
-          </p:cNvPr>
-          <p:cNvSpPr/>
-          <p:nvPr/>
-        </p:nvSpPr>
-        <p:spPr>
-          <a:xfrm>
-            <a:off x="3278436" y="4587974"/>
-            <a:ext cx="2731142" cy="433441"/>
-          </a:xfrm>
-          <a:prstGeom prst="roundRect">
-            <a:avLst>
-              <a:gd name="adj" fmla="val 10304"/>
-            </a:avLst>
-          </a:prstGeom>
-          <a:noFill/>
-          <a:ln>
-            <a:noFill/>
-          </a:ln>
-        </p:spPr>
-        <p:style>
-          <a:lnRef idx="2">
-            <a:schemeClr val="dk1"/>
-          </a:lnRef>
-          <a:fillRef idx="1">
-            <a:schemeClr val="lt1"/>
-          </a:fillRef>
-          <a:effectRef idx="0">
-            <a:schemeClr val="dk1"/>
-          </a:effectRef>
-          <a:fontRef idx="minor">
-            <a:schemeClr val="dk1"/>
-          </a:fontRef>
-        </p:style>
-        <p:txBody>
-          <a:bodyPr rtlCol="0" anchor="ctr"/>
-          <a:lstStyle/>
-          <a:p>
-            <a:pPr algn="ctr"/>
-            <a:r>
-              <a:rPr lang="en-US" altLang="ko-KR" sz="1200"/>
-              <a:t>OCI Runtime Spec</a:t>
-            </a:r>
-            <a:endParaRPr lang="en-US" altLang="ko-KR" sz="1200" dirty="0"/>
-          </a:p>
-        </p:txBody>
-      </p:sp>
-    </p:spTree>
-    <p:extLst>
-      <p:ext uri="{BB962C8B-B14F-4D97-AF65-F5344CB8AC3E}">
-        <p14:creationId xmlns:p14="http://schemas.microsoft.com/office/powerpoint/2010/main" val="3265569655"/>
-      </p:ext>
-    </p:extLst>
-  </p:cSld>
-  <p:clrMapOvr>
-    <a:masterClrMapping/>
-  </p:clrMapOvr>
-</p:sld>
-</file>
-
 <file path=ppt/slides/slide7.xml><?xml version="1.0" encoding="utf-8"?>
 <p:sld xmlns:a="http://schemas.openxmlformats.org/drawingml/2006/main" xmlns:r="http://schemas.openxmlformats.org/officeDocument/2006/relationships" xmlns:p="http://schemas.openxmlformats.org/presentationml/2006/main">
   <p:cSld>
@@ -16717,6 +18206,584 @@
         </p:nvSpPr>
         <p:spPr>
           <a:xfrm>
+            <a:off x="0" y="-726229"/>
+            <a:ext cx="9144000" cy="857250"/>
+          </a:xfrm>
+        </p:spPr>
+        <p:txBody>
+          <a:bodyPr>
+            <a:normAutofit fontScale="90000"/>
+          </a:bodyPr>
+          <a:lstStyle/>
+          <a:p>
+            <a:r>
+              <a:rPr lang="en-US" altLang="ko-KR"/>
+              <a:t>CUDA Container OCI Runtime Spec</a:t>
+            </a:r>
+            <a:endParaRPr lang="ko-KR" altLang="en-US" dirty="0"/>
+          </a:p>
+        </p:txBody>
+      </p:sp>
+      <p:sp>
+        <p:nvSpPr>
+          <p:cNvPr id="7" name="사각형: 둥근 모서리 114">
+            <a:extLst>
+              <a:ext uri="{FF2B5EF4-FFF2-40B4-BE49-F238E27FC236}">
+                <a16:creationId xmlns:a16="http://schemas.microsoft.com/office/drawing/2014/main" id="{E074CAD6-7716-4458-B0D4-1C0318E58F6D}"/>
+              </a:ext>
+            </a:extLst>
+          </p:cNvPr>
+          <p:cNvSpPr/>
+          <p:nvPr/>
+        </p:nvSpPr>
+        <p:spPr>
+          <a:xfrm>
+            <a:off x="2627784" y="259255"/>
+            <a:ext cx="4032448" cy="433441"/>
+          </a:xfrm>
+          <a:prstGeom prst="roundRect">
+            <a:avLst>
+              <a:gd name="adj" fmla="val 0"/>
+            </a:avLst>
+          </a:prstGeom>
+          <a:ln w="12700"/>
+        </p:spPr>
+        <p:style>
+          <a:lnRef idx="2">
+            <a:schemeClr val="dk1"/>
+          </a:lnRef>
+          <a:fillRef idx="1">
+            <a:schemeClr val="lt1"/>
+          </a:fillRef>
+          <a:effectRef idx="0">
+            <a:schemeClr val="dk1"/>
+          </a:effectRef>
+          <a:fontRef idx="minor">
+            <a:schemeClr val="dk1"/>
+          </a:fontRef>
+        </p:style>
+        <p:txBody>
+          <a:bodyPr rtlCol="0" anchor="ctr"/>
+          <a:lstStyle/>
+          <a:p>
+            <a:r>
+              <a:rPr lang="en-US" altLang="ko-KR" sz="1100"/>
+              <a:t>$ docker run --gpu all nvidia/cuda:9.0-base nvidia-smi</a:t>
+            </a:r>
+            <a:endParaRPr lang="en-US" altLang="ko-KR" sz="1100" dirty="0"/>
+          </a:p>
+        </p:txBody>
+      </p:sp>
+      <p:sp>
+        <p:nvSpPr>
+          <p:cNvPr id="11" name="사각형: 둥근 모서리 114">
+            <a:extLst>
+              <a:ext uri="{FF2B5EF4-FFF2-40B4-BE49-F238E27FC236}">
+                <a16:creationId xmlns:a16="http://schemas.microsoft.com/office/drawing/2014/main" id="{E07F06D4-AF1E-486E-8493-362B4DEDC5E3}"/>
+              </a:ext>
+            </a:extLst>
+          </p:cNvPr>
+          <p:cNvSpPr/>
+          <p:nvPr/>
+        </p:nvSpPr>
+        <p:spPr>
+          <a:xfrm>
+            <a:off x="899592" y="915566"/>
+            <a:ext cx="7488831" cy="3737569"/>
+          </a:xfrm>
+          <a:prstGeom prst="roundRect">
+            <a:avLst>
+              <a:gd name="adj" fmla="val 0"/>
+            </a:avLst>
+          </a:prstGeom>
+          <a:ln w="12700"/>
+        </p:spPr>
+        <p:style>
+          <a:lnRef idx="2">
+            <a:schemeClr val="dk1"/>
+          </a:lnRef>
+          <a:fillRef idx="1">
+            <a:schemeClr val="lt1"/>
+          </a:fillRef>
+          <a:effectRef idx="0">
+            <a:schemeClr val="dk1"/>
+          </a:effectRef>
+          <a:fontRef idx="minor">
+            <a:schemeClr val="dk1"/>
+          </a:fontRef>
+        </p:style>
+        <p:txBody>
+          <a:bodyPr rtlCol="0" anchor="ctr"/>
+          <a:lstStyle/>
+          <a:p>
+            <a:r>
+              <a:rPr lang="en-US" altLang="ko-KR" sz="1100" kern="0" dirty="0">
+                <a:cs typeface="Al Bayan Plain" pitchFamily="2" charset="-78"/>
+              </a:rPr>
+              <a:t>{</a:t>
+            </a:r>
+          </a:p>
+          <a:p>
+            <a:r>
+              <a:rPr lang="en-US" altLang="ko-KR" sz="1100" kern="0" dirty="0">
+                <a:cs typeface="Al Bayan Plain" pitchFamily="2" charset="-78"/>
+              </a:rPr>
+              <a:t>    "hooks": {</a:t>
+            </a:r>
+          </a:p>
+          <a:p>
+            <a:r>
+              <a:rPr lang="en-US" altLang="ko-KR" sz="1100" kern="0" dirty="0">
+                <a:cs typeface="Al Bayan Plain" pitchFamily="2" charset="-78"/>
+              </a:rPr>
+              <a:t>        "</a:t>
+            </a:r>
+            <a:r>
+              <a:rPr lang="en-US" altLang="ko-KR" sz="1100" kern="0" dirty="0" err="1">
+                <a:cs typeface="Al Bayan Plain" pitchFamily="2" charset="-78"/>
+              </a:rPr>
+              <a:t>Poststart</a:t>
+            </a:r>
+            <a:r>
+              <a:rPr lang="en-US" altLang="ko-KR" sz="1100" kern="0" dirty="0">
+                <a:cs typeface="Al Bayan Plain" pitchFamily="2" charset="-78"/>
+              </a:rPr>
+              <a:t>": [],</a:t>
+            </a:r>
+          </a:p>
+          <a:p>
+            <a:r>
+              <a:rPr lang="en-US" altLang="ko-KR" sz="1100" kern="0" dirty="0">
+                <a:cs typeface="Al Bayan Plain" pitchFamily="2" charset="-78"/>
+              </a:rPr>
+              <a:t>        "</a:t>
+            </a:r>
+            <a:r>
+              <a:rPr lang="en-US" altLang="ko-KR" sz="1100" kern="0" dirty="0" err="1">
+                <a:cs typeface="Al Bayan Plain" pitchFamily="2" charset="-78"/>
+              </a:rPr>
+              <a:t>Poststop</a:t>
+            </a:r>
+            <a:r>
+              <a:rPr lang="en-US" altLang="ko-KR" sz="1100" kern="0" dirty="0">
+                <a:cs typeface="Al Bayan Plain" pitchFamily="2" charset="-78"/>
+              </a:rPr>
+              <a:t>": [],</a:t>
+            </a:r>
+          </a:p>
+          <a:p>
+            <a:r>
+              <a:rPr lang="en-US" altLang="ko-KR" sz="1100" kern="0" dirty="0">
+                <a:cs typeface="Al Bayan Plain" pitchFamily="2" charset="-78"/>
+              </a:rPr>
+              <a:t>        "prestart": [{</a:t>
+            </a:r>
+          </a:p>
+          <a:p>
+            <a:r>
+              <a:rPr lang="en-US" altLang="ko-KR" sz="1100" kern="0" dirty="0">
+                <a:cs typeface="Al Bayan Plain" pitchFamily="2" charset="-78"/>
+              </a:rPr>
+              <a:t>            "</a:t>
+            </a:r>
+            <a:r>
+              <a:rPr lang="en-US" altLang="ko-KR" sz="1100" kern="0" dirty="0" err="1">
+                <a:cs typeface="Al Bayan Plain" pitchFamily="2" charset="-78"/>
+              </a:rPr>
+              <a:t>args</a:t>
+            </a:r>
+            <a:r>
+              <a:rPr lang="en-US" altLang="ko-KR" sz="1100" kern="0" dirty="0">
+                <a:cs typeface="Al Bayan Plain" pitchFamily="2" charset="-78"/>
+              </a:rPr>
+              <a:t>": ["/</a:t>
+            </a:r>
+            <a:r>
+              <a:rPr lang="en-US" altLang="ko-KR" sz="1100" kern="0" dirty="0" err="1">
+                <a:cs typeface="Al Bayan Plain" pitchFamily="2" charset="-78"/>
+              </a:rPr>
+              <a:t>usr</a:t>
+            </a:r>
+            <a:r>
+              <a:rPr lang="en-US" altLang="ko-KR" sz="1100" kern="0" dirty="0">
+                <a:cs typeface="Al Bayan Plain" pitchFamily="2" charset="-78"/>
+              </a:rPr>
+              <a:t>/bin/</a:t>
+            </a:r>
+            <a:r>
+              <a:rPr lang="en-US" altLang="ko-KR" sz="1100" kern="0" dirty="0" err="1">
+                <a:cs typeface="Al Bayan Plain" pitchFamily="2" charset="-78"/>
+              </a:rPr>
+              <a:t>nvidia</a:t>
+            </a:r>
+            <a:r>
+              <a:rPr lang="en-US" altLang="ko-KR" sz="1100" kern="0" dirty="0">
+                <a:cs typeface="Al Bayan Plain" pitchFamily="2" charset="-78"/>
+              </a:rPr>
+              <a:t>-container-runtime-hook", "prestart"],</a:t>
+            </a:r>
+          </a:p>
+          <a:p>
+            <a:r>
+              <a:rPr lang="en-US" altLang="ko-KR" sz="1100" kern="0" dirty="0">
+                <a:cs typeface="Al Bayan Plain" pitchFamily="2" charset="-78"/>
+              </a:rPr>
+              <a:t>            "path": "/</a:t>
+            </a:r>
+            <a:r>
+              <a:rPr lang="en-US" altLang="ko-KR" sz="1100" kern="0" dirty="0" err="1">
+                <a:cs typeface="Al Bayan Plain" pitchFamily="2" charset="-78"/>
+              </a:rPr>
+              <a:t>usr</a:t>
+            </a:r>
+            <a:r>
+              <a:rPr lang="en-US" altLang="ko-KR" sz="1100" kern="0" dirty="0">
+                <a:cs typeface="Al Bayan Plain" pitchFamily="2" charset="-78"/>
+              </a:rPr>
+              <a:t>/bin/</a:t>
+            </a:r>
+            <a:r>
+              <a:rPr lang="en-US" altLang="ko-KR" sz="1100" kern="0" dirty="0" err="1">
+                <a:cs typeface="Al Bayan Plain" pitchFamily="2" charset="-78"/>
+              </a:rPr>
+              <a:t>nvidia</a:t>
+            </a:r>
+            <a:r>
+              <a:rPr lang="en-US" altLang="ko-KR" sz="1100" kern="0" dirty="0">
+                <a:cs typeface="Al Bayan Plain" pitchFamily="2" charset="-78"/>
+              </a:rPr>
+              <a:t>-container-runtime-hook”</a:t>
+            </a:r>
+          </a:p>
+          <a:p>
+            <a:r>
+              <a:rPr lang="en-US" altLang="ko-KR" sz="1100" kern="0" dirty="0">
+                <a:cs typeface="Al Bayan Plain" pitchFamily="2" charset="-78"/>
+              </a:rPr>
+              <a:t>        }]</a:t>
+            </a:r>
+          </a:p>
+          <a:p>
+            <a:r>
+              <a:rPr lang="en-US" altLang="ko-KR" sz="1100" kern="0" dirty="0">
+                <a:cs typeface="Al Bayan Plain" pitchFamily="2" charset="-78"/>
+              </a:rPr>
+              <a:t>    },</a:t>
+            </a:r>
+          </a:p>
+          <a:p>
+            <a:r>
+              <a:rPr lang="en-US" altLang="ko-KR" sz="1100" kern="0" dirty="0">
+                <a:cs typeface="Al Bayan Plain" pitchFamily="2" charset="-78"/>
+              </a:rPr>
+              <a:t>...</a:t>
+            </a:r>
+          </a:p>
+          <a:p>
+            <a:r>
+              <a:rPr lang="en-US" altLang="ko-KR" sz="1100" kern="0" dirty="0">
+                <a:cs typeface="Al Bayan Plain" pitchFamily="2" charset="-78"/>
+              </a:rPr>
+              <a:t>    "process": {</a:t>
+            </a:r>
+          </a:p>
+          <a:p>
+            <a:r>
+              <a:rPr lang="en-US" altLang="ko-KR" sz="1100" kern="0" dirty="0">
+                <a:cs typeface="Al Bayan Plain" pitchFamily="2" charset="-78"/>
+              </a:rPr>
+              <a:t>        “env”: [</a:t>
+            </a:r>
+          </a:p>
+          <a:p>
+            <a:r>
+              <a:rPr lang="en-US" altLang="ko-KR" sz="1100" kern="0" dirty="0">
+                <a:cs typeface="Al Bayan Plain" pitchFamily="2" charset="-78"/>
+              </a:rPr>
+              <a:t>            "NVIDIA_VISIBLE_DEVICES=GPU-5a270e58-abc7-d55b-a94f-54d410c1dfe2,GPU-9de66fe4-2a8b-4a2b-36bc-d61c165db7d8",</a:t>
+            </a:r>
+          </a:p>
+          <a:p>
+            <a:r>
+              <a:rPr lang="en-US" altLang="ko-KR" sz="1100" kern="0" dirty="0">
+                <a:cs typeface="Al Bayan Plain" pitchFamily="2" charset="-78"/>
+              </a:rPr>
+              <a:t>            “NVIDIA_DRIVER_CAPABILITIES=</a:t>
+            </a:r>
+            <a:r>
+              <a:rPr lang="en-US" altLang="ko-KR" sz="1100" kern="0" dirty="0" err="1">
+                <a:cs typeface="Al Bayan Plain" pitchFamily="2" charset="-78"/>
+              </a:rPr>
+              <a:t>compute,utility</a:t>
+            </a:r>
+            <a:r>
+              <a:rPr lang="en-US" altLang="ko-KR" sz="1100" kern="0" dirty="0">
+                <a:cs typeface="Al Bayan Plain" pitchFamily="2" charset="-78"/>
+              </a:rPr>
+              <a:t>”,</a:t>
+            </a:r>
+          </a:p>
+          <a:p>
+            <a:r>
+              <a:rPr lang="en-US" altLang="ko-KR" sz="1100" kern="0" dirty="0">
+                <a:cs typeface="Al Bayan Plain" pitchFamily="2" charset="-78"/>
+              </a:rPr>
+              <a:t>            "NV_CUDA_CUDART_VERSION=11.8.89-1",</a:t>
+            </a:r>
+          </a:p>
+          <a:p>
+            <a:r>
+              <a:rPr lang="en-US" altLang="ko-KR" sz="1100" kern="0" dirty="0">
+                <a:cs typeface="Al Bayan Plain" pitchFamily="2" charset="-78"/>
+              </a:rPr>
+              <a:t>            "CUDA_VERSION=11.8.0”,</a:t>
+            </a:r>
+          </a:p>
+          <a:p>
+            <a:r>
+              <a:rPr lang="en-US" altLang="ko-KR" sz="1100" kern="0" dirty="0">
+                <a:cs typeface="Al Bayan Plain" pitchFamily="2" charset="-78"/>
+              </a:rPr>
+              <a:t>            "LD_LIBRARY_PATH=/</a:t>
+            </a:r>
+            <a:r>
+              <a:rPr lang="en-US" altLang="ko-KR" sz="1100" kern="0" dirty="0" err="1">
+                <a:cs typeface="Al Bayan Plain" pitchFamily="2" charset="-78"/>
+              </a:rPr>
+              <a:t>usr</a:t>
+            </a:r>
+            <a:r>
+              <a:rPr lang="en-US" altLang="ko-KR" sz="1100" kern="0" dirty="0">
+                <a:cs typeface="Al Bayan Plain" pitchFamily="2" charset="-78"/>
+              </a:rPr>
+              <a:t>/local/</a:t>
+            </a:r>
+            <a:r>
+              <a:rPr lang="en-US" altLang="ko-KR" sz="1100" kern="0" dirty="0" err="1">
+                <a:cs typeface="Al Bayan Plain" pitchFamily="2" charset="-78"/>
+              </a:rPr>
+              <a:t>nvidia</a:t>
+            </a:r>
+            <a:r>
+              <a:rPr lang="en-US" altLang="ko-KR" sz="1100" kern="0" dirty="0">
+                <a:cs typeface="Al Bayan Plain" pitchFamily="2" charset="-78"/>
+              </a:rPr>
+              <a:t>/lib:/</a:t>
+            </a:r>
+            <a:r>
+              <a:rPr lang="en-US" altLang="ko-KR" sz="1100" kern="0" dirty="0" err="1">
+                <a:cs typeface="Al Bayan Plain" pitchFamily="2" charset="-78"/>
+              </a:rPr>
+              <a:t>usr</a:t>
+            </a:r>
+            <a:r>
+              <a:rPr lang="en-US" altLang="ko-KR" sz="1100" kern="0" dirty="0">
+                <a:cs typeface="Al Bayan Plain" pitchFamily="2" charset="-78"/>
+              </a:rPr>
+              <a:t>/local/</a:t>
+            </a:r>
+            <a:r>
+              <a:rPr lang="en-US" altLang="ko-KR" sz="1100" kern="0" dirty="0" err="1">
+                <a:cs typeface="Al Bayan Plain" pitchFamily="2" charset="-78"/>
+              </a:rPr>
+              <a:t>nvidia</a:t>
+            </a:r>
+            <a:r>
+              <a:rPr lang="en-US" altLang="ko-KR" sz="1100" kern="0" dirty="0">
+                <a:cs typeface="Al Bayan Plain" pitchFamily="2" charset="-78"/>
+              </a:rPr>
+              <a:t>/lib64"</a:t>
+            </a:r>
+          </a:p>
+          <a:p>
+            <a:r>
+              <a:rPr lang="en-US" altLang="ko-KR" sz="1100" kern="0" dirty="0">
+                <a:cs typeface="Al Bayan Plain" pitchFamily="2" charset="-78"/>
+              </a:rPr>
+              <a:t>            ...</a:t>
+            </a:r>
+            <a:br>
+              <a:rPr lang="en-US" altLang="ko-KR" sz="1100" kern="0" dirty="0">
+                <a:cs typeface="Al Bayan Plain" pitchFamily="2" charset="-78"/>
+              </a:rPr>
+            </a:br>
+            <a:r>
+              <a:rPr lang="en-US" altLang="ko-KR" sz="1100" kern="0" dirty="0">
+                <a:cs typeface="Al Bayan Plain" pitchFamily="2" charset="-78"/>
+              </a:rPr>
+              <a:t>        ]</a:t>
+            </a:r>
+          </a:p>
+          <a:p>
+            <a:r>
+              <a:rPr lang="en-US" altLang="ko-KR" sz="1100" kern="0" dirty="0">
+                <a:cs typeface="Al Bayan Plain" pitchFamily="2" charset="-78"/>
+              </a:rPr>
+              <a:t>    }</a:t>
+            </a:r>
+          </a:p>
+          <a:p>
+            <a:r>
+              <a:rPr lang="en-US" altLang="ko-KR" sz="1100" kern="0" dirty="0">
+                <a:cs typeface="Al Bayan Plain" pitchFamily="2" charset="-78"/>
+              </a:rPr>
+              <a:t>...</a:t>
+            </a:r>
+            <a:endParaRPr lang="en-US" altLang="ko-KR" sz="1600" kern="0" dirty="0">
+              <a:cs typeface="Al Bayan Plain" pitchFamily="2" charset="-78"/>
+            </a:endParaRPr>
+          </a:p>
+        </p:txBody>
+      </p:sp>
+      <p:cxnSp>
+        <p:nvCxnSpPr>
+          <p:cNvPr id="9" name="직선 화살표 연결선 8">
+            <a:extLst>
+              <a:ext uri="{FF2B5EF4-FFF2-40B4-BE49-F238E27FC236}">
+                <a16:creationId xmlns:a16="http://schemas.microsoft.com/office/drawing/2014/main" id="{D3447036-464F-4C90-9B09-6E8806442451}"/>
+              </a:ext>
+            </a:extLst>
+          </p:cNvPr>
+          <p:cNvCxnSpPr>
+            <a:cxnSpLocks/>
+            <a:stCxn id="7" idx="2"/>
+            <a:endCxn id="11" idx="0"/>
+          </p:cNvCxnSpPr>
+          <p:nvPr/>
+        </p:nvCxnSpPr>
+        <p:spPr>
+          <a:xfrm>
+            <a:off x="4644008" y="692696"/>
+            <a:ext cx="0" cy="222870"/>
+          </a:xfrm>
+          <a:prstGeom prst="straightConnector1">
+            <a:avLst/>
+          </a:prstGeom>
+          <a:ln w="12700">
+            <a:solidFill>
+              <a:schemeClr val="tx1"/>
+            </a:solidFill>
+            <a:headEnd type="none" w="med" len="med"/>
+            <a:tailEnd type="triangle" w="med" len="med"/>
+          </a:ln>
+        </p:spPr>
+        <p:style>
+          <a:lnRef idx="1">
+            <a:schemeClr val="accent1"/>
+          </a:lnRef>
+          <a:fillRef idx="0">
+            <a:schemeClr val="accent1"/>
+          </a:fillRef>
+          <a:effectRef idx="0">
+            <a:schemeClr val="accent1"/>
+          </a:effectRef>
+          <a:fontRef idx="minor">
+            <a:schemeClr val="tx1"/>
+          </a:fontRef>
+        </p:style>
+      </p:cxnSp>
+      <p:sp>
+        <p:nvSpPr>
+          <p:cNvPr id="22" name="사각형: 둥근 모서리 114">
+            <a:extLst>
+              <a:ext uri="{FF2B5EF4-FFF2-40B4-BE49-F238E27FC236}">
+                <a16:creationId xmlns:a16="http://schemas.microsoft.com/office/drawing/2014/main" id="{0B79FB11-EB5E-48B2-9B7D-2CF7A5759856}"/>
+              </a:ext>
+            </a:extLst>
+          </p:cNvPr>
+          <p:cNvSpPr/>
+          <p:nvPr/>
+        </p:nvSpPr>
+        <p:spPr>
+          <a:xfrm>
+            <a:off x="3278436" y="4587974"/>
+            <a:ext cx="2731142" cy="433441"/>
+          </a:xfrm>
+          <a:prstGeom prst="roundRect">
+            <a:avLst>
+              <a:gd name="adj" fmla="val 10304"/>
+            </a:avLst>
+          </a:prstGeom>
+          <a:noFill/>
+          <a:ln>
+            <a:noFill/>
+          </a:ln>
+        </p:spPr>
+        <p:style>
+          <a:lnRef idx="2">
+            <a:schemeClr val="dk1"/>
+          </a:lnRef>
+          <a:fillRef idx="1">
+            <a:schemeClr val="lt1"/>
+          </a:fillRef>
+          <a:effectRef idx="0">
+            <a:schemeClr val="dk1"/>
+          </a:effectRef>
+          <a:fontRef idx="minor">
+            <a:schemeClr val="dk1"/>
+          </a:fontRef>
+        </p:style>
+        <p:txBody>
+          <a:bodyPr rtlCol="0" anchor="ctr"/>
+          <a:lstStyle/>
+          <a:p>
+            <a:pPr algn="ctr"/>
+            <a:r>
+              <a:rPr lang="en-US" altLang="ko-KR" sz="1200"/>
+              <a:t>OCI Runtime Spec</a:t>
+            </a:r>
+            <a:endParaRPr lang="en-US" altLang="ko-KR" sz="1200" dirty="0"/>
+          </a:p>
+        </p:txBody>
+      </p:sp>
+    </p:spTree>
+    <p:extLst>
+      <p:ext uri="{BB962C8B-B14F-4D97-AF65-F5344CB8AC3E}">
+        <p14:creationId xmlns:p14="http://schemas.microsoft.com/office/powerpoint/2010/main" val="3265569655"/>
+      </p:ext>
+    </p:extLst>
+  </p:cSld>
+  <p:clrMapOvr>
+    <a:masterClrMapping/>
+  </p:clrMapOvr>
+</p:sld>
+</file>
+
+<file path=ppt/slides/slide8.xml><?xml version="1.0" encoding="utf-8"?>
+<p:sld xmlns:a="http://schemas.openxmlformats.org/drawingml/2006/main" xmlns:r="http://schemas.openxmlformats.org/officeDocument/2006/relationships" xmlns:p="http://schemas.openxmlformats.org/presentationml/2006/main">
+  <p:cSld>
+    <p:spTree>
+      <p:nvGrpSpPr>
+        <p:cNvPr id="1" name=""/>
+        <p:cNvGrpSpPr/>
+        <p:nvPr/>
+      </p:nvGrpSpPr>
+      <p:grpSpPr>
+        <a:xfrm>
+          <a:off x="0" y="0"/>
+          <a:ext cx="0" cy="0"/>
+          <a:chOff x="0" y="0"/>
+          <a:chExt cx="0" cy="0"/>
+        </a:xfrm>
+      </p:grpSpPr>
+      <p:sp>
+        <p:nvSpPr>
+          <p:cNvPr id="2" name="제목 1">
+            <a:extLst>
+              <a:ext uri="{FF2B5EF4-FFF2-40B4-BE49-F238E27FC236}">
+                <a16:creationId xmlns:a16="http://schemas.microsoft.com/office/drawing/2014/main" id="{8738443D-5E72-49E2-86AC-581D61C41C39}"/>
+              </a:ext>
+            </a:extLst>
+          </p:cNvPr>
+          <p:cNvSpPr>
+            <a:spLocks noGrp="1"/>
+          </p:cNvSpPr>
+          <p:nvPr>
+            <p:ph type="title"/>
+          </p:nvPr>
+        </p:nvSpPr>
+        <p:spPr>
+          <a:xfrm>
             <a:off x="0" y="-92546"/>
             <a:ext cx="9144000" cy="857250"/>
           </a:xfrm>
@@ -18309,7 +20376,7 @@
 </p:sld>
 </file>
 
-<file path=ppt/slides/slide8.xml><?xml version="1.0" encoding="utf-8"?>
+<file path=ppt/slides/slide9.xml><?xml version="1.0" encoding="utf-8"?>
 <p:sld xmlns:a="http://schemas.openxmlformats.org/drawingml/2006/main" xmlns:r="http://schemas.openxmlformats.org/officeDocument/2006/relationships" xmlns:p="http://schemas.openxmlformats.org/presentationml/2006/main">
   <p:cSld>
     <p:spTree>
@@ -19672,378 +21739,6 @@
     <p:extLst>
       <p:ext uri="{BB962C8B-B14F-4D97-AF65-F5344CB8AC3E}">
         <p14:creationId xmlns:p14="http://schemas.microsoft.com/office/powerpoint/2010/main" val="718021752"/>
-      </p:ext>
-    </p:extLst>
-  </p:cSld>
-  <p:clrMapOvr>
-    <a:masterClrMapping/>
-  </p:clrMapOvr>
-</p:sld>
-</file>
-
-<file path=ppt/slides/slide9.xml><?xml version="1.0" encoding="utf-8"?>
-<p:sld xmlns:a="http://schemas.openxmlformats.org/drawingml/2006/main" xmlns:r="http://schemas.openxmlformats.org/officeDocument/2006/relationships" xmlns:p="http://schemas.openxmlformats.org/presentationml/2006/main">
-  <p:cSld>
-    <p:spTree>
-      <p:nvGrpSpPr>
-        <p:cNvPr id="1" name="">
-          <a:extLst>
-            <a:ext uri="{FF2B5EF4-FFF2-40B4-BE49-F238E27FC236}">
-              <a16:creationId xmlns:a16="http://schemas.microsoft.com/office/drawing/2014/main" id="{A103B0BA-68D1-BD3C-3458-09E9ACE5CC40}"/>
-            </a:ext>
-          </a:extLst>
-        </p:cNvPr>
-        <p:cNvGrpSpPr/>
-        <p:nvPr/>
-      </p:nvGrpSpPr>
-      <p:grpSpPr>
-        <a:xfrm>
-          <a:off x="0" y="0"/>
-          <a:ext cx="0" cy="0"/>
-          <a:chOff x="0" y="0"/>
-          <a:chExt cx="0" cy="0"/>
-        </a:xfrm>
-      </p:grpSpPr>
-      <p:sp>
-        <p:nvSpPr>
-          <p:cNvPr id="2" name="제목 1">
-            <a:extLst>
-              <a:ext uri="{FF2B5EF4-FFF2-40B4-BE49-F238E27FC236}">
-                <a16:creationId xmlns:a16="http://schemas.microsoft.com/office/drawing/2014/main" id="{97C74CC4-DE60-A510-3813-8C0BD405B8B4}"/>
-              </a:ext>
-            </a:extLst>
-          </p:cNvPr>
-          <p:cNvSpPr>
-            <a:spLocks noGrp="1"/>
-          </p:cNvSpPr>
-          <p:nvPr>
-            <p:ph type="title"/>
-          </p:nvPr>
-        </p:nvSpPr>
-        <p:spPr>
-          <a:xfrm>
-            <a:off x="0" y="-726229"/>
-            <a:ext cx="9144000" cy="857250"/>
-          </a:xfrm>
-        </p:spPr>
-        <p:txBody>
-          <a:bodyPr>
-            <a:normAutofit fontScale="90000"/>
-          </a:bodyPr>
-          <a:lstStyle/>
-          <a:p>
-            <a:r>
-              <a:rPr lang="en-US" altLang="ko-KR"/>
-              <a:t>CUDA Container OCI Runtime Spec</a:t>
-            </a:r>
-            <a:endParaRPr lang="ko-KR" altLang="en-US" dirty="0"/>
-          </a:p>
-        </p:txBody>
-      </p:sp>
-      <p:sp>
-        <p:nvSpPr>
-          <p:cNvPr id="7" name="사각형: 둥근 모서리 114">
-            <a:extLst>
-              <a:ext uri="{FF2B5EF4-FFF2-40B4-BE49-F238E27FC236}">
-                <a16:creationId xmlns:a16="http://schemas.microsoft.com/office/drawing/2014/main" id="{D022E7F7-C9AC-F290-1424-37425B5839ED}"/>
-              </a:ext>
-            </a:extLst>
-          </p:cNvPr>
-          <p:cNvSpPr/>
-          <p:nvPr/>
-        </p:nvSpPr>
-        <p:spPr>
-          <a:xfrm>
-            <a:off x="2267744" y="259255"/>
-            <a:ext cx="4752528" cy="433441"/>
-          </a:xfrm>
-          <a:prstGeom prst="roundRect">
-            <a:avLst>
-              <a:gd name="adj" fmla="val 0"/>
-            </a:avLst>
-          </a:prstGeom>
-          <a:ln w="12700"/>
-        </p:spPr>
-        <p:style>
-          <a:lnRef idx="2">
-            <a:schemeClr val="dk1"/>
-          </a:lnRef>
-          <a:fillRef idx="1">
-            <a:schemeClr val="lt1"/>
-          </a:fillRef>
-          <a:effectRef idx="0">
-            <a:schemeClr val="dk1"/>
-          </a:effectRef>
-          <a:fontRef idx="minor">
-            <a:schemeClr val="dk1"/>
-          </a:fontRef>
-        </p:style>
-        <p:txBody>
-          <a:bodyPr rtlCol="0" anchor="ctr"/>
-          <a:lstStyle/>
-          <a:p>
-            <a:r>
-              <a:rPr lang="en-US" altLang="ko-KR" sz="1400"/>
-              <a:t># docker run --gpu all nvidia/cuda:9.0-base nvidia-smi</a:t>
-            </a:r>
-            <a:endParaRPr lang="en-US" altLang="ko-KR" sz="1400" dirty="0"/>
-          </a:p>
-        </p:txBody>
-      </p:sp>
-      <p:sp>
-        <p:nvSpPr>
-          <p:cNvPr id="11" name="사각형: 둥근 모서리 114">
-            <a:extLst>
-              <a:ext uri="{FF2B5EF4-FFF2-40B4-BE49-F238E27FC236}">
-                <a16:creationId xmlns:a16="http://schemas.microsoft.com/office/drawing/2014/main" id="{A632F3FB-7B22-D451-5B4D-B7281CE5B4AA}"/>
-              </a:ext>
-            </a:extLst>
-          </p:cNvPr>
-          <p:cNvSpPr/>
-          <p:nvPr/>
-        </p:nvSpPr>
-        <p:spPr>
-          <a:xfrm>
-            <a:off x="899592" y="915566"/>
-            <a:ext cx="7488831" cy="3737569"/>
-          </a:xfrm>
-          <a:prstGeom prst="roundRect">
-            <a:avLst>
-              <a:gd name="adj" fmla="val 0"/>
-            </a:avLst>
-          </a:prstGeom>
-          <a:ln w="12700"/>
-        </p:spPr>
-        <p:style>
-          <a:lnRef idx="2">
-            <a:schemeClr val="dk1"/>
-          </a:lnRef>
-          <a:fillRef idx="1">
-            <a:schemeClr val="lt1"/>
-          </a:fillRef>
-          <a:effectRef idx="0">
-            <a:schemeClr val="dk1"/>
-          </a:effectRef>
-          <a:fontRef idx="minor">
-            <a:schemeClr val="dk1"/>
-          </a:fontRef>
-        </p:style>
-        <p:txBody>
-          <a:bodyPr rtlCol="0" anchor="ctr"/>
-          <a:lstStyle/>
-          <a:p>
-            <a:r>
-              <a:rPr lang="en-US" altLang="ko-KR" sz="1400"/>
-              <a:t>"hooks": {</a:t>
-            </a:r>
-          </a:p>
-          <a:p>
-            <a:r>
-              <a:rPr lang="en-US" altLang="ko-KR" sz="1400"/>
-              <a:t>    "process": {</a:t>
-            </a:r>
-          </a:p>
-          <a:p>
-            <a:r>
-              <a:rPr lang="en-US" altLang="ko-KR" sz="1400"/>
-              <a:t>          "env": [“CUDA_VERSION=9.0.176”,</a:t>
-            </a:r>
-            <a:br>
-              <a:rPr lang="en-US" altLang="ko-KR" sz="1400"/>
-            </a:br>
-            <a:r>
-              <a:rPr lang="en-US" altLang="ko-KR" sz="1400"/>
-              <a:t>                   “CUDA_PKG_VERSION=9-0=9.0.176-1”,</a:t>
-            </a:r>
-          </a:p>
-          <a:p>
-            <a:r>
-              <a:rPr lang="en-US" altLang="ko-KR" sz="1400"/>
-              <a:t>                   “NVIDIA_VISIBLE_DEVICES=all“,</a:t>
-            </a:r>
-            <a:br>
-              <a:rPr lang="en-US" altLang="ko-KR" sz="1400"/>
-            </a:br>
-            <a:r>
-              <a:rPr lang="en-US" altLang="ko-KR" sz="1400"/>
-              <a:t>                   “NVIDIA_DRIVER_CAPABILITIES=“compute,utility”,</a:t>
-            </a:r>
-          </a:p>
-          <a:p>
-            <a:r>
-              <a:rPr lang="en-US" altLang="ko-KR" sz="1400"/>
-              <a:t>                   "NVIDIA_REQUIRE_CUDA=cuda&gt;=9.0“,</a:t>
-            </a:r>
-            <a:br>
-              <a:rPr lang="en-US" altLang="ko-KR" sz="1400"/>
-            </a:br>
-            <a:r>
-              <a:rPr lang="en-US" altLang="ko-KR" sz="1400"/>
-              <a:t>                   "LD_LIBRARY_PATH=/usr/local/nvidia/lib:/usr/local/nvidia/lib64“</a:t>
-            </a:r>
-          </a:p>
-          <a:p>
-            <a:r>
-              <a:rPr lang="en-US" altLang="ko-KR" sz="1400"/>
-              <a:t>             ]</a:t>
-            </a:r>
-          </a:p>
-          <a:p>
-            <a:r>
-              <a:rPr lang="en-US" altLang="ko-KR" sz="1400"/>
-              <a:t>     }</a:t>
-            </a:r>
-          </a:p>
-          <a:p>
-            <a:r>
-              <a:rPr lang="en-US" altLang="ko-KR" sz="1400"/>
-              <a:t>    "prestart": [</a:t>
-            </a:r>
-          </a:p>
-          <a:p>
-            <a:r>
-              <a:rPr lang="en-US" altLang="ko-KR" sz="1400"/>
-              <a:t>         {</a:t>
-            </a:r>
-          </a:p>
-          <a:p>
-            <a:r>
-              <a:rPr lang="en-US" altLang="ko-KR" sz="1400"/>
-              <a:t>             "path": “/usr/bin/nvidia-container-runtime-hook”,</a:t>
-            </a:r>
-          </a:p>
-          <a:p>
-            <a:r>
-              <a:rPr lang="en-US" altLang="ko-KR" sz="1400"/>
-              <a:t>             "args": ["nvidia-container-runtime-hook ", “prestart"]</a:t>
-            </a:r>
-          </a:p>
-          <a:p>
-            <a:r>
-              <a:rPr lang="en-US" altLang="ko-KR" sz="1400"/>
-              <a:t>         },</a:t>
-            </a:r>
-          </a:p>
-          <a:p>
-            <a:r>
-              <a:rPr lang="en-US" altLang="ko-KR" sz="1400"/>
-              <a:t>    ],</a:t>
-            </a:r>
-          </a:p>
-          <a:p>
-            <a:r>
-              <a:rPr lang="en-US" altLang="ko-KR" sz="1400"/>
-              <a:t>}</a:t>
-            </a:r>
-            <a:endParaRPr lang="en-US" altLang="ko-KR" sz="1400" dirty="0"/>
-          </a:p>
-        </p:txBody>
-      </p:sp>
-      <p:cxnSp>
-        <p:nvCxnSpPr>
-          <p:cNvPr id="9" name="직선 화살표 연결선 8">
-            <a:extLst>
-              <a:ext uri="{FF2B5EF4-FFF2-40B4-BE49-F238E27FC236}">
-                <a16:creationId xmlns:a16="http://schemas.microsoft.com/office/drawing/2014/main" id="{765C919B-0EDF-3301-DFC5-8C1EF831E09C}"/>
-              </a:ext>
-            </a:extLst>
-          </p:cNvPr>
-          <p:cNvCxnSpPr>
-            <a:cxnSpLocks/>
-            <a:stCxn id="7" idx="2"/>
-            <a:endCxn id="11" idx="0"/>
-          </p:cNvCxnSpPr>
-          <p:nvPr/>
-        </p:nvCxnSpPr>
-        <p:spPr>
-          <a:xfrm>
-            <a:off x="4644008" y="692696"/>
-            <a:ext cx="0" cy="222870"/>
-          </a:xfrm>
-          <a:prstGeom prst="straightConnector1">
-            <a:avLst/>
-          </a:prstGeom>
-          <a:ln w="12700">
-            <a:solidFill>
-              <a:schemeClr val="tx1"/>
-            </a:solidFill>
-            <a:headEnd type="none" w="med" len="med"/>
-            <a:tailEnd type="triangle" w="med" len="med"/>
-          </a:ln>
-        </p:spPr>
-        <p:style>
-          <a:lnRef idx="1">
-            <a:schemeClr val="accent1"/>
-          </a:lnRef>
-          <a:fillRef idx="0">
-            <a:schemeClr val="accent1"/>
-          </a:fillRef>
-          <a:effectRef idx="0">
-            <a:schemeClr val="accent1"/>
-          </a:effectRef>
-          <a:fontRef idx="minor">
-            <a:schemeClr val="tx1"/>
-          </a:fontRef>
-        </p:style>
-      </p:cxnSp>
-      <p:sp>
-        <p:nvSpPr>
-          <p:cNvPr id="22" name="사각형: 둥근 모서리 114">
-            <a:extLst>
-              <a:ext uri="{FF2B5EF4-FFF2-40B4-BE49-F238E27FC236}">
-                <a16:creationId xmlns:a16="http://schemas.microsoft.com/office/drawing/2014/main" id="{D7853DE0-49D2-11AD-A222-5CDD76CD3A39}"/>
-              </a:ext>
-            </a:extLst>
-          </p:cNvPr>
-          <p:cNvSpPr/>
-          <p:nvPr/>
-        </p:nvSpPr>
-        <p:spPr>
-          <a:xfrm>
-            <a:off x="3278436" y="4587974"/>
-            <a:ext cx="2731142" cy="433441"/>
-          </a:xfrm>
-          <a:prstGeom prst="roundRect">
-            <a:avLst>
-              <a:gd name="adj" fmla="val 10304"/>
-            </a:avLst>
-          </a:prstGeom>
-          <a:noFill/>
-          <a:ln>
-            <a:noFill/>
-          </a:ln>
-        </p:spPr>
-        <p:style>
-          <a:lnRef idx="2">
-            <a:schemeClr val="dk1"/>
-          </a:lnRef>
-          <a:fillRef idx="1">
-            <a:schemeClr val="lt1"/>
-          </a:fillRef>
-          <a:effectRef idx="0">
-            <a:schemeClr val="dk1"/>
-          </a:effectRef>
-          <a:fontRef idx="minor">
-            <a:schemeClr val="dk1"/>
-          </a:fontRef>
-        </p:style>
-        <p:txBody>
-          <a:bodyPr rtlCol="0" anchor="ctr"/>
-          <a:lstStyle/>
-          <a:p>
-            <a:pPr algn="ctr"/>
-            <a:r>
-              <a:rPr lang="en-US" altLang="ko-KR" sz="1400"/>
-              <a:t>OCI Runtime Spec</a:t>
-            </a:r>
-            <a:endParaRPr lang="en-US" altLang="ko-KR" sz="1400" dirty="0"/>
-          </a:p>
-        </p:txBody>
-      </p:sp>
-    </p:spTree>
-    <p:extLst>
-      <p:ext uri="{BB962C8B-B14F-4D97-AF65-F5344CB8AC3E}">
-        <p14:creationId xmlns:p14="http://schemas.microsoft.com/office/powerpoint/2010/main" val="3377665677"/>
       </p:ext>
     </p:extLst>
   </p:cSld>

--- a/content/docs/theory-analysis/container-nvidia-gpu/images/images.pptx
+++ b/content/docs/theory-analysis/container-nvidia-gpu/images/images.pptx
@@ -13782,7 +13782,7 @@
             <a:pPr algn="ctr"/>
             <a:r>
               <a:rPr lang="en-US" altLang="ko-KR" sz="1050" dirty="0"/>
-              <a:t>ctr</a:t>
+              <a:t>ctr / dockerd</a:t>
             </a:r>
           </a:p>
         </p:txBody>
@@ -15375,7 +15375,7 @@
             <a:pPr algn="ctr"/>
             <a:r>
               <a:rPr lang="en-US" altLang="ko-KR" sz="1050" dirty="0"/>
-              <a:t>ctr</a:t>
+              <a:t>ctr / dockerd</a:t>
             </a:r>
           </a:p>
         </p:txBody>

--- a/content/docs/theory-analysis/container-nvidia-gpu/images/images.pptx
+++ b/content/docs/theory-analysis/container-nvidia-gpu/images/images.pptx
@@ -12844,7 +12844,7 @@
         </p:nvSpPr>
         <p:spPr>
           <a:xfrm>
-            <a:off x="1043953" y="3313618"/>
+            <a:off x="1079514" y="3297090"/>
             <a:ext cx="1886052" cy="390651"/>
           </a:xfrm>
           <a:prstGeom prst="roundRect">
@@ -12875,17 +12875,16 @@
           <a:bodyPr rtlCol="0" anchor="ctr"/>
           <a:lstStyle/>
           <a:p>
-            <a:pPr algn="ctr"/>
             <a:r>
               <a:rPr lang="en-US" altLang="ko-KR" sz="1000" i="1"/>
-              <a:t>Change root (pivot_root()),</a:t>
+              <a:t> - Change root (pivot_root())</a:t>
             </a:r>
             <a:br>
               <a:rPr lang="en-US" altLang="ko-KR" sz="1000" i="1"/>
             </a:br>
             <a:r>
               <a:rPr lang="en-US" altLang="ko-KR" sz="1000" i="1"/>
-              <a:t>Exec app (exec())</a:t>
+              <a:t> - Exec app (exec())</a:t>
             </a:r>
           </a:p>
         </p:txBody>
@@ -14833,66 +14832,6 @@
           </a:p>
         </p:txBody>
       </p:sp>
-      <p:sp>
-        <p:nvSpPr>
-          <p:cNvPr id="80" name="사각형: 둥근 모서리 114">
-            <a:extLst>
-              <a:ext uri="{FF2B5EF4-FFF2-40B4-BE49-F238E27FC236}">
-                <a16:creationId xmlns:a16="http://schemas.microsoft.com/office/drawing/2014/main" id="{39728405-1F1D-A18A-A2F5-D12C37051CB4}"/>
-              </a:ext>
-            </a:extLst>
-          </p:cNvPr>
-          <p:cNvSpPr/>
-          <p:nvPr/>
-        </p:nvSpPr>
-        <p:spPr>
-          <a:xfrm>
-            <a:off x="1043953" y="2808893"/>
-            <a:ext cx="1886052" cy="390651"/>
-          </a:xfrm>
-          <a:prstGeom prst="roundRect">
-            <a:avLst>
-              <a:gd name="adj" fmla="val 10304"/>
-            </a:avLst>
-          </a:prstGeom>
-          <a:noFill/>
-          <a:ln>
-            <a:noFill/>
-          </a:ln>
-        </p:spPr>
-        <p:style>
-          <a:lnRef idx="2">
-            <a:schemeClr val="dk1"/>
-          </a:lnRef>
-          <a:fillRef idx="1">
-            <a:schemeClr val="lt1"/>
-          </a:fillRef>
-          <a:effectRef idx="0">
-            <a:schemeClr val="dk1"/>
-          </a:effectRef>
-          <a:fontRef idx="minor">
-            <a:schemeClr val="dk1"/>
-          </a:fontRef>
-        </p:style>
-        <p:txBody>
-          <a:bodyPr rtlCol="0" anchor="ctr"/>
-          <a:lstStyle/>
-          <a:p>
-            <a:pPr algn="ctr"/>
-            <a:r>
-              <a:rPr lang="en-US" altLang="ko-KR" sz="1000" i="1"/>
-              <a:t>Change root (pivot_root()),</a:t>
-            </a:r>
-            <a:br>
-              <a:rPr lang="en-US" altLang="ko-KR" sz="1000" i="1"/>
-            </a:br>
-            <a:r>
-              <a:rPr lang="en-US" altLang="ko-KR" sz="1000" i="1"/>
-              <a:t>Exec app (exec())</a:t>
-            </a:r>
-          </a:p>
-        </p:txBody>
-      </p:sp>
       <p:cxnSp>
         <p:nvCxnSpPr>
           <p:cNvPr id="97" name="직선 화살표 연결선 96">
@@ -16242,6 +16181,65 @@
             <a:r>
               <a:rPr lang="en-US" altLang="ko-KR" sz="1000" i="1"/>
               <a:t>- Allow GPU Cgroup</a:t>
+            </a:r>
+          </a:p>
+        </p:txBody>
+      </p:sp>
+      <p:sp>
+        <p:nvSpPr>
+          <p:cNvPr id="32" name="사각형: 둥근 모서리 114">
+            <a:extLst>
+              <a:ext uri="{FF2B5EF4-FFF2-40B4-BE49-F238E27FC236}">
+                <a16:creationId xmlns:a16="http://schemas.microsoft.com/office/drawing/2014/main" id="{96BBE631-7FCB-7ECC-4623-B9E14AF48A89}"/>
+              </a:ext>
+            </a:extLst>
+          </p:cNvPr>
+          <p:cNvSpPr/>
+          <p:nvPr/>
+        </p:nvSpPr>
+        <p:spPr>
+          <a:xfrm>
+            <a:off x="1079514" y="2803313"/>
+            <a:ext cx="1886052" cy="390651"/>
+          </a:xfrm>
+          <a:prstGeom prst="roundRect">
+            <a:avLst>
+              <a:gd name="adj" fmla="val 10304"/>
+            </a:avLst>
+          </a:prstGeom>
+          <a:noFill/>
+          <a:ln>
+            <a:noFill/>
+          </a:ln>
+        </p:spPr>
+        <p:style>
+          <a:lnRef idx="2">
+            <a:schemeClr val="dk1"/>
+          </a:lnRef>
+          <a:fillRef idx="1">
+            <a:schemeClr val="lt1"/>
+          </a:fillRef>
+          <a:effectRef idx="0">
+            <a:schemeClr val="dk1"/>
+          </a:effectRef>
+          <a:fontRef idx="minor">
+            <a:schemeClr val="dk1"/>
+          </a:fontRef>
+        </p:style>
+        <p:txBody>
+          <a:bodyPr rtlCol="0" anchor="ctr"/>
+          <a:lstStyle/>
+          <a:p>
+            <a:r>
+              <a:rPr lang="en-US" altLang="ko-KR" sz="1000" i="1"/>
+              <a:t> - Change root (pivot_root())</a:t>
+            </a:r>
+            <a:br>
+              <a:rPr lang="en-US" altLang="ko-KR" sz="1000" i="1"/>
+            </a:br>
+            <a:r>
+              <a:rPr lang="en-US" altLang="ko-KR" sz="1000" i="1"/>
+              <a:t> - Exec app (exec())</a:t>
             </a:r>
           </a:p>
         </p:txBody>

--- a/content/docs/theory-analysis/container-nvidia-gpu/images/images.pptx
+++ b/content/docs/theory-analysis/container-nvidia-gpu/images/images.pptx
@@ -228,7 +228,7 @@
           <a:p>
             <a:fld id="{6CD5550B-26C4-49A9-A5BA-636EF7BE6CE9}" type="datetimeFigureOut">
               <a:rPr lang="ko-KR" altLang="en-US" smtClean="0"/>
-              <a:t>2026. 3. 1.</a:t>
+              <a:t>2026. 3. 3.</a:t>
             </a:fld>
             <a:endParaRPr lang="ko-KR" altLang="en-US"/>
           </a:p>
@@ -2150,7 +2150,7 @@
           <a:p>
             <a:fld id="{FB30EDBD-1C2D-4C1E-B459-B60219FAB484}" type="datetimeFigureOut">
               <a:rPr lang="ko-KR" altLang="en-US" smtClean="0"/>
-              <a:t>2026. 3. 1.</a:t>
+              <a:t>2026. 3. 3.</a:t>
             </a:fld>
             <a:endParaRPr lang="ko-KR" altLang="en-US"/>
           </a:p>
@@ -2313,7 +2313,7 @@
           <a:p>
             <a:fld id="{FB30EDBD-1C2D-4C1E-B459-B60219FAB484}" type="datetimeFigureOut">
               <a:rPr lang="ko-KR" altLang="en-US" smtClean="0"/>
-              <a:t>2026. 3. 1.</a:t>
+              <a:t>2026. 3. 3.</a:t>
             </a:fld>
             <a:endParaRPr lang="ko-KR" altLang="en-US"/>
           </a:p>
@@ -2486,7 +2486,7 @@
           <a:p>
             <a:fld id="{FB30EDBD-1C2D-4C1E-B459-B60219FAB484}" type="datetimeFigureOut">
               <a:rPr lang="ko-KR" altLang="en-US" smtClean="0"/>
-              <a:t>2026. 3. 1.</a:t>
+              <a:t>2026. 3. 3.</a:t>
             </a:fld>
             <a:endParaRPr lang="ko-KR" altLang="en-US"/>
           </a:p>
@@ -2649,7 +2649,7 @@
           <a:p>
             <a:fld id="{FB30EDBD-1C2D-4C1E-B459-B60219FAB484}" type="datetimeFigureOut">
               <a:rPr lang="ko-KR" altLang="en-US" smtClean="0"/>
-              <a:t>2026. 3. 1.</a:t>
+              <a:t>2026. 3. 3.</a:t>
             </a:fld>
             <a:endParaRPr lang="ko-KR" altLang="en-US"/>
           </a:p>
@@ -2889,7 +2889,7 @@
           <a:p>
             <a:fld id="{FB30EDBD-1C2D-4C1E-B459-B60219FAB484}" type="datetimeFigureOut">
               <a:rPr lang="ko-KR" altLang="en-US" smtClean="0"/>
-              <a:t>2026. 3. 1.</a:t>
+              <a:t>2026. 3. 3.</a:t>
             </a:fld>
             <a:endParaRPr lang="ko-KR" altLang="en-US"/>
           </a:p>
@@ -3169,7 +3169,7 @@
           <a:p>
             <a:fld id="{FB30EDBD-1C2D-4C1E-B459-B60219FAB484}" type="datetimeFigureOut">
               <a:rPr lang="ko-KR" altLang="en-US" smtClean="0"/>
-              <a:t>2026. 3. 1.</a:t>
+              <a:t>2026. 3. 3.</a:t>
             </a:fld>
             <a:endParaRPr lang="ko-KR" altLang="en-US"/>
           </a:p>
@@ -3583,7 +3583,7 @@
           <a:p>
             <a:fld id="{FB30EDBD-1C2D-4C1E-B459-B60219FAB484}" type="datetimeFigureOut">
               <a:rPr lang="ko-KR" altLang="en-US" smtClean="0"/>
-              <a:t>2026. 3. 1.</a:t>
+              <a:t>2026. 3. 3.</a:t>
             </a:fld>
             <a:endParaRPr lang="ko-KR" altLang="en-US"/>
           </a:p>
@@ -3695,7 +3695,7 @@
           <a:p>
             <a:fld id="{FB30EDBD-1C2D-4C1E-B459-B60219FAB484}" type="datetimeFigureOut">
               <a:rPr lang="ko-KR" altLang="en-US" smtClean="0"/>
-              <a:t>2026. 3. 1.</a:t>
+              <a:t>2026. 3. 3.</a:t>
             </a:fld>
             <a:endParaRPr lang="ko-KR" altLang="en-US"/>
           </a:p>
@@ -3785,7 +3785,7 @@
           <a:p>
             <a:fld id="{FB30EDBD-1C2D-4C1E-B459-B60219FAB484}" type="datetimeFigureOut">
               <a:rPr lang="ko-KR" altLang="en-US" smtClean="0"/>
-              <a:t>2026. 3. 1.</a:t>
+              <a:t>2026. 3. 3.</a:t>
             </a:fld>
             <a:endParaRPr lang="ko-KR" altLang="en-US"/>
           </a:p>
@@ -4055,7 +4055,7 @@
           <a:p>
             <a:fld id="{FB30EDBD-1C2D-4C1E-B459-B60219FAB484}" type="datetimeFigureOut">
               <a:rPr lang="ko-KR" altLang="en-US" smtClean="0"/>
-              <a:t>2026. 3. 1.</a:t>
+              <a:t>2026. 3. 3.</a:t>
             </a:fld>
             <a:endParaRPr lang="ko-KR" altLang="en-US"/>
           </a:p>
@@ -4302,7 +4302,7 @@
           <a:p>
             <a:fld id="{FB30EDBD-1C2D-4C1E-B459-B60219FAB484}" type="datetimeFigureOut">
               <a:rPr lang="ko-KR" altLang="en-US" smtClean="0"/>
-              <a:t>2026. 3. 1.</a:t>
+              <a:t>2026. 3. 3.</a:t>
             </a:fld>
             <a:endParaRPr lang="ko-KR" altLang="en-US"/>
           </a:p>
@@ -4508,7 +4508,7 @@
           <a:p>
             <a:fld id="{FB30EDBD-1C2D-4C1E-B459-B60219FAB484}" type="datetimeFigureOut">
               <a:rPr lang="ko-KR" altLang="en-US" smtClean="0"/>
-              <a:t>2026. 3. 1.</a:t>
+              <a:t>2026. 3. 3.</a:t>
             </a:fld>
             <a:endParaRPr lang="ko-KR" altLang="en-US"/>
           </a:p>
@@ -4886,57 +4886,6 @@
       </p:grpSpPr>
       <p:sp>
         <p:nvSpPr>
-          <p:cNvPr id="38" name="사각형: 둥근 모서리 114">
-            <a:extLst>
-              <a:ext uri="{FF2B5EF4-FFF2-40B4-BE49-F238E27FC236}">
-                <a16:creationId xmlns:a16="http://schemas.microsoft.com/office/drawing/2014/main" id="{715760DB-F35A-5664-E40F-12A0BEDC0B89}"/>
-              </a:ext>
-            </a:extLst>
-          </p:cNvPr>
-          <p:cNvSpPr/>
-          <p:nvPr/>
-        </p:nvSpPr>
-        <p:spPr>
-          <a:xfrm>
-            <a:off x="1547664" y="1930664"/>
-            <a:ext cx="6043510" cy="1282172"/>
-          </a:xfrm>
-          <a:prstGeom prst="roundRect">
-            <a:avLst>
-              <a:gd name="adj" fmla="val 7201"/>
-            </a:avLst>
-          </a:prstGeom>
-          <a:ln w="12700"/>
-        </p:spPr>
-        <p:style>
-          <a:lnRef idx="2">
-            <a:schemeClr val="dk1"/>
-          </a:lnRef>
-          <a:fillRef idx="1">
-            <a:schemeClr val="lt1"/>
-          </a:fillRef>
-          <a:effectRef idx="0">
-            <a:schemeClr val="dk1"/>
-          </a:effectRef>
-          <a:fontRef idx="minor">
-            <a:schemeClr val="dk1"/>
-          </a:fontRef>
-        </p:style>
-        <p:txBody>
-          <a:bodyPr rtlCol="0" anchor="b"/>
-          <a:lstStyle/>
-          <a:p>
-            <a:pPr algn="ctr"/>
-            <a:r>
-              <a:rPr lang="en-US" altLang="ko-KR" sz="1000" b="1"/>
-              <a:t>Host Filesystem</a:t>
-            </a:r>
-            <a:endParaRPr lang="en-US" altLang="ko-KR" sz="1000" b="1" dirty="0"/>
-          </a:p>
-        </p:txBody>
-      </p:sp>
-      <p:sp>
-        <p:nvSpPr>
           <p:cNvPr id="2" name="제목 1">
             <a:extLst>
               <a:ext uri="{FF2B5EF4-FFF2-40B4-BE49-F238E27FC236}">
@@ -4973,6 +4922,57 @@
       </p:sp>
       <p:sp>
         <p:nvSpPr>
+          <p:cNvPr id="38" name="사각형: 둥근 모서리 114">
+            <a:extLst>
+              <a:ext uri="{FF2B5EF4-FFF2-40B4-BE49-F238E27FC236}">
+                <a16:creationId xmlns:a16="http://schemas.microsoft.com/office/drawing/2014/main" id="{715760DB-F35A-5664-E40F-12A0BEDC0B89}"/>
+              </a:ext>
+            </a:extLst>
+          </p:cNvPr>
+          <p:cNvSpPr/>
+          <p:nvPr/>
+        </p:nvSpPr>
+        <p:spPr>
+          <a:xfrm>
+            <a:off x="1547664" y="2249109"/>
+            <a:ext cx="6043510" cy="1187198"/>
+          </a:xfrm>
+          <a:prstGeom prst="roundRect">
+            <a:avLst>
+              <a:gd name="adj" fmla="val 4925"/>
+            </a:avLst>
+          </a:prstGeom>
+          <a:ln w="12700"/>
+        </p:spPr>
+        <p:style>
+          <a:lnRef idx="2">
+            <a:schemeClr val="dk1"/>
+          </a:lnRef>
+          <a:fillRef idx="1">
+            <a:schemeClr val="lt1"/>
+          </a:fillRef>
+          <a:effectRef idx="0">
+            <a:schemeClr val="dk1"/>
+          </a:effectRef>
+          <a:fontRef idx="minor">
+            <a:schemeClr val="dk1"/>
+          </a:fontRef>
+        </p:style>
+        <p:txBody>
+          <a:bodyPr rtlCol="0" anchor="b"/>
+          <a:lstStyle/>
+          <a:p>
+            <a:pPr algn="ctr"/>
+            <a:r>
+              <a:rPr lang="en-US" altLang="ko-KR" sz="1000" b="1"/>
+              <a:t>Host Filesystem</a:t>
+            </a:r>
+            <a:endParaRPr lang="en-US" altLang="ko-KR" sz="1000" b="1" dirty="0"/>
+          </a:p>
+        </p:txBody>
+      </p:sp>
+      <p:sp>
+        <p:nvSpPr>
           <p:cNvPr id="37" name="사각형: 둥근 모서리 114">
             <a:extLst>
               <a:ext uri="{FF2B5EF4-FFF2-40B4-BE49-F238E27FC236}">
@@ -4985,8 +4985,8 @@
         </p:nvSpPr>
         <p:spPr>
           <a:xfrm>
-            <a:off x="1557988" y="4061207"/>
-            <a:ext cx="6033186" cy="976265"/>
+            <a:off x="1557988" y="4171338"/>
+            <a:ext cx="6033186" cy="787990"/>
           </a:xfrm>
           <a:prstGeom prst="roundRect">
             <a:avLst>
@@ -5036,8 +5036,8 @@
         </p:nvSpPr>
         <p:spPr>
           <a:xfrm>
-            <a:off x="1552826" y="3212363"/>
-            <a:ext cx="6043510" cy="855136"/>
+            <a:off x="1552826" y="3436307"/>
+            <a:ext cx="6043510" cy="739656"/>
           </a:xfrm>
           <a:prstGeom prst="roundRect">
             <a:avLst>
@@ -5087,12 +5087,12 @@
         </p:nvSpPr>
         <p:spPr>
           <a:xfrm>
-            <a:off x="2145948" y="4173376"/>
-            <a:ext cx="1077331" cy="576064"/>
+            <a:off x="2145948" y="4287525"/>
+            <a:ext cx="1077331" cy="383228"/>
           </a:xfrm>
           <a:prstGeom prst="roundRect">
             <a:avLst>
-              <a:gd name="adj" fmla="val 7242"/>
+              <a:gd name="adj" fmla="val 14292"/>
             </a:avLst>
           </a:prstGeom>
           <a:solidFill>
@@ -5150,12 +5150,12 @@
         </p:nvSpPr>
         <p:spPr>
           <a:xfrm>
-            <a:off x="3405927" y="4173376"/>
-            <a:ext cx="1077331" cy="576064"/>
+            <a:off x="3405927" y="4287525"/>
+            <a:ext cx="1077331" cy="383228"/>
           </a:xfrm>
           <a:prstGeom prst="roundRect">
             <a:avLst>
-              <a:gd name="adj" fmla="val 7242"/>
+              <a:gd name="adj" fmla="val 14292"/>
             </a:avLst>
           </a:prstGeom>
           <a:solidFill>
@@ -5213,12 +5213,12 @@
         </p:nvSpPr>
         <p:spPr>
           <a:xfrm>
-            <a:off x="4665905" y="4173376"/>
-            <a:ext cx="1077331" cy="576064"/>
+            <a:off x="4665905" y="4287525"/>
+            <a:ext cx="1077331" cy="383228"/>
           </a:xfrm>
           <a:prstGeom prst="roundRect">
             <a:avLst>
-              <a:gd name="adj" fmla="val 7242"/>
+              <a:gd name="adj" fmla="val 12529"/>
             </a:avLst>
           </a:prstGeom>
           <a:solidFill>
@@ -5276,12 +5276,12 @@
         </p:nvSpPr>
         <p:spPr>
           <a:xfrm>
-            <a:off x="5925884" y="4173376"/>
-            <a:ext cx="1077331" cy="576064"/>
+            <a:off x="5925884" y="4287525"/>
+            <a:ext cx="1077331" cy="383228"/>
           </a:xfrm>
           <a:prstGeom prst="roundRect">
             <a:avLst>
-              <a:gd name="adj" fmla="val 7242"/>
+              <a:gd name="adj" fmla="val 16055"/>
             </a:avLst>
           </a:prstGeom>
           <a:solidFill>
@@ -5339,8 +5339,8 @@
         </p:nvSpPr>
         <p:spPr>
           <a:xfrm>
-            <a:off x="734944" y="111692"/>
-            <a:ext cx="2486761" cy="1717824"/>
+            <a:off x="734944" y="488998"/>
+            <a:ext cx="2486761" cy="1662236"/>
           </a:xfrm>
           <a:prstGeom prst="roundRect">
             <a:avLst>
@@ -5396,8 +5396,8 @@
         </p:nvSpPr>
         <p:spPr>
           <a:xfrm>
-            <a:off x="822678" y="1345650"/>
-            <a:ext cx="1099999" cy="396044"/>
+            <a:off x="822678" y="1683025"/>
+            <a:ext cx="1099999" cy="383228"/>
           </a:xfrm>
           <a:prstGeom prst="roundRect">
             <a:avLst>
@@ -5452,8 +5452,8 @@
         </p:nvSpPr>
         <p:spPr>
           <a:xfrm>
-            <a:off x="2024278" y="1345650"/>
-            <a:ext cx="1099868" cy="396044"/>
+            <a:off x="2024278" y="1683025"/>
+            <a:ext cx="1099868" cy="383228"/>
           </a:xfrm>
           <a:prstGeom prst="roundRect">
             <a:avLst>
@@ -5508,8 +5508,8 @@
         </p:nvSpPr>
         <p:spPr>
           <a:xfrm>
-            <a:off x="822678" y="859596"/>
-            <a:ext cx="2301467" cy="396044"/>
+            <a:off x="822678" y="1212700"/>
+            <a:ext cx="2301467" cy="383228"/>
           </a:xfrm>
           <a:prstGeom prst="roundRect">
             <a:avLst>
@@ -5543,10 +5543,10 @@
           <a:p>
             <a:pPr algn="ctr"/>
             <a:r>
-              <a:rPr lang="en-US" altLang="ko-KR" sz="1000"/>
+              <a:rPr lang="en-US" altLang="ko-KR" sz="900"/>
               <a:t>NVIDIA CUDA Lib/Toolkit</a:t>
             </a:r>
-            <a:endParaRPr lang="en-US" altLang="ko-KR" sz="1000" dirty="0"/>
+            <a:endParaRPr lang="en-US" altLang="ko-KR" sz="900" dirty="0"/>
           </a:p>
         </p:txBody>
       </p:sp>
@@ -5564,8 +5564,8 @@
         </p:nvSpPr>
         <p:spPr>
           <a:xfrm>
-            <a:off x="3346476" y="106029"/>
-            <a:ext cx="3674596" cy="1717824"/>
+            <a:off x="3346476" y="483518"/>
+            <a:ext cx="3674596" cy="1662236"/>
           </a:xfrm>
           <a:prstGeom prst="roundRect">
             <a:avLst>
@@ -5621,8 +5621,8 @@
         </p:nvSpPr>
         <p:spPr>
           <a:xfrm>
-            <a:off x="3434210" y="1339987"/>
-            <a:ext cx="1099999" cy="396044"/>
+            <a:off x="3434210" y="1677546"/>
+            <a:ext cx="1099999" cy="383228"/>
           </a:xfrm>
           <a:prstGeom prst="roundRect">
             <a:avLst>
@@ -5677,8 +5677,8 @@
         </p:nvSpPr>
         <p:spPr>
           <a:xfrm>
-            <a:off x="4635810" y="1339987"/>
-            <a:ext cx="1099868" cy="396044"/>
+            <a:off x="4635810" y="1677546"/>
+            <a:ext cx="1099868" cy="383228"/>
           </a:xfrm>
           <a:prstGeom prst="roundRect">
             <a:avLst>
@@ -5733,8 +5733,8 @@
         </p:nvSpPr>
         <p:spPr>
           <a:xfrm>
-            <a:off x="3434210" y="853933"/>
-            <a:ext cx="3498895" cy="396044"/>
+            <a:off x="3434210" y="1207220"/>
+            <a:ext cx="3498895" cy="383228"/>
           </a:xfrm>
           <a:prstGeom prst="roundRect">
             <a:avLst>
@@ -5768,10 +5768,10 @@
           <a:p>
             <a:pPr algn="ctr"/>
             <a:r>
-              <a:rPr lang="en-US" altLang="ko-KR" sz="1000"/>
+              <a:rPr lang="en-US" altLang="ko-KR" sz="900"/>
               <a:t>NVIDIA CUDA Lib/Toolkit</a:t>
             </a:r>
-            <a:endParaRPr lang="en-US" altLang="ko-KR" sz="1000" dirty="0"/>
+            <a:endParaRPr lang="en-US" altLang="ko-KR" sz="900" dirty="0"/>
           </a:p>
         </p:txBody>
       </p:sp>
@@ -5789,8 +5789,8 @@
         </p:nvSpPr>
         <p:spPr>
           <a:xfrm>
-            <a:off x="5833237" y="1339987"/>
-            <a:ext cx="1099868" cy="396044"/>
+            <a:off x="5833237" y="1677546"/>
+            <a:ext cx="1099868" cy="383228"/>
           </a:xfrm>
           <a:prstGeom prst="roundRect">
             <a:avLst>
@@ -5845,8 +5845,8 @@
         </p:nvSpPr>
         <p:spPr>
           <a:xfrm>
-            <a:off x="7164288" y="106029"/>
-            <a:ext cx="1487816" cy="1717824"/>
+            <a:off x="7164288" y="483518"/>
+            <a:ext cx="1274717" cy="1662236"/>
           </a:xfrm>
           <a:prstGeom prst="roundRect">
             <a:avLst>
@@ -5902,8 +5902,8 @@
         </p:nvSpPr>
         <p:spPr>
           <a:xfrm>
-            <a:off x="7244475" y="1339987"/>
-            <a:ext cx="1321799" cy="396044"/>
+            <a:off x="7250134" y="1673181"/>
+            <a:ext cx="1098712" cy="383228"/>
           </a:xfrm>
           <a:prstGeom prst="roundRect">
             <a:avLst>
@@ -5958,8 +5958,8 @@
         </p:nvSpPr>
         <p:spPr>
           <a:xfrm>
-            <a:off x="7244475" y="853933"/>
-            <a:ext cx="1321798" cy="396044"/>
+            <a:off x="7250133" y="1202855"/>
+            <a:ext cx="1098711" cy="383228"/>
           </a:xfrm>
           <a:prstGeom prst="roundRect">
             <a:avLst>
@@ -5993,10 +5993,10 @@
           <a:p>
             <a:pPr algn="ctr"/>
             <a:r>
-              <a:rPr lang="en-US" altLang="ko-KR" sz="1000"/>
+              <a:rPr lang="en-US" altLang="ko-KR" sz="900"/>
               <a:t>NVIDIA CUDA Lib/Toolkit</a:t>
             </a:r>
-            <a:endParaRPr lang="en-US" altLang="ko-KR" sz="1000" dirty="0"/>
+            <a:endParaRPr lang="en-US" altLang="ko-KR" sz="900" dirty="0"/>
           </a:p>
         </p:txBody>
       </p:sp>
@@ -6014,12 +6014,12 @@
         </p:nvSpPr>
         <p:spPr>
           <a:xfrm>
-            <a:off x="1692325" y="3345284"/>
-            <a:ext cx="5759996" cy="396044"/>
+            <a:off x="1692325" y="3564926"/>
+            <a:ext cx="5759996" cy="383228"/>
           </a:xfrm>
           <a:prstGeom prst="roundRect">
             <a:avLst>
-              <a:gd name="adj" fmla="val 7242"/>
+              <a:gd name="adj" fmla="val 12530"/>
             </a:avLst>
           </a:prstGeom>
           <a:ln w="12700"/>
@@ -6065,8 +6065,8 @@
         </p:nvSpPr>
         <p:spPr>
           <a:xfrm>
-            <a:off x="2141132" y="2495911"/>
-            <a:ext cx="1082148" cy="396044"/>
+            <a:off x="2141132" y="2796064"/>
+            <a:ext cx="1082148" cy="383228"/>
           </a:xfrm>
           <a:prstGeom prst="roundRect">
             <a:avLst>
@@ -6121,8 +6121,8 @@
         </p:nvSpPr>
         <p:spPr>
           <a:xfrm>
-            <a:off x="3405927" y="2495911"/>
-            <a:ext cx="1082148" cy="396044"/>
+            <a:off x="3405927" y="2796064"/>
+            <a:ext cx="1082148" cy="383228"/>
           </a:xfrm>
           <a:prstGeom prst="roundRect">
             <a:avLst>
@@ -6177,8 +6177,8 @@
         </p:nvSpPr>
         <p:spPr>
           <a:xfrm>
-            <a:off x="4665905" y="2495911"/>
-            <a:ext cx="1082148" cy="396044"/>
+            <a:off x="4665905" y="2796064"/>
+            <a:ext cx="1082148" cy="383228"/>
           </a:xfrm>
           <a:prstGeom prst="roundRect">
             <a:avLst>
@@ -6233,8 +6233,8 @@
         </p:nvSpPr>
         <p:spPr>
           <a:xfrm>
-            <a:off x="5925884" y="2495911"/>
-            <a:ext cx="1082148" cy="396044"/>
+            <a:off x="5925884" y="2796064"/>
+            <a:ext cx="1082148" cy="383228"/>
           </a:xfrm>
           <a:prstGeom prst="roundRect">
             <a:avLst>
@@ -6293,8 +6293,8 @@
         </p:nvCxnSpPr>
         <p:spPr>
           <a:xfrm flipH="1">
-            <a:off x="3944593" y="2891955"/>
-            <a:ext cx="2408" cy="1281421"/>
+            <a:off x="3944593" y="3179293"/>
+            <a:ext cx="2408" cy="1108233"/>
           </a:xfrm>
           <a:prstGeom prst="line">
             <a:avLst/>
@@ -6335,8 +6335,8 @@
         </p:nvSpPr>
         <p:spPr>
           <a:xfrm>
-            <a:off x="2141132" y="2008269"/>
-            <a:ext cx="4862083" cy="396044"/>
+            <a:off x="2141132" y="2324202"/>
+            <a:ext cx="4862083" cy="383228"/>
           </a:xfrm>
           <a:prstGeom prst="roundRect">
             <a:avLst>
@@ -6395,8 +6395,8 @@
         </p:nvCxnSpPr>
         <p:spPr>
           <a:xfrm>
-            <a:off x="2682206" y="2891955"/>
-            <a:ext cx="2408" cy="1281421"/>
+            <a:off x="2682206" y="3179293"/>
+            <a:ext cx="2408" cy="1108233"/>
           </a:xfrm>
           <a:prstGeom prst="line">
             <a:avLst/>
@@ -6441,8 +6441,8 @@
         </p:nvCxnSpPr>
         <p:spPr>
           <a:xfrm flipH="1">
-            <a:off x="5204571" y="2891955"/>
-            <a:ext cx="2408" cy="1281421"/>
+            <a:off x="5204571" y="3179293"/>
+            <a:ext cx="2408" cy="1108233"/>
           </a:xfrm>
           <a:prstGeom prst="line">
             <a:avLst/>
@@ -6487,8 +6487,8 @@
         </p:nvCxnSpPr>
         <p:spPr>
           <a:xfrm flipH="1">
-            <a:off x="6464550" y="2891955"/>
-            <a:ext cx="2408" cy="1281421"/>
+            <a:off x="6464550" y="3179293"/>
+            <a:ext cx="2408" cy="1108233"/>
           </a:xfrm>
           <a:prstGeom prst="line">
             <a:avLst/>
@@ -6529,8 +6529,8 @@
         </p:nvSpPr>
         <p:spPr>
           <a:xfrm>
-            <a:off x="822678" y="393358"/>
-            <a:ext cx="2301467" cy="396044"/>
+            <a:off x="822678" y="761549"/>
+            <a:ext cx="2301467" cy="383228"/>
           </a:xfrm>
           <a:prstGeom prst="roundRect">
             <a:avLst>
@@ -6559,17 +6559,17 @@
           <a:p>
             <a:pPr algn="ctr"/>
             <a:r>
-              <a:rPr lang="en-US" altLang="ko-KR" sz="1000"/>
+              <a:rPr lang="en-US" altLang="ko-KR" sz="900"/>
               <a:t>App with </a:t>
             </a:r>
           </a:p>
           <a:p>
             <a:pPr algn="ctr"/>
             <a:r>
-              <a:rPr lang="en-US" altLang="ko-KR" sz="1000"/>
+              <a:rPr lang="en-US" altLang="ko-KR" sz="900"/>
               <a:t>NVIDIA_VISIBLE_DEVICES Env  </a:t>
             </a:r>
-            <a:endParaRPr lang="en-US" altLang="ko-KR" sz="1000" dirty="0"/>
+            <a:endParaRPr lang="en-US" altLang="ko-KR" sz="900" dirty="0"/>
           </a:p>
         </p:txBody>
       </p:sp>
@@ -6587,8 +6587,8 @@
         </p:nvSpPr>
         <p:spPr>
           <a:xfrm>
-            <a:off x="3434211" y="393358"/>
-            <a:ext cx="3498894" cy="396044"/>
+            <a:off x="3434211" y="761549"/>
+            <a:ext cx="3498894" cy="383228"/>
           </a:xfrm>
           <a:prstGeom prst="roundRect">
             <a:avLst>
@@ -6617,17 +6617,17 @@
           <a:p>
             <a:pPr algn="ctr"/>
             <a:r>
-              <a:rPr lang="en-US" altLang="ko-KR" sz="1000"/>
+              <a:rPr lang="en-US" altLang="ko-KR" sz="900"/>
               <a:t>App with </a:t>
             </a:r>
           </a:p>
           <a:p>
             <a:pPr algn="ctr"/>
             <a:r>
-              <a:rPr lang="en-US" altLang="ko-KR" sz="1000"/>
+              <a:rPr lang="en-US" altLang="ko-KR" sz="900"/>
               <a:t>NVIDIA_VISIBLE_DEVICES Env  </a:t>
             </a:r>
-            <a:endParaRPr lang="en-US" altLang="ko-KR" sz="1000" dirty="0"/>
+            <a:endParaRPr lang="en-US" altLang="ko-KR" sz="900" dirty="0"/>
           </a:p>
         </p:txBody>
       </p:sp>
@@ -6645,8 +6645,8 @@
         </p:nvSpPr>
         <p:spPr>
           <a:xfrm>
-            <a:off x="7244474" y="393358"/>
-            <a:ext cx="1321799" cy="396044"/>
+            <a:off x="7250133" y="757184"/>
+            <a:ext cx="1098712" cy="383228"/>
           </a:xfrm>
           <a:prstGeom prst="roundRect">
             <a:avLst>
@@ -6675,24 +6675,24 @@
           <a:p>
             <a:pPr algn="ctr"/>
             <a:r>
-              <a:rPr lang="en-US" altLang="ko-KR" sz="1000"/>
+              <a:rPr lang="en-US" altLang="ko-KR" sz="900"/>
               <a:t>App with </a:t>
             </a:r>
           </a:p>
           <a:p>
             <a:pPr algn="ctr"/>
             <a:r>
-              <a:rPr lang="en-US" altLang="ko-KR" sz="1000"/>
+              <a:rPr lang="en-US" altLang="ko-KR" sz="900"/>
               <a:t>NVIDIA_VISIBLE_</a:t>
             </a:r>
             <a:br>
-              <a:rPr lang="en-US" altLang="ko-KR" sz="1000"/>
+              <a:rPr lang="en-US" altLang="ko-KR" sz="900"/>
             </a:br>
             <a:r>
-              <a:rPr lang="en-US" altLang="ko-KR" sz="1000"/>
+              <a:rPr lang="en-US" altLang="ko-KR" sz="900"/>
               <a:t>DEVICES Env  </a:t>
             </a:r>
-            <a:endParaRPr lang="en-US" altLang="ko-KR" sz="1000" dirty="0"/>
+            <a:endParaRPr lang="en-US" altLang="ko-KR" sz="900" dirty="0"/>
           </a:p>
         </p:txBody>
       </p:sp>
@@ -6714,8 +6714,8 @@
         </p:nvCxnSpPr>
         <p:spPr>
           <a:xfrm flipH="1">
-            <a:off x="6466958" y="1736031"/>
-            <a:ext cx="1438417" cy="759880"/>
+            <a:off x="6466958" y="2056409"/>
+            <a:ext cx="1332532" cy="739656"/>
           </a:xfrm>
           <a:prstGeom prst="line">
             <a:avLst/>
@@ -6759,8 +6759,8 @@
         </p:nvCxnSpPr>
         <p:spPr>
           <a:xfrm>
-            <a:off x="6383171" y="1736031"/>
-            <a:ext cx="83787" cy="759880"/>
+            <a:off x="6383171" y="2060774"/>
+            <a:ext cx="83787" cy="735291"/>
           </a:xfrm>
           <a:prstGeom prst="line">
             <a:avLst/>
@@ -6804,8 +6804,8 @@
         </p:nvCxnSpPr>
         <p:spPr>
           <a:xfrm>
-            <a:off x="5185744" y="1736031"/>
-            <a:ext cx="21235" cy="759880"/>
+            <a:off x="5185744" y="2060774"/>
+            <a:ext cx="21235" cy="735291"/>
           </a:xfrm>
           <a:prstGeom prst="line">
             <a:avLst/>
@@ -6849,8 +6849,8 @@
         </p:nvCxnSpPr>
         <p:spPr>
           <a:xfrm flipH="1">
-            <a:off x="2682206" y="1736031"/>
-            <a:ext cx="1302004" cy="759880"/>
+            <a:off x="2682206" y="2060774"/>
+            <a:ext cx="1302004" cy="735291"/>
           </a:xfrm>
           <a:prstGeom prst="line">
             <a:avLst/>
@@ -6894,8 +6894,8 @@
         </p:nvCxnSpPr>
         <p:spPr>
           <a:xfrm>
-            <a:off x="2574212" y="1741694"/>
-            <a:ext cx="1372789" cy="754217"/>
+            <a:off x="2574212" y="2066254"/>
+            <a:ext cx="1372789" cy="729811"/>
           </a:xfrm>
           <a:prstGeom prst="line">
             <a:avLst/>
@@ -6939,8 +6939,8 @@
         </p:nvCxnSpPr>
         <p:spPr>
           <a:xfrm>
-            <a:off x="1372678" y="1741694"/>
-            <a:ext cx="1309528" cy="754217"/>
+            <a:off x="1372678" y="2066254"/>
+            <a:ext cx="1309528" cy="729811"/>
           </a:xfrm>
           <a:prstGeom prst="line">
             <a:avLst/>
@@ -6984,8 +6984,8 @@
         </p:nvCxnSpPr>
         <p:spPr>
           <a:xfrm>
-            <a:off x="1973412" y="1255640"/>
-            <a:ext cx="2598762" cy="752629"/>
+            <a:off x="1973412" y="1595928"/>
+            <a:ext cx="2598762" cy="728274"/>
           </a:xfrm>
           <a:prstGeom prst="line">
             <a:avLst/>
@@ -7029,8 +7029,8 @@
         </p:nvCxnSpPr>
         <p:spPr>
           <a:xfrm flipH="1">
-            <a:off x="4572174" y="1249977"/>
-            <a:ext cx="611484" cy="758292"/>
+            <a:off x="4572174" y="1590448"/>
+            <a:ext cx="611484" cy="733754"/>
           </a:xfrm>
           <a:prstGeom prst="line">
             <a:avLst/>
@@ -7074,8 +7074,8 @@
         </p:nvCxnSpPr>
         <p:spPr>
           <a:xfrm flipH="1">
-            <a:off x="4572174" y="1249977"/>
-            <a:ext cx="3333200" cy="758292"/>
+            <a:off x="4572174" y="1586083"/>
+            <a:ext cx="3227315" cy="738119"/>
           </a:xfrm>
           <a:prstGeom prst="line">
             <a:avLst/>
@@ -7115,8 +7115,8 @@
         </p:nvSpPr>
         <p:spPr>
           <a:xfrm>
-            <a:off x="691097" y="1819727"/>
-            <a:ext cx="915635" cy="246221"/>
+            <a:off x="691097" y="2141761"/>
+            <a:ext cx="915635" cy="238253"/>
           </a:xfrm>
           <a:prstGeom prst="rect">
             <a:avLst/>

--- a/content/docs/theory-analysis/container-nvidia-gpu/images/images.pptx
+++ b/content/docs/theory-analysis/container-nvidia-gpu/images/images.pptx
@@ -228,7 +228,7 @@
           <a:p>
             <a:fld id="{6CD5550B-26C4-49A9-A5BA-636EF7BE6CE9}" type="datetimeFigureOut">
               <a:rPr lang="ko-KR" altLang="en-US" smtClean="0"/>
-              <a:t>2026. 3. 3.</a:t>
+              <a:t>2026. 3. 4.</a:t>
             </a:fld>
             <a:endParaRPr lang="ko-KR" altLang="en-US"/>
           </a:p>
@@ -2150,7 +2150,7 @@
           <a:p>
             <a:fld id="{FB30EDBD-1C2D-4C1E-B459-B60219FAB484}" type="datetimeFigureOut">
               <a:rPr lang="ko-KR" altLang="en-US" smtClean="0"/>
-              <a:t>2026. 3. 3.</a:t>
+              <a:t>2026. 3. 4.</a:t>
             </a:fld>
             <a:endParaRPr lang="ko-KR" altLang="en-US"/>
           </a:p>
@@ -2313,7 +2313,7 @@
           <a:p>
             <a:fld id="{FB30EDBD-1C2D-4C1E-B459-B60219FAB484}" type="datetimeFigureOut">
               <a:rPr lang="ko-KR" altLang="en-US" smtClean="0"/>
-              <a:t>2026. 3. 3.</a:t>
+              <a:t>2026. 3. 4.</a:t>
             </a:fld>
             <a:endParaRPr lang="ko-KR" altLang="en-US"/>
           </a:p>
@@ -2486,7 +2486,7 @@
           <a:p>
             <a:fld id="{FB30EDBD-1C2D-4C1E-B459-B60219FAB484}" type="datetimeFigureOut">
               <a:rPr lang="ko-KR" altLang="en-US" smtClean="0"/>
-              <a:t>2026. 3. 3.</a:t>
+              <a:t>2026. 3. 4.</a:t>
             </a:fld>
             <a:endParaRPr lang="ko-KR" altLang="en-US"/>
           </a:p>
@@ -2649,7 +2649,7 @@
           <a:p>
             <a:fld id="{FB30EDBD-1C2D-4C1E-B459-B60219FAB484}" type="datetimeFigureOut">
               <a:rPr lang="ko-KR" altLang="en-US" smtClean="0"/>
-              <a:t>2026. 3. 3.</a:t>
+              <a:t>2026. 3. 4.</a:t>
             </a:fld>
             <a:endParaRPr lang="ko-KR" altLang="en-US"/>
           </a:p>
@@ -2889,7 +2889,7 @@
           <a:p>
             <a:fld id="{FB30EDBD-1C2D-4C1E-B459-B60219FAB484}" type="datetimeFigureOut">
               <a:rPr lang="ko-KR" altLang="en-US" smtClean="0"/>
-              <a:t>2026. 3. 3.</a:t>
+              <a:t>2026. 3. 4.</a:t>
             </a:fld>
             <a:endParaRPr lang="ko-KR" altLang="en-US"/>
           </a:p>
@@ -3169,7 +3169,7 @@
           <a:p>
             <a:fld id="{FB30EDBD-1C2D-4C1E-B459-B60219FAB484}" type="datetimeFigureOut">
               <a:rPr lang="ko-KR" altLang="en-US" smtClean="0"/>
-              <a:t>2026. 3. 3.</a:t>
+              <a:t>2026. 3. 4.</a:t>
             </a:fld>
             <a:endParaRPr lang="ko-KR" altLang="en-US"/>
           </a:p>
@@ -3583,7 +3583,7 @@
           <a:p>
             <a:fld id="{FB30EDBD-1C2D-4C1E-B459-B60219FAB484}" type="datetimeFigureOut">
               <a:rPr lang="ko-KR" altLang="en-US" smtClean="0"/>
-              <a:t>2026. 3. 3.</a:t>
+              <a:t>2026. 3. 4.</a:t>
             </a:fld>
             <a:endParaRPr lang="ko-KR" altLang="en-US"/>
           </a:p>
@@ -3695,7 +3695,7 @@
           <a:p>
             <a:fld id="{FB30EDBD-1C2D-4C1E-B459-B60219FAB484}" type="datetimeFigureOut">
               <a:rPr lang="ko-KR" altLang="en-US" smtClean="0"/>
-              <a:t>2026. 3. 3.</a:t>
+              <a:t>2026. 3. 4.</a:t>
             </a:fld>
             <a:endParaRPr lang="ko-KR" altLang="en-US"/>
           </a:p>
@@ -3785,7 +3785,7 @@
           <a:p>
             <a:fld id="{FB30EDBD-1C2D-4C1E-B459-B60219FAB484}" type="datetimeFigureOut">
               <a:rPr lang="ko-KR" altLang="en-US" smtClean="0"/>
-              <a:t>2026. 3. 3.</a:t>
+              <a:t>2026. 3. 4.</a:t>
             </a:fld>
             <a:endParaRPr lang="ko-KR" altLang="en-US"/>
           </a:p>
@@ -4055,7 +4055,7 @@
           <a:p>
             <a:fld id="{FB30EDBD-1C2D-4C1E-B459-B60219FAB484}" type="datetimeFigureOut">
               <a:rPr lang="ko-KR" altLang="en-US" smtClean="0"/>
-              <a:t>2026. 3. 3.</a:t>
+              <a:t>2026. 3. 4.</a:t>
             </a:fld>
             <a:endParaRPr lang="ko-KR" altLang="en-US"/>
           </a:p>
@@ -4302,7 +4302,7 @@
           <a:p>
             <a:fld id="{FB30EDBD-1C2D-4C1E-B459-B60219FAB484}" type="datetimeFigureOut">
               <a:rPr lang="ko-KR" altLang="en-US" smtClean="0"/>
-              <a:t>2026. 3. 3.</a:t>
+              <a:t>2026. 3. 4.</a:t>
             </a:fld>
             <a:endParaRPr lang="ko-KR" altLang="en-US"/>
           </a:p>
@@ -4508,7 +4508,7 @@
           <a:p>
             <a:fld id="{FB30EDBD-1C2D-4C1E-B459-B60219FAB484}" type="datetimeFigureOut">
               <a:rPr lang="ko-KR" altLang="en-US" smtClean="0"/>
-              <a:t>2026. 3. 3.</a:t>
+              <a:t>2026. 3. 4.</a:t>
             </a:fld>
             <a:endParaRPr lang="ko-KR" altLang="en-US"/>
           </a:p>
@@ -4934,12 +4934,12 @@
         </p:nvSpPr>
         <p:spPr>
           <a:xfrm>
-            <a:off x="1547664" y="2249109"/>
-            <a:ext cx="6043510" cy="1187198"/>
+            <a:off x="2046558" y="2249109"/>
+            <a:ext cx="5045722" cy="1187198"/>
           </a:xfrm>
           <a:prstGeom prst="roundRect">
             <a:avLst>
-              <a:gd name="adj" fmla="val 4925"/>
+              <a:gd name="adj" fmla="val 5938"/>
             </a:avLst>
           </a:prstGeom>
           <a:ln w="12700"/>
@@ -4985,12 +4985,12 @@
         </p:nvSpPr>
         <p:spPr>
           <a:xfrm>
-            <a:off x="1557988" y="4171338"/>
-            <a:ext cx="6033186" cy="787990"/>
+            <a:off x="2056030" y="4171338"/>
+            <a:ext cx="5037102" cy="787990"/>
           </a:xfrm>
           <a:prstGeom prst="roundRect">
             <a:avLst>
-              <a:gd name="adj" fmla="val 6397"/>
+              <a:gd name="adj" fmla="val 7160"/>
             </a:avLst>
           </a:prstGeom>
           <a:ln w="12700"/>
@@ -5036,8 +5036,8 @@
         </p:nvSpPr>
         <p:spPr>
           <a:xfrm>
-            <a:off x="1552826" y="3436307"/>
-            <a:ext cx="6043510" cy="739656"/>
+            <a:off x="2051720" y="3436307"/>
+            <a:ext cx="5045722" cy="739656"/>
           </a:xfrm>
           <a:prstGeom prst="roundRect">
             <a:avLst>
@@ -5845,7 +5845,7 @@
         </p:nvSpPr>
         <p:spPr>
           <a:xfrm>
-            <a:off x="7164288" y="483518"/>
+            <a:off x="7141814" y="483518"/>
             <a:ext cx="1274717" cy="1662236"/>
           </a:xfrm>
           <a:prstGeom prst="roundRect">
@@ -5902,7 +5902,7 @@
         </p:nvSpPr>
         <p:spPr>
           <a:xfrm>
-            <a:off x="7250134" y="1673181"/>
+            <a:off x="7227660" y="1673181"/>
             <a:ext cx="1098712" cy="383228"/>
           </a:xfrm>
           <a:prstGeom prst="roundRect">
@@ -5958,7 +5958,7 @@
         </p:nvSpPr>
         <p:spPr>
           <a:xfrm>
-            <a:off x="7250133" y="1202855"/>
+            <a:off x="7227659" y="1202855"/>
             <a:ext cx="1098711" cy="383228"/>
           </a:xfrm>
           <a:prstGeom prst="roundRect">
@@ -6014,8 +6014,8 @@
         </p:nvSpPr>
         <p:spPr>
           <a:xfrm>
-            <a:off x="1692325" y="3564926"/>
-            <a:ext cx="5759996" cy="383228"/>
+            <a:off x="2141131" y="3564926"/>
+            <a:ext cx="4862083" cy="383228"/>
           </a:xfrm>
           <a:prstGeom prst="roundRect">
             <a:avLst>
@@ -6233,7 +6233,7 @@
         </p:nvSpPr>
         <p:spPr>
           <a:xfrm>
-            <a:off x="5925884" y="2796064"/>
+            <a:off x="5920375" y="2796064"/>
             <a:ext cx="1082148" cy="383228"/>
           </a:xfrm>
           <a:prstGeom prst="roundRect">
@@ -6486,9 +6486,9 @@
           <p:nvPr/>
         </p:nvCxnSpPr>
         <p:spPr>
-          <a:xfrm flipH="1">
-            <a:off x="6464550" y="3179293"/>
-            <a:ext cx="2408" cy="1108233"/>
+          <a:xfrm>
+            <a:off x="6461449" y="3179292"/>
+            <a:ext cx="3101" cy="1108233"/>
           </a:xfrm>
           <a:prstGeom prst="line">
             <a:avLst/>
@@ -6645,7 +6645,7 @@
         </p:nvSpPr>
         <p:spPr>
           <a:xfrm>
-            <a:off x="7250133" y="757184"/>
+            <a:off x="7227659" y="757184"/>
             <a:ext cx="1098712" cy="383228"/>
           </a:xfrm>
           <a:prstGeom prst="roundRect">
@@ -6714,8 +6714,8 @@
         </p:nvCxnSpPr>
         <p:spPr>
           <a:xfrm flipH="1">
-            <a:off x="6466958" y="2056409"/>
-            <a:ext cx="1332532" cy="739656"/>
+            <a:off x="6461449" y="2056409"/>
+            <a:ext cx="1315567" cy="739655"/>
           </a:xfrm>
           <a:prstGeom prst="line">
             <a:avLst/>
@@ -6760,7 +6760,7 @@
         <p:spPr>
           <a:xfrm>
             <a:off x="6383171" y="2060774"/>
-            <a:ext cx="83787" cy="735291"/>
+            <a:ext cx="78278" cy="735290"/>
           </a:xfrm>
           <a:prstGeom prst="line">
             <a:avLst/>
@@ -7075,7 +7075,7 @@
         <p:spPr>
           <a:xfrm flipH="1">
             <a:off x="4572174" y="1586083"/>
-            <a:ext cx="3227315" cy="738119"/>
+            <a:ext cx="3204841" cy="738119"/>
           </a:xfrm>
           <a:prstGeom prst="line">
             <a:avLst/>

--- a/content/docs/theory-analysis/container-nvidia-gpu/images/images.pptx
+++ b/content/docs/theory-analysis/container-nvidia-gpu/images/images.pptx
@@ -5,25 +5,26 @@
     <p:sldMasterId id="2147483648" r:id="rId1"/>
   </p:sldMasterIdLst>
   <p:notesMasterIdLst>
-    <p:notesMasterId r:id="rId18"/>
+    <p:notesMasterId r:id="rId19"/>
   </p:notesMasterIdLst>
   <p:sldIdLst>
     <p:sldId id="436" r:id="rId2"/>
     <p:sldId id="435" r:id="rId3"/>
     <p:sldId id="438" r:id="rId4"/>
-    <p:sldId id="426" r:id="rId5"/>
-    <p:sldId id="434" r:id="rId6"/>
-    <p:sldId id="437" r:id="rId7"/>
-    <p:sldId id="439" r:id="rId8"/>
-    <p:sldId id="440" r:id="rId9"/>
-    <p:sldId id="428" r:id="rId10"/>
-    <p:sldId id="427" r:id="rId11"/>
-    <p:sldId id="422" r:id="rId12"/>
-    <p:sldId id="433" r:id="rId13"/>
-    <p:sldId id="432" r:id="rId14"/>
-    <p:sldId id="429" r:id="rId15"/>
-    <p:sldId id="430" r:id="rId16"/>
-    <p:sldId id="431" r:id="rId17"/>
+    <p:sldId id="441" r:id="rId5"/>
+    <p:sldId id="426" r:id="rId6"/>
+    <p:sldId id="434" r:id="rId7"/>
+    <p:sldId id="437" r:id="rId8"/>
+    <p:sldId id="439" r:id="rId9"/>
+    <p:sldId id="440" r:id="rId10"/>
+    <p:sldId id="428" r:id="rId11"/>
+    <p:sldId id="427" r:id="rId12"/>
+    <p:sldId id="422" r:id="rId13"/>
+    <p:sldId id="433" r:id="rId14"/>
+    <p:sldId id="432" r:id="rId15"/>
+    <p:sldId id="429" r:id="rId16"/>
+    <p:sldId id="430" r:id="rId17"/>
+    <p:sldId id="431" r:id="rId18"/>
   </p:sldIdLst>
   <p:sldSz cx="9144000" cy="5143500" type="screen16x9"/>
   <p:notesSz cx="6858000" cy="9144000"/>
@@ -228,7 +229,7 @@
           <a:p>
             <a:fld id="{6CD5550B-26C4-49A9-A5BA-636EF7BE6CE9}" type="datetimeFigureOut">
               <a:rPr lang="ko-KR" altLang="en-US" smtClean="0"/>
-              <a:t>2026. 3. 4.</a:t>
+              <a:t>2026. 3. 7.</a:t>
             </a:fld>
             <a:endParaRPr lang="ko-KR" altLang="en-US"/>
           </a:p>
@@ -677,6 +678,90 @@
     </p:spTree>
     <p:extLst>
       <p:ext uri="{BB962C8B-B14F-4D97-AF65-F5344CB8AC3E}">
+        <p14:creationId xmlns:p14="http://schemas.microsoft.com/office/powerpoint/2010/main" val="3019375958"/>
+      </p:ext>
+    </p:extLst>
+  </p:cSld>
+  <p:clrMapOvr>
+    <a:masterClrMapping/>
+  </p:clrMapOvr>
+</p:notes>
+</file>
+
+<file path=ppt/notesSlides/notesSlide11.xml><?xml version="1.0" encoding="utf-8"?>
+<p:notes xmlns:a="http://schemas.openxmlformats.org/drawingml/2006/main" xmlns:r="http://schemas.openxmlformats.org/officeDocument/2006/relationships" xmlns:p="http://schemas.openxmlformats.org/presentationml/2006/main">
+  <p:cSld>
+    <p:spTree>
+      <p:nvGrpSpPr>
+        <p:cNvPr id="1" name=""/>
+        <p:cNvGrpSpPr/>
+        <p:nvPr/>
+      </p:nvGrpSpPr>
+      <p:grpSpPr>
+        <a:xfrm>
+          <a:off x="0" y="0"/>
+          <a:ext cx="0" cy="0"/>
+          <a:chOff x="0" y="0"/>
+          <a:chExt cx="0" cy="0"/>
+        </a:xfrm>
+      </p:grpSpPr>
+      <p:sp>
+        <p:nvSpPr>
+          <p:cNvPr id="2" name="슬라이드 이미지 개체 틀 1"/>
+          <p:cNvSpPr>
+            <a:spLocks noGrp="1" noRot="1" noChangeAspect="1"/>
+          </p:cNvSpPr>
+          <p:nvPr>
+            <p:ph type="sldImg"/>
+          </p:nvPr>
+        </p:nvSpPr>
+        <p:spPr/>
+      </p:sp>
+      <p:sp>
+        <p:nvSpPr>
+          <p:cNvPr id="3" name="슬라이드 노트 개체 틀 2"/>
+          <p:cNvSpPr>
+            <a:spLocks noGrp="1"/>
+          </p:cNvSpPr>
+          <p:nvPr>
+            <p:ph type="body" idx="1"/>
+          </p:nvPr>
+        </p:nvSpPr>
+        <p:spPr/>
+        <p:txBody>
+          <a:bodyPr/>
+          <a:lstStyle/>
+          <a:p>
+            <a:endParaRPr lang="ko-KR" altLang="en-US"/>
+          </a:p>
+        </p:txBody>
+      </p:sp>
+      <p:sp>
+        <p:nvSpPr>
+          <p:cNvPr id="4" name="슬라이드 번호 개체 틀 3"/>
+          <p:cNvSpPr>
+            <a:spLocks noGrp="1"/>
+          </p:cNvSpPr>
+          <p:nvPr>
+            <p:ph type="sldNum" sz="quarter" idx="10"/>
+          </p:nvPr>
+        </p:nvSpPr>
+        <p:spPr/>
+        <p:txBody>
+          <a:bodyPr/>
+          <a:lstStyle/>
+          <a:p>
+            <a:fld id="{BA5DFA43-8D57-47FB-BC46-057616015C3B}" type="slidenum">
+              <a:rPr lang="ko-KR" altLang="en-US" smtClean="0"/>
+              <a:t>12</a:t>
+            </a:fld>
+            <a:endParaRPr lang="ko-KR" altLang="en-US"/>
+          </a:p>
+        </p:txBody>
+      </p:sp>
+    </p:spTree>
+    <p:extLst>
+      <p:ext uri="{BB962C8B-B14F-4D97-AF65-F5344CB8AC3E}">
         <p14:creationId xmlns:p14="http://schemas.microsoft.com/office/powerpoint/2010/main" val="3104554366"/>
       </p:ext>
     </p:extLst>
@@ -687,7 +772,7 @@
 </p:notes>
 </file>
 
-<file path=ppt/notesSlides/notesSlide11.xml><?xml version="1.0" encoding="utf-8"?>
+<file path=ppt/notesSlides/notesSlide12.xml><?xml version="1.0" encoding="utf-8"?>
 <p:notes xmlns:a="http://schemas.openxmlformats.org/drawingml/2006/main" xmlns:r="http://schemas.openxmlformats.org/officeDocument/2006/relationships" xmlns:p="http://schemas.openxmlformats.org/presentationml/2006/main">
   <p:cSld>
     <p:spTree>
@@ -776,7 +861,7 @@
           <a:p>
             <a:fld id="{BA5DFA43-8D57-47FB-BC46-057616015C3B}" type="slidenum">
               <a:rPr lang="ko-KR" altLang="en-US" smtClean="0"/>
-              <a:t>12</a:t>
+              <a:t>13</a:t>
             </a:fld>
             <a:endParaRPr lang="ko-KR" altLang="en-US"/>
           </a:p>
@@ -795,7 +880,7 @@
 </p:notes>
 </file>
 
-<file path=ppt/notesSlides/notesSlide12.xml><?xml version="1.0" encoding="utf-8"?>
+<file path=ppt/notesSlides/notesSlide13.xml><?xml version="1.0" encoding="utf-8"?>
 <p:notes xmlns:a="http://schemas.openxmlformats.org/drawingml/2006/main" xmlns:r="http://schemas.openxmlformats.org/officeDocument/2006/relationships" xmlns:p="http://schemas.openxmlformats.org/presentationml/2006/main">
   <p:cSld>
     <p:spTree>
@@ -884,7 +969,7 @@
           <a:p>
             <a:fld id="{BA5DFA43-8D57-47FB-BC46-057616015C3B}" type="slidenum">
               <a:rPr lang="ko-KR" altLang="en-US" smtClean="0"/>
-              <a:t>13</a:t>
+              <a:t>14</a:t>
             </a:fld>
             <a:endParaRPr lang="ko-KR" altLang="en-US"/>
           </a:p>
@@ -894,90 +979,6 @@
     <p:extLst>
       <p:ext uri="{BB962C8B-B14F-4D97-AF65-F5344CB8AC3E}">
         <p14:creationId xmlns:p14="http://schemas.microsoft.com/office/powerpoint/2010/main" val="180167310"/>
-      </p:ext>
-    </p:extLst>
-  </p:cSld>
-  <p:clrMapOvr>
-    <a:masterClrMapping/>
-  </p:clrMapOvr>
-</p:notes>
-</file>
-
-<file path=ppt/notesSlides/notesSlide13.xml><?xml version="1.0" encoding="utf-8"?>
-<p:notes xmlns:a="http://schemas.openxmlformats.org/drawingml/2006/main" xmlns:r="http://schemas.openxmlformats.org/officeDocument/2006/relationships" xmlns:p="http://schemas.openxmlformats.org/presentationml/2006/main">
-  <p:cSld>
-    <p:spTree>
-      <p:nvGrpSpPr>
-        <p:cNvPr id="1" name=""/>
-        <p:cNvGrpSpPr/>
-        <p:nvPr/>
-      </p:nvGrpSpPr>
-      <p:grpSpPr>
-        <a:xfrm>
-          <a:off x="0" y="0"/>
-          <a:ext cx="0" cy="0"/>
-          <a:chOff x="0" y="0"/>
-          <a:chExt cx="0" cy="0"/>
-        </a:xfrm>
-      </p:grpSpPr>
-      <p:sp>
-        <p:nvSpPr>
-          <p:cNvPr id="2" name="슬라이드 이미지 개체 틀 1"/>
-          <p:cNvSpPr>
-            <a:spLocks noGrp="1" noRot="1" noChangeAspect="1"/>
-          </p:cNvSpPr>
-          <p:nvPr>
-            <p:ph type="sldImg"/>
-          </p:nvPr>
-        </p:nvSpPr>
-        <p:spPr/>
-      </p:sp>
-      <p:sp>
-        <p:nvSpPr>
-          <p:cNvPr id="3" name="슬라이드 노트 개체 틀 2"/>
-          <p:cNvSpPr>
-            <a:spLocks noGrp="1"/>
-          </p:cNvSpPr>
-          <p:nvPr>
-            <p:ph type="body" idx="1"/>
-          </p:nvPr>
-        </p:nvSpPr>
-        <p:spPr/>
-        <p:txBody>
-          <a:bodyPr/>
-          <a:lstStyle/>
-          <a:p>
-            <a:endParaRPr lang="ko-KR" altLang="en-US"/>
-          </a:p>
-        </p:txBody>
-      </p:sp>
-      <p:sp>
-        <p:nvSpPr>
-          <p:cNvPr id="4" name="슬라이드 번호 개체 틀 3"/>
-          <p:cNvSpPr>
-            <a:spLocks noGrp="1"/>
-          </p:cNvSpPr>
-          <p:nvPr>
-            <p:ph type="sldNum" sz="quarter" idx="10"/>
-          </p:nvPr>
-        </p:nvSpPr>
-        <p:spPr/>
-        <p:txBody>
-          <a:bodyPr/>
-          <a:lstStyle/>
-          <a:p>
-            <a:fld id="{BA5DFA43-8D57-47FB-BC46-057616015C3B}" type="slidenum">
-              <a:rPr lang="ko-KR" altLang="en-US" smtClean="0"/>
-              <a:t>14</a:t>
-            </a:fld>
-            <a:endParaRPr lang="ko-KR" altLang="en-US"/>
-          </a:p>
-        </p:txBody>
-      </p:sp>
-    </p:spTree>
-    <p:extLst>
-      <p:ext uri="{BB962C8B-B14F-4D97-AF65-F5344CB8AC3E}">
-        <p14:creationId xmlns:p14="http://schemas.microsoft.com/office/powerpoint/2010/main" val="1617950839"/>
       </p:ext>
     </p:extLst>
   </p:cSld>
@@ -1061,7 +1062,7 @@
     </p:spTree>
     <p:extLst>
       <p:ext uri="{BB962C8B-B14F-4D97-AF65-F5344CB8AC3E}">
-        <p14:creationId xmlns:p14="http://schemas.microsoft.com/office/powerpoint/2010/main" val="1174720120"/>
+        <p14:creationId xmlns:p14="http://schemas.microsoft.com/office/powerpoint/2010/main" val="1617950839"/>
       </p:ext>
     </p:extLst>
   </p:cSld>
@@ -1137,6 +1138,90 @@
             <a:fld id="{BA5DFA43-8D57-47FB-BC46-057616015C3B}" type="slidenum">
               <a:rPr lang="ko-KR" altLang="en-US" smtClean="0"/>
               <a:t>16</a:t>
+            </a:fld>
+            <a:endParaRPr lang="ko-KR" altLang="en-US"/>
+          </a:p>
+        </p:txBody>
+      </p:sp>
+    </p:spTree>
+    <p:extLst>
+      <p:ext uri="{BB962C8B-B14F-4D97-AF65-F5344CB8AC3E}">
+        <p14:creationId xmlns:p14="http://schemas.microsoft.com/office/powerpoint/2010/main" val="1174720120"/>
+      </p:ext>
+    </p:extLst>
+  </p:cSld>
+  <p:clrMapOvr>
+    <a:masterClrMapping/>
+  </p:clrMapOvr>
+</p:notes>
+</file>
+
+<file path=ppt/notesSlides/notesSlide16.xml><?xml version="1.0" encoding="utf-8"?>
+<p:notes xmlns:a="http://schemas.openxmlformats.org/drawingml/2006/main" xmlns:r="http://schemas.openxmlformats.org/officeDocument/2006/relationships" xmlns:p="http://schemas.openxmlformats.org/presentationml/2006/main">
+  <p:cSld>
+    <p:spTree>
+      <p:nvGrpSpPr>
+        <p:cNvPr id="1" name=""/>
+        <p:cNvGrpSpPr/>
+        <p:nvPr/>
+      </p:nvGrpSpPr>
+      <p:grpSpPr>
+        <a:xfrm>
+          <a:off x="0" y="0"/>
+          <a:ext cx="0" cy="0"/>
+          <a:chOff x="0" y="0"/>
+          <a:chExt cx="0" cy="0"/>
+        </a:xfrm>
+      </p:grpSpPr>
+      <p:sp>
+        <p:nvSpPr>
+          <p:cNvPr id="2" name="슬라이드 이미지 개체 틀 1"/>
+          <p:cNvSpPr>
+            <a:spLocks noGrp="1" noRot="1" noChangeAspect="1"/>
+          </p:cNvSpPr>
+          <p:nvPr>
+            <p:ph type="sldImg"/>
+          </p:nvPr>
+        </p:nvSpPr>
+        <p:spPr/>
+      </p:sp>
+      <p:sp>
+        <p:nvSpPr>
+          <p:cNvPr id="3" name="슬라이드 노트 개체 틀 2"/>
+          <p:cNvSpPr>
+            <a:spLocks noGrp="1"/>
+          </p:cNvSpPr>
+          <p:nvPr>
+            <p:ph type="body" idx="1"/>
+          </p:nvPr>
+        </p:nvSpPr>
+        <p:spPr/>
+        <p:txBody>
+          <a:bodyPr/>
+          <a:lstStyle/>
+          <a:p>
+            <a:endParaRPr lang="ko-KR" altLang="en-US"/>
+          </a:p>
+        </p:txBody>
+      </p:sp>
+      <p:sp>
+        <p:nvSpPr>
+          <p:cNvPr id="4" name="슬라이드 번호 개체 틀 3"/>
+          <p:cNvSpPr>
+            <a:spLocks noGrp="1"/>
+          </p:cNvSpPr>
+          <p:nvPr>
+            <p:ph type="sldNum" sz="quarter" idx="10"/>
+          </p:nvPr>
+        </p:nvSpPr>
+        <p:spPr/>
+        <p:txBody>
+          <a:bodyPr/>
+          <a:lstStyle/>
+          <a:p>
+            <a:fld id="{BA5DFA43-8D57-47FB-BC46-057616015C3B}" type="slidenum">
+              <a:rPr lang="ko-KR" altLang="en-US" smtClean="0"/>
+              <a:t>17</a:t>
             </a:fld>
             <a:endParaRPr lang="ko-KR" altLang="en-US"/>
           </a:p>
@@ -1379,6 +1464,114 @@
         <p:cNvPr id="1" name="">
           <a:extLst>
             <a:ext uri="{FF2B5EF4-FFF2-40B4-BE49-F238E27FC236}">
+              <a16:creationId xmlns:a16="http://schemas.microsoft.com/office/drawing/2014/main" id="{3E5B85B6-200F-FC09-A03C-EF441145EA17}"/>
+            </a:ext>
+          </a:extLst>
+        </p:cNvPr>
+        <p:cNvGrpSpPr/>
+        <p:nvPr/>
+      </p:nvGrpSpPr>
+      <p:grpSpPr>
+        <a:xfrm>
+          <a:off x="0" y="0"/>
+          <a:ext cx="0" cy="0"/>
+          <a:chOff x="0" y="0"/>
+          <a:chExt cx="0" cy="0"/>
+        </a:xfrm>
+      </p:grpSpPr>
+      <p:sp>
+        <p:nvSpPr>
+          <p:cNvPr id="2" name="슬라이드 이미지 개체 틀 1">
+            <a:extLst>
+              <a:ext uri="{FF2B5EF4-FFF2-40B4-BE49-F238E27FC236}">
+                <a16:creationId xmlns:a16="http://schemas.microsoft.com/office/drawing/2014/main" id="{7E78FC12-20F8-CF8D-49E1-711C099A38B6}"/>
+              </a:ext>
+            </a:extLst>
+          </p:cNvPr>
+          <p:cNvSpPr>
+            <a:spLocks noGrp="1" noRot="1" noChangeAspect="1"/>
+          </p:cNvSpPr>
+          <p:nvPr>
+            <p:ph type="sldImg"/>
+          </p:nvPr>
+        </p:nvSpPr>
+        <p:spPr/>
+      </p:sp>
+      <p:sp>
+        <p:nvSpPr>
+          <p:cNvPr id="3" name="슬라이드 노트 개체 틀 2">
+            <a:extLst>
+              <a:ext uri="{FF2B5EF4-FFF2-40B4-BE49-F238E27FC236}">
+                <a16:creationId xmlns:a16="http://schemas.microsoft.com/office/drawing/2014/main" id="{83535495-7136-6AF5-0EC1-310007D06865}"/>
+              </a:ext>
+            </a:extLst>
+          </p:cNvPr>
+          <p:cNvSpPr>
+            <a:spLocks noGrp="1"/>
+          </p:cNvSpPr>
+          <p:nvPr>
+            <p:ph type="body" idx="1"/>
+          </p:nvPr>
+        </p:nvSpPr>
+        <p:spPr/>
+        <p:txBody>
+          <a:bodyPr/>
+          <a:lstStyle/>
+          <a:p>
+            <a:endParaRPr lang="ko-KR" altLang="en-US"/>
+          </a:p>
+        </p:txBody>
+      </p:sp>
+      <p:sp>
+        <p:nvSpPr>
+          <p:cNvPr id="4" name="슬라이드 번호 개체 틀 3">
+            <a:extLst>
+              <a:ext uri="{FF2B5EF4-FFF2-40B4-BE49-F238E27FC236}">
+                <a16:creationId xmlns:a16="http://schemas.microsoft.com/office/drawing/2014/main" id="{4E9CCB5C-686B-879E-587B-DC0E8D9364B3}"/>
+              </a:ext>
+            </a:extLst>
+          </p:cNvPr>
+          <p:cNvSpPr>
+            <a:spLocks noGrp="1"/>
+          </p:cNvSpPr>
+          <p:nvPr>
+            <p:ph type="sldNum" sz="quarter" idx="10"/>
+          </p:nvPr>
+        </p:nvSpPr>
+        <p:spPr/>
+        <p:txBody>
+          <a:bodyPr/>
+          <a:lstStyle/>
+          <a:p>
+            <a:fld id="{BA5DFA43-8D57-47FB-BC46-057616015C3B}" type="slidenum">
+              <a:rPr lang="ko-KR" altLang="en-US" smtClean="0"/>
+              <a:t>4</a:t>
+            </a:fld>
+            <a:endParaRPr lang="ko-KR" altLang="en-US"/>
+          </a:p>
+        </p:txBody>
+      </p:sp>
+    </p:spTree>
+    <p:extLst>
+      <p:ext uri="{BB962C8B-B14F-4D97-AF65-F5344CB8AC3E}">
+        <p14:creationId xmlns:p14="http://schemas.microsoft.com/office/powerpoint/2010/main" val="1128267190"/>
+      </p:ext>
+    </p:extLst>
+  </p:cSld>
+  <p:clrMapOvr>
+    <a:masterClrMapping/>
+  </p:clrMapOvr>
+</p:notes>
+</file>
+
+<file path=ppt/notesSlides/notesSlide5.xml><?xml version="1.0" encoding="utf-8"?>
+<p:notes xmlns:a="http://schemas.openxmlformats.org/drawingml/2006/main" xmlns:r="http://schemas.openxmlformats.org/officeDocument/2006/relationships" xmlns:p="http://schemas.openxmlformats.org/presentationml/2006/main">
+  <p:cSld>
+    <p:spTree>
+      <p:nvGrpSpPr>
+        <p:cNvPr id="1" name="">
+          <a:extLst>
+            <a:ext uri="{FF2B5EF4-FFF2-40B4-BE49-F238E27FC236}">
               <a16:creationId xmlns:a16="http://schemas.microsoft.com/office/drawing/2014/main" id="{1DFA0934-F7EE-9604-5F97-9303B9190681}"/>
             </a:ext>
           </a:extLst>
@@ -1460,7 +1653,7 @@
           <a:p>
             <a:fld id="{BA5DFA43-8D57-47FB-BC46-057616015C3B}" type="slidenum">
               <a:rPr lang="ko-KR" altLang="en-US" smtClean="0"/>
-              <a:t>5</a:t>
+              <a:t>6</a:t>
             </a:fld>
             <a:endParaRPr lang="ko-KR" altLang="en-US"/>
           </a:p>
@@ -1479,7 +1672,7 @@
 </p:notes>
 </file>
 
-<file path=ppt/notesSlides/notesSlide5.xml><?xml version="1.0" encoding="utf-8"?>
+<file path=ppt/notesSlides/notesSlide6.xml><?xml version="1.0" encoding="utf-8"?>
 <p:notes xmlns:a="http://schemas.openxmlformats.org/drawingml/2006/main" xmlns:r="http://schemas.openxmlformats.org/officeDocument/2006/relationships" xmlns:p="http://schemas.openxmlformats.org/presentationml/2006/main">
   <p:cSld>
     <p:spTree>
@@ -1568,7 +1761,7 @@
           <a:p>
             <a:fld id="{BA5DFA43-8D57-47FB-BC46-057616015C3B}" type="slidenum">
               <a:rPr lang="ko-KR" altLang="en-US" smtClean="0"/>
-              <a:t>6</a:t>
+              <a:t>7</a:t>
             </a:fld>
             <a:endParaRPr lang="ko-KR" altLang="en-US"/>
           </a:p>
@@ -1587,7 +1780,7 @@
 </p:notes>
 </file>
 
-<file path=ppt/notesSlides/notesSlide6.xml><?xml version="1.0" encoding="utf-8"?>
+<file path=ppt/notesSlides/notesSlide7.xml><?xml version="1.0" encoding="utf-8"?>
 <p:notes xmlns:a="http://schemas.openxmlformats.org/drawingml/2006/main" xmlns:r="http://schemas.openxmlformats.org/officeDocument/2006/relationships" xmlns:p="http://schemas.openxmlformats.org/presentationml/2006/main">
   <p:cSld>
     <p:spTree>
@@ -1676,7 +1869,7 @@
           <a:p>
             <a:fld id="{BA5DFA43-8D57-47FB-BC46-057616015C3B}" type="slidenum">
               <a:rPr lang="ko-KR" altLang="en-US" smtClean="0"/>
-              <a:t>7</a:t>
+              <a:t>8</a:t>
             </a:fld>
             <a:endParaRPr lang="ko-KR" altLang="en-US"/>
           </a:p>
@@ -1695,7 +1888,7 @@
 </p:notes>
 </file>
 
-<file path=ppt/notesSlides/notesSlide7.xml><?xml version="1.0" encoding="utf-8"?>
+<file path=ppt/notesSlides/notesSlide8.xml><?xml version="1.0" encoding="utf-8"?>
 <p:notes xmlns:a="http://schemas.openxmlformats.org/drawingml/2006/main" xmlns:r="http://schemas.openxmlformats.org/officeDocument/2006/relationships" xmlns:p="http://schemas.openxmlformats.org/presentationml/2006/main">
   <p:cSld>
     <p:spTree>
@@ -1784,7 +1977,7 @@
           <a:p>
             <a:fld id="{BA5DFA43-8D57-47FB-BC46-057616015C3B}" type="slidenum">
               <a:rPr lang="ko-KR" altLang="en-US" smtClean="0"/>
-              <a:t>8</a:t>
+              <a:t>9</a:t>
             </a:fld>
             <a:endParaRPr lang="ko-KR" altLang="en-US"/>
           </a:p>
@@ -1794,90 +1987,6 @@
     <p:extLst>
       <p:ext uri="{BB962C8B-B14F-4D97-AF65-F5344CB8AC3E}">
         <p14:creationId xmlns:p14="http://schemas.microsoft.com/office/powerpoint/2010/main" val="3418847978"/>
-      </p:ext>
-    </p:extLst>
-  </p:cSld>
-  <p:clrMapOvr>
-    <a:masterClrMapping/>
-  </p:clrMapOvr>
-</p:notes>
-</file>
-
-<file path=ppt/notesSlides/notesSlide8.xml><?xml version="1.0" encoding="utf-8"?>
-<p:notes xmlns:a="http://schemas.openxmlformats.org/drawingml/2006/main" xmlns:r="http://schemas.openxmlformats.org/officeDocument/2006/relationships" xmlns:p="http://schemas.openxmlformats.org/presentationml/2006/main">
-  <p:cSld>
-    <p:spTree>
-      <p:nvGrpSpPr>
-        <p:cNvPr id="1" name=""/>
-        <p:cNvGrpSpPr/>
-        <p:nvPr/>
-      </p:nvGrpSpPr>
-      <p:grpSpPr>
-        <a:xfrm>
-          <a:off x="0" y="0"/>
-          <a:ext cx="0" cy="0"/>
-          <a:chOff x="0" y="0"/>
-          <a:chExt cx="0" cy="0"/>
-        </a:xfrm>
-      </p:grpSpPr>
-      <p:sp>
-        <p:nvSpPr>
-          <p:cNvPr id="2" name="슬라이드 이미지 개체 틀 1"/>
-          <p:cNvSpPr>
-            <a:spLocks noGrp="1" noRot="1" noChangeAspect="1"/>
-          </p:cNvSpPr>
-          <p:nvPr>
-            <p:ph type="sldImg"/>
-          </p:nvPr>
-        </p:nvSpPr>
-        <p:spPr/>
-      </p:sp>
-      <p:sp>
-        <p:nvSpPr>
-          <p:cNvPr id="3" name="슬라이드 노트 개체 틀 2"/>
-          <p:cNvSpPr>
-            <a:spLocks noGrp="1"/>
-          </p:cNvSpPr>
-          <p:nvPr>
-            <p:ph type="body" idx="1"/>
-          </p:nvPr>
-        </p:nvSpPr>
-        <p:spPr/>
-        <p:txBody>
-          <a:bodyPr/>
-          <a:lstStyle/>
-          <a:p>
-            <a:endParaRPr lang="ko-KR" altLang="en-US"/>
-          </a:p>
-        </p:txBody>
-      </p:sp>
-      <p:sp>
-        <p:nvSpPr>
-          <p:cNvPr id="4" name="슬라이드 번호 개체 틀 3"/>
-          <p:cNvSpPr>
-            <a:spLocks noGrp="1"/>
-          </p:cNvSpPr>
-          <p:nvPr>
-            <p:ph type="sldNum" sz="quarter" idx="10"/>
-          </p:nvPr>
-        </p:nvSpPr>
-        <p:spPr/>
-        <p:txBody>
-          <a:bodyPr/>
-          <a:lstStyle/>
-          <a:p>
-            <a:fld id="{BA5DFA43-8D57-47FB-BC46-057616015C3B}" type="slidenum">
-              <a:rPr lang="ko-KR" altLang="en-US" smtClean="0"/>
-              <a:t>9</a:t>
-            </a:fld>
-            <a:endParaRPr lang="ko-KR" altLang="en-US"/>
-          </a:p>
-        </p:txBody>
-      </p:sp>
-    </p:spTree>
-    <p:extLst>
-      <p:ext uri="{BB962C8B-B14F-4D97-AF65-F5344CB8AC3E}">
-        <p14:creationId xmlns:p14="http://schemas.microsoft.com/office/powerpoint/2010/main" val="1567964482"/>
       </p:ext>
     </p:extLst>
   </p:cSld>
@@ -1961,7 +2070,7 @@
     </p:spTree>
     <p:extLst>
       <p:ext uri="{BB962C8B-B14F-4D97-AF65-F5344CB8AC3E}">
-        <p14:creationId xmlns:p14="http://schemas.microsoft.com/office/powerpoint/2010/main" val="3019375958"/>
+        <p14:creationId xmlns:p14="http://schemas.microsoft.com/office/powerpoint/2010/main" val="1567964482"/>
       </p:ext>
     </p:extLst>
   </p:cSld>
@@ -2150,7 +2259,7 @@
           <a:p>
             <a:fld id="{FB30EDBD-1C2D-4C1E-B459-B60219FAB484}" type="datetimeFigureOut">
               <a:rPr lang="ko-KR" altLang="en-US" smtClean="0"/>
-              <a:t>2026. 3. 4.</a:t>
+              <a:t>2026. 3. 7.</a:t>
             </a:fld>
             <a:endParaRPr lang="ko-KR" altLang="en-US"/>
           </a:p>
@@ -2313,7 +2422,7 @@
           <a:p>
             <a:fld id="{FB30EDBD-1C2D-4C1E-B459-B60219FAB484}" type="datetimeFigureOut">
               <a:rPr lang="ko-KR" altLang="en-US" smtClean="0"/>
-              <a:t>2026. 3. 4.</a:t>
+              <a:t>2026. 3. 7.</a:t>
             </a:fld>
             <a:endParaRPr lang="ko-KR" altLang="en-US"/>
           </a:p>
@@ -2486,7 +2595,7 @@
           <a:p>
             <a:fld id="{FB30EDBD-1C2D-4C1E-B459-B60219FAB484}" type="datetimeFigureOut">
               <a:rPr lang="ko-KR" altLang="en-US" smtClean="0"/>
-              <a:t>2026. 3. 4.</a:t>
+              <a:t>2026. 3. 7.</a:t>
             </a:fld>
             <a:endParaRPr lang="ko-KR" altLang="en-US"/>
           </a:p>
@@ -2649,7 +2758,7 @@
           <a:p>
             <a:fld id="{FB30EDBD-1C2D-4C1E-B459-B60219FAB484}" type="datetimeFigureOut">
               <a:rPr lang="ko-KR" altLang="en-US" smtClean="0"/>
-              <a:t>2026. 3. 4.</a:t>
+              <a:t>2026. 3. 7.</a:t>
             </a:fld>
             <a:endParaRPr lang="ko-KR" altLang="en-US"/>
           </a:p>
@@ -2889,7 +2998,7 @@
           <a:p>
             <a:fld id="{FB30EDBD-1C2D-4C1E-B459-B60219FAB484}" type="datetimeFigureOut">
               <a:rPr lang="ko-KR" altLang="en-US" smtClean="0"/>
-              <a:t>2026. 3. 4.</a:t>
+              <a:t>2026. 3. 7.</a:t>
             </a:fld>
             <a:endParaRPr lang="ko-KR" altLang="en-US"/>
           </a:p>
@@ -3169,7 +3278,7 @@
           <a:p>
             <a:fld id="{FB30EDBD-1C2D-4C1E-B459-B60219FAB484}" type="datetimeFigureOut">
               <a:rPr lang="ko-KR" altLang="en-US" smtClean="0"/>
-              <a:t>2026. 3. 4.</a:t>
+              <a:t>2026. 3. 7.</a:t>
             </a:fld>
             <a:endParaRPr lang="ko-KR" altLang="en-US"/>
           </a:p>
@@ -3583,7 +3692,7 @@
           <a:p>
             <a:fld id="{FB30EDBD-1C2D-4C1E-B459-B60219FAB484}" type="datetimeFigureOut">
               <a:rPr lang="ko-KR" altLang="en-US" smtClean="0"/>
-              <a:t>2026. 3. 4.</a:t>
+              <a:t>2026. 3. 7.</a:t>
             </a:fld>
             <a:endParaRPr lang="ko-KR" altLang="en-US"/>
           </a:p>
@@ -3695,7 +3804,7 @@
           <a:p>
             <a:fld id="{FB30EDBD-1C2D-4C1E-B459-B60219FAB484}" type="datetimeFigureOut">
               <a:rPr lang="ko-KR" altLang="en-US" smtClean="0"/>
-              <a:t>2026. 3. 4.</a:t>
+              <a:t>2026. 3. 7.</a:t>
             </a:fld>
             <a:endParaRPr lang="ko-KR" altLang="en-US"/>
           </a:p>
@@ -3785,7 +3894,7 @@
           <a:p>
             <a:fld id="{FB30EDBD-1C2D-4C1E-B459-B60219FAB484}" type="datetimeFigureOut">
               <a:rPr lang="ko-KR" altLang="en-US" smtClean="0"/>
-              <a:t>2026. 3. 4.</a:t>
+              <a:t>2026. 3. 7.</a:t>
             </a:fld>
             <a:endParaRPr lang="ko-KR" altLang="en-US"/>
           </a:p>
@@ -4055,7 +4164,7 @@
           <a:p>
             <a:fld id="{FB30EDBD-1C2D-4C1E-B459-B60219FAB484}" type="datetimeFigureOut">
               <a:rPr lang="ko-KR" altLang="en-US" smtClean="0"/>
-              <a:t>2026. 3. 4.</a:t>
+              <a:t>2026. 3. 7.</a:t>
             </a:fld>
             <a:endParaRPr lang="ko-KR" altLang="en-US"/>
           </a:p>
@@ -4302,7 +4411,7 @@
           <a:p>
             <a:fld id="{FB30EDBD-1C2D-4C1E-B459-B60219FAB484}" type="datetimeFigureOut">
               <a:rPr lang="ko-KR" altLang="en-US" smtClean="0"/>
-              <a:t>2026. 3. 4.</a:t>
+              <a:t>2026. 3. 7.</a:t>
             </a:fld>
             <a:endParaRPr lang="ko-KR" altLang="en-US"/>
           </a:p>
@@ -4508,7 +4617,7 @@
           <a:p>
             <a:fld id="{FB30EDBD-1C2D-4C1E-B459-B60219FAB484}" type="datetimeFigureOut">
               <a:rPr lang="ko-KR" altLang="en-US" smtClean="0"/>
-              <a:t>2026. 3. 4.</a:t>
+              <a:t>2026. 3. 7.</a:t>
             </a:fld>
             <a:endParaRPr lang="ko-KR" altLang="en-US"/>
           </a:p>
@@ -7185,6 +7294,584 @@
         </p:nvSpPr>
         <p:spPr>
           <a:xfrm>
+            <a:off x="0" y="-726229"/>
+            <a:ext cx="9144000" cy="857250"/>
+          </a:xfrm>
+        </p:spPr>
+        <p:txBody>
+          <a:bodyPr>
+            <a:normAutofit fontScale="90000"/>
+          </a:bodyPr>
+          <a:lstStyle/>
+          <a:p>
+            <a:r>
+              <a:rPr lang="en-US" altLang="ko-KR"/>
+              <a:t>CUDA Container OCI Runtime Spec</a:t>
+            </a:r>
+            <a:endParaRPr lang="ko-KR" altLang="en-US" dirty="0"/>
+          </a:p>
+        </p:txBody>
+      </p:sp>
+      <p:sp>
+        <p:nvSpPr>
+          <p:cNvPr id="7" name="사각형: 둥근 모서리 114">
+            <a:extLst>
+              <a:ext uri="{FF2B5EF4-FFF2-40B4-BE49-F238E27FC236}">
+                <a16:creationId xmlns:a16="http://schemas.microsoft.com/office/drawing/2014/main" id="{E074CAD6-7716-4458-B0D4-1C0318E58F6D}"/>
+              </a:ext>
+            </a:extLst>
+          </p:cNvPr>
+          <p:cNvSpPr/>
+          <p:nvPr/>
+        </p:nvSpPr>
+        <p:spPr>
+          <a:xfrm>
+            <a:off x="2627784" y="259255"/>
+            <a:ext cx="4032448" cy="433441"/>
+          </a:xfrm>
+          <a:prstGeom prst="roundRect">
+            <a:avLst>
+              <a:gd name="adj" fmla="val 0"/>
+            </a:avLst>
+          </a:prstGeom>
+          <a:ln w="12700"/>
+        </p:spPr>
+        <p:style>
+          <a:lnRef idx="2">
+            <a:schemeClr val="dk1"/>
+          </a:lnRef>
+          <a:fillRef idx="1">
+            <a:schemeClr val="lt1"/>
+          </a:fillRef>
+          <a:effectRef idx="0">
+            <a:schemeClr val="dk1"/>
+          </a:effectRef>
+          <a:fontRef idx="minor">
+            <a:schemeClr val="dk1"/>
+          </a:fontRef>
+        </p:style>
+        <p:txBody>
+          <a:bodyPr rtlCol="0" anchor="ctr"/>
+          <a:lstStyle/>
+          <a:p>
+            <a:r>
+              <a:rPr lang="en-US" altLang="ko-KR" sz="1100"/>
+              <a:t>$ docker run --gpu all nvidia/cuda:9.0-base nvidia-smi</a:t>
+            </a:r>
+            <a:endParaRPr lang="en-US" altLang="ko-KR" sz="1100" dirty="0"/>
+          </a:p>
+        </p:txBody>
+      </p:sp>
+      <p:sp>
+        <p:nvSpPr>
+          <p:cNvPr id="11" name="사각형: 둥근 모서리 114">
+            <a:extLst>
+              <a:ext uri="{FF2B5EF4-FFF2-40B4-BE49-F238E27FC236}">
+                <a16:creationId xmlns:a16="http://schemas.microsoft.com/office/drawing/2014/main" id="{E07F06D4-AF1E-486E-8493-362B4DEDC5E3}"/>
+              </a:ext>
+            </a:extLst>
+          </p:cNvPr>
+          <p:cNvSpPr/>
+          <p:nvPr/>
+        </p:nvSpPr>
+        <p:spPr>
+          <a:xfrm>
+            <a:off x="899592" y="915566"/>
+            <a:ext cx="7488831" cy="3737569"/>
+          </a:xfrm>
+          <a:prstGeom prst="roundRect">
+            <a:avLst>
+              <a:gd name="adj" fmla="val 0"/>
+            </a:avLst>
+          </a:prstGeom>
+          <a:ln w="12700"/>
+        </p:spPr>
+        <p:style>
+          <a:lnRef idx="2">
+            <a:schemeClr val="dk1"/>
+          </a:lnRef>
+          <a:fillRef idx="1">
+            <a:schemeClr val="lt1"/>
+          </a:fillRef>
+          <a:effectRef idx="0">
+            <a:schemeClr val="dk1"/>
+          </a:effectRef>
+          <a:fontRef idx="minor">
+            <a:schemeClr val="dk1"/>
+          </a:fontRef>
+        </p:style>
+        <p:txBody>
+          <a:bodyPr rtlCol="0" anchor="ctr"/>
+          <a:lstStyle/>
+          <a:p>
+            <a:r>
+              <a:rPr lang="en-US" altLang="ko-KR" sz="1100" kern="0" dirty="0">
+                <a:cs typeface="Al Bayan Plain" pitchFamily="2" charset="-78"/>
+              </a:rPr>
+              <a:t>{</a:t>
+            </a:r>
+          </a:p>
+          <a:p>
+            <a:r>
+              <a:rPr lang="en-US" altLang="ko-KR" sz="1100" kern="0" dirty="0">
+                <a:cs typeface="Al Bayan Plain" pitchFamily="2" charset="-78"/>
+              </a:rPr>
+              <a:t>    "hooks": {</a:t>
+            </a:r>
+          </a:p>
+          <a:p>
+            <a:r>
+              <a:rPr lang="en-US" altLang="ko-KR" sz="1100" kern="0" dirty="0">
+                <a:cs typeface="Al Bayan Plain" pitchFamily="2" charset="-78"/>
+              </a:rPr>
+              <a:t>        "</a:t>
+            </a:r>
+            <a:r>
+              <a:rPr lang="en-US" altLang="ko-KR" sz="1100" kern="0" dirty="0" err="1">
+                <a:cs typeface="Al Bayan Plain" pitchFamily="2" charset="-78"/>
+              </a:rPr>
+              <a:t>Poststart</a:t>
+            </a:r>
+            <a:r>
+              <a:rPr lang="en-US" altLang="ko-KR" sz="1100" kern="0" dirty="0">
+                <a:cs typeface="Al Bayan Plain" pitchFamily="2" charset="-78"/>
+              </a:rPr>
+              <a:t>": [],</a:t>
+            </a:r>
+          </a:p>
+          <a:p>
+            <a:r>
+              <a:rPr lang="en-US" altLang="ko-KR" sz="1100" kern="0" dirty="0">
+                <a:cs typeface="Al Bayan Plain" pitchFamily="2" charset="-78"/>
+              </a:rPr>
+              <a:t>        "</a:t>
+            </a:r>
+            <a:r>
+              <a:rPr lang="en-US" altLang="ko-KR" sz="1100" kern="0" dirty="0" err="1">
+                <a:cs typeface="Al Bayan Plain" pitchFamily="2" charset="-78"/>
+              </a:rPr>
+              <a:t>Poststop</a:t>
+            </a:r>
+            <a:r>
+              <a:rPr lang="en-US" altLang="ko-KR" sz="1100" kern="0" dirty="0">
+                <a:cs typeface="Al Bayan Plain" pitchFamily="2" charset="-78"/>
+              </a:rPr>
+              <a:t>": [],</a:t>
+            </a:r>
+          </a:p>
+          <a:p>
+            <a:r>
+              <a:rPr lang="en-US" altLang="ko-KR" sz="1100" kern="0" dirty="0">
+                <a:cs typeface="Al Bayan Plain" pitchFamily="2" charset="-78"/>
+              </a:rPr>
+              <a:t>        "prestart": [{</a:t>
+            </a:r>
+          </a:p>
+          <a:p>
+            <a:r>
+              <a:rPr lang="en-US" altLang="ko-KR" sz="1100" kern="0" dirty="0">
+                <a:cs typeface="Al Bayan Plain" pitchFamily="2" charset="-78"/>
+              </a:rPr>
+              <a:t>            "</a:t>
+            </a:r>
+            <a:r>
+              <a:rPr lang="en-US" altLang="ko-KR" sz="1100" kern="0" dirty="0" err="1">
+                <a:cs typeface="Al Bayan Plain" pitchFamily="2" charset="-78"/>
+              </a:rPr>
+              <a:t>args</a:t>
+            </a:r>
+            <a:r>
+              <a:rPr lang="en-US" altLang="ko-KR" sz="1100" kern="0" dirty="0">
+                <a:cs typeface="Al Bayan Plain" pitchFamily="2" charset="-78"/>
+              </a:rPr>
+              <a:t>": ["/</a:t>
+            </a:r>
+            <a:r>
+              <a:rPr lang="en-US" altLang="ko-KR" sz="1100" kern="0" dirty="0" err="1">
+                <a:cs typeface="Al Bayan Plain" pitchFamily="2" charset="-78"/>
+              </a:rPr>
+              <a:t>usr</a:t>
+            </a:r>
+            <a:r>
+              <a:rPr lang="en-US" altLang="ko-KR" sz="1100" kern="0" dirty="0">
+                <a:cs typeface="Al Bayan Plain" pitchFamily="2" charset="-78"/>
+              </a:rPr>
+              <a:t>/bin/</a:t>
+            </a:r>
+            <a:r>
+              <a:rPr lang="en-US" altLang="ko-KR" sz="1100" kern="0" dirty="0" err="1">
+                <a:cs typeface="Al Bayan Plain" pitchFamily="2" charset="-78"/>
+              </a:rPr>
+              <a:t>nvidia</a:t>
+            </a:r>
+            <a:r>
+              <a:rPr lang="en-US" altLang="ko-KR" sz="1100" kern="0" dirty="0">
+                <a:cs typeface="Al Bayan Plain" pitchFamily="2" charset="-78"/>
+              </a:rPr>
+              <a:t>-container-runtime-hook", "prestart"],</a:t>
+            </a:r>
+          </a:p>
+          <a:p>
+            <a:r>
+              <a:rPr lang="en-US" altLang="ko-KR" sz="1100" kern="0" dirty="0">
+                <a:cs typeface="Al Bayan Plain" pitchFamily="2" charset="-78"/>
+              </a:rPr>
+              <a:t>            "path": "/</a:t>
+            </a:r>
+            <a:r>
+              <a:rPr lang="en-US" altLang="ko-KR" sz="1100" kern="0" dirty="0" err="1">
+                <a:cs typeface="Al Bayan Plain" pitchFamily="2" charset="-78"/>
+              </a:rPr>
+              <a:t>usr</a:t>
+            </a:r>
+            <a:r>
+              <a:rPr lang="en-US" altLang="ko-KR" sz="1100" kern="0" dirty="0">
+                <a:cs typeface="Al Bayan Plain" pitchFamily="2" charset="-78"/>
+              </a:rPr>
+              <a:t>/bin/</a:t>
+            </a:r>
+            <a:r>
+              <a:rPr lang="en-US" altLang="ko-KR" sz="1100" kern="0" dirty="0" err="1">
+                <a:cs typeface="Al Bayan Plain" pitchFamily="2" charset="-78"/>
+              </a:rPr>
+              <a:t>nvidia</a:t>
+            </a:r>
+            <a:r>
+              <a:rPr lang="en-US" altLang="ko-KR" sz="1100" kern="0" dirty="0">
+                <a:cs typeface="Al Bayan Plain" pitchFamily="2" charset="-78"/>
+              </a:rPr>
+              <a:t>-container-runtime-hook”</a:t>
+            </a:r>
+          </a:p>
+          <a:p>
+            <a:r>
+              <a:rPr lang="en-US" altLang="ko-KR" sz="1100" kern="0" dirty="0">
+                <a:cs typeface="Al Bayan Plain" pitchFamily="2" charset="-78"/>
+              </a:rPr>
+              <a:t>        }]</a:t>
+            </a:r>
+          </a:p>
+          <a:p>
+            <a:r>
+              <a:rPr lang="en-US" altLang="ko-KR" sz="1100" kern="0" dirty="0">
+                <a:cs typeface="Al Bayan Plain" pitchFamily="2" charset="-78"/>
+              </a:rPr>
+              <a:t>    },</a:t>
+            </a:r>
+          </a:p>
+          <a:p>
+            <a:r>
+              <a:rPr lang="en-US" altLang="ko-KR" sz="1100" kern="0" dirty="0">
+                <a:cs typeface="Al Bayan Plain" pitchFamily="2" charset="-78"/>
+              </a:rPr>
+              <a:t>...</a:t>
+            </a:r>
+          </a:p>
+          <a:p>
+            <a:r>
+              <a:rPr lang="en-US" altLang="ko-KR" sz="1100" kern="0" dirty="0">
+                <a:cs typeface="Al Bayan Plain" pitchFamily="2" charset="-78"/>
+              </a:rPr>
+              <a:t>    "process": {</a:t>
+            </a:r>
+          </a:p>
+          <a:p>
+            <a:r>
+              <a:rPr lang="en-US" altLang="ko-KR" sz="1100" kern="0" dirty="0">
+                <a:cs typeface="Al Bayan Plain" pitchFamily="2" charset="-78"/>
+              </a:rPr>
+              <a:t>        “env”: [</a:t>
+            </a:r>
+          </a:p>
+          <a:p>
+            <a:r>
+              <a:rPr lang="en-US" altLang="ko-KR" sz="1100" kern="0" dirty="0">
+                <a:cs typeface="Al Bayan Plain" pitchFamily="2" charset="-78"/>
+              </a:rPr>
+              <a:t>            "NVIDIA_VISIBLE_DEVICES=GPU-5a270e58-abc7-d55b-a94f-54d410c1dfe2,GPU-9de66fe4-2a8b-4a2b-36bc-d61c165db7d8",</a:t>
+            </a:r>
+          </a:p>
+          <a:p>
+            <a:r>
+              <a:rPr lang="en-US" altLang="ko-KR" sz="1100" kern="0" dirty="0">
+                <a:cs typeface="Al Bayan Plain" pitchFamily="2" charset="-78"/>
+              </a:rPr>
+              <a:t>            “NVIDIA_DRIVER_CAPABILITIES=</a:t>
+            </a:r>
+            <a:r>
+              <a:rPr lang="en-US" altLang="ko-KR" sz="1100" kern="0" dirty="0" err="1">
+                <a:cs typeface="Al Bayan Plain" pitchFamily="2" charset="-78"/>
+              </a:rPr>
+              <a:t>compute,utility</a:t>
+            </a:r>
+            <a:r>
+              <a:rPr lang="en-US" altLang="ko-KR" sz="1100" kern="0" dirty="0">
+                <a:cs typeface="Al Bayan Plain" pitchFamily="2" charset="-78"/>
+              </a:rPr>
+              <a:t>”,</a:t>
+            </a:r>
+          </a:p>
+          <a:p>
+            <a:r>
+              <a:rPr lang="en-US" altLang="ko-KR" sz="1100" kern="0" dirty="0">
+                <a:cs typeface="Al Bayan Plain" pitchFamily="2" charset="-78"/>
+              </a:rPr>
+              <a:t>            "NV_CUDA_CUDART_VERSION=11.8.89-1",</a:t>
+            </a:r>
+          </a:p>
+          <a:p>
+            <a:r>
+              <a:rPr lang="en-US" altLang="ko-KR" sz="1100" kern="0" dirty="0">
+                <a:cs typeface="Al Bayan Plain" pitchFamily="2" charset="-78"/>
+              </a:rPr>
+              <a:t>            "CUDA_VERSION=11.8.0”,</a:t>
+            </a:r>
+          </a:p>
+          <a:p>
+            <a:r>
+              <a:rPr lang="en-US" altLang="ko-KR" sz="1100" kern="0" dirty="0">
+                <a:cs typeface="Al Bayan Plain" pitchFamily="2" charset="-78"/>
+              </a:rPr>
+              <a:t>            "LD_LIBRARY_PATH=/</a:t>
+            </a:r>
+            <a:r>
+              <a:rPr lang="en-US" altLang="ko-KR" sz="1100" kern="0" dirty="0" err="1">
+                <a:cs typeface="Al Bayan Plain" pitchFamily="2" charset="-78"/>
+              </a:rPr>
+              <a:t>usr</a:t>
+            </a:r>
+            <a:r>
+              <a:rPr lang="en-US" altLang="ko-KR" sz="1100" kern="0" dirty="0">
+                <a:cs typeface="Al Bayan Plain" pitchFamily="2" charset="-78"/>
+              </a:rPr>
+              <a:t>/local/</a:t>
+            </a:r>
+            <a:r>
+              <a:rPr lang="en-US" altLang="ko-KR" sz="1100" kern="0" dirty="0" err="1">
+                <a:cs typeface="Al Bayan Plain" pitchFamily="2" charset="-78"/>
+              </a:rPr>
+              <a:t>nvidia</a:t>
+            </a:r>
+            <a:r>
+              <a:rPr lang="en-US" altLang="ko-KR" sz="1100" kern="0" dirty="0">
+                <a:cs typeface="Al Bayan Plain" pitchFamily="2" charset="-78"/>
+              </a:rPr>
+              <a:t>/lib:/</a:t>
+            </a:r>
+            <a:r>
+              <a:rPr lang="en-US" altLang="ko-KR" sz="1100" kern="0" dirty="0" err="1">
+                <a:cs typeface="Al Bayan Plain" pitchFamily="2" charset="-78"/>
+              </a:rPr>
+              <a:t>usr</a:t>
+            </a:r>
+            <a:r>
+              <a:rPr lang="en-US" altLang="ko-KR" sz="1100" kern="0" dirty="0">
+                <a:cs typeface="Al Bayan Plain" pitchFamily="2" charset="-78"/>
+              </a:rPr>
+              <a:t>/local/</a:t>
+            </a:r>
+            <a:r>
+              <a:rPr lang="en-US" altLang="ko-KR" sz="1100" kern="0" dirty="0" err="1">
+                <a:cs typeface="Al Bayan Plain" pitchFamily="2" charset="-78"/>
+              </a:rPr>
+              <a:t>nvidia</a:t>
+            </a:r>
+            <a:r>
+              <a:rPr lang="en-US" altLang="ko-KR" sz="1100" kern="0" dirty="0">
+                <a:cs typeface="Al Bayan Plain" pitchFamily="2" charset="-78"/>
+              </a:rPr>
+              <a:t>/lib64"</a:t>
+            </a:r>
+          </a:p>
+          <a:p>
+            <a:r>
+              <a:rPr lang="en-US" altLang="ko-KR" sz="1100" kern="0" dirty="0">
+                <a:cs typeface="Al Bayan Plain" pitchFamily="2" charset="-78"/>
+              </a:rPr>
+              <a:t>            ...</a:t>
+            </a:r>
+            <a:br>
+              <a:rPr lang="en-US" altLang="ko-KR" sz="1100" kern="0" dirty="0">
+                <a:cs typeface="Al Bayan Plain" pitchFamily="2" charset="-78"/>
+              </a:rPr>
+            </a:br>
+            <a:r>
+              <a:rPr lang="en-US" altLang="ko-KR" sz="1100" kern="0" dirty="0">
+                <a:cs typeface="Al Bayan Plain" pitchFamily="2" charset="-78"/>
+              </a:rPr>
+              <a:t>        ]</a:t>
+            </a:r>
+          </a:p>
+          <a:p>
+            <a:r>
+              <a:rPr lang="en-US" altLang="ko-KR" sz="1100" kern="0" dirty="0">
+                <a:cs typeface="Al Bayan Plain" pitchFamily="2" charset="-78"/>
+              </a:rPr>
+              <a:t>    }</a:t>
+            </a:r>
+          </a:p>
+          <a:p>
+            <a:r>
+              <a:rPr lang="en-US" altLang="ko-KR" sz="1100" kern="0" dirty="0">
+                <a:cs typeface="Al Bayan Plain" pitchFamily="2" charset="-78"/>
+              </a:rPr>
+              <a:t>...</a:t>
+            </a:r>
+            <a:endParaRPr lang="en-US" altLang="ko-KR" sz="1600" kern="0" dirty="0">
+              <a:cs typeface="Al Bayan Plain" pitchFamily="2" charset="-78"/>
+            </a:endParaRPr>
+          </a:p>
+        </p:txBody>
+      </p:sp>
+      <p:cxnSp>
+        <p:nvCxnSpPr>
+          <p:cNvPr id="9" name="직선 화살표 연결선 8">
+            <a:extLst>
+              <a:ext uri="{FF2B5EF4-FFF2-40B4-BE49-F238E27FC236}">
+                <a16:creationId xmlns:a16="http://schemas.microsoft.com/office/drawing/2014/main" id="{D3447036-464F-4C90-9B09-6E8806442451}"/>
+              </a:ext>
+            </a:extLst>
+          </p:cNvPr>
+          <p:cNvCxnSpPr>
+            <a:cxnSpLocks/>
+            <a:stCxn id="7" idx="2"/>
+            <a:endCxn id="11" idx="0"/>
+          </p:cNvCxnSpPr>
+          <p:nvPr/>
+        </p:nvCxnSpPr>
+        <p:spPr>
+          <a:xfrm>
+            <a:off x="4644008" y="692696"/>
+            <a:ext cx="0" cy="222870"/>
+          </a:xfrm>
+          <a:prstGeom prst="straightConnector1">
+            <a:avLst/>
+          </a:prstGeom>
+          <a:ln w="12700">
+            <a:solidFill>
+              <a:schemeClr val="tx1"/>
+            </a:solidFill>
+            <a:headEnd type="none" w="med" len="med"/>
+            <a:tailEnd type="triangle" w="med" len="med"/>
+          </a:ln>
+        </p:spPr>
+        <p:style>
+          <a:lnRef idx="1">
+            <a:schemeClr val="accent1"/>
+          </a:lnRef>
+          <a:fillRef idx="0">
+            <a:schemeClr val="accent1"/>
+          </a:fillRef>
+          <a:effectRef idx="0">
+            <a:schemeClr val="accent1"/>
+          </a:effectRef>
+          <a:fontRef idx="minor">
+            <a:schemeClr val="tx1"/>
+          </a:fontRef>
+        </p:style>
+      </p:cxnSp>
+      <p:sp>
+        <p:nvSpPr>
+          <p:cNvPr id="22" name="사각형: 둥근 모서리 114">
+            <a:extLst>
+              <a:ext uri="{FF2B5EF4-FFF2-40B4-BE49-F238E27FC236}">
+                <a16:creationId xmlns:a16="http://schemas.microsoft.com/office/drawing/2014/main" id="{0B79FB11-EB5E-48B2-9B7D-2CF7A5759856}"/>
+              </a:ext>
+            </a:extLst>
+          </p:cNvPr>
+          <p:cNvSpPr/>
+          <p:nvPr/>
+        </p:nvSpPr>
+        <p:spPr>
+          <a:xfrm>
+            <a:off x="3278436" y="4587974"/>
+            <a:ext cx="2731142" cy="433441"/>
+          </a:xfrm>
+          <a:prstGeom prst="roundRect">
+            <a:avLst>
+              <a:gd name="adj" fmla="val 10304"/>
+            </a:avLst>
+          </a:prstGeom>
+          <a:noFill/>
+          <a:ln>
+            <a:noFill/>
+          </a:ln>
+        </p:spPr>
+        <p:style>
+          <a:lnRef idx="2">
+            <a:schemeClr val="dk1"/>
+          </a:lnRef>
+          <a:fillRef idx="1">
+            <a:schemeClr val="lt1"/>
+          </a:fillRef>
+          <a:effectRef idx="0">
+            <a:schemeClr val="dk1"/>
+          </a:effectRef>
+          <a:fontRef idx="minor">
+            <a:schemeClr val="dk1"/>
+          </a:fontRef>
+        </p:style>
+        <p:txBody>
+          <a:bodyPr rtlCol="0" anchor="ctr"/>
+          <a:lstStyle/>
+          <a:p>
+            <a:pPr algn="ctr"/>
+            <a:r>
+              <a:rPr lang="en-US" altLang="ko-KR" sz="1200"/>
+              <a:t>OCI Runtime Spec</a:t>
+            </a:r>
+            <a:endParaRPr lang="en-US" altLang="ko-KR" sz="1200" dirty="0"/>
+          </a:p>
+        </p:txBody>
+      </p:sp>
+    </p:spTree>
+    <p:extLst>
+      <p:ext uri="{BB962C8B-B14F-4D97-AF65-F5344CB8AC3E}">
+        <p14:creationId xmlns:p14="http://schemas.microsoft.com/office/powerpoint/2010/main" val="3265569655"/>
+      </p:ext>
+    </p:extLst>
+  </p:cSld>
+  <p:clrMapOvr>
+    <a:masterClrMapping/>
+  </p:clrMapOvr>
+</p:sld>
+</file>
+
+<file path=ppt/slides/slide11.xml><?xml version="1.0" encoding="utf-8"?>
+<p:sld xmlns:a="http://schemas.openxmlformats.org/drawingml/2006/main" xmlns:r="http://schemas.openxmlformats.org/officeDocument/2006/relationships" xmlns:p="http://schemas.openxmlformats.org/presentationml/2006/main">
+  <p:cSld>
+    <p:spTree>
+      <p:nvGrpSpPr>
+        <p:cNvPr id="1" name=""/>
+        <p:cNvGrpSpPr/>
+        <p:nvPr/>
+      </p:nvGrpSpPr>
+      <p:grpSpPr>
+        <a:xfrm>
+          <a:off x="0" y="0"/>
+          <a:ext cx="0" cy="0"/>
+          <a:chOff x="0" y="0"/>
+          <a:chExt cx="0" cy="0"/>
+        </a:xfrm>
+      </p:grpSpPr>
+      <p:sp>
+        <p:nvSpPr>
+          <p:cNvPr id="2" name="제목 1">
+            <a:extLst>
+              <a:ext uri="{FF2B5EF4-FFF2-40B4-BE49-F238E27FC236}">
+                <a16:creationId xmlns:a16="http://schemas.microsoft.com/office/drawing/2014/main" id="{8738443D-5E72-49E2-86AC-581D61C41C39}"/>
+              </a:ext>
+            </a:extLst>
+          </p:cNvPr>
+          <p:cNvSpPr>
+            <a:spLocks noGrp="1"/>
+          </p:cNvSpPr>
+          <p:nvPr>
+            <p:ph type="title"/>
+          </p:nvPr>
+        </p:nvSpPr>
+        <p:spPr>
+          <a:xfrm>
             <a:off x="0" y="-92546"/>
             <a:ext cx="9144000" cy="857250"/>
           </a:xfrm>
@@ -8777,7 +9464,7 @@
 </p:sld>
 </file>
 
-<file path=ppt/slides/slide11.xml><?xml version="1.0" encoding="utf-8"?>
+<file path=ppt/slides/slide12.xml><?xml version="1.0" encoding="utf-8"?>
 <p:sld xmlns:a="http://schemas.openxmlformats.org/drawingml/2006/main" xmlns:r="http://schemas.openxmlformats.org/officeDocument/2006/relationships" xmlns:p="http://schemas.openxmlformats.org/presentationml/2006/main">
   <p:cSld>
     <p:spTree>
@@ -10149,7 +10836,7 @@
 </p:sld>
 </file>
 
-<file path=ppt/slides/slide12.xml><?xml version="1.0" encoding="utf-8"?>
+<file path=ppt/slides/slide13.xml><?xml version="1.0" encoding="utf-8"?>
 <p:sld xmlns:a="http://schemas.openxmlformats.org/drawingml/2006/main" xmlns:r="http://schemas.openxmlformats.org/officeDocument/2006/relationships" xmlns:p="http://schemas.openxmlformats.org/presentationml/2006/main">
   <p:cSld>
     <p:spTree>
@@ -10521,7 +11208,7 @@
 </p:sld>
 </file>
 
-<file path=ppt/slides/slide13.xml><?xml version="1.0" encoding="utf-8"?>
+<file path=ppt/slides/slide14.xml><?xml version="1.0" encoding="utf-8"?>
 <p:sld xmlns:a="http://schemas.openxmlformats.org/drawingml/2006/main" xmlns:r="http://schemas.openxmlformats.org/officeDocument/2006/relationships" xmlns:p="http://schemas.openxmlformats.org/presentationml/2006/main">
   <p:cSld>
     <p:spTree>
@@ -11824,358 +12511,6 @@
     <p:extLst>
       <p:ext uri="{BB962C8B-B14F-4D97-AF65-F5344CB8AC3E}">
         <p14:creationId xmlns:p14="http://schemas.microsoft.com/office/powerpoint/2010/main" val="1318549003"/>
-      </p:ext>
-    </p:extLst>
-  </p:cSld>
-  <p:clrMapOvr>
-    <a:masterClrMapping/>
-  </p:clrMapOvr>
-</p:sld>
-</file>
-
-<file path=ppt/slides/slide14.xml><?xml version="1.0" encoding="utf-8"?>
-<p:sld xmlns:a="http://schemas.openxmlformats.org/drawingml/2006/main" xmlns:r="http://schemas.openxmlformats.org/officeDocument/2006/relationships" xmlns:p="http://schemas.openxmlformats.org/presentationml/2006/main">
-  <p:cSld>
-    <p:spTree>
-      <p:nvGrpSpPr>
-        <p:cNvPr id="1" name=""/>
-        <p:cNvGrpSpPr/>
-        <p:nvPr/>
-      </p:nvGrpSpPr>
-      <p:grpSpPr>
-        <a:xfrm>
-          <a:off x="0" y="0"/>
-          <a:ext cx="0" cy="0"/>
-          <a:chOff x="0" y="0"/>
-          <a:chExt cx="0" cy="0"/>
-        </a:xfrm>
-      </p:grpSpPr>
-      <p:sp>
-        <p:nvSpPr>
-          <p:cNvPr id="2" name="제목 1">
-            <a:extLst>
-              <a:ext uri="{FF2B5EF4-FFF2-40B4-BE49-F238E27FC236}">
-                <a16:creationId xmlns:a16="http://schemas.microsoft.com/office/drawing/2014/main" id="{8738443D-5E72-49E2-86AC-581D61C41C39}"/>
-              </a:ext>
-            </a:extLst>
-          </p:cNvPr>
-          <p:cNvSpPr>
-            <a:spLocks noGrp="1"/>
-          </p:cNvSpPr>
-          <p:nvPr>
-            <p:ph type="title"/>
-          </p:nvPr>
-        </p:nvSpPr>
-        <p:spPr>
-          <a:xfrm>
-            <a:off x="0" y="-92546"/>
-            <a:ext cx="9144000" cy="857250"/>
-          </a:xfrm>
-        </p:spPr>
-        <p:txBody>
-          <a:bodyPr>
-            <a:normAutofit fontScale="90000"/>
-          </a:bodyPr>
-          <a:lstStyle/>
-          <a:p>
-            <a:r>
-              <a:rPr lang="en-US" altLang="ko-KR"/>
-              <a:t>CUDA Container OCI Runtime Spec</a:t>
-            </a:r>
-            <a:endParaRPr lang="ko-KR" altLang="en-US" dirty="0"/>
-          </a:p>
-        </p:txBody>
-      </p:sp>
-      <p:sp>
-        <p:nvSpPr>
-          <p:cNvPr id="7" name="사각형: 둥근 모서리 114">
-            <a:extLst>
-              <a:ext uri="{FF2B5EF4-FFF2-40B4-BE49-F238E27FC236}">
-                <a16:creationId xmlns:a16="http://schemas.microsoft.com/office/drawing/2014/main" id="{E074CAD6-7716-4458-B0D4-1C0318E58F6D}"/>
-              </a:ext>
-            </a:extLst>
-          </p:cNvPr>
-          <p:cNvSpPr/>
-          <p:nvPr/>
-        </p:nvSpPr>
-        <p:spPr>
-          <a:xfrm>
-            <a:off x="2267744" y="698149"/>
-            <a:ext cx="4752528" cy="433441"/>
-          </a:xfrm>
-          <a:prstGeom prst="roundRect">
-            <a:avLst>
-              <a:gd name="adj" fmla="val 0"/>
-            </a:avLst>
-          </a:prstGeom>
-        </p:spPr>
-        <p:style>
-          <a:lnRef idx="2">
-            <a:schemeClr val="dk1"/>
-          </a:lnRef>
-          <a:fillRef idx="1">
-            <a:schemeClr val="lt1"/>
-          </a:fillRef>
-          <a:effectRef idx="0">
-            <a:schemeClr val="dk1"/>
-          </a:effectRef>
-          <a:fontRef idx="minor">
-            <a:schemeClr val="dk1"/>
-          </a:fontRef>
-        </p:style>
-        <p:txBody>
-          <a:bodyPr rtlCol="0" anchor="ctr"/>
-          <a:lstStyle/>
-          <a:p>
-            <a:r>
-              <a:rPr lang="en-US" altLang="ko-KR" sz="1400"/>
-              <a:t># docker run --gpu all nvidia/cuda:9.0-base nvidia-smi</a:t>
-            </a:r>
-            <a:endParaRPr lang="en-US" altLang="ko-KR" sz="1400" dirty="0"/>
-          </a:p>
-        </p:txBody>
-      </p:sp>
-      <p:sp>
-        <p:nvSpPr>
-          <p:cNvPr id="11" name="사각형: 둥근 모서리 114">
-            <a:extLst>
-              <a:ext uri="{FF2B5EF4-FFF2-40B4-BE49-F238E27FC236}">
-                <a16:creationId xmlns:a16="http://schemas.microsoft.com/office/drawing/2014/main" id="{E07F06D4-AF1E-486E-8493-362B4DEDC5E3}"/>
-              </a:ext>
-            </a:extLst>
-          </p:cNvPr>
-          <p:cNvSpPr/>
-          <p:nvPr/>
-        </p:nvSpPr>
-        <p:spPr>
-          <a:xfrm>
-            <a:off x="899592" y="1354461"/>
-            <a:ext cx="7488831" cy="3367380"/>
-          </a:xfrm>
-          <a:prstGeom prst="roundRect">
-            <a:avLst>
-              <a:gd name="adj" fmla="val 0"/>
-            </a:avLst>
-          </a:prstGeom>
-        </p:spPr>
-        <p:style>
-          <a:lnRef idx="2">
-            <a:schemeClr val="dk1"/>
-          </a:lnRef>
-          <a:fillRef idx="1">
-            <a:schemeClr val="lt1"/>
-          </a:fillRef>
-          <a:effectRef idx="0">
-            <a:schemeClr val="dk1"/>
-          </a:effectRef>
-          <a:fontRef idx="minor">
-            <a:schemeClr val="dk1"/>
-          </a:fontRef>
-        </p:style>
-        <p:txBody>
-          <a:bodyPr rtlCol="0" anchor="ctr"/>
-          <a:lstStyle/>
-          <a:p>
-            <a:r>
-              <a:rPr lang="en-US" altLang="ko-KR" sz="1400"/>
-              <a:t>"hooks": {</a:t>
-            </a:r>
-          </a:p>
-          <a:p>
-            <a:r>
-              <a:rPr lang="en-US" altLang="ko-KR" sz="1400"/>
-              <a:t>    "prestart": [</a:t>
-            </a:r>
-          </a:p>
-          <a:p>
-            <a:r>
-              <a:rPr lang="en-US" altLang="ko-KR" sz="1400"/>
-              <a:t>         {</a:t>
-            </a:r>
-          </a:p>
-          <a:p>
-            <a:r>
-              <a:rPr lang="en-US" altLang="ko-KR" sz="1400"/>
-              <a:t>             "path": “/usr/bin/nvidia-container-runtime-hook”,</a:t>
-            </a:r>
-          </a:p>
-          <a:p>
-            <a:r>
-              <a:rPr lang="en-US" altLang="ko-KR" sz="1400"/>
-              <a:t>             "args": ["nvidia-container-runtime-hook ", “prestart"],</a:t>
-            </a:r>
-          </a:p>
-          <a:p>
-            <a:r>
-              <a:rPr lang="en-US" altLang="ko-KR" sz="1400"/>
-              <a:t>             "env": [“CUDA_VERSION=9.0.176”,</a:t>
-            </a:r>
-            <a:br>
-              <a:rPr lang="en-US" altLang="ko-KR" sz="1400"/>
-            </a:br>
-            <a:r>
-              <a:rPr lang="en-US" altLang="ko-KR" sz="1400"/>
-              <a:t>                       “CUDA_PKG_VERSION=9-0=9.0.176-1”,</a:t>
-            </a:r>
-          </a:p>
-          <a:p>
-            <a:r>
-              <a:rPr lang="en-US" altLang="ko-KR" sz="1400"/>
-              <a:t>                       “NVIDIA_VISIBLE_DEVICES=all“,</a:t>
-            </a:r>
-            <a:br>
-              <a:rPr lang="en-US" altLang="ko-KR" sz="1400"/>
-            </a:br>
-            <a:r>
-              <a:rPr lang="en-US" altLang="ko-KR" sz="1400"/>
-              <a:t>                       “NVIDIA_DRIVER_CAPABILITIES=“compute,utility”,</a:t>
-            </a:r>
-          </a:p>
-          <a:p>
-            <a:r>
-              <a:rPr lang="en-US" altLang="ko-KR" sz="1400"/>
-              <a:t>                       "NVIDIA_REQUIRE_CUDA=cuda&gt;=9.0“,</a:t>
-            </a:r>
-            <a:br>
-              <a:rPr lang="en-US" altLang="ko-KR" sz="1400"/>
-            </a:br>
-            <a:r>
-              <a:rPr lang="en-US" altLang="ko-KR" sz="1400"/>
-              <a:t>                       "LD_LIBRARY_PATH=/usr/local/nvidia/lib:/usr/local/nvidia/lib64“</a:t>
-            </a:r>
-          </a:p>
-          <a:p>
-            <a:r>
-              <a:rPr lang="en-US" altLang="ko-KR" sz="1400"/>
-              <a:t>             ]</a:t>
-            </a:r>
-          </a:p>
-          <a:p>
-            <a:r>
-              <a:rPr lang="en-US" altLang="ko-KR" sz="1400"/>
-              <a:t>         },</a:t>
-            </a:r>
-          </a:p>
-          <a:p>
-            <a:r>
-              <a:rPr lang="en-US" altLang="ko-KR" sz="1400"/>
-              <a:t>    ],</a:t>
-            </a:r>
-          </a:p>
-          <a:p>
-            <a:r>
-              <a:rPr lang="en-US" altLang="ko-KR" sz="1400"/>
-              <a:t>}</a:t>
-            </a:r>
-            <a:endParaRPr lang="en-US" altLang="ko-KR" sz="1400" dirty="0"/>
-          </a:p>
-        </p:txBody>
-      </p:sp>
-      <p:cxnSp>
-        <p:nvCxnSpPr>
-          <p:cNvPr id="9" name="직선 화살표 연결선 8">
-            <a:extLst>
-              <a:ext uri="{FF2B5EF4-FFF2-40B4-BE49-F238E27FC236}">
-                <a16:creationId xmlns:a16="http://schemas.microsoft.com/office/drawing/2014/main" id="{D3447036-464F-4C90-9B09-6E8806442451}"/>
-              </a:ext>
-            </a:extLst>
-          </p:cNvPr>
-          <p:cNvCxnSpPr>
-            <a:cxnSpLocks/>
-            <a:stCxn id="7" idx="2"/>
-            <a:endCxn id="11" idx="0"/>
-          </p:cNvCxnSpPr>
-          <p:nvPr/>
-        </p:nvCxnSpPr>
-        <p:spPr>
-          <a:xfrm>
-            <a:off x="4644008" y="1131590"/>
-            <a:ext cx="0" cy="222871"/>
-          </a:xfrm>
-          <a:prstGeom prst="straightConnector1">
-            <a:avLst/>
-          </a:prstGeom>
-          <a:ln w="19050">
-            <a:solidFill>
-              <a:schemeClr val="tx1"/>
-            </a:solidFill>
-            <a:headEnd type="none" w="med" len="med"/>
-            <a:tailEnd type="arrow" w="med" len="med"/>
-          </a:ln>
-        </p:spPr>
-        <p:style>
-          <a:lnRef idx="1">
-            <a:schemeClr val="accent1"/>
-          </a:lnRef>
-          <a:fillRef idx="0">
-            <a:schemeClr val="accent1"/>
-          </a:fillRef>
-          <a:effectRef idx="0">
-            <a:schemeClr val="accent1"/>
-          </a:effectRef>
-          <a:fontRef idx="minor">
-            <a:schemeClr val="tx1"/>
-          </a:fontRef>
-        </p:style>
-      </p:cxnSp>
-      <p:sp>
-        <p:nvSpPr>
-          <p:cNvPr id="22" name="사각형: 둥근 모서리 114">
-            <a:extLst>
-              <a:ext uri="{FF2B5EF4-FFF2-40B4-BE49-F238E27FC236}">
-                <a16:creationId xmlns:a16="http://schemas.microsoft.com/office/drawing/2014/main" id="{0B79FB11-EB5E-48B2-9B7D-2CF7A5759856}"/>
-              </a:ext>
-            </a:extLst>
-          </p:cNvPr>
-          <p:cNvSpPr/>
-          <p:nvPr/>
-        </p:nvSpPr>
-        <p:spPr>
-          <a:xfrm>
-            <a:off x="3278436" y="4658589"/>
-            <a:ext cx="2731142" cy="433441"/>
-          </a:xfrm>
-          <a:prstGeom prst="roundRect">
-            <a:avLst>
-              <a:gd name="adj" fmla="val 10304"/>
-            </a:avLst>
-          </a:prstGeom>
-          <a:noFill/>
-          <a:ln>
-            <a:noFill/>
-          </a:ln>
-        </p:spPr>
-        <p:style>
-          <a:lnRef idx="2">
-            <a:schemeClr val="dk1"/>
-          </a:lnRef>
-          <a:fillRef idx="1">
-            <a:schemeClr val="lt1"/>
-          </a:fillRef>
-          <a:effectRef idx="0">
-            <a:schemeClr val="dk1"/>
-          </a:effectRef>
-          <a:fontRef idx="minor">
-            <a:schemeClr val="dk1"/>
-          </a:fontRef>
-        </p:style>
-        <p:txBody>
-          <a:bodyPr rtlCol="0" anchor="ctr"/>
-          <a:lstStyle/>
-          <a:p>
-            <a:pPr algn="ctr"/>
-            <a:r>
-              <a:rPr lang="en-US" altLang="ko-KR" sz="1400"/>
-              <a:t>OCI Runtime Spec</a:t>
-            </a:r>
-            <a:endParaRPr lang="en-US" altLang="ko-KR" sz="1400" dirty="0"/>
-          </a:p>
-        </p:txBody>
-      </p:sp>
-    </p:spTree>
-    <p:extLst>
-      <p:ext uri="{BB962C8B-B14F-4D97-AF65-F5344CB8AC3E}">
-        <p14:creationId xmlns:p14="http://schemas.microsoft.com/office/powerpoint/2010/main" val="3532445663"/>
       </p:ext>
     </p:extLst>
   </p:cSld>
@@ -12226,6 +12561,358 @@
         </p:spPr>
         <p:txBody>
           <a:bodyPr>
+            <a:normAutofit fontScale="90000"/>
+          </a:bodyPr>
+          <a:lstStyle/>
+          <a:p>
+            <a:r>
+              <a:rPr lang="en-US" altLang="ko-KR"/>
+              <a:t>CUDA Container OCI Runtime Spec</a:t>
+            </a:r>
+            <a:endParaRPr lang="ko-KR" altLang="en-US" dirty="0"/>
+          </a:p>
+        </p:txBody>
+      </p:sp>
+      <p:sp>
+        <p:nvSpPr>
+          <p:cNvPr id="7" name="사각형: 둥근 모서리 114">
+            <a:extLst>
+              <a:ext uri="{FF2B5EF4-FFF2-40B4-BE49-F238E27FC236}">
+                <a16:creationId xmlns:a16="http://schemas.microsoft.com/office/drawing/2014/main" id="{E074CAD6-7716-4458-B0D4-1C0318E58F6D}"/>
+              </a:ext>
+            </a:extLst>
+          </p:cNvPr>
+          <p:cNvSpPr/>
+          <p:nvPr/>
+        </p:nvSpPr>
+        <p:spPr>
+          <a:xfrm>
+            <a:off x="2267744" y="698149"/>
+            <a:ext cx="4752528" cy="433441"/>
+          </a:xfrm>
+          <a:prstGeom prst="roundRect">
+            <a:avLst>
+              <a:gd name="adj" fmla="val 0"/>
+            </a:avLst>
+          </a:prstGeom>
+        </p:spPr>
+        <p:style>
+          <a:lnRef idx="2">
+            <a:schemeClr val="dk1"/>
+          </a:lnRef>
+          <a:fillRef idx="1">
+            <a:schemeClr val="lt1"/>
+          </a:fillRef>
+          <a:effectRef idx="0">
+            <a:schemeClr val="dk1"/>
+          </a:effectRef>
+          <a:fontRef idx="minor">
+            <a:schemeClr val="dk1"/>
+          </a:fontRef>
+        </p:style>
+        <p:txBody>
+          <a:bodyPr rtlCol="0" anchor="ctr"/>
+          <a:lstStyle/>
+          <a:p>
+            <a:r>
+              <a:rPr lang="en-US" altLang="ko-KR" sz="1400"/>
+              <a:t># docker run --gpu all nvidia/cuda:9.0-base nvidia-smi</a:t>
+            </a:r>
+            <a:endParaRPr lang="en-US" altLang="ko-KR" sz="1400" dirty="0"/>
+          </a:p>
+        </p:txBody>
+      </p:sp>
+      <p:sp>
+        <p:nvSpPr>
+          <p:cNvPr id="11" name="사각형: 둥근 모서리 114">
+            <a:extLst>
+              <a:ext uri="{FF2B5EF4-FFF2-40B4-BE49-F238E27FC236}">
+                <a16:creationId xmlns:a16="http://schemas.microsoft.com/office/drawing/2014/main" id="{E07F06D4-AF1E-486E-8493-362B4DEDC5E3}"/>
+              </a:ext>
+            </a:extLst>
+          </p:cNvPr>
+          <p:cNvSpPr/>
+          <p:nvPr/>
+        </p:nvSpPr>
+        <p:spPr>
+          <a:xfrm>
+            <a:off x="899592" y="1354461"/>
+            <a:ext cx="7488831" cy="3367380"/>
+          </a:xfrm>
+          <a:prstGeom prst="roundRect">
+            <a:avLst>
+              <a:gd name="adj" fmla="val 0"/>
+            </a:avLst>
+          </a:prstGeom>
+        </p:spPr>
+        <p:style>
+          <a:lnRef idx="2">
+            <a:schemeClr val="dk1"/>
+          </a:lnRef>
+          <a:fillRef idx="1">
+            <a:schemeClr val="lt1"/>
+          </a:fillRef>
+          <a:effectRef idx="0">
+            <a:schemeClr val="dk1"/>
+          </a:effectRef>
+          <a:fontRef idx="minor">
+            <a:schemeClr val="dk1"/>
+          </a:fontRef>
+        </p:style>
+        <p:txBody>
+          <a:bodyPr rtlCol="0" anchor="ctr"/>
+          <a:lstStyle/>
+          <a:p>
+            <a:r>
+              <a:rPr lang="en-US" altLang="ko-KR" sz="1400"/>
+              <a:t>"hooks": {</a:t>
+            </a:r>
+          </a:p>
+          <a:p>
+            <a:r>
+              <a:rPr lang="en-US" altLang="ko-KR" sz="1400"/>
+              <a:t>    "prestart": [</a:t>
+            </a:r>
+          </a:p>
+          <a:p>
+            <a:r>
+              <a:rPr lang="en-US" altLang="ko-KR" sz="1400"/>
+              <a:t>         {</a:t>
+            </a:r>
+          </a:p>
+          <a:p>
+            <a:r>
+              <a:rPr lang="en-US" altLang="ko-KR" sz="1400"/>
+              <a:t>             "path": “/usr/bin/nvidia-container-runtime-hook”,</a:t>
+            </a:r>
+          </a:p>
+          <a:p>
+            <a:r>
+              <a:rPr lang="en-US" altLang="ko-KR" sz="1400"/>
+              <a:t>             "args": ["nvidia-container-runtime-hook ", “prestart"],</a:t>
+            </a:r>
+          </a:p>
+          <a:p>
+            <a:r>
+              <a:rPr lang="en-US" altLang="ko-KR" sz="1400"/>
+              <a:t>             "env": [“CUDA_VERSION=9.0.176”,</a:t>
+            </a:r>
+            <a:br>
+              <a:rPr lang="en-US" altLang="ko-KR" sz="1400"/>
+            </a:br>
+            <a:r>
+              <a:rPr lang="en-US" altLang="ko-KR" sz="1400"/>
+              <a:t>                       “CUDA_PKG_VERSION=9-0=9.0.176-1”,</a:t>
+            </a:r>
+          </a:p>
+          <a:p>
+            <a:r>
+              <a:rPr lang="en-US" altLang="ko-KR" sz="1400"/>
+              <a:t>                       “NVIDIA_VISIBLE_DEVICES=all“,</a:t>
+            </a:r>
+            <a:br>
+              <a:rPr lang="en-US" altLang="ko-KR" sz="1400"/>
+            </a:br>
+            <a:r>
+              <a:rPr lang="en-US" altLang="ko-KR" sz="1400"/>
+              <a:t>                       “NVIDIA_DRIVER_CAPABILITIES=“compute,utility”,</a:t>
+            </a:r>
+          </a:p>
+          <a:p>
+            <a:r>
+              <a:rPr lang="en-US" altLang="ko-KR" sz="1400"/>
+              <a:t>                       "NVIDIA_REQUIRE_CUDA=cuda&gt;=9.0“,</a:t>
+            </a:r>
+            <a:br>
+              <a:rPr lang="en-US" altLang="ko-KR" sz="1400"/>
+            </a:br>
+            <a:r>
+              <a:rPr lang="en-US" altLang="ko-KR" sz="1400"/>
+              <a:t>                       "LD_LIBRARY_PATH=/usr/local/nvidia/lib:/usr/local/nvidia/lib64“</a:t>
+            </a:r>
+          </a:p>
+          <a:p>
+            <a:r>
+              <a:rPr lang="en-US" altLang="ko-KR" sz="1400"/>
+              <a:t>             ]</a:t>
+            </a:r>
+          </a:p>
+          <a:p>
+            <a:r>
+              <a:rPr lang="en-US" altLang="ko-KR" sz="1400"/>
+              <a:t>         },</a:t>
+            </a:r>
+          </a:p>
+          <a:p>
+            <a:r>
+              <a:rPr lang="en-US" altLang="ko-KR" sz="1400"/>
+              <a:t>    ],</a:t>
+            </a:r>
+          </a:p>
+          <a:p>
+            <a:r>
+              <a:rPr lang="en-US" altLang="ko-KR" sz="1400"/>
+              <a:t>}</a:t>
+            </a:r>
+            <a:endParaRPr lang="en-US" altLang="ko-KR" sz="1400" dirty="0"/>
+          </a:p>
+        </p:txBody>
+      </p:sp>
+      <p:cxnSp>
+        <p:nvCxnSpPr>
+          <p:cNvPr id="9" name="직선 화살표 연결선 8">
+            <a:extLst>
+              <a:ext uri="{FF2B5EF4-FFF2-40B4-BE49-F238E27FC236}">
+                <a16:creationId xmlns:a16="http://schemas.microsoft.com/office/drawing/2014/main" id="{D3447036-464F-4C90-9B09-6E8806442451}"/>
+              </a:ext>
+            </a:extLst>
+          </p:cNvPr>
+          <p:cNvCxnSpPr>
+            <a:cxnSpLocks/>
+            <a:stCxn id="7" idx="2"/>
+            <a:endCxn id="11" idx="0"/>
+          </p:cNvCxnSpPr>
+          <p:nvPr/>
+        </p:nvCxnSpPr>
+        <p:spPr>
+          <a:xfrm>
+            <a:off x="4644008" y="1131590"/>
+            <a:ext cx="0" cy="222871"/>
+          </a:xfrm>
+          <a:prstGeom prst="straightConnector1">
+            <a:avLst/>
+          </a:prstGeom>
+          <a:ln w="19050">
+            <a:solidFill>
+              <a:schemeClr val="tx1"/>
+            </a:solidFill>
+            <a:headEnd type="none" w="med" len="med"/>
+            <a:tailEnd type="arrow" w="med" len="med"/>
+          </a:ln>
+        </p:spPr>
+        <p:style>
+          <a:lnRef idx="1">
+            <a:schemeClr val="accent1"/>
+          </a:lnRef>
+          <a:fillRef idx="0">
+            <a:schemeClr val="accent1"/>
+          </a:fillRef>
+          <a:effectRef idx="0">
+            <a:schemeClr val="accent1"/>
+          </a:effectRef>
+          <a:fontRef idx="minor">
+            <a:schemeClr val="tx1"/>
+          </a:fontRef>
+        </p:style>
+      </p:cxnSp>
+      <p:sp>
+        <p:nvSpPr>
+          <p:cNvPr id="22" name="사각형: 둥근 모서리 114">
+            <a:extLst>
+              <a:ext uri="{FF2B5EF4-FFF2-40B4-BE49-F238E27FC236}">
+                <a16:creationId xmlns:a16="http://schemas.microsoft.com/office/drawing/2014/main" id="{0B79FB11-EB5E-48B2-9B7D-2CF7A5759856}"/>
+              </a:ext>
+            </a:extLst>
+          </p:cNvPr>
+          <p:cNvSpPr/>
+          <p:nvPr/>
+        </p:nvSpPr>
+        <p:spPr>
+          <a:xfrm>
+            <a:off x="3278436" y="4658589"/>
+            <a:ext cx="2731142" cy="433441"/>
+          </a:xfrm>
+          <a:prstGeom prst="roundRect">
+            <a:avLst>
+              <a:gd name="adj" fmla="val 10304"/>
+            </a:avLst>
+          </a:prstGeom>
+          <a:noFill/>
+          <a:ln>
+            <a:noFill/>
+          </a:ln>
+        </p:spPr>
+        <p:style>
+          <a:lnRef idx="2">
+            <a:schemeClr val="dk1"/>
+          </a:lnRef>
+          <a:fillRef idx="1">
+            <a:schemeClr val="lt1"/>
+          </a:fillRef>
+          <a:effectRef idx="0">
+            <a:schemeClr val="dk1"/>
+          </a:effectRef>
+          <a:fontRef idx="minor">
+            <a:schemeClr val="dk1"/>
+          </a:fontRef>
+        </p:style>
+        <p:txBody>
+          <a:bodyPr rtlCol="0" anchor="ctr"/>
+          <a:lstStyle/>
+          <a:p>
+            <a:pPr algn="ctr"/>
+            <a:r>
+              <a:rPr lang="en-US" altLang="ko-KR" sz="1400"/>
+              <a:t>OCI Runtime Spec</a:t>
+            </a:r>
+            <a:endParaRPr lang="en-US" altLang="ko-KR" sz="1400" dirty="0"/>
+          </a:p>
+        </p:txBody>
+      </p:sp>
+    </p:spTree>
+    <p:extLst>
+      <p:ext uri="{BB962C8B-B14F-4D97-AF65-F5344CB8AC3E}">
+        <p14:creationId xmlns:p14="http://schemas.microsoft.com/office/powerpoint/2010/main" val="3532445663"/>
+      </p:ext>
+    </p:extLst>
+  </p:cSld>
+  <p:clrMapOvr>
+    <a:masterClrMapping/>
+  </p:clrMapOvr>
+</p:sld>
+</file>
+
+<file path=ppt/slides/slide16.xml><?xml version="1.0" encoding="utf-8"?>
+<p:sld xmlns:a="http://schemas.openxmlformats.org/drawingml/2006/main" xmlns:r="http://schemas.openxmlformats.org/officeDocument/2006/relationships" xmlns:p="http://schemas.openxmlformats.org/presentationml/2006/main">
+  <p:cSld>
+    <p:spTree>
+      <p:nvGrpSpPr>
+        <p:cNvPr id="1" name=""/>
+        <p:cNvGrpSpPr/>
+        <p:nvPr/>
+      </p:nvGrpSpPr>
+      <p:grpSpPr>
+        <a:xfrm>
+          <a:off x="0" y="0"/>
+          <a:ext cx="0" cy="0"/>
+          <a:chOff x="0" y="0"/>
+          <a:chExt cx="0" cy="0"/>
+        </a:xfrm>
+      </p:grpSpPr>
+      <p:sp>
+        <p:nvSpPr>
+          <p:cNvPr id="2" name="제목 1">
+            <a:extLst>
+              <a:ext uri="{FF2B5EF4-FFF2-40B4-BE49-F238E27FC236}">
+                <a16:creationId xmlns:a16="http://schemas.microsoft.com/office/drawing/2014/main" id="{8738443D-5E72-49E2-86AC-581D61C41C39}"/>
+              </a:ext>
+            </a:extLst>
+          </p:cNvPr>
+          <p:cNvSpPr>
+            <a:spLocks noGrp="1"/>
+          </p:cNvSpPr>
+          <p:nvPr>
+            <p:ph type="title"/>
+          </p:nvPr>
+        </p:nvSpPr>
+        <p:spPr>
+          <a:xfrm>
+            <a:off x="0" y="-92546"/>
+            <a:ext cx="9144000" cy="857250"/>
+          </a:xfrm>
+        </p:spPr>
+        <p:txBody>
+          <a:bodyPr>
             <a:normAutofit/>
           </a:bodyPr>
           <a:lstStyle/>
@@ -13414,7 +14101,7 @@
 </p:sld>
 </file>
 
-<file path=ppt/slides/slide16.xml><?xml version="1.0" encoding="utf-8"?>
+<file path=ppt/slides/slide17.xml><?xml version="1.0" encoding="utf-8"?>
 <p:sld xmlns:a="http://schemas.openxmlformats.org/drawingml/2006/main" xmlns:r="http://schemas.openxmlformats.org/officeDocument/2006/relationships" xmlns:p="http://schemas.openxmlformats.org/presentationml/2006/main">
   <p:cSld>
     <p:spTree>
@@ -19479,6 +20166,2025 @@
   <p:cSld>
     <p:spTree>
       <p:nvGrpSpPr>
+        <p:cNvPr id="1" name="">
+          <a:extLst>
+            <a:ext uri="{FF2B5EF4-FFF2-40B4-BE49-F238E27FC236}">
+              <a16:creationId xmlns:a16="http://schemas.microsoft.com/office/drawing/2014/main" id="{FB73BBA0-BDC3-74A4-7ADA-C62F9F0A6FD3}"/>
+            </a:ext>
+          </a:extLst>
+        </p:cNvPr>
+        <p:cNvGrpSpPr/>
+        <p:nvPr/>
+      </p:nvGrpSpPr>
+      <p:grpSpPr>
+        <a:xfrm>
+          <a:off x="0" y="0"/>
+          <a:ext cx="0" cy="0"/>
+          <a:chOff x="0" y="0"/>
+          <a:chExt cx="0" cy="0"/>
+        </a:xfrm>
+      </p:grpSpPr>
+      <p:sp>
+        <p:nvSpPr>
+          <p:cNvPr id="2" name="제목 1">
+            <a:extLst>
+              <a:ext uri="{FF2B5EF4-FFF2-40B4-BE49-F238E27FC236}">
+                <a16:creationId xmlns:a16="http://schemas.microsoft.com/office/drawing/2014/main" id="{87AB4A66-59DA-C252-8162-28C582A65DF3}"/>
+              </a:ext>
+            </a:extLst>
+          </p:cNvPr>
+          <p:cNvSpPr>
+            <a:spLocks noGrp="1"/>
+          </p:cNvSpPr>
+          <p:nvPr>
+            <p:ph type="title"/>
+          </p:nvPr>
+        </p:nvSpPr>
+        <p:spPr>
+          <a:xfrm>
+            <a:off x="0" y="-773419"/>
+            <a:ext cx="9144000" cy="857250"/>
+          </a:xfrm>
+        </p:spPr>
+        <p:txBody>
+          <a:bodyPr>
+            <a:normAutofit/>
+          </a:bodyPr>
+          <a:lstStyle/>
+          <a:p>
+            <a:r>
+              <a:rPr lang="en-US" altLang="ko-KR"/>
+              <a:t>CUDA Container Stack</a:t>
+            </a:r>
+            <a:endParaRPr lang="ko-KR" altLang="en-US" dirty="0"/>
+          </a:p>
+        </p:txBody>
+      </p:sp>
+      <p:sp>
+        <p:nvSpPr>
+          <p:cNvPr id="38" name="사각형: 둥근 모서리 114">
+            <a:extLst>
+              <a:ext uri="{FF2B5EF4-FFF2-40B4-BE49-F238E27FC236}">
+                <a16:creationId xmlns:a16="http://schemas.microsoft.com/office/drawing/2014/main" id="{49C4A451-4B7C-C0A8-A6F8-428CD54F266B}"/>
+              </a:ext>
+            </a:extLst>
+          </p:cNvPr>
+          <p:cNvSpPr/>
+          <p:nvPr/>
+        </p:nvSpPr>
+        <p:spPr>
+          <a:xfrm>
+            <a:off x="2046558" y="2249109"/>
+            <a:ext cx="5045722" cy="1187198"/>
+          </a:xfrm>
+          <a:prstGeom prst="roundRect">
+            <a:avLst>
+              <a:gd name="adj" fmla="val 5938"/>
+            </a:avLst>
+          </a:prstGeom>
+          <a:ln w="12700"/>
+        </p:spPr>
+        <p:style>
+          <a:lnRef idx="2">
+            <a:schemeClr val="dk1"/>
+          </a:lnRef>
+          <a:fillRef idx="1">
+            <a:schemeClr val="lt1"/>
+          </a:fillRef>
+          <a:effectRef idx="0">
+            <a:schemeClr val="dk1"/>
+          </a:effectRef>
+          <a:fontRef idx="minor">
+            <a:schemeClr val="dk1"/>
+          </a:fontRef>
+        </p:style>
+        <p:txBody>
+          <a:bodyPr rtlCol="0" anchor="b"/>
+          <a:lstStyle/>
+          <a:p>
+            <a:pPr algn="ctr"/>
+            <a:r>
+              <a:rPr lang="en-US" altLang="ko-KR" sz="1000" b="1"/>
+              <a:t>Host Filesystem</a:t>
+            </a:r>
+            <a:endParaRPr lang="en-US" altLang="ko-KR" sz="1000" b="1" dirty="0"/>
+          </a:p>
+        </p:txBody>
+      </p:sp>
+      <p:sp>
+        <p:nvSpPr>
+          <p:cNvPr id="37" name="사각형: 둥근 모서리 114">
+            <a:extLst>
+              <a:ext uri="{FF2B5EF4-FFF2-40B4-BE49-F238E27FC236}">
+                <a16:creationId xmlns:a16="http://schemas.microsoft.com/office/drawing/2014/main" id="{F7A03B79-F33E-9615-4BEC-7D3E92E1CE8F}"/>
+              </a:ext>
+            </a:extLst>
+          </p:cNvPr>
+          <p:cNvSpPr/>
+          <p:nvPr/>
+        </p:nvSpPr>
+        <p:spPr>
+          <a:xfrm>
+            <a:off x="2056030" y="4171338"/>
+            <a:ext cx="5037102" cy="787990"/>
+          </a:xfrm>
+          <a:prstGeom prst="roundRect">
+            <a:avLst>
+              <a:gd name="adj" fmla="val 7160"/>
+            </a:avLst>
+          </a:prstGeom>
+          <a:ln w="12700"/>
+        </p:spPr>
+        <p:style>
+          <a:lnRef idx="2">
+            <a:schemeClr val="dk1"/>
+          </a:lnRef>
+          <a:fillRef idx="1">
+            <a:schemeClr val="lt1"/>
+          </a:fillRef>
+          <a:effectRef idx="0">
+            <a:schemeClr val="dk1"/>
+          </a:effectRef>
+          <a:fontRef idx="minor">
+            <a:schemeClr val="dk1"/>
+          </a:fontRef>
+        </p:style>
+        <p:txBody>
+          <a:bodyPr rtlCol="0" anchor="b"/>
+          <a:lstStyle/>
+          <a:p>
+            <a:pPr algn="ctr"/>
+            <a:r>
+              <a:rPr lang="en-US" altLang="ko-KR" sz="1000" b="1"/>
+              <a:t>Host Hardware</a:t>
+            </a:r>
+            <a:endParaRPr lang="en-US" altLang="ko-KR" sz="1000" b="1" dirty="0"/>
+          </a:p>
+        </p:txBody>
+      </p:sp>
+      <p:sp>
+        <p:nvSpPr>
+          <p:cNvPr id="33" name="사각형: 둥근 모서리 114">
+            <a:extLst>
+              <a:ext uri="{FF2B5EF4-FFF2-40B4-BE49-F238E27FC236}">
+                <a16:creationId xmlns:a16="http://schemas.microsoft.com/office/drawing/2014/main" id="{C6C01DA5-CF5B-E631-B057-65A1DEF271C8}"/>
+              </a:ext>
+            </a:extLst>
+          </p:cNvPr>
+          <p:cNvSpPr/>
+          <p:nvPr/>
+        </p:nvSpPr>
+        <p:spPr>
+          <a:xfrm>
+            <a:off x="2051720" y="3436307"/>
+            <a:ext cx="5045722" cy="739656"/>
+          </a:xfrm>
+          <a:prstGeom prst="roundRect">
+            <a:avLst>
+              <a:gd name="adj" fmla="val 7201"/>
+            </a:avLst>
+          </a:prstGeom>
+          <a:ln w="12700"/>
+        </p:spPr>
+        <p:style>
+          <a:lnRef idx="2">
+            <a:schemeClr val="dk1"/>
+          </a:lnRef>
+          <a:fillRef idx="1">
+            <a:schemeClr val="lt1"/>
+          </a:fillRef>
+          <a:effectRef idx="0">
+            <a:schemeClr val="dk1"/>
+          </a:effectRef>
+          <a:fontRef idx="minor">
+            <a:schemeClr val="dk1"/>
+          </a:fontRef>
+        </p:style>
+        <p:txBody>
+          <a:bodyPr rtlCol="0" anchor="b"/>
+          <a:lstStyle/>
+          <a:p>
+            <a:pPr algn="ctr"/>
+            <a:r>
+              <a:rPr lang="en-US" altLang="ko-KR" sz="1000" b="1"/>
+              <a:t>Host Kernel</a:t>
+            </a:r>
+            <a:endParaRPr lang="en-US" altLang="ko-KR" sz="1000" b="1" dirty="0"/>
+          </a:p>
+        </p:txBody>
+      </p:sp>
+      <p:sp>
+        <p:nvSpPr>
+          <p:cNvPr id="14" name="사각형: 둥근 모서리 114">
+            <a:extLst>
+              <a:ext uri="{FF2B5EF4-FFF2-40B4-BE49-F238E27FC236}">
+                <a16:creationId xmlns:a16="http://schemas.microsoft.com/office/drawing/2014/main" id="{31DC5A73-D785-DF36-7351-9796CD3BF52A}"/>
+              </a:ext>
+            </a:extLst>
+          </p:cNvPr>
+          <p:cNvSpPr/>
+          <p:nvPr/>
+        </p:nvSpPr>
+        <p:spPr>
+          <a:xfrm>
+            <a:off x="2145948" y="4287525"/>
+            <a:ext cx="1077331" cy="383228"/>
+          </a:xfrm>
+          <a:prstGeom prst="roundRect">
+            <a:avLst>
+              <a:gd name="adj" fmla="val 14292"/>
+            </a:avLst>
+          </a:prstGeom>
+          <a:solidFill>
+            <a:schemeClr val="bg1">
+              <a:lumMod val="95000"/>
+            </a:schemeClr>
+          </a:solidFill>
+          <a:ln w="12700"/>
+        </p:spPr>
+        <p:style>
+          <a:lnRef idx="2">
+            <a:schemeClr val="dk1"/>
+          </a:lnRef>
+          <a:fillRef idx="1">
+            <a:schemeClr val="lt1"/>
+          </a:fillRef>
+          <a:effectRef idx="0">
+            <a:schemeClr val="dk1"/>
+          </a:effectRef>
+          <a:fontRef idx="minor">
+            <a:schemeClr val="dk1"/>
+          </a:fontRef>
+        </p:style>
+        <p:txBody>
+          <a:bodyPr rtlCol="0" anchor="ctr"/>
+          <a:lstStyle/>
+          <a:p>
+            <a:pPr algn="ctr"/>
+            <a:r>
+              <a:rPr lang="en-US" altLang="ko-KR" sz="1000"/>
+              <a:t>NVIDIA</a:t>
+            </a:r>
+          </a:p>
+          <a:p>
+            <a:pPr algn="ctr"/>
+            <a:r>
+              <a:rPr lang="en-US" altLang="ko-KR" sz="1000"/>
+              <a:t>GPU 0</a:t>
+            </a:r>
+            <a:endParaRPr lang="en-US" altLang="ko-KR" sz="1000" dirty="0"/>
+          </a:p>
+        </p:txBody>
+      </p:sp>
+      <p:sp>
+        <p:nvSpPr>
+          <p:cNvPr id="15" name="사각형: 둥근 모서리 114">
+            <a:extLst>
+              <a:ext uri="{FF2B5EF4-FFF2-40B4-BE49-F238E27FC236}">
+                <a16:creationId xmlns:a16="http://schemas.microsoft.com/office/drawing/2014/main" id="{3F49FE6C-C36E-6548-7A51-B036889F6F00}"/>
+              </a:ext>
+            </a:extLst>
+          </p:cNvPr>
+          <p:cNvSpPr/>
+          <p:nvPr/>
+        </p:nvSpPr>
+        <p:spPr>
+          <a:xfrm>
+            <a:off x="3405927" y="4287525"/>
+            <a:ext cx="1077331" cy="383228"/>
+          </a:xfrm>
+          <a:prstGeom prst="roundRect">
+            <a:avLst>
+              <a:gd name="adj" fmla="val 14292"/>
+            </a:avLst>
+          </a:prstGeom>
+          <a:solidFill>
+            <a:schemeClr val="bg1">
+              <a:lumMod val="95000"/>
+            </a:schemeClr>
+          </a:solidFill>
+          <a:ln w="12700"/>
+        </p:spPr>
+        <p:style>
+          <a:lnRef idx="2">
+            <a:schemeClr val="dk1"/>
+          </a:lnRef>
+          <a:fillRef idx="1">
+            <a:schemeClr val="lt1"/>
+          </a:fillRef>
+          <a:effectRef idx="0">
+            <a:schemeClr val="dk1"/>
+          </a:effectRef>
+          <a:fontRef idx="minor">
+            <a:schemeClr val="dk1"/>
+          </a:fontRef>
+        </p:style>
+        <p:txBody>
+          <a:bodyPr rtlCol="0" anchor="ctr"/>
+          <a:lstStyle/>
+          <a:p>
+            <a:pPr algn="ctr"/>
+            <a:r>
+              <a:rPr lang="en-US" altLang="ko-KR" sz="1000"/>
+              <a:t>NVIDIA</a:t>
+            </a:r>
+          </a:p>
+          <a:p>
+            <a:pPr algn="ctr"/>
+            <a:r>
+              <a:rPr lang="en-US" altLang="ko-KR" sz="1000"/>
+              <a:t>GPU 1</a:t>
+            </a:r>
+            <a:endParaRPr lang="en-US" altLang="ko-KR" sz="1000" dirty="0"/>
+          </a:p>
+        </p:txBody>
+      </p:sp>
+      <p:sp>
+        <p:nvSpPr>
+          <p:cNvPr id="16" name="사각형: 둥근 모서리 114">
+            <a:extLst>
+              <a:ext uri="{FF2B5EF4-FFF2-40B4-BE49-F238E27FC236}">
+                <a16:creationId xmlns:a16="http://schemas.microsoft.com/office/drawing/2014/main" id="{F0428608-6DE1-17BC-1F25-3F20FD33DD33}"/>
+              </a:ext>
+            </a:extLst>
+          </p:cNvPr>
+          <p:cNvSpPr/>
+          <p:nvPr/>
+        </p:nvSpPr>
+        <p:spPr>
+          <a:xfrm>
+            <a:off x="4665905" y="4287525"/>
+            <a:ext cx="1077331" cy="383228"/>
+          </a:xfrm>
+          <a:prstGeom prst="roundRect">
+            <a:avLst>
+              <a:gd name="adj" fmla="val 12529"/>
+            </a:avLst>
+          </a:prstGeom>
+          <a:solidFill>
+            <a:schemeClr val="bg1">
+              <a:lumMod val="95000"/>
+            </a:schemeClr>
+          </a:solidFill>
+          <a:ln w="12700"/>
+        </p:spPr>
+        <p:style>
+          <a:lnRef idx="2">
+            <a:schemeClr val="dk1"/>
+          </a:lnRef>
+          <a:fillRef idx="1">
+            <a:schemeClr val="lt1"/>
+          </a:fillRef>
+          <a:effectRef idx="0">
+            <a:schemeClr val="dk1"/>
+          </a:effectRef>
+          <a:fontRef idx="minor">
+            <a:schemeClr val="dk1"/>
+          </a:fontRef>
+        </p:style>
+        <p:txBody>
+          <a:bodyPr rtlCol="0" anchor="ctr"/>
+          <a:lstStyle/>
+          <a:p>
+            <a:pPr algn="ctr"/>
+            <a:r>
+              <a:rPr lang="en-US" altLang="ko-KR" sz="1000"/>
+              <a:t>NVIDIA</a:t>
+            </a:r>
+          </a:p>
+          <a:p>
+            <a:pPr algn="ctr"/>
+            <a:r>
+              <a:rPr lang="en-US" altLang="ko-KR" sz="1000"/>
+              <a:t>GPU 2</a:t>
+            </a:r>
+            <a:endParaRPr lang="en-US" altLang="ko-KR" sz="1000" dirty="0"/>
+          </a:p>
+        </p:txBody>
+      </p:sp>
+      <p:sp>
+        <p:nvSpPr>
+          <p:cNvPr id="17" name="사각형: 둥근 모서리 114">
+            <a:extLst>
+              <a:ext uri="{FF2B5EF4-FFF2-40B4-BE49-F238E27FC236}">
+                <a16:creationId xmlns:a16="http://schemas.microsoft.com/office/drawing/2014/main" id="{4CDD1DBB-C65B-3BFF-9B8F-ECB78B21A8FF}"/>
+              </a:ext>
+            </a:extLst>
+          </p:cNvPr>
+          <p:cNvSpPr/>
+          <p:nvPr/>
+        </p:nvSpPr>
+        <p:spPr>
+          <a:xfrm>
+            <a:off x="5925884" y="4287525"/>
+            <a:ext cx="1077331" cy="383228"/>
+          </a:xfrm>
+          <a:prstGeom prst="roundRect">
+            <a:avLst>
+              <a:gd name="adj" fmla="val 16055"/>
+            </a:avLst>
+          </a:prstGeom>
+          <a:solidFill>
+            <a:schemeClr val="bg1">
+              <a:lumMod val="95000"/>
+            </a:schemeClr>
+          </a:solidFill>
+          <a:ln w="12700"/>
+        </p:spPr>
+        <p:style>
+          <a:lnRef idx="2">
+            <a:schemeClr val="dk1"/>
+          </a:lnRef>
+          <a:fillRef idx="1">
+            <a:schemeClr val="lt1"/>
+          </a:fillRef>
+          <a:effectRef idx="0">
+            <a:schemeClr val="dk1"/>
+          </a:effectRef>
+          <a:fontRef idx="minor">
+            <a:schemeClr val="dk1"/>
+          </a:fontRef>
+        </p:style>
+        <p:txBody>
+          <a:bodyPr rtlCol="0" anchor="ctr"/>
+          <a:lstStyle/>
+          <a:p>
+            <a:pPr algn="ctr"/>
+            <a:r>
+              <a:rPr lang="en-US" altLang="ko-KR" sz="1000"/>
+              <a:t>NVIDIA</a:t>
+            </a:r>
+          </a:p>
+          <a:p>
+            <a:pPr algn="ctr"/>
+            <a:r>
+              <a:rPr lang="en-US" altLang="ko-KR" sz="1000"/>
+              <a:t>GPU 3</a:t>
+            </a:r>
+            <a:endParaRPr lang="en-US" altLang="ko-KR" sz="1000" dirty="0"/>
+          </a:p>
+        </p:txBody>
+      </p:sp>
+      <p:sp>
+        <p:nvSpPr>
+          <p:cNvPr id="36" name="사각형: 둥근 모서리 114">
+            <a:extLst>
+              <a:ext uri="{FF2B5EF4-FFF2-40B4-BE49-F238E27FC236}">
+                <a16:creationId xmlns:a16="http://schemas.microsoft.com/office/drawing/2014/main" id="{E56B413F-F449-9D67-ADF9-40E980DAAA96}"/>
+              </a:ext>
+            </a:extLst>
+          </p:cNvPr>
+          <p:cNvSpPr/>
+          <p:nvPr/>
+        </p:nvSpPr>
+        <p:spPr>
+          <a:xfrm>
+            <a:off x="734944" y="488998"/>
+            <a:ext cx="2486761" cy="1662236"/>
+          </a:xfrm>
+          <a:prstGeom prst="roundRect">
+            <a:avLst>
+              <a:gd name="adj" fmla="val 4028"/>
+            </a:avLst>
+          </a:prstGeom>
+          <a:ln w="12700"/>
+        </p:spPr>
+        <p:style>
+          <a:lnRef idx="2">
+            <a:schemeClr val="dk1"/>
+          </a:lnRef>
+          <a:fillRef idx="1">
+            <a:schemeClr val="lt1"/>
+          </a:fillRef>
+          <a:effectRef idx="0">
+            <a:schemeClr val="dk1"/>
+          </a:effectRef>
+          <a:fontRef idx="minor">
+            <a:schemeClr val="dk1"/>
+          </a:fontRef>
+        </p:style>
+        <p:txBody>
+          <a:bodyPr rtlCol="0" anchor="t"/>
+          <a:lstStyle/>
+          <a:p>
+            <a:pPr algn="ctr"/>
+            <a:r>
+              <a:rPr lang="en-US" altLang="ko-KR" sz="1000" b="1"/>
+              <a:t>Container A</a:t>
+            </a:r>
+            <a:endParaRPr lang="ko-KR" altLang="en-US" sz="1000" b="1" dirty="0">
+              <a:solidFill>
+                <a:schemeClr val="accent2">
+                  <a:lumMod val="75000"/>
+                </a:schemeClr>
+              </a:solidFill>
+            </a:endParaRPr>
+          </a:p>
+        </p:txBody>
+      </p:sp>
+      <p:sp>
+        <p:nvSpPr>
+          <p:cNvPr id="48" name="사각형: 둥근 모서리 114">
+            <a:extLst>
+              <a:ext uri="{FF2B5EF4-FFF2-40B4-BE49-F238E27FC236}">
+                <a16:creationId xmlns:a16="http://schemas.microsoft.com/office/drawing/2014/main" id="{73003435-C7BB-B467-69A4-6732CF624A0B}"/>
+              </a:ext>
+            </a:extLst>
+          </p:cNvPr>
+          <p:cNvSpPr/>
+          <p:nvPr/>
+        </p:nvSpPr>
+        <p:spPr>
+          <a:xfrm>
+            <a:off x="822678" y="1683025"/>
+            <a:ext cx="1099999" cy="383228"/>
+          </a:xfrm>
+          <a:prstGeom prst="roundRect">
+            <a:avLst>
+              <a:gd name="adj" fmla="val 7242"/>
+            </a:avLst>
+          </a:prstGeom>
+          <a:solidFill>
+            <a:schemeClr val="bg1">
+              <a:lumMod val="95000"/>
+            </a:schemeClr>
+          </a:solidFill>
+          <a:ln w="12700"/>
+        </p:spPr>
+        <p:style>
+          <a:lnRef idx="2">
+            <a:schemeClr val="dk1"/>
+          </a:lnRef>
+          <a:fillRef idx="1">
+            <a:schemeClr val="lt1"/>
+          </a:fillRef>
+          <a:effectRef idx="0">
+            <a:schemeClr val="dk1"/>
+          </a:effectRef>
+          <a:fontRef idx="minor">
+            <a:schemeClr val="dk1"/>
+          </a:fontRef>
+        </p:style>
+        <p:txBody>
+          <a:bodyPr rtlCol="0" anchor="ctr"/>
+          <a:lstStyle/>
+          <a:p>
+            <a:pPr algn="ctr"/>
+            <a:r>
+              <a:rPr lang="en-US" altLang="ko-KR" sz="1000"/>
+              <a:t>/dev/nvidia0</a:t>
+            </a:r>
+            <a:endParaRPr lang="en-US" altLang="ko-KR" sz="1000" dirty="0"/>
+          </a:p>
+        </p:txBody>
+      </p:sp>
+      <p:sp>
+        <p:nvSpPr>
+          <p:cNvPr id="49" name="사각형: 둥근 모서리 114">
+            <a:extLst>
+              <a:ext uri="{FF2B5EF4-FFF2-40B4-BE49-F238E27FC236}">
+                <a16:creationId xmlns:a16="http://schemas.microsoft.com/office/drawing/2014/main" id="{D2634C51-112B-8129-D1CB-466790FEECE5}"/>
+              </a:ext>
+            </a:extLst>
+          </p:cNvPr>
+          <p:cNvSpPr/>
+          <p:nvPr/>
+        </p:nvSpPr>
+        <p:spPr>
+          <a:xfrm>
+            <a:off x="2024278" y="1683025"/>
+            <a:ext cx="1099868" cy="383228"/>
+          </a:xfrm>
+          <a:prstGeom prst="roundRect">
+            <a:avLst>
+              <a:gd name="adj" fmla="val 7242"/>
+            </a:avLst>
+          </a:prstGeom>
+          <a:solidFill>
+            <a:schemeClr val="bg1">
+              <a:lumMod val="95000"/>
+            </a:schemeClr>
+          </a:solidFill>
+          <a:ln w="12700"/>
+        </p:spPr>
+        <p:style>
+          <a:lnRef idx="2">
+            <a:schemeClr val="dk1"/>
+          </a:lnRef>
+          <a:fillRef idx="1">
+            <a:schemeClr val="lt1"/>
+          </a:fillRef>
+          <a:effectRef idx="0">
+            <a:schemeClr val="dk1"/>
+          </a:effectRef>
+          <a:fontRef idx="minor">
+            <a:schemeClr val="dk1"/>
+          </a:fontRef>
+        </p:style>
+        <p:txBody>
+          <a:bodyPr rtlCol="0" anchor="ctr"/>
+          <a:lstStyle/>
+          <a:p>
+            <a:pPr algn="ctr"/>
+            <a:r>
+              <a:rPr lang="en-US" altLang="ko-KR" sz="1000"/>
+              <a:t>/dev/nvidia1</a:t>
+            </a:r>
+            <a:endParaRPr lang="en-US" altLang="ko-KR" sz="1000" dirty="0"/>
+          </a:p>
+        </p:txBody>
+      </p:sp>
+      <p:sp>
+        <p:nvSpPr>
+          <p:cNvPr id="53" name="사각형: 둥근 모서리 114">
+            <a:extLst>
+              <a:ext uri="{FF2B5EF4-FFF2-40B4-BE49-F238E27FC236}">
+                <a16:creationId xmlns:a16="http://schemas.microsoft.com/office/drawing/2014/main" id="{A0951ADA-A20D-2A5F-C8BB-25E5463B7267}"/>
+              </a:ext>
+            </a:extLst>
+          </p:cNvPr>
+          <p:cNvSpPr/>
+          <p:nvPr/>
+        </p:nvSpPr>
+        <p:spPr>
+          <a:xfrm>
+            <a:off x="822678" y="1212700"/>
+            <a:ext cx="2301467" cy="383228"/>
+          </a:xfrm>
+          <a:prstGeom prst="roundRect">
+            <a:avLst>
+              <a:gd name="adj" fmla="val 7242"/>
+            </a:avLst>
+          </a:prstGeom>
+          <a:solidFill>
+            <a:schemeClr val="bg2">
+              <a:lumMod val="90000"/>
+            </a:schemeClr>
+          </a:solidFill>
+          <a:ln w="12700"/>
+        </p:spPr>
+        <p:style>
+          <a:lnRef idx="2">
+            <a:schemeClr val="dk1"/>
+          </a:lnRef>
+          <a:fillRef idx="1">
+            <a:schemeClr val="lt1"/>
+          </a:fillRef>
+          <a:effectRef idx="0">
+            <a:schemeClr val="dk1"/>
+          </a:effectRef>
+          <a:fontRef idx="minor">
+            <a:schemeClr val="dk1"/>
+          </a:fontRef>
+        </p:style>
+        <p:txBody>
+          <a:bodyPr rtlCol="0" anchor="ctr"/>
+          <a:lstStyle/>
+          <a:p>
+            <a:pPr algn="ctr"/>
+            <a:r>
+              <a:rPr lang="en-US" altLang="ko-KR" sz="900"/>
+              <a:t>NVIDIA CUDA Lib/Toolkit</a:t>
+            </a:r>
+            <a:endParaRPr lang="en-US" altLang="ko-KR" sz="900" dirty="0"/>
+          </a:p>
+        </p:txBody>
+      </p:sp>
+      <p:sp>
+        <p:nvSpPr>
+          <p:cNvPr id="54" name="사각형: 둥근 모서리 114">
+            <a:extLst>
+              <a:ext uri="{FF2B5EF4-FFF2-40B4-BE49-F238E27FC236}">
+                <a16:creationId xmlns:a16="http://schemas.microsoft.com/office/drawing/2014/main" id="{F5B6AD1B-3029-2BF9-CD83-B9DAB37C1331}"/>
+              </a:ext>
+            </a:extLst>
+          </p:cNvPr>
+          <p:cNvSpPr/>
+          <p:nvPr/>
+        </p:nvSpPr>
+        <p:spPr>
+          <a:xfrm>
+            <a:off x="3346476" y="483518"/>
+            <a:ext cx="3674596" cy="1662236"/>
+          </a:xfrm>
+          <a:prstGeom prst="roundRect">
+            <a:avLst>
+              <a:gd name="adj" fmla="val 4028"/>
+            </a:avLst>
+          </a:prstGeom>
+          <a:ln w="12700"/>
+        </p:spPr>
+        <p:style>
+          <a:lnRef idx="2">
+            <a:schemeClr val="dk1"/>
+          </a:lnRef>
+          <a:fillRef idx="1">
+            <a:schemeClr val="lt1"/>
+          </a:fillRef>
+          <a:effectRef idx="0">
+            <a:schemeClr val="dk1"/>
+          </a:effectRef>
+          <a:fontRef idx="minor">
+            <a:schemeClr val="dk1"/>
+          </a:fontRef>
+        </p:style>
+        <p:txBody>
+          <a:bodyPr rtlCol="0" anchor="t"/>
+          <a:lstStyle/>
+          <a:p>
+            <a:pPr algn="ctr"/>
+            <a:r>
+              <a:rPr lang="en-US" altLang="ko-KR" sz="1000" b="1"/>
+              <a:t>Container B</a:t>
+            </a:r>
+            <a:endParaRPr lang="ko-KR" altLang="en-US" sz="1000" b="1" dirty="0">
+              <a:solidFill>
+                <a:schemeClr val="accent2">
+                  <a:lumMod val="75000"/>
+                </a:schemeClr>
+              </a:solidFill>
+            </a:endParaRPr>
+          </a:p>
+        </p:txBody>
+      </p:sp>
+      <p:sp>
+        <p:nvSpPr>
+          <p:cNvPr id="55" name="사각형: 둥근 모서리 114">
+            <a:extLst>
+              <a:ext uri="{FF2B5EF4-FFF2-40B4-BE49-F238E27FC236}">
+                <a16:creationId xmlns:a16="http://schemas.microsoft.com/office/drawing/2014/main" id="{3423A5EF-7849-F8BB-E27D-014EF03D49B1}"/>
+              </a:ext>
+            </a:extLst>
+          </p:cNvPr>
+          <p:cNvSpPr/>
+          <p:nvPr/>
+        </p:nvSpPr>
+        <p:spPr>
+          <a:xfrm>
+            <a:off x="3434210" y="1677546"/>
+            <a:ext cx="1099999" cy="383228"/>
+          </a:xfrm>
+          <a:prstGeom prst="roundRect">
+            <a:avLst>
+              <a:gd name="adj" fmla="val 7242"/>
+            </a:avLst>
+          </a:prstGeom>
+          <a:solidFill>
+            <a:schemeClr val="bg1">
+              <a:lumMod val="95000"/>
+            </a:schemeClr>
+          </a:solidFill>
+          <a:ln w="12700"/>
+        </p:spPr>
+        <p:style>
+          <a:lnRef idx="2">
+            <a:schemeClr val="dk1"/>
+          </a:lnRef>
+          <a:fillRef idx="1">
+            <a:schemeClr val="lt1"/>
+          </a:fillRef>
+          <a:effectRef idx="0">
+            <a:schemeClr val="dk1"/>
+          </a:effectRef>
+          <a:fontRef idx="minor">
+            <a:schemeClr val="dk1"/>
+          </a:fontRef>
+        </p:style>
+        <p:txBody>
+          <a:bodyPr rtlCol="0" anchor="ctr"/>
+          <a:lstStyle/>
+          <a:p>
+            <a:pPr algn="ctr"/>
+            <a:r>
+              <a:rPr lang="en-US" altLang="ko-KR" sz="1000"/>
+              <a:t>/dev/nvidia0</a:t>
+            </a:r>
+            <a:endParaRPr lang="en-US" altLang="ko-KR" sz="1000" dirty="0"/>
+          </a:p>
+        </p:txBody>
+      </p:sp>
+      <p:sp>
+        <p:nvSpPr>
+          <p:cNvPr id="56" name="사각형: 둥근 모서리 114">
+            <a:extLst>
+              <a:ext uri="{FF2B5EF4-FFF2-40B4-BE49-F238E27FC236}">
+                <a16:creationId xmlns:a16="http://schemas.microsoft.com/office/drawing/2014/main" id="{9E85798A-6AE0-0D28-94EC-3FBBDCDB6684}"/>
+              </a:ext>
+            </a:extLst>
+          </p:cNvPr>
+          <p:cNvSpPr/>
+          <p:nvPr/>
+        </p:nvSpPr>
+        <p:spPr>
+          <a:xfrm>
+            <a:off x="4635810" y="1677546"/>
+            <a:ext cx="1099868" cy="383228"/>
+          </a:xfrm>
+          <a:prstGeom prst="roundRect">
+            <a:avLst>
+              <a:gd name="adj" fmla="val 7242"/>
+            </a:avLst>
+          </a:prstGeom>
+          <a:solidFill>
+            <a:schemeClr val="bg1">
+              <a:lumMod val="95000"/>
+            </a:schemeClr>
+          </a:solidFill>
+          <a:ln w="12700"/>
+        </p:spPr>
+        <p:style>
+          <a:lnRef idx="2">
+            <a:schemeClr val="dk1"/>
+          </a:lnRef>
+          <a:fillRef idx="1">
+            <a:schemeClr val="lt1"/>
+          </a:fillRef>
+          <a:effectRef idx="0">
+            <a:schemeClr val="dk1"/>
+          </a:effectRef>
+          <a:fontRef idx="minor">
+            <a:schemeClr val="dk1"/>
+          </a:fontRef>
+        </p:style>
+        <p:txBody>
+          <a:bodyPr rtlCol="0" anchor="ctr"/>
+          <a:lstStyle/>
+          <a:p>
+            <a:pPr algn="ctr"/>
+            <a:r>
+              <a:rPr lang="en-US" altLang="ko-KR" sz="1000"/>
+              <a:t>/dev/nvidia2</a:t>
+            </a:r>
+            <a:endParaRPr lang="en-US" altLang="ko-KR" sz="1000" dirty="0"/>
+          </a:p>
+        </p:txBody>
+      </p:sp>
+      <p:sp>
+        <p:nvSpPr>
+          <p:cNvPr id="57" name="사각형: 둥근 모서리 114">
+            <a:extLst>
+              <a:ext uri="{FF2B5EF4-FFF2-40B4-BE49-F238E27FC236}">
+                <a16:creationId xmlns:a16="http://schemas.microsoft.com/office/drawing/2014/main" id="{B04ADCCC-9D96-59CB-9BCE-21F50A90BE9D}"/>
+              </a:ext>
+            </a:extLst>
+          </p:cNvPr>
+          <p:cNvSpPr/>
+          <p:nvPr/>
+        </p:nvSpPr>
+        <p:spPr>
+          <a:xfrm>
+            <a:off x="3434210" y="1207220"/>
+            <a:ext cx="3498895" cy="383228"/>
+          </a:xfrm>
+          <a:prstGeom prst="roundRect">
+            <a:avLst>
+              <a:gd name="adj" fmla="val 7242"/>
+            </a:avLst>
+          </a:prstGeom>
+          <a:solidFill>
+            <a:schemeClr val="bg2">
+              <a:lumMod val="90000"/>
+            </a:schemeClr>
+          </a:solidFill>
+          <a:ln w="12700"/>
+        </p:spPr>
+        <p:style>
+          <a:lnRef idx="2">
+            <a:schemeClr val="dk1"/>
+          </a:lnRef>
+          <a:fillRef idx="1">
+            <a:schemeClr val="lt1"/>
+          </a:fillRef>
+          <a:effectRef idx="0">
+            <a:schemeClr val="dk1"/>
+          </a:effectRef>
+          <a:fontRef idx="minor">
+            <a:schemeClr val="dk1"/>
+          </a:fontRef>
+        </p:style>
+        <p:txBody>
+          <a:bodyPr rtlCol="0" anchor="ctr"/>
+          <a:lstStyle/>
+          <a:p>
+            <a:pPr algn="ctr"/>
+            <a:r>
+              <a:rPr lang="en-US" altLang="ko-KR" sz="900"/>
+              <a:t>NVIDIA CUDA Lib/Toolkit</a:t>
+            </a:r>
+            <a:endParaRPr lang="en-US" altLang="ko-KR" sz="900" dirty="0"/>
+          </a:p>
+        </p:txBody>
+      </p:sp>
+      <p:sp>
+        <p:nvSpPr>
+          <p:cNvPr id="85" name="사각형: 둥근 모서리 114">
+            <a:extLst>
+              <a:ext uri="{FF2B5EF4-FFF2-40B4-BE49-F238E27FC236}">
+                <a16:creationId xmlns:a16="http://schemas.microsoft.com/office/drawing/2014/main" id="{BD4D5BBF-0602-053D-AD30-F2AF8FAC8A29}"/>
+              </a:ext>
+            </a:extLst>
+          </p:cNvPr>
+          <p:cNvSpPr/>
+          <p:nvPr/>
+        </p:nvSpPr>
+        <p:spPr>
+          <a:xfrm>
+            <a:off x="5833237" y="1677546"/>
+            <a:ext cx="1099868" cy="383228"/>
+          </a:xfrm>
+          <a:prstGeom prst="roundRect">
+            <a:avLst>
+              <a:gd name="adj" fmla="val 7242"/>
+            </a:avLst>
+          </a:prstGeom>
+          <a:solidFill>
+            <a:schemeClr val="bg1">
+              <a:lumMod val="95000"/>
+            </a:schemeClr>
+          </a:solidFill>
+          <a:ln w="12700"/>
+        </p:spPr>
+        <p:style>
+          <a:lnRef idx="2">
+            <a:schemeClr val="dk1"/>
+          </a:lnRef>
+          <a:fillRef idx="1">
+            <a:schemeClr val="lt1"/>
+          </a:fillRef>
+          <a:effectRef idx="0">
+            <a:schemeClr val="dk1"/>
+          </a:effectRef>
+          <a:fontRef idx="minor">
+            <a:schemeClr val="dk1"/>
+          </a:fontRef>
+        </p:style>
+        <p:txBody>
+          <a:bodyPr rtlCol="0" anchor="ctr"/>
+          <a:lstStyle/>
+          <a:p>
+            <a:pPr algn="ctr"/>
+            <a:r>
+              <a:rPr lang="en-US" altLang="ko-KR" sz="1000"/>
+              <a:t>/dev/nvidia3</a:t>
+            </a:r>
+            <a:endParaRPr lang="en-US" altLang="ko-KR" sz="1000" dirty="0"/>
+          </a:p>
+        </p:txBody>
+      </p:sp>
+      <p:sp>
+        <p:nvSpPr>
+          <p:cNvPr id="72" name="사각형: 둥근 모서리 114">
+            <a:extLst>
+              <a:ext uri="{FF2B5EF4-FFF2-40B4-BE49-F238E27FC236}">
+                <a16:creationId xmlns:a16="http://schemas.microsoft.com/office/drawing/2014/main" id="{ABBB745A-FC38-4A85-707C-890E5D004226}"/>
+              </a:ext>
+            </a:extLst>
+          </p:cNvPr>
+          <p:cNvSpPr/>
+          <p:nvPr/>
+        </p:nvSpPr>
+        <p:spPr>
+          <a:xfrm>
+            <a:off x="7141814" y="483518"/>
+            <a:ext cx="1274717" cy="1662236"/>
+          </a:xfrm>
+          <a:prstGeom prst="roundRect">
+            <a:avLst>
+              <a:gd name="adj" fmla="val 4159"/>
+            </a:avLst>
+          </a:prstGeom>
+          <a:ln w="12700"/>
+        </p:spPr>
+        <p:style>
+          <a:lnRef idx="2">
+            <a:schemeClr val="dk1"/>
+          </a:lnRef>
+          <a:fillRef idx="1">
+            <a:schemeClr val="lt1"/>
+          </a:fillRef>
+          <a:effectRef idx="0">
+            <a:schemeClr val="dk1"/>
+          </a:effectRef>
+          <a:fontRef idx="minor">
+            <a:schemeClr val="dk1"/>
+          </a:fontRef>
+        </p:style>
+        <p:txBody>
+          <a:bodyPr rtlCol="0" anchor="t"/>
+          <a:lstStyle/>
+          <a:p>
+            <a:pPr algn="ctr"/>
+            <a:r>
+              <a:rPr lang="en-US" altLang="ko-KR" sz="1000" b="1"/>
+              <a:t>Container C</a:t>
+            </a:r>
+            <a:endParaRPr lang="ko-KR" altLang="en-US" sz="1000" b="1" dirty="0">
+              <a:solidFill>
+                <a:schemeClr val="accent2">
+                  <a:lumMod val="75000"/>
+                </a:schemeClr>
+              </a:solidFill>
+            </a:endParaRPr>
+          </a:p>
+        </p:txBody>
+      </p:sp>
+      <p:sp>
+        <p:nvSpPr>
+          <p:cNvPr id="74" name="사각형: 둥근 모서리 114">
+            <a:extLst>
+              <a:ext uri="{FF2B5EF4-FFF2-40B4-BE49-F238E27FC236}">
+                <a16:creationId xmlns:a16="http://schemas.microsoft.com/office/drawing/2014/main" id="{D027113B-EF17-B051-01FA-22A6489E19AB}"/>
+              </a:ext>
+            </a:extLst>
+          </p:cNvPr>
+          <p:cNvSpPr/>
+          <p:nvPr/>
+        </p:nvSpPr>
+        <p:spPr>
+          <a:xfrm>
+            <a:off x="7227660" y="1673181"/>
+            <a:ext cx="1098712" cy="383228"/>
+          </a:xfrm>
+          <a:prstGeom prst="roundRect">
+            <a:avLst>
+              <a:gd name="adj" fmla="val 7242"/>
+            </a:avLst>
+          </a:prstGeom>
+          <a:solidFill>
+            <a:schemeClr val="bg1">
+              <a:lumMod val="95000"/>
+            </a:schemeClr>
+          </a:solidFill>
+          <a:ln w="12700"/>
+        </p:spPr>
+        <p:style>
+          <a:lnRef idx="2">
+            <a:schemeClr val="dk1"/>
+          </a:lnRef>
+          <a:fillRef idx="1">
+            <a:schemeClr val="lt1"/>
+          </a:fillRef>
+          <a:effectRef idx="0">
+            <a:schemeClr val="dk1"/>
+          </a:effectRef>
+          <a:fontRef idx="minor">
+            <a:schemeClr val="dk1"/>
+          </a:fontRef>
+        </p:style>
+        <p:txBody>
+          <a:bodyPr rtlCol="0" anchor="ctr"/>
+          <a:lstStyle/>
+          <a:p>
+            <a:pPr algn="ctr"/>
+            <a:r>
+              <a:rPr lang="en-US" altLang="ko-KR" sz="1000"/>
+              <a:t>/dev/nvidia3</a:t>
+            </a:r>
+            <a:endParaRPr lang="en-US" altLang="ko-KR" sz="1000" dirty="0"/>
+          </a:p>
+        </p:txBody>
+      </p:sp>
+      <p:sp>
+        <p:nvSpPr>
+          <p:cNvPr id="75" name="사각형: 둥근 모서리 114">
+            <a:extLst>
+              <a:ext uri="{FF2B5EF4-FFF2-40B4-BE49-F238E27FC236}">
+                <a16:creationId xmlns:a16="http://schemas.microsoft.com/office/drawing/2014/main" id="{40534082-54FD-B713-04F2-56C9B7008111}"/>
+              </a:ext>
+            </a:extLst>
+          </p:cNvPr>
+          <p:cNvSpPr/>
+          <p:nvPr/>
+        </p:nvSpPr>
+        <p:spPr>
+          <a:xfrm>
+            <a:off x="7227659" y="1202855"/>
+            <a:ext cx="1098711" cy="383228"/>
+          </a:xfrm>
+          <a:prstGeom prst="roundRect">
+            <a:avLst>
+              <a:gd name="adj" fmla="val 7242"/>
+            </a:avLst>
+          </a:prstGeom>
+          <a:solidFill>
+            <a:schemeClr val="bg2">
+              <a:lumMod val="90000"/>
+            </a:schemeClr>
+          </a:solidFill>
+          <a:ln w="12700"/>
+        </p:spPr>
+        <p:style>
+          <a:lnRef idx="2">
+            <a:schemeClr val="dk1"/>
+          </a:lnRef>
+          <a:fillRef idx="1">
+            <a:schemeClr val="lt1"/>
+          </a:fillRef>
+          <a:effectRef idx="0">
+            <a:schemeClr val="dk1"/>
+          </a:effectRef>
+          <a:fontRef idx="minor">
+            <a:schemeClr val="dk1"/>
+          </a:fontRef>
+        </p:style>
+        <p:txBody>
+          <a:bodyPr rtlCol="0" anchor="ctr"/>
+          <a:lstStyle/>
+          <a:p>
+            <a:pPr algn="ctr"/>
+            <a:r>
+              <a:rPr lang="en-US" altLang="ko-KR" sz="900"/>
+              <a:t>NVIDIA CUDA Lib/Toolkit</a:t>
+            </a:r>
+            <a:endParaRPr lang="en-US" altLang="ko-KR" sz="900" dirty="0"/>
+          </a:p>
+        </p:txBody>
+      </p:sp>
+      <p:sp>
+        <p:nvSpPr>
+          <p:cNvPr id="35" name="사각형: 둥근 모서리 114">
+            <a:extLst>
+              <a:ext uri="{FF2B5EF4-FFF2-40B4-BE49-F238E27FC236}">
+                <a16:creationId xmlns:a16="http://schemas.microsoft.com/office/drawing/2014/main" id="{1860E4FD-40EB-3432-7D0C-EDEE55F42F51}"/>
+              </a:ext>
+            </a:extLst>
+          </p:cNvPr>
+          <p:cNvSpPr/>
+          <p:nvPr/>
+        </p:nvSpPr>
+        <p:spPr>
+          <a:xfrm>
+            <a:off x="2141131" y="3564926"/>
+            <a:ext cx="4862083" cy="383228"/>
+          </a:xfrm>
+          <a:prstGeom prst="roundRect">
+            <a:avLst>
+              <a:gd name="adj" fmla="val 12530"/>
+            </a:avLst>
+          </a:prstGeom>
+          <a:ln w="12700"/>
+        </p:spPr>
+        <p:style>
+          <a:lnRef idx="2">
+            <a:schemeClr val="dk1"/>
+          </a:lnRef>
+          <a:fillRef idx="1">
+            <a:schemeClr val="lt1"/>
+          </a:fillRef>
+          <a:effectRef idx="0">
+            <a:schemeClr val="dk1"/>
+          </a:effectRef>
+          <a:fontRef idx="minor">
+            <a:schemeClr val="dk1"/>
+          </a:fontRef>
+        </p:style>
+        <p:txBody>
+          <a:bodyPr rtlCol="0" anchor="ctr"/>
+          <a:lstStyle/>
+          <a:p>
+            <a:pPr algn="ctr"/>
+            <a:r>
+              <a:rPr lang="en-US" altLang="ko-KR" sz="1000"/>
+              <a:t>NVIDIA GPU Device Driver</a:t>
+            </a:r>
+            <a:endParaRPr lang="en-US" altLang="ko-KR" sz="1000" dirty="0"/>
+          </a:p>
+        </p:txBody>
+      </p:sp>
+      <p:sp>
+        <p:nvSpPr>
+          <p:cNvPr id="34" name="사각형: 둥근 모서리 114">
+            <a:extLst>
+              <a:ext uri="{FF2B5EF4-FFF2-40B4-BE49-F238E27FC236}">
+                <a16:creationId xmlns:a16="http://schemas.microsoft.com/office/drawing/2014/main" id="{1A85F7A8-74F2-80CD-74B3-ABAC662850E6}"/>
+              </a:ext>
+            </a:extLst>
+          </p:cNvPr>
+          <p:cNvSpPr/>
+          <p:nvPr/>
+        </p:nvSpPr>
+        <p:spPr>
+          <a:xfrm>
+            <a:off x="2141132" y="2796064"/>
+            <a:ext cx="1082148" cy="383228"/>
+          </a:xfrm>
+          <a:prstGeom prst="roundRect">
+            <a:avLst>
+              <a:gd name="adj" fmla="val 13792"/>
+            </a:avLst>
+          </a:prstGeom>
+          <a:solidFill>
+            <a:schemeClr val="bg1">
+              <a:lumMod val="95000"/>
+            </a:schemeClr>
+          </a:solidFill>
+          <a:ln w="12700"/>
+        </p:spPr>
+        <p:style>
+          <a:lnRef idx="2">
+            <a:schemeClr val="dk1"/>
+          </a:lnRef>
+          <a:fillRef idx="1">
+            <a:schemeClr val="lt1"/>
+          </a:fillRef>
+          <a:effectRef idx="0">
+            <a:schemeClr val="dk1"/>
+          </a:effectRef>
+          <a:fontRef idx="minor">
+            <a:schemeClr val="dk1"/>
+          </a:fontRef>
+        </p:style>
+        <p:txBody>
+          <a:bodyPr rtlCol="0" anchor="ctr"/>
+          <a:lstStyle/>
+          <a:p>
+            <a:pPr algn="ctr"/>
+            <a:r>
+              <a:rPr lang="en-US" altLang="ko-KR" sz="1000"/>
+              <a:t>/dev/nvidia0</a:t>
+            </a:r>
+            <a:endParaRPr lang="en-US" altLang="ko-KR" sz="1000" dirty="0"/>
+          </a:p>
+        </p:txBody>
+      </p:sp>
+      <p:sp>
+        <p:nvSpPr>
+          <p:cNvPr id="44" name="사각형: 둥근 모서리 114">
+            <a:extLst>
+              <a:ext uri="{FF2B5EF4-FFF2-40B4-BE49-F238E27FC236}">
+                <a16:creationId xmlns:a16="http://schemas.microsoft.com/office/drawing/2014/main" id="{A19F6AE8-9209-4E92-B9D4-255861AE8D9F}"/>
+              </a:ext>
+            </a:extLst>
+          </p:cNvPr>
+          <p:cNvSpPr/>
+          <p:nvPr/>
+        </p:nvSpPr>
+        <p:spPr>
+          <a:xfrm>
+            <a:off x="3405927" y="2796064"/>
+            <a:ext cx="1082148" cy="383228"/>
+          </a:xfrm>
+          <a:prstGeom prst="roundRect">
+            <a:avLst>
+              <a:gd name="adj" fmla="val 13792"/>
+            </a:avLst>
+          </a:prstGeom>
+          <a:solidFill>
+            <a:schemeClr val="bg1">
+              <a:lumMod val="95000"/>
+            </a:schemeClr>
+          </a:solidFill>
+          <a:ln w="12700"/>
+        </p:spPr>
+        <p:style>
+          <a:lnRef idx="2">
+            <a:schemeClr val="dk1"/>
+          </a:lnRef>
+          <a:fillRef idx="1">
+            <a:schemeClr val="lt1"/>
+          </a:fillRef>
+          <a:effectRef idx="0">
+            <a:schemeClr val="dk1"/>
+          </a:effectRef>
+          <a:fontRef idx="minor">
+            <a:schemeClr val="dk1"/>
+          </a:fontRef>
+        </p:style>
+        <p:txBody>
+          <a:bodyPr rtlCol="0" anchor="ctr"/>
+          <a:lstStyle/>
+          <a:p>
+            <a:pPr algn="ctr"/>
+            <a:r>
+              <a:rPr lang="en-US" altLang="ko-KR" sz="1000"/>
+              <a:t>/dev/nvidia1</a:t>
+            </a:r>
+            <a:endParaRPr lang="en-US" altLang="ko-KR" sz="1000" dirty="0"/>
+          </a:p>
+        </p:txBody>
+      </p:sp>
+      <p:sp>
+        <p:nvSpPr>
+          <p:cNvPr id="45" name="사각형: 둥근 모서리 114">
+            <a:extLst>
+              <a:ext uri="{FF2B5EF4-FFF2-40B4-BE49-F238E27FC236}">
+                <a16:creationId xmlns:a16="http://schemas.microsoft.com/office/drawing/2014/main" id="{447F7FF2-CFB9-C5BA-F252-E89AB13CD361}"/>
+              </a:ext>
+            </a:extLst>
+          </p:cNvPr>
+          <p:cNvSpPr/>
+          <p:nvPr/>
+        </p:nvSpPr>
+        <p:spPr>
+          <a:xfrm>
+            <a:off x="4665905" y="2796064"/>
+            <a:ext cx="1082148" cy="383228"/>
+          </a:xfrm>
+          <a:prstGeom prst="roundRect">
+            <a:avLst>
+              <a:gd name="adj" fmla="val 13792"/>
+            </a:avLst>
+          </a:prstGeom>
+          <a:solidFill>
+            <a:schemeClr val="bg1">
+              <a:lumMod val="95000"/>
+            </a:schemeClr>
+          </a:solidFill>
+          <a:ln w="12700"/>
+        </p:spPr>
+        <p:style>
+          <a:lnRef idx="2">
+            <a:schemeClr val="dk1"/>
+          </a:lnRef>
+          <a:fillRef idx="1">
+            <a:schemeClr val="lt1"/>
+          </a:fillRef>
+          <a:effectRef idx="0">
+            <a:schemeClr val="dk1"/>
+          </a:effectRef>
+          <a:fontRef idx="minor">
+            <a:schemeClr val="dk1"/>
+          </a:fontRef>
+        </p:style>
+        <p:txBody>
+          <a:bodyPr rtlCol="0" anchor="ctr"/>
+          <a:lstStyle/>
+          <a:p>
+            <a:pPr algn="ctr"/>
+            <a:r>
+              <a:rPr lang="en-US" altLang="ko-KR" sz="1000"/>
+              <a:t>/dev/nvidia2</a:t>
+            </a:r>
+            <a:endParaRPr lang="en-US" altLang="ko-KR" sz="1000" dirty="0"/>
+          </a:p>
+        </p:txBody>
+      </p:sp>
+      <p:sp>
+        <p:nvSpPr>
+          <p:cNvPr id="46" name="사각형: 둥근 모서리 114">
+            <a:extLst>
+              <a:ext uri="{FF2B5EF4-FFF2-40B4-BE49-F238E27FC236}">
+                <a16:creationId xmlns:a16="http://schemas.microsoft.com/office/drawing/2014/main" id="{24241B17-01FC-EC5B-B554-F0761364AB9A}"/>
+              </a:ext>
+            </a:extLst>
+          </p:cNvPr>
+          <p:cNvSpPr/>
+          <p:nvPr/>
+        </p:nvSpPr>
+        <p:spPr>
+          <a:xfrm>
+            <a:off x="5920375" y="2796064"/>
+            <a:ext cx="1082148" cy="383228"/>
+          </a:xfrm>
+          <a:prstGeom prst="roundRect">
+            <a:avLst>
+              <a:gd name="adj" fmla="val 13792"/>
+            </a:avLst>
+          </a:prstGeom>
+          <a:solidFill>
+            <a:schemeClr val="bg1">
+              <a:lumMod val="95000"/>
+            </a:schemeClr>
+          </a:solidFill>
+          <a:ln w="12700"/>
+        </p:spPr>
+        <p:style>
+          <a:lnRef idx="2">
+            <a:schemeClr val="dk1"/>
+          </a:lnRef>
+          <a:fillRef idx="1">
+            <a:schemeClr val="lt1"/>
+          </a:fillRef>
+          <a:effectRef idx="0">
+            <a:schemeClr val="dk1"/>
+          </a:effectRef>
+          <a:fontRef idx="minor">
+            <a:schemeClr val="dk1"/>
+          </a:fontRef>
+        </p:style>
+        <p:txBody>
+          <a:bodyPr rtlCol="0" anchor="ctr"/>
+          <a:lstStyle/>
+          <a:p>
+            <a:pPr algn="ctr"/>
+            <a:r>
+              <a:rPr lang="en-US" altLang="ko-KR" sz="1000"/>
+              <a:t>/dev/nvidia3</a:t>
+            </a:r>
+            <a:endParaRPr lang="en-US" altLang="ko-KR" sz="1000" dirty="0"/>
+          </a:p>
+        </p:txBody>
+      </p:sp>
+      <p:cxnSp>
+        <p:nvCxnSpPr>
+          <p:cNvPr id="52" name="직선 연결선 20">
+            <a:extLst>
+              <a:ext uri="{FF2B5EF4-FFF2-40B4-BE49-F238E27FC236}">
+                <a16:creationId xmlns:a16="http://schemas.microsoft.com/office/drawing/2014/main" id="{F2B7835A-327D-38B2-1DCF-EAE3A8214060}"/>
+              </a:ext>
+            </a:extLst>
+          </p:cNvPr>
+          <p:cNvCxnSpPr>
+            <a:cxnSpLocks/>
+            <a:stCxn id="44" idx="2"/>
+            <a:endCxn id="15" idx="0"/>
+          </p:cNvCxnSpPr>
+          <p:nvPr/>
+        </p:nvCxnSpPr>
+        <p:spPr>
+          <a:xfrm flipH="1">
+            <a:off x="3944593" y="3179293"/>
+            <a:ext cx="2408" cy="1108233"/>
+          </a:xfrm>
+          <a:prstGeom prst="line">
+            <a:avLst/>
+          </a:prstGeom>
+          <a:ln w="12700">
+            <a:solidFill>
+              <a:schemeClr val="tx1"/>
+            </a:solidFill>
+            <a:prstDash val="dash"/>
+          </a:ln>
+        </p:spPr>
+        <p:style>
+          <a:lnRef idx="1">
+            <a:schemeClr val="accent1"/>
+          </a:lnRef>
+          <a:fillRef idx="0">
+            <a:schemeClr val="accent1"/>
+          </a:fillRef>
+          <a:effectRef idx="0">
+            <a:schemeClr val="accent1"/>
+          </a:effectRef>
+          <a:fontRef idx="minor">
+            <a:schemeClr val="tx1"/>
+          </a:fontRef>
+        </p:style>
+      </p:cxnSp>
+      <p:sp>
+        <p:nvSpPr>
+          <p:cNvPr id="104" name="사각형: 둥근 모서리 114">
+            <a:extLst>
+              <a:ext uri="{FF2B5EF4-FFF2-40B4-BE49-F238E27FC236}">
+                <a16:creationId xmlns:a16="http://schemas.microsoft.com/office/drawing/2014/main" id="{D2056424-B580-17DC-A162-3816E98A6054}"/>
+              </a:ext>
+            </a:extLst>
+          </p:cNvPr>
+          <p:cNvSpPr/>
+          <p:nvPr/>
+        </p:nvSpPr>
+        <p:spPr>
+          <a:xfrm>
+            <a:off x="2141132" y="2324202"/>
+            <a:ext cx="4862083" cy="383228"/>
+          </a:xfrm>
+          <a:prstGeom prst="roundRect">
+            <a:avLst>
+              <a:gd name="adj" fmla="val 17067"/>
+            </a:avLst>
+          </a:prstGeom>
+          <a:solidFill>
+            <a:schemeClr val="bg2">
+              <a:lumMod val="90000"/>
+            </a:schemeClr>
+          </a:solidFill>
+          <a:ln w="12700"/>
+        </p:spPr>
+        <p:style>
+          <a:lnRef idx="2">
+            <a:schemeClr val="dk1"/>
+          </a:lnRef>
+          <a:fillRef idx="1">
+            <a:schemeClr val="lt1"/>
+          </a:fillRef>
+          <a:effectRef idx="0">
+            <a:schemeClr val="dk1"/>
+          </a:effectRef>
+          <a:fontRef idx="minor">
+            <a:schemeClr val="dk1"/>
+          </a:fontRef>
+        </p:style>
+        <p:txBody>
+          <a:bodyPr rtlCol="0" anchor="ctr"/>
+          <a:lstStyle/>
+          <a:p>
+            <a:pPr algn="ctr"/>
+            <a:r>
+              <a:rPr lang="en-US" altLang="ko-KR" sz="1000"/>
+              <a:t>NVIDIA CUDA Lib/Toolkit</a:t>
+            </a:r>
+            <a:endParaRPr lang="en-US" altLang="ko-KR" sz="1000" dirty="0"/>
+          </a:p>
+        </p:txBody>
+      </p:sp>
+      <p:cxnSp>
+        <p:nvCxnSpPr>
+          <p:cNvPr id="117" name="직선 연결선 17">
+            <a:extLst>
+              <a:ext uri="{FF2B5EF4-FFF2-40B4-BE49-F238E27FC236}">
+                <a16:creationId xmlns:a16="http://schemas.microsoft.com/office/drawing/2014/main" id="{5EBAA434-8FEE-3100-705F-BF56D52547B5}"/>
+              </a:ext>
+            </a:extLst>
+          </p:cNvPr>
+          <p:cNvCxnSpPr>
+            <a:cxnSpLocks/>
+            <a:stCxn id="34" idx="2"/>
+            <a:endCxn id="14" idx="0"/>
+          </p:cNvCxnSpPr>
+          <p:nvPr/>
+        </p:nvCxnSpPr>
+        <p:spPr>
+          <a:xfrm>
+            <a:off x="2682206" y="3179293"/>
+            <a:ext cx="2408" cy="1108233"/>
+          </a:xfrm>
+          <a:prstGeom prst="line">
+            <a:avLst/>
+          </a:prstGeom>
+          <a:ln w="12700">
+            <a:solidFill>
+              <a:schemeClr val="tx1"/>
+            </a:solidFill>
+            <a:prstDash val="dash"/>
+          </a:ln>
+        </p:spPr>
+        <p:style>
+          <a:lnRef idx="1">
+            <a:schemeClr val="accent1"/>
+          </a:lnRef>
+          <a:fillRef idx="0">
+            <a:schemeClr val="accent1"/>
+          </a:fillRef>
+          <a:effectRef idx="0">
+            <a:schemeClr val="accent1"/>
+          </a:effectRef>
+          <a:fontRef idx="minor">
+            <a:schemeClr val="tx1"/>
+          </a:fontRef>
+        </p:style>
+      </p:cxnSp>
+      <p:cxnSp>
+        <p:nvCxnSpPr>
+          <p:cNvPr id="120" name="직선 연결선 17">
+            <a:extLst>
+              <a:ext uri="{FF2B5EF4-FFF2-40B4-BE49-F238E27FC236}">
+                <a16:creationId xmlns:a16="http://schemas.microsoft.com/office/drawing/2014/main" id="{70DF0CA5-2BC5-EC7E-0562-BADC50860779}"/>
+              </a:ext>
+            </a:extLst>
+          </p:cNvPr>
+          <p:cNvCxnSpPr>
+            <a:cxnSpLocks/>
+            <a:stCxn id="45" idx="2"/>
+            <a:endCxn id="16" idx="0"/>
+          </p:cNvCxnSpPr>
+          <p:nvPr/>
+        </p:nvCxnSpPr>
+        <p:spPr>
+          <a:xfrm flipH="1">
+            <a:off x="5204571" y="3179293"/>
+            <a:ext cx="2408" cy="1108233"/>
+          </a:xfrm>
+          <a:prstGeom prst="line">
+            <a:avLst/>
+          </a:prstGeom>
+          <a:ln w="12700">
+            <a:solidFill>
+              <a:schemeClr val="tx1"/>
+            </a:solidFill>
+            <a:prstDash val="dash"/>
+          </a:ln>
+        </p:spPr>
+        <p:style>
+          <a:lnRef idx="1">
+            <a:schemeClr val="accent1"/>
+          </a:lnRef>
+          <a:fillRef idx="0">
+            <a:schemeClr val="accent1"/>
+          </a:fillRef>
+          <a:effectRef idx="0">
+            <a:schemeClr val="accent1"/>
+          </a:effectRef>
+          <a:fontRef idx="minor">
+            <a:schemeClr val="tx1"/>
+          </a:fontRef>
+        </p:style>
+      </p:cxnSp>
+      <p:cxnSp>
+        <p:nvCxnSpPr>
+          <p:cNvPr id="123" name="직선 연결선 26">
+            <a:extLst>
+              <a:ext uri="{FF2B5EF4-FFF2-40B4-BE49-F238E27FC236}">
+                <a16:creationId xmlns:a16="http://schemas.microsoft.com/office/drawing/2014/main" id="{009134AB-65E2-45C7-83B2-D2A8AE79CAFB}"/>
+              </a:ext>
+            </a:extLst>
+          </p:cNvPr>
+          <p:cNvCxnSpPr>
+            <a:cxnSpLocks/>
+            <a:stCxn id="46" idx="2"/>
+            <a:endCxn id="17" idx="0"/>
+          </p:cNvCxnSpPr>
+          <p:nvPr/>
+        </p:nvCxnSpPr>
+        <p:spPr>
+          <a:xfrm>
+            <a:off x="6461449" y="3179292"/>
+            <a:ext cx="3101" cy="1108233"/>
+          </a:xfrm>
+          <a:prstGeom prst="line">
+            <a:avLst/>
+          </a:prstGeom>
+          <a:ln w="12700">
+            <a:solidFill>
+              <a:schemeClr val="tx1"/>
+            </a:solidFill>
+            <a:prstDash val="dash"/>
+          </a:ln>
+        </p:spPr>
+        <p:style>
+          <a:lnRef idx="1">
+            <a:schemeClr val="accent1"/>
+          </a:lnRef>
+          <a:fillRef idx="0">
+            <a:schemeClr val="accent1"/>
+          </a:fillRef>
+          <a:effectRef idx="0">
+            <a:schemeClr val="accent1"/>
+          </a:effectRef>
+          <a:fontRef idx="minor">
+            <a:schemeClr val="tx1"/>
+          </a:fontRef>
+        </p:style>
+      </p:cxnSp>
+      <p:sp>
+        <p:nvSpPr>
+          <p:cNvPr id="146" name="사각형: 둥근 모서리 114">
+            <a:extLst>
+              <a:ext uri="{FF2B5EF4-FFF2-40B4-BE49-F238E27FC236}">
+                <a16:creationId xmlns:a16="http://schemas.microsoft.com/office/drawing/2014/main" id="{691A7357-7A6C-90B2-18E9-66F71148D688}"/>
+              </a:ext>
+            </a:extLst>
+          </p:cNvPr>
+          <p:cNvSpPr/>
+          <p:nvPr/>
+        </p:nvSpPr>
+        <p:spPr>
+          <a:xfrm>
+            <a:off x="822678" y="761549"/>
+            <a:ext cx="2301467" cy="383228"/>
+          </a:xfrm>
+          <a:prstGeom prst="roundRect">
+            <a:avLst>
+              <a:gd name="adj" fmla="val 7242"/>
+            </a:avLst>
+          </a:prstGeom>
+          <a:ln w="12700"/>
+        </p:spPr>
+        <p:style>
+          <a:lnRef idx="2">
+            <a:schemeClr val="dk1"/>
+          </a:lnRef>
+          <a:fillRef idx="1">
+            <a:schemeClr val="lt1"/>
+          </a:fillRef>
+          <a:effectRef idx="0">
+            <a:schemeClr val="dk1"/>
+          </a:effectRef>
+          <a:fontRef idx="minor">
+            <a:schemeClr val="dk1"/>
+          </a:fontRef>
+        </p:style>
+        <p:txBody>
+          <a:bodyPr rtlCol="0" anchor="ctr"/>
+          <a:lstStyle/>
+          <a:p>
+            <a:pPr algn="ctr"/>
+            <a:r>
+              <a:rPr lang="en-US" altLang="ko-KR" sz="900"/>
+              <a:t>App with </a:t>
+            </a:r>
+          </a:p>
+          <a:p>
+            <a:pPr algn="ctr"/>
+            <a:r>
+              <a:rPr lang="en-US" altLang="ko-KR" sz="900"/>
+              <a:t>NVIDIA_VISIBLE_DEVICES Env  </a:t>
+            </a:r>
+            <a:endParaRPr lang="en-US" altLang="ko-KR" sz="900" dirty="0"/>
+          </a:p>
+        </p:txBody>
+      </p:sp>
+      <p:sp>
+        <p:nvSpPr>
+          <p:cNvPr id="147" name="사각형: 둥근 모서리 114">
+            <a:extLst>
+              <a:ext uri="{FF2B5EF4-FFF2-40B4-BE49-F238E27FC236}">
+                <a16:creationId xmlns:a16="http://schemas.microsoft.com/office/drawing/2014/main" id="{3A6E3813-7524-DADD-A3D5-FD71D7525ECE}"/>
+              </a:ext>
+            </a:extLst>
+          </p:cNvPr>
+          <p:cNvSpPr/>
+          <p:nvPr/>
+        </p:nvSpPr>
+        <p:spPr>
+          <a:xfrm>
+            <a:off x="3434211" y="761549"/>
+            <a:ext cx="3498894" cy="383228"/>
+          </a:xfrm>
+          <a:prstGeom prst="roundRect">
+            <a:avLst>
+              <a:gd name="adj" fmla="val 7242"/>
+            </a:avLst>
+          </a:prstGeom>
+          <a:ln w="12700"/>
+        </p:spPr>
+        <p:style>
+          <a:lnRef idx="2">
+            <a:schemeClr val="dk1"/>
+          </a:lnRef>
+          <a:fillRef idx="1">
+            <a:schemeClr val="lt1"/>
+          </a:fillRef>
+          <a:effectRef idx="0">
+            <a:schemeClr val="dk1"/>
+          </a:effectRef>
+          <a:fontRef idx="minor">
+            <a:schemeClr val="dk1"/>
+          </a:fontRef>
+        </p:style>
+        <p:txBody>
+          <a:bodyPr rtlCol="0" anchor="ctr"/>
+          <a:lstStyle/>
+          <a:p>
+            <a:pPr algn="ctr"/>
+            <a:r>
+              <a:rPr lang="en-US" altLang="ko-KR" sz="900"/>
+              <a:t>App with </a:t>
+            </a:r>
+          </a:p>
+          <a:p>
+            <a:pPr algn="ctr"/>
+            <a:r>
+              <a:rPr lang="en-US" altLang="ko-KR" sz="900"/>
+              <a:t>NVIDIA_VISIBLE_DEVICES Env  </a:t>
+            </a:r>
+            <a:endParaRPr lang="en-US" altLang="ko-KR" sz="900" dirty="0"/>
+          </a:p>
+        </p:txBody>
+      </p:sp>
+      <p:sp>
+        <p:nvSpPr>
+          <p:cNvPr id="148" name="사각형: 둥근 모서리 114">
+            <a:extLst>
+              <a:ext uri="{FF2B5EF4-FFF2-40B4-BE49-F238E27FC236}">
+                <a16:creationId xmlns:a16="http://schemas.microsoft.com/office/drawing/2014/main" id="{1E7EF5DB-50AA-10A3-7463-2DC4DCEFF1C5}"/>
+              </a:ext>
+            </a:extLst>
+          </p:cNvPr>
+          <p:cNvSpPr/>
+          <p:nvPr/>
+        </p:nvSpPr>
+        <p:spPr>
+          <a:xfrm>
+            <a:off x="7227659" y="757184"/>
+            <a:ext cx="1098712" cy="383228"/>
+          </a:xfrm>
+          <a:prstGeom prst="roundRect">
+            <a:avLst>
+              <a:gd name="adj" fmla="val 7242"/>
+            </a:avLst>
+          </a:prstGeom>
+          <a:ln w="12700"/>
+        </p:spPr>
+        <p:style>
+          <a:lnRef idx="2">
+            <a:schemeClr val="dk1"/>
+          </a:lnRef>
+          <a:fillRef idx="1">
+            <a:schemeClr val="lt1"/>
+          </a:fillRef>
+          <a:effectRef idx="0">
+            <a:schemeClr val="dk1"/>
+          </a:effectRef>
+          <a:fontRef idx="minor">
+            <a:schemeClr val="dk1"/>
+          </a:fontRef>
+        </p:style>
+        <p:txBody>
+          <a:bodyPr rtlCol="0" anchor="ctr"/>
+          <a:lstStyle/>
+          <a:p>
+            <a:pPr algn="ctr"/>
+            <a:r>
+              <a:rPr lang="en-US" altLang="ko-KR" sz="900"/>
+              <a:t>App with </a:t>
+            </a:r>
+          </a:p>
+          <a:p>
+            <a:pPr algn="ctr"/>
+            <a:r>
+              <a:rPr lang="en-US" altLang="ko-KR" sz="900"/>
+              <a:t>NVIDIA_VISIBLE_</a:t>
+            </a:r>
+            <a:br>
+              <a:rPr lang="en-US" altLang="ko-KR" sz="900"/>
+            </a:br>
+            <a:r>
+              <a:rPr lang="en-US" altLang="ko-KR" sz="900"/>
+              <a:t>DEVICES Env  </a:t>
+            </a:r>
+            <a:endParaRPr lang="en-US" altLang="ko-KR" sz="900" dirty="0"/>
+          </a:p>
+        </p:txBody>
+      </p:sp>
+      <p:cxnSp>
+        <p:nvCxnSpPr>
+          <p:cNvPr id="168" name="직선 연결선 20">
+            <a:extLst>
+              <a:ext uri="{FF2B5EF4-FFF2-40B4-BE49-F238E27FC236}">
+                <a16:creationId xmlns:a16="http://schemas.microsoft.com/office/drawing/2014/main" id="{6B198168-A86C-DBE1-8AF7-CBA8AC5FED1B}"/>
+              </a:ext>
+            </a:extLst>
+          </p:cNvPr>
+          <p:cNvCxnSpPr>
+            <a:cxnSpLocks/>
+            <a:stCxn id="53" idx="2"/>
+            <a:endCxn id="104" idx="0"/>
+          </p:cNvCxnSpPr>
+          <p:nvPr/>
+        </p:nvCxnSpPr>
+        <p:spPr>
+          <a:xfrm>
+            <a:off x="1973412" y="1595928"/>
+            <a:ext cx="2598762" cy="728274"/>
+          </a:xfrm>
+          <a:prstGeom prst="line">
+            <a:avLst/>
+          </a:prstGeom>
+          <a:ln w="12700">
+            <a:solidFill>
+              <a:schemeClr val="tx1"/>
+            </a:solidFill>
+          </a:ln>
+        </p:spPr>
+        <p:style>
+          <a:lnRef idx="1">
+            <a:schemeClr val="accent1"/>
+          </a:lnRef>
+          <a:fillRef idx="0">
+            <a:schemeClr val="accent1"/>
+          </a:fillRef>
+          <a:effectRef idx="0">
+            <a:schemeClr val="accent1"/>
+          </a:effectRef>
+          <a:fontRef idx="minor">
+            <a:schemeClr val="tx1"/>
+          </a:fontRef>
+        </p:style>
+      </p:cxnSp>
+      <p:cxnSp>
+        <p:nvCxnSpPr>
+          <p:cNvPr id="172" name="직선 연결선 20">
+            <a:extLst>
+              <a:ext uri="{FF2B5EF4-FFF2-40B4-BE49-F238E27FC236}">
+                <a16:creationId xmlns:a16="http://schemas.microsoft.com/office/drawing/2014/main" id="{380DDD28-4647-CDAA-478C-D95AF04F8FBE}"/>
+              </a:ext>
+            </a:extLst>
+          </p:cNvPr>
+          <p:cNvCxnSpPr>
+            <a:cxnSpLocks/>
+            <a:stCxn id="57" idx="2"/>
+            <a:endCxn id="104" idx="0"/>
+          </p:cNvCxnSpPr>
+          <p:nvPr/>
+        </p:nvCxnSpPr>
+        <p:spPr>
+          <a:xfrm flipH="1">
+            <a:off x="4572174" y="1590448"/>
+            <a:ext cx="611484" cy="733754"/>
+          </a:xfrm>
+          <a:prstGeom prst="line">
+            <a:avLst/>
+          </a:prstGeom>
+          <a:ln w="12700">
+            <a:solidFill>
+              <a:schemeClr val="tx1"/>
+            </a:solidFill>
+          </a:ln>
+        </p:spPr>
+        <p:style>
+          <a:lnRef idx="1">
+            <a:schemeClr val="accent1"/>
+          </a:lnRef>
+          <a:fillRef idx="0">
+            <a:schemeClr val="accent1"/>
+          </a:fillRef>
+          <a:effectRef idx="0">
+            <a:schemeClr val="accent1"/>
+          </a:effectRef>
+          <a:fontRef idx="minor">
+            <a:schemeClr val="tx1"/>
+          </a:fontRef>
+        </p:style>
+      </p:cxnSp>
+      <p:cxnSp>
+        <p:nvCxnSpPr>
+          <p:cNvPr id="175" name="직선 연결선 20">
+            <a:extLst>
+              <a:ext uri="{FF2B5EF4-FFF2-40B4-BE49-F238E27FC236}">
+                <a16:creationId xmlns:a16="http://schemas.microsoft.com/office/drawing/2014/main" id="{A53510EE-42D6-F4D5-CF8F-3580C6A81578}"/>
+              </a:ext>
+            </a:extLst>
+          </p:cNvPr>
+          <p:cNvCxnSpPr>
+            <a:cxnSpLocks/>
+            <a:stCxn id="75" idx="2"/>
+            <a:endCxn id="104" idx="0"/>
+          </p:cNvCxnSpPr>
+          <p:nvPr/>
+        </p:nvCxnSpPr>
+        <p:spPr>
+          <a:xfrm flipH="1">
+            <a:off x="4572174" y="1586083"/>
+            <a:ext cx="3204841" cy="738119"/>
+          </a:xfrm>
+          <a:prstGeom prst="line">
+            <a:avLst/>
+          </a:prstGeom>
+          <a:ln w="12700">
+            <a:solidFill>
+              <a:schemeClr val="tx1"/>
+            </a:solidFill>
+          </a:ln>
+        </p:spPr>
+        <p:style>
+          <a:lnRef idx="1">
+            <a:schemeClr val="accent1"/>
+          </a:lnRef>
+          <a:fillRef idx="0">
+            <a:schemeClr val="accent1"/>
+          </a:fillRef>
+          <a:effectRef idx="0">
+            <a:schemeClr val="accent1"/>
+          </a:effectRef>
+          <a:fontRef idx="minor">
+            <a:schemeClr val="tx1"/>
+          </a:fontRef>
+        </p:style>
+      </p:cxnSp>
+      <p:sp>
+        <p:nvSpPr>
+          <p:cNvPr id="179" name="TextBox 178">
+            <a:extLst>
+              <a:ext uri="{FF2B5EF4-FFF2-40B4-BE49-F238E27FC236}">
+                <a16:creationId xmlns:a16="http://schemas.microsoft.com/office/drawing/2014/main" id="{ABB58BBC-C827-B102-FD86-C03B0F7D8038}"/>
+              </a:ext>
+            </a:extLst>
+          </p:cNvPr>
+          <p:cNvSpPr txBox="1"/>
+          <p:nvPr/>
+        </p:nvSpPr>
+        <p:spPr>
+          <a:xfrm>
+            <a:off x="691097" y="2141761"/>
+            <a:ext cx="915635" cy="238253"/>
+          </a:xfrm>
+          <a:prstGeom prst="rect">
+            <a:avLst/>
+          </a:prstGeom>
+          <a:noFill/>
+        </p:spPr>
+        <p:txBody>
+          <a:bodyPr wrap="none" rtlCol="0">
+            <a:spAutoFit/>
+          </a:bodyPr>
+          <a:lstStyle/>
+          <a:p>
+            <a:r>
+              <a:rPr kumimoji="1" lang="en-US" altLang="ko-KR" sz="1000" b="1" i="1"/>
+              <a:t>Bind Mount</a:t>
+            </a:r>
+            <a:endParaRPr kumimoji="1" lang="ko-KR" altLang="en-US" sz="1000" b="1" i="1"/>
+          </a:p>
+        </p:txBody>
+      </p:sp>
+    </p:spTree>
+    <p:extLst>
+      <p:ext uri="{BB962C8B-B14F-4D97-AF65-F5344CB8AC3E}">
+        <p14:creationId xmlns:p14="http://schemas.microsoft.com/office/powerpoint/2010/main" val="2011513852"/>
+      </p:ext>
+    </p:extLst>
+  </p:cSld>
+  <p:clrMapOvr>
+    <a:masterClrMapping/>
+  </p:clrMapOvr>
+</p:sld>
+</file>
+
+<file path=ppt/slides/slide5.xml><?xml version="1.0" encoding="utf-8"?>
+<p:sld xmlns:a="http://schemas.openxmlformats.org/drawingml/2006/main" xmlns:r="http://schemas.openxmlformats.org/officeDocument/2006/relationships" xmlns:p="http://schemas.openxmlformats.org/presentationml/2006/main">
+  <p:cSld>
+    <p:spTree>
+      <p:nvGrpSpPr>
         <p:cNvPr id="1" name=""/>
         <p:cNvGrpSpPr/>
         <p:nvPr/>
@@ -19504,7 +22210,7 @@
 </p:sld>
 </file>
 
-<file path=ppt/slides/slide5.xml><?xml version="1.0" encoding="utf-8"?>
+<file path=ppt/slides/slide6.xml><?xml version="1.0" encoding="utf-8"?>
 <p:sld xmlns:a="http://schemas.openxmlformats.org/drawingml/2006/main" xmlns:r="http://schemas.openxmlformats.org/officeDocument/2006/relationships" xmlns:p="http://schemas.openxmlformats.org/presentationml/2006/main">
   <p:cSld>
     <p:spTree>
@@ -20008,7 +22714,7 @@
 </p:sld>
 </file>
 
-<file path=ppt/slides/slide6.xml><?xml version="1.0" encoding="utf-8"?>
+<file path=ppt/slides/slide7.xml><?xml version="1.0" encoding="utf-8"?>
 <p:sld xmlns:a="http://schemas.openxmlformats.org/drawingml/2006/main" xmlns:r="http://schemas.openxmlformats.org/officeDocument/2006/relationships" xmlns:p="http://schemas.openxmlformats.org/presentationml/2006/main">
   <p:cSld>
     <p:spTree>
@@ -21386,7 +24092,7 @@
 </p:sld>
 </file>
 
-<file path=ppt/slides/slide7.xml><?xml version="1.0" encoding="utf-8"?>
+<file path=ppt/slides/slide8.xml><?xml version="1.0" encoding="utf-8"?>
 <p:sld xmlns:a="http://schemas.openxmlformats.org/drawingml/2006/main" xmlns:r="http://schemas.openxmlformats.org/officeDocument/2006/relationships" xmlns:p="http://schemas.openxmlformats.org/presentationml/2006/main">
   <p:cSld>
     <p:spTree>
@@ -24007,7 +26713,7 @@
 </p:sld>
 </file>
 
-<file path=ppt/slides/slide8.xml><?xml version="1.0" encoding="utf-8"?>
+<file path=ppt/slides/slide9.xml><?xml version="1.0" encoding="utf-8"?>
 <p:sld xmlns:a="http://schemas.openxmlformats.org/drawingml/2006/main" xmlns:r="http://schemas.openxmlformats.org/officeDocument/2006/relationships" xmlns:p="http://schemas.openxmlformats.org/presentationml/2006/main">
   <p:cSld>
     <p:spTree>
@@ -25603,584 +28309,6 @@
     <p:extLst>
       <p:ext uri="{BB962C8B-B14F-4D97-AF65-F5344CB8AC3E}">
         <p14:creationId xmlns:p14="http://schemas.microsoft.com/office/powerpoint/2010/main" val="2871309681"/>
-      </p:ext>
-    </p:extLst>
-  </p:cSld>
-  <p:clrMapOvr>
-    <a:masterClrMapping/>
-  </p:clrMapOvr>
-</p:sld>
-</file>
-
-<file path=ppt/slides/slide9.xml><?xml version="1.0" encoding="utf-8"?>
-<p:sld xmlns:a="http://schemas.openxmlformats.org/drawingml/2006/main" xmlns:r="http://schemas.openxmlformats.org/officeDocument/2006/relationships" xmlns:p="http://schemas.openxmlformats.org/presentationml/2006/main">
-  <p:cSld>
-    <p:spTree>
-      <p:nvGrpSpPr>
-        <p:cNvPr id="1" name=""/>
-        <p:cNvGrpSpPr/>
-        <p:nvPr/>
-      </p:nvGrpSpPr>
-      <p:grpSpPr>
-        <a:xfrm>
-          <a:off x="0" y="0"/>
-          <a:ext cx="0" cy="0"/>
-          <a:chOff x="0" y="0"/>
-          <a:chExt cx="0" cy="0"/>
-        </a:xfrm>
-      </p:grpSpPr>
-      <p:sp>
-        <p:nvSpPr>
-          <p:cNvPr id="2" name="제목 1">
-            <a:extLst>
-              <a:ext uri="{FF2B5EF4-FFF2-40B4-BE49-F238E27FC236}">
-                <a16:creationId xmlns:a16="http://schemas.microsoft.com/office/drawing/2014/main" id="{8738443D-5E72-49E2-86AC-581D61C41C39}"/>
-              </a:ext>
-            </a:extLst>
-          </p:cNvPr>
-          <p:cNvSpPr>
-            <a:spLocks noGrp="1"/>
-          </p:cNvSpPr>
-          <p:nvPr>
-            <p:ph type="title"/>
-          </p:nvPr>
-        </p:nvSpPr>
-        <p:spPr>
-          <a:xfrm>
-            <a:off x="0" y="-726229"/>
-            <a:ext cx="9144000" cy="857250"/>
-          </a:xfrm>
-        </p:spPr>
-        <p:txBody>
-          <a:bodyPr>
-            <a:normAutofit fontScale="90000"/>
-          </a:bodyPr>
-          <a:lstStyle/>
-          <a:p>
-            <a:r>
-              <a:rPr lang="en-US" altLang="ko-KR"/>
-              <a:t>CUDA Container OCI Runtime Spec</a:t>
-            </a:r>
-            <a:endParaRPr lang="ko-KR" altLang="en-US" dirty="0"/>
-          </a:p>
-        </p:txBody>
-      </p:sp>
-      <p:sp>
-        <p:nvSpPr>
-          <p:cNvPr id="7" name="사각형: 둥근 모서리 114">
-            <a:extLst>
-              <a:ext uri="{FF2B5EF4-FFF2-40B4-BE49-F238E27FC236}">
-                <a16:creationId xmlns:a16="http://schemas.microsoft.com/office/drawing/2014/main" id="{E074CAD6-7716-4458-B0D4-1C0318E58F6D}"/>
-              </a:ext>
-            </a:extLst>
-          </p:cNvPr>
-          <p:cNvSpPr/>
-          <p:nvPr/>
-        </p:nvSpPr>
-        <p:spPr>
-          <a:xfrm>
-            <a:off x="2627784" y="259255"/>
-            <a:ext cx="4032448" cy="433441"/>
-          </a:xfrm>
-          <a:prstGeom prst="roundRect">
-            <a:avLst>
-              <a:gd name="adj" fmla="val 0"/>
-            </a:avLst>
-          </a:prstGeom>
-          <a:ln w="12700"/>
-        </p:spPr>
-        <p:style>
-          <a:lnRef idx="2">
-            <a:schemeClr val="dk1"/>
-          </a:lnRef>
-          <a:fillRef idx="1">
-            <a:schemeClr val="lt1"/>
-          </a:fillRef>
-          <a:effectRef idx="0">
-            <a:schemeClr val="dk1"/>
-          </a:effectRef>
-          <a:fontRef idx="minor">
-            <a:schemeClr val="dk1"/>
-          </a:fontRef>
-        </p:style>
-        <p:txBody>
-          <a:bodyPr rtlCol="0" anchor="ctr"/>
-          <a:lstStyle/>
-          <a:p>
-            <a:r>
-              <a:rPr lang="en-US" altLang="ko-KR" sz="1100"/>
-              <a:t>$ docker run --gpu all nvidia/cuda:9.0-base nvidia-smi</a:t>
-            </a:r>
-            <a:endParaRPr lang="en-US" altLang="ko-KR" sz="1100" dirty="0"/>
-          </a:p>
-        </p:txBody>
-      </p:sp>
-      <p:sp>
-        <p:nvSpPr>
-          <p:cNvPr id="11" name="사각형: 둥근 모서리 114">
-            <a:extLst>
-              <a:ext uri="{FF2B5EF4-FFF2-40B4-BE49-F238E27FC236}">
-                <a16:creationId xmlns:a16="http://schemas.microsoft.com/office/drawing/2014/main" id="{E07F06D4-AF1E-486E-8493-362B4DEDC5E3}"/>
-              </a:ext>
-            </a:extLst>
-          </p:cNvPr>
-          <p:cNvSpPr/>
-          <p:nvPr/>
-        </p:nvSpPr>
-        <p:spPr>
-          <a:xfrm>
-            <a:off x="899592" y="915566"/>
-            <a:ext cx="7488831" cy="3737569"/>
-          </a:xfrm>
-          <a:prstGeom prst="roundRect">
-            <a:avLst>
-              <a:gd name="adj" fmla="val 0"/>
-            </a:avLst>
-          </a:prstGeom>
-          <a:ln w="12700"/>
-        </p:spPr>
-        <p:style>
-          <a:lnRef idx="2">
-            <a:schemeClr val="dk1"/>
-          </a:lnRef>
-          <a:fillRef idx="1">
-            <a:schemeClr val="lt1"/>
-          </a:fillRef>
-          <a:effectRef idx="0">
-            <a:schemeClr val="dk1"/>
-          </a:effectRef>
-          <a:fontRef idx="minor">
-            <a:schemeClr val="dk1"/>
-          </a:fontRef>
-        </p:style>
-        <p:txBody>
-          <a:bodyPr rtlCol="0" anchor="ctr"/>
-          <a:lstStyle/>
-          <a:p>
-            <a:r>
-              <a:rPr lang="en-US" altLang="ko-KR" sz="1100" kern="0" dirty="0">
-                <a:cs typeface="Al Bayan Plain" pitchFamily="2" charset="-78"/>
-              </a:rPr>
-              <a:t>{</a:t>
-            </a:r>
-          </a:p>
-          <a:p>
-            <a:r>
-              <a:rPr lang="en-US" altLang="ko-KR" sz="1100" kern="0" dirty="0">
-                <a:cs typeface="Al Bayan Plain" pitchFamily="2" charset="-78"/>
-              </a:rPr>
-              <a:t>    "hooks": {</a:t>
-            </a:r>
-          </a:p>
-          <a:p>
-            <a:r>
-              <a:rPr lang="en-US" altLang="ko-KR" sz="1100" kern="0" dirty="0">
-                <a:cs typeface="Al Bayan Plain" pitchFamily="2" charset="-78"/>
-              </a:rPr>
-              <a:t>        "</a:t>
-            </a:r>
-            <a:r>
-              <a:rPr lang="en-US" altLang="ko-KR" sz="1100" kern="0" dirty="0" err="1">
-                <a:cs typeface="Al Bayan Plain" pitchFamily="2" charset="-78"/>
-              </a:rPr>
-              <a:t>Poststart</a:t>
-            </a:r>
-            <a:r>
-              <a:rPr lang="en-US" altLang="ko-KR" sz="1100" kern="0" dirty="0">
-                <a:cs typeface="Al Bayan Plain" pitchFamily="2" charset="-78"/>
-              </a:rPr>
-              <a:t>": [],</a:t>
-            </a:r>
-          </a:p>
-          <a:p>
-            <a:r>
-              <a:rPr lang="en-US" altLang="ko-KR" sz="1100" kern="0" dirty="0">
-                <a:cs typeface="Al Bayan Plain" pitchFamily="2" charset="-78"/>
-              </a:rPr>
-              <a:t>        "</a:t>
-            </a:r>
-            <a:r>
-              <a:rPr lang="en-US" altLang="ko-KR" sz="1100" kern="0" dirty="0" err="1">
-                <a:cs typeface="Al Bayan Plain" pitchFamily="2" charset="-78"/>
-              </a:rPr>
-              <a:t>Poststop</a:t>
-            </a:r>
-            <a:r>
-              <a:rPr lang="en-US" altLang="ko-KR" sz="1100" kern="0" dirty="0">
-                <a:cs typeface="Al Bayan Plain" pitchFamily="2" charset="-78"/>
-              </a:rPr>
-              <a:t>": [],</a:t>
-            </a:r>
-          </a:p>
-          <a:p>
-            <a:r>
-              <a:rPr lang="en-US" altLang="ko-KR" sz="1100" kern="0" dirty="0">
-                <a:cs typeface="Al Bayan Plain" pitchFamily="2" charset="-78"/>
-              </a:rPr>
-              <a:t>        "prestart": [{</a:t>
-            </a:r>
-          </a:p>
-          <a:p>
-            <a:r>
-              <a:rPr lang="en-US" altLang="ko-KR" sz="1100" kern="0" dirty="0">
-                <a:cs typeface="Al Bayan Plain" pitchFamily="2" charset="-78"/>
-              </a:rPr>
-              <a:t>            "</a:t>
-            </a:r>
-            <a:r>
-              <a:rPr lang="en-US" altLang="ko-KR" sz="1100" kern="0" dirty="0" err="1">
-                <a:cs typeface="Al Bayan Plain" pitchFamily="2" charset="-78"/>
-              </a:rPr>
-              <a:t>args</a:t>
-            </a:r>
-            <a:r>
-              <a:rPr lang="en-US" altLang="ko-KR" sz="1100" kern="0" dirty="0">
-                <a:cs typeface="Al Bayan Plain" pitchFamily="2" charset="-78"/>
-              </a:rPr>
-              <a:t>": ["/</a:t>
-            </a:r>
-            <a:r>
-              <a:rPr lang="en-US" altLang="ko-KR" sz="1100" kern="0" dirty="0" err="1">
-                <a:cs typeface="Al Bayan Plain" pitchFamily="2" charset="-78"/>
-              </a:rPr>
-              <a:t>usr</a:t>
-            </a:r>
-            <a:r>
-              <a:rPr lang="en-US" altLang="ko-KR" sz="1100" kern="0" dirty="0">
-                <a:cs typeface="Al Bayan Plain" pitchFamily="2" charset="-78"/>
-              </a:rPr>
-              <a:t>/bin/</a:t>
-            </a:r>
-            <a:r>
-              <a:rPr lang="en-US" altLang="ko-KR" sz="1100" kern="0" dirty="0" err="1">
-                <a:cs typeface="Al Bayan Plain" pitchFamily="2" charset="-78"/>
-              </a:rPr>
-              <a:t>nvidia</a:t>
-            </a:r>
-            <a:r>
-              <a:rPr lang="en-US" altLang="ko-KR" sz="1100" kern="0" dirty="0">
-                <a:cs typeface="Al Bayan Plain" pitchFamily="2" charset="-78"/>
-              </a:rPr>
-              <a:t>-container-runtime-hook", "prestart"],</a:t>
-            </a:r>
-          </a:p>
-          <a:p>
-            <a:r>
-              <a:rPr lang="en-US" altLang="ko-KR" sz="1100" kern="0" dirty="0">
-                <a:cs typeface="Al Bayan Plain" pitchFamily="2" charset="-78"/>
-              </a:rPr>
-              <a:t>            "path": "/</a:t>
-            </a:r>
-            <a:r>
-              <a:rPr lang="en-US" altLang="ko-KR" sz="1100" kern="0" dirty="0" err="1">
-                <a:cs typeface="Al Bayan Plain" pitchFamily="2" charset="-78"/>
-              </a:rPr>
-              <a:t>usr</a:t>
-            </a:r>
-            <a:r>
-              <a:rPr lang="en-US" altLang="ko-KR" sz="1100" kern="0" dirty="0">
-                <a:cs typeface="Al Bayan Plain" pitchFamily="2" charset="-78"/>
-              </a:rPr>
-              <a:t>/bin/</a:t>
-            </a:r>
-            <a:r>
-              <a:rPr lang="en-US" altLang="ko-KR" sz="1100" kern="0" dirty="0" err="1">
-                <a:cs typeface="Al Bayan Plain" pitchFamily="2" charset="-78"/>
-              </a:rPr>
-              <a:t>nvidia</a:t>
-            </a:r>
-            <a:r>
-              <a:rPr lang="en-US" altLang="ko-KR" sz="1100" kern="0" dirty="0">
-                <a:cs typeface="Al Bayan Plain" pitchFamily="2" charset="-78"/>
-              </a:rPr>
-              <a:t>-container-runtime-hook”</a:t>
-            </a:r>
-          </a:p>
-          <a:p>
-            <a:r>
-              <a:rPr lang="en-US" altLang="ko-KR" sz="1100" kern="0" dirty="0">
-                <a:cs typeface="Al Bayan Plain" pitchFamily="2" charset="-78"/>
-              </a:rPr>
-              <a:t>        }]</a:t>
-            </a:r>
-          </a:p>
-          <a:p>
-            <a:r>
-              <a:rPr lang="en-US" altLang="ko-KR" sz="1100" kern="0" dirty="0">
-                <a:cs typeface="Al Bayan Plain" pitchFamily="2" charset="-78"/>
-              </a:rPr>
-              <a:t>    },</a:t>
-            </a:r>
-          </a:p>
-          <a:p>
-            <a:r>
-              <a:rPr lang="en-US" altLang="ko-KR" sz="1100" kern="0" dirty="0">
-                <a:cs typeface="Al Bayan Plain" pitchFamily="2" charset="-78"/>
-              </a:rPr>
-              <a:t>...</a:t>
-            </a:r>
-          </a:p>
-          <a:p>
-            <a:r>
-              <a:rPr lang="en-US" altLang="ko-KR" sz="1100" kern="0" dirty="0">
-                <a:cs typeface="Al Bayan Plain" pitchFamily="2" charset="-78"/>
-              </a:rPr>
-              <a:t>    "process": {</a:t>
-            </a:r>
-          </a:p>
-          <a:p>
-            <a:r>
-              <a:rPr lang="en-US" altLang="ko-KR" sz="1100" kern="0" dirty="0">
-                <a:cs typeface="Al Bayan Plain" pitchFamily="2" charset="-78"/>
-              </a:rPr>
-              <a:t>        “env”: [</a:t>
-            </a:r>
-          </a:p>
-          <a:p>
-            <a:r>
-              <a:rPr lang="en-US" altLang="ko-KR" sz="1100" kern="0" dirty="0">
-                <a:cs typeface="Al Bayan Plain" pitchFamily="2" charset="-78"/>
-              </a:rPr>
-              <a:t>            "NVIDIA_VISIBLE_DEVICES=GPU-5a270e58-abc7-d55b-a94f-54d410c1dfe2,GPU-9de66fe4-2a8b-4a2b-36bc-d61c165db7d8",</a:t>
-            </a:r>
-          </a:p>
-          <a:p>
-            <a:r>
-              <a:rPr lang="en-US" altLang="ko-KR" sz="1100" kern="0" dirty="0">
-                <a:cs typeface="Al Bayan Plain" pitchFamily="2" charset="-78"/>
-              </a:rPr>
-              <a:t>            “NVIDIA_DRIVER_CAPABILITIES=</a:t>
-            </a:r>
-            <a:r>
-              <a:rPr lang="en-US" altLang="ko-KR" sz="1100" kern="0" dirty="0" err="1">
-                <a:cs typeface="Al Bayan Plain" pitchFamily="2" charset="-78"/>
-              </a:rPr>
-              <a:t>compute,utility</a:t>
-            </a:r>
-            <a:r>
-              <a:rPr lang="en-US" altLang="ko-KR" sz="1100" kern="0" dirty="0">
-                <a:cs typeface="Al Bayan Plain" pitchFamily="2" charset="-78"/>
-              </a:rPr>
-              <a:t>”,</a:t>
-            </a:r>
-          </a:p>
-          <a:p>
-            <a:r>
-              <a:rPr lang="en-US" altLang="ko-KR" sz="1100" kern="0" dirty="0">
-                <a:cs typeface="Al Bayan Plain" pitchFamily="2" charset="-78"/>
-              </a:rPr>
-              <a:t>            "NV_CUDA_CUDART_VERSION=11.8.89-1",</a:t>
-            </a:r>
-          </a:p>
-          <a:p>
-            <a:r>
-              <a:rPr lang="en-US" altLang="ko-KR" sz="1100" kern="0" dirty="0">
-                <a:cs typeface="Al Bayan Plain" pitchFamily="2" charset="-78"/>
-              </a:rPr>
-              <a:t>            "CUDA_VERSION=11.8.0”,</a:t>
-            </a:r>
-          </a:p>
-          <a:p>
-            <a:r>
-              <a:rPr lang="en-US" altLang="ko-KR" sz="1100" kern="0" dirty="0">
-                <a:cs typeface="Al Bayan Plain" pitchFamily="2" charset="-78"/>
-              </a:rPr>
-              <a:t>            "LD_LIBRARY_PATH=/</a:t>
-            </a:r>
-            <a:r>
-              <a:rPr lang="en-US" altLang="ko-KR" sz="1100" kern="0" dirty="0" err="1">
-                <a:cs typeface="Al Bayan Plain" pitchFamily="2" charset="-78"/>
-              </a:rPr>
-              <a:t>usr</a:t>
-            </a:r>
-            <a:r>
-              <a:rPr lang="en-US" altLang="ko-KR" sz="1100" kern="0" dirty="0">
-                <a:cs typeface="Al Bayan Plain" pitchFamily="2" charset="-78"/>
-              </a:rPr>
-              <a:t>/local/</a:t>
-            </a:r>
-            <a:r>
-              <a:rPr lang="en-US" altLang="ko-KR" sz="1100" kern="0" dirty="0" err="1">
-                <a:cs typeface="Al Bayan Plain" pitchFamily="2" charset="-78"/>
-              </a:rPr>
-              <a:t>nvidia</a:t>
-            </a:r>
-            <a:r>
-              <a:rPr lang="en-US" altLang="ko-KR" sz="1100" kern="0" dirty="0">
-                <a:cs typeface="Al Bayan Plain" pitchFamily="2" charset="-78"/>
-              </a:rPr>
-              <a:t>/lib:/</a:t>
-            </a:r>
-            <a:r>
-              <a:rPr lang="en-US" altLang="ko-KR" sz="1100" kern="0" dirty="0" err="1">
-                <a:cs typeface="Al Bayan Plain" pitchFamily="2" charset="-78"/>
-              </a:rPr>
-              <a:t>usr</a:t>
-            </a:r>
-            <a:r>
-              <a:rPr lang="en-US" altLang="ko-KR" sz="1100" kern="0" dirty="0">
-                <a:cs typeface="Al Bayan Plain" pitchFamily="2" charset="-78"/>
-              </a:rPr>
-              <a:t>/local/</a:t>
-            </a:r>
-            <a:r>
-              <a:rPr lang="en-US" altLang="ko-KR" sz="1100" kern="0" dirty="0" err="1">
-                <a:cs typeface="Al Bayan Plain" pitchFamily="2" charset="-78"/>
-              </a:rPr>
-              <a:t>nvidia</a:t>
-            </a:r>
-            <a:r>
-              <a:rPr lang="en-US" altLang="ko-KR" sz="1100" kern="0" dirty="0">
-                <a:cs typeface="Al Bayan Plain" pitchFamily="2" charset="-78"/>
-              </a:rPr>
-              <a:t>/lib64"</a:t>
-            </a:r>
-          </a:p>
-          <a:p>
-            <a:r>
-              <a:rPr lang="en-US" altLang="ko-KR" sz="1100" kern="0" dirty="0">
-                <a:cs typeface="Al Bayan Plain" pitchFamily="2" charset="-78"/>
-              </a:rPr>
-              <a:t>            ...</a:t>
-            </a:r>
-            <a:br>
-              <a:rPr lang="en-US" altLang="ko-KR" sz="1100" kern="0" dirty="0">
-                <a:cs typeface="Al Bayan Plain" pitchFamily="2" charset="-78"/>
-              </a:rPr>
-            </a:br>
-            <a:r>
-              <a:rPr lang="en-US" altLang="ko-KR" sz="1100" kern="0" dirty="0">
-                <a:cs typeface="Al Bayan Plain" pitchFamily="2" charset="-78"/>
-              </a:rPr>
-              <a:t>        ]</a:t>
-            </a:r>
-          </a:p>
-          <a:p>
-            <a:r>
-              <a:rPr lang="en-US" altLang="ko-KR" sz="1100" kern="0" dirty="0">
-                <a:cs typeface="Al Bayan Plain" pitchFamily="2" charset="-78"/>
-              </a:rPr>
-              <a:t>    }</a:t>
-            </a:r>
-          </a:p>
-          <a:p>
-            <a:r>
-              <a:rPr lang="en-US" altLang="ko-KR" sz="1100" kern="0" dirty="0">
-                <a:cs typeface="Al Bayan Plain" pitchFamily="2" charset="-78"/>
-              </a:rPr>
-              <a:t>...</a:t>
-            </a:r>
-            <a:endParaRPr lang="en-US" altLang="ko-KR" sz="1600" kern="0" dirty="0">
-              <a:cs typeface="Al Bayan Plain" pitchFamily="2" charset="-78"/>
-            </a:endParaRPr>
-          </a:p>
-        </p:txBody>
-      </p:sp>
-      <p:cxnSp>
-        <p:nvCxnSpPr>
-          <p:cNvPr id="9" name="직선 화살표 연결선 8">
-            <a:extLst>
-              <a:ext uri="{FF2B5EF4-FFF2-40B4-BE49-F238E27FC236}">
-                <a16:creationId xmlns:a16="http://schemas.microsoft.com/office/drawing/2014/main" id="{D3447036-464F-4C90-9B09-6E8806442451}"/>
-              </a:ext>
-            </a:extLst>
-          </p:cNvPr>
-          <p:cNvCxnSpPr>
-            <a:cxnSpLocks/>
-            <a:stCxn id="7" idx="2"/>
-            <a:endCxn id="11" idx="0"/>
-          </p:cNvCxnSpPr>
-          <p:nvPr/>
-        </p:nvCxnSpPr>
-        <p:spPr>
-          <a:xfrm>
-            <a:off x="4644008" y="692696"/>
-            <a:ext cx="0" cy="222870"/>
-          </a:xfrm>
-          <a:prstGeom prst="straightConnector1">
-            <a:avLst/>
-          </a:prstGeom>
-          <a:ln w="12700">
-            <a:solidFill>
-              <a:schemeClr val="tx1"/>
-            </a:solidFill>
-            <a:headEnd type="none" w="med" len="med"/>
-            <a:tailEnd type="triangle" w="med" len="med"/>
-          </a:ln>
-        </p:spPr>
-        <p:style>
-          <a:lnRef idx="1">
-            <a:schemeClr val="accent1"/>
-          </a:lnRef>
-          <a:fillRef idx="0">
-            <a:schemeClr val="accent1"/>
-          </a:fillRef>
-          <a:effectRef idx="0">
-            <a:schemeClr val="accent1"/>
-          </a:effectRef>
-          <a:fontRef idx="minor">
-            <a:schemeClr val="tx1"/>
-          </a:fontRef>
-        </p:style>
-      </p:cxnSp>
-      <p:sp>
-        <p:nvSpPr>
-          <p:cNvPr id="22" name="사각형: 둥근 모서리 114">
-            <a:extLst>
-              <a:ext uri="{FF2B5EF4-FFF2-40B4-BE49-F238E27FC236}">
-                <a16:creationId xmlns:a16="http://schemas.microsoft.com/office/drawing/2014/main" id="{0B79FB11-EB5E-48B2-9B7D-2CF7A5759856}"/>
-              </a:ext>
-            </a:extLst>
-          </p:cNvPr>
-          <p:cNvSpPr/>
-          <p:nvPr/>
-        </p:nvSpPr>
-        <p:spPr>
-          <a:xfrm>
-            <a:off x="3278436" y="4587974"/>
-            <a:ext cx="2731142" cy="433441"/>
-          </a:xfrm>
-          <a:prstGeom prst="roundRect">
-            <a:avLst>
-              <a:gd name="adj" fmla="val 10304"/>
-            </a:avLst>
-          </a:prstGeom>
-          <a:noFill/>
-          <a:ln>
-            <a:noFill/>
-          </a:ln>
-        </p:spPr>
-        <p:style>
-          <a:lnRef idx="2">
-            <a:schemeClr val="dk1"/>
-          </a:lnRef>
-          <a:fillRef idx="1">
-            <a:schemeClr val="lt1"/>
-          </a:fillRef>
-          <a:effectRef idx="0">
-            <a:schemeClr val="dk1"/>
-          </a:effectRef>
-          <a:fontRef idx="minor">
-            <a:schemeClr val="dk1"/>
-          </a:fontRef>
-        </p:style>
-        <p:txBody>
-          <a:bodyPr rtlCol="0" anchor="ctr"/>
-          <a:lstStyle/>
-          <a:p>
-            <a:pPr algn="ctr"/>
-            <a:r>
-              <a:rPr lang="en-US" altLang="ko-KR" sz="1200"/>
-              <a:t>OCI Runtime Spec</a:t>
-            </a:r>
-            <a:endParaRPr lang="en-US" altLang="ko-KR" sz="1200" dirty="0"/>
-          </a:p>
-        </p:txBody>
-      </p:sp>
-    </p:spTree>
-    <p:extLst>
-      <p:ext uri="{BB962C8B-B14F-4D97-AF65-F5344CB8AC3E}">
-        <p14:creationId xmlns:p14="http://schemas.microsoft.com/office/powerpoint/2010/main" val="3265569655"/>
       </p:ext>
     </p:extLst>
   </p:cSld>
